--- a/docs/theme-preview/pptx/minimalism.pptx
+++ b/docs/theme-preview/pptx/minimalism.pptx
@@ -10273,7 +10273,7 @@
                 <a:ea typeface="Pretendard" pitchFamily="34" charset="-122"/>
                 <a:cs typeface="Pretendard" pitchFamily="34" charset="-120"/>
               </a:rPr>
-              <a:t>Markdown Semantics</a:t>
+              <a:t>Semantic Blocks</a:t>
             </a:r>
             <a:endParaRPr lang="en-US" sz="2200" dirty="0"/>
           </a:p>
@@ -13230,7 +13230,7 @@
                 <a:ea typeface="Pretendard" pitchFamily="34" charset="-122"/>
                 <a:cs typeface="Pretendard" pitchFamily="34" charset="-120"/>
               </a:rPr>
-              <a:t>Markdown Semantics</a:t>
+              <a:t>Semantic Blocks</a:t>
             </a:r>
             <a:endParaRPr lang="en-US" sz="3400" dirty="0"/>
           </a:p>

--- a/docs/theme-preview/pptx/minimalism.pptx
+++ b/docs/theme-preview/pptx/minimalism.pptx
@@ -125,7 +125,7 @@
 </p:presentation>
 </file>
 
-<file path=ppt/charts/chart7.xml><?xml version="1.0" encoding="utf-8"?>
+<file path=ppt/charts/chart5.xml><?xml version="1.0" encoding="utf-8"?>
 <c:chartSpace xmlns:c="http://schemas.openxmlformats.org/drawingml/2006/chart" xmlns:a="http://schemas.openxmlformats.org/drawingml/2006/main" xmlns:r="http://schemas.openxmlformats.org/officeDocument/2006/relationships">
   <c:date1904 val="0"/>
   <c:roundedCorners val="1"/>
@@ -9407,8 +9407,37 @@
         </p:nvSpPr>
         <p:spPr>
           <a:xfrm>
-            <a:off x="914400" y="1417320"/>
-            <a:ext cx="73152" cy="868680"/>
+            <a:off x="786384" y="1956816"/>
+            <a:ext cx="32004" cy="3483864"/>
+          </a:xfrm>
+          <a:prstGeom prst="rect">
+            <a:avLst/>
+          </a:prstGeom>
+          <a:solidFill>
+            <a:srgbClr val="E5E7EB">
+              <a:alpha val="80000"/>
+            </a:srgbClr>
+          </a:solidFill>
+          <a:ln w="12700">
+            <a:solidFill>
+              <a:srgbClr val="E5E7EB">
+                <a:alpha val="0"/>
+              </a:srgbClr>
+            </a:solidFill>
+            <a:prstDash val="solid"/>
+          </a:ln>
+        </p:spPr>
+      </p:sp>
+      <p:sp>
+        <p:nvSpPr>
+          <p:cNvPr id="5" name="Shape 3"/>
+          <p:cNvSpPr/>
+          <p:nvPr/>
+        </p:nvSpPr>
+        <p:spPr>
+          <a:xfrm>
+            <a:off x="914400" y="1865376"/>
+            <a:ext cx="73152" cy="1024128"/>
           </a:xfrm>
           <a:prstGeom prst="rect">
             <a:avLst/>
@@ -9428,14 +9457,14 @@
       </p:sp>
       <p:sp>
         <p:nvSpPr>
-          <p:cNvPr id="5" name="Shape 3"/>
+          <p:cNvPr id="6" name="Shape 4"/>
           <p:cNvSpPr/>
           <p:nvPr/>
         </p:nvSpPr>
         <p:spPr>
           <a:xfrm>
-            <a:off x="914400" y="2560320"/>
-            <a:ext cx="73152" cy="868680"/>
+            <a:off x="914400" y="3191256"/>
+            <a:ext cx="73152" cy="1024128"/>
           </a:xfrm>
           <a:prstGeom prst="rect">
             <a:avLst/>
@@ -9455,14 +9484,14 @@
       </p:sp>
       <p:sp>
         <p:nvSpPr>
-          <p:cNvPr id="6" name="Shape 4"/>
+          <p:cNvPr id="7" name="Shape 5"/>
           <p:cNvSpPr/>
           <p:nvPr/>
         </p:nvSpPr>
         <p:spPr>
           <a:xfrm>
-            <a:off x="914400" y="3703320"/>
-            <a:ext cx="73152" cy="868680"/>
+            <a:off x="914400" y="4507992"/>
+            <a:ext cx="73152" cy="1024128"/>
           </a:xfrm>
           <a:prstGeom prst="rect">
             <a:avLst/>
@@ -9482,7 +9511,7 @@
       </p:sp>
       <p:pic>
         <p:nvPicPr>
-          <p:cNvPr id="7" name="Image 0" descr="preencoded.png">    </p:cNvPr>
+          <p:cNvPr id="8" name="Image 0" descr="preencoded.png">    </p:cNvPr>
           <p:cNvPicPr>
             <a:picLocks noChangeAspect="1"/>
           </p:cNvPicPr>
@@ -9502,8 +9531,8 @@
         </p:blipFill>
         <p:spPr>
           <a:xfrm>
-            <a:off x="914400" y="1417320"/>
-            <a:ext cx="10241280" cy="868680"/>
+            <a:off x="914400" y="1865376"/>
+            <a:ext cx="10241280" cy="1024128"/>
           </a:xfrm>
           <a:prstGeom prst="rect">
             <a:avLst/>
@@ -9512,7 +9541,7 @@
       </p:pic>
       <p:pic>
         <p:nvPicPr>
-          <p:cNvPr id="8" name="Image 1" descr="preencoded.png">    </p:cNvPr>
+          <p:cNvPr id="9" name="Image 1" descr="preencoded.png">    </p:cNvPr>
           <p:cNvPicPr>
             <a:picLocks noChangeAspect="1"/>
           </p:cNvPicPr>
@@ -9532,8 +9561,8 @@
         </p:blipFill>
         <p:spPr>
           <a:xfrm>
-            <a:off x="914400" y="2560320"/>
-            <a:ext cx="10241280" cy="868680"/>
+            <a:off x="914400" y="3191256"/>
+            <a:ext cx="10241280" cy="1024128"/>
           </a:xfrm>
           <a:prstGeom prst="rect">
             <a:avLst/>
@@ -9542,7 +9571,7 @@
       </p:pic>
       <p:pic>
         <p:nvPicPr>
-          <p:cNvPr id="9" name="Image 2" descr="preencoded.png">    </p:cNvPr>
+          <p:cNvPr id="10" name="Image 2" descr="preencoded.png">    </p:cNvPr>
           <p:cNvPicPr>
             <a:picLocks noChangeAspect="1"/>
           </p:cNvPicPr>
@@ -9562,8 +9591,8 @@
         </p:blipFill>
         <p:spPr>
           <a:xfrm>
-            <a:off x="914400" y="3703320"/>
-            <a:ext cx="10241280" cy="868680"/>
+            <a:off x="914400" y="4507992"/>
+            <a:ext cx="10241280" cy="1024128"/>
           </a:xfrm>
           <a:prstGeom prst="rect">
             <a:avLst/>
@@ -9572,7 +9601,7 @@
       </p:pic>
       <p:sp>
         <p:nvSpPr>
-          <p:cNvPr id="10" name="Text 5"/>
+          <p:cNvPr id="11" name="Text 6"/>
           <p:cNvSpPr txBox="1"/>
           <p:nvPr/>
         </p:nvSpPr>
@@ -9614,18 +9643,18 @@
       </p:sp>
       <p:sp>
         <p:nvSpPr>
-          <p:cNvPr id="11" name="Shape 6"/>
+          <p:cNvPr id="12" name="Shape 7"/>
           <p:cNvSpPr/>
           <p:nvPr/>
         </p:nvSpPr>
         <p:spPr>
           <a:xfrm>
-            <a:off x="1097280" y="1623060"/>
-            <a:ext cx="457200" cy="457200"/>
+            <a:off x="1097280" y="2140428"/>
+            <a:ext cx="474025" cy="474025"/>
           </a:xfrm>
           <a:prstGeom prst="roundRect">
             <a:avLst>
-              <a:gd name="adj" fmla="val 8000"/>
+              <a:gd name="adj" fmla="val 7716"/>
             </a:avLst>
           </a:prstGeom>
           <a:solidFill>
@@ -9641,7 +9670,7 @@
       </p:sp>
       <p:pic>
         <p:nvPicPr>
-          <p:cNvPr id="12" name="Image 3" descr="flow icon from tabler-icons (MIT)">    </p:cNvPr>
+          <p:cNvPr id="13" name="Image 3" descr="flow icon from tabler-icons (MIT)">    </p:cNvPr>
           <p:cNvPicPr>
             <a:picLocks noChangeAspect="1"/>
           </p:cNvPicPr>
@@ -9661,8 +9690,8 @@
         </p:blipFill>
         <p:spPr>
           <a:xfrm>
-            <a:off x="1170432" y="1696212"/>
-            <a:ext cx="310896" cy="310896"/>
+            <a:off x="1170432" y="2213580"/>
+            <a:ext cx="327721" cy="327721"/>
           </a:xfrm>
           <a:prstGeom prst="rect">
             <a:avLst/>
@@ -9671,14 +9700,14 @@
       </p:pic>
       <p:sp>
         <p:nvSpPr>
-          <p:cNvPr id="13" name="Text 7"/>
+          <p:cNvPr id="14" name="Text 8"/>
           <p:cNvSpPr txBox="1"/>
           <p:nvPr/>
         </p:nvSpPr>
         <p:spPr>
           <a:xfrm>
-            <a:off x="1682496" y="1508760"/>
-            <a:ext cx="9272016" cy="685800"/>
+            <a:off x="1699321" y="1957548"/>
+            <a:ext cx="9255191" cy="839785"/>
           </a:xfrm>
           <a:prstGeom prst="rect">
             <a:avLst/>
@@ -9730,18 +9759,18 @@
       </p:sp>
       <p:sp>
         <p:nvSpPr>
-          <p:cNvPr id="14" name="Shape 8"/>
+          <p:cNvPr id="15" name="Shape 9"/>
           <p:cNvSpPr/>
           <p:nvPr/>
         </p:nvSpPr>
         <p:spPr>
           <a:xfrm>
-            <a:off x="1097280" y="2766060"/>
-            <a:ext cx="457200" cy="457200"/>
+            <a:off x="1097280" y="3466308"/>
+            <a:ext cx="474025" cy="474025"/>
           </a:xfrm>
           <a:prstGeom prst="roundRect">
             <a:avLst>
-              <a:gd name="adj" fmla="val 8000"/>
+              <a:gd name="adj" fmla="val 7716"/>
             </a:avLst>
           </a:prstGeom>
           <a:solidFill>
@@ -9757,7 +9786,7 @@
       </p:sp>
       <p:pic>
         <p:nvPicPr>
-          <p:cNvPr id="15" name="Image 4" descr="verified icon from tabler-icons (MIT)">    </p:cNvPr>
+          <p:cNvPr id="16" name="Image 4" descr="verified icon from tabler-icons (MIT)">    </p:cNvPr>
           <p:cNvPicPr>
             <a:picLocks noChangeAspect="1"/>
           </p:cNvPicPr>
@@ -9777,8 +9806,8 @@
         </p:blipFill>
         <p:spPr>
           <a:xfrm>
-            <a:off x="1170432" y="2839212"/>
-            <a:ext cx="310896" cy="310896"/>
+            <a:off x="1170432" y="3539460"/>
+            <a:ext cx="327721" cy="327721"/>
           </a:xfrm>
           <a:prstGeom prst="rect">
             <a:avLst/>
@@ -9787,14 +9816,14 @@
       </p:pic>
       <p:sp>
         <p:nvSpPr>
-          <p:cNvPr id="16" name="Text 9"/>
+          <p:cNvPr id="17" name="Text 10"/>
           <p:cNvSpPr txBox="1"/>
           <p:nvPr/>
         </p:nvSpPr>
         <p:spPr>
           <a:xfrm>
-            <a:off x="1682496" y="2651760"/>
-            <a:ext cx="9272016" cy="685800"/>
+            <a:off x="1699321" y="3283428"/>
+            <a:ext cx="9255191" cy="839785"/>
           </a:xfrm>
           <a:prstGeom prst="rect">
             <a:avLst/>
@@ -9846,18 +9875,18 @@
       </p:sp>
       <p:sp>
         <p:nvSpPr>
-          <p:cNvPr id="17" name="Shape 10"/>
+          <p:cNvPr id="18" name="Shape 11"/>
           <p:cNvSpPr/>
           <p:nvPr/>
         </p:nvSpPr>
         <p:spPr>
           <a:xfrm>
-            <a:off x="1097280" y="3909060"/>
-            <a:ext cx="457200" cy="457200"/>
+            <a:off x="1097280" y="4783044"/>
+            <a:ext cx="474025" cy="474025"/>
           </a:xfrm>
           <a:prstGeom prst="roundRect">
             <a:avLst>
-              <a:gd name="adj" fmla="val 8000"/>
+              <a:gd name="adj" fmla="val 7716"/>
             </a:avLst>
           </a:prstGeom>
           <a:solidFill>
@@ -9873,7 +9902,7 @@
       </p:sp>
       <p:pic>
         <p:nvPicPr>
-          <p:cNvPr id="18" name="Image 5" descr="spark icon from tabler-icons (MIT)">    </p:cNvPr>
+          <p:cNvPr id="19" name="Image 5" descr="spark icon from tabler-icons (MIT)">    </p:cNvPr>
           <p:cNvPicPr>
             <a:picLocks noChangeAspect="1"/>
           </p:cNvPicPr>
@@ -9893,8 +9922,8 @@
         </p:blipFill>
         <p:spPr>
           <a:xfrm>
-            <a:off x="1170432" y="3982212"/>
-            <a:ext cx="310896" cy="310896"/>
+            <a:off x="1170432" y="4856196"/>
+            <a:ext cx="327721" cy="327721"/>
           </a:xfrm>
           <a:prstGeom prst="rect">
             <a:avLst/>
@@ -9903,14 +9932,14 @@
       </p:pic>
       <p:sp>
         <p:nvSpPr>
-          <p:cNvPr id="19" name="Text 11"/>
+          <p:cNvPr id="20" name="Text 12"/>
           <p:cNvSpPr txBox="1"/>
           <p:nvPr/>
         </p:nvSpPr>
         <p:spPr>
           <a:xfrm>
-            <a:off x="1682496" y="3794760"/>
-            <a:ext cx="9272016" cy="685800"/>
+            <a:off x="1699321" y="4600164"/>
+            <a:ext cx="9255191" cy="839785"/>
           </a:xfrm>
           <a:prstGeom prst="rect">
             <a:avLst/>
@@ -10050,8 +10079,8 @@
         </p:nvSpPr>
         <p:spPr>
           <a:xfrm>
-            <a:off x="914400" y="1463040"/>
-            <a:ext cx="10241280" cy="73152"/>
+            <a:off x="822960" y="1188720"/>
+            <a:ext cx="10515600" cy="45720"/>
           </a:xfrm>
           <a:prstGeom prst="rect">
             <a:avLst/>
@@ -10071,7 +10100,387 @@
       </p:sp>
       <p:sp>
         <p:nvSpPr>
-          <p:cNvPr id="5" name="Text 3"/>
+          <p:cNvPr id="5" name="Shape 3"/>
+          <p:cNvSpPr/>
+          <p:nvPr/>
+        </p:nvSpPr>
+        <p:spPr>
+          <a:xfrm>
+            <a:off x="822960" y="6199632"/>
+            <a:ext cx="2011680" cy="45720"/>
+          </a:xfrm>
+          <a:prstGeom prst="rect">
+            <a:avLst/>
+          </a:prstGeom>
+          <a:solidFill>
+            <a:srgbClr val="E5E7EB"/>
+          </a:solidFill>
+          <a:ln w="12700">
+            <a:solidFill>
+              <a:srgbClr val="E5E7EB">
+                <a:alpha val="0"/>
+              </a:srgbClr>
+            </a:solidFill>
+            <a:prstDash val="solid"/>
+          </a:ln>
+        </p:spPr>
+      </p:sp>
+      <p:sp>
+        <p:nvSpPr>
+          <p:cNvPr id="6" name="Shape 4"/>
+          <p:cNvSpPr/>
+          <p:nvPr/>
+        </p:nvSpPr>
+        <p:spPr>
+          <a:xfrm>
+            <a:off x="6080760" y="1389888"/>
+            <a:ext cx="22860" cy="4663440"/>
+          </a:xfrm>
+          <a:prstGeom prst="rect">
+            <a:avLst/>
+          </a:prstGeom>
+          <a:solidFill>
+            <a:srgbClr val="E5E7EB">
+              <a:alpha val="90000"/>
+            </a:srgbClr>
+          </a:solidFill>
+          <a:ln w="12700">
+            <a:solidFill>
+              <a:srgbClr val="E5E7EB">
+                <a:alpha val="0"/>
+              </a:srgbClr>
+            </a:solidFill>
+            <a:prstDash val="solid"/>
+          </a:ln>
+        </p:spPr>
+      </p:sp>
+      <p:sp>
+        <p:nvSpPr>
+          <p:cNvPr id="7" name="Shape 5"/>
+          <p:cNvSpPr/>
+          <p:nvPr/>
+        </p:nvSpPr>
+        <p:spPr>
+          <a:xfrm>
+            <a:off x="822960" y="1389888"/>
+            <a:ext cx="73152" cy="658368"/>
+          </a:xfrm>
+          <a:prstGeom prst="rect">
+            <a:avLst/>
+          </a:prstGeom>
+          <a:solidFill>
+            <a:srgbClr val="111827"/>
+          </a:solidFill>
+          <a:ln w="12700">
+            <a:solidFill>
+              <a:srgbClr val="111827">
+                <a:alpha val="0"/>
+              </a:srgbClr>
+            </a:solidFill>
+            <a:prstDash val="solid"/>
+          </a:ln>
+        </p:spPr>
+      </p:sp>
+      <p:sp>
+        <p:nvSpPr>
+          <p:cNvPr id="8" name="Shape 6"/>
+          <p:cNvSpPr/>
+          <p:nvPr/>
+        </p:nvSpPr>
+        <p:spPr>
+          <a:xfrm>
+            <a:off x="822960" y="2194560"/>
+            <a:ext cx="73152" cy="658368"/>
+          </a:xfrm>
+          <a:prstGeom prst="rect">
+            <a:avLst/>
+          </a:prstGeom>
+          <a:solidFill>
+            <a:srgbClr val="E5E7EB"/>
+          </a:solidFill>
+          <a:ln w="12700">
+            <a:solidFill>
+              <a:srgbClr val="E5E7EB">
+                <a:alpha val="0"/>
+              </a:srgbClr>
+            </a:solidFill>
+            <a:prstDash val="solid"/>
+          </a:ln>
+        </p:spPr>
+      </p:sp>
+      <p:sp>
+        <p:nvSpPr>
+          <p:cNvPr id="9" name="Shape 7"/>
+          <p:cNvSpPr/>
+          <p:nvPr/>
+        </p:nvSpPr>
+        <p:spPr>
+          <a:xfrm>
+            <a:off x="822960" y="2990088"/>
+            <a:ext cx="73152" cy="658368"/>
+          </a:xfrm>
+          <a:prstGeom prst="rect">
+            <a:avLst/>
+          </a:prstGeom>
+          <a:solidFill>
+            <a:srgbClr val="111827"/>
+          </a:solidFill>
+          <a:ln w="12700">
+            <a:solidFill>
+              <a:srgbClr val="111827">
+                <a:alpha val="0"/>
+              </a:srgbClr>
+            </a:solidFill>
+            <a:prstDash val="solid"/>
+          </a:ln>
+        </p:spPr>
+      </p:sp>
+      <p:sp>
+        <p:nvSpPr>
+          <p:cNvPr id="10" name="Shape 8"/>
+          <p:cNvSpPr/>
+          <p:nvPr/>
+        </p:nvSpPr>
+        <p:spPr>
+          <a:xfrm>
+            <a:off x="822960" y="3794760"/>
+            <a:ext cx="73152" cy="658368"/>
+          </a:xfrm>
+          <a:prstGeom prst="rect">
+            <a:avLst/>
+          </a:prstGeom>
+          <a:solidFill>
+            <a:srgbClr val="E5E7EB"/>
+          </a:solidFill>
+          <a:ln w="12700">
+            <a:solidFill>
+              <a:srgbClr val="E5E7EB">
+                <a:alpha val="0"/>
+              </a:srgbClr>
+            </a:solidFill>
+            <a:prstDash val="solid"/>
+          </a:ln>
+        </p:spPr>
+      </p:sp>
+      <p:sp>
+        <p:nvSpPr>
+          <p:cNvPr id="11" name="Shape 9"/>
+          <p:cNvSpPr/>
+          <p:nvPr/>
+        </p:nvSpPr>
+        <p:spPr>
+          <a:xfrm>
+            <a:off x="822960" y="4599432"/>
+            <a:ext cx="73152" cy="658368"/>
+          </a:xfrm>
+          <a:prstGeom prst="rect">
+            <a:avLst/>
+          </a:prstGeom>
+          <a:solidFill>
+            <a:srgbClr val="111827"/>
+          </a:solidFill>
+          <a:ln w="12700">
+            <a:solidFill>
+              <a:srgbClr val="111827">
+                <a:alpha val="0"/>
+              </a:srgbClr>
+            </a:solidFill>
+            <a:prstDash val="solid"/>
+          </a:ln>
+        </p:spPr>
+      </p:sp>
+      <p:sp>
+        <p:nvSpPr>
+          <p:cNvPr id="12" name="Shape 10"/>
+          <p:cNvSpPr/>
+          <p:nvPr/>
+        </p:nvSpPr>
+        <p:spPr>
+          <a:xfrm>
+            <a:off x="822960" y="5394960"/>
+            <a:ext cx="73152" cy="658368"/>
+          </a:xfrm>
+          <a:prstGeom prst="rect">
+            <a:avLst/>
+          </a:prstGeom>
+          <a:solidFill>
+            <a:srgbClr val="E5E7EB"/>
+          </a:solidFill>
+          <a:ln w="12700">
+            <a:solidFill>
+              <a:srgbClr val="E5E7EB">
+                <a:alpha val="0"/>
+              </a:srgbClr>
+            </a:solidFill>
+            <a:prstDash val="solid"/>
+          </a:ln>
+        </p:spPr>
+      </p:sp>
+      <p:sp>
+        <p:nvSpPr>
+          <p:cNvPr id="13" name="Shape 11"/>
+          <p:cNvSpPr/>
+          <p:nvPr/>
+        </p:nvSpPr>
+        <p:spPr>
+          <a:xfrm>
+            <a:off x="6272784" y="1389888"/>
+            <a:ext cx="73152" cy="658368"/>
+          </a:xfrm>
+          <a:prstGeom prst="rect">
+            <a:avLst/>
+          </a:prstGeom>
+          <a:solidFill>
+            <a:srgbClr val="111827"/>
+          </a:solidFill>
+          <a:ln w="12700">
+            <a:solidFill>
+              <a:srgbClr val="111827">
+                <a:alpha val="0"/>
+              </a:srgbClr>
+            </a:solidFill>
+            <a:prstDash val="solid"/>
+          </a:ln>
+        </p:spPr>
+      </p:sp>
+      <p:sp>
+        <p:nvSpPr>
+          <p:cNvPr id="14" name="Shape 12"/>
+          <p:cNvSpPr/>
+          <p:nvPr/>
+        </p:nvSpPr>
+        <p:spPr>
+          <a:xfrm>
+            <a:off x="6272784" y="2194560"/>
+            <a:ext cx="73152" cy="658368"/>
+          </a:xfrm>
+          <a:prstGeom prst="rect">
+            <a:avLst/>
+          </a:prstGeom>
+          <a:solidFill>
+            <a:srgbClr val="E5E7EB"/>
+          </a:solidFill>
+          <a:ln w="12700">
+            <a:solidFill>
+              <a:srgbClr val="E5E7EB">
+                <a:alpha val="0"/>
+              </a:srgbClr>
+            </a:solidFill>
+            <a:prstDash val="solid"/>
+          </a:ln>
+        </p:spPr>
+      </p:sp>
+      <p:sp>
+        <p:nvSpPr>
+          <p:cNvPr id="15" name="Shape 13"/>
+          <p:cNvSpPr/>
+          <p:nvPr/>
+        </p:nvSpPr>
+        <p:spPr>
+          <a:xfrm>
+            <a:off x="6272784" y="2990088"/>
+            <a:ext cx="73152" cy="658368"/>
+          </a:xfrm>
+          <a:prstGeom prst="rect">
+            <a:avLst/>
+          </a:prstGeom>
+          <a:solidFill>
+            <a:srgbClr val="111827"/>
+          </a:solidFill>
+          <a:ln w="12700">
+            <a:solidFill>
+              <a:srgbClr val="111827">
+                <a:alpha val="0"/>
+              </a:srgbClr>
+            </a:solidFill>
+            <a:prstDash val="solid"/>
+          </a:ln>
+        </p:spPr>
+      </p:sp>
+      <p:sp>
+        <p:nvSpPr>
+          <p:cNvPr id="16" name="Shape 14"/>
+          <p:cNvSpPr/>
+          <p:nvPr/>
+        </p:nvSpPr>
+        <p:spPr>
+          <a:xfrm>
+            <a:off x="6272784" y="3794760"/>
+            <a:ext cx="73152" cy="658368"/>
+          </a:xfrm>
+          <a:prstGeom prst="rect">
+            <a:avLst/>
+          </a:prstGeom>
+          <a:solidFill>
+            <a:srgbClr val="E5E7EB"/>
+          </a:solidFill>
+          <a:ln w="12700">
+            <a:solidFill>
+              <a:srgbClr val="E5E7EB">
+                <a:alpha val="0"/>
+              </a:srgbClr>
+            </a:solidFill>
+            <a:prstDash val="solid"/>
+          </a:ln>
+        </p:spPr>
+      </p:sp>
+      <p:sp>
+        <p:nvSpPr>
+          <p:cNvPr id="17" name="Shape 15"/>
+          <p:cNvSpPr/>
+          <p:nvPr/>
+        </p:nvSpPr>
+        <p:spPr>
+          <a:xfrm>
+            <a:off x="6272784" y="4599432"/>
+            <a:ext cx="73152" cy="658368"/>
+          </a:xfrm>
+          <a:prstGeom prst="rect">
+            <a:avLst/>
+          </a:prstGeom>
+          <a:solidFill>
+            <a:srgbClr val="111827"/>
+          </a:solidFill>
+          <a:ln w="12700">
+            <a:solidFill>
+              <a:srgbClr val="111827">
+                <a:alpha val="0"/>
+              </a:srgbClr>
+            </a:solidFill>
+            <a:prstDash val="solid"/>
+          </a:ln>
+        </p:spPr>
+      </p:sp>
+      <p:sp>
+        <p:nvSpPr>
+          <p:cNvPr id="18" name="Shape 16"/>
+          <p:cNvSpPr/>
+          <p:nvPr/>
+        </p:nvSpPr>
+        <p:spPr>
+          <a:xfrm>
+            <a:off x="6272784" y="5394960"/>
+            <a:ext cx="73152" cy="658368"/>
+          </a:xfrm>
+          <a:prstGeom prst="rect">
+            <a:avLst/>
+          </a:prstGeom>
+          <a:solidFill>
+            <a:srgbClr val="E5E7EB"/>
+          </a:solidFill>
+          <a:ln w="12700">
+            <a:solidFill>
+              <a:srgbClr val="E5E7EB">
+                <a:alpha val="0"/>
+              </a:srgbClr>
+            </a:solidFill>
+            <a:prstDash val="solid"/>
+          </a:ln>
+        </p:spPr>
+      </p:sp>
+      <p:sp>
+        <p:nvSpPr>
+          <p:cNvPr id="19" name="Text 17"/>
           <p:cNvSpPr txBox="1"/>
           <p:nvPr/>
         </p:nvSpPr>
@@ -10113,14 +10522,14 @@
       </p:sp>
       <p:sp>
         <p:nvSpPr>
-          <p:cNvPr id="6" name="Text 4"/>
+          <p:cNvPr id="20" name="Text 18"/>
           <p:cNvSpPr txBox="1"/>
           <p:nvPr/>
         </p:nvSpPr>
         <p:spPr>
           <a:xfrm>
-            <a:off x="987552" y="1572768"/>
-            <a:ext cx="10094976" cy="355092"/>
+            <a:off x="1042416" y="1481328"/>
+            <a:ext cx="4645152" cy="475488"/>
           </a:xfrm>
           <a:prstGeom prst="rect">
             <a:avLst/>
@@ -10132,14 +10541,14 @@
           <a:bodyPr wrap="square" lIns="0" tIns="25400" rIns="25400" bIns="0" rtlCol="0" anchor="ctr"/>
           <a:lstStyle/>
           <a:p>
-            <a:pPr algn="l" indent="0" marL="0">
+            <a:pPr algn="ctr" indent="0" marL="0">
               <a:lnSpc>
                 <a:spcPct val="120000"/>
               </a:lnSpc>
               <a:buNone/>
             </a:pPr>
             <a:r>
-              <a:rPr lang="en-US" sz="2200" dirty="0">
+              <a:rPr lang="en-US" sz="1800" dirty="0">
                 <a:solidFill>
                   <a:srgbClr val="111827"/>
                 </a:solidFill>
@@ -10147,22 +10556,22 @@
                 <a:ea typeface="Pretendard" pitchFamily="34" charset="-122"/>
                 <a:cs typeface="Pretendard" pitchFamily="34" charset="-120"/>
               </a:rPr>
-              <a:t>Preview Purpose</a:t>
+              <a:t>01  Preview Purpose</a:t>
             </a:r>
-            <a:endParaRPr lang="en-US" sz="2200" dirty="0"/>
+            <a:endParaRPr lang="en-US" sz="1800" dirty="0"/>
           </a:p>
         </p:txBody>
       </p:sp>
       <p:sp>
         <p:nvSpPr>
-          <p:cNvPr id="7" name="Text 5"/>
+          <p:cNvPr id="21" name="Text 19"/>
           <p:cNvSpPr txBox="1"/>
           <p:nvPr/>
         </p:nvSpPr>
         <p:spPr>
           <a:xfrm>
-            <a:off x="987552" y="1927860"/>
-            <a:ext cx="10094976" cy="355092"/>
+            <a:off x="1042416" y="2286000"/>
+            <a:ext cx="4645152" cy="475488"/>
           </a:xfrm>
           <a:prstGeom prst="rect">
             <a:avLst/>
@@ -10174,14 +10583,14 @@
           <a:bodyPr wrap="square" lIns="0" tIns="25400" rIns="25400" bIns="0" rtlCol="0" anchor="ctr"/>
           <a:lstStyle/>
           <a:p>
-            <a:pPr algn="l" indent="0" marL="0">
+            <a:pPr algn="ctr" indent="0" marL="0">
               <a:lnSpc>
                 <a:spcPct val="120000"/>
               </a:lnSpc>
               <a:buNone/>
             </a:pPr>
             <a:r>
-              <a:rPr lang="en-US" sz="2200" dirty="0">
+              <a:rPr lang="en-US" sz="1800" dirty="0">
                 <a:solidFill>
                   <a:srgbClr val="111827"/>
                 </a:solidFill>
@@ -10189,22 +10598,22 @@
                 <a:ea typeface="Pretendard" pitchFamily="34" charset="-122"/>
                 <a:cs typeface="Pretendard" pitchFamily="34" charset="-120"/>
               </a:rPr>
-              <a:t>Composition Contract</a:t>
+              <a:t>02  Composition Contract</a:t>
             </a:r>
-            <a:endParaRPr lang="en-US" sz="2200" dirty="0"/>
+            <a:endParaRPr lang="en-US" sz="1800" dirty="0"/>
           </a:p>
         </p:txBody>
       </p:sp>
       <p:sp>
         <p:nvSpPr>
-          <p:cNvPr id="8" name="Text 6"/>
+          <p:cNvPr id="22" name="Text 20"/>
           <p:cNvSpPr txBox="1"/>
           <p:nvPr/>
         </p:nvSpPr>
         <p:spPr>
           <a:xfrm>
-            <a:off x="987552" y="2282952"/>
-            <a:ext cx="10094976" cy="355092"/>
+            <a:off x="1042416" y="3081528"/>
+            <a:ext cx="4645152" cy="475488"/>
           </a:xfrm>
           <a:prstGeom prst="rect">
             <a:avLst/>
@@ -10216,14 +10625,14 @@
           <a:bodyPr wrap="square" lIns="0" tIns="25400" rIns="25400" bIns="0" rtlCol="0" anchor="ctr"/>
           <a:lstStyle/>
           <a:p>
-            <a:pPr algn="l" indent="0" marL="0">
+            <a:pPr algn="ctr" indent="0" marL="0">
               <a:lnSpc>
                 <a:spcPct val="120000"/>
               </a:lnSpc>
               <a:buNone/>
             </a:pPr>
             <a:r>
-              <a:rPr lang="en-US" sz="2200" dirty="0">
+              <a:rPr lang="en-US" sz="1800" dirty="0">
                 <a:solidFill>
                   <a:srgbClr val="111827"/>
                 </a:solidFill>
@@ -10231,22 +10640,22 @@
                 <a:ea typeface="Pretendard" pitchFamily="34" charset="-122"/>
                 <a:cs typeface="Pretendard" pitchFamily="34" charset="-120"/>
               </a:rPr>
-              <a:t>Style Families</a:t>
+              <a:t>03  Style Families</a:t>
             </a:r>
-            <a:endParaRPr lang="en-US" sz="2200" dirty="0"/>
+            <a:endParaRPr lang="en-US" sz="1800" dirty="0"/>
           </a:p>
         </p:txBody>
       </p:sp>
       <p:sp>
         <p:nvSpPr>
-          <p:cNvPr id="9" name="Text 7"/>
+          <p:cNvPr id="23" name="Text 21"/>
           <p:cNvSpPr txBox="1"/>
           <p:nvPr/>
         </p:nvSpPr>
         <p:spPr>
           <a:xfrm>
-            <a:off x="987552" y="2638044"/>
-            <a:ext cx="10094976" cy="355092"/>
+            <a:off x="1042416" y="3886200"/>
+            <a:ext cx="4645152" cy="475488"/>
           </a:xfrm>
           <a:prstGeom prst="rect">
             <a:avLst/>
@@ -10258,14 +10667,14 @@
           <a:bodyPr wrap="square" lIns="0" tIns="25400" rIns="25400" bIns="0" rtlCol="0" anchor="ctr"/>
           <a:lstStyle/>
           <a:p>
-            <a:pPr algn="l" indent="0" marL="0">
+            <a:pPr algn="ctr" indent="0" marL="0">
               <a:lnSpc>
                 <a:spcPct val="120000"/>
               </a:lnSpc>
               <a:buNone/>
             </a:pPr>
             <a:r>
-              <a:rPr lang="en-US" sz="2200" dirty="0">
+              <a:rPr lang="en-US" sz="1800" dirty="0">
                 <a:solidFill>
                   <a:srgbClr val="111827"/>
                 </a:solidFill>
@@ -10273,22 +10682,22 @@
                 <a:ea typeface="Pretendard" pitchFamily="34" charset="-122"/>
                 <a:cs typeface="Pretendard" pitchFamily="34" charset="-120"/>
               </a:rPr>
-              <a:t>Semantic Blocks</a:t>
+              <a:t>04  Semantic Blocks</a:t>
             </a:r>
-            <a:endParaRPr lang="en-US" sz="2200" dirty="0"/>
+            <a:endParaRPr lang="en-US" sz="1800" dirty="0"/>
           </a:p>
         </p:txBody>
       </p:sp>
       <p:sp>
         <p:nvSpPr>
-          <p:cNvPr id="10" name="Text 8"/>
+          <p:cNvPr id="24" name="Text 22"/>
           <p:cNvSpPr txBox="1"/>
           <p:nvPr/>
         </p:nvSpPr>
         <p:spPr>
           <a:xfrm>
-            <a:off x="987552" y="2993136"/>
-            <a:ext cx="10094976" cy="355092"/>
+            <a:off x="1042416" y="4690872"/>
+            <a:ext cx="4645152" cy="475488"/>
           </a:xfrm>
           <a:prstGeom prst="rect">
             <a:avLst/>
@@ -10300,14 +10709,14 @@
           <a:bodyPr wrap="square" lIns="0" tIns="25400" rIns="25400" bIns="0" rtlCol="0" anchor="ctr"/>
           <a:lstStyle/>
           <a:p>
-            <a:pPr algn="l" indent="0" marL="0">
+            <a:pPr algn="ctr" indent="0" marL="0">
               <a:lnSpc>
                 <a:spcPct val="120000"/>
               </a:lnSpc>
               <a:buNone/>
             </a:pPr>
             <a:r>
-              <a:rPr lang="en-US" sz="2200" dirty="0">
+              <a:rPr lang="en-US" sz="1800" dirty="0">
                 <a:solidFill>
                   <a:srgbClr val="111827"/>
                 </a:solidFill>
@@ -10315,22 +10724,22 @@
                 <a:ea typeface="Pretendard" pitchFamily="34" charset="-122"/>
                 <a:cs typeface="Pretendard" pitchFamily="34" charset="-120"/>
               </a:rPr>
-              <a:t>Pipeline Diagram</a:t>
+              <a:t>05  Pipeline Diagram</a:t>
             </a:r>
-            <a:endParaRPr lang="en-US" sz="2200" dirty="0"/>
+            <a:endParaRPr lang="en-US" sz="1800" dirty="0"/>
           </a:p>
         </p:txBody>
       </p:sp>
       <p:sp>
         <p:nvSpPr>
-          <p:cNvPr id="11" name="Text 9"/>
+          <p:cNvPr id="25" name="Text 23"/>
           <p:cNvSpPr txBox="1"/>
           <p:nvPr/>
         </p:nvSpPr>
         <p:spPr>
           <a:xfrm>
-            <a:off x="987552" y="3348228"/>
-            <a:ext cx="10094976" cy="355092"/>
+            <a:off x="1042416" y="5486400"/>
+            <a:ext cx="4645152" cy="475488"/>
           </a:xfrm>
           <a:prstGeom prst="rect">
             <a:avLst/>
@@ -10342,14 +10751,14 @@
           <a:bodyPr wrap="square" lIns="0" tIns="25400" rIns="25400" bIns="0" rtlCol="0" anchor="ctr"/>
           <a:lstStyle/>
           <a:p>
-            <a:pPr algn="l" indent="0" marL="0">
+            <a:pPr algn="ctr" indent="0" marL="0">
               <a:lnSpc>
                 <a:spcPct val="120000"/>
               </a:lnSpc>
               <a:buNone/>
             </a:pPr>
             <a:r>
-              <a:rPr lang="en-US" sz="2200" dirty="0">
+              <a:rPr lang="en-US" sz="1800" dirty="0">
                 <a:solidFill>
                   <a:srgbClr val="111827"/>
                 </a:solidFill>
@@ -10357,22 +10766,22 @@
                 <a:ea typeface="Pretendard" pitchFamily="34" charset="-122"/>
                 <a:cs typeface="Pretendard" pitchFamily="34" charset="-120"/>
               </a:rPr>
-              <a:t>Table Coherence</a:t>
+              <a:t>06  Table Coherence</a:t>
             </a:r>
-            <a:endParaRPr lang="en-US" sz="2200" dirty="0"/>
+            <a:endParaRPr lang="en-US" sz="1800" dirty="0"/>
           </a:p>
         </p:txBody>
       </p:sp>
       <p:sp>
         <p:nvSpPr>
-          <p:cNvPr id="12" name="Text 10"/>
+          <p:cNvPr id="26" name="Text 24"/>
           <p:cNvSpPr txBox="1"/>
           <p:nvPr/>
         </p:nvSpPr>
         <p:spPr>
           <a:xfrm>
-            <a:off x="987552" y="3703320"/>
-            <a:ext cx="10094976" cy="355092"/>
+            <a:off x="6492240" y="1481328"/>
+            <a:ext cx="4645152" cy="475488"/>
           </a:xfrm>
           <a:prstGeom prst="rect">
             <a:avLst/>
@@ -10384,14 +10793,14 @@
           <a:bodyPr wrap="square" lIns="0" tIns="25400" rIns="25400" bIns="0" rtlCol="0" anchor="ctr"/>
           <a:lstStyle/>
           <a:p>
-            <a:pPr algn="l" indent="0" marL="0">
+            <a:pPr algn="ctr" indent="0" marL="0">
               <a:lnSpc>
                 <a:spcPct val="120000"/>
               </a:lnSpc>
               <a:buNone/>
             </a:pPr>
             <a:r>
-              <a:rPr lang="en-US" sz="2200" dirty="0">
+              <a:rPr lang="en-US" sz="1800" dirty="0">
                 <a:solidFill>
                   <a:srgbClr val="111827"/>
                 </a:solidFill>
@@ -10399,22 +10808,22 @@
                 <a:ea typeface="Pretendard" pitchFamily="34" charset="-122"/>
                 <a:cs typeface="Pretendard" pitchFamily="34" charset="-120"/>
               </a:rPr>
-              <a:t>Chart and Table Pair</a:t>
+              <a:t>07  Chart and Table Pair</a:t>
             </a:r>
-            <a:endParaRPr lang="en-US" sz="2200" dirty="0"/>
+            <a:endParaRPr lang="en-US" sz="1800" dirty="0"/>
           </a:p>
         </p:txBody>
       </p:sp>
       <p:sp>
         <p:nvSpPr>
-          <p:cNvPr id="13" name="Text 11"/>
+          <p:cNvPr id="27" name="Text 25"/>
           <p:cNvSpPr txBox="1"/>
           <p:nvPr/>
         </p:nvSpPr>
         <p:spPr>
           <a:xfrm>
-            <a:off x="987552" y="4058412"/>
-            <a:ext cx="10094976" cy="355092"/>
+            <a:off x="6492240" y="2286000"/>
+            <a:ext cx="4645152" cy="475488"/>
           </a:xfrm>
           <a:prstGeom prst="rect">
             <a:avLst/>
@@ -10426,14 +10835,14 @@
           <a:bodyPr wrap="square" lIns="0" tIns="25400" rIns="25400" bIns="0" rtlCol="0" anchor="ctr"/>
           <a:lstStyle/>
           <a:p>
-            <a:pPr algn="l" indent="0" marL="0">
+            <a:pPr algn="ctr" indent="0" marL="0">
               <a:lnSpc>
                 <a:spcPct val="120000"/>
               </a:lnSpc>
               <a:buNone/>
             </a:pPr>
             <a:r>
-              <a:rPr lang="en-US" sz="2200" dirty="0">
+              <a:rPr lang="en-US" sz="1800" dirty="0">
                 <a:solidFill>
                   <a:srgbClr val="111827"/>
                 </a:solidFill>
@@ -10441,22 +10850,22 @@
                 <a:ea typeface="Pretendard" pitchFamily="34" charset="-122"/>
                 <a:cs typeface="Pretendard" pitchFamily="34" charset="-120"/>
               </a:rPr>
-              <a:t>Editable Proof Objects</a:t>
+              <a:t>08  Editable Proof Objects</a:t>
             </a:r>
-            <a:endParaRPr lang="en-US" sz="2200" dirty="0"/>
+            <a:endParaRPr lang="en-US" sz="1800" dirty="0"/>
           </a:p>
         </p:txBody>
       </p:sp>
       <p:sp>
         <p:nvSpPr>
-          <p:cNvPr id="14" name="Text 12"/>
+          <p:cNvPr id="28" name="Text 26"/>
           <p:cNvSpPr txBox="1"/>
           <p:nvPr/>
         </p:nvSpPr>
         <p:spPr>
           <a:xfrm>
-            <a:off x="987552" y="4413504"/>
-            <a:ext cx="10094976" cy="355092"/>
+            <a:off x="6492240" y="3081528"/>
+            <a:ext cx="4645152" cy="475488"/>
           </a:xfrm>
           <a:prstGeom prst="rect">
             <a:avLst/>
@@ -10468,14 +10877,14 @@
           <a:bodyPr wrap="square" lIns="0" tIns="25400" rIns="25400" bIns="0" rtlCol="0" anchor="ctr"/>
           <a:lstStyle/>
           <a:p>
-            <a:pPr algn="l" indent="0" marL="0">
+            <a:pPr algn="ctr" indent="0" marL="0">
               <a:lnSpc>
                 <a:spcPct val="120000"/>
               </a:lnSpc>
               <a:buNone/>
             </a:pPr>
             <a:r>
-              <a:rPr lang="en-US" sz="2200" dirty="0">
+              <a:rPr lang="en-US" sz="1800" dirty="0">
                 <a:solidFill>
                   <a:srgbClr val="111827"/>
                 </a:solidFill>
@@ -10483,22 +10892,22 @@
                 <a:ea typeface="Pretendard" pitchFamily="34" charset="-122"/>
                 <a:cs typeface="Pretendard" pitchFamily="34" charset="-120"/>
               </a:rPr>
-              <a:t>Object Shape Grammar</a:t>
+              <a:t>09  Object Shape Grammar</a:t>
             </a:r>
-            <a:endParaRPr lang="en-US" sz="2200" dirty="0"/>
+            <a:endParaRPr lang="en-US" sz="1800" dirty="0"/>
           </a:p>
         </p:txBody>
       </p:sp>
       <p:sp>
         <p:nvSpPr>
-          <p:cNvPr id="15" name="Text 13"/>
+          <p:cNvPr id="29" name="Text 27"/>
           <p:cNvSpPr txBox="1"/>
           <p:nvPr/>
         </p:nvSpPr>
         <p:spPr>
           <a:xfrm>
-            <a:off x="987552" y="4768596"/>
-            <a:ext cx="10094976" cy="355092"/>
+            <a:off x="6492240" y="3886200"/>
+            <a:ext cx="4645152" cy="475488"/>
           </a:xfrm>
           <a:prstGeom prst="rect">
             <a:avLst/>
@@ -10510,14 +10919,14 @@
           <a:bodyPr wrap="square" lIns="0" tIns="25400" rIns="25400" bIns="0" rtlCol="0" anchor="ctr"/>
           <a:lstStyle/>
           <a:p>
-            <a:pPr algn="l" indent="0" marL="0">
+            <a:pPr algn="ctr" indent="0" marL="0">
               <a:lnSpc>
                 <a:spcPct val="120000"/>
               </a:lnSpc>
               <a:buNone/>
             </a:pPr>
             <a:r>
-              <a:rPr lang="en-US" sz="2200" dirty="0">
+              <a:rPr lang="en-US" sz="1800" dirty="0">
                 <a:solidFill>
                   <a:srgbClr val="111827"/>
                 </a:solidFill>
@@ -10525,22 +10934,22 @@
                 <a:ea typeface="Pretendard" pitchFamily="34" charset="-122"/>
                 <a:cs typeface="Pretendard" pitchFamily="34" charset="-120"/>
               </a:rPr>
-              <a:t>Icon and Text Aside</a:t>
+              <a:t>10  Icon and Text Aside</a:t>
             </a:r>
-            <a:endParaRPr lang="en-US" sz="2200" dirty="0"/>
+            <a:endParaRPr lang="en-US" sz="1800" dirty="0"/>
           </a:p>
         </p:txBody>
       </p:sp>
       <p:sp>
         <p:nvSpPr>
-          <p:cNvPr id="16" name="Text 14"/>
+          <p:cNvPr id="30" name="Text 28"/>
           <p:cNvSpPr txBox="1"/>
           <p:nvPr/>
         </p:nvSpPr>
         <p:spPr>
           <a:xfrm>
-            <a:off x="987552" y="5123688"/>
-            <a:ext cx="10094976" cy="355092"/>
+            <a:off x="6492240" y="4690872"/>
+            <a:ext cx="4645152" cy="475488"/>
           </a:xfrm>
           <a:prstGeom prst="rect">
             <a:avLst/>
@@ -10552,14 +10961,14 @@
           <a:bodyPr wrap="square" lIns="0" tIns="25400" rIns="25400" bIns="0" rtlCol="0" anchor="ctr"/>
           <a:lstStyle/>
           <a:p>
-            <a:pPr algn="l" indent="0" marL="0">
+            <a:pPr algn="ctr" indent="0" marL="0">
               <a:lnSpc>
                 <a:spcPct val="120000"/>
               </a:lnSpc>
               <a:buNone/>
             </a:pPr>
             <a:r>
-              <a:rPr lang="en-US" sz="2200" dirty="0">
+              <a:rPr lang="en-US" sz="1800" dirty="0">
                 <a:solidFill>
                   <a:srgbClr val="111827"/>
                 </a:solidFill>
@@ -10567,22 +10976,22 @@
                 <a:ea typeface="Pretendard" pitchFamily="34" charset="-122"/>
                 <a:cs typeface="Pretendard" pitchFamily="34" charset="-120"/>
               </a:rPr>
-              <a:t>Overflow Guard</a:t>
+              <a:t>11  Overflow Guard</a:t>
             </a:r>
-            <a:endParaRPr lang="en-US" sz="2200" dirty="0"/>
+            <a:endParaRPr lang="en-US" sz="1800" dirty="0"/>
           </a:p>
         </p:txBody>
       </p:sp>
       <p:sp>
         <p:nvSpPr>
-          <p:cNvPr id="17" name="Text 15"/>
+          <p:cNvPr id="31" name="Text 29"/>
           <p:cNvSpPr txBox="1"/>
           <p:nvPr/>
         </p:nvSpPr>
         <p:spPr>
           <a:xfrm>
-            <a:off x="987552" y="5478780"/>
-            <a:ext cx="10094976" cy="355092"/>
+            <a:off x="6492240" y="5486400"/>
+            <a:ext cx="4645152" cy="475488"/>
           </a:xfrm>
           <a:prstGeom prst="rect">
             <a:avLst/>
@@ -10594,14 +11003,14 @@
           <a:bodyPr wrap="square" lIns="0" tIns="25400" rIns="25400" bIns="0" rtlCol="0" anchor="ctr"/>
           <a:lstStyle/>
           <a:p>
-            <a:pPr algn="l" indent="0" marL="0">
+            <a:pPr algn="ctr" indent="0" marL="0">
               <a:lnSpc>
                 <a:spcPct val="120000"/>
               </a:lnSpc>
               <a:buNone/>
             </a:pPr>
             <a:r>
-              <a:rPr lang="en-US" sz="2200" dirty="0">
+              <a:rPr lang="en-US" sz="1800" dirty="0">
                 <a:solidFill>
                   <a:srgbClr val="111827"/>
                 </a:solidFill>
@@ -10609,9 +11018,9 @@
                 <a:ea typeface="Pretendard" pitchFamily="34" charset="-122"/>
                 <a:cs typeface="Pretendard" pitchFamily="34" charset="-120"/>
               </a:rPr>
-              <a:t>Actions Output Review</a:t>
+              <a:t>12  Actions Output Review</a:t>
             </a:r>
-            <a:endParaRPr lang="en-US" sz="2200" dirty="0"/>
+            <a:endParaRPr lang="en-US" sz="1800" dirty="0"/>
           </a:p>
         </p:txBody>
       </p:sp>
@@ -11096,8 +11505,37 @@
         </p:nvSpPr>
         <p:spPr>
           <a:xfrm>
-            <a:off x="914400" y="1417320"/>
-            <a:ext cx="73152" cy="868680"/>
+            <a:off x="786384" y="1956816"/>
+            <a:ext cx="32004" cy="3483864"/>
+          </a:xfrm>
+          <a:prstGeom prst="rect">
+            <a:avLst/>
+          </a:prstGeom>
+          <a:solidFill>
+            <a:srgbClr val="E5E7EB">
+              <a:alpha val="80000"/>
+            </a:srgbClr>
+          </a:solidFill>
+          <a:ln w="12700">
+            <a:solidFill>
+              <a:srgbClr val="E5E7EB">
+                <a:alpha val="0"/>
+              </a:srgbClr>
+            </a:solidFill>
+            <a:prstDash val="solid"/>
+          </a:ln>
+        </p:spPr>
+      </p:sp>
+      <p:sp>
+        <p:nvSpPr>
+          <p:cNvPr id="5" name="Shape 3"/>
+          <p:cNvSpPr/>
+          <p:nvPr/>
+        </p:nvSpPr>
+        <p:spPr>
+          <a:xfrm>
+            <a:off x="914400" y="1865376"/>
+            <a:ext cx="73152" cy="1024128"/>
           </a:xfrm>
           <a:prstGeom prst="rect">
             <a:avLst/>
@@ -11117,14 +11555,14 @@
       </p:sp>
       <p:sp>
         <p:nvSpPr>
-          <p:cNvPr id="5" name="Shape 3"/>
+          <p:cNvPr id="6" name="Shape 4"/>
           <p:cNvSpPr/>
           <p:nvPr/>
         </p:nvSpPr>
         <p:spPr>
           <a:xfrm>
-            <a:off x="914400" y="2560320"/>
-            <a:ext cx="73152" cy="868680"/>
+            <a:off x="914400" y="3191256"/>
+            <a:ext cx="73152" cy="1024128"/>
           </a:xfrm>
           <a:prstGeom prst="rect">
             <a:avLst/>
@@ -11144,14 +11582,14 @@
       </p:sp>
       <p:sp>
         <p:nvSpPr>
-          <p:cNvPr id="6" name="Shape 4"/>
+          <p:cNvPr id="7" name="Shape 5"/>
           <p:cNvSpPr/>
           <p:nvPr/>
         </p:nvSpPr>
         <p:spPr>
           <a:xfrm>
-            <a:off x="914400" y="3703320"/>
-            <a:ext cx="73152" cy="868680"/>
+            <a:off x="914400" y="4507992"/>
+            <a:ext cx="73152" cy="1024128"/>
           </a:xfrm>
           <a:prstGeom prst="rect">
             <a:avLst/>
@@ -11171,7 +11609,7 @@
       </p:sp>
       <p:pic>
         <p:nvPicPr>
-          <p:cNvPr id="7" name="Image 0" descr="preencoded.png">    </p:cNvPr>
+          <p:cNvPr id="8" name="Image 0" descr="preencoded.png">    </p:cNvPr>
           <p:cNvPicPr>
             <a:picLocks noChangeAspect="1"/>
           </p:cNvPicPr>
@@ -11191,8 +11629,8 @@
         </p:blipFill>
         <p:spPr>
           <a:xfrm>
-            <a:off x="914400" y="1417320"/>
-            <a:ext cx="10241280" cy="868680"/>
+            <a:off x="914400" y="1865376"/>
+            <a:ext cx="10241280" cy="1024128"/>
           </a:xfrm>
           <a:prstGeom prst="rect">
             <a:avLst/>
@@ -11201,7 +11639,7 @@
       </p:pic>
       <p:pic>
         <p:nvPicPr>
-          <p:cNvPr id="8" name="Image 1" descr="preencoded.png">    </p:cNvPr>
+          <p:cNvPr id="9" name="Image 1" descr="preencoded.png">    </p:cNvPr>
           <p:cNvPicPr>
             <a:picLocks noChangeAspect="1"/>
           </p:cNvPicPr>
@@ -11221,8 +11659,8 @@
         </p:blipFill>
         <p:spPr>
           <a:xfrm>
-            <a:off x="914400" y="2560320"/>
-            <a:ext cx="10241280" cy="868680"/>
+            <a:off x="914400" y="3191256"/>
+            <a:ext cx="10241280" cy="1024128"/>
           </a:xfrm>
           <a:prstGeom prst="rect">
             <a:avLst/>
@@ -11231,7 +11669,7 @@
       </p:pic>
       <p:pic>
         <p:nvPicPr>
-          <p:cNvPr id="9" name="Image 2" descr="preencoded.png">    </p:cNvPr>
+          <p:cNvPr id="10" name="Image 2" descr="preencoded.png">    </p:cNvPr>
           <p:cNvPicPr>
             <a:picLocks noChangeAspect="1"/>
           </p:cNvPicPr>
@@ -11251,8 +11689,8 @@
         </p:blipFill>
         <p:spPr>
           <a:xfrm>
-            <a:off x="914400" y="3703320"/>
-            <a:ext cx="10241280" cy="868680"/>
+            <a:off x="914400" y="4507992"/>
+            <a:ext cx="10241280" cy="1024128"/>
           </a:xfrm>
           <a:prstGeom prst="rect">
             <a:avLst/>
@@ -11261,7 +11699,7 @@
       </p:pic>
       <p:sp>
         <p:nvSpPr>
-          <p:cNvPr id="10" name="Text 5"/>
+          <p:cNvPr id="11" name="Text 6"/>
           <p:cNvSpPr txBox="1"/>
           <p:nvPr/>
         </p:nvSpPr>
@@ -11303,18 +11741,18 @@
       </p:sp>
       <p:sp>
         <p:nvSpPr>
-          <p:cNvPr id="11" name="Shape 6"/>
+          <p:cNvPr id="12" name="Shape 7"/>
           <p:cNvSpPr/>
           <p:nvPr/>
         </p:nvSpPr>
         <p:spPr>
           <a:xfrm>
-            <a:off x="1097280" y="1623060"/>
-            <a:ext cx="457200" cy="457200"/>
+            <a:off x="1097280" y="2140428"/>
+            <a:ext cx="474025" cy="474025"/>
           </a:xfrm>
           <a:prstGeom prst="roundRect">
             <a:avLst>
-              <a:gd name="adj" fmla="val 8000"/>
+              <a:gd name="adj" fmla="val 7716"/>
             </a:avLst>
           </a:prstGeom>
           <a:solidFill>
@@ -11330,7 +11768,7 @@
       </p:sp>
       <p:pic>
         <p:nvPicPr>
-          <p:cNvPr id="12" name="Image 3" descr="flow icon from tabler-icons (MIT)">    </p:cNvPr>
+          <p:cNvPr id="13" name="Image 3" descr="flow icon from tabler-icons (MIT)">    </p:cNvPr>
           <p:cNvPicPr>
             <a:picLocks noChangeAspect="1"/>
           </p:cNvPicPr>
@@ -11350,8 +11788,8 @@
         </p:blipFill>
         <p:spPr>
           <a:xfrm>
-            <a:off x="1170432" y="1696212"/>
-            <a:ext cx="310896" cy="310896"/>
+            <a:off x="1170432" y="2213580"/>
+            <a:ext cx="327721" cy="327721"/>
           </a:xfrm>
           <a:prstGeom prst="rect">
             <a:avLst/>
@@ -11360,14 +11798,14 @@
       </p:pic>
       <p:sp>
         <p:nvSpPr>
-          <p:cNvPr id="13" name="Text 7"/>
+          <p:cNvPr id="14" name="Text 8"/>
           <p:cNvSpPr txBox="1"/>
           <p:nvPr/>
         </p:nvSpPr>
         <p:spPr>
           <a:xfrm>
-            <a:off x="1682496" y="1508760"/>
-            <a:ext cx="9272016" cy="685800"/>
+            <a:off x="1699321" y="1957548"/>
+            <a:ext cx="9255191" cy="839785"/>
           </a:xfrm>
           <a:prstGeom prst="rect">
             <a:avLst/>
@@ -11419,18 +11857,18 @@
       </p:sp>
       <p:sp>
         <p:nvSpPr>
-          <p:cNvPr id="14" name="Shape 8"/>
+          <p:cNvPr id="15" name="Shape 9"/>
           <p:cNvSpPr/>
           <p:nvPr/>
         </p:nvSpPr>
         <p:spPr>
           <a:xfrm>
-            <a:off x="1097280" y="2766060"/>
-            <a:ext cx="457200" cy="457200"/>
+            <a:off x="1097280" y="3466308"/>
+            <a:ext cx="474025" cy="474025"/>
           </a:xfrm>
           <a:prstGeom prst="roundRect">
             <a:avLst>
-              <a:gd name="adj" fmla="val 8000"/>
+              <a:gd name="adj" fmla="val 7716"/>
             </a:avLst>
           </a:prstGeom>
           <a:solidFill>
@@ -11446,7 +11884,7 @@
       </p:sp>
       <p:pic>
         <p:nvPicPr>
-          <p:cNvPr id="15" name="Image 4" descr="verified icon from tabler-icons (MIT)">    </p:cNvPr>
+          <p:cNvPr id="16" name="Image 4" descr="verified icon from tabler-icons (MIT)">    </p:cNvPr>
           <p:cNvPicPr>
             <a:picLocks noChangeAspect="1"/>
           </p:cNvPicPr>
@@ -11466,8 +11904,8 @@
         </p:blipFill>
         <p:spPr>
           <a:xfrm>
-            <a:off x="1170432" y="2839212"/>
-            <a:ext cx="310896" cy="310896"/>
+            <a:off x="1170432" y="3539460"/>
+            <a:ext cx="327721" cy="327721"/>
           </a:xfrm>
           <a:prstGeom prst="rect">
             <a:avLst/>
@@ -11476,14 +11914,14 @@
       </p:pic>
       <p:sp>
         <p:nvSpPr>
-          <p:cNvPr id="16" name="Text 9"/>
+          <p:cNvPr id="17" name="Text 10"/>
           <p:cNvSpPr txBox="1"/>
           <p:nvPr/>
         </p:nvSpPr>
         <p:spPr>
           <a:xfrm>
-            <a:off x="1682496" y="2651760"/>
-            <a:ext cx="9272016" cy="685800"/>
+            <a:off x="1699321" y="3283428"/>
+            <a:ext cx="9255191" cy="839785"/>
           </a:xfrm>
           <a:prstGeom prst="rect">
             <a:avLst/>
@@ -11535,18 +11973,18 @@
       </p:sp>
       <p:sp>
         <p:nvSpPr>
-          <p:cNvPr id="17" name="Shape 10"/>
+          <p:cNvPr id="18" name="Shape 11"/>
           <p:cNvSpPr/>
           <p:nvPr/>
         </p:nvSpPr>
         <p:spPr>
           <a:xfrm>
-            <a:off x="1097280" y="3909060"/>
-            <a:ext cx="457200" cy="457200"/>
+            <a:off x="1097280" y="4783044"/>
+            <a:ext cx="474025" cy="474025"/>
           </a:xfrm>
           <a:prstGeom prst="roundRect">
             <a:avLst>
-              <a:gd name="adj" fmla="val 8000"/>
+              <a:gd name="adj" fmla="val 7716"/>
             </a:avLst>
           </a:prstGeom>
           <a:solidFill>
@@ -11562,7 +12000,7 @@
       </p:sp>
       <p:pic>
         <p:nvPicPr>
-          <p:cNvPr id="18" name="Image 5" descr="spark icon from tabler-icons (MIT)">    </p:cNvPr>
+          <p:cNvPr id="19" name="Image 5" descr="spark icon from tabler-icons (MIT)">    </p:cNvPr>
           <p:cNvPicPr>
             <a:picLocks noChangeAspect="1"/>
           </p:cNvPicPr>
@@ -11582,8 +12020,8 @@
         </p:blipFill>
         <p:spPr>
           <a:xfrm>
-            <a:off x="1170432" y="3982212"/>
-            <a:ext cx="310896" cy="310896"/>
+            <a:off x="1170432" y="4856196"/>
+            <a:ext cx="327721" cy="327721"/>
           </a:xfrm>
           <a:prstGeom prst="rect">
             <a:avLst/>
@@ -11592,14 +12030,14 @@
       </p:pic>
       <p:sp>
         <p:nvSpPr>
-          <p:cNvPr id="19" name="Text 11"/>
+          <p:cNvPr id="20" name="Text 12"/>
           <p:cNvSpPr txBox="1"/>
           <p:nvPr/>
         </p:nvSpPr>
         <p:spPr>
           <a:xfrm>
-            <a:off x="1682496" y="3794760"/>
-            <a:ext cx="9272016" cy="685800"/>
+            <a:off x="1699321" y="4600164"/>
+            <a:ext cx="9255191" cy="839785"/>
           </a:xfrm>
           <a:prstGeom prst="rect">
             <a:avLst/>
@@ -12035,8 +12473,37 @@
         </p:nvSpPr>
         <p:spPr>
           <a:xfrm>
-            <a:off x="914400" y="1417320"/>
-            <a:ext cx="73152" cy="868680"/>
+            <a:off x="786384" y="1956816"/>
+            <a:ext cx="32004" cy="3483864"/>
+          </a:xfrm>
+          <a:prstGeom prst="rect">
+            <a:avLst/>
+          </a:prstGeom>
+          <a:solidFill>
+            <a:srgbClr val="E5E7EB">
+              <a:alpha val="80000"/>
+            </a:srgbClr>
+          </a:solidFill>
+          <a:ln w="12700">
+            <a:solidFill>
+              <a:srgbClr val="E5E7EB">
+                <a:alpha val="0"/>
+              </a:srgbClr>
+            </a:solidFill>
+            <a:prstDash val="solid"/>
+          </a:ln>
+        </p:spPr>
+      </p:sp>
+      <p:sp>
+        <p:nvSpPr>
+          <p:cNvPr id="5" name="Shape 3"/>
+          <p:cNvSpPr/>
+          <p:nvPr/>
+        </p:nvSpPr>
+        <p:spPr>
+          <a:xfrm>
+            <a:off x="914400" y="1865376"/>
+            <a:ext cx="73152" cy="1024128"/>
           </a:xfrm>
           <a:prstGeom prst="rect">
             <a:avLst/>
@@ -12056,14 +12523,14 @@
       </p:sp>
       <p:sp>
         <p:nvSpPr>
-          <p:cNvPr id="5" name="Shape 3"/>
+          <p:cNvPr id="6" name="Shape 4"/>
           <p:cNvSpPr/>
           <p:nvPr/>
         </p:nvSpPr>
         <p:spPr>
           <a:xfrm>
-            <a:off x="914400" y="2560320"/>
-            <a:ext cx="73152" cy="868680"/>
+            <a:off x="914400" y="3191256"/>
+            <a:ext cx="73152" cy="1024128"/>
           </a:xfrm>
           <a:prstGeom prst="rect">
             <a:avLst/>
@@ -12083,14 +12550,14 @@
       </p:sp>
       <p:sp>
         <p:nvSpPr>
-          <p:cNvPr id="6" name="Shape 4"/>
+          <p:cNvPr id="7" name="Shape 5"/>
           <p:cNvSpPr/>
           <p:nvPr/>
         </p:nvSpPr>
         <p:spPr>
           <a:xfrm>
-            <a:off x="914400" y="3703320"/>
-            <a:ext cx="73152" cy="868680"/>
+            <a:off x="914400" y="4507992"/>
+            <a:ext cx="73152" cy="1024128"/>
           </a:xfrm>
           <a:prstGeom prst="rect">
             <a:avLst/>
@@ -12110,7 +12577,7 @@
       </p:sp>
       <p:pic>
         <p:nvPicPr>
-          <p:cNvPr id="7" name="Image 0" descr="preencoded.png">    </p:cNvPr>
+          <p:cNvPr id="8" name="Image 0" descr="preencoded.png">    </p:cNvPr>
           <p:cNvPicPr>
             <a:picLocks noChangeAspect="1"/>
           </p:cNvPicPr>
@@ -12130,8 +12597,8 @@
         </p:blipFill>
         <p:spPr>
           <a:xfrm>
-            <a:off x="914400" y="1417320"/>
-            <a:ext cx="10241280" cy="868680"/>
+            <a:off x="914400" y="1865376"/>
+            <a:ext cx="10241280" cy="1024128"/>
           </a:xfrm>
           <a:prstGeom prst="rect">
             <a:avLst/>
@@ -12140,7 +12607,7 @@
       </p:pic>
       <p:pic>
         <p:nvPicPr>
-          <p:cNvPr id="8" name="Image 1" descr="preencoded.png">    </p:cNvPr>
+          <p:cNvPr id="9" name="Image 1" descr="preencoded.png">    </p:cNvPr>
           <p:cNvPicPr>
             <a:picLocks noChangeAspect="1"/>
           </p:cNvPicPr>
@@ -12160,8 +12627,8 @@
         </p:blipFill>
         <p:spPr>
           <a:xfrm>
-            <a:off x="914400" y="2560320"/>
-            <a:ext cx="10241280" cy="868680"/>
+            <a:off x="914400" y="3191256"/>
+            <a:ext cx="10241280" cy="1024128"/>
           </a:xfrm>
           <a:prstGeom prst="rect">
             <a:avLst/>
@@ -12170,7 +12637,7 @@
       </p:pic>
       <p:pic>
         <p:nvPicPr>
-          <p:cNvPr id="9" name="Image 2" descr="preencoded.png">    </p:cNvPr>
+          <p:cNvPr id="10" name="Image 2" descr="preencoded.png">    </p:cNvPr>
           <p:cNvPicPr>
             <a:picLocks noChangeAspect="1"/>
           </p:cNvPicPr>
@@ -12190,8 +12657,8 @@
         </p:blipFill>
         <p:spPr>
           <a:xfrm>
-            <a:off x="914400" y="3703320"/>
-            <a:ext cx="10241280" cy="868680"/>
+            <a:off x="914400" y="4507992"/>
+            <a:ext cx="10241280" cy="1024128"/>
           </a:xfrm>
           <a:prstGeom prst="rect">
             <a:avLst/>
@@ -12200,7 +12667,7 @@
       </p:pic>
       <p:sp>
         <p:nvSpPr>
-          <p:cNvPr id="10" name="Text 5"/>
+          <p:cNvPr id="11" name="Text 6"/>
           <p:cNvSpPr txBox="1"/>
           <p:nvPr/>
         </p:nvSpPr>
@@ -12242,18 +12709,18 @@
       </p:sp>
       <p:sp>
         <p:nvSpPr>
-          <p:cNvPr id="11" name="Shape 6"/>
+          <p:cNvPr id="12" name="Shape 7"/>
           <p:cNvSpPr/>
           <p:nvPr/>
         </p:nvSpPr>
         <p:spPr>
           <a:xfrm>
-            <a:off x="1097280" y="1623060"/>
-            <a:ext cx="457200" cy="457200"/>
+            <a:off x="1097280" y="2140428"/>
+            <a:ext cx="474025" cy="474025"/>
           </a:xfrm>
           <a:prstGeom prst="roundRect">
             <a:avLst>
-              <a:gd name="adj" fmla="val 8000"/>
+              <a:gd name="adj" fmla="val 7716"/>
             </a:avLst>
           </a:prstGeom>
           <a:solidFill>
@@ -12269,7 +12736,7 @@
       </p:sp>
       <p:pic>
         <p:nvPicPr>
-          <p:cNvPr id="12" name="Image 3" descr="flow icon from tabler-icons (MIT)">    </p:cNvPr>
+          <p:cNvPr id="13" name="Image 3" descr="flow icon from tabler-icons (MIT)">    </p:cNvPr>
           <p:cNvPicPr>
             <a:picLocks noChangeAspect="1"/>
           </p:cNvPicPr>
@@ -12289,8 +12756,8 @@
         </p:blipFill>
         <p:spPr>
           <a:xfrm>
-            <a:off x="1170432" y="1696212"/>
-            <a:ext cx="310896" cy="310896"/>
+            <a:off x="1170432" y="2213580"/>
+            <a:ext cx="327721" cy="327721"/>
           </a:xfrm>
           <a:prstGeom prst="rect">
             <a:avLst/>
@@ -12299,14 +12766,14 @@
       </p:pic>
       <p:sp>
         <p:nvSpPr>
-          <p:cNvPr id="13" name="Text 7"/>
+          <p:cNvPr id="14" name="Text 8"/>
           <p:cNvSpPr txBox="1"/>
           <p:nvPr/>
         </p:nvSpPr>
         <p:spPr>
           <a:xfrm>
-            <a:off x="1682496" y="1508760"/>
-            <a:ext cx="9272016" cy="685800"/>
+            <a:off x="1699321" y="1957548"/>
+            <a:ext cx="9255191" cy="839785"/>
           </a:xfrm>
           <a:prstGeom prst="rect">
             <a:avLst/>
@@ -12333,7 +12800,7 @@
                 <a:ea typeface="Pretendard" pitchFamily="34" charset="-122"/>
                 <a:cs typeface="Pretendard" pitchFamily="34" charset="-120"/>
               </a:rPr>
-              <a:t>Plain / clean</a:t>
+              <a:t>Clean / minimalism</a:t>
             </a:r>
             <a:pPr algn="l" indent="0" marL="0">
               <a:lnSpc>
@@ -12350,7 +12817,7 @@
                 <a:ea typeface="Pretendard" pitchFamily="34" charset="-122"/>
                 <a:cs typeface="Pretendard" pitchFamily="34" charset="-120"/>
               </a:rPr>
-              <a:t>  low-decoration baselines.</a:t>
+              <a:t>  restrained structural baselines.</a:t>
             </a:r>
             <a:endParaRPr lang="en-US" sz="2200" dirty="0"/>
           </a:p>
@@ -12358,18 +12825,18 @@
       </p:sp>
       <p:sp>
         <p:nvSpPr>
-          <p:cNvPr id="14" name="Shape 8"/>
+          <p:cNvPr id="15" name="Shape 9"/>
           <p:cNvSpPr/>
           <p:nvPr/>
         </p:nvSpPr>
         <p:spPr>
           <a:xfrm>
-            <a:off x="1097280" y="2766060"/>
-            <a:ext cx="457200" cy="457200"/>
+            <a:off x="1097280" y="3466308"/>
+            <a:ext cx="474025" cy="474025"/>
           </a:xfrm>
           <a:prstGeom prst="roundRect">
             <a:avLst>
-              <a:gd name="adj" fmla="val 8000"/>
+              <a:gd name="adj" fmla="val 7716"/>
             </a:avLst>
           </a:prstGeom>
           <a:solidFill>
@@ -12385,7 +12852,7 @@
       </p:sp>
       <p:pic>
         <p:nvPicPr>
-          <p:cNvPr id="15" name="Image 4" descr="verified icon from tabler-icons (MIT)">    </p:cNvPr>
+          <p:cNvPr id="16" name="Image 4" descr="verified icon from tabler-icons (MIT)">    </p:cNvPr>
           <p:cNvPicPr>
             <a:picLocks noChangeAspect="1"/>
           </p:cNvPicPr>
@@ -12405,8 +12872,8 @@
         </p:blipFill>
         <p:spPr>
           <a:xfrm>
-            <a:off x="1170432" y="2839212"/>
-            <a:ext cx="310896" cy="310896"/>
+            <a:off x="1170432" y="3539460"/>
+            <a:ext cx="327721" cy="327721"/>
           </a:xfrm>
           <a:prstGeom prst="rect">
             <a:avLst/>
@@ -12415,14 +12882,14 @@
       </p:pic>
       <p:sp>
         <p:nvSpPr>
-          <p:cNvPr id="16" name="Text 9"/>
+          <p:cNvPr id="17" name="Text 10"/>
           <p:cNvSpPr txBox="1"/>
           <p:nvPr/>
         </p:nvSpPr>
         <p:spPr>
           <a:xfrm>
-            <a:off x="1682496" y="2651760"/>
-            <a:ext cx="9272016" cy="685800"/>
+            <a:off x="1699321" y="3283428"/>
+            <a:ext cx="9255191" cy="839785"/>
           </a:xfrm>
           <a:prstGeom prst="rect">
             <a:avLst/>
@@ -12474,18 +12941,18 @@
       </p:sp>
       <p:sp>
         <p:nvSpPr>
-          <p:cNvPr id="17" name="Shape 10"/>
+          <p:cNvPr id="18" name="Shape 11"/>
           <p:cNvSpPr/>
           <p:nvPr/>
         </p:nvSpPr>
         <p:spPr>
           <a:xfrm>
-            <a:off x="1097280" y="3909060"/>
-            <a:ext cx="457200" cy="457200"/>
+            <a:off x="1097280" y="4783044"/>
+            <a:ext cx="474025" cy="474025"/>
           </a:xfrm>
           <a:prstGeom prst="roundRect">
             <a:avLst>
-              <a:gd name="adj" fmla="val 8000"/>
+              <a:gd name="adj" fmla="val 7716"/>
             </a:avLst>
           </a:prstGeom>
           <a:solidFill>
@@ -12501,7 +12968,7 @@
       </p:sp>
       <p:pic>
         <p:nvPicPr>
-          <p:cNvPr id="18" name="Image 5" descr="spark icon from tabler-icons (MIT)">    </p:cNvPr>
+          <p:cNvPr id="19" name="Image 5" descr="spark icon from tabler-icons (MIT)">    </p:cNvPr>
           <p:cNvPicPr>
             <a:picLocks noChangeAspect="1"/>
           </p:cNvPicPr>
@@ -12521,8 +12988,8 @@
         </p:blipFill>
         <p:spPr>
           <a:xfrm>
-            <a:off x="1170432" y="3982212"/>
-            <a:ext cx="310896" cy="310896"/>
+            <a:off x="1170432" y="4856196"/>
+            <a:ext cx="327721" cy="327721"/>
           </a:xfrm>
           <a:prstGeom prst="rect">
             <a:avLst/>
@@ -12531,14 +12998,14 @@
       </p:pic>
       <p:sp>
         <p:nvSpPr>
-          <p:cNvPr id="19" name="Text 11"/>
+          <p:cNvPr id="20" name="Text 12"/>
           <p:cNvSpPr txBox="1"/>
           <p:nvPr/>
         </p:nvSpPr>
         <p:spPr>
           <a:xfrm>
-            <a:off x="1682496" y="3794760"/>
-            <a:ext cx="9272016" cy="685800"/>
+            <a:off x="1699321" y="4600164"/>
+            <a:ext cx="9255191" cy="839785"/>
           </a:xfrm>
           <a:prstGeom prst="rect">
             <a:avLst/>

--- a/docs/theme-preview/pptx/minimalism.pptx
+++ b/docs/theme-preview/pptx/minimalism.pptx
@@ -8066,7 +8066,7 @@
       </p:sp>
       <p:pic>
         <p:nvPicPr>
-          <p:cNvPr id="14" name="Image 4" descr="flow icon from tabler-icons (MIT)">    </p:cNvPr>
+          <p:cNvPr id="14" name="Image 4" descr="article icon from tabler-icons (MIT)">    </p:cNvPr>
           <p:cNvPicPr>
             <a:picLocks noChangeAspect="1"/>
           </p:cNvPicPr>
@@ -8182,7 +8182,7 @@
       </p:sp>
       <p:pic>
         <p:nvPicPr>
-          <p:cNvPr id="17" name="Image 5" descr="verified icon from tabler-icons (MIT)">    </p:cNvPr>
+          <p:cNvPr id="17" name="Image 5" descr="article icon from tabler-icons (MIT)">    </p:cNvPr>
           <p:cNvPicPr>
             <a:picLocks noChangeAspect="1"/>
           </p:cNvPicPr>
@@ -8298,7 +8298,7 @@
       </p:sp>
       <p:pic>
         <p:nvPicPr>
-          <p:cNvPr id="20" name="Image 6" descr="spark icon from tabler-icons (MIT)">    </p:cNvPr>
+          <p:cNvPr id="20" name="Image 6" descr="article icon from tabler-icons (MIT)">    </p:cNvPr>
           <p:cNvPicPr>
             <a:picLocks noChangeAspect="1"/>
           </p:cNvPicPr>
@@ -8414,7 +8414,7 @@
       </p:sp>
       <p:pic>
         <p:nvPicPr>
-          <p:cNvPr id="23" name="Image 7" descr="chart icon from tabler-icons (MIT)">    </p:cNvPr>
+          <p:cNvPr id="23" name="Image 7" descr="table icon from tabler-icons (MIT)">    </p:cNvPr>
           <p:cNvPicPr>
             <a:picLocks noChangeAspect="1"/>
           </p:cNvPicPr>
@@ -8882,7 +8882,7 @@
       </p:sp>
       <p:pic>
         <p:nvPicPr>
-          <p:cNvPr id="14" name="Image 4" descr="flow icon from tabler-icons (MIT)">    </p:cNvPr>
+          <p:cNvPr id="14" name="Image 4" descr="verified icon from tabler-icons (MIT)">    </p:cNvPr>
           <p:cNvPicPr>
             <a:picLocks noChangeAspect="1"/>
           </p:cNvPicPr>
@@ -8998,7 +8998,7 @@
       </p:sp>
       <p:pic>
         <p:nvPicPr>
-          <p:cNvPr id="17" name="Image 5" descr="verified icon from tabler-icons (MIT)">    </p:cNvPr>
+          <p:cNvPr id="17" name="Image 5" descr="table icon from tabler-icons (MIT)">    </p:cNvPr>
           <p:cNvPicPr>
             <a:picLocks noChangeAspect="1"/>
           </p:cNvPicPr>
@@ -9114,7 +9114,7 @@
       </p:sp>
       <p:pic>
         <p:nvPicPr>
-          <p:cNvPr id="20" name="Image 6" descr="spark icon from tabler-icons (MIT)">    </p:cNvPr>
+          <p:cNvPr id="20" name="Image 6" descr="article icon from tabler-icons (MIT)">    </p:cNvPr>
           <p:cNvPicPr>
             <a:picLocks noChangeAspect="1"/>
           </p:cNvPicPr>
@@ -9230,7 +9230,7 @@
       </p:sp>
       <p:pic>
         <p:nvPicPr>
-          <p:cNvPr id="23" name="Image 7" descr="chart icon from tabler-icons (MIT)">    </p:cNvPr>
+          <p:cNvPr id="23" name="Image 7" descr="article icon from tabler-icons (MIT)">    </p:cNvPr>
           <p:cNvPicPr>
             <a:picLocks noChangeAspect="1"/>
           </p:cNvPicPr>
@@ -11768,7 +11768,7 @@
       </p:sp>
       <p:pic>
         <p:nvPicPr>
-          <p:cNvPr id="13" name="Image 3" descr="flow icon from tabler-icons (MIT)">    </p:cNvPr>
+          <p:cNvPr id="13" name="Image 3" descr="article icon from tabler-icons (MIT)">    </p:cNvPr>
           <p:cNvPicPr>
             <a:picLocks noChangeAspect="1"/>
           </p:cNvPicPr>
@@ -11884,7 +11884,7 @@
       </p:sp>
       <p:pic>
         <p:nvPicPr>
-          <p:cNvPr id="16" name="Image 4" descr="verified icon from tabler-icons (MIT)">    </p:cNvPr>
+          <p:cNvPr id="16" name="Image 4" descr="chart icon from tabler-icons (MIT)">    </p:cNvPr>
           <p:cNvPicPr>
             <a:picLocks noChangeAspect="1"/>
           </p:cNvPicPr>
@@ -12000,7 +12000,7 @@
       </p:sp>
       <p:pic>
         <p:nvPicPr>
-          <p:cNvPr id="19" name="Image 5" descr="spark icon from tabler-icons (MIT)">    </p:cNvPr>
+          <p:cNvPr id="19" name="Image 5" descr="article icon from tabler-icons (MIT)">    </p:cNvPr>
           <p:cNvPicPr>
             <a:picLocks noChangeAspect="1"/>
           </p:cNvPicPr>
@@ -12736,7 +12736,7 @@
       </p:sp>
       <p:pic>
         <p:nvPicPr>
-          <p:cNvPr id="13" name="Image 3" descr="flow icon from tabler-icons (MIT)">    </p:cNvPr>
+          <p:cNvPr id="13" name="Image 3" descr="article icon from tabler-icons (MIT)">    </p:cNvPr>
           <p:cNvPicPr>
             <a:picLocks noChangeAspect="1"/>
           </p:cNvPicPr>
@@ -12852,7 +12852,7 @@
       </p:sp>
       <p:pic>
         <p:nvPicPr>
-          <p:cNvPr id="16" name="Image 4" descr="verified icon from tabler-icons (MIT)">    </p:cNvPr>
+          <p:cNvPr id="16" name="Image 4" descr="article icon from tabler-icons (MIT)">    </p:cNvPr>
           <p:cNvPicPr>
             <a:picLocks noChangeAspect="1"/>
           </p:cNvPicPr>
@@ -12968,7 +12968,7 @@
       </p:sp>
       <p:pic>
         <p:nvPicPr>
-          <p:cNvPr id="19" name="Image 5" descr="spark icon from tabler-icons (MIT)">    </p:cNvPr>
+          <p:cNvPr id="19" name="Image 5" descr="article icon from tabler-icons (MIT)">    </p:cNvPr>
           <p:cNvPicPr>
             <a:picLocks noChangeAspect="1"/>
           </p:cNvPicPr>
@@ -13732,7 +13732,7 @@
       </p:sp>
       <p:pic>
         <p:nvPicPr>
-          <p:cNvPr id="14" name="Image 4" descr="flow icon from tabler-icons (MIT)">    </p:cNvPr>
+          <p:cNvPr id="14" name="Image 4" descr="table icon from tabler-icons (MIT)">    </p:cNvPr>
           <p:cNvPicPr>
             <a:picLocks noChangeAspect="1"/>
           </p:cNvPicPr>
@@ -13848,7 +13848,7 @@
       </p:sp>
       <p:pic>
         <p:nvPicPr>
-          <p:cNvPr id="17" name="Image 5" descr="verified icon from tabler-icons (MIT)">    </p:cNvPr>
+          <p:cNvPr id="17" name="Image 5" descr="article icon from tabler-icons (MIT)">    </p:cNvPr>
           <p:cNvPicPr>
             <a:picLocks noChangeAspect="1"/>
           </p:cNvPicPr>
@@ -13964,7 +13964,7 @@
       </p:sp>
       <p:pic>
         <p:nvPicPr>
-          <p:cNvPr id="20" name="Image 6" descr="spark icon from tabler-icons (MIT)">    </p:cNvPr>
+          <p:cNvPr id="20" name="Image 6" descr="article icon from tabler-icons (MIT)">    </p:cNvPr>
           <p:cNvPicPr>
             <a:picLocks noChangeAspect="1"/>
           </p:cNvPicPr>
@@ -14080,7 +14080,7 @@
       </p:sp>
       <p:pic>
         <p:nvPicPr>
-          <p:cNvPr id="23" name="Image 7" descr="chart icon from tabler-icons (MIT)">    </p:cNvPr>
+          <p:cNvPr id="23" name="Image 7" descr="table icon from tabler-icons (MIT)">    </p:cNvPr>
           <p:cNvPicPr>
             <a:picLocks noChangeAspect="1"/>
           </p:cNvPicPr>

--- a/docs/theme-preview/pptx/minimalism.pptx
+++ b/docs/theme-preview/pptx/minimalism.pptx
@@ -10514,7 +10514,7 @@
                 <a:ea typeface="Pretendard" pitchFamily="34" charset="-122"/>
                 <a:cs typeface="Pretendard" pitchFamily="34" charset="-120"/>
               </a:rPr>
-              <a:t>목차</a:t>
+              <a:t>Agenda</a:t>
             </a:r>
             <a:endParaRPr lang="en-US" sz="3800" dirty="0"/>
           </a:p>

--- a/docs/theme-preview/pptx/minimalism.pptx
+++ b/docs/theme-preview/pptx/minimalism.pptx
@@ -2994,36 +2994,39 @@
           </a:ln>
         </p:spPr>
       </p:sp>
-      <p:sp>
-        <p:nvSpPr>
-          <p:cNvPr id="4" name="Shape 2"/>
-          <p:cNvSpPr/>
-          <p:nvPr/>
-        </p:nvSpPr>
-        <p:spPr>
-          <a:xfrm>
-            <a:off x="914400" y="1463040"/>
-            <a:ext cx="10241280" cy="73152"/>
-          </a:xfrm>
-          <a:prstGeom prst="rect">
-            <a:avLst/>
-          </a:prstGeom>
-          <a:solidFill>
-            <a:srgbClr val="111827"/>
-          </a:solidFill>
-          <a:ln w="12700">
-            <a:solidFill>
-              <a:srgbClr val="111827">
-                <a:alpha val="0"/>
-              </a:srgbClr>
-            </a:solidFill>
-            <a:prstDash val="solid"/>
-          </a:ln>
-        </p:spPr>
-      </p:sp>
-      <p:sp>
-        <p:nvSpPr>
-          <p:cNvPr id="5" name="Text 3"/>
+      <p:pic>
+        <p:nvPicPr>
+          <p:cNvPr id="4" name="Image 0" descr="preencoded.png">    </p:cNvPr>
+          <p:cNvPicPr>
+            <a:picLocks noChangeAspect="1"/>
+          </p:cNvPicPr>
+          <p:nvPr/>
+        </p:nvPicPr>
+        <p:blipFill>
+          <a:blip r:embed="rId1">
+            <a:extLst>
+              <a:ext uri="{96DAC541-7B7A-43D3-8B79-37D633B846F1}">
+                <asvg:svgBlip xmlns:asvg="http://schemas.microsoft.com/office/drawing/2016/SVG/main" r:embed="rId2"/>
+              </a:ext>
+            </a:extLst>
+          </a:blip>
+          <a:stretch>
+            <a:fillRect/>
+          </a:stretch>
+        </p:blipFill>
+        <p:spPr>
+          <a:xfrm>
+            <a:off x="914400" y="1417320"/>
+            <a:ext cx="10241280" cy="4526280"/>
+          </a:xfrm>
+          <a:prstGeom prst="rect">
+            <a:avLst/>
+          </a:prstGeom>
+        </p:spPr>
+      </p:pic>
+      <p:sp>
+        <p:nvSpPr>
+          <p:cNvPr id="5" name="Text 2"/>
           <p:cNvSpPr txBox="1"/>
           <p:nvPr/>
         </p:nvSpPr>
@@ -3078,8 +3081,8 @@
           </p:nvPr>
         </p:nvGraphicFramePr>
         <p:xfrm>
-          <a:off x="914400" y="1463040"/>
-          <a:ext cx="10241280" cy="4480560"/>
+          <a:off x="914400" y="1417320"/>
+          <a:ext cx="10241280" cy="4526280"/>
         </p:xfrm>
         <a:graphic>
           <a:graphicData uri="http://schemas.openxmlformats.org/drawingml/2006/table">
@@ -3090,7 +3093,7 @@
                 <a:gridCol w="3413760"/>
                 <a:gridCol w="3413760"/>
               </a:tblGrid>
-              <a:tr h="896112">
+              <a:tr h="905256">
                 <a:tc>
                   <a:txBody>
                     <a:bodyPr/>
@@ -3100,7 +3103,7 @@
                         <a:buNone/>
                       </a:pPr>
                       <a:r>
-                        <a:rPr lang="en-US" sz="2200" b="1" dirty="0">
+                        <a:rPr lang="en-US" sz="1800" b="1" dirty="0">
                           <a:solidFill>
                             <a:srgbClr val="FFFFFF"/>
                           </a:solidFill>
@@ -3110,7 +3113,7 @@
                         </a:rPr>
                         <a:t>Object</a:t>
                       </a:r>
-                      <a:endParaRPr lang="en-US" sz="2200" dirty="0">
+                      <a:endParaRPr lang="en-US" sz="1800" dirty="0">
                         <a:latin typeface="Pretendard" charset="0"/>
                         <a:ea typeface="Pretendard" charset="0"/>
                         <a:cs typeface="Pretendard" charset="0"/>
@@ -3168,7 +3171,7 @@
                         <a:buNone/>
                       </a:pPr>
                       <a:r>
-                        <a:rPr lang="en-US" sz="2200" b="1" dirty="0">
+                        <a:rPr lang="en-US" sz="1800" b="1" dirty="0">
                           <a:solidFill>
                             <a:srgbClr val="FFFFFF"/>
                           </a:solidFill>
@@ -3178,7 +3181,7 @@
                         </a:rPr>
                         <a:t>Renderer expectation</a:t>
                       </a:r>
-                      <a:endParaRPr lang="en-US" sz="2200" dirty="0">
+                      <a:endParaRPr lang="en-US" sz="1800" dirty="0">
                         <a:latin typeface="Pretendard" charset="0"/>
                         <a:ea typeface="Pretendard" charset="0"/>
                         <a:cs typeface="Pretendard" charset="0"/>
@@ -3236,7 +3239,7 @@
                         <a:buNone/>
                       </a:pPr>
                       <a:r>
-                        <a:rPr lang="en-US" sz="2200" b="1" dirty="0">
+                        <a:rPr lang="en-US" sz="1800" b="1" dirty="0">
                           <a:solidFill>
                             <a:srgbClr val="FFFFFF"/>
                           </a:solidFill>
@@ -3246,7 +3249,7 @@
                         </a:rPr>
                         <a:t>QA signal</a:t>
                       </a:r>
-                      <a:endParaRPr lang="en-US" sz="2200" dirty="0">
+                      <a:endParaRPr lang="en-US" sz="1800" dirty="0">
                         <a:latin typeface="Pretendard" charset="0"/>
                         <a:ea typeface="Pretendard" charset="0"/>
                         <a:cs typeface="Pretendard" charset="0"/>
@@ -3296,7 +3299,7 @@
                   </a:tcPr>
                 </a:tc>
               </a:tr>
-              <a:tr h="896112">
+              <a:tr h="905256">
                 <a:tc>
                   <a:txBody>
                     <a:bodyPr/>
@@ -3306,7 +3309,7 @@
                         <a:buNone/>
                       </a:pPr>
                       <a:r>
-                        <a:rPr lang="en-US" sz="2200" b="1" dirty="0">
+                        <a:rPr lang="en-US" sz="1800" b="1" dirty="0">
                           <a:solidFill>
                             <a:srgbClr val="111827"/>
                           </a:solidFill>
@@ -3316,7 +3319,7 @@
                         </a:rPr>
                         <a:t>Text box</a:t>
                       </a:r>
-                      <a:endParaRPr lang="en-US" sz="2200" dirty="0">
+                      <a:endParaRPr lang="en-US" sz="1800" dirty="0">
                         <a:latin typeface="Pretendard" charset="0"/>
                         <a:ea typeface="Pretendard" charset="0"/>
                         <a:cs typeface="Pretendard" charset="0"/>
@@ -3371,7 +3374,7 @@
                         <a:buNone/>
                       </a:pPr>
                       <a:r>
-                        <a:rPr lang="en-US" sz="2200" dirty="0">
+                        <a:rPr lang="en-US" sz="1800" dirty="0">
                           <a:solidFill>
                             <a:srgbClr val="111827"/>
                           </a:solidFill>
@@ -3381,7 +3384,7 @@
                         </a:rPr>
                         <a:t>editable, middle aligned</a:t>
                       </a:r>
-                      <a:endParaRPr lang="en-US" sz="2200" dirty="0">
+                      <a:endParaRPr lang="en-US" sz="1800" dirty="0">
                         <a:latin typeface="Pretendard" charset="0"/>
                         <a:ea typeface="Pretendard" charset="0"/>
                         <a:cs typeface="Pretendard" charset="0"/>
@@ -3436,7 +3439,7 @@
                         <a:buNone/>
                       </a:pPr>
                       <a:r>
-                        <a:rPr lang="en-US" sz="2200" dirty="0">
+                        <a:rPr lang="en-US" sz="1800" dirty="0">
                           <a:solidFill>
                             <a:srgbClr val="111827"/>
                           </a:solidFill>
@@ -3446,7 +3449,7 @@
                         </a:rPr>
                         <a:t>readable minimum size</a:t>
                       </a:r>
-                      <a:endParaRPr lang="en-US" sz="2200" dirty="0">
+                      <a:endParaRPr lang="en-US" sz="1800" dirty="0">
                         <a:latin typeface="Pretendard" charset="0"/>
                         <a:ea typeface="Pretendard" charset="0"/>
                         <a:cs typeface="Pretendard" charset="0"/>
@@ -3493,7 +3496,7 @@
                   </a:tcPr>
                 </a:tc>
               </a:tr>
-              <a:tr h="896112">
+              <a:tr h="905256">
                 <a:tc>
                   <a:txBody>
                     <a:bodyPr/>
@@ -3503,7 +3506,7 @@
                         <a:buNone/>
                       </a:pPr>
                       <a:r>
-                        <a:rPr lang="en-US" sz="2200" b="1" dirty="0">
+                        <a:rPr lang="en-US" sz="1800" b="1" dirty="0">
                           <a:solidFill>
                             <a:srgbClr val="111827"/>
                           </a:solidFill>
@@ -3513,7 +3516,7 @@
                         </a:rPr>
                         <a:t>Table</a:t>
                       </a:r>
-                      <a:endParaRPr lang="en-US" sz="2200" dirty="0">
+                      <a:endParaRPr lang="en-US" sz="1800" dirty="0">
                         <a:latin typeface="Pretendard" charset="0"/>
                         <a:ea typeface="Pretendard" charset="0"/>
                         <a:cs typeface="Pretendard" charset="0"/>
@@ -3573,7 +3576,7 @@
                         <a:buNone/>
                       </a:pPr>
                       <a:r>
-                        <a:rPr lang="en-US" sz="2200" dirty="0">
+                        <a:rPr lang="en-US" sz="1800" dirty="0">
                           <a:solidFill>
                             <a:srgbClr val="111827"/>
                           </a:solidFill>
@@ -3583,7 +3586,7 @@
                         </a:rPr>
                         <a:t>native table object</a:t>
                       </a:r>
-                      <a:endParaRPr lang="en-US" sz="2200" dirty="0">
+                      <a:endParaRPr lang="en-US" sz="1800" dirty="0">
                         <a:latin typeface="Pretendard" charset="0"/>
                         <a:ea typeface="Pretendard" charset="0"/>
                         <a:cs typeface="Pretendard" charset="0"/>
@@ -3643,7 +3646,7 @@
                         <a:buNone/>
                       </a:pPr>
                       <a:r>
-                        <a:rPr lang="en-US" sz="2200" dirty="0">
+                        <a:rPr lang="en-US" sz="1800" dirty="0">
                           <a:solidFill>
                             <a:srgbClr val="111827"/>
                           </a:solidFill>
@@ -3653,7 +3656,7 @@
                         </a:rPr>
                         <a:t>header fill and cell padding</a:t>
                       </a:r>
-                      <a:endParaRPr lang="en-US" sz="2200" dirty="0">
+                      <a:endParaRPr lang="en-US" sz="1800" dirty="0">
                         <a:latin typeface="Pretendard" charset="0"/>
                         <a:ea typeface="Pretendard" charset="0"/>
                         <a:cs typeface="Pretendard" charset="0"/>
@@ -3705,7 +3708,7 @@
                   </a:tcPr>
                 </a:tc>
               </a:tr>
-              <a:tr h="896112">
+              <a:tr h="905256">
                 <a:tc>
                   <a:txBody>
                     <a:bodyPr/>
@@ -3715,7 +3718,7 @@
                         <a:buNone/>
                       </a:pPr>
                       <a:r>
-                        <a:rPr lang="en-US" sz="2200" b="1" dirty="0">
+                        <a:rPr lang="en-US" sz="1800" b="1" dirty="0">
                           <a:solidFill>
                             <a:srgbClr val="111827"/>
                           </a:solidFill>
@@ -3725,7 +3728,7 @@
                         </a:rPr>
                         <a:t>Diagram</a:t>
                       </a:r>
-                      <a:endParaRPr lang="en-US" sz="2200" dirty="0">
+                      <a:endParaRPr lang="en-US" sz="1800" dirty="0">
                         <a:latin typeface="Pretendard" charset="0"/>
                         <a:ea typeface="Pretendard" charset="0"/>
                         <a:cs typeface="Pretendard" charset="0"/>
@@ -3780,7 +3783,7 @@
                         <a:buNone/>
                       </a:pPr>
                       <a:r>
-                        <a:rPr lang="en-US" sz="2200" dirty="0">
+                        <a:rPr lang="en-US" sz="1800" dirty="0">
                           <a:solidFill>
                             <a:srgbClr val="111827"/>
                           </a:solidFill>
@@ -3790,7 +3793,7 @@
                         </a:rPr>
                         <a:t>nodes and connectors</a:t>
                       </a:r>
-                      <a:endParaRPr lang="en-US" sz="2200" dirty="0">
+                      <a:endParaRPr lang="en-US" sz="1800" dirty="0">
                         <a:latin typeface="Pretendard" charset="0"/>
                         <a:ea typeface="Pretendard" charset="0"/>
                         <a:cs typeface="Pretendard" charset="0"/>
@@ -3845,7 +3848,7 @@
                         <a:buNone/>
                       </a:pPr>
                       <a:r>
-                        <a:rPr lang="en-US" sz="2200" dirty="0">
+                        <a:rPr lang="en-US" sz="1800" dirty="0">
                           <a:solidFill>
                             <a:srgbClr val="111827"/>
                           </a:solidFill>
@@ -3855,7 +3858,7 @@
                         </a:rPr>
                         <a:t>no clipped labels</a:t>
                       </a:r>
-                      <a:endParaRPr lang="en-US" sz="2200" dirty="0">
+                      <a:endParaRPr lang="en-US" sz="1800" dirty="0">
                         <a:latin typeface="Pretendard" charset="0"/>
                         <a:ea typeface="Pretendard" charset="0"/>
                         <a:cs typeface="Pretendard" charset="0"/>
@@ -3902,7 +3905,7 @@
                   </a:tcPr>
                 </a:tc>
               </a:tr>
-              <a:tr h="896112">
+              <a:tr h="905256">
                 <a:tc>
                   <a:txBody>
                     <a:bodyPr/>
@@ -3912,7 +3915,7 @@
                         <a:buNone/>
                       </a:pPr>
                       <a:r>
-                        <a:rPr lang="en-US" sz="2200" b="1" dirty="0">
+                        <a:rPr lang="en-US" sz="1800" b="1" dirty="0">
                           <a:solidFill>
                             <a:srgbClr val="111827"/>
                           </a:solidFill>
@@ -3922,7 +3925,7 @@
                         </a:rPr>
                         <a:t>Chart</a:t>
                       </a:r>
-                      <a:endParaRPr lang="en-US" sz="2200" dirty="0">
+                      <a:endParaRPr lang="en-US" sz="1800" dirty="0">
                         <a:latin typeface="Pretendard" charset="0"/>
                         <a:ea typeface="Pretendard" charset="0"/>
                         <a:cs typeface="Pretendard" charset="0"/>
@@ -3982,7 +3985,7 @@
                         <a:buNone/>
                       </a:pPr>
                       <a:r>
-                        <a:rPr lang="en-US" sz="2200" dirty="0">
+                        <a:rPr lang="en-US" sz="1800" dirty="0">
                           <a:solidFill>
                             <a:srgbClr val="111827"/>
                           </a:solidFill>
@@ -3992,7 +3995,7 @@
                         </a:rPr>
                         <a:t>theme-colored data object</a:t>
                       </a:r>
-                      <a:endParaRPr lang="en-US" sz="2200" dirty="0">
+                      <a:endParaRPr lang="en-US" sz="1800" dirty="0">
                         <a:latin typeface="Pretendard" charset="0"/>
                         <a:ea typeface="Pretendard" charset="0"/>
                         <a:cs typeface="Pretendard" charset="0"/>
@@ -4052,7 +4055,7 @@
                         <a:buNone/>
                       </a:pPr>
                       <a:r>
-                        <a:rPr lang="en-US" sz="2200" dirty="0">
+                        <a:rPr lang="en-US" sz="1800" dirty="0">
                           <a:solidFill>
                             <a:srgbClr val="111827"/>
                           </a:solidFill>
@@ -4062,7 +4065,7 @@
                         </a:rPr>
                         <a:t>contrast and value clarity</a:t>
                       </a:r>
-                      <a:endParaRPr lang="en-US" sz="2200" dirty="0">
+                      <a:endParaRPr lang="en-US" sz="1800" dirty="0">
                         <a:latin typeface="Pretendard" charset="0"/>
                         <a:ea typeface="Pretendard" charset="0"/>
                         <a:cs typeface="Pretendard" charset="0"/>
@@ -4536,36 +4539,39 @@
           </a:ln>
         </p:spPr>
       </p:sp>
-      <p:sp>
-        <p:nvSpPr>
-          <p:cNvPr id="4" name="Shape 2"/>
-          <p:cNvSpPr/>
-          <p:nvPr/>
-        </p:nvSpPr>
-        <p:spPr>
-          <a:xfrm>
-            <a:off x="914400" y="1463040"/>
-            <a:ext cx="10241280" cy="73152"/>
-          </a:xfrm>
-          <a:prstGeom prst="rect">
-            <a:avLst/>
-          </a:prstGeom>
-          <a:solidFill>
-            <a:srgbClr val="111827"/>
-          </a:solidFill>
-          <a:ln w="12700">
-            <a:solidFill>
-              <a:srgbClr val="111827">
-                <a:alpha val="0"/>
-              </a:srgbClr>
-            </a:solidFill>
-            <a:prstDash val="solid"/>
-          </a:ln>
-        </p:spPr>
-      </p:sp>
-      <p:sp>
-        <p:nvSpPr>
-          <p:cNvPr id="5" name="Text 3"/>
+      <p:pic>
+        <p:nvPicPr>
+          <p:cNvPr id="4" name="Image 0" descr="preencoded.png">    </p:cNvPr>
+          <p:cNvPicPr>
+            <a:picLocks noChangeAspect="1"/>
+          </p:cNvPicPr>
+          <p:nvPr/>
+        </p:nvPicPr>
+        <p:blipFill>
+          <a:blip r:embed="rId1">
+            <a:extLst>
+              <a:ext uri="{96DAC541-7B7A-43D3-8B79-37D633B846F1}">
+                <asvg:svgBlip xmlns:asvg="http://schemas.microsoft.com/office/drawing/2016/SVG/main" r:embed="rId2"/>
+              </a:ext>
+            </a:extLst>
+          </a:blip>
+          <a:stretch>
+            <a:fillRect/>
+          </a:stretch>
+        </p:blipFill>
+        <p:spPr>
+          <a:xfrm>
+            <a:off x="914400" y="1417320"/>
+            <a:ext cx="10241280" cy="4526280"/>
+          </a:xfrm>
+          <a:prstGeom prst="rect">
+            <a:avLst/>
+          </a:prstGeom>
+        </p:spPr>
+      </p:pic>
+      <p:sp>
+        <p:nvSpPr>
+          <p:cNvPr id="5" name="Text 2"/>
           <p:cNvSpPr txBox="1"/>
           <p:nvPr/>
         </p:nvSpPr>
@@ -4620,8 +4626,8 @@
           </p:nvPr>
         </p:nvGraphicFramePr>
         <p:xfrm>
-          <a:off x="914400" y="1463040"/>
-          <a:ext cx="10241280" cy="4480560"/>
+          <a:off x="914400" y="1417320"/>
+          <a:ext cx="10241280" cy="4526280"/>
         </p:xfrm>
         <a:graphic>
           <a:graphicData uri="http://schemas.openxmlformats.org/drawingml/2006/table">
@@ -4632,7 +4638,7 @@
                 <a:gridCol w="3413760"/>
                 <a:gridCol w="3413760"/>
               </a:tblGrid>
-              <a:tr h="1120140">
+              <a:tr h="1131570">
                 <a:tc>
                   <a:txBody>
                     <a:bodyPr/>
@@ -4642,7 +4648,7 @@
                         <a:buNone/>
                       </a:pPr>
                       <a:r>
-                        <a:rPr lang="en-US" sz="2200" b="1" dirty="0">
+                        <a:rPr lang="en-US" sz="1800" b="1" dirty="0">
                           <a:solidFill>
                             <a:srgbClr val="FFFFFF"/>
                           </a:solidFill>
@@ -4652,7 +4658,7 @@
                         </a:rPr>
                         <a:t>Stage</a:t>
                       </a:r>
-                      <a:endParaRPr lang="en-US" sz="2200" dirty="0">
+                      <a:endParaRPr lang="en-US" sz="1800" dirty="0">
                         <a:latin typeface="Pretendard" charset="0"/>
                         <a:ea typeface="Pretendard" charset="0"/>
                         <a:cs typeface="Pretendard" charset="0"/>
@@ -4710,7 +4716,7 @@
                         <a:buNone/>
                       </a:pPr>
                       <a:r>
-                        <a:rPr lang="en-US" sz="2200" b="1" dirty="0">
+                        <a:rPr lang="en-US" sz="1800" b="1" dirty="0">
                           <a:solidFill>
                             <a:srgbClr val="FFFFFF"/>
                           </a:solidFill>
@@ -4720,7 +4726,7 @@
                         </a:rPr>
                         <a:t>Coverage</a:t>
                       </a:r>
-                      <a:endParaRPr lang="en-US" sz="2200" dirty="0">
+                      <a:endParaRPr lang="en-US" sz="1800" dirty="0">
                         <a:latin typeface="Pretendard" charset="0"/>
                         <a:ea typeface="Pretendard" charset="0"/>
                         <a:cs typeface="Pretendard" charset="0"/>
@@ -4778,7 +4784,7 @@
                         <a:buNone/>
                       </a:pPr>
                       <a:r>
-                        <a:rPr lang="en-US" sz="2200" b="1" dirty="0">
+                        <a:rPr lang="en-US" sz="1800" b="1" dirty="0">
                           <a:solidFill>
                             <a:srgbClr val="FFFFFF"/>
                           </a:solidFill>
@@ -4788,7 +4794,7 @@
                         </a:rPr>
                         <a:t>Defects</a:t>
                       </a:r>
-                      <a:endParaRPr lang="en-US" sz="2200" dirty="0">
+                      <a:endParaRPr lang="en-US" sz="1800" dirty="0">
                         <a:latin typeface="Pretendard" charset="0"/>
                         <a:ea typeface="Pretendard" charset="0"/>
                         <a:cs typeface="Pretendard" charset="0"/>
@@ -4838,7 +4844,7 @@
                   </a:tcPr>
                 </a:tc>
               </a:tr>
-              <a:tr h="1120140">
+              <a:tr h="1131570">
                 <a:tc>
                   <a:txBody>
                     <a:bodyPr/>
@@ -4848,7 +4854,7 @@
                         <a:buNone/>
                       </a:pPr>
                       <a:r>
-                        <a:rPr lang="en-US" sz="2200" b="1" dirty="0">
+                        <a:rPr lang="en-US" sz="1800" b="1" dirty="0">
                           <a:solidFill>
                             <a:srgbClr val="111827"/>
                           </a:solidFill>
@@ -4858,7 +4864,7 @@
                         </a:rPr>
                         <a:t>Parser</a:t>
                       </a:r>
-                      <a:endParaRPr lang="en-US" sz="2200" dirty="0">
+                      <a:endParaRPr lang="en-US" sz="1800" dirty="0">
                         <a:latin typeface="Pretendard" charset="0"/>
                         <a:ea typeface="Pretendard" charset="0"/>
                         <a:cs typeface="Pretendard" charset="0"/>
@@ -4913,7 +4919,7 @@
                         <a:buNone/>
                       </a:pPr>
                       <a:r>
-                        <a:rPr lang="en-US" sz="2200" dirty="0">
+                        <a:rPr lang="en-US" sz="1800" dirty="0">
                           <a:solidFill>
                             <a:srgbClr val="111827"/>
                           </a:solidFill>
@@ -4923,7 +4929,7 @@
                         </a:rPr>
                         <a:t>92</a:t>
                       </a:r>
-                      <a:endParaRPr lang="en-US" sz="2200" dirty="0">
+                      <a:endParaRPr lang="en-US" sz="1800" dirty="0">
                         <a:latin typeface="Pretendard" charset="0"/>
                         <a:ea typeface="Pretendard" charset="0"/>
                         <a:cs typeface="Pretendard" charset="0"/>
@@ -4978,7 +4984,7 @@
                         <a:buNone/>
                       </a:pPr>
                       <a:r>
-                        <a:rPr lang="en-US" sz="2200" dirty="0">
+                        <a:rPr lang="en-US" sz="1800" dirty="0">
                           <a:solidFill>
                             <a:srgbClr val="111827"/>
                           </a:solidFill>
@@ -4988,7 +4994,7 @@
                         </a:rPr>
                         <a:t>3</a:t>
                       </a:r>
-                      <a:endParaRPr lang="en-US" sz="2200" dirty="0">
+                      <a:endParaRPr lang="en-US" sz="1800" dirty="0">
                         <a:latin typeface="Pretendard" charset="0"/>
                         <a:ea typeface="Pretendard" charset="0"/>
                         <a:cs typeface="Pretendard" charset="0"/>
@@ -5035,7 +5041,7 @@
                   </a:tcPr>
                 </a:tc>
               </a:tr>
-              <a:tr h="1120140">
+              <a:tr h="1131570">
                 <a:tc>
                   <a:txBody>
                     <a:bodyPr/>
@@ -5045,7 +5051,7 @@
                         <a:buNone/>
                       </a:pPr>
                       <a:r>
-                        <a:rPr lang="en-US" sz="2200" b="1" dirty="0">
+                        <a:rPr lang="en-US" sz="1800" b="1" dirty="0">
                           <a:solidFill>
                             <a:srgbClr val="111827"/>
                           </a:solidFill>
@@ -5055,7 +5061,7 @@
                         </a:rPr>
                         <a:t>Layout</a:t>
                       </a:r>
-                      <a:endParaRPr lang="en-US" sz="2200" dirty="0">
+                      <a:endParaRPr lang="en-US" sz="1800" dirty="0">
                         <a:latin typeface="Pretendard" charset="0"/>
                         <a:ea typeface="Pretendard" charset="0"/>
                         <a:cs typeface="Pretendard" charset="0"/>
@@ -5115,7 +5121,7 @@
                         <a:buNone/>
                       </a:pPr>
                       <a:r>
-                        <a:rPr lang="en-US" sz="2200" dirty="0">
+                        <a:rPr lang="en-US" sz="1800" dirty="0">
                           <a:solidFill>
                             <a:srgbClr val="111827"/>
                           </a:solidFill>
@@ -5125,7 +5131,7 @@
                         </a:rPr>
                         <a:t>88</a:t>
                       </a:r>
-                      <a:endParaRPr lang="en-US" sz="2200" dirty="0">
+                      <a:endParaRPr lang="en-US" sz="1800" dirty="0">
                         <a:latin typeface="Pretendard" charset="0"/>
                         <a:ea typeface="Pretendard" charset="0"/>
                         <a:cs typeface="Pretendard" charset="0"/>
@@ -5185,7 +5191,7 @@
                         <a:buNone/>
                       </a:pPr>
                       <a:r>
-                        <a:rPr lang="en-US" sz="2200" dirty="0">
+                        <a:rPr lang="en-US" sz="1800" dirty="0">
                           <a:solidFill>
                             <a:srgbClr val="111827"/>
                           </a:solidFill>
@@ -5195,7 +5201,7 @@
                         </a:rPr>
                         <a:t>5</a:t>
                       </a:r>
-                      <a:endParaRPr lang="en-US" sz="2200" dirty="0">
+                      <a:endParaRPr lang="en-US" sz="1800" dirty="0">
                         <a:latin typeface="Pretendard" charset="0"/>
                         <a:ea typeface="Pretendard" charset="0"/>
                         <a:cs typeface="Pretendard" charset="0"/>
@@ -5247,7 +5253,7 @@
                   </a:tcPr>
                 </a:tc>
               </a:tr>
-              <a:tr h="1120140">
+              <a:tr h="1131570">
                 <a:tc>
                   <a:txBody>
                     <a:bodyPr/>
@@ -5257,7 +5263,7 @@
                         <a:buNone/>
                       </a:pPr>
                       <a:r>
-                        <a:rPr lang="en-US" sz="2200" b="1" dirty="0">
+                        <a:rPr lang="en-US" sz="1800" b="1" dirty="0">
                           <a:solidFill>
                             <a:srgbClr val="111827"/>
                           </a:solidFill>
@@ -5267,7 +5273,7 @@
                         </a:rPr>
                         <a:t>PPTX</a:t>
                       </a:r>
-                      <a:endParaRPr lang="en-US" sz="2200" dirty="0">
+                      <a:endParaRPr lang="en-US" sz="1800" dirty="0">
                         <a:latin typeface="Pretendard" charset="0"/>
                         <a:ea typeface="Pretendard" charset="0"/>
                         <a:cs typeface="Pretendard" charset="0"/>
@@ -5322,7 +5328,7 @@
                         <a:buNone/>
                       </a:pPr>
                       <a:r>
-                        <a:rPr lang="en-US" sz="2200" dirty="0">
+                        <a:rPr lang="en-US" sz="1800" dirty="0">
                           <a:solidFill>
                             <a:srgbClr val="111827"/>
                           </a:solidFill>
@@ -5332,7 +5338,7 @@
                         </a:rPr>
                         <a:t>95</a:t>
                       </a:r>
-                      <a:endParaRPr lang="en-US" sz="2200" dirty="0">
+                      <a:endParaRPr lang="en-US" sz="1800" dirty="0">
                         <a:latin typeface="Pretendard" charset="0"/>
                         <a:ea typeface="Pretendard" charset="0"/>
                         <a:cs typeface="Pretendard" charset="0"/>
@@ -5387,7 +5393,7 @@
                         <a:buNone/>
                       </a:pPr>
                       <a:r>
-                        <a:rPr lang="en-US" sz="2200" dirty="0">
+                        <a:rPr lang="en-US" sz="1800" dirty="0">
                           <a:solidFill>
                             <a:srgbClr val="111827"/>
                           </a:solidFill>
@@ -5397,7 +5403,7 @@
                         </a:rPr>
                         <a:t>2</a:t>
                       </a:r>
-                      <a:endParaRPr lang="en-US" sz="2200" dirty="0">
+                      <a:endParaRPr lang="en-US" sz="1800" dirty="0">
                         <a:latin typeface="Pretendard" charset="0"/>
                         <a:ea typeface="Pretendard" charset="0"/>
                         <a:cs typeface="Pretendard" charset="0"/>

--- a/docs/theme-preview/pptx/minimalism.pptx
+++ b/docs/theme-preview/pptx/minimalism.pptx
@@ -29,9 +29,10 @@
     <p:sldId id="277" r:id="rId23"/>
     <p:sldId id="278" r:id="rId24"/>
     <p:sldId id="279" r:id="rId25"/>
+    <p:sldId id="280" r:id="rId26"/>
   </p:sldIdLst>
   <p:notesMasterIdLst>
-    <p:notesMasterId r:id="rId26"/>
+    <p:notesMasterId r:id="rId27"/>
   </p:notesMasterIdLst>
   <p:sldSz cx="12191695" cy="6858000"/>
   <p:notesSz cx="6858000" cy="12191695"/>
@@ -130,7 +131,7 @@
 </p:presentation>
 </file>
 
-<file path=ppt/charts/chart5.xml><?xml version="1.0" encoding="utf-8"?>
+<file path=ppt/charts/chart3.xml><?xml version="1.0" encoding="utf-8"?>
 <c:chartSpace xmlns:c="http://schemas.openxmlformats.org/drawingml/2006/chart" xmlns:a="http://schemas.openxmlformats.org/drawingml/2006/main" xmlns:r="http://schemas.openxmlformats.org/officeDocument/2006/relationships">
   <c:date1904 val="0"/>
   <c:roundedCorners val="1"/>
@@ -473,7 +474,7 @@
 </c:chartSpace>
 </file>
 
-<file path=ppt/charts/chart6.xml><?xml version="1.0" encoding="utf-8"?>
+<file path=ppt/charts/chart4.xml><?xml version="1.0" encoding="utf-8"?>
 <c:chartSpace xmlns:c="http://schemas.openxmlformats.org/drawingml/2006/chart" xmlns:a="http://schemas.openxmlformats.org/drawingml/2006/main" xmlns:r="http://schemas.openxmlformats.org/officeDocument/2006/relationships">
   <c:date1904 val="0"/>
   <c:roundedCorners val="1"/>
@@ -2540,6 +2541,94 @@
             <a:fld id="{F7021451-1387-4CA6-816F-3879F97B5CBC}" type="slidenum">
               <a:rPr lang="en-US"/>
               <a:t>24</a:t>
+            </a:fld>
+            <a:endParaRPr lang="en-US"/>
+          </a:p>
+        </p:txBody>
+      </p:sp>
+    </p:spTree>
+    <p:extLst>
+      <p:ext uri="{BB962C8B-B14F-4D97-AF65-F5344CB8AC3E}">
+        <p14:creationId xmlns:p14="http://schemas.microsoft.com/office/powerpoint/2010/main" val="1024086991"/>
+      </p:ext>
+    </p:extLst>
+  </p:cSld>
+  <p:clrMapOvr>
+    <a:masterClrMapping/>
+  </p:clrMapOvr>
+</p:notes>
+</file>
+
+<file path=ppt/notesSlides/notesSlide25.xml><?xml version="1.0" encoding="utf-8"?>
+<p:notes xmlns:a="http://schemas.openxmlformats.org/drawingml/2006/main" xmlns:r="http://schemas.openxmlformats.org/officeDocument/2006/relationships" xmlns:p="http://schemas.openxmlformats.org/presentationml/2006/main">
+  <p:cSld>
+    <p:spTree>
+      <p:nvGrpSpPr>
+        <p:cNvPr id="1" name=""/>
+        <p:cNvGrpSpPr/>
+        <p:nvPr/>
+      </p:nvGrpSpPr>
+      <p:grpSpPr>
+        <a:xfrm>
+          <a:off x="0" y="0"/>
+          <a:ext cx="0" cy="0"/>
+          <a:chOff x="0" y="0"/>
+          <a:chExt cx="0" cy="0"/>
+        </a:xfrm>
+      </p:grpSpPr>
+      <p:sp>
+        <p:nvSpPr>
+          <p:cNvPr id="2" name="Slide Image Placeholder 1"/>
+          <p:cNvSpPr>
+            <a:spLocks noGrp="1" noRot="1" noChangeAspect="1"/>
+          </p:cNvSpPr>
+          <p:nvPr>
+            <p:ph type="sldImg"/>
+          </p:nvPr>
+        </p:nvSpPr>
+        <p:spPr/>
+      </p:sp>
+      <p:sp>
+        <p:nvSpPr>
+          <p:cNvPr id="3" name="Notes Placeholder 2"/>
+          <p:cNvSpPr>
+            <a:spLocks noGrp="1"/>
+          </p:cNvSpPr>
+          <p:nvPr>
+            <p:ph type="body" idx="1"/>
+          </p:nvPr>
+        </p:nvSpPr>
+        <p:spPr/>
+        <p:txBody>
+          <a:bodyPr/>
+          <a:lstStyle/>
+          <a:p>
+            <a:r>
+              <a:rPr lang="en-US" dirty="0"/>
+              <a:t/>
+            </a:r>
+            <a:endParaRPr lang="en-US" dirty="0"/>
+          </a:p>
+        </p:txBody>
+      </p:sp>
+      <p:sp>
+        <p:nvSpPr>
+          <p:cNvPr id="4" name="Slide Number Placeholder 3"/>
+          <p:cNvSpPr>
+            <a:spLocks noGrp="1"/>
+          </p:cNvSpPr>
+          <p:nvPr>
+            <p:ph type="sldNum" sz="quarter" idx="10"/>
+          </p:nvPr>
+        </p:nvSpPr>
+        <p:spPr/>
+        <p:txBody>
+          <a:bodyPr/>
+          <a:lstStyle/>
+          <a:p>
+            <a:fld id="{F7021451-1387-4CA6-816F-3879F97B5CBC}" type="slidenum">
+              <a:rPr lang="en-US"/>
+              <a:t>25</a:t>
             </a:fld>
             <a:endParaRPr lang="en-US"/>
           </a:p>
@@ -3681,7 +3770,61 @@
       </p:sp>
       <p:sp>
         <p:nvSpPr>
-          <p:cNvPr id="4" name="Text 2"/>
+          <p:cNvPr id="4" name="Shape 2"/>
+          <p:cNvSpPr/>
+          <p:nvPr/>
+        </p:nvSpPr>
+        <p:spPr>
+          <a:xfrm>
+            <a:off x="822960" y="1554480"/>
+            <a:ext cx="4937760" cy="73152"/>
+          </a:xfrm>
+          <a:prstGeom prst="rect">
+            <a:avLst/>
+          </a:prstGeom>
+          <a:solidFill>
+            <a:srgbClr val="111827"/>
+          </a:solidFill>
+          <a:ln w="12700">
+            <a:solidFill>
+              <a:srgbClr val="111827">
+                <a:alpha val="0"/>
+              </a:srgbClr>
+            </a:solidFill>
+            <a:prstDash val="solid"/>
+          </a:ln>
+        </p:spPr>
+      </p:sp>
+      <p:sp>
+        <p:nvSpPr>
+          <p:cNvPr id="5" name="Shape 3"/>
+          <p:cNvSpPr/>
+          <p:nvPr/>
+        </p:nvSpPr>
+        <p:spPr>
+          <a:xfrm>
+            <a:off x="6400800" y="1554480"/>
+            <a:ext cx="4937760" cy="73152"/>
+          </a:xfrm>
+          <a:prstGeom prst="rect">
+            <a:avLst/>
+          </a:prstGeom>
+          <a:solidFill>
+            <a:srgbClr val="111827"/>
+          </a:solidFill>
+          <a:ln w="12700">
+            <a:solidFill>
+              <a:srgbClr val="111827">
+                <a:alpha val="0"/>
+              </a:srgbClr>
+            </a:solidFill>
+            <a:prstDash val="solid"/>
+          </a:ln>
+        </p:spPr>
+      </p:sp>
+      <p:sp>
+        <p:nvSpPr>
+          <p:cNvPr id="6" name="Text 4"/>
           <p:cNvSpPr txBox="1"/>
           <p:nvPr/>
         </p:nvSpPr>
@@ -3715,7 +3858,7 @@
                 <a:ea typeface="Pretendard" pitchFamily="34" charset="-122"/>
                 <a:cs typeface="Pretendard" pitchFamily="34" charset="-120"/>
               </a:rPr>
-              <a:t>Pipeline Diagram</a:t>
+              <a:t>Semantic Blocks (Cont. 2/2)</a:t>
             </a:r>
             <a:endParaRPr lang="en-US" sz="3400" dirty="0"/>
           </a:p>
@@ -3723,222 +3866,14 @@
       </p:sp>
       <p:sp>
         <p:nvSpPr>
-          <p:cNvPr id="5" name="Shape 3"/>
-          <p:cNvSpPr/>
-          <p:nvPr/>
-        </p:nvSpPr>
-        <p:spPr>
-          <a:xfrm>
-            <a:off x="4002024" y="3095244"/>
-            <a:ext cx="457200" cy="0"/>
-          </a:xfrm>
-          <a:prstGeom prst="line">
-            <a:avLst/>
-          </a:prstGeom>
-          <a:noFill/>
-          <a:ln w="12700">
-            <a:solidFill>
-              <a:srgbClr val="111827"/>
-            </a:solidFill>
-            <a:prstDash val="solid"/>
-            <a:tailEnd type="triangle"/>
-          </a:ln>
-        </p:spPr>
-      </p:sp>
-      <p:sp>
-        <p:nvSpPr>
-          <p:cNvPr id="6" name="Shape 4"/>
-          <p:cNvSpPr/>
-          <p:nvPr/>
-        </p:nvSpPr>
-        <p:spPr>
-          <a:xfrm>
-            <a:off x="7748016" y="3095244"/>
-            <a:ext cx="457200" cy="0"/>
-          </a:xfrm>
-          <a:prstGeom prst="line">
-            <a:avLst/>
-          </a:prstGeom>
-          <a:noFill/>
-          <a:ln w="12700">
-            <a:solidFill>
-              <a:srgbClr val="111827"/>
-            </a:solidFill>
-            <a:prstDash val="solid"/>
-            <a:tailEnd type="triangle"/>
-          </a:ln>
-        </p:spPr>
-      </p:sp>
-      <p:sp>
-        <p:nvSpPr>
-          <p:cNvPr id="7" name="Shape 5"/>
-          <p:cNvSpPr/>
-          <p:nvPr/>
-        </p:nvSpPr>
-        <p:spPr>
-          <a:xfrm>
-            <a:off x="9849612" y="3627791"/>
-            <a:ext cx="0" cy="416235"/>
-          </a:xfrm>
-          <a:prstGeom prst="line">
-            <a:avLst/>
-          </a:prstGeom>
-          <a:noFill/>
-          <a:ln w="12700">
-            <a:solidFill>
-              <a:srgbClr val="111827"/>
-            </a:solidFill>
-            <a:prstDash val="solid"/>
-            <a:tailEnd type="triangle"/>
-          </a:ln>
-        </p:spPr>
-      </p:sp>
-      <p:sp>
-        <p:nvSpPr>
-          <p:cNvPr id="8" name="Shape 6"/>
-          <p:cNvSpPr/>
-          <p:nvPr/>
-        </p:nvSpPr>
-        <p:spPr>
-          <a:xfrm>
-            <a:off x="7748016" y="4576572"/>
-            <a:ext cx="457200" cy="0"/>
-          </a:xfrm>
-          <a:prstGeom prst="line">
-            <a:avLst/>
-          </a:prstGeom>
-          <a:noFill/>
-          <a:ln w="12700">
-            <a:solidFill>
-              <a:srgbClr val="111827"/>
-            </a:solidFill>
-            <a:prstDash val="solid"/>
-            <a:headEnd type="triangle"/>
-          </a:ln>
-        </p:spPr>
-      </p:sp>
-      <p:sp>
-        <p:nvSpPr>
-          <p:cNvPr id="9" name="Shape 7"/>
-          <p:cNvSpPr/>
-          <p:nvPr/>
-        </p:nvSpPr>
-        <p:spPr>
-          <a:xfrm>
-            <a:off x="4002024" y="4576572"/>
-            <a:ext cx="457200" cy="0"/>
-          </a:xfrm>
-          <a:prstGeom prst="line">
-            <a:avLst/>
-          </a:prstGeom>
-          <a:noFill/>
-          <a:ln w="12700">
-            <a:solidFill>
-              <a:srgbClr val="111827"/>
-            </a:solidFill>
-            <a:prstDash val="solid"/>
-            <a:headEnd type="triangle"/>
-          </a:ln>
-        </p:spPr>
-      </p:sp>
-      <p:sp>
-        <p:nvSpPr>
-          <p:cNvPr id="10" name="Shape 8"/>
-          <p:cNvSpPr/>
-          <p:nvPr/>
-        </p:nvSpPr>
-        <p:spPr>
-          <a:xfrm>
-            <a:off x="640080" y="2510028"/>
-            <a:ext cx="3435096" cy="1170432"/>
-          </a:xfrm>
-          <a:prstGeom prst="roundRect">
-            <a:avLst>
-              <a:gd name="adj" fmla="val 4688"/>
-            </a:avLst>
-          </a:prstGeom>
-          <a:solidFill>
-            <a:srgbClr val="FFFFFF"/>
-          </a:solidFill>
-          <a:ln w="12700">
-            <a:solidFill>
-              <a:srgbClr val="111827"/>
-            </a:solidFill>
-            <a:prstDash val="solid"/>
-          </a:ln>
-          <a:effectLst>
-            <a:outerShdw sx="100000" sy="100000" kx="0" ky="0" algn="bl" rotWithShape="0" blurRad="12700" dist="50800" dir="2700000">
-              <a:srgbClr val="000000">
-                <a:alpha val="12000"/>
-              </a:srgbClr>
-            </a:outerShdw>
-          </a:effectLst>
-        </p:spPr>
-      </p:sp>
-      <p:sp>
-        <p:nvSpPr>
-          <p:cNvPr id="11" name="Shape 9"/>
-          <p:cNvSpPr/>
-          <p:nvPr/>
-        </p:nvSpPr>
-        <p:spPr>
-          <a:xfrm>
-            <a:off x="640080" y="2510028"/>
-            <a:ext cx="3435096" cy="109728"/>
-          </a:xfrm>
-          <a:prstGeom prst="rect">
-            <a:avLst/>
-          </a:prstGeom>
-          <a:solidFill>
-            <a:srgbClr val="111827"/>
-          </a:solidFill>
-          <a:ln w="12700">
-            <a:solidFill>
-              <a:srgbClr val="111827">
-                <a:alpha val="0"/>
-              </a:srgbClr>
-            </a:solidFill>
-            <a:prstDash val="solid"/>
-          </a:ln>
-        </p:spPr>
-      </p:sp>
-      <p:sp>
-        <p:nvSpPr>
-          <p:cNvPr id="12" name="Shape 10"/>
-          <p:cNvSpPr/>
-          <p:nvPr/>
-        </p:nvSpPr>
-        <p:spPr>
-          <a:xfrm>
-            <a:off x="804672" y="2907975"/>
-            <a:ext cx="374538" cy="374538"/>
-          </a:xfrm>
-          <a:prstGeom prst="ellipse">
-            <a:avLst/>
-          </a:prstGeom>
-          <a:solidFill>
-            <a:srgbClr val="111827"/>
-          </a:solidFill>
-          <a:ln w="12700">
-            <a:solidFill>
-              <a:srgbClr val="111827">
-                <a:alpha val="0"/>
-              </a:srgbClr>
-            </a:solidFill>
-            <a:prstDash val="solid"/>
-          </a:ln>
-        </p:spPr>
-      </p:sp>
-      <p:sp>
-        <p:nvSpPr>
-          <p:cNvPr id="13" name="Text 11"/>
+          <p:cNvPr id="7" name="Text 5"/>
           <p:cNvSpPr txBox="1"/>
           <p:nvPr/>
         </p:nvSpPr>
         <p:spPr>
           <a:xfrm>
-            <a:off x="804672" y="2907975"/>
-            <a:ext cx="374538" cy="374538"/>
+            <a:off x="896112" y="1664208"/>
+            <a:ext cx="4791456" cy="4169664"/>
           </a:xfrm>
           <a:prstGeom prst="rect">
             <a:avLst/>
@@ -3947,63 +3882,17 @@
           <a:ln/>
         </p:spPr>
         <p:txBody>
-          <a:bodyPr wrap="square" lIns="0" tIns="0" rIns="0" bIns="0" rtlCol="0" anchor="ctr">
-            <a:normAutofit/>
-          </a:bodyPr>
+          <a:bodyPr wrap="square" lIns="0" tIns="25400" rIns="25400" bIns="0" rtlCol="0" anchor="t"/>
           <a:lstStyle/>
           <a:p>
-            <a:pPr algn="ctr" indent="0" marL="0">
+            <a:pPr algn="l" indent="0" marL="0">
               <a:lnSpc>
                 <a:spcPct val="120000"/>
               </a:lnSpc>
               <a:buNone/>
             </a:pPr>
             <a:r>
-              <a:rPr lang="en-US" sz="1500" b="1" dirty="0">
-                <a:solidFill>
-                  <a:srgbClr val="FFFFFF"/>
-                </a:solidFill>
-                <a:latin typeface="Pretendard" pitchFamily="34" charset="0"/>
-                <a:ea typeface="Pretendard" pitchFamily="34" charset="-122"/>
-                <a:cs typeface="Pretendard" pitchFamily="34" charset="-120"/>
-              </a:rPr>
-              <a:t>1</a:t>
-            </a:r>
-            <a:endParaRPr lang="en-US" sz="1500" dirty="0"/>
-          </a:p>
-        </p:txBody>
-      </p:sp>
-      <p:sp>
-        <p:nvSpPr>
-          <p:cNvPr id="14" name="Text 12"/>
-          <p:cNvSpPr txBox="1"/>
-          <p:nvPr/>
-        </p:nvSpPr>
-        <p:spPr>
-          <a:xfrm>
-            <a:off x="1325514" y="2638044"/>
-            <a:ext cx="2585070" cy="914400"/>
-          </a:xfrm>
-          <a:prstGeom prst="rect">
-            <a:avLst/>
-          </a:prstGeom>
-          <a:noFill/>
-          <a:ln/>
-        </p:spPr>
-        <p:txBody>
-          <a:bodyPr wrap="square" lIns="0" tIns="25400" rIns="25400" bIns="0" rtlCol="0" anchor="ctr">
-            <a:normAutofit/>
-          </a:bodyPr>
-          <a:lstStyle/>
-          <a:p>
-            <a:pPr algn="l" indent="0" marL="0">
-              <a:lnSpc>
-                <a:spcPct val="92000"/>
-              </a:lnSpc>
-              <a:buNone/>
-            </a:pPr>
-            <a:r>
-              <a:rPr lang="en-US" sz="1600" dirty="0">
+              <a:rPr lang="en-US" sz="2200" b="1" dirty="0">
                 <a:solidFill>
                   <a:srgbClr val="111827"/>
                 </a:solidFill>
@@ -4011,175 +3900,16 @@
                 <a:ea typeface="Pretendard" pitchFamily="34" charset="-122"/>
                 <a:cs typeface="Pretendard" pitchFamily="34" charset="-120"/>
               </a:rPr>
-              <a:t>Markdown source</a:t>
+              <a:t>- Constraint:</a:t>
             </a:r>
-            <a:endParaRPr lang="en-US" sz="1600" dirty="0"/>
-          </a:p>
-        </p:txBody>
-      </p:sp>
-      <p:sp>
-        <p:nvSpPr>
-          <p:cNvPr id="15" name="Shape 13"/>
-          <p:cNvSpPr/>
-          <p:nvPr/>
-        </p:nvSpPr>
-        <p:spPr>
-          <a:xfrm>
-            <a:off x="4386072" y="2510028"/>
-            <a:ext cx="3435096" cy="1170432"/>
-          </a:xfrm>
-          <a:prstGeom prst="roundRect">
-            <a:avLst>
-              <a:gd name="adj" fmla="val 4688"/>
-            </a:avLst>
-          </a:prstGeom>
-          <a:solidFill>
-            <a:srgbClr val="FFFFFF"/>
-          </a:solidFill>
-          <a:ln w="12700">
-            <a:solidFill>
-              <a:srgbClr val="111827"/>
-            </a:solidFill>
-            <a:prstDash val="solid"/>
-          </a:ln>
-          <a:effectLst>
-            <a:outerShdw sx="100000" sy="100000" kx="0" ky="0" algn="bl" rotWithShape="0" blurRad="12700" dist="50800" dir="2700000">
-              <a:srgbClr val="000000">
-                <a:alpha val="12000"/>
-              </a:srgbClr>
-            </a:outerShdw>
-          </a:effectLst>
-        </p:spPr>
-      </p:sp>
-      <p:sp>
-        <p:nvSpPr>
-          <p:cNvPr id="16" name="Shape 14"/>
-          <p:cNvSpPr/>
-          <p:nvPr/>
-        </p:nvSpPr>
-        <p:spPr>
-          <a:xfrm>
-            <a:off x="4386072" y="2510028"/>
-            <a:ext cx="3435096" cy="109728"/>
-          </a:xfrm>
-          <a:prstGeom prst="rect">
-            <a:avLst/>
-          </a:prstGeom>
-          <a:solidFill>
-            <a:srgbClr val="111827"/>
-          </a:solidFill>
-          <a:ln w="12700">
-            <a:solidFill>
-              <a:srgbClr val="111827">
-                <a:alpha val="0"/>
-              </a:srgbClr>
-            </a:solidFill>
-            <a:prstDash val="solid"/>
-          </a:ln>
-        </p:spPr>
-      </p:sp>
-      <p:sp>
-        <p:nvSpPr>
-          <p:cNvPr id="17" name="Shape 15"/>
-          <p:cNvSpPr/>
-          <p:nvPr/>
-        </p:nvSpPr>
-        <p:spPr>
-          <a:xfrm>
-            <a:off x="4550664" y="2907975"/>
-            <a:ext cx="374538" cy="374538"/>
-          </a:xfrm>
-          <a:prstGeom prst="ellipse">
-            <a:avLst/>
-          </a:prstGeom>
-          <a:solidFill>
-            <a:srgbClr val="111827"/>
-          </a:solidFill>
-          <a:ln w="12700">
-            <a:solidFill>
-              <a:srgbClr val="111827">
-                <a:alpha val="0"/>
-              </a:srgbClr>
-            </a:solidFill>
-            <a:prstDash val="solid"/>
-          </a:ln>
-        </p:spPr>
-      </p:sp>
-      <p:sp>
-        <p:nvSpPr>
-          <p:cNvPr id="18" name="Text 16"/>
-          <p:cNvSpPr txBox="1"/>
-          <p:nvPr/>
-        </p:nvSpPr>
-        <p:spPr>
-          <a:xfrm>
-            <a:off x="4550664" y="2907975"/>
-            <a:ext cx="374538" cy="374538"/>
-          </a:xfrm>
-          <a:prstGeom prst="rect">
-            <a:avLst/>
-          </a:prstGeom>
-          <a:noFill/>
-          <a:ln/>
-        </p:spPr>
-        <p:txBody>
-          <a:bodyPr wrap="square" lIns="0" tIns="0" rIns="0" bIns="0" rtlCol="0" anchor="ctr">
-            <a:normAutofit/>
-          </a:bodyPr>
-          <a:lstStyle/>
-          <a:p>
-            <a:pPr algn="ctr" indent="0" marL="0">
+            <a:pPr algn="l" indent="0" marL="0">
               <a:lnSpc>
                 <a:spcPct val="120000"/>
               </a:lnSpc>
               <a:buNone/>
             </a:pPr>
             <a:r>
-              <a:rPr lang="en-US" sz="1500" b="1" dirty="0">
-                <a:solidFill>
-                  <a:srgbClr val="FFFFFF"/>
-                </a:solidFill>
-                <a:latin typeface="Pretendard" pitchFamily="34" charset="0"/>
-                <a:ea typeface="Pretendard" pitchFamily="34" charset="-122"/>
-                <a:cs typeface="Pretendard" pitchFamily="34" charset="-120"/>
-              </a:rPr>
-              <a:t>2</a:t>
-            </a:r>
-            <a:endParaRPr lang="en-US" sz="1500" dirty="0"/>
-          </a:p>
-        </p:txBody>
-      </p:sp>
-      <p:sp>
-        <p:nvSpPr>
-          <p:cNvPr id="19" name="Text 17"/>
-          <p:cNvSpPr txBox="1"/>
-          <p:nvPr/>
-        </p:nvSpPr>
-        <p:spPr>
-          <a:xfrm>
-            <a:off x="5071506" y="2638044"/>
-            <a:ext cx="2585070" cy="914400"/>
-          </a:xfrm>
-          <a:prstGeom prst="rect">
-            <a:avLst/>
-          </a:prstGeom>
-          <a:noFill/>
-          <a:ln/>
-        </p:spPr>
-        <p:txBody>
-          <a:bodyPr wrap="square" lIns="0" tIns="25400" rIns="25400" bIns="0" rtlCol="0" anchor="ctr">
-            <a:normAutofit/>
-          </a:bodyPr>
-          <a:lstStyle/>
-          <a:p>
-            <a:pPr algn="l" indent="0" marL="0">
-              <a:lnSpc>
-                <a:spcPct val="92000"/>
-              </a:lnSpc>
-              <a:buNone/>
-            </a:pPr>
-            <a:r>
-              <a:rPr lang="en-US" sz="1600" dirty="0">
+              <a:rPr lang="en-US" sz="2200" dirty="0">
                 <a:solidFill>
                   <a:srgbClr val="111827"/>
                 </a:solidFill>
@@ -4187,110 +3917,22 @@
                 <a:ea typeface="Pretendard" pitchFamily="34" charset="-122"/>
                 <a:cs typeface="Pretendard" pitchFamily="34" charset="-120"/>
               </a:rPr>
-              <a:t>Parse blocks</a:t>
+              <a:t>  Indented description lines stay under the bold label.</a:t>
             </a:r>
-            <a:endParaRPr lang="en-US" sz="1600" dirty="0"/>
+            <a:endParaRPr lang="en-US" sz="2200" dirty="0"/>
           </a:p>
         </p:txBody>
       </p:sp>
       <p:sp>
         <p:nvSpPr>
-          <p:cNvPr id="20" name="Shape 18"/>
-          <p:cNvSpPr/>
-          <p:nvPr/>
-        </p:nvSpPr>
-        <p:spPr>
-          <a:xfrm>
-            <a:off x="8132064" y="2510028"/>
-            <a:ext cx="3435096" cy="1170432"/>
-          </a:xfrm>
-          <a:prstGeom prst="roundRect">
-            <a:avLst>
-              <a:gd name="adj" fmla="val 4688"/>
-            </a:avLst>
-          </a:prstGeom>
-          <a:solidFill>
-            <a:srgbClr val="FFFFFF"/>
-          </a:solidFill>
-          <a:ln w="12700">
-            <a:solidFill>
-              <a:srgbClr val="111827"/>
-            </a:solidFill>
-            <a:prstDash val="solid"/>
-          </a:ln>
-          <a:effectLst>
-            <a:outerShdw sx="100000" sy="100000" kx="0" ky="0" algn="bl" rotWithShape="0" blurRad="12700" dist="50800" dir="2700000">
-              <a:srgbClr val="000000">
-                <a:alpha val="12000"/>
-              </a:srgbClr>
-            </a:outerShdw>
-          </a:effectLst>
-        </p:spPr>
-      </p:sp>
-      <p:sp>
-        <p:nvSpPr>
-          <p:cNvPr id="21" name="Shape 19"/>
-          <p:cNvSpPr/>
-          <p:nvPr/>
-        </p:nvSpPr>
-        <p:spPr>
-          <a:xfrm>
-            <a:off x="8132064" y="2510028"/>
-            <a:ext cx="3435096" cy="109728"/>
-          </a:xfrm>
-          <a:prstGeom prst="rect">
-            <a:avLst/>
-          </a:prstGeom>
-          <a:solidFill>
-            <a:srgbClr val="111827"/>
-          </a:solidFill>
-          <a:ln w="12700">
-            <a:solidFill>
-              <a:srgbClr val="111827">
-                <a:alpha val="0"/>
-              </a:srgbClr>
-            </a:solidFill>
-            <a:prstDash val="solid"/>
-          </a:ln>
-        </p:spPr>
-      </p:sp>
-      <p:sp>
-        <p:nvSpPr>
-          <p:cNvPr id="22" name="Shape 20"/>
-          <p:cNvSpPr/>
-          <p:nvPr/>
-        </p:nvSpPr>
-        <p:spPr>
-          <a:xfrm>
-            <a:off x="8296656" y="2907975"/>
-            <a:ext cx="374538" cy="374538"/>
-          </a:xfrm>
-          <a:prstGeom prst="ellipse">
-            <a:avLst/>
-          </a:prstGeom>
-          <a:solidFill>
-            <a:srgbClr val="111827"/>
-          </a:solidFill>
-          <a:ln w="12700">
-            <a:solidFill>
-              <a:srgbClr val="111827">
-                <a:alpha val="0"/>
-              </a:srgbClr>
-            </a:solidFill>
-            <a:prstDash val="solid"/>
-          </a:ln>
-        </p:spPr>
-      </p:sp>
-      <p:sp>
-        <p:nvSpPr>
-          <p:cNvPr id="23" name="Text 21"/>
+          <p:cNvPr id="8" name="Text 6"/>
           <p:cNvSpPr txBox="1"/>
           <p:nvPr/>
         </p:nvSpPr>
         <p:spPr>
           <a:xfrm>
-            <a:off x="8296656" y="2907975"/>
-            <a:ext cx="374538" cy="374538"/>
+            <a:off x="6473952" y="1664208"/>
+            <a:ext cx="4791456" cy="4169664"/>
           </a:xfrm>
           <a:prstGeom prst="rect">
             <a:avLst/>
@@ -4299,63 +3941,17 @@
           <a:ln/>
         </p:spPr>
         <p:txBody>
-          <a:bodyPr wrap="square" lIns="0" tIns="0" rIns="0" bIns="0" rtlCol="0" anchor="ctr">
-            <a:normAutofit/>
-          </a:bodyPr>
+          <a:bodyPr wrap="square" lIns="0" tIns="25400" rIns="25400" bIns="0" rtlCol="0" anchor="t"/>
           <a:lstStyle/>
           <a:p>
-            <a:pPr algn="ctr" indent="0" marL="0">
+            <a:pPr algn="l" indent="0" marL="0">
               <a:lnSpc>
                 <a:spcPct val="120000"/>
               </a:lnSpc>
               <a:buNone/>
             </a:pPr>
             <a:r>
-              <a:rPr lang="en-US" sz="1500" b="1" dirty="0">
-                <a:solidFill>
-                  <a:srgbClr val="FFFFFF"/>
-                </a:solidFill>
-                <a:latin typeface="Pretendard" pitchFamily="34" charset="0"/>
-                <a:ea typeface="Pretendard" pitchFamily="34" charset="-122"/>
-                <a:cs typeface="Pretendard" pitchFamily="34" charset="-120"/>
-              </a:rPr>
-              <a:t>3</a:t>
-            </a:r>
-            <a:endParaRPr lang="en-US" sz="1500" dirty="0"/>
-          </a:p>
-        </p:txBody>
-      </p:sp>
-      <p:sp>
-        <p:nvSpPr>
-          <p:cNvPr id="24" name="Text 22"/>
-          <p:cNvSpPr txBox="1"/>
-          <p:nvPr/>
-        </p:nvSpPr>
-        <p:spPr>
-          <a:xfrm>
-            <a:off x="8817498" y="2638044"/>
-            <a:ext cx="2585070" cy="914400"/>
-          </a:xfrm>
-          <a:prstGeom prst="rect">
-            <a:avLst/>
-          </a:prstGeom>
-          <a:noFill/>
-          <a:ln/>
-        </p:spPr>
-        <p:txBody>
-          <a:bodyPr wrap="square" lIns="0" tIns="25400" rIns="25400" bIns="0" rtlCol="0" anchor="ctr">
-            <a:normAutofit/>
-          </a:bodyPr>
-          <a:lstStyle/>
-          <a:p>
-            <a:pPr algn="l" indent="0" marL="0">
-              <a:lnSpc>
-                <a:spcPct val="92000"/>
-              </a:lnSpc>
-              <a:buNone/>
-            </a:pPr>
-            <a:r>
-              <a:rPr lang="en-US" sz="1600" dirty="0">
+              <a:rPr lang="en-US" sz="2200" b="1" dirty="0">
                 <a:solidFill>
                   <a:srgbClr val="111827"/>
                 </a:solidFill>
@@ -4363,175 +3959,16 @@
                 <a:ea typeface="Pretendard" pitchFamily="34" charset="-122"/>
                 <a:cs typeface="Pretendard" pitchFamily="34" charset="-120"/>
               </a:rPr>
-              <a:t>Split slides</a:t>
+              <a:t>- Emphasis</a:t>
             </a:r>
-            <a:endParaRPr lang="en-US" sz="1600" dirty="0"/>
-          </a:p>
-        </p:txBody>
-      </p:sp>
-      <p:sp>
-        <p:nvSpPr>
-          <p:cNvPr id="25" name="Shape 23"/>
-          <p:cNvSpPr/>
-          <p:nvPr/>
-        </p:nvSpPr>
-        <p:spPr>
-          <a:xfrm>
-            <a:off x="8132064" y="3991356"/>
-            <a:ext cx="3435096" cy="1170432"/>
-          </a:xfrm>
-          <a:prstGeom prst="roundRect">
-            <a:avLst>
-              <a:gd name="adj" fmla="val 4688"/>
-            </a:avLst>
-          </a:prstGeom>
-          <a:solidFill>
-            <a:srgbClr val="FFFFFF"/>
-          </a:solidFill>
-          <a:ln w="12700">
-            <a:solidFill>
-              <a:srgbClr val="111827"/>
-            </a:solidFill>
-            <a:prstDash val="solid"/>
-          </a:ln>
-          <a:effectLst>
-            <a:outerShdw sx="100000" sy="100000" kx="0" ky="0" algn="bl" rotWithShape="0" blurRad="12700" dist="50800" dir="2700000">
-              <a:srgbClr val="000000">
-                <a:alpha val="12000"/>
-              </a:srgbClr>
-            </a:outerShdw>
-          </a:effectLst>
-        </p:spPr>
-      </p:sp>
-      <p:sp>
-        <p:nvSpPr>
-          <p:cNvPr id="26" name="Shape 24"/>
-          <p:cNvSpPr/>
-          <p:nvPr/>
-        </p:nvSpPr>
-        <p:spPr>
-          <a:xfrm>
-            <a:off x="8132064" y="3991356"/>
-            <a:ext cx="3435096" cy="109728"/>
-          </a:xfrm>
-          <a:prstGeom prst="rect">
-            <a:avLst/>
-          </a:prstGeom>
-          <a:solidFill>
-            <a:srgbClr val="111827"/>
-          </a:solidFill>
-          <a:ln w="12700">
-            <a:solidFill>
-              <a:srgbClr val="111827">
-                <a:alpha val="0"/>
-              </a:srgbClr>
-            </a:solidFill>
-            <a:prstDash val="solid"/>
-          </a:ln>
-        </p:spPr>
-      </p:sp>
-      <p:sp>
-        <p:nvSpPr>
-          <p:cNvPr id="27" name="Shape 25"/>
-          <p:cNvSpPr/>
-          <p:nvPr/>
-        </p:nvSpPr>
-        <p:spPr>
-          <a:xfrm>
-            <a:off x="8296656" y="4389303"/>
-            <a:ext cx="374538" cy="374538"/>
-          </a:xfrm>
-          <a:prstGeom prst="ellipse">
-            <a:avLst/>
-          </a:prstGeom>
-          <a:solidFill>
-            <a:srgbClr val="111827"/>
-          </a:solidFill>
-          <a:ln w="12700">
-            <a:solidFill>
-              <a:srgbClr val="111827">
-                <a:alpha val="0"/>
-              </a:srgbClr>
-            </a:solidFill>
-            <a:prstDash val="solid"/>
-          </a:ln>
-        </p:spPr>
-      </p:sp>
-      <p:sp>
-        <p:nvSpPr>
-          <p:cNvPr id="28" name="Text 26"/>
-          <p:cNvSpPr txBox="1"/>
-          <p:nvPr/>
-        </p:nvSpPr>
-        <p:spPr>
-          <a:xfrm>
-            <a:off x="8296656" y="4389303"/>
-            <a:ext cx="374538" cy="374538"/>
-          </a:xfrm>
-          <a:prstGeom prst="rect">
-            <a:avLst/>
-          </a:prstGeom>
-          <a:noFill/>
-          <a:ln/>
-        </p:spPr>
-        <p:txBody>
-          <a:bodyPr wrap="square" lIns="0" tIns="0" rIns="0" bIns="0" rtlCol="0" anchor="ctr">
-            <a:normAutofit/>
-          </a:bodyPr>
-          <a:lstStyle/>
-          <a:p>
-            <a:pPr algn="ctr" indent="0" marL="0">
+            <a:pPr algn="l" indent="0" marL="0">
               <a:lnSpc>
                 <a:spcPct val="120000"/>
               </a:lnSpc>
               <a:buNone/>
             </a:pPr>
             <a:r>
-              <a:rPr lang="en-US" sz="1500" b="1" dirty="0">
-                <a:solidFill>
-                  <a:srgbClr val="FFFFFF"/>
-                </a:solidFill>
-                <a:latin typeface="Pretendard" pitchFamily="34" charset="0"/>
-                <a:ea typeface="Pretendard" pitchFamily="34" charset="-122"/>
-                <a:cs typeface="Pretendard" pitchFamily="34" charset="-120"/>
-              </a:rPr>
-              <a:t>4</a:t>
-            </a:r>
-            <a:endParaRPr lang="en-US" sz="1500" dirty="0"/>
-          </a:p>
-        </p:txBody>
-      </p:sp>
-      <p:sp>
-        <p:nvSpPr>
-          <p:cNvPr id="29" name="Text 27"/>
-          <p:cNvSpPr txBox="1"/>
-          <p:nvPr/>
-        </p:nvSpPr>
-        <p:spPr>
-          <a:xfrm>
-            <a:off x="8817498" y="4119372"/>
-            <a:ext cx="2585070" cy="914400"/>
-          </a:xfrm>
-          <a:prstGeom prst="rect">
-            <a:avLst/>
-          </a:prstGeom>
-          <a:noFill/>
-          <a:ln/>
-        </p:spPr>
-        <p:txBody>
-          <a:bodyPr wrap="square" lIns="0" tIns="25400" rIns="25400" bIns="0" rtlCol="0" anchor="ctr">
-            <a:normAutofit/>
-          </a:bodyPr>
-          <a:lstStyle/>
-          <a:p>
-            <a:pPr algn="l" indent="0" marL="0">
-              <a:lnSpc>
-                <a:spcPct val="92000"/>
-              </a:lnSpc>
-              <a:buNone/>
-            </a:pPr>
-            <a:r>
-              <a:rPr lang="en-US" sz="1600" dirty="0">
+              <a:rPr lang="en-US" sz="2200" dirty="0">
                 <a:solidFill>
                   <a:srgbClr val="111827"/>
                 </a:solidFill>
@@ -4539,361 +3976,9 @@
                 <a:ea typeface="Pretendard" pitchFamily="34" charset="-122"/>
                 <a:cs typeface="Pretendard" pitchFamily="34" charset="-120"/>
               </a:rPr>
-              <a:t>Layout objects</a:t>
+              <a:t>  bold and italic remain editable.</a:t>
             </a:r>
-            <a:endParaRPr lang="en-US" sz="1600" dirty="0"/>
-          </a:p>
-        </p:txBody>
-      </p:sp>
-      <p:sp>
-        <p:nvSpPr>
-          <p:cNvPr id="30" name="Shape 28"/>
-          <p:cNvSpPr/>
-          <p:nvPr/>
-        </p:nvSpPr>
-        <p:spPr>
-          <a:xfrm>
-            <a:off x="4386072" y="3991356"/>
-            <a:ext cx="3435096" cy="1170432"/>
-          </a:xfrm>
-          <a:prstGeom prst="roundRect">
-            <a:avLst>
-              <a:gd name="adj" fmla="val 4688"/>
-            </a:avLst>
-          </a:prstGeom>
-          <a:solidFill>
-            <a:srgbClr val="FFFFFF"/>
-          </a:solidFill>
-          <a:ln w="12700">
-            <a:solidFill>
-              <a:srgbClr val="111827"/>
-            </a:solidFill>
-            <a:prstDash val="solid"/>
-          </a:ln>
-          <a:effectLst>
-            <a:outerShdw sx="100000" sy="100000" kx="0" ky="0" algn="bl" rotWithShape="0" blurRad="12700" dist="50800" dir="2700000">
-              <a:srgbClr val="000000">
-                <a:alpha val="12000"/>
-              </a:srgbClr>
-            </a:outerShdw>
-          </a:effectLst>
-        </p:spPr>
-      </p:sp>
-      <p:sp>
-        <p:nvSpPr>
-          <p:cNvPr id="31" name="Shape 29"/>
-          <p:cNvSpPr/>
-          <p:nvPr/>
-        </p:nvSpPr>
-        <p:spPr>
-          <a:xfrm>
-            <a:off x="4386072" y="3991356"/>
-            <a:ext cx="3435096" cy="109728"/>
-          </a:xfrm>
-          <a:prstGeom prst="rect">
-            <a:avLst/>
-          </a:prstGeom>
-          <a:solidFill>
-            <a:srgbClr val="111827"/>
-          </a:solidFill>
-          <a:ln w="12700">
-            <a:solidFill>
-              <a:srgbClr val="111827">
-                <a:alpha val="0"/>
-              </a:srgbClr>
-            </a:solidFill>
-            <a:prstDash val="solid"/>
-          </a:ln>
-        </p:spPr>
-      </p:sp>
-      <p:sp>
-        <p:nvSpPr>
-          <p:cNvPr id="32" name="Shape 30"/>
-          <p:cNvSpPr/>
-          <p:nvPr/>
-        </p:nvSpPr>
-        <p:spPr>
-          <a:xfrm>
-            <a:off x="4550664" y="4389303"/>
-            <a:ext cx="374538" cy="374538"/>
-          </a:xfrm>
-          <a:prstGeom prst="ellipse">
-            <a:avLst/>
-          </a:prstGeom>
-          <a:solidFill>
-            <a:srgbClr val="111827"/>
-          </a:solidFill>
-          <a:ln w="12700">
-            <a:solidFill>
-              <a:srgbClr val="111827">
-                <a:alpha val="0"/>
-              </a:srgbClr>
-            </a:solidFill>
-            <a:prstDash val="solid"/>
-          </a:ln>
-        </p:spPr>
-      </p:sp>
-      <p:sp>
-        <p:nvSpPr>
-          <p:cNvPr id="33" name="Text 31"/>
-          <p:cNvSpPr txBox="1"/>
-          <p:nvPr/>
-        </p:nvSpPr>
-        <p:spPr>
-          <a:xfrm>
-            <a:off x="4550664" y="4389303"/>
-            <a:ext cx="374538" cy="374538"/>
-          </a:xfrm>
-          <a:prstGeom prst="rect">
-            <a:avLst/>
-          </a:prstGeom>
-          <a:noFill/>
-          <a:ln/>
-        </p:spPr>
-        <p:txBody>
-          <a:bodyPr wrap="square" lIns="0" tIns="0" rIns="0" bIns="0" rtlCol="0" anchor="ctr">
-            <a:normAutofit/>
-          </a:bodyPr>
-          <a:lstStyle/>
-          <a:p>
-            <a:pPr algn="ctr" indent="0" marL="0">
-              <a:lnSpc>
-                <a:spcPct val="120000"/>
-              </a:lnSpc>
-              <a:buNone/>
-            </a:pPr>
-            <a:r>
-              <a:rPr lang="en-US" sz="1500" b="1" dirty="0">
-                <a:solidFill>
-                  <a:srgbClr val="FFFFFF"/>
-                </a:solidFill>
-                <a:latin typeface="Pretendard" pitchFamily="34" charset="0"/>
-                <a:ea typeface="Pretendard" pitchFamily="34" charset="-122"/>
-                <a:cs typeface="Pretendard" pitchFamily="34" charset="-120"/>
-              </a:rPr>
-              <a:t>5</a:t>
-            </a:r>
-            <a:endParaRPr lang="en-US" sz="1500" dirty="0"/>
-          </a:p>
-        </p:txBody>
-      </p:sp>
-      <p:sp>
-        <p:nvSpPr>
-          <p:cNvPr id="34" name="Text 32"/>
-          <p:cNvSpPr txBox="1"/>
-          <p:nvPr/>
-        </p:nvSpPr>
-        <p:spPr>
-          <a:xfrm>
-            <a:off x="5071506" y="4119372"/>
-            <a:ext cx="2585070" cy="914400"/>
-          </a:xfrm>
-          <a:prstGeom prst="rect">
-            <a:avLst/>
-          </a:prstGeom>
-          <a:noFill/>
-          <a:ln/>
-        </p:spPr>
-        <p:txBody>
-          <a:bodyPr wrap="square" lIns="0" tIns="25400" rIns="25400" bIns="0" rtlCol="0" anchor="ctr">
-            <a:normAutofit/>
-          </a:bodyPr>
-          <a:lstStyle/>
-          <a:p>
-            <a:pPr algn="l" indent="0" marL="0">
-              <a:lnSpc>
-                <a:spcPct val="92000"/>
-              </a:lnSpc>
-              <a:buNone/>
-            </a:pPr>
-            <a:r>
-              <a:rPr lang="en-US" sz="1600" dirty="0">
-                <a:solidFill>
-                  <a:srgbClr val="111827"/>
-                </a:solidFill>
-                <a:latin typeface="Pretendard" pitchFamily="34" charset="0"/>
-                <a:ea typeface="Pretendard" pitchFamily="34" charset="-122"/>
-                <a:cs typeface="Pretendard" pitchFamily="34" charset="-120"/>
-              </a:rPr>
-              <a:t>Validate overflow</a:t>
-            </a:r>
-            <a:endParaRPr lang="en-US" sz="1600" dirty="0"/>
-          </a:p>
-        </p:txBody>
-      </p:sp>
-      <p:sp>
-        <p:nvSpPr>
-          <p:cNvPr id="35" name="Shape 33"/>
-          <p:cNvSpPr/>
-          <p:nvPr/>
-        </p:nvSpPr>
-        <p:spPr>
-          <a:xfrm>
-            <a:off x="640080" y="3991356"/>
-            <a:ext cx="3435096" cy="1170432"/>
-          </a:xfrm>
-          <a:prstGeom prst="roundRect">
-            <a:avLst>
-              <a:gd name="adj" fmla="val 4688"/>
-            </a:avLst>
-          </a:prstGeom>
-          <a:solidFill>
-            <a:srgbClr val="FFFFFF"/>
-          </a:solidFill>
-          <a:ln w="12700">
-            <a:solidFill>
-              <a:srgbClr val="111827"/>
-            </a:solidFill>
-            <a:prstDash val="solid"/>
-          </a:ln>
-          <a:effectLst>
-            <a:outerShdw sx="100000" sy="100000" kx="0" ky="0" algn="bl" rotWithShape="0" blurRad="12700" dist="50800" dir="2700000">
-              <a:srgbClr val="000000">
-                <a:alpha val="12000"/>
-              </a:srgbClr>
-            </a:outerShdw>
-          </a:effectLst>
-        </p:spPr>
-      </p:sp>
-      <p:sp>
-        <p:nvSpPr>
-          <p:cNvPr id="36" name="Shape 34"/>
-          <p:cNvSpPr/>
-          <p:nvPr/>
-        </p:nvSpPr>
-        <p:spPr>
-          <a:xfrm>
-            <a:off x="640080" y="3991356"/>
-            <a:ext cx="3435096" cy="109728"/>
-          </a:xfrm>
-          <a:prstGeom prst="rect">
-            <a:avLst/>
-          </a:prstGeom>
-          <a:solidFill>
-            <a:srgbClr val="111827"/>
-          </a:solidFill>
-          <a:ln w="12700">
-            <a:solidFill>
-              <a:srgbClr val="111827">
-                <a:alpha val="0"/>
-              </a:srgbClr>
-            </a:solidFill>
-            <a:prstDash val="solid"/>
-          </a:ln>
-        </p:spPr>
-      </p:sp>
-      <p:sp>
-        <p:nvSpPr>
-          <p:cNvPr id="37" name="Shape 35"/>
-          <p:cNvSpPr/>
-          <p:nvPr/>
-        </p:nvSpPr>
-        <p:spPr>
-          <a:xfrm>
-            <a:off x="804672" y="4389303"/>
-            <a:ext cx="374538" cy="374538"/>
-          </a:xfrm>
-          <a:prstGeom prst="ellipse">
-            <a:avLst/>
-          </a:prstGeom>
-          <a:solidFill>
-            <a:srgbClr val="111827"/>
-          </a:solidFill>
-          <a:ln w="12700">
-            <a:solidFill>
-              <a:srgbClr val="111827">
-                <a:alpha val="0"/>
-              </a:srgbClr>
-            </a:solidFill>
-            <a:prstDash val="solid"/>
-          </a:ln>
-        </p:spPr>
-      </p:sp>
-      <p:sp>
-        <p:nvSpPr>
-          <p:cNvPr id="38" name="Text 36"/>
-          <p:cNvSpPr txBox="1"/>
-          <p:nvPr/>
-        </p:nvSpPr>
-        <p:spPr>
-          <a:xfrm>
-            <a:off x="804672" y="4389303"/>
-            <a:ext cx="374538" cy="374538"/>
-          </a:xfrm>
-          <a:prstGeom prst="rect">
-            <a:avLst/>
-          </a:prstGeom>
-          <a:noFill/>
-          <a:ln/>
-        </p:spPr>
-        <p:txBody>
-          <a:bodyPr wrap="square" lIns="0" tIns="0" rIns="0" bIns="0" rtlCol="0" anchor="ctr">
-            <a:normAutofit/>
-          </a:bodyPr>
-          <a:lstStyle/>
-          <a:p>
-            <a:pPr algn="ctr" indent="0" marL="0">
-              <a:lnSpc>
-                <a:spcPct val="120000"/>
-              </a:lnSpc>
-              <a:buNone/>
-            </a:pPr>
-            <a:r>
-              <a:rPr lang="en-US" sz="1500" b="1" dirty="0">
-                <a:solidFill>
-                  <a:srgbClr val="FFFFFF"/>
-                </a:solidFill>
-                <a:latin typeface="Pretendard" pitchFamily="34" charset="0"/>
-                <a:ea typeface="Pretendard" pitchFamily="34" charset="-122"/>
-                <a:cs typeface="Pretendard" pitchFamily="34" charset="-120"/>
-              </a:rPr>
-              <a:t>6</a:t>
-            </a:r>
-            <a:endParaRPr lang="en-US" sz="1500" dirty="0"/>
-          </a:p>
-        </p:txBody>
-      </p:sp>
-      <p:sp>
-        <p:nvSpPr>
-          <p:cNvPr id="39" name="Text 37"/>
-          <p:cNvSpPr txBox="1"/>
-          <p:nvPr/>
-        </p:nvSpPr>
-        <p:spPr>
-          <a:xfrm>
-            <a:off x="1325514" y="4119372"/>
-            <a:ext cx="2585070" cy="914400"/>
-          </a:xfrm>
-          <a:prstGeom prst="rect">
-            <a:avLst/>
-          </a:prstGeom>
-          <a:noFill/>
-          <a:ln/>
-        </p:spPr>
-        <p:txBody>
-          <a:bodyPr wrap="square" lIns="0" tIns="25400" rIns="25400" bIns="0" rtlCol="0" anchor="ctr">
-            <a:normAutofit/>
-          </a:bodyPr>
-          <a:lstStyle/>
-          <a:p>
-            <a:pPr algn="l" indent="0" marL="0">
-              <a:lnSpc>
-                <a:spcPct val="92000"/>
-              </a:lnSpc>
-              <a:buNone/>
-            </a:pPr>
-            <a:r>
-              <a:rPr lang="en-US" sz="1600" dirty="0">
-                <a:solidFill>
-                  <a:srgbClr val="111827"/>
-                </a:solidFill>
-                <a:latin typeface="Pretendard" pitchFamily="34" charset="0"/>
-                <a:ea typeface="Pretendard" pitchFamily="34" charset="-122"/>
-                <a:cs typeface="Pretendard" pitchFamily="34" charset="-120"/>
-              </a:rPr>
-              <a:t>Render PPTX HTML PDF</a:t>
-            </a:r>
-            <a:endParaRPr lang="en-US" sz="1600" dirty="0"/>
+            <a:endParaRPr lang="en-US" sz="2200" dirty="0"/>
           </a:p>
         </p:txBody>
       </p:sp>
@@ -4981,14 +4066,210 @@
       </p:sp>
       <p:sp>
         <p:nvSpPr>
-          <p:cNvPr id="4" name="Shape 2"/>
+          <p:cNvPr id="4" name="Text 2"/>
+          <p:cNvSpPr txBox="1"/>
+          <p:nvPr/>
+        </p:nvSpPr>
+        <p:spPr>
+          <a:xfrm>
+            <a:off x="731520" y="457200"/>
+            <a:ext cx="10698480" cy="731520"/>
+          </a:xfrm>
+          <a:prstGeom prst="rect">
+            <a:avLst/>
+          </a:prstGeom>
+          <a:noFill/>
+          <a:ln/>
+        </p:spPr>
+        <p:txBody>
+          <a:bodyPr wrap="square" lIns="0" tIns="0" rIns="0" bIns="0" rtlCol="0" anchor="ctr"/>
+          <a:lstStyle/>
+          <a:p>
+            <a:pPr algn="ctr" indent="0" marL="0">
+              <a:lnSpc>
+                <a:spcPct val="120000"/>
+              </a:lnSpc>
+              <a:buNone/>
+            </a:pPr>
+            <a:r>
+              <a:rPr lang="en-US" sz="3400" b="1" dirty="0">
+                <a:solidFill>
+                  <a:srgbClr val="111827"/>
+                </a:solidFill>
+                <a:latin typeface="Pretendard" pitchFamily="34" charset="0"/>
+                <a:ea typeface="Pretendard" pitchFamily="34" charset="-122"/>
+                <a:cs typeface="Pretendard" pitchFamily="34" charset="-120"/>
+              </a:rPr>
+              <a:t>Pipeline Diagram</a:t>
+            </a:r>
+            <a:endParaRPr lang="en-US" sz="3400" dirty="0"/>
+          </a:p>
+        </p:txBody>
+      </p:sp>
+      <p:sp>
+        <p:nvSpPr>
+          <p:cNvPr id="5" name="Shape 3"/>
           <p:cNvSpPr/>
           <p:nvPr/>
         </p:nvSpPr>
         <p:spPr>
           <a:xfrm>
-            <a:off x="914400" y="1463040"/>
-            <a:ext cx="10241280" cy="73152"/>
+            <a:off x="4002024" y="3095244"/>
+            <a:ext cx="457200" cy="0"/>
+          </a:xfrm>
+          <a:prstGeom prst="line">
+            <a:avLst/>
+          </a:prstGeom>
+          <a:noFill/>
+          <a:ln w="12700">
+            <a:solidFill>
+              <a:srgbClr val="111827"/>
+            </a:solidFill>
+            <a:prstDash val="solid"/>
+            <a:tailEnd type="triangle"/>
+          </a:ln>
+        </p:spPr>
+      </p:sp>
+      <p:sp>
+        <p:nvSpPr>
+          <p:cNvPr id="6" name="Shape 4"/>
+          <p:cNvSpPr/>
+          <p:nvPr/>
+        </p:nvSpPr>
+        <p:spPr>
+          <a:xfrm>
+            <a:off x="7748016" y="3095244"/>
+            <a:ext cx="457200" cy="0"/>
+          </a:xfrm>
+          <a:prstGeom prst="line">
+            <a:avLst/>
+          </a:prstGeom>
+          <a:noFill/>
+          <a:ln w="12700">
+            <a:solidFill>
+              <a:srgbClr val="111827"/>
+            </a:solidFill>
+            <a:prstDash val="solid"/>
+            <a:tailEnd type="triangle"/>
+          </a:ln>
+        </p:spPr>
+      </p:sp>
+      <p:sp>
+        <p:nvSpPr>
+          <p:cNvPr id="7" name="Shape 5"/>
+          <p:cNvSpPr/>
+          <p:nvPr/>
+        </p:nvSpPr>
+        <p:spPr>
+          <a:xfrm>
+            <a:off x="9849612" y="3627791"/>
+            <a:ext cx="0" cy="416235"/>
+          </a:xfrm>
+          <a:prstGeom prst="line">
+            <a:avLst/>
+          </a:prstGeom>
+          <a:noFill/>
+          <a:ln w="12700">
+            <a:solidFill>
+              <a:srgbClr val="111827"/>
+            </a:solidFill>
+            <a:prstDash val="solid"/>
+            <a:tailEnd type="triangle"/>
+          </a:ln>
+        </p:spPr>
+      </p:sp>
+      <p:sp>
+        <p:nvSpPr>
+          <p:cNvPr id="8" name="Shape 6"/>
+          <p:cNvSpPr/>
+          <p:nvPr/>
+        </p:nvSpPr>
+        <p:spPr>
+          <a:xfrm>
+            <a:off x="7748016" y="4576572"/>
+            <a:ext cx="457200" cy="0"/>
+          </a:xfrm>
+          <a:prstGeom prst="line">
+            <a:avLst/>
+          </a:prstGeom>
+          <a:noFill/>
+          <a:ln w="12700">
+            <a:solidFill>
+              <a:srgbClr val="111827"/>
+            </a:solidFill>
+            <a:prstDash val="solid"/>
+            <a:headEnd type="triangle"/>
+          </a:ln>
+        </p:spPr>
+      </p:sp>
+      <p:sp>
+        <p:nvSpPr>
+          <p:cNvPr id="9" name="Shape 7"/>
+          <p:cNvSpPr/>
+          <p:nvPr/>
+        </p:nvSpPr>
+        <p:spPr>
+          <a:xfrm>
+            <a:off x="4002024" y="4576572"/>
+            <a:ext cx="457200" cy="0"/>
+          </a:xfrm>
+          <a:prstGeom prst="line">
+            <a:avLst/>
+          </a:prstGeom>
+          <a:noFill/>
+          <a:ln w="12700">
+            <a:solidFill>
+              <a:srgbClr val="111827"/>
+            </a:solidFill>
+            <a:prstDash val="solid"/>
+            <a:headEnd type="triangle"/>
+          </a:ln>
+        </p:spPr>
+      </p:sp>
+      <p:sp>
+        <p:nvSpPr>
+          <p:cNvPr id="10" name="Shape 8"/>
+          <p:cNvSpPr/>
+          <p:nvPr/>
+        </p:nvSpPr>
+        <p:spPr>
+          <a:xfrm>
+            <a:off x="640080" y="2510028"/>
+            <a:ext cx="3435096" cy="1170432"/>
+          </a:xfrm>
+          <a:prstGeom prst="roundRect">
+            <a:avLst>
+              <a:gd name="adj" fmla="val 4688"/>
+            </a:avLst>
+          </a:prstGeom>
+          <a:solidFill>
+            <a:srgbClr val="FFFFFF"/>
+          </a:solidFill>
+          <a:ln w="12700">
+            <a:solidFill>
+              <a:srgbClr val="111827"/>
+            </a:solidFill>
+            <a:prstDash val="solid"/>
+          </a:ln>
+          <a:effectLst>
+            <a:outerShdw sx="100000" sy="100000" kx="0" ky="0" algn="bl" rotWithShape="0" blurRad="12700" dist="50800" dir="2700000">
+              <a:srgbClr val="000000">
+                <a:alpha val="12000"/>
+              </a:srgbClr>
+            </a:outerShdw>
+          </a:effectLst>
+        </p:spPr>
+      </p:sp>
+      <p:sp>
+        <p:nvSpPr>
+          <p:cNvPr id="11" name="Shape 9"/>
+          <p:cNvSpPr/>
+          <p:nvPr/>
+        </p:nvSpPr>
+        <p:spPr>
+          <a:xfrm>
+            <a:off x="640080" y="2510028"/>
+            <a:ext cx="3435096" cy="109728"/>
           </a:xfrm>
           <a:prstGeom prst="rect">
             <a:avLst/>
@@ -5008,7 +4289,1312 @@
       </p:sp>
       <p:sp>
         <p:nvSpPr>
-          <p:cNvPr id="5" name="Text 3"/>
+          <p:cNvPr id="12" name="Shape 10"/>
+          <p:cNvSpPr/>
+          <p:nvPr/>
+        </p:nvSpPr>
+        <p:spPr>
+          <a:xfrm>
+            <a:off x="804672" y="2907975"/>
+            <a:ext cx="374538" cy="374538"/>
+          </a:xfrm>
+          <a:prstGeom prst="ellipse">
+            <a:avLst/>
+          </a:prstGeom>
+          <a:solidFill>
+            <a:srgbClr val="111827"/>
+          </a:solidFill>
+          <a:ln w="12700">
+            <a:solidFill>
+              <a:srgbClr val="111827">
+                <a:alpha val="0"/>
+              </a:srgbClr>
+            </a:solidFill>
+            <a:prstDash val="solid"/>
+          </a:ln>
+        </p:spPr>
+      </p:sp>
+      <p:sp>
+        <p:nvSpPr>
+          <p:cNvPr id="13" name="Text 11"/>
+          <p:cNvSpPr txBox="1"/>
+          <p:nvPr/>
+        </p:nvSpPr>
+        <p:spPr>
+          <a:xfrm>
+            <a:off x="804672" y="2907975"/>
+            <a:ext cx="374538" cy="374538"/>
+          </a:xfrm>
+          <a:prstGeom prst="rect">
+            <a:avLst/>
+          </a:prstGeom>
+          <a:noFill/>
+          <a:ln/>
+        </p:spPr>
+        <p:txBody>
+          <a:bodyPr wrap="square" lIns="0" tIns="0" rIns="0" bIns="0" rtlCol="0" anchor="ctr">
+            <a:normAutofit/>
+          </a:bodyPr>
+          <a:lstStyle/>
+          <a:p>
+            <a:pPr algn="ctr" indent="0" marL="0">
+              <a:lnSpc>
+                <a:spcPct val="120000"/>
+              </a:lnSpc>
+              <a:buNone/>
+            </a:pPr>
+            <a:r>
+              <a:rPr lang="en-US" sz="1500" b="1" dirty="0">
+                <a:solidFill>
+                  <a:srgbClr val="FFFFFF"/>
+                </a:solidFill>
+                <a:latin typeface="Pretendard" pitchFamily="34" charset="0"/>
+                <a:ea typeface="Pretendard" pitchFamily="34" charset="-122"/>
+                <a:cs typeface="Pretendard" pitchFamily="34" charset="-120"/>
+              </a:rPr>
+              <a:t>1</a:t>
+            </a:r>
+            <a:endParaRPr lang="en-US" sz="1500" dirty="0"/>
+          </a:p>
+        </p:txBody>
+      </p:sp>
+      <p:sp>
+        <p:nvSpPr>
+          <p:cNvPr id="14" name="Text 12"/>
+          <p:cNvSpPr txBox="1"/>
+          <p:nvPr/>
+        </p:nvSpPr>
+        <p:spPr>
+          <a:xfrm>
+            <a:off x="1325514" y="2638044"/>
+            <a:ext cx="2585070" cy="914400"/>
+          </a:xfrm>
+          <a:prstGeom prst="rect">
+            <a:avLst/>
+          </a:prstGeom>
+          <a:noFill/>
+          <a:ln/>
+        </p:spPr>
+        <p:txBody>
+          <a:bodyPr wrap="square" lIns="0" tIns="25400" rIns="25400" bIns="0" rtlCol="0" anchor="ctr">
+            <a:normAutofit/>
+          </a:bodyPr>
+          <a:lstStyle/>
+          <a:p>
+            <a:pPr algn="l" indent="0" marL="0">
+              <a:lnSpc>
+                <a:spcPct val="92000"/>
+              </a:lnSpc>
+              <a:buNone/>
+            </a:pPr>
+            <a:r>
+              <a:rPr lang="en-US" sz="1600" dirty="0">
+                <a:solidFill>
+                  <a:srgbClr val="111827"/>
+                </a:solidFill>
+                <a:latin typeface="Pretendard" pitchFamily="34" charset="0"/>
+                <a:ea typeface="Pretendard" pitchFamily="34" charset="-122"/>
+                <a:cs typeface="Pretendard" pitchFamily="34" charset="-120"/>
+              </a:rPr>
+              <a:t>Markdown source</a:t>
+            </a:r>
+            <a:endParaRPr lang="en-US" sz="1600" dirty="0"/>
+          </a:p>
+        </p:txBody>
+      </p:sp>
+      <p:sp>
+        <p:nvSpPr>
+          <p:cNvPr id="15" name="Shape 13"/>
+          <p:cNvSpPr/>
+          <p:nvPr/>
+        </p:nvSpPr>
+        <p:spPr>
+          <a:xfrm>
+            <a:off x="4386072" y="2510028"/>
+            <a:ext cx="3435096" cy="1170432"/>
+          </a:xfrm>
+          <a:prstGeom prst="roundRect">
+            <a:avLst>
+              <a:gd name="adj" fmla="val 4688"/>
+            </a:avLst>
+          </a:prstGeom>
+          <a:solidFill>
+            <a:srgbClr val="FFFFFF"/>
+          </a:solidFill>
+          <a:ln w="12700">
+            <a:solidFill>
+              <a:srgbClr val="111827"/>
+            </a:solidFill>
+            <a:prstDash val="solid"/>
+          </a:ln>
+          <a:effectLst>
+            <a:outerShdw sx="100000" sy="100000" kx="0" ky="0" algn="bl" rotWithShape="0" blurRad="12700" dist="50800" dir="2700000">
+              <a:srgbClr val="000000">
+                <a:alpha val="12000"/>
+              </a:srgbClr>
+            </a:outerShdw>
+          </a:effectLst>
+        </p:spPr>
+      </p:sp>
+      <p:sp>
+        <p:nvSpPr>
+          <p:cNvPr id="16" name="Shape 14"/>
+          <p:cNvSpPr/>
+          <p:nvPr/>
+        </p:nvSpPr>
+        <p:spPr>
+          <a:xfrm>
+            <a:off x="4386072" y="2510028"/>
+            <a:ext cx="3435096" cy="109728"/>
+          </a:xfrm>
+          <a:prstGeom prst="rect">
+            <a:avLst/>
+          </a:prstGeom>
+          <a:solidFill>
+            <a:srgbClr val="111827"/>
+          </a:solidFill>
+          <a:ln w="12700">
+            <a:solidFill>
+              <a:srgbClr val="111827">
+                <a:alpha val="0"/>
+              </a:srgbClr>
+            </a:solidFill>
+            <a:prstDash val="solid"/>
+          </a:ln>
+        </p:spPr>
+      </p:sp>
+      <p:sp>
+        <p:nvSpPr>
+          <p:cNvPr id="17" name="Shape 15"/>
+          <p:cNvSpPr/>
+          <p:nvPr/>
+        </p:nvSpPr>
+        <p:spPr>
+          <a:xfrm>
+            <a:off x="4550664" y="2907975"/>
+            <a:ext cx="374538" cy="374538"/>
+          </a:xfrm>
+          <a:prstGeom prst="ellipse">
+            <a:avLst/>
+          </a:prstGeom>
+          <a:solidFill>
+            <a:srgbClr val="111827"/>
+          </a:solidFill>
+          <a:ln w="12700">
+            <a:solidFill>
+              <a:srgbClr val="111827">
+                <a:alpha val="0"/>
+              </a:srgbClr>
+            </a:solidFill>
+            <a:prstDash val="solid"/>
+          </a:ln>
+        </p:spPr>
+      </p:sp>
+      <p:sp>
+        <p:nvSpPr>
+          <p:cNvPr id="18" name="Text 16"/>
+          <p:cNvSpPr txBox="1"/>
+          <p:nvPr/>
+        </p:nvSpPr>
+        <p:spPr>
+          <a:xfrm>
+            <a:off x="4550664" y="2907975"/>
+            <a:ext cx="374538" cy="374538"/>
+          </a:xfrm>
+          <a:prstGeom prst="rect">
+            <a:avLst/>
+          </a:prstGeom>
+          <a:noFill/>
+          <a:ln/>
+        </p:spPr>
+        <p:txBody>
+          <a:bodyPr wrap="square" lIns="0" tIns="0" rIns="0" bIns="0" rtlCol="0" anchor="ctr">
+            <a:normAutofit/>
+          </a:bodyPr>
+          <a:lstStyle/>
+          <a:p>
+            <a:pPr algn="ctr" indent="0" marL="0">
+              <a:lnSpc>
+                <a:spcPct val="120000"/>
+              </a:lnSpc>
+              <a:buNone/>
+            </a:pPr>
+            <a:r>
+              <a:rPr lang="en-US" sz="1500" b="1" dirty="0">
+                <a:solidFill>
+                  <a:srgbClr val="FFFFFF"/>
+                </a:solidFill>
+                <a:latin typeface="Pretendard" pitchFamily="34" charset="0"/>
+                <a:ea typeface="Pretendard" pitchFamily="34" charset="-122"/>
+                <a:cs typeface="Pretendard" pitchFamily="34" charset="-120"/>
+              </a:rPr>
+              <a:t>2</a:t>
+            </a:r>
+            <a:endParaRPr lang="en-US" sz="1500" dirty="0"/>
+          </a:p>
+        </p:txBody>
+      </p:sp>
+      <p:sp>
+        <p:nvSpPr>
+          <p:cNvPr id="19" name="Text 17"/>
+          <p:cNvSpPr txBox="1"/>
+          <p:nvPr/>
+        </p:nvSpPr>
+        <p:spPr>
+          <a:xfrm>
+            <a:off x="5071506" y="2638044"/>
+            <a:ext cx="2585070" cy="914400"/>
+          </a:xfrm>
+          <a:prstGeom prst="rect">
+            <a:avLst/>
+          </a:prstGeom>
+          <a:noFill/>
+          <a:ln/>
+        </p:spPr>
+        <p:txBody>
+          <a:bodyPr wrap="square" lIns="0" tIns="25400" rIns="25400" bIns="0" rtlCol="0" anchor="ctr">
+            <a:normAutofit/>
+          </a:bodyPr>
+          <a:lstStyle/>
+          <a:p>
+            <a:pPr algn="l" indent="0" marL="0">
+              <a:lnSpc>
+                <a:spcPct val="92000"/>
+              </a:lnSpc>
+              <a:buNone/>
+            </a:pPr>
+            <a:r>
+              <a:rPr lang="en-US" sz="1600" dirty="0">
+                <a:solidFill>
+                  <a:srgbClr val="111827"/>
+                </a:solidFill>
+                <a:latin typeface="Pretendard" pitchFamily="34" charset="0"/>
+                <a:ea typeface="Pretendard" pitchFamily="34" charset="-122"/>
+                <a:cs typeface="Pretendard" pitchFamily="34" charset="-120"/>
+              </a:rPr>
+              <a:t>Parse blocks</a:t>
+            </a:r>
+            <a:endParaRPr lang="en-US" sz="1600" dirty="0"/>
+          </a:p>
+        </p:txBody>
+      </p:sp>
+      <p:sp>
+        <p:nvSpPr>
+          <p:cNvPr id="20" name="Shape 18"/>
+          <p:cNvSpPr/>
+          <p:nvPr/>
+        </p:nvSpPr>
+        <p:spPr>
+          <a:xfrm>
+            <a:off x="8132064" y="2510028"/>
+            <a:ext cx="3435096" cy="1170432"/>
+          </a:xfrm>
+          <a:prstGeom prst="roundRect">
+            <a:avLst>
+              <a:gd name="adj" fmla="val 4688"/>
+            </a:avLst>
+          </a:prstGeom>
+          <a:solidFill>
+            <a:srgbClr val="FFFFFF"/>
+          </a:solidFill>
+          <a:ln w="12700">
+            <a:solidFill>
+              <a:srgbClr val="111827"/>
+            </a:solidFill>
+            <a:prstDash val="solid"/>
+          </a:ln>
+          <a:effectLst>
+            <a:outerShdw sx="100000" sy="100000" kx="0" ky="0" algn="bl" rotWithShape="0" blurRad="12700" dist="50800" dir="2700000">
+              <a:srgbClr val="000000">
+                <a:alpha val="12000"/>
+              </a:srgbClr>
+            </a:outerShdw>
+          </a:effectLst>
+        </p:spPr>
+      </p:sp>
+      <p:sp>
+        <p:nvSpPr>
+          <p:cNvPr id="21" name="Shape 19"/>
+          <p:cNvSpPr/>
+          <p:nvPr/>
+        </p:nvSpPr>
+        <p:spPr>
+          <a:xfrm>
+            <a:off x="8132064" y="2510028"/>
+            <a:ext cx="3435096" cy="109728"/>
+          </a:xfrm>
+          <a:prstGeom prst="rect">
+            <a:avLst/>
+          </a:prstGeom>
+          <a:solidFill>
+            <a:srgbClr val="111827"/>
+          </a:solidFill>
+          <a:ln w="12700">
+            <a:solidFill>
+              <a:srgbClr val="111827">
+                <a:alpha val="0"/>
+              </a:srgbClr>
+            </a:solidFill>
+            <a:prstDash val="solid"/>
+          </a:ln>
+        </p:spPr>
+      </p:sp>
+      <p:sp>
+        <p:nvSpPr>
+          <p:cNvPr id="22" name="Shape 20"/>
+          <p:cNvSpPr/>
+          <p:nvPr/>
+        </p:nvSpPr>
+        <p:spPr>
+          <a:xfrm>
+            <a:off x="8296656" y="2907975"/>
+            <a:ext cx="374538" cy="374538"/>
+          </a:xfrm>
+          <a:prstGeom prst="ellipse">
+            <a:avLst/>
+          </a:prstGeom>
+          <a:solidFill>
+            <a:srgbClr val="111827"/>
+          </a:solidFill>
+          <a:ln w="12700">
+            <a:solidFill>
+              <a:srgbClr val="111827">
+                <a:alpha val="0"/>
+              </a:srgbClr>
+            </a:solidFill>
+            <a:prstDash val="solid"/>
+          </a:ln>
+        </p:spPr>
+      </p:sp>
+      <p:sp>
+        <p:nvSpPr>
+          <p:cNvPr id="23" name="Text 21"/>
+          <p:cNvSpPr txBox="1"/>
+          <p:nvPr/>
+        </p:nvSpPr>
+        <p:spPr>
+          <a:xfrm>
+            <a:off x="8296656" y="2907975"/>
+            <a:ext cx="374538" cy="374538"/>
+          </a:xfrm>
+          <a:prstGeom prst="rect">
+            <a:avLst/>
+          </a:prstGeom>
+          <a:noFill/>
+          <a:ln/>
+        </p:spPr>
+        <p:txBody>
+          <a:bodyPr wrap="square" lIns="0" tIns="0" rIns="0" bIns="0" rtlCol="0" anchor="ctr">
+            <a:normAutofit/>
+          </a:bodyPr>
+          <a:lstStyle/>
+          <a:p>
+            <a:pPr algn="ctr" indent="0" marL="0">
+              <a:lnSpc>
+                <a:spcPct val="120000"/>
+              </a:lnSpc>
+              <a:buNone/>
+            </a:pPr>
+            <a:r>
+              <a:rPr lang="en-US" sz="1500" b="1" dirty="0">
+                <a:solidFill>
+                  <a:srgbClr val="FFFFFF"/>
+                </a:solidFill>
+                <a:latin typeface="Pretendard" pitchFamily="34" charset="0"/>
+                <a:ea typeface="Pretendard" pitchFamily="34" charset="-122"/>
+                <a:cs typeface="Pretendard" pitchFamily="34" charset="-120"/>
+              </a:rPr>
+              <a:t>3</a:t>
+            </a:r>
+            <a:endParaRPr lang="en-US" sz="1500" dirty="0"/>
+          </a:p>
+        </p:txBody>
+      </p:sp>
+      <p:sp>
+        <p:nvSpPr>
+          <p:cNvPr id="24" name="Text 22"/>
+          <p:cNvSpPr txBox="1"/>
+          <p:nvPr/>
+        </p:nvSpPr>
+        <p:spPr>
+          <a:xfrm>
+            <a:off x="8817498" y="2638044"/>
+            <a:ext cx="2585070" cy="914400"/>
+          </a:xfrm>
+          <a:prstGeom prst="rect">
+            <a:avLst/>
+          </a:prstGeom>
+          <a:noFill/>
+          <a:ln/>
+        </p:spPr>
+        <p:txBody>
+          <a:bodyPr wrap="square" lIns="0" tIns="25400" rIns="25400" bIns="0" rtlCol="0" anchor="ctr">
+            <a:normAutofit/>
+          </a:bodyPr>
+          <a:lstStyle/>
+          <a:p>
+            <a:pPr algn="l" indent="0" marL="0">
+              <a:lnSpc>
+                <a:spcPct val="92000"/>
+              </a:lnSpc>
+              <a:buNone/>
+            </a:pPr>
+            <a:r>
+              <a:rPr lang="en-US" sz="1600" dirty="0">
+                <a:solidFill>
+                  <a:srgbClr val="111827"/>
+                </a:solidFill>
+                <a:latin typeface="Pretendard" pitchFamily="34" charset="0"/>
+                <a:ea typeface="Pretendard" pitchFamily="34" charset="-122"/>
+                <a:cs typeface="Pretendard" pitchFamily="34" charset="-120"/>
+              </a:rPr>
+              <a:t>Split slides</a:t>
+            </a:r>
+            <a:endParaRPr lang="en-US" sz="1600" dirty="0"/>
+          </a:p>
+        </p:txBody>
+      </p:sp>
+      <p:sp>
+        <p:nvSpPr>
+          <p:cNvPr id="25" name="Shape 23"/>
+          <p:cNvSpPr/>
+          <p:nvPr/>
+        </p:nvSpPr>
+        <p:spPr>
+          <a:xfrm>
+            <a:off x="8132064" y="3991356"/>
+            <a:ext cx="3435096" cy="1170432"/>
+          </a:xfrm>
+          <a:prstGeom prst="roundRect">
+            <a:avLst>
+              <a:gd name="adj" fmla="val 4688"/>
+            </a:avLst>
+          </a:prstGeom>
+          <a:solidFill>
+            <a:srgbClr val="FFFFFF"/>
+          </a:solidFill>
+          <a:ln w="12700">
+            <a:solidFill>
+              <a:srgbClr val="111827"/>
+            </a:solidFill>
+            <a:prstDash val="solid"/>
+          </a:ln>
+          <a:effectLst>
+            <a:outerShdw sx="100000" sy="100000" kx="0" ky="0" algn="bl" rotWithShape="0" blurRad="12700" dist="50800" dir="2700000">
+              <a:srgbClr val="000000">
+                <a:alpha val="12000"/>
+              </a:srgbClr>
+            </a:outerShdw>
+          </a:effectLst>
+        </p:spPr>
+      </p:sp>
+      <p:sp>
+        <p:nvSpPr>
+          <p:cNvPr id="26" name="Shape 24"/>
+          <p:cNvSpPr/>
+          <p:nvPr/>
+        </p:nvSpPr>
+        <p:spPr>
+          <a:xfrm>
+            <a:off x="8132064" y="3991356"/>
+            <a:ext cx="3435096" cy="109728"/>
+          </a:xfrm>
+          <a:prstGeom prst="rect">
+            <a:avLst/>
+          </a:prstGeom>
+          <a:solidFill>
+            <a:srgbClr val="111827"/>
+          </a:solidFill>
+          <a:ln w="12700">
+            <a:solidFill>
+              <a:srgbClr val="111827">
+                <a:alpha val="0"/>
+              </a:srgbClr>
+            </a:solidFill>
+            <a:prstDash val="solid"/>
+          </a:ln>
+        </p:spPr>
+      </p:sp>
+      <p:sp>
+        <p:nvSpPr>
+          <p:cNvPr id="27" name="Shape 25"/>
+          <p:cNvSpPr/>
+          <p:nvPr/>
+        </p:nvSpPr>
+        <p:spPr>
+          <a:xfrm>
+            <a:off x="8296656" y="4389303"/>
+            <a:ext cx="374538" cy="374538"/>
+          </a:xfrm>
+          <a:prstGeom prst="ellipse">
+            <a:avLst/>
+          </a:prstGeom>
+          <a:solidFill>
+            <a:srgbClr val="111827"/>
+          </a:solidFill>
+          <a:ln w="12700">
+            <a:solidFill>
+              <a:srgbClr val="111827">
+                <a:alpha val="0"/>
+              </a:srgbClr>
+            </a:solidFill>
+            <a:prstDash val="solid"/>
+          </a:ln>
+        </p:spPr>
+      </p:sp>
+      <p:sp>
+        <p:nvSpPr>
+          <p:cNvPr id="28" name="Text 26"/>
+          <p:cNvSpPr txBox="1"/>
+          <p:nvPr/>
+        </p:nvSpPr>
+        <p:spPr>
+          <a:xfrm>
+            <a:off x="8296656" y="4389303"/>
+            <a:ext cx="374538" cy="374538"/>
+          </a:xfrm>
+          <a:prstGeom prst="rect">
+            <a:avLst/>
+          </a:prstGeom>
+          <a:noFill/>
+          <a:ln/>
+        </p:spPr>
+        <p:txBody>
+          <a:bodyPr wrap="square" lIns="0" tIns="0" rIns="0" bIns="0" rtlCol="0" anchor="ctr">
+            <a:normAutofit/>
+          </a:bodyPr>
+          <a:lstStyle/>
+          <a:p>
+            <a:pPr algn="ctr" indent="0" marL="0">
+              <a:lnSpc>
+                <a:spcPct val="120000"/>
+              </a:lnSpc>
+              <a:buNone/>
+            </a:pPr>
+            <a:r>
+              <a:rPr lang="en-US" sz="1500" b="1" dirty="0">
+                <a:solidFill>
+                  <a:srgbClr val="FFFFFF"/>
+                </a:solidFill>
+                <a:latin typeface="Pretendard" pitchFamily="34" charset="0"/>
+                <a:ea typeface="Pretendard" pitchFamily="34" charset="-122"/>
+                <a:cs typeface="Pretendard" pitchFamily="34" charset="-120"/>
+              </a:rPr>
+              <a:t>4</a:t>
+            </a:r>
+            <a:endParaRPr lang="en-US" sz="1500" dirty="0"/>
+          </a:p>
+        </p:txBody>
+      </p:sp>
+      <p:sp>
+        <p:nvSpPr>
+          <p:cNvPr id="29" name="Text 27"/>
+          <p:cNvSpPr txBox="1"/>
+          <p:nvPr/>
+        </p:nvSpPr>
+        <p:spPr>
+          <a:xfrm>
+            <a:off x="8817498" y="4119372"/>
+            <a:ext cx="2585070" cy="914400"/>
+          </a:xfrm>
+          <a:prstGeom prst="rect">
+            <a:avLst/>
+          </a:prstGeom>
+          <a:noFill/>
+          <a:ln/>
+        </p:spPr>
+        <p:txBody>
+          <a:bodyPr wrap="square" lIns="0" tIns="25400" rIns="25400" bIns="0" rtlCol="0" anchor="ctr">
+            <a:normAutofit/>
+          </a:bodyPr>
+          <a:lstStyle/>
+          <a:p>
+            <a:pPr algn="l" indent="0" marL="0">
+              <a:lnSpc>
+                <a:spcPct val="92000"/>
+              </a:lnSpc>
+              <a:buNone/>
+            </a:pPr>
+            <a:r>
+              <a:rPr lang="en-US" sz="1600" dirty="0">
+                <a:solidFill>
+                  <a:srgbClr val="111827"/>
+                </a:solidFill>
+                <a:latin typeface="Pretendard" pitchFamily="34" charset="0"/>
+                <a:ea typeface="Pretendard" pitchFamily="34" charset="-122"/>
+                <a:cs typeface="Pretendard" pitchFamily="34" charset="-120"/>
+              </a:rPr>
+              <a:t>Layout objects</a:t>
+            </a:r>
+            <a:endParaRPr lang="en-US" sz="1600" dirty="0"/>
+          </a:p>
+        </p:txBody>
+      </p:sp>
+      <p:sp>
+        <p:nvSpPr>
+          <p:cNvPr id="30" name="Shape 28"/>
+          <p:cNvSpPr/>
+          <p:nvPr/>
+        </p:nvSpPr>
+        <p:spPr>
+          <a:xfrm>
+            <a:off x="4386072" y="3991356"/>
+            <a:ext cx="3435096" cy="1170432"/>
+          </a:xfrm>
+          <a:prstGeom prst="roundRect">
+            <a:avLst>
+              <a:gd name="adj" fmla="val 4688"/>
+            </a:avLst>
+          </a:prstGeom>
+          <a:solidFill>
+            <a:srgbClr val="FFFFFF"/>
+          </a:solidFill>
+          <a:ln w="12700">
+            <a:solidFill>
+              <a:srgbClr val="111827"/>
+            </a:solidFill>
+            <a:prstDash val="solid"/>
+          </a:ln>
+          <a:effectLst>
+            <a:outerShdw sx="100000" sy="100000" kx="0" ky="0" algn="bl" rotWithShape="0" blurRad="12700" dist="50800" dir="2700000">
+              <a:srgbClr val="000000">
+                <a:alpha val="12000"/>
+              </a:srgbClr>
+            </a:outerShdw>
+          </a:effectLst>
+        </p:spPr>
+      </p:sp>
+      <p:sp>
+        <p:nvSpPr>
+          <p:cNvPr id="31" name="Shape 29"/>
+          <p:cNvSpPr/>
+          <p:nvPr/>
+        </p:nvSpPr>
+        <p:spPr>
+          <a:xfrm>
+            <a:off x="4386072" y="3991356"/>
+            <a:ext cx="3435096" cy="109728"/>
+          </a:xfrm>
+          <a:prstGeom prst="rect">
+            <a:avLst/>
+          </a:prstGeom>
+          <a:solidFill>
+            <a:srgbClr val="111827"/>
+          </a:solidFill>
+          <a:ln w="12700">
+            <a:solidFill>
+              <a:srgbClr val="111827">
+                <a:alpha val="0"/>
+              </a:srgbClr>
+            </a:solidFill>
+            <a:prstDash val="solid"/>
+          </a:ln>
+        </p:spPr>
+      </p:sp>
+      <p:sp>
+        <p:nvSpPr>
+          <p:cNvPr id="32" name="Shape 30"/>
+          <p:cNvSpPr/>
+          <p:nvPr/>
+        </p:nvSpPr>
+        <p:spPr>
+          <a:xfrm>
+            <a:off x="4550664" y="4389303"/>
+            <a:ext cx="374538" cy="374538"/>
+          </a:xfrm>
+          <a:prstGeom prst="ellipse">
+            <a:avLst/>
+          </a:prstGeom>
+          <a:solidFill>
+            <a:srgbClr val="111827"/>
+          </a:solidFill>
+          <a:ln w="12700">
+            <a:solidFill>
+              <a:srgbClr val="111827">
+                <a:alpha val="0"/>
+              </a:srgbClr>
+            </a:solidFill>
+            <a:prstDash val="solid"/>
+          </a:ln>
+        </p:spPr>
+      </p:sp>
+      <p:sp>
+        <p:nvSpPr>
+          <p:cNvPr id="33" name="Text 31"/>
+          <p:cNvSpPr txBox="1"/>
+          <p:nvPr/>
+        </p:nvSpPr>
+        <p:spPr>
+          <a:xfrm>
+            <a:off x="4550664" y="4389303"/>
+            <a:ext cx="374538" cy="374538"/>
+          </a:xfrm>
+          <a:prstGeom prst="rect">
+            <a:avLst/>
+          </a:prstGeom>
+          <a:noFill/>
+          <a:ln/>
+        </p:spPr>
+        <p:txBody>
+          <a:bodyPr wrap="square" lIns="0" tIns="0" rIns="0" bIns="0" rtlCol="0" anchor="ctr">
+            <a:normAutofit/>
+          </a:bodyPr>
+          <a:lstStyle/>
+          <a:p>
+            <a:pPr algn="ctr" indent="0" marL="0">
+              <a:lnSpc>
+                <a:spcPct val="120000"/>
+              </a:lnSpc>
+              <a:buNone/>
+            </a:pPr>
+            <a:r>
+              <a:rPr lang="en-US" sz="1500" b="1" dirty="0">
+                <a:solidFill>
+                  <a:srgbClr val="FFFFFF"/>
+                </a:solidFill>
+                <a:latin typeface="Pretendard" pitchFamily="34" charset="0"/>
+                <a:ea typeface="Pretendard" pitchFamily="34" charset="-122"/>
+                <a:cs typeface="Pretendard" pitchFamily="34" charset="-120"/>
+              </a:rPr>
+              <a:t>5</a:t>
+            </a:r>
+            <a:endParaRPr lang="en-US" sz="1500" dirty="0"/>
+          </a:p>
+        </p:txBody>
+      </p:sp>
+      <p:sp>
+        <p:nvSpPr>
+          <p:cNvPr id="34" name="Text 32"/>
+          <p:cNvSpPr txBox="1"/>
+          <p:nvPr/>
+        </p:nvSpPr>
+        <p:spPr>
+          <a:xfrm>
+            <a:off x="5071506" y="4119372"/>
+            <a:ext cx="2585070" cy="914400"/>
+          </a:xfrm>
+          <a:prstGeom prst="rect">
+            <a:avLst/>
+          </a:prstGeom>
+          <a:noFill/>
+          <a:ln/>
+        </p:spPr>
+        <p:txBody>
+          <a:bodyPr wrap="square" lIns="0" tIns="25400" rIns="25400" bIns="0" rtlCol="0" anchor="ctr">
+            <a:normAutofit/>
+          </a:bodyPr>
+          <a:lstStyle/>
+          <a:p>
+            <a:pPr algn="l" indent="0" marL="0">
+              <a:lnSpc>
+                <a:spcPct val="92000"/>
+              </a:lnSpc>
+              <a:buNone/>
+            </a:pPr>
+            <a:r>
+              <a:rPr lang="en-US" sz="1600" dirty="0">
+                <a:solidFill>
+                  <a:srgbClr val="111827"/>
+                </a:solidFill>
+                <a:latin typeface="Pretendard" pitchFamily="34" charset="0"/>
+                <a:ea typeface="Pretendard" pitchFamily="34" charset="-122"/>
+                <a:cs typeface="Pretendard" pitchFamily="34" charset="-120"/>
+              </a:rPr>
+              <a:t>Validate overflow</a:t>
+            </a:r>
+            <a:endParaRPr lang="en-US" sz="1600" dirty="0"/>
+          </a:p>
+        </p:txBody>
+      </p:sp>
+      <p:sp>
+        <p:nvSpPr>
+          <p:cNvPr id="35" name="Shape 33"/>
+          <p:cNvSpPr/>
+          <p:nvPr/>
+        </p:nvSpPr>
+        <p:spPr>
+          <a:xfrm>
+            <a:off x="640080" y="3991356"/>
+            <a:ext cx="3435096" cy="1170432"/>
+          </a:xfrm>
+          <a:prstGeom prst="roundRect">
+            <a:avLst>
+              <a:gd name="adj" fmla="val 4688"/>
+            </a:avLst>
+          </a:prstGeom>
+          <a:solidFill>
+            <a:srgbClr val="FFFFFF"/>
+          </a:solidFill>
+          <a:ln w="12700">
+            <a:solidFill>
+              <a:srgbClr val="111827"/>
+            </a:solidFill>
+            <a:prstDash val="solid"/>
+          </a:ln>
+          <a:effectLst>
+            <a:outerShdw sx="100000" sy="100000" kx="0" ky="0" algn="bl" rotWithShape="0" blurRad="12700" dist="50800" dir="2700000">
+              <a:srgbClr val="000000">
+                <a:alpha val="12000"/>
+              </a:srgbClr>
+            </a:outerShdw>
+          </a:effectLst>
+        </p:spPr>
+      </p:sp>
+      <p:sp>
+        <p:nvSpPr>
+          <p:cNvPr id="36" name="Shape 34"/>
+          <p:cNvSpPr/>
+          <p:nvPr/>
+        </p:nvSpPr>
+        <p:spPr>
+          <a:xfrm>
+            <a:off x="640080" y="3991356"/>
+            <a:ext cx="3435096" cy="109728"/>
+          </a:xfrm>
+          <a:prstGeom prst="rect">
+            <a:avLst/>
+          </a:prstGeom>
+          <a:solidFill>
+            <a:srgbClr val="111827"/>
+          </a:solidFill>
+          <a:ln w="12700">
+            <a:solidFill>
+              <a:srgbClr val="111827">
+                <a:alpha val="0"/>
+              </a:srgbClr>
+            </a:solidFill>
+            <a:prstDash val="solid"/>
+          </a:ln>
+        </p:spPr>
+      </p:sp>
+      <p:sp>
+        <p:nvSpPr>
+          <p:cNvPr id="37" name="Shape 35"/>
+          <p:cNvSpPr/>
+          <p:nvPr/>
+        </p:nvSpPr>
+        <p:spPr>
+          <a:xfrm>
+            <a:off x="804672" y="4389303"/>
+            <a:ext cx="374538" cy="374538"/>
+          </a:xfrm>
+          <a:prstGeom prst="ellipse">
+            <a:avLst/>
+          </a:prstGeom>
+          <a:solidFill>
+            <a:srgbClr val="111827"/>
+          </a:solidFill>
+          <a:ln w="12700">
+            <a:solidFill>
+              <a:srgbClr val="111827">
+                <a:alpha val="0"/>
+              </a:srgbClr>
+            </a:solidFill>
+            <a:prstDash val="solid"/>
+          </a:ln>
+        </p:spPr>
+      </p:sp>
+      <p:sp>
+        <p:nvSpPr>
+          <p:cNvPr id="38" name="Text 36"/>
+          <p:cNvSpPr txBox="1"/>
+          <p:nvPr/>
+        </p:nvSpPr>
+        <p:spPr>
+          <a:xfrm>
+            <a:off x="804672" y="4389303"/>
+            <a:ext cx="374538" cy="374538"/>
+          </a:xfrm>
+          <a:prstGeom prst="rect">
+            <a:avLst/>
+          </a:prstGeom>
+          <a:noFill/>
+          <a:ln/>
+        </p:spPr>
+        <p:txBody>
+          <a:bodyPr wrap="square" lIns="0" tIns="0" rIns="0" bIns="0" rtlCol="0" anchor="ctr">
+            <a:normAutofit/>
+          </a:bodyPr>
+          <a:lstStyle/>
+          <a:p>
+            <a:pPr algn="ctr" indent="0" marL="0">
+              <a:lnSpc>
+                <a:spcPct val="120000"/>
+              </a:lnSpc>
+              <a:buNone/>
+            </a:pPr>
+            <a:r>
+              <a:rPr lang="en-US" sz="1500" b="1" dirty="0">
+                <a:solidFill>
+                  <a:srgbClr val="FFFFFF"/>
+                </a:solidFill>
+                <a:latin typeface="Pretendard" pitchFamily="34" charset="0"/>
+                <a:ea typeface="Pretendard" pitchFamily="34" charset="-122"/>
+                <a:cs typeface="Pretendard" pitchFamily="34" charset="-120"/>
+              </a:rPr>
+              <a:t>6</a:t>
+            </a:r>
+            <a:endParaRPr lang="en-US" sz="1500" dirty="0"/>
+          </a:p>
+        </p:txBody>
+      </p:sp>
+      <p:sp>
+        <p:nvSpPr>
+          <p:cNvPr id="39" name="Text 37"/>
+          <p:cNvSpPr txBox="1"/>
+          <p:nvPr/>
+        </p:nvSpPr>
+        <p:spPr>
+          <a:xfrm>
+            <a:off x="1325514" y="4119372"/>
+            <a:ext cx="2585070" cy="914400"/>
+          </a:xfrm>
+          <a:prstGeom prst="rect">
+            <a:avLst/>
+          </a:prstGeom>
+          <a:noFill/>
+          <a:ln/>
+        </p:spPr>
+        <p:txBody>
+          <a:bodyPr wrap="square" lIns="0" tIns="25400" rIns="25400" bIns="0" rtlCol="0" anchor="ctr">
+            <a:normAutofit/>
+          </a:bodyPr>
+          <a:lstStyle/>
+          <a:p>
+            <a:pPr algn="l" indent="0" marL="0">
+              <a:lnSpc>
+                <a:spcPct val="92000"/>
+              </a:lnSpc>
+              <a:buNone/>
+            </a:pPr>
+            <a:r>
+              <a:rPr lang="en-US" sz="1600" dirty="0">
+                <a:solidFill>
+                  <a:srgbClr val="111827"/>
+                </a:solidFill>
+                <a:latin typeface="Pretendard" pitchFamily="34" charset="0"/>
+                <a:ea typeface="Pretendard" pitchFamily="34" charset="-122"/>
+                <a:cs typeface="Pretendard" pitchFamily="34" charset="-120"/>
+              </a:rPr>
+              <a:t>Render PPTX HTML PDF</a:t>
+            </a:r>
+            <a:endParaRPr lang="en-US" sz="1600" dirty="0"/>
+          </a:p>
+        </p:txBody>
+      </p:sp>
+    </p:spTree>
+  </p:cSld>
+  <p:clrMapOvr>
+    <a:masterClrMapping/>
+  </p:clrMapOvr>
+</p:sld>
+</file>
+
+<file path=ppt/slides/slide12.xml><?xml version="1.0" encoding="utf-8"?>
+<p:sld xmlns:a="http://schemas.openxmlformats.org/drawingml/2006/main" xmlns:r="http://schemas.openxmlformats.org/officeDocument/2006/relationships" xmlns:p="http://schemas.openxmlformats.org/presentationml/2006/main">
+  <p:cSld name="Slide 12">
+    <p:bg>
+      <p:bgPr>
+        <a:solidFill>
+          <a:srgbClr val="FFFFFF"/>
+        </a:solidFill>
+      </p:bgPr>
+    </p:bg>
+    <p:spTree>
+      <p:nvGrpSpPr>
+        <p:cNvPr id="1" name=""/>
+        <p:cNvGrpSpPr/>
+        <p:nvPr/>
+      </p:nvGrpSpPr>
+      <p:grpSpPr>
+        <a:xfrm>
+          <a:off x="0" y="0"/>
+          <a:ext cx="0" cy="0"/>
+          <a:chOff x="0" y="0"/>
+          <a:chExt cx="0" cy="0"/>
+        </a:xfrm>
+      </p:grpSpPr>
+      <p:sp>
+        <p:nvSpPr>
+          <p:cNvPr id="2" name="Shape 0"/>
+          <p:cNvSpPr/>
+          <p:nvPr/>
+        </p:nvSpPr>
+        <p:spPr>
+          <a:xfrm>
+            <a:off x="749808" y="713232"/>
+            <a:ext cx="2194505" cy="0"/>
+          </a:xfrm>
+          <a:prstGeom prst="line">
+            <a:avLst/>
+          </a:prstGeom>
+          <a:noFill/>
+          <a:ln w="12700">
+            <a:solidFill>
+              <a:srgbClr val="111827">
+                <a:alpha val="82000"/>
+              </a:srgbClr>
+            </a:solidFill>
+            <a:prstDash val="solid"/>
+          </a:ln>
+        </p:spPr>
+      </p:sp>
+      <p:sp>
+        <p:nvSpPr>
+          <p:cNvPr id="3" name="Shape 1"/>
+          <p:cNvSpPr/>
+          <p:nvPr/>
+        </p:nvSpPr>
+        <p:spPr>
+          <a:xfrm>
+            <a:off x="9338767" y="6199632"/>
+            <a:ext cx="2103120" cy="0"/>
+          </a:xfrm>
+          <a:prstGeom prst="line">
+            <a:avLst/>
+          </a:prstGeom>
+          <a:noFill/>
+          <a:ln w="12700">
+            <a:solidFill>
+              <a:srgbClr val="E5E7EB">
+                <a:alpha val="82000"/>
+              </a:srgbClr>
+            </a:solidFill>
+            <a:prstDash val="solid"/>
+          </a:ln>
+        </p:spPr>
+      </p:sp>
+      <p:sp>
+        <p:nvSpPr>
+          <p:cNvPr id="4" name="Shape 2"/>
+          <p:cNvSpPr/>
+          <p:nvPr/>
+        </p:nvSpPr>
+        <p:spPr>
+          <a:xfrm>
+            <a:off x="822960" y="1463040"/>
+            <a:ext cx="73152" cy="1920240"/>
+          </a:xfrm>
+          <a:prstGeom prst="rect">
+            <a:avLst/>
+          </a:prstGeom>
+          <a:solidFill>
+            <a:srgbClr val="111827"/>
+          </a:solidFill>
+          <a:ln w="12700">
+            <a:solidFill>
+              <a:srgbClr val="111827">
+                <a:alpha val="0"/>
+              </a:srgbClr>
+            </a:solidFill>
+            <a:prstDash val="solid"/>
+          </a:ln>
+        </p:spPr>
+      </p:sp>
+      <p:sp>
+        <p:nvSpPr>
+          <p:cNvPr id="5" name="Shape 3"/>
+          <p:cNvSpPr/>
+          <p:nvPr/>
+        </p:nvSpPr>
+        <p:spPr>
+          <a:xfrm>
+            <a:off x="6309360" y="1463040"/>
+            <a:ext cx="73152" cy="1920240"/>
+          </a:xfrm>
+          <a:prstGeom prst="rect">
+            <a:avLst/>
+          </a:prstGeom>
+          <a:solidFill>
+            <a:srgbClr val="E5E7EB"/>
+          </a:solidFill>
+          <a:ln w="12700">
+            <a:solidFill>
+              <a:srgbClr val="E5E7EB">
+                <a:alpha val="0"/>
+              </a:srgbClr>
+            </a:solidFill>
+            <a:prstDash val="solid"/>
+          </a:ln>
+        </p:spPr>
+      </p:sp>
+      <p:sp>
+        <p:nvSpPr>
+          <p:cNvPr id="6" name="Shape 4"/>
+          <p:cNvSpPr/>
+          <p:nvPr/>
+        </p:nvSpPr>
+        <p:spPr>
+          <a:xfrm>
+            <a:off x="822960" y="3749040"/>
+            <a:ext cx="73152" cy="1920240"/>
+          </a:xfrm>
+          <a:prstGeom prst="rect">
+            <a:avLst/>
+          </a:prstGeom>
+          <a:solidFill>
+            <a:srgbClr val="111827"/>
+          </a:solidFill>
+          <a:ln w="12700">
+            <a:solidFill>
+              <a:srgbClr val="111827">
+                <a:alpha val="0"/>
+              </a:srgbClr>
+            </a:solidFill>
+            <a:prstDash val="solid"/>
+          </a:ln>
+        </p:spPr>
+      </p:sp>
+      <p:sp>
+        <p:nvSpPr>
+          <p:cNvPr id="7" name="Shape 5"/>
+          <p:cNvSpPr/>
+          <p:nvPr/>
+        </p:nvSpPr>
+        <p:spPr>
+          <a:xfrm>
+            <a:off x="6309360" y="3749040"/>
+            <a:ext cx="73152" cy="1920240"/>
+          </a:xfrm>
+          <a:prstGeom prst="rect">
+            <a:avLst/>
+          </a:prstGeom>
+          <a:solidFill>
+            <a:srgbClr val="E5E7EB"/>
+          </a:solidFill>
+          <a:ln w="12700">
+            <a:solidFill>
+              <a:srgbClr val="E5E7EB">
+                <a:alpha val="0"/>
+              </a:srgbClr>
+            </a:solidFill>
+            <a:prstDash val="solid"/>
+          </a:ln>
+        </p:spPr>
+      </p:sp>
+      <p:pic>
+        <p:nvPicPr>
+          <p:cNvPr id="8" name="Image 0" descr="preencoded.png">    </p:cNvPr>
+          <p:cNvPicPr>
+            <a:picLocks noChangeAspect="1"/>
+          </p:cNvPicPr>
+          <p:nvPr/>
+        </p:nvPicPr>
+        <p:blipFill>
+          <a:blip r:embed="rId1">
+            <a:extLst>
+              <a:ext uri="{96DAC541-7B7A-43D3-8B79-37D633B846F1}">
+                <asvg:svgBlip xmlns:asvg="http://schemas.microsoft.com/office/drawing/2016/SVG/main" r:embed="rId2"/>
+              </a:ext>
+            </a:extLst>
+          </a:blip>
+          <a:stretch>
+            <a:fillRect/>
+          </a:stretch>
+        </p:blipFill>
+        <p:spPr>
+          <a:xfrm>
+            <a:off x="822960" y="1463040"/>
+            <a:ext cx="5029200" cy="1920240"/>
+          </a:xfrm>
+          <a:prstGeom prst="rect">
+            <a:avLst/>
+          </a:prstGeom>
+        </p:spPr>
+      </p:pic>
+      <p:pic>
+        <p:nvPicPr>
+          <p:cNvPr id="9" name="Image 1" descr="preencoded.png">    </p:cNvPr>
+          <p:cNvPicPr>
+            <a:picLocks noChangeAspect="1"/>
+          </p:cNvPicPr>
+          <p:nvPr/>
+        </p:nvPicPr>
+        <p:blipFill>
+          <a:blip r:embed="rId3">
+            <a:extLst>
+              <a:ext uri="{96DAC541-7B7A-43D3-8B79-37D633B846F1}">
+                <asvg:svgBlip xmlns:asvg="http://schemas.microsoft.com/office/drawing/2016/SVG/main" r:embed="rId4"/>
+              </a:ext>
+            </a:extLst>
+          </a:blip>
+          <a:stretch>
+            <a:fillRect/>
+          </a:stretch>
+        </p:blipFill>
+        <p:spPr>
+          <a:xfrm>
+            <a:off x="6309360" y="1463040"/>
+            <a:ext cx="5029200" cy="1920240"/>
+          </a:xfrm>
+          <a:prstGeom prst="rect">
+            <a:avLst/>
+          </a:prstGeom>
+        </p:spPr>
+      </p:pic>
+      <p:pic>
+        <p:nvPicPr>
+          <p:cNvPr id="10" name="Image 2" descr="preencoded.png">    </p:cNvPr>
+          <p:cNvPicPr>
+            <a:picLocks noChangeAspect="1"/>
+          </p:cNvPicPr>
+          <p:nvPr/>
+        </p:nvPicPr>
+        <p:blipFill>
+          <a:blip r:embed="rId5">
+            <a:extLst>
+              <a:ext uri="{96DAC541-7B7A-43D3-8B79-37D633B846F1}">
+                <asvg:svgBlip xmlns:asvg="http://schemas.microsoft.com/office/drawing/2016/SVG/main" r:embed="rId6"/>
+              </a:ext>
+            </a:extLst>
+          </a:blip>
+          <a:stretch>
+            <a:fillRect/>
+          </a:stretch>
+        </p:blipFill>
+        <p:spPr>
+          <a:xfrm>
+            <a:off x="822960" y="3749040"/>
+            <a:ext cx="5029200" cy="1920240"/>
+          </a:xfrm>
+          <a:prstGeom prst="rect">
+            <a:avLst/>
+          </a:prstGeom>
+        </p:spPr>
+      </p:pic>
+      <p:pic>
+        <p:nvPicPr>
+          <p:cNvPr id="11" name="Image 3" descr="preencoded.png">    </p:cNvPr>
+          <p:cNvPicPr>
+            <a:picLocks noChangeAspect="1"/>
+          </p:cNvPicPr>
+          <p:nvPr/>
+        </p:nvPicPr>
+        <p:blipFill>
+          <a:blip r:embed="rId7">
+            <a:extLst>
+              <a:ext uri="{96DAC541-7B7A-43D3-8B79-37D633B846F1}">
+                <asvg:svgBlip xmlns:asvg="http://schemas.microsoft.com/office/drawing/2016/SVG/main" r:embed="rId8"/>
+              </a:ext>
+            </a:extLst>
+          </a:blip>
+          <a:stretch>
+            <a:fillRect/>
+          </a:stretch>
+        </p:blipFill>
+        <p:spPr>
+          <a:xfrm>
+            <a:off x="6309360" y="3749040"/>
+            <a:ext cx="5029200" cy="1920240"/>
+          </a:xfrm>
+          <a:prstGeom prst="rect">
+            <a:avLst/>
+          </a:prstGeom>
+        </p:spPr>
+      </p:pic>
+      <p:sp>
+        <p:nvSpPr>
+          <p:cNvPr id="12" name="Text 6"/>
           <p:cNvSpPr txBox="1"/>
           <p:nvPr/>
         </p:nvSpPr>
@@ -5050,14 +5636,71 @@
       </p:sp>
       <p:sp>
         <p:nvSpPr>
-          <p:cNvPr id="6" name="Text 4"/>
+          <p:cNvPr id="13" name="Shape 7"/>
+          <p:cNvSpPr/>
+          <p:nvPr/>
+        </p:nvSpPr>
+        <p:spPr>
+          <a:xfrm>
+            <a:off x="976122" y="2130552"/>
+            <a:ext cx="585216" cy="585216"/>
+          </a:xfrm>
+          <a:prstGeom prst="roundRect">
+            <a:avLst>
+              <a:gd name="adj" fmla="val 6250"/>
+            </a:avLst>
+          </a:prstGeom>
+          <a:solidFill>
+            <a:srgbClr val="FFFFFF"/>
+          </a:solidFill>
+          <a:ln w="12700">
+            <a:solidFill>
+              <a:srgbClr val="E5E7EB"/>
+            </a:solidFill>
+            <a:prstDash val="solid"/>
+          </a:ln>
+        </p:spPr>
+      </p:sp>
+      <p:pic>
+        <p:nvPicPr>
+          <p:cNvPr id="14" name="Image 4" descr="article icon from tabler-icons (MIT)">    </p:cNvPr>
+          <p:cNvPicPr>
+            <a:picLocks noChangeAspect="1"/>
+          </p:cNvPicPr>
+          <p:nvPr/>
+        </p:nvPicPr>
+        <p:blipFill>
+          <a:blip r:embed="rId9">
+            <a:extLst>
+              <a:ext uri="{96DAC541-7B7A-43D3-8B79-37D633B846F1}">
+                <asvg:svgBlip xmlns:asvg="http://schemas.microsoft.com/office/drawing/2016/SVG/main" r:embed="rId10"/>
+              </a:ext>
+            </a:extLst>
+          </a:blip>
+          <a:stretch>
+            <a:fillRect/>
+          </a:stretch>
+        </p:blipFill>
+        <p:spPr>
+          <a:xfrm>
+            <a:off x="1049274" y="2203704"/>
+            <a:ext cx="438912" cy="438912"/>
+          </a:xfrm>
+          <a:prstGeom prst="rect">
+            <a:avLst/>
+          </a:prstGeom>
+        </p:spPr>
+      </p:pic>
+      <p:sp>
+        <p:nvSpPr>
+          <p:cNvPr id="15" name="Text 8"/>
           <p:cNvSpPr txBox="1"/>
           <p:nvPr/>
         </p:nvSpPr>
         <p:spPr>
           <a:xfrm>
-            <a:off x="987552" y="1572768"/>
-            <a:ext cx="10094976" cy="4261104"/>
+            <a:off x="1689354" y="1627632"/>
+            <a:ext cx="3961638" cy="1591056"/>
           </a:xfrm>
           <a:prstGeom prst="rect">
             <a:avLst/>
@@ -5066,7 +5709,7 @@
           <a:ln/>
         </p:spPr>
         <p:txBody>
-          <a:bodyPr wrap="square" lIns="0" tIns="25400" rIns="25400" bIns="0" rtlCol="0" anchor="t"/>
+          <a:bodyPr wrap="square" lIns="0" tIns="25400" rIns="25400" bIns="0" rtlCol="0" anchor="ctr"/>
           <a:lstStyle/>
           <a:p>
             <a:pPr algn="l" indent="0" marL="0">
@@ -5084,7 +5727,7 @@
                 <a:ea typeface="Pretendard" pitchFamily="34" charset="-122"/>
                 <a:cs typeface="Pretendard" pitchFamily="34" charset="-120"/>
               </a:rPr>
-              <a:t>- Surfaces</a:t>
+              <a:t>Surfaces</a:t>
             </a:r>
             <a:pPr algn="l" indent="0" marL="0">
               <a:lnSpc>
@@ -5105,6 +5748,85 @@
             </a:r>
             <a:endParaRPr lang="en-US" sz="2200" dirty="0"/>
           </a:p>
+        </p:txBody>
+      </p:sp>
+      <p:sp>
+        <p:nvSpPr>
+          <p:cNvPr id="16" name="Shape 9"/>
+          <p:cNvSpPr/>
+          <p:nvPr/>
+        </p:nvSpPr>
+        <p:spPr>
+          <a:xfrm>
+            <a:off x="6462522" y="2130552"/>
+            <a:ext cx="585216" cy="585216"/>
+          </a:xfrm>
+          <a:prstGeom prst="roundRect">
+            <a:avLst>
+              <a:gd name="adj" fmla="val 6250"/>
+            </a:avLst>
+          </a:prstGeom>
+          <a:solidFill>
+            <a:srgbClr val="FFFFFF"/>
+          </a:solidFill>
+          <a:ln w="12700">
+            <a:solidFill>
+              <a:srgbClr val="E5E7EB"/>
+            </a:solidFill>
+            <a:prstDash val="solid"/>
+          </a:ln>
+        </p:spPr>
+      </p:sp>
+      <p:pic>
+        <p:nvPicPr>
+          <p:cNvPr id="17" name="Image 5" descr="table icon from tabler-icons (MIT)">    </p:cNvPr>
+          <p:cNvPicPr>
+            <a:picLocks noChangeAspect="1"/>
+          </p:cNvPicPr>
+          <p:nvPr/>
+        </p:nvPicPr>
+        <p:blipFill>
+          <a:blip r:embed="rId11">
+            <a:extLst>
+              <a:ext uri="{96DAC541-7B7A-43D3-8B79-37D633B846F1}">
+                <asvg:svgBlip xmlns:asvg="http://schemas.microsoft.com/office/drawing/2016/SVG/main" r:embed="rId12"/>
+              </a:ext>
+            </a:extLst>
+          </a:blip>
+          <a:stretch>
+            <a:fillRect/>
+          </a:stretch>
+        </p:blipFill>
+        <p:spPr>
+          <a:xfrm>
+            <a:off x="6535674" y="2203704"/>
+            <a:ext cx="438912" cy="438912"/>
+          </a:xfrm>
+          <a:prstGeom prst="rect">
+            <a:avLst/>
+          </a:prstGeom>
+        </p:spPr>
+      </p:pic>
+      <p:sp>
+        <p:nvSpPr>
+          <p:cNvPr id="18" name="Text 10"/>
+          <p:cNvSpPr txBox="1"/>
+          <p:nvPr/>
+        </p:nvSpPr>
+        <p:spPr>
+          <a:xfrm>
+            <a:off x="7175754" y="1627632"/>
+            <a:ext cx="3961638" cy="1591056"/>
+          </a:xfrm>
+          <a:prstGeom prst="rect">
+            <a:avLst/>
+          </a:prstGeom>
+          <a:noFill/>
+          <a:ln/>
+        </p:spPr>
+        <p:txBody>
+          <a:bodyPr wrap="square" lIns="0" tIns="25400" rIns="25400" bIns="0" rtlCol="0" anchor="ctr"/>
+          <a:lstStyle/>
           <a:p>
             <a:pPr algn="l" indent="0" marL="0">
               <a:lnSpc>
@@ -5121,11 +5843,8 @@
                 <a:ea typeface="Pretendard" pitchFamily="34" charset="-122"/>
                 <a:cs typeface="Pretendard" pitchFamily="34" charset="-120"/>
               </a:rPr>
-              <a:t>- Layouts</a:t>
+              <a:t>Layouts</a:t>
             </a:r>
-            <a:endParaRPr lang="en-US" sz="2200" dirty="0"/>
-          </a:p>
-          <a:p>
             <a:pPr algn="l" indent="0" marL="0">
               <a:lnSpc>
                 <a:spcPct val="120000"/>
@@ -5145,6 +5864,85 @@
             </a:r>
             <a:endParaRPr lang="en-US" sz="2200" dirty="0"/>
           </a:p>
+        </p:txBody>
+      </p:sp>
+      <p:sp>
+        <p:nvSpPr>
+          <p:cNvPr id="19" name="Shape 11"/>
+          <p:cNvSpPr/>
+          <p:nvPr/>
+        </p:nvSpPr>
+        <p:spPr>
+          <a:xfrm>
+            <a:off x="976122" y="4416552"/>
+            <a:ext cx="585216" cy="585216"/>
+          </a:xfrm>
+          <a:prstGeom prst="roundRect">
+            <a:avLst>
+              <a:gd name="adj" fmla="val 6250"/>
+            </a:avLst>
+          </a:prstGeom>
+          <a:solidFill>
+            <a:srgbClr val="FFFFFF"/>
+          </a:solidFill>
+          <a:ln w="12700">
+            <a:solidFill>
+              <a:srgbClr val="E5E7EB"/>
+            </a:solidFill>
+            <a:prstDash val="solid"/>
+          </a:ln>
+        </p:spPr>
+      </p:sp>
+      <p:pic>
+        <p:nvPicPr>
+          <p:cNvPr id="20" name="Image 6" descr="chart icon from tabler-icons (MIT)">    </p:cNvPr>
+          <p:cNvPicPr>
+            <a:picLocks noChangeAspect="1"/>
+          </p:cNvPicPr>
+          <p:nvPr/>
+        </p:nvPicPr>
+        <p:blipFill>
+          <a:blip r:embed="rId13">
+            <a:extLst>
+              <a:ext uri="{96DAC541-7B7A-43D3-8B79-37D633B846F1}">
+                <asvg:svgBlip xmlns:asvg="http://schemas.microsoft.com/office/drawing/2016/SVG/main" r:embed="rId14"/>
+              </a:ext>
+            </a:extLst>
+          </a:blip>
+          <a:stretch>
+            <a:fillRect/>
+          </a:stretch>
+        </p:blipFill>
+        <p:spPr>
+          <a:xfrm>
+            <a:off x="1049274" y="4489704"/>
+            <a:ext cx="438912" cy="438912"/>
+          </a:xfrm>
+          <a:prstGeom prst="rect">
+            <a:avLst/>
+          </a:prstGeom>
+        </p:spPr>
+      </p:pic>
+      <p:sp>
+        <p:nvSpPr>
+          <p:cNvPr id="21" name="Text 12"/>
+          <p:cNvSpPr txBox="1"/>
+          <p:nvPr/>
+        </p:nvSpPr>
+        <p:spPr>
+          <a:xfrm>
+            <a:off x="1689354" y="3913632"/>
+            <a:ext cx="3961638" cy="1591056"/>
+          </a:xfrm>
+          <a:prstGeom prst="rect">
+            <a:avLst/>
+          </a:prstGeom>
+          <a:noFill/>
+          <a:ln/>
+        </p:spPr>
+        <p:txBody>
+          <a:bodyPr wrap="square" lIns="0" tIns="25400" rIns="25400" bIns="0" rtlCol="0" anchor="ctr"/>
+          <a:lstStyle/>
           <a:p>
             <a:pPr algn="l" indent="0" marL="0">
               <a:lnSpc>
@@ -5161,11 +5959,8 @@
                 <a:ea typeface="Pretendard" pitchFamily="34" charset="-122"/>
                 <a:cs typeface="Pretendard" pitchFamily="34" charset="-120"/>
               </a:rPr>
-              <a:t>- Evidence</a:t>
+              <a:t>Evidence</a:t>
             </a:r>
-            <a:endParaRPr lang="en-US" sz="2200" dirty="0"/>
-          </a:p>
-          <a:p>
             <a:pPr algn="l" indent="0" marL="0">
               <a:lnSpc>
                 <a:spcPct val="120000"/>
@@ -5185,6 +5980,85 @@
             </a:r>
             <a:endParaRPr lang="en-US" sz="2200" dirty="0"/>
           </a:p>
+        </p:txBody>
+      </p:sp>
+      <p:sp>
+        <p:nvSpPr>
+          <p:cNvPr id="22" name="Shape 13"/>
+          <p:cNvSpPr/>
+          <p:nvPr/>
+        </p:nvSpPr>
+        <p:spPr>
+          <a:xfrm>
+            <a:off x="6462522" y="4416552"/>
+            <a:ext cx="585216" cy="585216"/>
+          </a:xfrm>
+          <a:prstGeom prst="roundRect">
+            <a:avLst>
+              <a:gd name="adj" fmla="val 6250"/>
+            </a:avLst>
+          </a:prstGeom>
+          <a:solidFill>
+            <a:srgbClr val="FFFFFF"/>
+          </a:solidFill>
+          <a:ln w="12700">
+            <a:solidFill>
+              <a:srgbClr val="E5E7EB"/>
+            </a:solidFill>
+            <a:prstDash val="solid"/>
+          </a:ln>
+        </p:spPr>
+      </p:sp>
+      <p:pic>
+        <p:nvPicPr>
+          <p:cNvPr id="23" name="Image 7" descr="flow icon from tabler-icons (MIT)">    </p:cNvPr>
+          <p:cNvPicPr>
+            <a:picLocks noChangeAspect="1"/>
+          </p:cNvPicPr>
+          <p:nvPr/>
+        </p:nvPicPr>
+        <p:blipFill>
+          <a:blip r:embed="rId15">
+            <a:extLst>
+              <a:ext uri="{96DAC541-7B7A-43D3-8B79-37D633B846F1}">
+                <asvg:svgBlip xmlns:asvg="http://schemas.microsoft.com/office/drawing/2016/SVG/main" r:embed="rId16"/>
+              </a:ext>
+            </a:extLst>
+          </a:blip>
+          <a:stretch>
+            <a:fillRect/>
+          </a:stretch>
+        </p:blipFill>
+        <p:spPr>
+          <a:xfrm>
+            <a:off x="6535674" y="4489704"/>
+            <a:ext cx="438912" cy="438912"/>
+          </a:xfrm>
+          <a:prstGeom prst="rect">
+            <a:avLst/>
+          </a:prstGeom>
+        </p:spPr>
+      </p:pic>
+      <p:sp>
+        <p:nvSpPr>
+          <p:cNvPr id="24" name="Text 14"/>
+          <p:cNvSpPr txBox="1"/>
+          <p:nvPr/>
+        </p:nvSpPr>
+        <p:spPr>
+          <a:xfrm>
+            <a:off x="7175754" y="3913632"/>
+            <a:ext cx="3961638" cy="1591056"/>
+          </a:xfrm>
+          <a:prstGeom prst="rect">
+            <a:avLst/>
+          </a:prstGeom>
+          <a:noFill/>
+          <a:ln/>
+        </p:spPr>
+        <p:txBody>
+          <a:bodyPr wrap="square" lIns="0" tIns="25400" rIns="25400" bIns="0" rtlCol="0" anchor="ctr"/>
+          <a:lstStyle/>
           <a:p>
             <a:pPr algn="l" indent="0" marL="0">
               <a:lnSpc>
@@ -5201,11 +6075,8 @@
                 <a:ea typeface="Pretendard" pitchFamily="34" charset="-122"/>
                 <a:cs typeface="Pretendard" pitchFamily="34" charset="-120"/>
               </a:rPr>
-              <a:t>- Connectors</a:t>
+              <a:t>Connectors</a:t>
             </a:r>
-            <a:endParaRPr lang="en-US" sz="2200" dirty="0"/>
-          </a:p>
-          <a:p>
             <a:pPr algn="l" indent="0" marL="0">
               <a:lnSpc>
                 <a:spcPct val="120000"/>
@@ -5235,9 +6106,9 @@
 </p:sld>
 </file>
 
-<file path=ppt/slides/slide12.xml><?xml version="1.0" encoding="utf-8"?>
+<file path=ppt/slides/slide13.xml><?xml version="1.0" encoding="utf-8"?>
 <p:sld xmlns:a="http://schemas.openxmlformats.org/drawingml/2006/main" xmlns:r="http://schemas.openxmlformats.org/officeDocument/2006/relationships" xmlns:p="http://schemas.openxmlformats.org/presentationml/2006/main">
-  <p:cSld name="Slide 12">
+  <p:cSld name="Slide 13">
     <p:bg>
       <p:bgPr>
         <a:solidFill>
@@ -5517,7 +6388,7 @@
                 <a:ea typeface="Pretendard" pitchFamily="34" charset="-122"/>
                 <a:cs typeface="Pretendard" pitchFamily="34" charset="-120"/>
               </a:rPr>
-              <a:t>  magazine-rail, grid-baseline, glass-surface, newmorphic-panel, data-rail, minimal-rule.</a:t>
+              <a:t>  clean-card, glass-surface, newmorphic-panel, data-rail, minimal-rule.</a:t>
             </a:r>
             <a:endParaRPr lang="en-US" sz="2200" dirty="0"/>
           </a:p>
@@ -5531,9 +6402,9 @@
 </p:sld>
 </file>
 
-<file path=ppt/slides/slide13.xml><?xml version="1.0" encoding="utf-8"?>
+<file path=ppt/slides/slide14.xml><?xml version="1.0" encoding="utf-8"?>
 <p:sld xmlns:a="http://schemas.openxmlformats.org/drawingml/2006/main" xmlns:r="http://schemas.openxmlformats.org/officeDocument/2006/relationships" xmlns:p="http://schemas.openxmlformats.org/presentationml/2006/main">
-  <p:cSld name="Slide 13">
+  <p:cSld name="Slide 14">
     <p:bg>
       <p:bgPr>
         <a:solidFill>
@@ -5679,7 +6550,7 @@
       </p:sp>
       <p:graphicFrame>
         <p:nvGraphicFramePr>
-          <p:cNvPr id="14" name="Table 0"/>
+          <p:cNvPr id="15" name="Table 0"/>
           <p:cNvGraphicFramePr>
             <a:graphicFrameLocks noGrp="1"/>
           </p:cNvGraphicFramePr>
@@ -6740,9 +7611,9 @@
 </p:sld>
 </file>
 
-<file path=ppt/slides/slide14.xml><?xml version="1.0" encoding="utf-8"?>
+<file path=ppt/slides/slide15.xml><?xml version="1.0" encoding="utf-8"?>
 <p:sld xmlns:a="http://schemas.openxmlformats.org/drawingml/2006/main" xmlns:r="http://schemas.openxmlformats.org/officeDocument/2006/relationships" xmlns:p="http://schemas.openxmlformats.org/presentationml/2006/main">
-  <p:cSld name="Slide 14">
+  <p:cSld name="Slide 15">
     <p:bg>
       <p:bgPr>
         <a:solidFill>
@@ -7076,9 +7947,9 @@
 </p:sld>
 </file>
 
-<file path=ppt/slides/slide15.xml><?xml version="1.0" encoding="utf-8"?>
+<file path=ppt/slides/slide16.xml><?xml version="1.0" encoding="utf-8"?>
 <p:sld xmlns:a="http://schemas.openxmlformats.org/drawingml/2006/main" xmlns:r="http://schemas.openxmlformats.org/officeDocument/2006/relationships" xmlns:p="http://schemas.openxmlformats.org/presentationml/2006/main">
-  <p:cSld name="Slide 15">
+  <p:cSld name="Slide 16">
     <p:bg>
       <p:bgPr>
         <a:solidFill>
@@ -7224,7 +8095,7 @@
       </p:sp>
       <p:graphicFrame>
         <p:nvGraphicFramePr>
-          <p:cNvPr id="16" name="Table 0"/>
+          <p:cNvPr id="17" name="Table 0"/>
           <p:cNvGraphicFramePr>
             <a:graphicFrameLocks noGrp="1"/>
           </p:cNvGraphicFramePr>
@@ -8073,9 +8944,9 @@
 </p:sld>
 </file>
 
-<file path=ppt/slides/slide16.xml><?xml version="1.0" encoding="utf-8"?>
+<file path=ppt/slides/slide17.xml><?xml version="1.0" encoding="utf-8"?>
 <p:sld xmlns:a="http://schemas.openxmlformats.org/drawingml/2006/main" xmlns:r="http://schemas.openxmlformats.org/officeDocument/2006/relationships" xmlns:p="http://schemas.openxmlformats.org/presentationml/2006/main">
-  <p:cSld name="Slide 16">
+  <p:cSld name="Slide 17">
     <p:bg>
       <p:bgPr>
         <a:solidFill>
@@ -8921,800 +9792,6 @@
             <a:endParaRPr lang="en-US" sz="1400" dirty="0"/>
           </a:p>
         </p:txBody>
-      </p:sp>
-    </p:spTree>
-  </p:cSld>
-  <p:clrMapOvr>
-    <a:masterClrMapping/>
-  </p:clrMapOvr>
-</p:sld>
-</file>
-
-<file path=ppt/slides/slide17.xml><?xml version="1.0" encoding="utf-8"?>
-<p:sld xmlns:a="http://schemas.openxmlformats.org/drawingml/2006/main" xmlns:r="http://schemas.openxmlformats.org/officeDocument/2006/relationships" xmlns:p="http://schemas.openxmlformats.org/presentationml/2006/main">
-  <p:cSld name="Slide 17">
-    <p:bg>
-      <p:bgPr>
-        <a:solidFill>
-          <a:srgbClr val="FFFFFF"/>
-        </a:solidFill>
-      </p:bgPr>
-    </p:bg>
-    <p:spTree>
-      <p:nvGrpSpPr>
-        <p:cNvPr id="1" name=""/>
-        <p:cNvGrpSpPr/>
-        <p:nvPr/>
-      </p:nvGrpSpPr>
-      <p:grpSpPr>
-        <a:xfrm>
-          <a:off x="0" y="0"/>
-          <a:ext cx="0" cy="0"/>
-          <a:chOff x="0" y="0"/>
-          <a:chExt cx="0" cy="0"/>
-        </a:xfrm>
-      </p:grpSpPr>
-      <p:sp>
-        <p:nvSpPr>
-          <p:cNvPr id="2" name="Shape 0"/>
-          <p:cNvSpPr/>
-          <p:nvPr/>
-        </p:nvSpPr>
-        <p:spPr>
-          <a:xfrm>
-            <a:off x="749808" y="713232"/>
-            <a:ext cx="2194505" cy="0"/>
-          </a:xfrm>
-          <a:prstGeom prst="line">
-            <a:avLst/>
-          </a:prstGeom>
-          <a:noFill/>
-          <a:ln w="12700">
-            <a:solidFill>
-              <a:srgbClr val="111827">
-                <a:alpha val="82000"/>
-              </a:srgbClr>
-            </a:solidFill>
-            <a:prstDash val="solid"/>
-          </a:ln>
-        </p:spPr>
-      </p:sp>
-      <p:sp>
-        <p:nvSpPr>
-          <p:cNvPr id="3" name="Shape 1"/>
-          <p:cNvSpPr/>
-          <p:nvPr/>
-        </p:nvSpPr>
-        <p:spPr>
-          <a:xfrm>
-            <a:off x="9338767" y="6199632"/>
-            <a:ext cx="2103120" cy="0"/>
-          </a:xfrm>
-          <a:prstGeom prst="line">
-            <a:avLst/>
-          </a:prstGeom>
-          <a:noFill/>
-          <a:ln w="12700">
-            <a:solidFill>
-              <a:srgbClr val="E5E7EB">
-                <a:alpha val="82000"/>
-              </a:srgbClr>
-            </a:solidFill>
-            <a:prstDash val="solid"/>
-          </a:ln>
-        </p:spPr>
-      </p:sp>
-      <p:pic>
-        <p:nvPicPr>
-          <p:cNvPr id="4" name="Image 0" descr="preencoded.png">    </p:cNvPr>
-          <p:cNvPicPr>
-            <a:picLocks noChangeAspect="1"/>
-          </p:cNvPicPr>
-          <p:nvPr/>
-        </p:nvPicPr>
-        <p:blipFill>
-          <a:blip r:embed="rId1">
-            <a:extLst>
-              <a:ext uri="{96DAC541-7B7A-43D3-8B79-37D633B846F1}">
-                <asvg:svgBlip xmlns:asvg="http://schemas.microsoft.com/office/drawing/2016/SVG/main" r:embed="rId2"/>
-              </a:ext>
-            </a:extLst>
-          </a:blip>
-          <a:stretch>
-            <a:fillRect/>
-          </a:stretch>
-        </p:blipFill>
-        <p:spPr>
-          <a:xfrm>
-            <a:off x="914400" y="1417320"/>
-            <a:ext cx="10241280" cy="4343400"/>
-          </a:xfrm>
-          <a:prstGeom prst="rect">
-            <a:avLst/>
-          </a:prstGeom>
-        </p:spPr>
-      </p:pic>
-      <p:sp>
-        <p:nvSpPr>
-          <p:cNvPr id="5" name="Text 2"/>
-          <p:cNvSpPr txBox="1"/>
-          <p:nvPr/>
-        </p:nvSpPr>
-        <p:spPr>
-          <a:xfrm>
-            <a:off x="731520" y="457200"/>
-            <a:ext cx="10698480" cy="731520"/>
-          </a:xfrm>
-          <a:prstGeom prst="rect">
-            <a:avLst/>
-          </a:prstGeom>
-          <a:noFill/>
-          <a:ln/>
-        </p:spPr>
-        <p:txBody>
-          <a:bodyPr wrap="square" lIns="0" tIns="0" rIns="0" bIns="0" rtlCol="0" anchor="ctr"/>
-          <a:lstStyle/>
-          <a:p>
-            <a:pPr algn="ctr" indent="0" marL="0">
-              <a:lnSpc>
-                <a:spcPct val="120000"/>
-              </a:lnSpc>
-              <a:buNone/>
-            </a:pPr>
-            <a:r>
-              <a:rPr lang="en-US" sz="3400" b="1" dirty="0">
-                <a:solidFill>
-                  <a:srgbClr val="111827"/>
-                </a:solidFill>
-                <a:latin typeface="Pretendard" pitchFamily="34" charset="0"/>
-                <a:ea typeface="Pretendard" pitchFamily="34" charset="-122"/>
-                <a:cs typeface="Pretendard" pitchFamily="34" charset="-120"/>
-              </a:rPr>
-              <a:t>Editable Proof Objects (Cont. 2/2)</a:t>
-            </a:r>
-            <a:endParaRPr lang="en-US" sz="3400" dirty="0"/>
-          </a:p>
-        </p:txBody>
-      </p:sp>
-      <p:sp>
-        <p:nvSpPr>
-          <p:cNvPr id="6" name="Shape 3"/>
-          <p:cNvSpPr/>
-          <p:nvPr/>
-        </p:nvSpPr>
-        <p:spPr>
-          <a:xfrm>
-            <a:off x="1078992" y="2446020"/>
-            <a:ext cx="2262957" cy="2286000"/>
-          </a:xfrm>
-          <a:prstGeom prst="roundRect">
-            <a:avLst>
-              <a:gd name="adj" fmla="val 2020"/>
-            </a:avLst>
-          </a:prstGeom>
-          <a:solidFill>
-            <a:srgbClr val="FFFFFF"/>
-          </a:solidFill>
-          <a:ln w="12700">
-            <a:solidFill>
-              <a:srgbClr val="E5E7EB"/>
-            </a:solidFill>
-            <a:prstDash val="solid"/>
-          </a:ln>
-        </p:spPr>
-      </p:sp>
-      <p:sp>
-        <p:nvSpPr>
-          <p:cNvPr id="7" name="Shape 4"/>
-          <p:cNvSpPr/>
-          <p:nvPr/>
-        </p:nvSpPr>
-        <p:spPr>
-          <a:xfrm>
-            <a:off x="1280160" y="4347972"/>
-            <a:ext cx="593815" cy="128016"/>
-          </a:xfrm>
-          <a:prstGeom prst="rect">
-            <a:avLst/>
-          </a:prstGeom>
-          <a:solidFill>
-            <a:srgbClr val="111827"/>
-          </a:solidFill>
-          <a:ln w="12700">
-            <a:solidFill>
-              <a:srgbClr val="111827">
-                <a:alpha val="0"/>
-              </a:srgbClr>
-            </a:solidFill>
-            <a:prstDash val="solid"/>
-          </a:ln>
-        </p:spPr>
-      </p:sp>
-      <p:sp>
-        <p:nvSpPr>
-          <p:cNvPr id="8" name="Text 5"/>
-          <p:cNvSpPr txBox="1"/>
-          <p:nvPr/>
-        </p:nvSpPr>
-        <p:spPr>
-          <a:xfrm>
-            <a:off x="1261872" y="2574036"/>
-            <a:ext cx="1897197" cy="914400"/>
-          </a:xfrm>
-          <a:prstGeom prst="rect">
-            <a:avLst/>
-          </a:prstGeom>
-          <a:noFill/>
-          <a:ln/>
-        </p:spPr>
-        <p:txBody>
-          <a:bodyPr wrap="square" lIns="381" tIns="508" rIns="508" bIns="381" rtlCol="0" anchor="ctr">
-            <a:normAutofit/>
-          </a:bodyPr>
-          <a:lstStyle/>
-          <a:p>
-            <a:pPr algn="ctr" indent="0" marL="0">
-              <a:lnSpc>
-                <a:spcPct val="120000"/>
-              </a:lnSpc>
-              <a:buNone/>
-            </a:pPr>
-            <a:r>
-              <a:rPr lang="en-US" sz="1800" b="1" dirty="0">
-                <a:solidFill>
-                  <a:srgbClr val="111827"/>
-                </a:solidFill>
-                <a:latin typeface="Pretendard" pitchFamily="34" charset="0"/>
-                <a:ea typeface="Pretendard" pitchFamily="34" charset="-122"/>
-                <a:cs typeface="Pretendard" pitchFamily="34" charset="-120"/>
-              </a:rPr>
-              <a:t>Parse</a:t>
-            </a:r>
-            <a:endParaRPr lang="en-US" sz="1800" dirty="0"/>
-          </a:p>
-        </p:txBody>
-      </p:sp>
-      <p:sp>
-        <p:nvSpPr>
-          <p:cNvPr id="9" name="Text 6"/>
-          <p:cNvSpPr txBox="1"/>
-          <p:nvPr/>
-        </p:nvSpPr>
-        <p:spPr>
-          <a:xfrm>
-            <a:off x="1261872" y="3543300"/>
-            <a:ext cx="1897197" cy="420624"/>
-          </a:xfrm>
-          <a:prstGeom prst="rect">
-            <a:avLst/>
-          </a:prstGeom>
-          <a:noFill/>
-          <a:ln/>
-        </p:spPr>
-        <p:txBody>
-          <a:bodyPr wrap="square" lIns="0" tIns="0" rIns="0" bIns="0" rtlCol="0" anchor="ctr">
-            <a:normAutofit/>
-          </a:bodyPr>
-          <a:lstStyle/>
-          <a:p>
-            <a:pPr algn="ctr" indent="0" marL="0">
-              <a:lnSpc>
-                <a:spcPct val="120000"/>
-              </a:lnSpc>
-              <a:buNone/>
-            </a:pPr>
-            <a:r>
-              <a:rPr lang="en-US" sz="2800" b="1" dirty="0">
-                <a:solidFill>
-                  <a:srgbClr val="111827"/>
-                </a:solidFill>
-                <a:latin typeface="Pretendard" pitchFamily="34" charset="0"/>
-                <a:ea typeface="Pretendard" pitchFamily="34" charset="-122"/>
-                <a:cs typeface="Pretendard" pitchFamily="34" charset="-120"/>
-              </a:rPr>
-              <a:t>30%</a:t>
-            </a:r>
-            <a:endParaRPr lang="en-US" sz="2800" dirty="0"/>
-          </a:p>
-        </p:txBody>
-      </p:sp>
-      <p:sp>
-        <p:nvSpPr>
-          <p:cNvPr id="10" name="Shape 7"/>
-          <p:cNvSpPr/>
-          <p:nvPr/>
-        </p:nvSpPr>
-        <p:spPr>
-          <a:xfrm>
-            <a:off x="3628705" y="2446020"/>
-            <a:ext cx="2262957" cy="2286000"/>
-          </a:xfrm>
-          <a:prstGeom prst="roundRect">
-            <a:avLst>
-              <a:gd name="adj" fmla="val 2020"/>
-            </a:avLst>
-          </a:prstGeom>
-          <a:solidFill>
-            <a:srgbClr val="FFFFFF"/>
-          </a:solidFill>
-          <a:ln w="12700">
-            <a:solidFill>
-              <a:srgbClr val="E5E7EB"/>
-            </a:solidFill>
-            <a:prstDash val="solid"/>
-          </a:ln>
-        </p:spPr>
-      </p:sp>
-      <p:sp>
-        <p:nvSpPr>
-          <p:cNvPr id="11" name="Shape 8"/>
-          <p:cNvSpPr/>
-          <p:nvPr/>
-        </p:nvSpPr>
-        <p:spPr>
-          <a:xfrm>
-            <a:off x="3829873" y="4347972"/>
-            <a:ext cx="1227218" cy="128016"/>
-          </a:xfrm>
-          <a:prstGeom prst="rect">
-            <a:avLst/>
-          </a:prstGeom>
-          <a:solidFill>
-            <a:srgbClr val="E5E7EB"/>
-          </a:solidFill>
-          <a:ln w="12700">
-            <a:solidFill>
-              <a:srgbClr val="E5E7EB">
-                <a:alpha val="0"/>
-              </a:srgbClr>
-            </a:solidFill>
-            <a:prstDash val="solid"/>
-          </a:ln>
-        </p:spPr>
-      </p:sp>
-      <p:sp>
-        <p:nvSpPr>
-          <p:cNvPr id="12" name="Text 9"/>
-          <p:cNvSpPr txBox="1"/>
-          <p:nvPr/>
-        </p:nvSpPr>
-        <p:spPr>
-          <a:xfrm>
-            <a:off x="3811585" y="2574036"/>
-            <a:ext cx="1897197" cy="914400"/>
-          </a:xfrm>
-          <a:prstGeom prst="rect">
-            <a:avLst/>
-          </a:prstGeom>
-          <a:noFill/>
-          <a:ln/>
-        </p:spPr>
-        <p:txBody>
-          <a:bodyPr wrap="square" lIns="381" tIns="508" rIns="508" bIns="381" rtlCol="0" anchor="ctr">
-            <a:normAutofit/>
-          </a:bodyPr>
-          <a:lstStyle/>
-          <a:p>
-            <a:pPr algn="ctr" indent="0" marL="0">
-              <a:lnSpc>
-                <a:spcPct val="120000"/>
-              </a:lnSpc>
-              <a:buNone/>
-            </a:pPr>
-            <a:r>
-              <a:rPr lang="en-US" sz="1800" b="1" dirty="0">
-                <a:solidFill>
-                  <a:srgbClr val="111827"/>
-                </a:solidFill>
-                <a:latin typeface="Pretendard" pitchFamily="34" charset="0"/>
-                <a:ea typeface="Pretendard" pitchFamily="34" charset="-122"/>
-                <a:cs typeface="Pretendard" pitchFamily="34" charset="-120"/>
-              </a:rPr>
-              <a:t>Plan</a:t>
-            </a:r>
-            <a:endParaRPr lang="en-US" sz="1800" dirty="0"/>
-          </a:p>
-        </p:txBody>
-      </p:sp>
-      <p:sp>
-        <p:nvSpPr>
-          <p:cNvPr id="13" name="Text 10"/>
-          <p:cNvSpPr txBox="1"/>
-          <p:nvPr/>
-        </p:nvSpPr>
-        <p:spPr>
-          <a:xfrm>
-            <a:off x="3811585" y="3543300"/>
-            <a:ext cx="1897197" cy="420624"/>
-          </a:xfrm>
-          <a:prstGeom prst="rect">
-            <a:avLst/>
-          </a:prstGeom>
-          <a:noFill/>
-          <a:ln/>
-        </p:spPr>
-        <p:txBody>
-          <a:bodyPr wrap="square" lIns="0" tIns="0" rIns="0" bIns="0" rtlCol="0" anchor="ctr">
-            <a:normAutofit/>
-          </a:bodyPr>
-          <a:lstStyle/>
-          <a:p>
-            <a:pPr algn="ctr" indent="0" marL="0">
-              <a:lnSpc>
-                <a:spcPct val="120000"/>
-              </a:lnSpc>
-              <a:buNone/>
-            </a:pPr>
-            <a:r>
-              <a:rPr lang="en-US" sz="2800" b="1" dirty="0">
-                <a:solidFill>
-                  <a:srgbClr val="E5E7EB"/>
-                </a:solidFill>
-                <a:latin typeface="Pretendard" pitchFamily="34" charset="0"/>
-                <a:ea typeface="Pretendard" pitchFamily="34" charset="-122"/>
-                <a:cs typeface="Pretendard" pitchFamily="34" charset="-120"/>
-              </a:rPr>
-              <a:t>62%</a:t>
-            </a:r>
-            <a:endParaRPr lang="en-US" sz="2800" dirty="0"/>
-          </a:p>
-        </p:txBody>
-      </p:sp>
-      <p:sp>
-        <p:nvSpPr>
-          <p:cNvPr id="14" name="Shape 11"/>
-          <p:cNvSpPr/>
-          <p:nvPr/>
-        </p:nvSpPr>
-        <p:spPr>
-          <a:xfrm>
-            <a:off x="6178418" y="2446020"/>
-            <a:ext cx="2262957" cy="2286000"/>
-          </a:xfrm>
-          <a:prstGeom prst="roundRect">
-            <a:avLst>
-              <a:gd name="adj" fmla="val 2020"/>
-            </a:avLst>
-          </a:prstGeom>
-          <a:solidFill>
-            <a:srgbClr val="FFFFFF"/>
-          </a:solidFill>
-          <a:ln w="12700">
-            <a:solidFill>
-              <a:srgbClr val="E5E7EB"/>
-            </a:solidFill>
-            <a:prstDash val="solid"/>
-          </a:ln>
-        </p:spPr>
-      </p:sp>
-      <p:sp>
-        <p:nvSpPr>
-          <p:cNvPr id="15" name="Shape 12"/>
-          <p:cNvSpPr/>
-          <p:nvPr/>
-        </p:nvSpPr>
-        <p:spPr>
-          <a:xfrm>
-            <a:off x="6379586" y="4347972"/>
-            <a:ext cx="1702270" cy="128016"/>
-          </a:xfrm>
-          <a:prstGeom prst="rect">
-            <a:avLst/>
-          </a:prstGeom>
-          <a:solidFill>
-            <a:srgbClr val="111827"/>
-          </a:solidFill>
-          <a:ln w="12700">
-            <a:solidFill>
-              <a:srgbClr val="111827">
-                <a:alpha val="0"/>
-              </a:srgbClr>
-            </a:solidFill>
-            <a:prstDash val="solid"/>
-          </a:ln>
-        </p:spPr>
-      </p:sp>
-      <p:sp>
-        <p:nvSpPr>
-          <p:cNvPr id="16" name="Text 13"/>
-          <p:cNvSpPr txBox="1"/>
-          <p:nvPr/>
-        </p:nvSpPr>
-        <p:spPr>
-          <a:xfrm>
-            <a:off x="6361298" y="2574036"/>
-            <a:ext cx="1897197" cy="914400"/>
-          </a:xfrm>
-          <a:prstGeom prst="rect">
-            <a:avLst/>
-          </a:prstGeom>
-          <a:noFill/>
-          <a:ln/>
-        </p:spPr>
-        <p:txBody>
-          <a:bodyPr wrap="square" lIns="381" tIns="508" rIns="508" bIns="381" rtlCol="0" anchor="ctr">
-            <a:normAutofit/>
-          </a:bodyPr>
-          <a:lstStyle/>
-          <a:p>
-            <a:pPr algn="ctr" indent="0" marL="0">
-              <a:lnSpc>
-                <a:spcPct val="120000"/>
-              </a:lnSpc>
-              <a:buNone/>
-            </a:pPr>
-            <a:r>
-              <a:rPr lang="en-US" sz="1800" b="1" dirty="0">
-                <a:solidFill>
-                  <a:srgbClr val="111827"/>
-                </a:solidFill>
-                <a:latin typeface="Pretendard" pitchFamily="34" charset="0"/>
-                <a:ea typeface="Pretendard" pitchFamily="34" charset="-122"/>
-                <a:cs typeface="Pretendard" pitchFamily="34" charset="-120"/>
-              </a:rPr>
-              <a:t>Render</a:t>
-            </a:r>
-            <a:endParaRPr lang="en-US" sz="1800" dirty="0"/>
-          </a:p>
-        </p:txBody>
-      </p:sp>
-      <p:sp>
-        <p:nvSpPr>
-          <p:cNvPr id="17" name="Text 14"/>
-          <p:cNvSpPr txBox="1"/>
-          <p:nvPr/>
-        </p:nvSpPr>
-        <p:spPr>
-          <a:xfrm>
-            <a:off x="6361298" y="3543300"/>
-            <a:ext cx="1897197" cy="420624"/>
-          </a:xfrm>
-          <a:prstGeom prst="rect">
-            <a:avLst/>
-          </a:prstGeom>
-          <a:noFill/>
-          <a:ln/>
-        </p:spPr>
-        <p:txBody>
-          <a:bodyPr wrap="square" lIns="0" tIns="0" rIns="0" bIns="0" rtlCol="0" anchor="ctr">
-            <a:normAutofit/>
-          </a:bodyPr>
-          <a:lstStyle/>
-          <a:p>
-            <a:pPr algn="ctr" indent="0" marL="0">
-              <a:lnSpc>
-                <a:spcPct val="120000"/>
-              </a:lnSpc>
-              <a:buNone/>
-            </a:pPr>
-            <a:r>
-              <a:rPr lang="en-US" sz="2800" b="1" dirty="0">
-                <a:solidFill>
-                  <a:srgbClr val="111827"/>
-                </a:solidFill>
-                <a:latin typeface="Pretendard" pitchFamily="34" charset="0"/>
-                <a:ea typeface="Pretendard" pitchFamily="34" charset="-122"/>
-                <a:cs typeface="Pretendard" pitchFamily="34" charset="-120"/>
-              </a:rPr>
-              <a:t>86%</a:t>
-            </a:r>
-            <a:endParaRPr lang="en-US" sz="2800" dirty="0"/>
-          </a:p>
-        </p:txBody>
-      </p:sp>
-      <p:sp>
-        <p:nvSpPr>
-          <p:cNvPr id="18" name="Shape 15"/>
-          <p:cNvSpPr/>
-          <p:nvPr/>
-        </p:nvSpPr>
-        <p:spPr>
-          <a:xfrm>
-            <a:off x="8728131" y="2446020"/>
-            <a:ext cx="2262957" cy="2286000"/>
-          </a:xfrm>
-          <a:prstGeom prst="roundRect">
-            <a:avLst>
-              <a:gd name="adj" fmla="val 2020"/>
-            </a:avLst>
-          </a:prstGeom>
-          <a:solidFill>
-            <a:srgbClr val="FFFFFF"/>
-          </a:solidFill>
-          <a:ln w="12700">
-            <a:solidFill>
-              <a:srgbClr val="E5E7EB"/>
-            </a:solidFill>
-            <a:prstDash val="solid"/>
-          </a:ln>
-        </p:spPr>
-      </p:sp>
-      <p:sp>
-        <p:nvSpPr>
-          <p:cNvPr id="19" name="Shape 16"/>
-          <p:cNvSpPr/>
-          <p:nvPr/>
-        </p:nvSpPr>
-        <p:spPr>
-          <a:xfrm>
-            <a:off x="8929299" y="4347972"/>
-            <a:ext cx="1860621" cy="128016"/>
-          </a:xfrm>
-          <a:prstGeom prst="rect">
-            <a:avLst/>
-          </a:prstGeom>
-          <a:solidFill>
-            <a:srgbClr val="111827"/>
-          </a:solidFill>
-          <a:ln w="12700">
-            <a:solidFill>
-              <a:srgbClr val="111827">
-                <a:alpha val="0"/>
-              </a:srgbClr>
-            </a:solidFill>
-            <a:prstDash val="solid"/>
-          </a:ln>
-        </p:spPr>
-      </p:sp>
-      <p:sp>
-        <p:nvSpPr>
-          <p:cNvPr id="20" name="Text 17"/>
-          <p:cNvSpPr txBox="1"/>
-          <p:nvPr/>
-        </p:nvSpPr>
-        <p:spPr>
-          <a:xfrm>
-            <a:off x="8911011" y="2574036"/>
-            <a:ext cx="1897197" cy="914400"/>
-          </a:xfrm>
-          <a:prstGeom prst="rect">
-            <a:avLst/>
-          </a:prstGeom>
-          <a:noFill/>
-          <a:ln/>
-        </p:spPr>
-        <p:txBody>
-          <a:bodyPr wrap="square" lIns="381" tIns="508" rIns="508" bIns="381" rtlCol="0" anchor="ctr">
-            <a:normAutofit/>
-          </a:bodyPr>
-          <a:lstStyle/>
-          <a:p>
-            <a:pPr algn="ctr" indent="0" marL="0">
-              <a:lnSpc>
-                <a:spcPct val="120000"/>
-              </a:lnSpc>
-              <a:buNone/>
-            </a:pPr>
-            <a:r>
-              <a:rPr lang="en-US" sz="1800" b="1" dirty="0">
-                <a:solidFill>
-                  <a:srgbClr val="111827"/>
-                </a:solidFill>
-                <a:latin typeface="Pretendard" pitchFamily="34" charset="0"/>
-                <a:ea typeface="Pretendard" pitchFamily="34" charset="-122"/>
-                <a:cs typeface="Pretendard" pitchFamily="34" charset="-120"/>
-              </a:rPr>
-              <a:t>Review</a:t>
-            </a:r>
-            <a:endParaRPr lang="en-US" sz="1800" dirty="0"/>
-          </a:p>
-        </p:txBody>
-      </p:sp>
-      <p:sp>
-        <p:nvSpPr>
-          <p:cNvPr id="21" name="Text 18"/>
-          <p:cNvSpPr txBox="1"/>
-          <p:nvPr/>
-        </p:nvSpPr>
-        <p:spPr>
-          <a:xfrm>
-            <a:off x="8911011" y="3543300"/>
-            <a:ext cx="1897197" cy="420624"/>
-          </a:xfrm>
-          <a:prstGeom prst="rect">
-            <a:avLst/>
-          </a:prstGeom>
-          <a:noFill/>
-          <a:ln/>
-        </p:spPr>
-        <p:txBody>
-          <a:bodyPr wrap="square" lIns="0" tIns="0" rIns="0" bIns="0" rtlCol="0" anchor="ctr">
-            <a:normAutofit/>
-          </a:bodyPr>
-          <a:lstStyle/>
-          <a:p>
-            <a:pPr algn="ctr" indent="0" marL="0">
-              <a:lnSpc>
-                <a:spcPct val="120000"/>
-              </a:lnSpc>
-              <a:buNone/>
-            </a:pPr>
-            <a:r>
-              <a:rPr lang="en-US" sz="2800" b="1" dirty="0">
-                <a:solidFill>
-                  <a:srgbClr val="111827"/>
-                </a:solidFill>
-                <a:latin typeface="Pretendard" pitchFamily="34" charset="0"/>
-                <a:ea typeface="Pretendard" pitchFamily="34" charset="-122"/>
-                <a:cs typeface="Pretendard" pitchFamily="34" charset="-120"/>
-              </a:rPr>
-              <a:t>94%</a:t>
-            </a:r>
-            <a:endParaRPr lang="en-US" sz="2800" dirty="0"/>
-          </a:p>
-        </p:txBody>
-      </p:sp>
-      <p:sp>
-        <p:nvSpPr>
-          <p:cNvPr id="22" name="Shape 19"/>
-          <p:cNvSpPr/>
-          <p:nvPr/>
-        </p:nvSpPr>
-        <p:spPr>
-          <a:xfrm>
-            <a:off x="3285375" y="3589020"/>
-            <a:ext cx="399904" cy="0"/>
-          </a:xfrm>
-          <a:prstGeom prst="line">
-            <a:avLst/>
-          </a:prstGeom>
-          <a:noFill/>
-          <a:ln w="12700">
-            <a:solidFill>
-              <a:srgbClr val="111827"/>
-            </a:solidFill>
-            <a:prstDash val="solid"/>
-            <a:tailEnd type="triangle"/>
-          </a:ln>
-        </p:spPr>
-      </p:sp>
-      <p:sp>
-        <p:nvSpPr>
-          <p:cNvPr id="23" name="Shape 20"/>
-          <p:cNvSpPr/>
-          <p:nvPr/>
-        </p:nvSpPr>
-        <p:spPr>
-          <a:xfrm>
-            <a:off x="5835088" y="3589020"/>
-            <a:ext cx="399904" cy="0"/>
-          </a:xfrm>
-          <a:prstGeom prst="line">
-            <a:avLst/>
-          </a:prstGeom>
-          <a:noFill/>
-          <a:ln w="12700">
-            <a:solidFill>
-              <a:srgbClr val="111827"/>
-            </a:solidFill>
-            <a:prstDash val="solid"/>
-            <a:tailEnd type="triangle"/>
-          </a:ln>
-        </p:spPr>
-      </p:sp>
-      <p:sp>
-        <p:nvSpPr>
-          <p:cNvPr id="24" name="Shape 21"/>
-          <p:cNvSpPr/>
-          <p:nvPr/>
-        </p:nvSpPr>
-        <p:spPr>
-          <a:xfrm>
-            <a:off x="8384801" y="3589020"/>
-            <a:ext cx="399904" cy="0"/>
-          </a:xfrm>
-          <a:prstGeom prst="line">
-            <a:avLst/>
-          </a:prstGeom>
-          <a:noFill/>
-          <a:ln w="12700">
-            <a:solidFill>
-              <a:srgbClr val="111827"/>
-            </a:solidFill>
-            <a:prstDash val="solid"/>
-            <a:tailEnd type="triangle"/>
-          </a:ln>
-        </p:spPr>
       </p:sp>
     </p:spTree>
   </p:cSld>
@@ -9798,16 +9875,115 @@
           </a:ln>
         </p:spPr>
       </p:sp>
-      <p:sp>
-        <p:nvSpPr>
-          <p:cNvPr id="4" name="Shape 2"/>
+      <p:pic>
+        <p:nvPicPr>
+          <p:cNvPr id="4" name="Image 0" descr="preencoded.png">    </p:cNvPr>
+          <p:cNvPicPr>
+            <a:picLocks noChangeAspect="1"/>
+          </p:cNvPicPr>
+          <p:nvPr/>
+        </p:nvPicPr>
+        <p:blipFill>
+          <a:blip r:embed="rId1">
+            <a:extLst>
+              <a:ext uri="{96DAC541-7B7A-43D3-8B79-37D633B846F1}">
+                <asvg:svgBlip xmlns:asvg="http://schemas.microsoft.com/office/drawing/2016/SVG/main" r:embed="rId2"/>
+              </a:ext>
+            </a:extLst>
+          </a:blip>
+          <a:stretch>
+            <a:fillRect/>
+          </a:stretch>
+        </p:blipFill>
+        <p:spPr>
+          <a:xfrm>
+            <a:off x="914400" y="1417320"/>
+            <a:ext cx="10241280" cy="4343400"/>
+          </a:xfrm>
+          <a:prstGeom prst="rect">
+            <a:avLst/>
+          </a:prstGeom>
+        </p:spPr>
+      </p:pic>
+      <p:sp>
+        <p:nvSpPr>
+          <p:cNvPr id="5" name="Text 2"/>
+          <p:cNvSpPr txBox="1"/>
+          <p:nvPr/>
+        </p:nvSpPr>
+        <p:spPr>
+          <a:xfrm>
+            <a:off x="731520" y="457200"/>
+            <a:ext cx="10698480" cy="731520"/>
+          </a:xfrm>
+          <a:prstGeom prst="rect">
+            <a:avLst/>
+          </a:prstGeom>
+          <a:noFill/>
+          <a:ln/>
+        </p:spPr>
+        <p:txBody>
+          <a:bodyPr wrap="square" lIns="0" tIns="0" rIns="0" bIns="0" rtlCol="0" anchor="ctr"/>
+          <a:lstStyle/>
+          <a:p>
+            <a:pPr algn="ctr" indent="0" marL="0">
+              <a:lnSpc>
+                <a:spcPct val="120000"/>
+              </a:lnSpc>
+              <a:buNone/>
+            </a:pPr>
+            <a:r>
+              <a:rPr lang="en-US" sz="3400" b="1" dirty="0">
+                <a:solidFill>
+                  <a:srgbClr val="111827"/>
+                </a:solidFill>
+                <a:latin typeface="Pretendard" pitchFamily="34" charset="0"/>
+                <a:ea typeface="Pretendard" pitchFamily="34" charset="-122"/>
+                <a:cs typeface="Pretendard" pitchFamily="34" charset="-120"/>
+              </a:rPr>
+              <a:t>Editable Proof Objects (Cont. 2/2)</a:t>
+            </a:r>
+            <a:endParaRPr lang="en-US" sz="3400" dirty="0"/>
+          </a:p>
+        </p:txBody>
+      </p:sp>
+      <p:sp>
+        <p:nvSpPr>
+          <p:cNvPr id="6" name="Shape 3"/>
           <p:cNvSpPr/>
           <p:nvPr/>
         </p:nvSpPr>
         <p:spPr>
           <a:xfrm>
-            <a:off x="914400" y="1463040"/>
-            <a:ext cx="10241280" cy="73152"/>
+            <a:off x="1078992" y="2446020"/>
+            <a:ext cx="2262957" cy="2286000"/>
+          </a:xfrm>
+          <a:prstGeom prst="roundRect">
+            <a:avLst>
+              <a:gd name="adj" fmla="val 2020"/>
+            </a:avLst>
+          </a:prstGeom>
+          <a:solidFill>
+            <a:srgbClr val="FFFFFF"/>
+          </a:solidFill>
+          <a:ln w="12700">
+            <a:solidFill>
+              <a:srgbClr val="E5E7EB"/>
+            </a:solidFill>
+            <a:prstDash val="solid"/>
+          </a:ln>
+        </p:spPr>
+      </p:sp>
+      <p:sp>
+        <p:nvSpPr>
+          <p:cNvPr id="7" name="Shape 4"/>
+          <p:cNvSpPr/>
+          <p:nvPr/>
+        </p:nvSpPr>
+        <p:spPr>
+          <a:xfrm>
+            <a:off x="1280160" y="4347972"/>
+            <a:ext cx="593815" cy="128016"/>
           </a:xfrm>
           <a:prstGeom prst="rect">
             <a:avLst/>
@@ -9827,7 +10003,875 @@
       </p:sp>
       <p:sp>
         <p:nvSpPr>
-          <p:cNvPr id="5" name="Text 3"/>
+          <p:cNvPr id="8" name="Text 5"/>
+          <p:cNvSpPr txBox="1"/>
+          <p:nvPr/>
+        </p:nvSpPr>
+        <p:spPr>
+          <a:xfrm>
+            <a:off x="1261872" y="2574036"/>
+            <a:ext cx="1897197" cy="914400"/>
+          </a:xfrm>
+          <a:prstGeom prst="rect">
+            <a:avLst/>
+          </a:prstGeom>
+          <a:noFill/>
+          <a:ln/>
+        </p:spPr>
+        <p:txBody>
+          <a:bodyPr wrap="square" lIns="381" tIns="508" rIns="508" bIns="381" rtlCol="0" anchor="ctr">
+            <a:normAutofit/>
+          </a:bodyPr>
+          <a:lstStyle/>
+          <a:p>
+            <a:pPr algn="ctr" indent="0" marL="0">
+              <a:lnSpc>
+                <a:spcPct val="120000"/>
+              </a:lnSpc>
+              <a:buNone/>
+            </a:pPr>
+            <a:r>
+              <a:rPr lang="en-US" sz="1800" b="1" dirty="0">
+                <a:solidFill>
+                  <a:srgbClr val="111827"/>
+                </a:solidFill>
+                <a:latin typeface="Pretendard" pitchFamily="34" charset="0"/>
+                <a:ea typeface="Pretendard" pitchFamily="34" charset="-122"/>
+                <a:cs typeface="Pretendard" pitchFamily="34" charset="-120"/>
+              </a:rPr>
+              <a:t>Parse</a:t>
+            </a:r>
+            <a:endParaRPr lang="en-US" sz="1800" dirty="0"/>
+          </a:p>
+        </p:txBody>
+      </p:sp>
+      <p:sp>
+        <p:nvSpPr>
+          <p:cNvPr id="9" name="Text 6"/>
+          <p:cNvSpPr txBox="1"/>
+          <p:nvPr/>
+        </p:nvSpPr>
+        <p:spPr>
+          <a:xfrm>
+            <a:off x="1261872" y="3543300"/>
+            <a:ext cx="1897197" cy="420624"/>
+          </a:xfrm>
+          <a:prstGeom prst="rect">
+            <a:avLst/>
+          </a:prstGeom>
+          <a:noFill/>
+          <a:ln/>
+        </p:spPr>
+        <p:txBody>
+          <a:bodyPr wrap="square" lIns="0" tIns="0" rIns="0" bIns="0" rtlCol="0" anchor="ctr">
+            <a:normAutofit/>
+          </a:bodyPr>
+          <a:lstStyle/>
+          <a:p>
+            <a:pPr algn="ctr" indent="0" marL="0">
+              <a:lnSpc>
+                <a:spcPct val="120000"/>
+              </a:lnSpc>
+              <a:buNone/>
+            </a:pPr>
+            <a:r>
+              <a:rPr lang="en-US" sz="2800" b="1" dirty="0">
+                <a:solidFill>
+                  <a:srgbClr val="111827"/>
+                </a:solidFill>
+                <a:latin typeface="Pretendard" pitchFamily="34" charset="0"/>
+                <a:ea typeface="Pretendard" pitchFamily="34" charset="-122"/>
+                <a:cs typeface="Pretendard" pitchFamily="34" charset="-120"/>
+              </a:rPr>
+              <a:t>30%</a:t>
+            </a:r>
+            <a:endParaRPr lang="en-US" sz="2800" dirty="0"/>
+          </a:p>
+        </p:txBody>
+      </p:sp>
+      <p:sp>
+        <p:nvSpPr>
+          <p:cNvPr id="10" name="Shape 7"/>
+          <p:cNvSpPr/>
+          <p:nvPr/>
+        </p:nvSpPr>
+        <p:spPr>
+          <a:xfrm>
+            <a:off x="3628705" y="2446020"/>
+            <a:ext cx="2262957" cy="2286000"/>
+          </a:xfrm>
+          <a:prstGeom prst="roundRect">
+            <a:avLst>
+              <a:gd name="adj" fmla="val 2020"/>
+            </a:avLst>
+          </a:prstGeom>
+          <a:solidFill>
+            <a:srgbClr val="FFFFFF"/>
+          </a:solidFill>
+          <a:ln w="12700">
+            <a:solidFill>
+              <a:srgbClr val="E5E7EB"/>
+            </a:solidFill>
+            <a:prstDash val="solid"/>
+          </a:ln>
+        </p:spPr>
+      </p:sp>
+      <p:sp>
+        <p:nvSpPr>
+          <p:cNvPr id="11" name="Shape 8"/>
+          <p:cNvSpPr/>
+          <p:nvPr/>
+        </p:nvSpPr>
+        <p:spPr>
+          <a:xfrm>
+            <a:off x="3829873" y="4347972"/>
+            <a:ext cx="1227218" cy="128016"/>
+          </a:xfrm>
+          <a:prstGeom prst="rect">
+            <a:avLst/>
+          </a:prstGeom>
+          <a:solidFill>
+            <a:srgbClr val="E5E7EB"/>
+          </a:solidFill>
+          <a:ln w="12700">
+            <a:solidFill>
+              <a:srgbClr val="E5E7EB">
+                <a:alpha val="0"/>
+              </a:srgbClr>
+            </a:solidFill>
+            <a:prstDash val="solid"/>
+          </a:ln>
+        </p:spPr>
+      </p:sp>
+      <p:sp>
+        <p:nvSpPr>
+          <p:cNvPr id="12" name="Text 9"/>
+          <p:cNvSpPr txBox="1"/>
+          <p:nvPr/>
+        </p:nvSpPr>
+        <p:spPr>
+          <a:xfrm>
+            <a:off x="3811585" y="2574036"/>
+            <a:ext cx="1897197" cy="914400"/>
+          </a:xfrm>
+          <a:prstGeom prst="rect">
+            <a:avLst/>
+          </a:prstGeom>
+          <a:noFill/>
+          <a:ln/>
+        </p:spPr>
+        <p:txBody>
+          <a:bodyPr wrap="square" lIns="381" tIns="508" rIns="508" bIns="381" rtlCol="0" anchor="ctr">
+            <a:normAutofit/>
+          </a:bodyPr>
+          <a:lstStyle/>
+          <a:p>
+            <a:pPr algn="ctr" indent="0" marL="0">
+              <a:lnSpc>
+                <a:spcPct val="120000"/>
+              </a:lnSpc>
+              <a:buNone/>
+            </a:pPr>
+            <a:r>
+              <a:rPr lang="en-US" sz="1800" b="1" dirty="0">
+                <a:solidFill>
+                  <a:srgbClr val="111827"/>
+                </a:solidFill>
+                <a:latin typeface="Pretendard" pitchFamily="34" charset="0"/>
+                <a:ea typeface="Pretendard" pitchFamily="34" charset="-122"/>
+                <a:cs typeface="Pretendard" pitchFamily="34" charset="-120"/>
+              </a:rPr>
+              <a:t>Plan</a:t>
+            </a:r>
+            <a:endParaRPr lang="en-US" sz="1800" dirty="0"/>
+          </a:p>
+        </p:txBody>
+      </p:sp>
+      <p:sp>
+        <p:nvSpPr>
+          <p:cNvPr id="13" name="Text 10"/>
+          <p:cNvSpPr txBox="1"/>
+          <p:nvPr/>
+        </p:nvSpPr>
+        <p:spPr>
+          <a:xfrm>
+            <a:off x="3811585" y="3543300"/>
+            <a:ext cx="1897197" cy="420624"/>
+          </a:xfrm>
+          <a:prstGeom prst="rect">
+            <a:avLst/>
+          </a:prstGeom>
+          <a:noFill/>
+          <a:ln/>
+        </p:spPr>
+        <p:txBody>
+          <a:bodyPr wrap="square" lIns="0" tIns="0" rIns="0" bIns="0" rtlCol="0" anchor="ctr">
+            <a:normAutofit/>
+          </a:bodyPr>
+          <a:lstStyle/>
+          <a:p>
+            <a:pPr algn="ctr" indent="0" marL="0">
+              <a:lnSpc>
+                <a:spcPct val="120000"/>
+              </a:lnSpc>
+              <a:buNone/>
+            </a:pPr>
+            <a:r>
+              <a:rPr lang="en-US" sz="2800" b="1" dirty="0">
+                <a:solidFill>
+                  <a:srgbClr val="E5E7EB"/>
+                </a:solidFill>
+                <a:latin typeface="Pretendard" pitchFamily="34" charset="0"/>
+                <a:ea typeface="Pretendard" pitchFamily="34" charset="-122"/>
+                <a:cs typeface="Pretendard" pitchFamily="34" charset="-120"/>
+              </a:rPr>
+              <a:t>62%</a:t>
+            </a:r>
+            <a:endParaRPr lang="en-US" sz="2800" dirty="0"/>
+          </a:p>
+        </p:txBody>
+      </p:sp>
+      <p:sp>
+        <p:nvSpPr>
+          <p:cNvPr id="14" name="Shape 11"/>
+          <p:cNvSpPr/>
+          <p:nvPr/>
+        </p:nvSpPr>
+        <p:spPr>
+          <a:xfrm>
+            <a:off x="6178418" y="2446020"/>
+            <a:ext cx="2262957" cy="2286000"/>
+          </a:xfrm>
+          <a:prstGeom prst="roundRect">
+            <a:avLst>
+              <a:gd name="adj" fmla="val 2020"/>
+            </a:avLst>
+          </a:prstGeom>
+          <a:solidFill>
+            <a:srgbClr val="FFFFFF"/>
+          </a:solidFill>
+          <a:ln w="12700">
+            <a:solidFill>
+              <a:srgbClr val="E5E7EB"/>
+            </a:solidFill>
+            <a:prstDash val="solid"/>
+          </a:ln>
+        </p:spPr>
+      </p:sp>
+      <p:sp>
+        <p:nvSpPr>
+          <p:cNvPr id="15" name="Shape 12"/>
+          <p:cNvSpPr/>
+          <p:nvPr/>
+        </p:nvSpPr>
+        <p:spPr>
+          <a:xfrm>
+            <a:off x="6379586" y="4347972"/>
+            <a:ext cx="1702270" cy="128016"/>
+          </a:xfrm>
+          <a:prstGeom prst="rect">
+            <a:avLst/>
+          </a:prstGeom>
+          <a:solidFill>
+            <a:srgbClr val="111827"/>
+          </a:solidFill>
+          <a:ln w="12700">
+            <a:solidFill>
+              <a:srgbClr val="111827">
+                <a:alpha val="0"/>
+              </a:srgbClr>
+            </a:solidFill>
+            <a:prstDash val="solid"/>
+          </a:ln>
+        </p:spPr>
+      </p:sp>
+      <p:sp>
+        <p:nvSpPr>
+          <p:cNvPr id="16" name="Text 13"/>
+          <p:cNvSpPr txBox="1"/>
+          <p:nvPr/>
+        </p:nvSpPr>
+        <p:spPr>
+          <a:xfrm>
+            <a:off x="6361298" y="2574036"/>
+            <a:ext cx="1897197" cy="914400"/>
+          </a:xfrm>
+          <a:prstGeom prst="rect">
+            <a:avLst/>
+          </a:prstGeom>
+          <a:noFill/>
+          <a:ln/>
+        </p:spPr>
+        <p:txBody>
+          <a:bodyPr wrap="square" lIns="381" tIns="508" rIns="508" bIns="381" rtlCol="0" anchor="ctr">
+            <a:normAutofit/>
+          </a:bodyPr>
+          <a:lstStyle/>
+          <a:p>
+            <a:pPr algn="ctr" indent="0" marL="0">
+              <a:lnSpc>
+                <a:spcPct val="120000"/>
+              </a:lnSpc>
+              <a:buNone/>
+            </a:pPr>
+            <a:r>
+              <a:rPr lang="en-US" sz="1800" b="1" dirty="0">
+                <a:solidFill>
+                  <a:srgbClr val="111827"/>
+                </a:solidFill>
+                <a:latin typeface="Pretendard" pitchFamily="34" charset="0"/>
+                <a:ea typeface="Pretendard" pitchFamily="34" charset="-122"/>
+                <a:cs typeface="Pretendard" pitchFamily="34" charset="-120"/>
+              </a:rPr>
+              <a:t>Render</a:t>
+            </a:r>
+            <a:endParaRPr lang="en-US" sz="1800" dirty="0"/>
+          </a:p>
+        </p:txBody>
+      </p:sp>
+      <p:sp>
+        <p:nvSpPr>
+          <p:cNvPr id="17" name="Text 14"/>
+          <p:cNvSpPr txBox="1"/>
+          <p:nvPr/>
+        </p:nvSpPr>
+        <p:spPr>
+          <a:xfrm>
+            <a:off x="6361298" y="3543300"/>
+            <a:ext cx="1897197" cy="420624"/>
+          </a:xfrm>
+          <a:prstGeom prst="rect">
+            <a:avLst/>
+          </a:prstGeom>
+          <a:noFill/>
+          <a:ln/>
+        </p:spPr>
+        <p:txBody>
+          <a:bodyPr wrap="square" lIns="0" tIns="0" rIns="0" bIns="0" rtlCol="0" anchor="ctr">
+            <a:normAutofit/>
+          </a:bodyPr>
+          <a:lstStyle/>
+          <a:p>
+            <a:pPr algn="ctr" indent="0" marL="0">
+              <a:lnSpc>
+                <a:spcPct val="120000"/>
+              </a:lnSpc>
+              <a:buNone/>
+            </a:pPr>
+            <a:r>
+              <a:rPr lang="en-US" sz="2800" b="1" dirty="0">
+                <a:solidFill>
+                  <a:srgbClr val="111827"/>
+                </a:solidFill>
+                <a:latin typeface="Pretendard" pitchFamily="34" charset="0"/>
+                <a:ea typeface="Pretendard" pitchFamily="34" charset="-122"/>
+                <a:cs typeface="Pretendard" pitchFamily="34" charset="-120"/>
+              </a:rPr>
+              <a:t>86%</a:t>
+            </a:r>
+            <a:endParaRPr lang="en-US" sz="2800" dirty="0"/>
+          </a:p>
+        </p:txBody>
+      </p:sp>
+      <p:sp>
+        <p:nvSpPr>
+          <p:cNvPr id="18" name="Shape 15"/>
+          <p:cNvSpPr/>
+          <p:nvPr/>
+        </p:nvSpPr>
+        <p:spPr>
+          <a:xfrm>
+            <a:off x="8728131" y="2446020"/>
+            <a:ext cx="2262957" cy="2286000"/>
+          </a:xfrm>
+          <a:prstGeom prst="roundRect">
+            <a:avLst>
+              <a:gd name="adj" fmla="val 2020"/>
+            </a:avLst>
+          </a:prstGeom>
+          <a:solidFill>
+            <a:srgbClr val="FFFFFF"/>
+          </a:solidFill>
+          <a:ln w="12700">
+            <a:solidFill>
+              <a:srgbClr val="E5E7EB"/>
+            </a:solidFill>
+            <a:prstDash val="solid"/>
+          </a:ln>
+        </p:spPr>
+      </p:sp>
+      <p:sp>
+        <p:nvSpPr>
+          <p:cNvPr id="19" name="Shape 16"/>
+          <p:cNvSpPr/>
+          <p:nvPr/>
+        </p:nvSpPr>
+        <p:spPr>
+          <a:xfrm>
+            <a:off x="8929299" y="4347972"/>
+            <a:ext cx="1860621" cy="128016"/>
+          </a:xfrm>
+          <a:prstGeom prst="rect">
+            <a:avLst/>
+          </a:prstGeom>
+          <a:solidFill>
+            <a:srgbClr val="111827"/>
+          </a:solidFill>
+          <a:ln w="12700">
+            <a:solidFill>
+              <a:srgbClr val="111827">
+                <a:alpha val="0"/>
+              </a:srgbClr>
+            </a:solidFill>
+            <a:prstDash val="solid"/>
+          </a:ln>
+        </p:spPr>
+      </p:sp>
+      <p:sp>
+        <p:nvSpPr>
+          <p:cNvPr id="20" name="Text 17"/>
+          <p:cNvSpPr txBox="1"/>
+          <p:nvPr/>
+        </p:nvSpPr>
+        <p:spPr>
+          <a:xfrm>
+            <a:off x="8911011" y="2574036"/>
+            <a:ext cx="1897197" cy="914400"/>
+          </a:xfrm>
+          <a:prstGeom prst="rect">
+            <a:avLst/>
+          </a:prstGeom>
+          <a:noFill/>
+          <a:ln/>
+        </p:spPr>
+        <p:txBody>
+          <a:bodyPr wrap="square" lIns="381" tIns="508" rIns="508" bIns="381" rtlCol="0" anchor="ctr">
+            <a:normAutofit/>
+          </a:bodyPr>
+          <a:lstStyle/>
+          <a:p>
+            <a:pPr algn="ctr" indent="0" marL="0">
+              <a:lnSpc>
+                <a:spcPct val="120000"/>
+              </a:lnSpc>
+              <a:buNone/>
+            </a:pPr>
+            <a:r>
+              <a:rPr lang="en-US" sz="1800" b="1" dirty="0">
+                <a:solidFill>
+                  <a:srgbClr val="111827"/>
+                </a:solidFill>
+                <a:latin typeface="Pretendard" pitchFamily="34" charset="0"/>
+                <a:ea typeface="Pretendard" pitchFamily="34" charset="-122"/>
+                <a:cs typeface="Pretendard" pitchFamily="34" charset="-120"/>
+              </a:rPr>
+              <a:t>Review</a:t>
+            </a:r>
+            <a:endParaRPr lang="en-US" sz="1800" dirty="0"/>
+          </a:p>
+        </p:txBody>
+      </p:sp>
+      <p:sp>
+        <p:nvSpPr>
+          <p:cNvPr id="21" name="Text 18"/>
+          <p:cNvSpPr txBox="1"/>
+          <p:nvPr/>
+        </p:nvSpPr>
+        <p:spPr>
+          <a:xfrm>
+            <a:off x="8911011" y="3543300"/>
+            <a:ext cx="1897197" cy="420624"/>
+          </a:xfrm>
+          <a:prstGeom prst="rect">
+            <a:avLst/>
+          </a:prstGeom>
+          <a:noFill/>
+          <a:ln/>
+        </p:spPr>
+        <p:txBody>
+          <a:bodyPr wrap="square" lIns="0" tIns="0" rIns="0" bIns="0" rtlCol="0" anchor="ctr">
+            <a:normAutofit/>
+          </a:bodyPr>
+          <a:lstStyle/>
+          <a:p>
+            <a:pPr algn="ctr" indent="0" marL="0">
+              <a:lnSpc>
+                <a:spcPct val="120000"/>
+              </a:lnSpc>
+              <a:buNone/>
+            </a:pPr>
+            <a:r>
+              <a:rPr lang="en-US" sz="2800" b="1" dirty="0">
+                <a:solidFill>
+                  <a:srgbClr val="111827"/>
+                </a:solidFill>
+                <a:latin typeface="Pretendard" pitchFamily="34" charset="0"/>
+                <a:ea typeface="Pretendard" pitchFamily="34" charset="-122"/>
+                <a:cs typeface="Pretendard" pitchFamily="34" charset="-120"/>
+              </a:rPr>
+              <a:t>94%</a:t>
+            </a:r>
+            <a:endParaRPr lang="en-US" sz="2800" dirty="0"/>
+          </a:p>
+        </p:txBody>
+      </p:sp>
+      <p:sp>
+        <p:nvSpPr>
+          <p:cNvPr id="22" name="Shape 19"/>
+          <p:cNvSpPr/>
+          <p:nvPr/>
+        </p:nvSpPr>
+        <p:spPr>
+          <a:xfrm>
+            <a:off x="3285375" y="3589020"/>
+            <a:ext cx="399904" cy="0"/>
+          </a:xfrm>
+          <a:prstGeom prst="line">
+            <a:avLst/>
+          </a:prstGeom>
+          <a:noFill/>
+          <a:ln w="12700">
+            <a:solidFill>
+              <a:srgbClr val="111827"/>
+            </a:solidFill>
+            <a:prstDash val="solid"/>
+            <a:tailEnd type="triangle"/>
+          </a:ln>
+        </p:spPr>
+      </p:sp>
+      <p:sp>
+        <p:nvSpPr>
+          <p:cNvPr id="23" name="Shape 20"/>
+          <p:cNvSpPr/>
+          <p:nvPr/>
+        </p:nvSpPr>
+        <p:spPr>
+          <a:xfrm>
+            <a:off x="5835088" y="3589020"/>
+            <a:ext cx="399904" cy="0"/>
+          </a:xfrm>
+          <a:prstGeom prst="line">
+            <a:avLst/>
+          </a:prstGeom>
+          <a:noFill/>
+          <a:ln w="12700">
+            <a:solidFill>
+              <a:srgbClr val="111827"/>
+            </a:solidFill>
+            <a:prstDash val="solid"/>
+            <a:tailEnd type="triangle"/>
+          </a:ln>
+        </p:spPr>
+      </p:sp>
+      <p:sp>
+        <p:nvSpPr>
+          <p:cNvPr id="24" name="Shape 21"/>
+          <p:cNvSpPr/>
+          <p:nvPr/>
+        </p:nvSpPr>
+        <p:spPr>
+          <a:xfrm>
+            <a:off x="8384801" y="3589020"/>
+            <a:ext cx="399904" cy="0"/>
+          </a:xfrm>
+          <a:prstGeom prst="line">
+            <a:avLst/>
+          </a:prstGeom>
+          <a:noFill/>
+          <a:ln w="12700">
+            <a:solidFill>
+              <a:srgbClr val="111827"/>
+            </a:solidFill>
+            <a:prstDash val="solid"/>
+            <a:tailEnd type="triangle"/>
+          </a:ln>
+        </p:spPr>
+      </p:sp>
+    </p:spTree>
+  </p:cSld>
+  <p:clrMapOvr>
+    <a:masterClrMapping/>
+  </p:clrMapOvr>
+</p:sld>
+</file>
+
+<file path=ppt/slides/slide19.xml><?xml version="1.0" encoding="utf-8"?>
+<p:sld xmlns:a="http://schemas.openxmlformats.org/drawingml/2006/main" xmlns:r="http://schemas.openxmlformats.org/officeDocument/2006/relationships" xmlns:p="http://schemas.openxmlformats.org/presentationml/2006/main">
+  <p:cSld name="Slide 19">
+    <p:bg>
+      <p:bgPr>
+        <a:solidFill>
+          <a:srgbClr val="FFFFFF"/>
+        </a:solidFill>
+      </p:bgPr>
+    </p:bg>
+    <p:spTree>
+      <p:nvGrpSpPr>
+        <p:cNvPr id="1" name=""/>
+        <p:cNvGrpSpPr/>
+        <p:nvPr/>
+      </p:nvGrpSpPr>
+      <p:grpSpPr>
+        <a:xfrm>
+          <a:off x="0" y="0"/>
+          <a:ext cx="0" cy="0"/>
+          <a:chOff x="0" y="0"/>
+          <a:chExt cx="0" cy="0"/>
+        </a:xfrm>
+      </p:grpSpPr>
+      <p:sp>
+        <p:nvSpPr>
+          <p:cNvPr id="2" name="Shape 0"/>
+          <p:cNvSpPr/>
+          <p:nvPr/>
+        </p:nvSpPr>
+        <p:spPr>
+          <a:xfrm>
+            <a:off x="749808" y="713232"/>
+            <a:ext cx="2194505" cy="0"/>
+          </a:xfrm>
+          <a:prstGeom prst="line">
+            <a:avLst/>
+          </a:prstGeom>
+          <a:noFill/>
+          <a:ln w="12700">
+            <a:solidFill>
+              <a:srgbClr val="111827">
+                <a:alpha val="82000"/>
+              </a:srgbClr>
+            </a:solidFill>
+            <a:prstDash val="solid"/>
+          </a:ln>
+        </p:spPr>
+      </p:sp>
+      <p:sp>
+        <p:nvSpPr>
+          <p:cNvPr id="3" name="Shape 1"/>
+          <p:cNvSpPr/>
+          <p:nvPr/>
+        </p:nvSpPr>
+        <p:spPr>
+          <a:xfrm>
+            <a:off x="9338767" y="6199632"/>
+            <a:ext cx="2103120" cy="0"/>
+          </a:xfrm>
+          <a:prstGeom prst="line">
+            <a:avLst/>
+          </a:prstGeom>
+          <a:noFill/>
+          <a:ln w="12700">
+            <a:solidFill>
+              <a:srgbClr val="E5E7EB">
+                <a:alpha val="82000"/>
+              </a:srgbClr>
+            </a:solidFill>
+            <a:prstDash val="solid"/>
+          </a:ln>
+        </p:spPr>
+      </p:sp>
+      <p:sp>
+        <p:nvSpPr>
+          <p:cNvPr id="4" name="Shape 2"/>
+          <p:cNvSpPr/>
+          <p:nvPr/>
+        </p:nvSpPr>
+        <p:spPr>
+          <a:xfrm>
+            <a:off x="786384" y="1956816"/>
+            <a:ext cx="32004" cy="3483864"/>
+          </a:xfrm>
+          <a:prstGeom prst="rect">
+            <a:avLst/>
+          </a:prstGeom>
+          <a:solidFill>
+            <a:srgbClr val="E5E7EB">
+              <a:alpha val="80000"/>
+            </a:srgbClr>
+          </a:solidFill>
+          <a:ln w="12700">
+            <a:solidFill>
+              <a:srgbClr val="E5E7EB">
+                <a:alpha val="0"/>
+              </a:srgbClr>
+            </a:solidFill>
+            <a:prstDash val="solid"/>
+          </a:ln>
+        </p:spPr>
+      </p:sp>
+      <p:sp>
+        <p:nvSpPr>
+          <p:cNvPr id="5" name="Shape 3"/>
+          <p:cNvSpPr/>
+          <p:nvPr/>
+        </p:nvSpPr>
+        <p:spPr>
+          <a:xfrm>
+            <a:off x="914400" y="1865376"/>
+            <a:ext cx="73152" cy="1024128"/>
+          </a:xfrm>
+          <a:prstGeom prst="rect">
+            <a:avLst/>
+          </a:prstGeom>
+          <a:solidFill>
+            <a:srgbClr val="111827"/>
+          </a:solidFill>
+          <a:ln w="12700">
+            <a:solidFill>
+              <a:srgbClr val="111827">
+                <a:alpha val="0"/>
+              </a:srgbClr>
+            </a:solidFill>
+            <a:prstDash val="solid"/>
+          </a:ln>
+        </p:spPr>
+      </p:sp>
+      <p:sp>
+        <p:nvSpPr>
+          <p:cNvPr id="6" name="Shape 4"/>
+          <p:cNvSpPr/>
+          <p:nvPr/>
+        </p:nvSpPr>
+        <p:spPr>
+          <a:xfrm>
+            <a:off x="914400" y="3191256"/>
+            <a:ext cx="73152" cy="1024128"/>
+          </a:xfrm>
+          <a:prstGeom prst="rect">
+            <a:avLst/>
+          </a:prstGeom>
+          <a:solidFill>
+            <a:srgbClr val="E5E7EB"/>
+          </a:solidFill>
+          <a:ln w="12700">
+            <a:solidFill>
+              <a:srgbClr val="E5E7EB">
+                <a:alpha val="0"/>
+              </a:srgbClr>
+            </a:solidFill>
+            <a:prstDash val="solid"/>
+          </a:ln>
+        </p:spPr>
+      </p:sp>
+      <p:sp>
+        <p:nvSpPr>
+          <p:cNvPr id="7" name="Shape 5"/>
+          <p:cNvSpPr/>
+          <p:nvPr/>
+        </p:nvSpPr>
+        <p:spPr>
+          <a:xfrm>
+            <a:off x="914400" y="4507992"/>
+            <a:ext cx="73152" cy="1024128"/>
+          </a:xfrm>
+          <a:prstGeom prst="rect">
+            <a:avLst/>
+          </a:prstGeom>
+          <a:solidFill>
+            <a:srgbClr val="111827"/>
+          </a:solidFill>
+          <a:ln w="12700">
+            <a:solidFill>
+              <a:srgbClr val="111827">
+                <a:alpha val="0"/>
+              </a:srgbClr>
+            </a:solidFill>
+            <a:prstDash val="solid"/>
+          </a:ln>
+        </p:spPr>
+      </p:sp>
+      <p:pic>
+        <p:nvPicPr>
+          <p:cNvPr id="8" name="Image 0" descr="preencoded.png">    </p:cNvPr>
+          <p:cNvPicPr>
+            <a:picLocks noChangeAspect="1"/>
+          </p:cNvPicPr>
+          <p:nvPr/>
+        </p:nvPicPr>
+        <p:blipFill>
+          <a:blip r:embed="rId1">
+            <a:extLst>
+              <a:ext uri="{96DAC541-7B7A-43D3-8B79-37D633B846F1}">
+                <asvg:svgBlip xmlns:asvg="http://schemas.microsoft.com/office/drawing/2016/SVG/main" r:embed="rId2"/>
+              </a:ext>
+            </a:extLst>
+          </a:blip>
+          <a:stretch>
+            <a:fillRect/>
+          </a:stretch>
+        </p:blipFill>
+        <p:spPr>
+          <a:xfrm>
+            <a:off x="914400" y="1865376"/>
+            <a:ext cx="10241280" cy="1024128"/>
+          </a:xfrm>
+          <a:prstGeom prst="rect">
+            <a:avLst/>
+          </a:prstGeom>
+        </p:spPr>
+      </p:pic>
+      <p:pic>
+        <p:nvPicPr>
+          <p:cNvPr id="9" name="Image 1" descr="preencoded.png">    </p:cNvPr>
+          <p:cNvPicPr>
+            <a:picLocks noChangeAspect="1"/>
+          </p:cNvPicPr>
+          <p:nvPr/>
+        </p:nvPicPr>
+        <p:blipFill>
+          <a:blip r:embed="rId3">
+            <a:extLst>
+              <a:ext uri="{96DAC541-7B7A-43D3-8B79-37D633B846F1}">
+                <asvg:svgBlip xmlns:asvg="http://schemas.microsoft.com/office/drawing/2016/SVG/main" r:embed="rId4"/>
+              </a:ext>
+            </a:extLst>
+          </a:blip>
+          <a:stretch>
+            <a:fillRect/>
+          </a:stretch>
+        </p:blipFill>
+        <p:spPr>
+          <a:xfrm>
+            <a:off x="914400" y="3191256"/>
+            <a:ext cx="10241280" cy="1024128"/>
+          </a:xfrm>
+          <a:prstGeom prst="rect">
+            <a:avLst/>
+          </a:prstGeom>
+        </p:spPr>
+      </p:pic>
+      <p:pic>
+        <p:nvPicPr>
+          <p:cNvPr id="10" name="Image 2" descr="preencoded.png">    </p:cNvPr>
+          <p:cNvPicPr>
+            <a:picLocks noChangeAspect="1"/>
+          </p:cNvPicPr>
+          <p:nvPr/>
+        </p:nvPicPr>
+        <p:blipFill>
+          <a:blip r:embed="rId5">
+            <a:extLst>
+              <a:ext uri="{96DAC541-7B7A-43D3-8B79-37D633B846F1}">
+                <asvg:svgBlip xmlns:asvg="http://schemas.microsoft.com/office/drawing/2016/SVG/main" r:embed="rId6"/>
+              </a:ext>
+            </a:extLst>
+          </a:blip>
+          <a:stretch>
+            <a:fillRect/>
+          </a:stretch>
+        </p:blipFill>
+        <p:spPr>
+          <a:xfrm>
+            <a:off x="914400" y="4507992"/>
+            <a:ext cx="10241280" cy="1024128"/>
+          </a:xfrm>
+          <a:prstGeom prst="rect">
+            <a:avLst/>
+          </a:prstGeom>
+        </p:spPr>
+      </p:pic>
+      <p:sp>
+        <p:nvSpPr>
+          <p:cNvPr id="11" name="Text 6"/>
           <p:cNvSpPr txBox="1"/>
           <p:nvPr/>
         </p:nvSpPr>
@@ -9869,14 +10913,71 @@
       </p:sp>
       <p:sp>
         <p:nvSpPr>
-          <p:cNvPr id="6" name="Text 4"/>
+          <p:cNvPr id="12" name="Shape 7"/>
+          <p:cNvSpPr/>
+          <p:nvPr/>
+        </p:nvSpPr>
+        <p:spPr>
+          <a:xfrm>
+            <a:off x="1097280" y="2140428"/>
+            <a:ext cx="474025" cy="474025"/>
+          </a:xfrm>
+          <a:prstGeom prst="roundRect">
+            <a:avLst>
+              <a:gd name="adj" fmla="val 7716"/>
+            </a:avLst>
+          </a:prstGeom>
+          <a:solidFill>
+            <a:srgbClr val="FFFFFF"/>
+          </a:solidFill>
+          <a:ln w="12700">
+            <a:solidFill>
+              <a:srgbClr val="E5E7EB"/>
+            </a:solidFill>
+            <a:prstDash val="solid"/>
+          </a:ln>
+        </p:spPr>
+      </p:sp>
+      <p:pic>
+        <p:nvPicPr>
+          <p:cNvPr id="13" name="Image 3" descr="article icon from tabler-icons (MIT)">    </p:cNvPr>
+          <p:cNvPicPr>
+            <a:picLocks noChangeAspect="1"/>
+          </p:cNvPicPr>
+          <p:nvPr/>
+        </p:nvPicPr>
+        <p:blipFill>
+          <a:blip r:embed="rId7">
+            <a:extLst>
+              <a:ext uri="{96DAC541-7B7A-43D3-8B79-37D633B846F1}">
+                <asvg:svgBlip xmlns:asvg="http://schemas.microsoft.com/office/drawing/2016/SVG/main" r:embed="rId8"/>
+              </a:ext>
+            </a:extLst>
+          </a:blip>
+          <a:stretch>
+            <a:fillRect/>
+          </a:stretch>
+        </p:blipFill>
+        <p:spPr>
+          <a:xfrm>
+            <a:off x="1170432" y="2213580"/>
+            <a:ext cx="327721" cy="327721"/>
+          </a:xfrm>
+          <a:prstGeom prst="rect">
+            <a:avLst/>
+          </a:prstGeom>
+        </p:spPr>
+      </p:pic>
+      <p:sp>
+        <p:nvSpPr>
+          <p:cNvPr id="14" name="Text 8"/>
           <p:cNvSpPr txBox="1"/>
           <p:nvPr/>
         </p:nvSpPr>
         <p:spPr>
           <a:xfrm>
-            <a:off x="987552" y="1572768"/>
-            <a:ext cx="10094976" cy="4261104"/>
+            <a:off x="1699321" y="1987296"/>
+            <a:ext cx="9255191" cy="780288"/>
           </a:xfrm>
           <a:prstGeom prst="rect">
             <a:avLst/>
@@ -9885,7 +10986,7 @@
           <a:ln/>
         </p:spPr>
         <p:txBody>
-          <a:bodyPr wrap="square" lIns="0" tIns="25400" rIns="25400" bIns="0" rtlCol="0" anchor="t"/>
+          <a:bodyPr wrap="square" lIns="0" tIns="25400" rIns="25400" bIns="0" rtlCol="0" anchor="ctr"/>
           <a:lstStyle/>
           <a:p>
             <a:pPr algn="l" indent="0" marL="0">
@@ -9903,7 +11004,7 @@
                 <a:ea typeface="Pretendard" pitchFamily="34" charset="-122"/>
                 <a:cs typeface="Pretendard" pitchFamily="34" charset="-120"/>
               </a:rPr>
-              <a:t>- Method flag</a:t>
+              <a:t>Method flag</a:t>
             </a:r>
             <a:pPr algn="l" indent="0" marL="0">
               <a:lnSpc>
@@ -9924,6 +11025,85 @@
             </a:r>
             <a:endParaRPr lang="en-US" sz="2200" dirty="0"/>
           </a:p>
+        </p:txBody>
+      </p:sp>
+      <p:sp>
+        <p:nvSpPr>
+          <p:cNvPr id="15" name="Shape 9"/>
+          <p:cNvSpPr/>
+          <p:nvPr/>
+        </p:nvSpPr>
+        <p:spPr>
+          <a:xfrm>
+            <a:off x="1097280" y="3466308"/>
+            <a:ext cx="474025" cy="474025"/>
+          </a:xfrm>
+          <a:prstGeom prst="roundRect">
+            <a:avLst>
+              <a:gd name="adj" fmla="val 7716"/>
+            </a:avLst>
+          </a:prstGeom>
+          <a:solidFill>
+            <a:srgbClr val="FFFFFF"/>
+          </a:solidFill>
+          <a:ln w="12700">
+            <a:solidFill>
+              <a:srgbClr val="E5E7EB"/>
+            </a:solidFill>
+            <a:prstDash val="solid"/>
+          </a:ln>
+        </p:spPr>
+      </p:sp>
+      <p:pic>
+        <p:nvPicPr>
+          <p:cNvPr id="16" name="Image 4" descr="article icon from tabler-icons (MIT)">    </p:cNvPr>
+          <p:cNvPicPr>
+            <a:picLocks noChangeAspect="1"/>
+          </p:cNvPicPr>
+          <p:nvPr/>
+        </p:nvPicPr>
+        <p:blipFill>
+          <a:blip r:embed="rId9">
+            <a:extLst>
+              <a:ext uri="{96DAC541-7B7A-43D3-8B79-37D633B846F1}">
+                <asvg:svgBlip xmlns:asvg="http://schemas.microsoft.com/office/drawing/2016/SVG/main" r:embed="rId10"/>
+              </a:ext>
+            </a:extLst>
+          </a:blip>
+          <a:stretch>
+            <a:fillRect/>
+          </a:stretch>
+        </p:blipFill>
+        <p:spPr>
+          <a:xfrm>
+            <a:off x="1170432" y="3539460"/>
+            <a:ext cx="327721" cy="327721"/>
+          </a:xfrm>
+          <a:prstGeom prst="rect">
+            <a:avLst/>
+          </a:prstGeom>
+        </p:spPr>
+      </p:pic>
+      <p:sp>
+        <p:nvSpPr>
+          <p:cNvPr id="17" name="Text 10"/>
+          <p:cNvSpPr txBox="1"/>
+          <p:nvPr/>
+        </p:nvSpPr>
+        <p:spPr>
+          <a:xfrm>
+            <a:off x="1699321" y="3313176"/>
+            <a:ext cx="9255191" cy="780288"/>
+          </a:xfrm>
+          <a:prstGeom prst="rect">
+            <a:avLst/>
+          </a:prstGeom>
+          <a:noFill/>
+          <a:ln/>
+        </p:spPr>
+        <p:txBody>
+          <a:bodyPr wrap="square" lIns="0" tIns="25400" rIns="25400" bIns="0" rtlCol="0" anchor="ctr"/>
+          <a:lstStyle/>
           <a:p>
             <a:pPr algn="l" indent="0" marL="0">
               <a:lnSpc>
@@ -9940,11 +11120,8 @@
                 <a:ea typeface="Pretendard" pitchFamily="34" charset="-122"/>
                 <a:cs typeface="Pretendard" pitchFamily="34" charset="-120"/>
               </a:rPr>
-              <a:t>- Ticket panel</a:t>
+              <a:t>Ticket panel</a:t>
             </a:r>
-            <a:endParaRPr lang="en-US" sz="2200" dirty="0"/>
-          </a:p>
-          <a:p>
             <a:pPr algn="l" indent="0" marL="0">
               <a:lnSpc>
                 <a:spcPct val="120000"/>
@@ -9964,6 +11141,85 @@
             </a:r>
             <a:endParaRPr lang="en-US" sz="2200" dirty="0"/>
           </a:p>
+        </p:txBody>
+      </p:sp>
+      <p:sp>
+        <p:nvSpPr>
+          <p:cNvPr id="18" name="Shape 11"/>
+          <p:cNvSpPr/>
+          <p:nvPr/>
+        </p:nvSpPr>
+        <p:spPr>
+          <a:xfrm>
+            <a:off x="1097280" y="4783044"/>
+            <a:ext cx="474025" cy="474025"/>
+          </a:xfrm>
+          <a:prstGeom prst="roundRect">
+            <a:avLst>
+              <a:gd name="adj" fmla="val 7716"/>
+            </a:avLst>
+          </a:prstGeom>
+          <a:solidFill>
+            <a:srgbClr val="FFFFFF"/>
+          </a:solidFill>
+          <a:ln w="12700">
+            <a:solidFill>
+              <a:srgbClr val="E5E7EB"/>
+            </a:solidFill>
+            <a:prstDash val="solid"/>
+          </a:ln>
+        </p:spPr>
+      </p:sp>
+      <p:pic>
+        <p:nvPicPr>
+          <p:cNvPr id="19" name="Image 5" descr="article icon from tabler-icons (MIT)">    </p:cNvPr>
+          <p:cNvPicPr>
+            <a:picLocks noChangeAspect="1"/>
+          </p:cNvPicPr>
+          <p:nvPr/>
+        </p:nvPicPr>
+        <p:blipFill>
+          <a:blip r:embed="rId11">
+            <a:extLst>
+              <a:ext uri="{96DAC541-7B7A-43D3-8B79-37D633B846F1}">
+                <asvg:svgBlip xmlns:asvg="http://schemas.microsoft.com/office/drawing/2016/SVG/main" r:embed="rId12"/>
+              </a:ext>
+            </a:extLst>
+          </a:blip>
+          <a:stretch>
+            <a:fillRect/>
+          </a:stretch>
+        </p:blipFill>
+        <p:spPr>
+          <a:xfrm>
+            <a:off x="1170432" y="4856196"/>
+            <a:ext cx="327721" cy="327721"/>
+          </a:xfrm>
+          <a:prstGeom prst="rect">
+            <a:avLst/>
+          </a:prstGeom>
+        </p:spPr>
+      </p:pic>
+      <p:sp>
+        <p:nvSpPr>
+          <p:cNvPr id="20" name="Text 12"/>
+          <p:cNvSpPr txBox="1"/>
+          <p:nvPr/>
+        </p:nvSpPr>
+        <p:spPr>
+          <a:xfrm>
+            <a:off x="1699321" y="4629912"/>
+            <a:ext cx="9255191" cy="780288"/>
+          </a:xfrm>
+          <a:prstGeom prst="rect">
+            <a:avLst/>
+          </a:prstGeom>
+          <a:noFill/>
+          <a:ln/>
+        </p:spPr>
+        <p:txBody>
+          <a:bodyPr wrap="square" lIns="0" tIns="25400" rIns="25400" bIns="0" rtlCol="0" anchor="ctr"/>
+          <a:lstStyle/>
           <a:p>
             <a:pPr algn="l" indent="0" marL="0">
               <a:lnSpc>
@@ -9980,11 +11236,8 @@
                 <a:ea typeface="Pretendard" pitchFamily="34" charset="-122"/>
                 <a:cs typeface="Pretendard" pitchFamily="34" charset="-120"/>
               </a:rPr>
-              <a:t>- Two-corner panel</a:t>
+              <a:t>Two-corner panel</a:t>
             </a:r>
-            <a:endParaRPr lang="en-US" sz="2200" dirty="0"/>
-          </a:p>
-          <a:p>
             <a:pPr algn="l" indent="0" marL="0">
               <a:lnSpc>
                 <a:spcPct val="120000"/>
@@ -10014,9 +11267,1182 @@
 </p:sld>
 </file>
 
-<file path=ppt/slides/slide19.xml><?xml version="1.0" encoding="utf-8"?>
+<file path=ppt/slides/slide2.xml><?xml version="1.0" encoding="utf-8"?>
 <p:sld xmlns:a="http://schemas.openxmlformats.org/drawingml/2006/main" xmlns:r="http://schemas.openxmlformats.org/officeDocument/2006/relationships" xmlns:p="http://schemas.openxmlformats.org/presentationml/2006/main">
-  <p:cSld name="Slide 19">
+  <p:cSld name="Slide 2">
+    <p:bg>
+      <p:bgPr>
+        <a:solidFill>
+          <a:srgbClr val="FFFFFF"/>
+        </a:solidFill>
+      </p:bgPr>
+    </p:bg>
+    <p:spTree>
+      <p:nvGrpSpPr>
+        <p:cNvPr id="1" name=""/>
+        <p:cNvGrpSpPr/>
+        <p:nvPr/>
+      </p:nvGrpSpPr>
+      <p:grpSpPr>
+        <a:xfrm>
+          <a:off x="0" y="0"/>
+          <a:ext cx="0" cy="0"/>
+          <a:chOff x="0" y="0"/>
+          <a:chExt cx="0" cy="0"/>
+        </a:xfrm>
+      </p:grpSpPr>
+      <p:sp>
+        <p:nvSpPr>
+          <p:cNvPr id="2" name="Shape 0"/>
+          <p:cNvSpPr/>
+          <p:nvPr/>
+        </p:nvSpPr>
+        <p:spPr>
+          <a:xfrm>
+            <a:off x="749808" y="713232"/>
+            <a:ext cx="2194505" cy="0"/>
+          </a:xfrm>
+          <a:prstGeom prst="line">
+            <a:avLst/>
+          </a:prstGeom>
+          <a:noFill/>
+          <a:ln w="12700">
+            <a:solidFill>
+              <a:srgbClr val="111827">
+                <a:alpha val="82000"/>
+              </a:srgbClr>
+            </a:solidFill>
+            <a:prstDash val="solid"/>
+          </a:ln>
+        </p:spPr>
+      </p:sp>
+      <p:sp>
+        <p:nvSpPr>
+          <p:cNvPr id="3" name="Shape 1"/>
+          <p:cNvSpPr/>
+          <p:nvPr/>
+        </p:nvSpPr>
+        <p:spPr>
+          <a:xfrm>
+            <a:off x="9338767" y="6199632"/>
+            <a:ext cx="2103120" cy="0"/>
+          </a:xfrm>
+          <a:prstGeom prst="line">
+            <a:avLst/>
+          </a:prstGeom>
+          <a:noFill/>
+          <a:ln w="12700">
+            <a:solidFill>
+              <a:srgbClr val="E5E7EB">
+                <a:alpha val="82000"/>
+              </a:srgbClr>
+            </a:solidFill>
+            <a:prstDash val="solid"/>
+          </a:ln>
+        </p:spPr>
+      </p:sp>
+      <p:sp>
+        <p:nvSpPr>
+          <p:cNvPr id="4" name="Shape 2"/>
+          <p:cNvSpPr/>
+          <p:nvPr/>
+        </p:nvSpPr>
+        <p:spPr>
+          <a:xfrm>
+            <a:off x="822960" y="1188720"/>
+            <a:ext cx="10515600" cy="45720"/>
+          </a:xfrm>
+          <a:prstGeom prst="rect">
+            <a:avLst/>
+          </a:prstGeom>
+          <a:solidFill>
+            <a:srgbClr val="111827"/>
+          </a:solidFill>
+          <a:ln w="12700">
+            <a:solidFill>
+              <a:srgbClr val="111827">
+                <a:alpha val="0"/>
+              </a:srgbClr>
+            </a:solidFill>
+            <a:prstDash val="solid"/>
+          </a:ln>
+        </p:spPr>
+      </p:sp>
+      <p:sp>
+        <p:nvSpPr>
+          <p:cNvPr id="5" name="Shape 3"/>
+          <p:cNvSpPr/>
+          <p:nvPr/>
+        </p:nvSpPr>
+        <p:spPr>
+          <a:xfrm>
+            <a:off x="822960" y="6382512"/>
+            <a:ext cx="2011680" cy="45720"/>
+          </a:xfrm>
+          <a:prstGeom prst="rect">
+            <a:avLst/>
+          </a:prstGeom>
+          <a:solidFill>
+            <a:srgbClr val="E5E7EB"/>
+          </a:solidFill>
+          <a:ln w="12700">
+            <a:solidFill>
+              <a:srgbClr val="E5E7EB">
+                <a:alpha val="0"/>
+              </a:srgbClr>
+            </a:solidFill>
+            <a:prstDash val="solid"/>
+          </a:ln>
+        </p:spPr>
+      </p:sp>
+      <p:sp>
+        <p:nvSpPr>
+          <p:cNvPr id="6" name="Shape 4"/>
+          <p:cNvSpPr/>
+          <p:nvPr/>
+        </p:nvSpPr>
+        <p:spPr>
+          <a:xfrm>
+            <a:off x="6080760" y="1389888"/>
+            <a:ext cx="22860" cy="4846320"/>
+          </a:xfrm>
+          <a:prstGeom prst="rect">
+            <a:avLst/>
+          </a:prstGeom>
+          <a:solidFill>
+            <a:srgbClr val="E5E7EB">
+              <a:alpha val="90000"/>
+            </a:srgbClr>
+          </a:solidFill>
+          <a:ln w="12700">
+            <a:solidFill>
+              <a:srgbClr val="E5E7EB">
+                <a:alpha val="0"/>
+              </a:srgbClr>
+            </a:solidFill>
+            <a:prstDash val="solid"/>
+          </a:ln>
+        </p:spPr>
+      </p:sp>
+      <p:sp>
+        <p:nvSpPr>
+          <p:cNvPr id="7" name="Shape 5"/>
+          <p:cNvSpPr/>
+          <p:nvPr/>
+        </p:nvSpPr>
+        <p:spPr>
+          <a:xfrm>
+            <a:off x="822960" y="1389888"/>
+            <a:ext cx="73152" cy="566928"/>
+          </a:xfrm>
+          <a:prstGeom prst="rect">
+            <a:avLst/>
+          </a:prstGeom>
+          <a:solidFill>
+            <a:srgbClr val="111827"/>
+          </a:solidFill>
+          <a:ln w="12700">
+            <a:solidFill>
+              <a:srgbClr val="111827">
+                <a:alpha val="0"/>
+              </a:srgbClr>
+            </a:solidFill>
+            <a:prstDash val="solid"/>
+          </a:ln>
+        </p:spPr>
+      </p:sp>
+      <p:sp>
+        <p:nvSpPr>
+          <p:cNvPr id="8" name="Shape 6"/>
+          <p:cNvSpPr/>
+          <p:nvPr/>
+        </p:nvSpPr>
+        <p:spPr>
+          <a:xfrm>
+            <a:off x="822960" y="2103120"/>
+            <a:ext cx="73152" cy="566928"/>
+          </a:xfrm>
+          <a:prstGeom prst="rect">
+            <a:avLst/>
+          </a:prstGeom>
+          <a:solidFill>
+            <a:srgbClr val="E5E7EB"/>
+          </a:solidFill>
+          <a:ln w="12700">
+            <a:solidFill>
+              <a:srgbClr val="E5E7EB">
+                <a:alpha val="0"/>
+              </a:srgbClr>
+            </a:solidFill>
+            <a:prstDash val="solid"/>
+          </a:ln>
+        </p:spPr>
+      </p:sp>
+      <p:sp>
+        <p:nvSpPr>
+          <p:cNvPr id="9" name="Shape 7"/>
+          <p:cNvSpPr/>
+          <p:nvPr/>
+        </p:nvSpPr>
+        <p:spPr>
+          <a:xfrm>
+            <a:off x="822960" y="2816352"/>
+            <a:ext cx="73152" cy="566928"/>
+          </a:xfrm>
+          <a:prstGeom prst="rect">
+            <a:avLst/>
+          </a:prstGeom>
+          <a:solidFill>
+            <a:srgbClr val="111827"/>
+          </a:solidFill>
+          <a:ln w="12700">
+            <a:solidFill>
+              <a:srgbClr val="111827">
+                <a:alpha val="0"/>
+              </a:srgbClr>
+            </a:solidFill>
+            <a:prstDash val="solid"/>
+          </a:ln>
+        </p:spPr>
+      </p:sp>
+      <p:sp>
+        <p:nvSpPr>
+          <p:cNvPr id="10" name="Shape 8"/>
+          <p:cNvSpPr/>
+          <p:nvPr/>
+        </p:nvSpPr>
+        <p:spPr>
+          <a:xfrm>
+            <a:off x="822960" y="3529584"/>
+            <a:ext cx="73152" cy="566928"/>
+          </a:xfrm>
+          <a:prstGeom prst="rect">
+            <a:avLst/>
+          </a:prstGeom>
+          <a:solidFill>
+            <a:srgbClr val="E5E7EB"/>
+          </a:solidFill>
+          <a:ln w="12700">
+            <a:solidFill>
+              <a:srgbClr val="E5E7EB">
+                <a:alpha val="0"/>
+              </a:srgbClr>
+            </a:solidFill>
+            <a:prstDash val="solid"/>
+          </a:ln>
+        </p:spPr>
+      </p:sp>
+      <p:sp>
+        <p:nvSpPr>
+          <p:cNvPr id="11" name="Shape 9"/>
+          <p:cNvSpPr/>
+          <p:nvPr/>
+        </p:nvSpPr>
+        <p:spPr>
+          <a:xfrm>
+            <a:off x="822960" y="4242816"/>
+            <a:ext cx="73152" cy="566928"/>
+          </a:xfrm>
+          <a:prstGeom prst="rect">
+            <a:avLst/>
+          </a:prstGeom>
+          <a:solidFill>
+            <a:srgbClr val="111827"/>
+          </a:solidFill>
+          <a:ln w="12700">
+            <a:solidFill>
+              <a:srgbClr val="111827">
+                <a:alpha val="0"/>
+              </a:srgbClr>
+            </a:solidFill>
+            <a:prstDash val="solid"/>
+          </a:ln>
+        </p:spPr>
+      </p:sp>
+      <p:sp>
+        <p:nvSpPr>
+          <p:cNvPr id="12" name="Shape 10"/>
+          <p:cNvSpPr/>
+          <p:nvPr/>
+        </p:nvSpPr>
+        <p:spPr>
+          <a:xfrm>
+            <a:off x="822960" y="4956048"/>
+            <a:ext cx="73152" cy="566928"/>
+          </a:xfrm>
+          <a:prstGeom prst="rect">
+            <a:avLst/>
+          </a:prstGeom>
+          <a:solidFill>
+            <a:srgbClr val="E5E7EB"/>
+          </a:solidFill>
+          <a:ln w="12700">
+            <a:solidFill>
+              <a:srgbClr val="E5E7EB">
+                <a:alpha val="0"/>
+              </a:srgbClr>
+            </a:solidFill>
+            <a:prstDash val="solid"/>
+          </a:ln>
+        </p:spPr>
+      </p:sp>
+      <p:sp>
+        <p:nvSpPr>
+          <p:cNvPr id="13" name="Shape 11"/>
+          <p:cNvSpPr/>
+          <p:nvPr/>
+        </p:nvSpPr>
+        <p:spPr>
+          <a:xfrm>
+            <a:off x="822960" y="5669280"/>
+            <a:ext cx="73152" cy="566928"/>
+          </a:xfrm>
+          <a:prstGeom prst="rect">
+            <a:avLst/>
+          </a:prstGeom>
+          <a:solidFill>
+            <a:srgbClr val="111827"/>
+          </a:solidFill>
+          <a:ln w="12700">
+            <a:solidFill>
+              <a:srgbClr val="111827">
+                <a:alpha val="0"/>
+              </a:srgbClr>
+            </a:solidFill>
+            <a:prstDash val="solid"/>
+          </a:ln>
+        </p:spPr>
+      </p:sp>
+      <p:sp>
+        <p:nvSpPr>
+          <p:cNvPr id="14" name="Shape 12"/>
+          <p:cNvSpPr/>
+          <p:nvPr/>
+        </p:nvSpPr>
+        <p:spPr>
+          <a:xfrm>
+            <a:off x="6272784" y="1389888"/>
+            <a:ext cx="73152" cy="566928"/>
+          </a:xfrm>
+          <a:prstGeom prst="rect">
+            <a:avLst/>
+          </a:prstGeom>
+          <a:solidFill>
+            <a:srgbClr val="E5E7EB"/>
+          </a:solidFill>
+          <a:ln w="12700">
+            <a:solidFill>
+              <a:srgbClr val="E5E7EB">
+                <a:alpha val="0"/>
+              </a:srgbClr>
+            </a:solidFill>
+            <a:prstDash val="solid"/>
+          </a:ln>
+        </p:spPr>
+      </p:sp>
+      <p:sp>
+        <p:nvSpPr>
+          <p:cNvPr id="15" name="Shape 13"/>
+          <p:cNvSpPr/>
+          <p:nvPr/>
+        </p:nvSpPr>
+        <p:spPr>
+          <a:xfrm>
+            <a:off x="6272784" y="2103120"/>
+            <a:ext cx="73152" cy="566928"/>
+          </a:xfrm>
+          <a:prstGeom prst="rect">
+            <a:avLst/>
+          </a:prstGeom>
+          <a:solidFill>
+            <a:srgbClr val="111827"/>
+          </a:solidFill>
+          <a:ln w="12700">
+            <a:solidFill>
+              <a:srgbClr val="111827">
+                <a:alpha val="0"/>
+              </a:srgbClr>
+            </a:solidFill>
+            <a:prstDash val="solid"/>
+          </a:ln>
+        </p:spPr>
+      </p:sp>
+      <p:sp>
+        <p:nvSpPr>
+          <p:cNvPr id="16" name="Shape 14"/>
+          <p:cNvSpPr/>
+          <p:nvPr/>
+        </p:nvSpPr>
+        <p:spPr>
+          <a:xfrm>
+            <a:off x="6272784" y="2816352"/>
+            <a:ext cx="73152" cy="566928"/>
+          </a:xfrm>
+          <a:prstGeom prst="rect">
+            <a:avLst/>
+          </a:prstGeom>
+          <a:solidFill>
+            <a:srgbClr val="E5E7EB"/>
+          </a:solidFill>
+          <a:ln w="12700">
+            <a:solidFill>
+              <a:srgbClr val="E5E7EB">
+                <a:alpha val="0"/>
+              </a:srgbClr>
+            </a:solidFill>
+            <a:prstDash val="solid"/>
+          </a:ln>
+        </p:spPr>
+      </p:sp>
+      <p:sp>
+        <p:nvSpPr>
+          <p:cNvPr id="17" name="Shape 15"/>
+          <p:cNvSpPr/>
+          <p:nvPr/>
+        </p:nvSpPr>
+        <p:spPr>
+          <a:xfrm>
+            <a:off x="6272784" y="3529584"/>
+            <a:ext cx="73152" cy="566928"/>
+          </a:xfrm>
+          <a:prstGeom prst="rect">
+            <a:avLst/>
+          </a:prstGeom>
+          <a:solidFill>
+            <a:srgbClr val="111827"/>
+          </a:solidFill>
+          <a:ln w="12700">
+            <a:solidFill>
+              <a:srgbClr val="111827">
+                <a:alpha val="0"/>
+              </a:srgbClr>
+            </a:solidFill>
+            <a:prstDash val="solid"/>
+          </a:ln>
+        </p:spPr>
+      </p:sp>
+      <p:sp>
+        <p:nvSpPr>
+          <p:cNvPr id="18" name="Shape 16"/>
+          <p:cNvSpPr/>
+          <p:nvPr/>
+        </p:nvSpPr>
+        <p:spPr>
+          <a:xfrm>
+            <a:off x="6272784" y="4242816"/>
+            <a:ext cx="73152" cy="566928"/>
+          </a:xfrm>
+          <a:prstGeom prst="rect">
+            <a:avLst/>
+          </a:prstGeom>
+          <a:solidFill>
+            <a:srgbClr val="E5E7EB"/>
+          </a:solidFill>
+          <a:ln w="12700">
+            <a:solidFill>
+              <a:srgbClr val="E5E7EB">
+                <a:alpha val="0"/>
+              </a:srgbClr>
+            </a:solidFill>
+            <a:prstDash val="solid"/>
+          </a:ln>
+        </p:spPr>
+      </p:sp>
+      <p:sp>
+        <p:nvSpPr>
+          <p:cNvPr id="19" name="Shape 17"/>
+          <p:cNvSpPr/>
+          <p:nvPr/>
+        </p:nvSpPr>
+        <p:spPr>
+          <a:xfrm>
+            <a:off x="6272784" y="4956048"/>
+            <a:ext cx="73152" cy="566928"/>
+          </a:xfrm>
+          <a:prstGeom prst="rect">
+            <a:avLst/>
+          </a:prstGeom>
+          <a:solidFill>
+            <a:srgbClr val="111827"/>
+          </a:solidFill>
+          <a:ln w="12700">
+            <a:solidFill>
+              <a:srgbClr val="111827">
+                <a:alpha val="0"/>
+              </a:srgbClr>
+            </a:solidFill>
+            <a:prstDash val="solid"/>
+          </a:ln>
+        </p:spPr>
+      </p:sp>
+      <p:sp>
+        <p:nvSpPr>
+          <p:cNvPr id="20" name="Shape 18"/>
+          <p:cNvSpPr/>
+          <p:nvPr/>
+        </p:nvSpPr>
+        <p:spPr>
+          <a:xfrm>
+            <a:off x="6272784" y="5669280"/>
+            <a:ext cx="73152" cy="566928"/>
+          </a:xfrm>
+          <a:prstGeom prst="rect">
+            <a:avLst/>
+          </a:prstGeom>
+          <a:solidFill>
+            <a:srgbClr val="E5E7EB"/>
+          </a:solidFill>
+          <a:ln w="12700">
+            <a:solidFill>
+              <a:srgbClr val="E5E7EB">
+                <a:alpha val="0"/>
+              </a:srgbClr>
+            </a:solidFill>
+            <a:prstDash val="solid"/>
+          </a:ln>
+        </p:spPr>
+      </p:sp>
+      <p:sp>
+        <p:nvSpPr>
+          <p:cNvPr id="21" name="Text 19"/>
+          <p:cNvSpPr txBox="1"/>
+          <p:nvPr/>
+        </p:nvSpPr>
+        <p:spPr>
+          <a:xfrm>
+            <a:off x="731520" y="384048"/>
+            <a:ext cx="10698480" cy="822960"/>
+          </a:xfrm>
+          <a:prstGeom prst="rect">
+            <a:avLst/>
+          </a:prstGeom>
+          <a:noFill/>
+          <a:ln/>
+        </p:spPr>
+        <p:txBody>
+          <a:bodyPr wrap="square" lIns="0" tIns="0" rIns="0" bIns="0" rtlCol="0" anchor="ctr"/>
+          <a:lstStyle/>
+          <a:p>
+            <a:pPr algn="ctr" indent="0" marL="0">
+              <a:lnSpc>
+                <a:spcPct val="120000"/>
+              </a:lnSpc>
+              <a:buNone/>
+            </a:pPr>
+            <a:r>
+              <a:rPr lang="en-US" sz="3800" b="1" dirty="0">
+                <a:solidFill>
+                  <a:srgbClr val="111827"/>
+                </a:solidFill>
+                <a:latin typeface="Pretendard" pitchFamily="34" charset="0"/>
+                <a:ea typeface="Pretendard" pitchFamily="34" charset="-122"/>
+                <a:cs typeface="Pretendard" pitchFamily="34" charset="-120"/>
+              </a:rPr>
+              <a:t>Agenda</a:t>
+            </a:r>
+            <a:endParaRPr lang="en-US" sz="3800" dirty="0"/>
+          </a:p>
+        </p:txBody>
+      </p:sp>
+      <p:sp>
+        <p:nvSpPr>
+          <p:cNvPr id="22" name="Text 20"/>
+          <p:cNvSpPr txBox="1"/>
+          <p:nvPr/>
+        </p:nvSpPr>
+        <p:spPr>
+          <a:xfrm>
+            <a:off x="1042416" y="1481328"/>
+            <a:ext cx="4645152" cy="384048"/>
+          </a:xfrm>
+          <a:prstGeom prst="rect">
+            <a:avLst/>
+          </a:prstGeom>
+          <a:noFill/>
+          <a:ln/>
+        </p:spPr>
+        <p:txBody>
+          <a:bodyPr wrap="square" lIns="0" tIns="25400" rIns="25400" bIns="0" rtlCol="0" anchor="ctr"/>
+          <a:lstStyle/>
+          <a:p>
+            <a:pPr algn="ctr" indent="0" marL="0">
+              <a:lnSpc>
+                <a:spcPct val="120000"/>
+              </a:lnSpc>
+              <a:buNone/>
+            </a:pPr>
+            <a:r>
+              <a:rPr lang="en-US" sz="1800" dirty="0">
+                <a:solidFill>
+                  <a:srgbClr val="111827"/>
+                </a:solidFill>
+                <a:latin typeface="Pretendard" pitchFamily="34" charset="0"/>
+                <a:ea typeface="Pretendard" pitchFamily="34" charset="-122"/>
+                <a:cs typeface="Pretendard" pitchFamily="34" charset="-120"/>
+              </a:rPr>
+              <a:t>01  Teaser Summary</a:t>
+            </a:r>
+            <a:endParaRPr lang="en-US" sz="1800" dirty="0"/>
+          </a:p>
+        </p:txBody>
+      </p:sp>
+      <p:sp>
+        <p:nvSpPr>
+          <p:cNvPr id="23" name="Text 21"/>
+          <p:cNvSpPr txBox="1"/>
+          <p:nvPr/>
+        </p:nvSpPr>
+        <p:spPr>
+          <a:xfrm>
+            <a:off x="1042416" y="2194560"/>
+            <a:ext cx="4645152" cy="384048"/>
+          </a:xfrm>
+          <a:prstGeom prst="rect">
+            <a:avLst/>
+          </a:prstGeom>
+          <a:noFill/>
+          <a:ln/>
+        </p:spPr>
+        <p:txBody>
+          <a:bodyPr wrap="square" lIns="0" tIns="25400" rIns="25400" bIns="0" rtlCol="0" anchor="ctr"/>
+          <a:lstStyle/>
+          <a:p>
+            <a:pPr algn="ctr" indent="0" marL="0">
+              <a:lnSpc>
+                <a:spcPct val="120000"/>
+              </a:lnSpc>
+              <a:buNone/>
+            </a:pPr>
+            <a:r>
+              <a:rPr lang="en-US" sz="1800" dirty="0">
+                <a:solidFill>
+                  <a:srgbClr val="111827"/>
+                </a:solidFill>
+                <a:latin typeface="Pretendard" pitchFamily="34" charset="0"/>
+                <a:ea typeface="Pretendard" pitchFamily="34" charset="-122"/>
+                <a:cs typeface="Pretendard" pitchFamily="34" charset="-120"/>
+              </a:rPr>
+              <a:t>02  Composition Contract</a:t>
+            </a:r>
+            <a:endParaRPr lang="en-US" sz="1800" dirty="0"/>
+          </a:p>
+        </p:txBody>
+      </p:sp>
+      <p:sp>
+        <p:nvSpPr>
+          <p:cNvPr id="24" name="Text 22"/>
+          <p:cNvSpPr txBox="1"/>
+          <p:nvPr/>
+        </p:nvSpPr>
+        <p:spPr>
+          <a:xfrm>
+            <a:off x="1042416" y="2907792"/>
+            <a:ext cx="4645152" cy="384048"/>
+          </a:xfrm>
+          <a:prstGeom prst="rect">
+            <a:avLst/>
+          </a:prstGeom>
+          <a:noFill/>
+          <a:ln/>
+        </p:spPr>
+        <p:txBody>
+          <a:bodyPr wrap="square" lIns="0" tIns="25400" rIns="25400" bIns="0" rtlCol="0" anchor="ctr"/>
+          <a:lstStyle/>
+          <a:p>
+            <a:pPr algn="ctr" indent="0" marL="0">
+              <a:lnSpc>
+                <a:spcPct val="120000"/>
+              </a:lnSpc>
+              <a:buNone/>
+            </a:pPr>
+            <a:r>
+              <a:rPr lang="en-US" sz="1800" dirty="0">
+                <a:solidFill>
+                  <a:srgbClr val="111827"/>
+                </a:solidFill>
+                <a:latin typeface="Pretendard" pitchFamily="34" charset="0"/>
+                <a:ea typeface="Pretendard" pitchFamily="34" charset="-122"/>
+                <a:cs typeface="Pretendard" pitchFamily="34" charset="-120"/>
+              </a:rPr>
+              <a:t>03  Pruned Style Families</a:t>
+            </a:r>
+            <a:endParaRPr lang="en-US" sz="1800" dirty="0"/>
+          </a:p>
+        </p:txBody>
+      </p:sp>
+      <p:sp>
+        <p:nvSpPr>
+          <p:cNvPr id="25" name="Text 23"/>
+          <p:cNvSpPr txBox="1"/>
+          <p:nvPr/>
+        </p:nvSpPr>
+        <p:spPr>
+          <a:xfrm>
+            <a:off x="1042416" y="3621024"/>
+            <a:ext cx="4645152" cy="384048"/>
+          </a:xfrm>
+          <a:prstGeom prst="rect">
+            <a:avLst/>
+          </a:prstGeom>
+          <a:noFill/>
+          <a:ln/>
+        </p:spPr>
+        <p:txBody>
+          <a:bodyPr wrap="square" lIns="0" tIns="25400" rIns="25400" bIns="0" rtlCol="0" anchor="ctr"/>
+          <a:lstStyle/>
+          <a:p>
+            <a:pPr algn="ctr" indent="0" marL="0">
+              <a:lnSpc>
+                <a:spcPct val="120000"/>
+              </a:lnSpc>
+              <a:buNone/>
+            </a:pPr>
+            <a:r>
+              <a:rPr lang="en-US" sz="1800" dirty="0">
+                <a:solidFill>
+                  <a:srgbClr val="111827"/>
+                </a:solidFill>
+                <a:latin typeface="Pretendard" pitchFamily="34" charset="0"/>
+                <a:ea typeface="Pretendard" pitchFamily="34" charset="-122"/>
+                <a:cs typeface="Pretendard" pitchFamily="34" charset="-120"/>
+              </a:rPr>
+              <a:t>04  Semantic Blocks</a:t>
+            </a:r>
+            <a:endParaRPr lang="en-US" sz="1800" dirty="0"/>
+          </a:p>
+        </p:txBody>
+      </p:sp>
+      <p:sp>
+        <p:nvSpPr>
+          <p:cNvPr id="26" name="Text 24"/>
+          <p:cNvSpPr txBox="1"/>
+          <p:nvPr/>
+        </p:nvSpPr>
+        <p:spPr>
+          <a:xfrm>
+            <a:off x="1042416" y="4334256"/>
+            <a:ext cx="4645152" cy="384048"/>
+          </a:xfrm>
+          <a:prstGeom prst="rect">
+            <a:avLst/>
+          </a:prstGeom>
+          <a:noFill/>
+          <a:ln/>
+        </p:spPr>
+        <p:txBody>
+          <a:bodyPr wrap="square" lIns="0" tIns="25400" rIns="25400" bIns="0" rtlCol="0" anchor="ctr"/>
+          <a:lstStyle/>
+          <a:p>
+            <a:pPr algn="ctr" indent="0" marL="0">
+              <a:lnSpc>
+                <a:spcPct val="120000"/>
+              </a:lnSpc>
+              <a:buNone/>
+            </a:pPr>
+            <a:r>
+              <a:rPr lang="en-US" sz="1800" dirty="0">
+                <a:solidFill>
+                  <a:srgbClr val="111827"/>
+                </a:solidFill>
+                <a:latin typeface="Pretendard" pitchFamily="34" charset="0"/>
+                <a:ea typeface="Pretendard" pitchFamily="34" charset="-122"/>
+                <a:cs typeface="Pretendard" pitchFamily="34" charset="-120"/>
+              </a:rPr>
+              <a:t>05  Pipeline Diagram</a:t>
+            </a:r>
+            <a:endParaRPr lang="en-US" sz="1800" dirty="0"/>
+          </a:p>
+        </p:txBody>
+      </p:sp>
+      <p:sp>
+        <p:nvSpPr>
+          <p:cNvPr id="27" name="Text 25"/>
+          <p:cNvSpPr txBox="1"/>
+          <p:nvPr/>
+        </p:nvSpPr>
+        <p:spPr>
+          <a:xfrm>
+            <a:off x="1042416" y="5047488"/>
+            <a:ext cx="4645152" cy="384048"/>
+          </a:xfrm>
+          <a:prstGeom prst="rect">
+            <a:avLst/>
+          </a:prstGeom>
+          <a:noFill/>
+          <a:ln/>
+        </p:spPr>
+        <p:txBody>
+          <a:bodyPr wrap="square" lIns="0" tIns="25400" rIns="25400" bIns="0" rtlCol="0" anchor="ctr"/>
+          <a:lstStyle/>
+          <a:p>
+            <a:pPr algn="ctr" indent="0" marL="0">
+              <a:lnSpc>
+                <a:spcPct val="120000"/>
+              </a:lnSpc>
+              <a:buNone/>
+            </a:pPr>
+            <a:r>
+              <a:rPr lang="en-US" sz="1800" dirty="0">
+                <a:solidFill>
+                  <a:srgbClr val="111827"/>
+                </a:solidFill>
+                <a:latin typeface="Pretendard" pitchFamily="34" charset="0"/>
+                <a:ea typeface="Pretendard" pitchFamily="34" charset="-122"/>
+                <a:cs typeface="Pretendard" pitchFamily="34" charset="-120"/>
+              </a:rPr>
+              <a:t>06  Decoration Pattern Catalog</a:t>
+            </a:r>
+            <a:endParaRPr lang="en-US" sz="1800" dirty="0"/>
+          </a:p>
+        </p:txBody>
+      </p:sp>
+      <p:sp>
+        <p:nvSpPr>
+          <p:cNvPr id="28" name="Text 26"/>
+          <p:cNvSpPr txBox="1"/>
+          <p:nvPr/>
+        </p:nvSpPr>
+        <p:spPr>
+          <a:xfrm>
+            <a:off x="1042416" y="5760720"/>
+            <a:ext cx="4645152" cy="384048"/>
+          </a:xfrm>
+          <a:prstGeom prst="rect">
+            <a:avLst/>
+          </a:prstGeom>
+          <a:noFill/>
+          <a:ln/>
+        </p:spPr>
+        <p:txBody>
+          <a:bodyPr wrap="square" lIns="0" tIns="25400" rIns="25400" bIns="0" rtlCol="0" anchor="ctr"/>
+          <a:lstStyle/>
+          <a:p>
+            <a:pPr algn="ctr" indent="0" marL="0">
+              <a:lnSpc>
+                <a:spcPct val="120000"/>
+              </a:lnSpc>
+              <a:buNone/>
+            </a:pPr>
+            <a:r>
+              <a:rPr lang="en-US" sz="1800" dirty="0">
+                <a:solidFill>
+                  <a:srgbClr val="111827"/>
+                </a:solidFill>
+                <a:latin typeface="Pretendard" pitchFamily="34" charset="0"/>
+                <a:ea typeface="Pretendard" pitchFamily="34" charset="-122"/>
+                <a:cs typeface="Pretendard" pitchFamily="34" charset="-120"/>
+              </a:rPr>
+              <a:t>07  Table Coherence</a:t>
+            </a:r>
+            <a:endParaRPr lang="en-US" sz="1800" dirty="0"/>
+          </a:p>
+        </p:txBody>
+      </p:sp>
+      <p:sp>
+        <p:nvSpPr>
+          <p:cNvPr id="29" name="Text 27"/>
+          <p:cNvSpPr txBox="1"/>
+          <p:nvPr/>
+        </p:nvSpPr>
+        <p:spPr>
+          <a:xfrm>
+            <a:off x="6492240" y="1481328"/>
+            <a:ext cx="4645152" cy="384048"/>
+          </a:xfrm>
+          <a:prstGeom prst="rect">
+            <a:avLst/>
+          </a:prstGeom>
+          <a:noFill/>
+          <a:ln/>
+        </p:spPr>
+        <p:txBody>
+          <a:bodyPr wrap="square" lIns="0" tIns="25400" rIns="25400" bIns="0" rtlCol="0" anchor="ctr"/>
+          <a:lstStyle/>
+          <a:p>
+            <a:pPr algn="ctr" indent="0" marL="0">
+              <a:lnSpc>
+                <a:spcPct val="120000"/>
+              </a:lnSpc>
+              <a:buNone/>
+            </a:pPr>
+            <a:r>
+              <a:rPr lang="en-US" sz="1800" dirty="0">
+                <a:solidFill>
+                  <a:srgbClr val="111827"/>
+                </a:solidFill>
+                <a:latin typeface="Pretendard" pitchFamily="34" charset="0"/>
+                <a:ea typeface="Pretendard" pitchFamily="34" charset="-122"/>
+                <a:cs typeface="Pretendard" pitchFamily="34" charset="-120"/>
+              </a:rPr>
+              <a:t>08  Chart and Table Pair</a:t>
+            </a:r>
+            <a:endParaRPr lang="en-US" sz="1800" dirty="0"/>
+          </a:p>
+        </p:txBody>
+      </p:sp>
+      <p:sp>
+        <p:nvSpPr>
+          <p:cNvPr id="30" name="Text 28"/>
+          <p:cNvSpPr txBox="1"/>
+          <p:nvPr/>
+        </p:nvSpPr>
+        <p:spPr>
+          <a:xfrm>
+            <a:off x="6492240" y="2194560"/>
+            <a:ext cx="4645152" cy="384048"/>
+          </a:xfrm>
+          <a:prstGeom prst="rect">
+            <a:avLst/>
+          </a:prstGeom>
+          <a:noFill/>
+          <a:ln/>
+        </p:spPr>
+        <p:txBody>
+          <a:bodyPr wrap="square" lIns="0" tIns="25400" rIns="25400" bIns="0" rtlCol="0" anchor="ctr"/>
+          <a:lstStyle/>
+          <a:p>
+            <a:pPr algn="ctr" indent="0" marL="0">
+              <a:lnSpc>
+                <a:spcPct val="120000"/>
+              </a:lnSpc>
+              <a:buNone/>
+            </a:pPr>
+            <a:r>
+              <a:rPr lang="en-US" sz="1800" dirty="0">
+                <a:solidFill>
+                  <a:srgbClr val="111827"/>
+                </a:solidFill>
+                <a:latin typeface="Pretendard" pitchFamily="34" charset="0"/>
+                <a:ea typeface="Pretendard" pitchFamily="34" charset="-122"/>
+                <a:cs typeface="Pretendard" pitchFamily="34" charset="-120"/>
+              </a:rPr>
+              <a:t>09  Editable Proof Objects</a:t>
+            </a:r>
+            <a:endParaRPr lang="en-US" sz="1800" dirty="0"/>
+          </a:p>
+        </p:txBody>
+      </p:sp>
+      <p:sp>
+        <p:nvSpPr>
+          <p:cNvPr id="31" name="Text 29"/>
+          <p:cNvSpPr txBox="1"/>
+          <p:nvPr/>
+        </p:nvSpPr>
+        <p:spPr>
+          <a:xfrm>
+            <a:off x="6492240" y="2907792"/>
+            <a:ext cx="4645152" cy="384048"/>
+          </a:xfrm>
+          <a:prstGeom prst="rect">
+            <a:avLst/>
+          </a:prstGeom>
+          <a:noFill/>
+          <a:ln/>
+        </p:spPr>
+        <p:txBody>
+          <a:bodyPr wrap="square" lIns="0" tIns="25400" rIns="25400" bIns="0" rtlCol="0" anchor="ctr"/>
+          <a:lstStyle/>
+          <a:p>
+            <a:pPr algn="ctr" indent="0" marL="0">
+              <a:lnSpc>
+                <a:spcPct val="120000"/>
+              </a:lnSpc>
+              <a:buNone/>
+            </a:pPr>
+            <a:r>
+              <a:rPr lang="en-US" sz="1800" dirty="0">
+                <a:solidFill>
+                  <a:srgbClr val="111827"/>
+                </a:solidFill>
+                <a:latin typeface="Pretendard" pitchFamily="34" charset="0"/>
+                <a:ea typeface="Pretendard" pitchFamily="34" charset="-122"/>
+                <a:cs typeface="Pretendard" pitchFamily="34" charset="-120"/>
+              </a:rPr>
+              <a:t>10  Object Shape Grammar</a:t>
+            </a:r>
+            <a:endParaRPr lang="en-US" sz="1800" dirty="0"/>
+          </a:p>
+        </p:txBody>
+      </p:sp>
+      <p:sp>
+        <p:nvSpPr>
+          <p:cNvPr id="32" name="Text 30"/>
+          <p:cNvSpPr txBox="1"/>
+          <p:nvPr/>
+        </p:nvSpPr>
+        <p:spPr>
+          <a:xfrm>
+            <a:off x="6492240" y="3621024"/>
+            <a:ext cx="4645152" cy="384048"/>
+          </a:xfrm>
+          <a:prstGeom prst="rect">
+            <a:avLst/>
+          </a:prstGeom>
+          <a:noFill/>
+          <a:ln/>
+        </p:spPr>
+        <p:txBody>
+          <a:bodyPr wrap="square" lIns="0" tIns="25400" rIns="25400" bIns="0" rtlCol="0" anchor="ctr"/>
+          <a:lstStyle/>
+          <a:p>
+            <a:pPr algn="ctr" indent="0" marL="0">
+              <a:lnSpc>
+                <a:spcPct val="120000"/>
+              </a:lnSpc>
+              <a:buNone/>
+            </a:pPr>
+            <a:r>
+              <a:rPr lang="en-US" sz="1800" dirty="0">
+                <a:solidFill>
+                  <a:srgbClr val="111827"/>
+                </a:solidFill>
+                <a:latin typeface="Pretendard" pitchFamily="34" charset="0"/>
+                <a:ea typeface="Pretendard" pitchFamily="34" charset="-122"/>
+                <a:cs typeface="Pretendard" pitchFamily="34" charset="-120"/>
+              </a:rPr>
+              <a:t>11  Icon and Text Aside</a:t>
+            </a:r>
+            <a:endParaRPr lang="en-US" sz="1800" dirty="0"/>
+          </a:p>
+        </p:txBody>
+      </p:sp>
+      <p:sp>
+        <p:nvSpPr>
+          <p:cNvPr id="33" name="Text 31"/>
+          <p:cNvSpPr txBox="1"/>
+          <p:nvPr/>
+        </p:nvSpPr>
+        <p:spPr>
+          <a:xfrm>
+            <a:off x="6492240" y="4334256"/>
+            <a:ext cx="4645152" cy="384048"/>
+          </a:xfrm>
+          <a:prstGeom prst="rect">
+            <a:avLst/>
+          </a:prstGeom>
+          <a:noFill/>
+          <a:ln/>
+        </p:spPr>
+        <p:txBody>
+          <a:bodyPr wrap="square" lIns="0" tIns="25400" rIns="25400" bIns="0" rtlCol="0" anchor="ctr"/>
+          <a:lstStyle/>
+          <a:p>
+            <a:pPr algn="ctr" indent="0" marL="0">
+              <a:lnSpc>
+                <a:spcPct val="120000"/>
+              </a:lnSpc>
+              <a:buNone/>
+            </a:pPr>
+            <a:r>
+              <a:rPr lang="en-US" sz="1800" dirty="0">
+                <a:solidFill>
+                  <a:srgbClr val="111827"/>
+                </a:solidFill>
+                <a:latin typeface="Pretendard" pitchFamily="34" charset="0"/>
+                <a:ea typeface="Pretendard" pitchFamily="34" charset="-122"/>
+                <a:cs typeface="Pretendard" pitchFamily="34" charset="-120"/>
+              </a:rPr>
+              <a:t>12  Overflow Guard</a:t>
+            </a:r>
+            <a:endParaRPr lang="en-US" sz="1800" dirty="0"/>
+          </a:p>
+        </p:txBody>
+      </p:sp>
+      <p:sp>
+        <p:nvSpPr>
+          <p:cNvPr id="34" name="Text 32"/>
+          <p:cNvSpPr txBox="1"/>
+          <p:nvPr/>
+        </p:nvSpPr>
+        <p:spPr>
+          <a:xfrm>
+            <a:off x="6492240" y="5047488"/>
+            <a:ext cx="4645152" cy="384048"/>
+          </a:xfrm>
+          <a:prstGeom prst="rect">
+            <a:avLst/>
+          </a:prstGeom>
+          <a:noFill/>
+          <a:ln/>
+        </p:spPr>
+        <p:txBody>
+          <a:bodyPr wrap="square" lIns="0" tIns="25400" rIns="25400" bIns="0" rtlCol="0" anchor="ctr"/>
+          <a:lstStyle/>
+          <a:p>
+            <a:pPr algn="ctr" indent="0" marL="0">
+              <a:lnSpc>
+                <a:spcPct val="120000"/>
+              </a:lnSpc>
+              <a:buNone/>
+            </a:pPr>
+            <a:r>
+              <a:rPr lang="en-US" sz="1800" dirty="0">
+                <a:solidFill>
+                  <a:srgbClr val="111827"/>
+                </a:solidFill>
+                <a:latin typeface="Pretendard" pitchFamily="34" charset="0"/>
+                <a:ea typeface="Pretendard" pitchFamily="34" charset="-122"/>
+                <a:cs typeface="Pretendard" pitchFamily="34" charset="-120"/>
+              </a:rPr>
+              <a:t>13  Image Safe Frame</a:t>
+            </a:r>
+            <a:endParaRPr lang="en-US" sz="1800" dirty="0"/>
+          </a:p>
+        </p:txBody>
+      </p:sp>
+      <p:sp>
+        <p:nvSpPr>
+          <p:cNvPr id="35" name="Text 33"/>
+          <p:cNvSpPr txBox="1"/>
+          <p:nvPr/>
+        </p:nvSpPr>
+        <p:spPr>
+          <a:xfrm>
+            <a:off x="6492240" y="5760720"/>
+            <a:ext cx="4645152" cy="384048"/>
+          </a:xfrm>
+          <a:prstGeom prst="rect">
+            <a:avLst/>
+          </a:prstGeom>
+          <a:noFill/>
+          <a:ln/>
+        </p:spPr>
+        <p:txBody>
+          <a:bodyPr wrap="square" lIns="0" tIns="25400" rIns="25400" bIns="0" rtlCol="0" anchor="ctr"/>
+          <a:lstStyle/>
+          <a:p>
+            <a:pPr algn="ctr" indent="0" marL="0">
+              <a:lnSpc>
+                <a:spcPct val="120000"/>
+              </a:lnSpc>
+              <a:buNone/>
+            </a:pPr>
+            <a:r>
+              <a:rPr lang="en-US" sz="1800" dirty="0">
+                <a:solidFill>
+                  <a:srgbClr val="111827"/>
+                </a:solidFill>
+                <a:latin typeface="Pretendard" pitchFamily="34" charset="0"/>
+                <a:ea typeface="Pretendard" pitchFamily="34" charset="-122"/>
+                <a:cs typeface="Pretendard" pitchFamily="34" charset="-120"/>
+              </a:rPr>
+              <a:t>14  Mixed Object Packing</a:t>
+            </a:r>
+            <a:endParaRPr lang="en-US" sz="1800" dirty="0"/>
+          </a:p>
+        </p:txBody>
+      </p:sp>
+    </p:spTree>
+  </p:cSld>
+  <p:clrMapOvr>
+    <a:masterClrMapping/>
+  </p:clrMapOvr>
+</p:sld>
+</file>
+
+<file path=ppt/slides/slide20.xml><?xml version="1.0" encoding="utf-8"?>
+<p:sld xmlns:a="http://schemas.openxmlformats.org/drawingml/2006/main" xmlns:r="http://schemas.openxmlformats.org/officeDocument/2006/relationships" xmlns:p="http://schemas.openxmlformats.org/presentationml/2006/main">
+  <p:cSld name="Slide 20">
     <p:bg>
       <p:bgPr>
         <a:solidFill>
@@ -10310,1182 +12736,9 @@
 </p:sld>
 </file>
 
-<file path=ppt/slides/slide2.xml><?xml version="1.0" encoding="utf-8"?>
+<file path=ppt/slides/slide21.xml><?xml version="1.0" encoding="utf-8"?>
 <p:sld xmlns:a="http://schemas.openxmlformats.org/drawingml/2006/main" xmlns:r="http://schemas.openxmlformats.org/officeDocument/2006/relationships" xmlns:p="http://schemas.openxmlformats.org/presentationml/2006/main">
-  <p:cSld name="Slide 2">
-    <p:bg>
-      <p:bgPr>
-        <a:solidFill>
-          <a:srgbClr val="FFFFFF"/>
-        </a:solidFill>
-      </p:bgPr>
-    </p:bg>
-    <p:spTree>
-      <p:nvGrpSpPr>
-        <p:cNvPr id="1" name=""/>
-        <p:cNvGrpSpPr/>
-        <p:nvPr/>
-      </p:nvGrpSpPr>
-      <p:grpSpPr>
-        <a:xfrm>
-          <a:off x="0" y="0"/>
-          <a:ext cx="0" cy="0"/>
-          <a:chOff x="0" y="0"/>
-          <a:chExt cx="0" cy="0"/>
-        </a:xfrm>
-      </p:grpSpPr>
-      <p:sp>
-        <p:nvSpPr>
-          <p:cNvPr id="2" name="Shape 0"/>
-          <p:cNvSpPr/>
-          <p:nvPr/>
-        </p:nvSpPr>
-        <p:spPr>
-          <a:xfrm>
-            <a:off x="749808" y="713232"/>
-            <a:ext cx="2194505" cy="0"/>
-          </a:xfrm>
-          <a:prstGeom prst="line">
-            <a:avLst/>
-          </a:prstGeom>
-          <a:noFill/>
-          <a:ln w="12700">
-            <a:solidFill>
-              <a:srgbClr val="111827">
-                <a:alpha val="82000"/>
-              </a:srgbClr>
-            </a:solidFill>
-            <a:prstDash val="solid"/>
-          </a:ln>
-        </p:spPr>
-      </p:sp>
-      <p:sp>
-        <p:nvSpPr>
-          <p:cNvPr id="3" name="Shape 1"/>
-          <p:cNvSpPr/>
-          <p:nvPr/>
-        </p:nvSpPr>
-        <p:spPr>
-          <a:xfrm>
-            <a:off x="9338767" y="6199632"/>
-            <a:ext cx="2103120" cy="0"/>
-          </a:xfrm>
-          <a:prstGeom prst="line">
-            <a:avLst/>
-          </a:prstGeom>
-          <a:noFill/>
-          <a:ln w="12700">
-            <a:solidFill>
-              <a:srgbClr val="E5E7EB">
-                <a:alpha val="82000"/>
-              </a:srgbClr>
-            </a:solidFill>
-            <a:prstDash val="solid"/>
-          </a:ln>
-        </p:spPr>
-      </p:sp>
-      <p:sp>
-        <p:nvSpPr>
-          <p:cNvPr id="4" name="Shape 2"/>
-          <p:cNvSpPr/>
-          <p:nvPr/>
-        </p:nvSpPr>
-        <p:spPr>
-          <a:xfrm>
-            <a:off x="822960" y="1188720"/>
-            <a:ext cx="10515600" cy="45720"/>
-          </a:xfrm>
-          <a:prstGeom prst="rect">
-            <a:avLst/>
-          </a:prstGeom>
-          <a:solidFill>
-            <a:srgbClr val="111827"/>
-          </a:solidFill>
-          <a:ln w="12700">
-            <a:solidFill>
-              <a:srgbClr val="111827">
-                <a:alpha val="0"/>
-              </a:srgbClr>
-            </a:solidFill>
-            <a:prstDash val="solid"/>
-          </a:ln>
-        </p:spPr>
-      </p:sp>
-      <p:sp>
-        <p:nvSpPr>
-          <p:cNvPr id="5" name="Shape 3"/>
-          <p:cNvSpPr/>
-          <p:nvPr/>
-        </p:nvSpPr>
-        <p:spPr>
-          <a:xfrm>
-            <a:off x="822960" y="6382512"/>
-            <a:ext cx="2011680" cy="45720"/>
-          </a:xfrm>
-          <a:prstGeom prst="rect">
-            <a:avLst/>
-          </a:prstGeom>
-          <a:solidFill>
-            <a:srgbClr val="E5E7EB"/>
-          </a:solidFill>
-          <a:ln w="12700">
-            <a:solidFill>
-              <a:srgbClr val="E5E7EB">
-                <a:alpha val="0"/>
-              </a:srgbClr>
-            </a:solidFill>
-            <a:prstDash val="solid"/>
-          </a:ln>
-        </p:spPr>
-      </p:sp>
-      <p:sp>
-        <p:nvSpPr>
-          <p:cNvPr id="6" name="Shape 4"/>
-          <p:cNvSpPr/>
-          <p:nvPr/>
-        </p:nvSpPr>
-        <p:spPr>
-          <a:xfrm>
-            <a:off x="6080760" y="1389888"/>
-            <a:ext cx="22860" cy="4846320"/>
-          </a:xfrm>
-          <a:prstGeom prst="rect">
-            <a:avLst/>
-          </a:prstGeom>
-          <a:solidFill>
-            <a:srgbClr val="E5E7EB">
-              <a:alpha val="90000"/>
-            </a:srgbClr>
-          </a:solidFill>
-          <a:ln w="12700">
-            <a:solidFill>
-              <a:srgbClr val="E5E7EB">
-                <a:alpha val="0"/>
-              </a:srgbClr>
-            </a:solidFill>
-            <a:prstDash val="solid"/>
-          </a:ln>
-        </p:spPr>
-      </p:sp>
-      <p:sp>
-        <p:nvSpPr>
-          <p:cNvPr id="7" name="Shape 5"/>
-          <p:cNvSpPr/>
-          <p:nvPr/>
-        </p:nvSpPr>
-        <p:spPr>
-          <a:xfrm>
-            <a:off x="822960" y="1389888"/>
-            <a:ext cx="73152" cy="566928"/>
-          </a:xfrm>
-          <a:prstGeom prst="rect">
-            <a:avLst/>
-          </a:prstGeom>
-          <a:solidFill>
-            <a:srgbClr val="111827"/>
-          </a:solidFill>
-          <a:ln w="12700">
-            <a:solidFill>
-              <a:srgbClr val="111827">
-                <a:alpha val="0"/>
-              </a:srgbClr>
-            </a:solidFill>
-            <a:prstDash val="solid"/>
-          </a:ln>
-        </p:spPr>
-      </p:sp>
-      <p:sp>
-        <p:nvSpPr>
-          <p:cNvPr id="8" name="Shape 6"/>
-          <p:cNvSpPr/>
-          <p:nvPr/>
-        </p:nvSpPr>
-        <p:spPr>
-          <a:xfrm>
-            <a:off x="822960" y="2103120"/>
-            <a:ext cx="73152" cy="566928"/>
-          </a:xfrm>
-          <a:prstGeom prst="rect">
-            <a:avLst/>
-          </a:prstGeom>
-          <a:solidFill>
-            <a:srgbClr val="E5E7EB"/>
-          </a:solidFill>
-          <a:ln w="12700">
-            <a:solidFill>
-              <a:srgbClr val="E5E7EB">
-                <a:alpha val="0"/>
-              </a:srgbClr>
-            </a:solidFill>
-            <a:prstDash val="solid"/>
-          </a:ln>
-        </p:spPr>
-      </p:sp>
-      <p:sp>
-        <p:nvSpPr>
-          <p:cNvPr id="9" name="Shape 7"/>
-          <p:cNvSpPr/>
-          <p:nvPr/>
-        </p:nvSpPr>
-        <p:spPr>
-          <a:xfrm>
-            <a:off x="822960" y="2816352"/>
-            <a:ext cx="73152" cy="566928"/>
-          </a:xfrm>
-          <a:prstGeom prst="rect">
-            <a:avLst/>
-          </a:prstGeom>
-          <a:solidFill>
-            <a:srgbClr val="111827"/>
-          </a:solidFill>
-          <a:ln w="12700">
-            <a:solidFill>
-              <a:srgbClr val="111827">
-                <a:alpha val="0"/>
-              </a:srgbClr>
-            </a:solidFill>
-            <a:prstDash val="solid"/>
-          </a:ln>
-        </p:spPr>
-      </p:sp>
-      <p:sp>
-        <p:nvSpPr>
-          <p:cNvPr id="10" name="Shape 8"/>
-          <p:cNvSpPr/>
-          <p:nvPr/>
-        </p:nvSpPr>
-        <p:spPr>
-          <a:xfrm>
-            <a:off x="822960" y="3529584"/>
-            <a:ext cx="73152" cy="566928"/>
-          </a:xfrm>
-          <a:prstGeom prst="rect">
-            <a:avLst/>
-          </a:prstGeom>
-          <a:solidFill>
-            <a:srgbClr val="E5E7EB"/>
-          </a:solidFill>
-          <a:ln w="12700">
-            <a:solidFill>
-              <a:srgbClr val="E5E7EB">
-                <a:alpha val="0"/>
-              </a:srgbClr>
-            </a:solidFill>
-            <a:prstDash val="solid"/>
-          </a:ln>
-        </p:spPr>
-      </p:sp>
-      <p:sp>
-        <p:nvSpPr>
-          <p:cNvPr id="11" name="Shape 9"/>
-          <p:cNvSpPr/>
-          <p:nvPr/>
-        </p:nvSpPr>
-        <p:spPr>
-          <a:xfrm>
-            <a:off x="822960" y="4242816"/>
-            <a:ext cx="73152" cy="566928"/>
-          </a:xfrm>
-          <a:prstGeom prst="rect">
-            <a:avLst/>
-          </a:prstGeom>
-          <a:solidFill>
-            <a:srgbClr val="111827"/>
-          </a:solidFill>
-          <a:ln w="12700">
-            <a:solidFill>
-              <a:srgbClr val="111827">
-                <a:alpha val="0"/>
-              </a:srgbClr>
-            </a:solidFill>
-            <a:prstDash val="solid"/>
-          </a:ln>
-        </p:spPr>
-      </p:sp>
-      <p:sp>
-        <p:nvSpPr>
-          <p:cNvPr id="12" name="Shape 10"/>
-          <p:cNvSpPr/>
-          <p:nvPr/>
-        </p:nvSpPr>
-        <p:spPr>
-          <a:xfrm>
-            <a:off x="822960" y="4956048"/>
-            <a:ext cx="73152" cy="566928"/>
-          </a:xfrm>
-          <a:prstGeom prst="rect">
-            <a:avLst/>
-          </a:prstGeom>
-          <a:solidFill>
-            <a:srgbClr val="E5E7EB"/>
-          </a:solidFill>
-          <a:ln w="12700">
-            <a:solidFill>
-              <a:srgbClr val="E5E7EB">
-                <a:alpha val="0"/>
-              </a:srgbClr>
-            </a:solidFill>
-            <a:prstDash val="solid"/>
-          </a:ln>
-        </p:spPr>
-      </p:sp>
-      <p:sp>
-        <p:nvSpPr>
-          <p:cNvPr id="13" name="Shape 11"/>
-          <p:cNvSpPr/>
-          <p:nvPr/>
-        </p:nvSpPr>
-        <p:spPr>
-          <a:xfrm>
-            <a:off x="822960" y="5669280"/>
-            <a:ext cx="73152" cy="566928"/>
-          </a:xfrm>
-          <a:prstGeom prst="rect">
-            <a:avLst/>
-          </a:prstGeom>
-          <a:solidFill>
-            <a:srgbClr val="111827"/>
-          </a:solidFill>
-          <a:ln w="12700">
-            <a:solidFill>
-              <a:srgbClr val="111827">
-                <a:alpha val="0"/>
-              </a:srgbClr>
-            </a:solidFill>
-            <a:prstDash val="solid"/>
-          </a:ln>
-        </p:spPr>
-      </p:sp>
-      <p:sp>
-        <p:nvSpPr>
-          <p:cNvPr id="14" name="Shape 12"/>
-          <p:cNvSpPr/>
-          <p:nvPr/>
-        </p:nvSpPr>
-        <p:spPr>
-          <a:xfrm>
-            <a:off x="6272784" y="1389888"/>
-            <a:ext cx="73152" cy="566928"/>
-          </a:xfrm>
-          <a:prstGeom prst="rect">
-            <a:avLst/>
-          </a:prstGeom>
-          <a:solidFill>
-            <a:srgbClr val="E5E7EB"/>
-          </a:solidFill>
-          <a:ln w="12700">
-            <a:solidFill>
-              <a:srgbClr val="E5E7EB">
-                <a:alpha val="0"/>
-              </a:srgbClr>
-            </a:solidFill>
-            <a:prstDash val="solid"/>
-          </a:ln>
-        </p:spPr>
-      </p:sp>
-      <p:sp>
-        <p:nvSpPr>
-          <p:cNvPr id="15" name="Shape 13"/>
-          <p:cNvSpPr/>
-          <p:nvPr/>
-        </p:nvSpPr>
-        <p:spPr>
-          <a:xfrm>
-            <a:off x="6272784" y="2103120"/>
-            <a:ext cx="73152" cy="566928"/>
-          </a:xfrm>
-          <a:prstGeom prst="rect">
-            <a:avLst/>
-          </a:prstGeom>
-          <a:solidFill>
-            <a:srgbClr val="111827"/>
-          </a:solidFill>
-          <a:ln w="12700">
-            <a:solidFill>
-              <a:srgbClr val="111827">
-                <a:alpha val="0"/>
-              </a:srgbClr>
-            </a:solidFill>
-            <a:prstDash val="solid"/>
-          </a:ln>
-        </p:spPr>
-      </p:sp>
-      <p:sp>
-        <p:nvSpPr>
-          <p:cNvPr id="16" name="Shape 14"/>
-          <p:cNvSpPr/>
-          <p:nvPr/>
-        </p:nvSpPr>
-        <p:spPr>
-          <a:xfrm>
-            <a:off x="6272784" y="2816352"/>
-            <a:ext cx="73152" cy="566928"/>
-          </a:xfrm>
-          <a:prstGeom prst="rect">
-            <a:avLst/>
-          </a:prstGeom>
-          <a:solidFill>
-            <a:srgbClr val="E5E7EB"/>
-          </a:solidFill>
-          <a:ln w="12700">
-            <a:solidFill>
-              <a:srgbClr val="E5E7EB">
-                <a:alpha val="0"/>
-              </a:srgbClr>
-            </a:solidFill>
-            <a:prstDash val="solid"/>
-          </a:ln>
-        </p:spPr>
-      </p:sp>
-      <p:sp>
-        <p:nvSpPr>
-          <p:cNvPr id="17" name="Shape 15"/>
-          <p:cNvSpPr/>
-          <p:nvPr/>
-        </p:nvSpPr>
-        <p:spPr>
-          <a:xfrm>
-            <a:off x="6272784" y="3529584"/>
-            <a:ext cx="73152" cy="566928"/>
-          </a:xfrm>
-          <a:prstGeom prst="rect">
-            <a:avLst/>
-          </a:prstGeom>
-          <a:solidFill>
-            <a:srgbClr val="111827"/>
-          </a:solidFill>
-          <a:ln w="12700">
-            <a:solidFill>
-              <a:srgbClr val="111827">
-                <a:alpha val="0"/>
-              </a:srgbClr>
-            </a:solidFill>
-            <a:prstDash val="solid"/>
-          </a:ln>
-        </p:spPr>
-      </p:sp>
-      <p:sp>
-        <p:nvSpPr>
-          <p:cNvPr id="18" name="Shape 16"/>
-          <p:cNvSpPr/>
-          <p:nvPr/>
-        </p:nvSpPr>
-        <p:spPr>
-          <a:xfrm>
-            <a:off x="6272784" y="4242816"/>
-            <a:ext cx="73152" cy="566928"/>
-          </a:xfrm>
-          <a:prstGeom prst="rect">
-            <a:avLst/>
-          </a:prstGeom>
-          <a:solidFill>
-            <a:srgbClr val="E5E7EB"/>
-          </a:solidFill>
-          <a:ln w="12700">
-            <a:solidFill>
-              <a:srgbClr val="E5E7EB">
-                <a:alpha val="0"/>
-              </a:srgbClr>
-            </a:solidFill>
-            <a:prstDash val="solid"/>
-          </a:ln>
-        </p:spPr>
-      </p:sp>
-      <p:sp>
-        <p:nvSpPr>
-          <p:cNvPr id="19" name="Shape 17"/>
-          <p:cNvSpPr/>
-          <p:nvPr/>
-        </p:nvSpPr>
-        <p:spPr>
-          <a:xfrm>
-            <a:off x="6272784" y="4956048"/>
-            <a:ext cx="73152" cy="566928"/>
-          </a:xfrm>
-          <a:prstGeom prst="rect">
-            <a:avLst/>
-          </a:prstGeom>
-          <a:solidFill>
-            <a:srgbClr val="111827"/>
-          </a:solidFill>
-          <a:ln w="12700">
-            <a:solidFill>
-              <a:srgbClr val="111827">
-                <a:alpha val="0"/>
-              </a:srgbClr>
-            </a:solidFill>
-            <a:prstDash val="solid"/>
-          </a:ln>
-        </p:spPr>
-      </p:sp>
-      <p:sp>
-        <p:nvSpPr>
-          <p:cNvPr id="20" name="Shape 18"/>
-          <p:cNvSpPr/>
-          <p:nvPr/>
-        </p:nvSpPr>
-        <p:spPr>
-          <a:xfrm>
-            <a:off x="6272784" y="5669280"/>
-            <a:ext cx="73152" cy="566928"/>
-          </a:xfrm>
-          <a:prstGeom prst="rect">
-            <a:avLst/>
-          </a:prstGeom>
-          <a:solidFill>
-            <a:srgbClr val="E5E7EB"/>
-          </a:solidFill>
-          <a:ln w="12700">
-            <a:solidFill>
-              <a:srgbClr val="E5E7EB">
-                <a:alpha val="0"/>
-              </a:srgbClr>
-            </a:solidFill>
-            <a:prstDash val="solid"/>
-          </a:ln>
-        </p:spPr>
-      </p:sp>
-      <p:sp>
-        <p:nvSpPr>
-          <p:cNvPr id="21" name="Text 19"/>
-          <p:cNvSpPr txBox="1"/>
-          <p:nvPr/>
-        </p:nvSpPr>
-        <p:spPr>
-          <a:xfrm>
-            <a:off x="731520" y="384048"/>
-            <a:ext cx="10698480" cy="822960"/>
-          </a:xfrm>
-          <a:prstGeom prst="rect">
-            <a:avLst/>
-          </a:prstGeom>
-          <a:noFill/>
-          <a:ln/>
-        </p:spPr>
-        <p:txBody>
-          <a:bodyPr wrap="square" lIns="0" tIns="0" rIns="0" bIns="0" rtlCol="0" anchor="ctr"/>
-          <a:lstStyle/>
-          <a:p>
-            <a:pPr algn="ctr" indent="0" marL="0">
-              <a:lnSpc>
-                <a:spcPct val="120000"/>
-              </a:lnSpc>
-              <a:buNone/>
-            </a:pPr>
-            <a:r>
-              <a:rPr lang="en-US" sz="3800" b="1" dirty="0">
-                <a:solidFill>
-                  <a:srgbClr val="111827"/>
-                </a:solidFill>
-                <a:latin typeface="Pretendard" pitchFamily="34" charset="0"/>
-                <a:ea typeface="Pretendard" pitchFamily="34" charset="-122"/>
-                <a:cs typeface="Pretendard" pitchFamily="34" charset="-120"/>
-              </a:rPr>
-              <a:t>Agenda</a:t>
-            </a:r>
-            <a:endParaRPr lang="en-US" sz="3800" dirty="0"/>
-          </a:p>
-        </p:txBody>
-      </p:sp>
-      <p:sp>
-        <p:nvSpPr>
-          <p:cNvPr id="22" name="Text 20"/>
-          <p:cNvSpPr txBox="1"/>
-          <p:nvPr/>
-        </p:nvSpPr>
-        <p:spPr>
-          <a:xfrm>
-            <a:off x="1042416" y="1481328"/>
-            <a:ext cx="4645152" cy="384048"/>
-          </a:xfrm>
-          <a:prstGeom prst="rect">
-            <a:avLst/>
-          </a:prstGeom>
-          <a:noFill/>
-          <a:ln/>
-        </p:spPr>
-        <p:txBody>
-          <a:bodyPr wrap="square" lIns="0" tIns="25400" rIns="25400" bIns="0" rtlCol="0" anchor="ctr"/>
-          <a:lstStyle/>
-          <a:p>
-            <a:pPr algn="ctr" indent="0" marL="0">
-              <a:lnSpc>
-                <a:spcPct val="120000"/>
-              </a:lnSpc>
-              <a:buNone/>
-            </a:pPr>
-            <a:r>
-              <a:rPr lang="en-US" sz="1800" dirty="0">
-                <a:solidFill>
-                  <a:srgbClr val="111827"/>
-                </a:solidFill>
-                <a:latin typeface="Pretendard" pitchFamily="34" charset="0"/>
-                <a:ea typeface="Pretendard" pitchFamily="34" charset="-122"/>
-                <a:cs typeface="Pretendard" pitchFamily="34" charset="-120"/>
-              </a:rPr>
-              <a:t>01  Teaser Summary</a:t>
-            </a:r>
-            <a:endParaRPr lang="en-US" sz="1800" dirty="0"/>
-          </a:p>
-        </p:txBody>
-      </p:sp>
-      <p:sp>
-        <p:nvSpPr>
-          <p:cNvPr id="23" name="Text 21"/>
-          <p:cNvSpPr txBox="1"/>
-          <p:nvPr/>
-        </p:nvSpPr>
-        <p:spPr>
-          <a:xfrm>
-            <a:off x="1042416" y="2194560"/>
-            <a:ext cx="4645152" cy="384048"/>
-          </a:xfrm>
-          <a:prstGeom prst="rect">
-            <a:avLst/>
-          </a:prstGeom>
-          <a:noFill/>
-          <a:ln/>
-        </p:spPr>
-        <p:txBody>
-          <a:bodyPr wrap="square" lIns="0" tIns="25400" rIns="25400" bIns="0" rtlCol="0" anchor="ctr"/>
-          <a:lstStyle/>
-          <a:p>
-            <a:pPr algn="ctr" indent="0" marL="0">
-              <a:lnSpc>
-                <a:spcPct val="120000"/>
-              </a:lnSpc>
-              <a:buNone/>
-            </a:pPr>
-            <a:r>
-              <a:rPr lang="en-US" sz="1800" dirty="0">
-                <a:solidFill>
-                  <a:srgbClr val="111827"/>
-                </a:solidFill>
-                <a:latin typeface="Pretendard" pitchFamily="34" charset="0"/>
-                <a:ea typeface="Pretendard" pitchFamily="34" charset="-122"/>
-                <a:cs typeface="Pretendard" pitchFamily="34" charset="-120"/>
-              </a:rPr>
-              <a:t>02  Composition Contract</a:t>
-            </a:r>
-            <a:endParaRPr lang="en-US" sz="1800" dirty="0"/>
-          </a:p>
-        </p:txBody>
-      </p:sp>
-      <p:sp>
-        <p:nvSpPr>
-          <p:cNvPr id="24" name="Text 22"/>
-          <p:cNvSpPr txBox="1"/>
-          <p:nvPr/>
-        </p:nvSpPr>
-        <p:spPr>
-          <a:xfrm>
-            <a:off x="1042416" y="2907792"/>
-            <a:ext cx="4645152" cy="384048"/>
-          </a:xfrm>
-          <a:prstGeom prst="rect">
-            <a:avLst/>
-          </a:prstGeom>
-          <a:noFill/>
-          <a:ln/>
-        </p:spPr>
-        <p:txBody>
-          <a:bodyPr wrap="square" lIns="0" tIns="25400" rIns="25400" bIns="0" rtlCol="0" anchor="ctr"/>
-          <a:lstStyle/>
-          <a:p>
-            <a:pPr algn="ctr" indent="0" marL="0">
-              <a:lnSpc>
-                <a:spcPct val="120000"/>
-              </a:lnSpc>
-              <a:buNone/>
-            </a:pPr>
-            <a:r>
-              <a:rPr lang="en-US" sz="1800" dirty="0">
-                <a:solidFill>
-                  <a:srgbClr val="111827"/>
-                </a:solidFill>
-                <a:latin typeface="Pretendard" pitchFamily="34" charset="0"/>
-                <a:ea typeface="Pretendard" pitchFamily="34" charset="-122"/>
-                <a:cs typeface="Pretendard" pitchFamily="34" charset="-120"/>
-              </a:rPr>
-              <a:t>03  Pruned Style Families</a:t>
-            </a:r>
-            <a:endParaRPr lang="en-US" sz="1800" dirty="0"/>
-          </a:p>
-        </p:txBody>
-      </p:sp>
-      <p:sp>
-        <p:nvSpPr>
-          <p:cNvPr id="25" name="Text 23"/>
-          <p:cNvSpPr txBox="1"/>
-          <p:nvPr/>
-        </p:nvSpPr>
-        <p:spPr>
-          <a:xfrm>
-            <a:off x="1042416" y="3621024"/>
-            <a:ext cx="4645152" cy="384048"/>
-          </a:xfrm>
-          <a:prstGeom prst="rect">
-            <a:avLst/>
-          </a:prstGeom>
-          <a:noFill/>
-          <a:ln/>
-        </p:spPr>
-        <p:txBody>
-          <a:bodyPr wrap="square" lIns="0" tIns="25400" rIns="25400" bIns="0" rtlCol="0" anchor="ctr"/>
-          <a:lstStyle/>
-          <a:p>
-            <a:pPr algn="ctr" indent="0" marL="0">
-              <a:lnSpc>
-                <a:spcPct val="120000"/>
-              </a:lnSpc>
-              <a:buNone/>
-            </a:pPr>
-            <a:r>
-              <a:rPr lang="en-US" sz="1800" dirty="0">
-                <a:solidFill>
-                  <a:srgbClr val="111827"/>
-                </a:solidFill>
-                <a:latin typeface="Pretendard" pitchFamily="34" charset="0"/>
-                <a:ea typeface="Pretendard" pitchFamily="34" charset="-122"/>
-                <a:cs typeface="Pretendard" pitchFamily="34" charset="-120"/>
-              </a:rPr>
-              <a:t>04  Semantic Blocks</a:t>
-            </a:r>
-            <a:endParaRPr lang="en-US" sz="1800" dirty="0"/>
-          </a:p>
-        </p:txBody>
-      </p:sp>
-      <p:sp>
-        <p:nvSpPr>
-          <p:cNvPr id="26" name="Text 24"/>
-          <p:cNvSpPr txBox="1"/>
-          <p:nvPr/>
-        </p:nvSpPr>
-        <p:spPr>
-          <a:xfrm>
-            <a:off x="1042416" y="4334256"/>
-            <a:ext cx="4645152" cy="384048"/>
-          </a:xfrm>
-          <a:prstGeom prst="rect">
-            <a:avLst/>
-          </a:prstGeom>
-          <a:noFill/>
-          <a:ln/>
-        </p:spPr>
-        <p:txBody>
-          <a:bodyPr wrap="square" lIns="0" tIns="25400" rIns="25400" bIns="0" rtlCol="0" anchor="ctr"/>
-          <a:lstStyle/>
-          <a:p>
-            <a:pPr algn="ctr" indent="0" marL="0">
-              <a:lnSpc>
-                <a:spcPct val="120000"/>
-              </a:lnSpc>
-              <a:buNone/>
-            </a:pPr>
-            <a:r>
-              <a:rPr lang="en-US" sz="1800" dirty="0">
-                <a:solidFill>
-                  <a:srgbClr val="111827"/>
-                </a:solidFill>
-                <a:latin typeface="Pretendard" pitchFamily="34" charset="0"/>
-                <a:ea typeface="Pretendard" pitchFamily="34" charset="-122"/>
-                <a:cs typeface="Pretendard" pitchFamily="34" charset="-120"/>
-              </a:rPr>
-              <a:t>05  Pipeline Diagram</a:t>
-            </a:r>
-            <a:endParaRPr lang="en-US" sz="1800" dirty="0"/>
-          </a:p>
-        </p:txBody>
-      </p:sp>
-      <p:sp>
-        <p:nvSpPr>
-          <p:cNvPr id="27" name="Text 25"/>
-          <p:cNvSpPr txBox="1"/>
-          <p:nvPr/>
-        </p:nvSpPr>
-        <p:spPr>
-          <a:xfrm>
-            <a:off x="1042416" y="5047488"/>
-            <a:ext cx="4645152" cy="384048"/>
-          </a:xfrm>
-          <a:prstGeom prst="rect">
-            <a:avLst/>
-          </a:prstGeom>
-          <a:noFill/>
-          <a:ln/>
-        </p:spPr>
-        <p:txBody>
-          <a:bodyPr wrap="square" lIns="0" tIns="25400" rIns="25400" bIns="0" rtlCol="0" anchor="ctr"/>
-          <a:lstStyle/>
-          <a:p>
-            <a:pPr algn="ctr" indent="0" marL="0">
-              <a:lnSpc>
-                <a:spcPct val="120000"/>
-              </a:lnSpc>
-              <a:buNone/>
-            </a:pPr>
-            <a:r>
-              <a:rPr lang="en-US" sz="1800" dirty="0">
-                <a:solidFill>
-                  <a:srgbClr val="111827"/>
-                </a:solidFill>
-                <a:latin typeface="Pretendard" pitchFamily="34" charset="0"/>
-                <a:ea typeface="Pretendard" pitchFamily="34" charset="-122"/>
-                <a:cs typeface="Pretendard" pitchFamily="34" charset="-120"/>
-              </a:rPr>
-              <a:t>06  Decoration Pattern Catalog</a:t>
-            </a:r>
-            <a:endParaRPr lang="en-US" sz="1800" dirty="0"/>
-          </a:p>
-        </p:txBody>
-      </p:sp>
-      <p:sp>
-        <p:nvSpPr>
-          <p:cNvPr id="28" name="Text 26"/>
-          <p:cNvSpPr txBox="1"/>
-          <p:nvPr/>
-        </p:nvSpPr>
-        <p:spPr>
-          <a:xfrm>
-            <a:off x="1042416" y="5760720"/>
-            <a:ext cx="4645152" cy="384048"/>
-          </a:xfrm>
-          <a:prstGeom prst="rect">
-            <a:avLst/>
-          </a:prstGeom>
-          <a:noFill/>
-          <a:ln/>
-        </p:spPr>
-        <p:txBody>
-          <a:bodyPr wrap="square" lIns="0" tIns="25400" rIns="25400" bIns="0" rtlCol="0" anchor="ctr"/>
-          <a:lstStyle/>
-          <a:p>
-            <a:pPr algn="ctr" indent="0" marL="0">
-              <a:lnSpc>
-                <a:spcPct val="120000"/>
-              </a:lnSpc>
-              <a:buNone/>
-            </a:pPr>
-            <a:r>
-              <a:rPr lang="en-US" sz="1800" dirty="0">
-                <a:solidFill>
-                  <a:srgbClr val="111827"/>
-                </a:solidFill>
-                <a:latin typeface="Pretendard" pitchFamily="34" charset="0"/>
-                <a:ea typeface="Pretendard" pitchFamily="34" charset="-122"/>
-                <a:cs typeface="Pretendard" pitchFamily="34" charset="-120"/>
-              </a:rPr>
-              <a:t>07  Table Coherence</a:t>
-            </a:r>
-            <a:endParaRPr lang="en-US" sz="1800" dirty="0"/>
-          </a:p>
-        </p:txBody>
-      </p:sp>
-      <p:sp>
-        <p:nvSpPr>
-          <p:cNvPr id="29" name="Text 27"/>
-          <p:cNvSpPr txBox="1"/>
-          <p:nvPr/>
-        </p:nvSpPr>
-        <p:spPr>
-          <a:xfrm>
-            <a:off x="6492240" y="1481328"/>
-            <a:ext cx="4645152" cy="384048"/>
-          </a:xfrm>
-          <a:prstGeom prst="rect">
-            <a:avLst/>
-          </a:prstGeom>
-          <a:noFill/>
-          <a:ln/>
-        </p:spPr>
-        <p:txBody>
-          <a:bodyPr wrap="square" lIns="0" tIns="25400" rIns="25400" bIns="0" rtlCol="0" anchor="ctr"/>
-          <a:lstStyle/>
-          <a:p>
-            <a:pPr algn="ctr" indent="0" marL="0">
-              <a:lnSpc>
-                <a:spcPct val="120000"/>
-              </a:lnSpc>
-              <a:buNone/>
-            </a:pPr>
-            <a:r>
-              <a:rPr lang="en-US" sz="1800" dirty="0">
-                <a:solidFill>
-                  <a:srgbClr val="111827"/>
-                </a:solidFill>
-                <a:latin typeface="Pretendard" pitchFamily="34" charset="0"/>
-                <a:ea typeface="Pretendard" pitchFamily="34" charset="-122"/>
-                <a:cs typeface="Pretendard" pitchFamily="34" charset="-120"/>
-              </a:rPr>
-              <a:t>08  Chart and Table Pair</a:t>
-            </a:r>
-            <a:endParaRPr lang="en-US" sz="1800" dirty="0"/>
-          </a:p>
-        </p:txBody>
-      </p:sp>
-      <p:sp>
-        <p:nvSpPr>
-          <p:cNvPr id="30" name="Text 28"/>
-          <p:cNvSpPr txBox="1"/>
-          <p:nvPr/>
-        </p:nvSpPr>
-        <p:spPr>
-          <a:xfrm>
-            <a:off x="6492240" y="2194560"/>
-            <a:ext cx="4645152" cy="384048"/>
-          </a:xfrm>
-          <a:prstGeom prst="rect">
-            <a:avLst/>
-          </a:prstGeom>
-          <a:noFill/>
-          <a:ln/>
-        </p:spPr>
-        <p:txBody>
-          <a:bodyPr wrap="square" lIns="0" tIns="25400" rIns="25400" bIns="0" rtlCol="0" anchor="ctr"/>
-          <a:lstStyle/>
-          <a:p>
-            <a:pPr algn="ctr" indent="0" marL="0">
-              <a:lnSpc>
-                <a:spcPct val="120000"/>
-              </a:lnSpc>
-              <a:buNone/>
-            </a:pPr>
-            <a:r>
-              <a:rPr lang="en-US" sz="1800" dirty="0">
-                <a:solidFill>
-                  <a:srgbClr val="111827"/>
-                </a:solidFill>
-                <a:latin typeface="Pretendard" pitchFamily="34" charset="0"/>
-                <a:ea typeface="Pretendard" pitchFamily="34" charset="-122"/>
-                <a:cs typeface="Pretendard" pitchFamily="34" charset="-120"/>
-              </a:rPr>
-              <a:t>09  Editable Proof Objects</a:t>
-            </a:r>
-            <a:endParaRPr lang="en-US" sz="1800" dirty="0"/>
-          </a:p>
-        </p:txBody>
-      </p:sp>
-      <p:sp>
-        <p:nvSpPr>
-          <p:cNvPr id="31" name="Text 29"/>
-          <p:cNvSpPr txBox="1"/>
-          <p:nvPr/>
-        </p:nvSpPr>
-        <p:spPr>
-          <a:xfrm>
-            <a:off x="6492240" y="2907792"/>
-            <a:ext cx="4645152" cy="384048"/>
-          </a:xfrm>
-          <a:prstGeom prst="rect">
-            <a:avLst/>
-          </a:prstGeom>
-          <a:noFill/>
-          <a:ln/>
-        </p:spPr>
-        <p:txBody>
-          <a:bodyPr wrap="square" lIns="0" tIns="25400" rIns="25400" bIns="0" rtlCol="0" anchor="ctr"/>
-          <a:lstStyle/>
-          <a:p>
-            <a:pPr algn="ctr" indent="0" marL="0">
-              <a:lnSpc>
-                <a:spcPct val="120000"/>
-              </a:lnSpc>
-              <a:buNone/>
-            </a:pPr>
-            <a:r>
-              <a:rPr lang="en-US" sz="1800" dirty="0">
-                <a:solidFill>
-                  <a:srgbClr val="111827"/>
-                </a:solidFill>
-                <a:latin typeface="Pretendard" pitchFamily="34" charset="0"/>
-                <a:ea typeface="Pretendard" pitchFamily="34" charset="-122"/>
-                <a:cs typeface="Pretendard" pitchFamily="34" charset="-120"/>
-              </a:rPr>
-              <a:t>10  Object Shape Grammar</a:t>
-            </a:r>
-            <a:endParaRPr lang="en-US" sz="1800" dirty="0"/>
-          </a:p>
-        </p:txBody>
-      </p:sp>
-      <p:sp>
-        <p:nvSpPr>
-          <p:cNvPr id="32" name="Text 30"/>
-          <p:cNvSpPr txBox="1"/>
-          <p:nvPr/>
-        </p:nvSpPr>
-        <p:spPr>
-          <a:xfrm>
-            <a:off x="6492240" y="3621024"/>
-            <a:ext cx="4645152" cy="384048"/>
-          </a:xfrm>
-          <a:prstGeom prst="rect">
-            <a:avLst/>
-          </a:prstGeom>
-          <a:noFill/>
-          <a:ln/>
-        </p:spPr>
-        <p:txBody>
-          <a:bodyPr wrap="square" lIns="0" tIns="25400" rIns="25400" bIns="0" rtlCol="0" anchor="ctr"/>
-          <a:lstStyle/>
-          <a:p>
-            <a:pPr algn="ctr" indent="0" marL="0">
-              <a:lnSpc>
-                <a:spcPct val="120000"/>
-              </a:lnSpc>
-              <a:buNone/>
-            </a:pPr>
-            <a:r>
-              <a:rPr lang="en-US" sz="1800" dirty="0">
-                <a:solidFill>
-                  <a:srgbClr val="111827"/>
-                </a:solidFill>
-                <a:latin typeface="Pretendard" pitchFamily="34" charset="0"/>
-                <a:ea typeface="Pretendard" pitchFamily="34" charset="-122"/>
-                <a:cs typeface="Pretendard" pitchFamily="34" charset="-120"/>
-              </a:rPr>
-              <a:t>11  Icon and Text Aside</a:t>
-            </a:r>
-            <a:endParaRPr lang="en-US" sz="1800" dirty="0"/>
-          </a:p>
-        </p:txBody>
-      </p:sp>
-      <p:sp>
-        <p:nvSpPr>
-          <p:cNvPr id="33" name="Text 31"/>
-          <p:cNvSpPr txBox="1"/>
-          <p:nvPr/>
-        </p:nvSpPr>
-        <p:spPr>
-          <a:xfrm>
-            <a:off x="6492240" y="4334256"/>
-            <a:ext cx="4645152" cy="384048"/>
-          </a:xfrm>
-          <a:prstGeom prst="rect">
-            <a:avLst/>
-          </a:prstGeom>
-          <a:noFill/>
-          <a:ln/>
-        </p:spPr>
-        <p:txBody>
-          <a:bodyPr wrap="square" lIns="0" tIns="25400" rIns="25400" bIns="0" rtlCol="0" anchor="ctr"/>
-          <a:lstStyle/>
-          <a:p>
-            <a:pPr algn="ctr" indent="0" marL="0">
-              <a:lnSpc>
-                <a:spcPct val="120000"/>
-              </a:lnSpc>
-              <a:buNone/>
-            </a:pPr>
-            <a:r>
-              <a:rPr lang="en-US" sz="1800" dirty="0">
-                <a:solidFill>
-                  <a:srgbClr val="111827"/>
-                </a:solidFill>
-                <a:latin typeface="Pretendard" pitchFamily="34" charset="0"/>
-                <a:ea typeface="Pretendard" pitchFamily="34" charset="-122"/>
-                <a:cs typeface="Pretendard" pitchFamily="34" charset="-120"/>
-              </a:rPr>
-              <a:t>12  Overflow Guard</a:t>
-            </a:r>
-            <a:endParaRPr lang="en-US" sz="1800" dirty="0"/>
-          </a:p>
-        </p:txBody>
-      </p:sp>
-      <p:sp>
-        <p:nvSpPr>
-          <p:cNvPr id="34" name="Text 32"/>
-          <p:cNvSpPr txBox="1"/>
-          <p:nvPr/>
-        </p:nvSpPr>
-        <p:spPr>
-          <a:xfrm>
-            <a:off x="6492240" y="5047488"/>
-            <a:ext cx="4645152" cy="384048"/>
-          </a:xfrm>
-          <a:prstGeom prst="rect">
-            <a:avLst/>
-          </a:prstGeom>
-          <a:noFill/>
-          <a:ln/>
-        </p:spPr>
-        <p:txBody>
-          <a:bodyPr wrap="square" lIns="0" tIns="25400" rIns="25400" bIns="0" rtlCol="0" anchor="ctr"/>
-          <a:lstStyle/>
-          <a:p>
-            <a:pPr algn="ctr" indent="0" marL="0">
-              <a:lnSpc>
-                <a:spcPct val="120000"/>
-              </a:lnSpc>
-              <a:buNone/>
-            </a:pPr>
-            <a:r>
-              <a:rPr lang="en-US" sz="1800" dirty="0">
-                <a:solidFill>
-                  <a:srgbClr val="111827"/>
-                </a:solidFill>
-                <a:latin typeface="Pretendard" pitchFamily="34" charset="0"/>
-                <a:ea typeface="Pretendard" pitchFamily="34" charset="-122"/>
-                <a:cs typeface="Pretendard" pitchFamily="34" charset="-120"/>
-              </a:rPr>
-              <a:t>13  Image Safe Frame</a:t>
-            </a:r>
-            <a:endParaRPr lang="en-US" sz="1800" dirty="0"/>
-          </a:p>
-        </p:txBody>
-      </p:sp>
-      <p:sp>
-        <p:nvSpPr>
-          <p:cNvPr id="35" name="Text 33"/>
-          <p:cNvSpPr txBox="1"/>
-          <p:nvPr/>
-        </p:nvSpPr>
-        <p:spPr>
-          <a:xfrm>
-            <a:off x="6492240" y="5760720"/>
-            <a:ext cx="4645152" cy="384048"/>
-          </a:xfrm>
-          <a:prstGeom prst="rect">
-            <a:avLst/>
-          </a:prstGeom>
-          <a:noFill/>
-          <a:ln/>
-        </p:spPr>
-        <p:txBody>
-          <a:bodyPr wrap="square" lIns="0" tIns="25400" rIns="25400" bIns="0" rtlCol="0" anchor="ctr"/>
-          <a:lstStyle/>
-          <a:p>
-            <a:pPr algn="ctr" indent="0" marL="0">
-              <a:lnSpc>
-                <a:spcPct val="120000"/>
-              </a:lnSpc>
-              <a:buNone/>
-            </a:pPr>
-            <a:r>
-              <a:rPr lang="en-US" sz="1800" dirty="0">
-                <a:solidFill>
-                  <a:srgbClr val="111827"/>
-                </a:solidFill>
-                <a:latin typeface="Pretendard" pitchFamily="34" charset="0"/>
-                <a:ea typeface="Pretendard" pitchFamily="34" charset="-122"/>
-                <a:cs typeface="Pretendard" pitchFamily="34" charset="-120"/>
-              </a:rPr>
-              <a:t>14  Mixed Object Packing</a:t>
-            </a:r>
-            <a:endParaRPr lang="en-US" sz="1800" dirty="0"/>
-          </a:p>
-        </p:txBody>
-      </p:sp>
-    </p:spTree>
-  </p:cSld>
-  <p:clrMapOvr>
-    <a:masterClrMapping/>
-  </p:clrMapOvr>
-</p:sld>
-</file>
-
-<file path=ppt/slides/slide20.xml><?xml version="1.0" encoding="utf-8"?>
-<p:sld xmlns:a="http://schemas.openxmlformats.org/drawingml/2006/main" xmlns:r="http://schemas.openxmlformats.org/officeDocument/2006/relationships" xmlns:p="http://schemas.openxmlformats.org/presentationml/2006/main">
-  <p:cSld name="Slide 20">
+  <p:cSld name="Slide 21">
     <p:bg>
       <p:bgPr>
         <a:solidFill>
@@ -12299,9 +13552,9 @@
 </p:sld>
 </file>
 
-<file path=ppt/slides/slide21.xml><?xml version="1.0" encoding="utf-8"?>
+<file path=ppt/slides/slide22.xml><?xml version="1.0" encoding="utf-8"?>
 <p:sld xmlns:a="http://schemas.openxmlformats.org/drawingml/2006/main" xmlns:r="http://schemas.openxmlformats.org/officeDocument/2006/relationships" xmlns:p="http://schemas.openxmlformats.org/presentationml/2006/main">
-  <p:cSld name="Slide 21">
+  <p:cSld name="Slide 22">
     <p:bg>
       <p:bgPr>
         <a:solidFill>
@@ -13115,9 +14368,9 @@
 </p:sld>
 </file>
 
-<file path=ppt/slides/slide22.xml><?xml version="1.0" encoding="utf-8"?>
+<file path=ppt/slides/slide23.xml><?xml version="1.0" encoding="utf-8"?>
 <p:sld xmlns:a="http://schemas.openxmlformats.org/drawingml/2006/main" xmlns:r="http://schemas.openxmlformats.org/officeDocument/2006/relationships" xmlns:p="http://schemas.openxmlformats.org/presentationml/2006/main">
-  <p:cSld name="Slide 22">
+  <p:cSld name="Slide 23">
     <p:bg>
       <p:bgPr>
         <a:solidFill>
@@ -13465,9 +14718,9 @@
 </p:sld>
 </file>
 
-<file path=ppt/slides/slide23.xml><?xml version="1.0" encoding="utf-8"?>
+<file path=ppt/slides/slide24.xml><?xml version="1.0" encoding="utf-8"?>
 <p:sld xmlns:a="http://schemas.openxmlformats.org/drawingml/2006/main" xmlns:r="http://schemas.openxmlformats.org/officeDocument/2006/relationships" xmlns:p="http://schemas.openxmlformats.org/presentationml/2006/main">
-  <p:cSld name="Slide 23">
+  <p:cSld name="Slide 24">
     <p:bg>
       <p:bgPr>
         <a:solidFill>
@@ -13716,7 +14969,7 @@
       </p:graphicFrame>
       <p:graphicFrame>
         <p:nvGraphicFramePr>
-          <p:cNvPr id="24" name="Table 0"/>
+          <p:cNvPr id="25" name="Table 0"/>
           <p:cNvGraphicFramePr>
             <a:graphicFrameLocks noGrp="1"/>
           </p:cNvGraphicFramePr>
@@ -14293,9 +15546,9 @@
 </p:sld>
 </file>
 
-<file path=ppt/slides/slide24.xml><?xml version="1.0" encoding="utf-8"?>
+<file path=ppt/slides/slide25.xml><?xml version="1.0" encoding="utf-8"?>
 <p:sld xmlns:a="http://schemas.openxmlformats.org/drawingml/2006/main" xmlns:r="http://schemas.openxmlformats.org/officeDocument/2006/relationships" xmlns:p="http://schemas.openxmlformats.org/presentationml/2006/main">
-  <p:cSld name="Slide 24">
+  <p:cSld name="Slide 25">
     <p:bg>
       <p:bgPr>
         <a:solidFill>
@@ -15509,7 +16762,7 @@
                 <a:ea typeface="Pretendard" pitchFamily="34" charset="-122"/>
                 <a:cs typeface="Pretendard" pitchFamily="34" charset="-120"/>
               </a:rPr>
-              <a:t>  8 pruned decoration grammars, not palette-only swaps.</a:t>
+              <a:t>  5 pruned decoration grammars, not palette-only swaps.</a:t>
             </a:r>
             <a:endParaRPr lang="en-US" sz="2200" dirty="0"/>
           </a:p>
@@ -17072,7 +18325,7 @@
       </p:sp>
       <p:pic>
         <p:nvPicPr>
-          <p:cNvPr id="16" name="Image 4" descr="chart icon from tabler-icons (MIT)">    </p:cNvPr>
+          <p:cNvPr id="16" name="Image 4" descr="article icon from tabler-icons (MIT)">    </p:cNvPr>
           <p:cNvPicPr>
             <a:picLocks noChangeAspect="1"/>
           </p:cNvPicPr>
@@ -17109,122 +18362,6 @@
         <p:spPr>
           <a:xfrm>
             <a:off x="1699321" y="3313176"/>
-            <a:ext cx="9255191" cy="780288"/>
-          </a:xfrm>
-          <a:prstGeom prst="rect">
-            <a:avLst/>
-          </a:prstGeom>
-          <a:noFill/>
-          <a:ln/>
-        </p:spPr>
-        <p:txBody>
-          <a:bodyPr wrap="square" lIns="0" tIns="25400" rIns="25400" bIns="0" rtlCol="0" anchor="ctr"/>
-          <a:lstStyle/>
-          <a:p>
-            <a:pPr algn="l" indent="0" marL="0">
-              <a:lnSpc>
-                <a:spcPct val="120000"/>
-              </a:lnSpc>
-              <a:buNone/>
-            </a:pPr>
-            <a:r>
-              <a:rPr lang="en-US" sz="2200" b="1" dirty="0">
-                <a:solidFill>
-                  <a:srgbClr val="111827"/>
-                </a:solidFill>
-                <a:latin typeface="Pretendard" pitchFamily="34" charset="0"/>
-                <a:ea typeface="Pretendard" pitchFamily="34" charset="-122"/>
-                <a:cs typeface="Pretendard" pitchFamily="34" charset="-120"/>
-              </a:rPr>
-              <a:t>Editorial / magazine</a:t>
-            </a:r>
-            <a:pPr algn="l" indent="0" marL="0">
-              <a:lnSpc>
-                <a:spcPct val="120000"/>
-              </a:lnSpc>
-              <a:buNone/>
-            </a:pPr>
-            <a:r>
-              <a:rPr lang="en-US" sz="2200" dirty="0">
-                <a:solidFill>
-                  <a:srgbClr val="111827"/>
-                </a:solidFill>
-                <a:latin typeface="Pretendard" pitchFamily="34" charset="0"/>
-                <a:ea typeface="Pretendard" pitchFamily="34" charset="-122"/>
-                <a:cs typeface="Pretendard" pitchFamily="34" charset="-120"/>
-              </a:rPr>
-              <a:t>  asymmetric rhythm and publication-like accents.</a:t>
-            </a:r>
-            <a:endParaRPr lang="en-US" sz="2200" dirty="0"/>
-          </a:p>
-        </p:txBody>
-      </p:sp>
-      <p:sp>
-        <p:nvSpPr>
-          <p:cNvPr id="18" name="Shape 11"/>
-          <p:cNvSpPr/>
-          <p:nvPr/>
-        </p:nvSpPr>
-        <p:spPr>
-          <a:xfrm>
-            <a:off x="1097280" y="4783044"/>
-            <a:ext cx="474025" cy="474025"/>
-          </a:xfrm>
-          <a:prstGeom prst="roundRect">
-            <a:avLst>
-              <a:gd name="adj" fmla="val 7716"/>
-            </a:avLst>
-          </a:prstGeom>
-          <a:solidFill>
-            <a:srgbClr val="FFFFFF"/>
-          </a:solidFill>
-          <a:ln w="12700">
-            <a:solidFill>
-              <a:srgbClr val="E5E7EB"/>
-            </a:solidFill>
-            <a:prstDash val="solid"/>
-          </a:ln>
-        </p:spPr>
-      </p:sp>
-      <p:pic>
-        <p:nvPicPr>
-          <p:cNvPr id="19" name="Image 5" descr="article icon from tabler-icons (MIT)">    </p:cNvPr>
-          <p:cNvPicPr>
-            <a:picLocks noChangeAspect="1"/>
-          </p:cNvPicPr>
-          <p:nvPr/>
-        </p:nvPicPr>
-        <p:blipFill>
-          <a:blip r:embed="rId11">
-            <a:extLst>
-              <a:ext uri="{96DAC541-7B7A-43D3-8B79-37D633B846F1}">
-                <asvg:svgBlip xmlns:asvg="http://schemas.microsoft.com/office/drawing/2016/SVG/main" r:embed="rId12"/>
-              </a:ext>
-            </a:extLst>
-          </a:blip>
-          <a:stretch>
-            <a:fillRect/>
-          </a:stretch>
-        </p:blipFill>
-        <p:spPr>
-          <a:xfrm>
-            <a:off x="1170432" y="4856196"/>
-            <a:ext cx="327721" cy="327721"/>
-          </a:xfrm>
-          <a:prstGeom prst="rect">
-            <a:avLst/>
-          </a:prstGeom>
-        </p:spPr>
-      </p:pic>
-      <p:sp>
-        <p:nvSpPr>
-          <p:cNvPr id="20" name="Text 12"/>
-          <p:cNvSpPr txBox="1"/>
-          <p:nvPr/>
-        </p:nvSpPr>
-        <p:spPr>
-          <a:xfrm>
-            <a:off x="1699321" y="4629912"/>
             <a:ext cx="9255191" cy="780288"/>
           </a:xfrm>
           <a:prstGeom prst="rect">
@@ -17275,6 +18412,122 @@
           </a:p>
         </p:txBody>
       </p:sp>
+      <p:sp>
+        <p:nvSpPr>
+          <p:cNvPr id="18" name="Shape 11"/>
+          <p:cNvSpPr/>
+          <p:nvPr/>
+        </p:nvSpPr>
+        <p:spPr>
+          <a:xfrm>
+            <a:off x="1097280" y="4783044"/>
+            <a:ext cx="474025" cy="474025"/>
+          </a:xfrm>
+          <a:prstGeom prst="roundRect">
+            <a:avLst>
+              <a:gd name="adj" fmla="val 7716"/>
+            </a:avLst>
+          </a:prstGeom>
+          <a:solidFill>
+            <a:srgbClr val="FFFFFF"/>
+          </a:solidFill>
+          <a:ln w="12700">
+            <a:solidFill>
+              <a:srgbClr val="E5E7EB"/>
+            </a:solidFill>
+            <a:prstDash val="solid"/>
+          </a:ln>
+        </p:spPr>
+      </p:sp>
+      <p:pic>
+        <p:nvPicPr>
+          <p:cNvPr id="19" name="Image 5" descr="chart icon from tabler-icons (MIT)">    </p:cNvPr>
+          <p:cNvPicPr>
+            <a:picLocks noChangeAspect="1"/>
+          </p:cNvPicPr>
+          <p:nvPr/>
+        </p:nvPicPr>
+        <p:blipFill>
+          <a:blip r:embed="rId11">
+            <a:extLst>
+              <a:ext uri="{96DAC541-7B7A-43D3-8B79-37D633B846F1}">
+                <asvg:svgBlip xmlns:asvg="http://schemas.microsoft.com/office/drawing/2016/SVG/main" r:embed="rId12"/>
+              </a:ext>
+            </a:extLst>
+          </a:blip>
+          <a:stretch>
+            <a:fillRect/>
+          </a:stretch>
+        </p:blipFill>
+        <p:spPr>
+          <a:xfrm>
+            <a:off x="1170432" y="4856196"/>
+            <a:ext cx="327721" cy="327721"/>
+          </a:xfrm>
+          <a:prstGeom prst="rect">
+            <a:avLst/>
+          </a:prstGeom>
+        </p:spPr>
+      </p:pic>
+      <p:sp>
+        <p:nvSpPr>
+          <p:cNvPr id="20" name="Text 12"/>
+          <p:cNvSpPr txBox="1"/>
+          <p:nvPr/>
+        </p:nvSpPr>
+        <p:spPr>
+          <a:xfrm>
+            <a:off x="1699321" y="4629912"/>
+            <a:ext cx="9255191" cy="780288"/>
+          </a:xfrm>
+          <a:prstGeom prst="rect">
+            <a:avLst/>
+          </a:prstGeom>
+          <a:noFill/>
+          <a:ln/>
+        </p:spPr>
+        <p:txBody>
+          <a:bodyPr wrap="square" lIns="0" tIns="25400" rIns="25400" bIns="0" rtlCol="0" anchor="ctr"/>
+          <a:lstStyle/>
+          <a:p>
+            <a:pPr algn="l" indent="0" marL="0">
+              <a:lnSpc>
+                <a:spcPct val="120000"/>
+              </a:lnSpc>
+              <a:buNone/>
+            </a:pPr>
+            <a:r>
+              <a:rPr lang="en-US" sz="2200" b="1" dirty="0">
+                <a:solidFill>
+                  <a:srgbClr val="111827"/>
+                </a:solidFill>
+                <a:latin typeface="Pretendard" pitchFamily="34" charset="0"/>
+                <a:ea typeface="Pretendard" pitchFamily="34" charset="-122"/>
+                <a:cs typeface="Pretendard" pitchFamily="34" charset="-120"/>
+              </a:rPr>
+              <a:t>Glass / data</a:t>
+            </a:r>
+            <a:pPr algn="l" indent="0" marL="0">
+              <a:lnSpc>
+                <a:spcPct val="120000"/>
+              </a:lnSpc>
+              <a:buNone/>
+            </a:pPr>
+            <a:r>
+              <a:rPr lang="en-US" sz="2200" dirty="0">
+                <a:solidFill>
+                  <a:srgbClr val="111827"/>
+                </a:solidFill>
+                <a:latin typeface="Pretendard" pitchFamily="34" charset="0"/>
+                <a:ea typeface="Pretendard" pitchFamily="34" charset="-122"/>
+                <a:cs typeface="Pretendard" pitchFamily="34" charset="-120"/>
+              </a:rPr>
+              <a:t>  translucent surfaces or metric rails.</a:t>
+            </a:r>
+            <a:endParaRPr lang="en-US" sz="2200" dirty="0"/>
+          </a:p>
+        </p:txBody>
+      </p:sp>
     </p:spTree>
   </p:cSld>
   <p:clrMapOvr>
@@ -17489,7 +18742,7 @@
                 <a:ea typeface="Pretendard" pitchFamily="34" charset="-122"/>
                 <a:cs typeface="Pretendard" pitchFamily="34" charset="-120"/>
               </a:rPr>
-              <a:t>- Glass / grid / data</a:t>
+              <a:t>- Clean</a:t>
             </a:r>
             <a:pPr algn="l" indent="0" marL="0">
               <a:lnSpc>
@@ -17506,7 +18759,7 @@
                 <a:ea typeface="Pretendard" pitchFamily="34" charset="-122"/>
                 <a:cs typeface="Pretendard" pitchFamily="34" charset="-120"/>
               </a:rPr>
-              <a:t>  translucent surfaces, construction lines, or metric rails.</a:t>
+              <a:t>  restrained default structure for ordinary decks.</a:t>
             </a:r>
             <a:endParaRPr lang="en-US" sz="2200" dirty="0"/>
           </a:p>
@@ -17661,8 +18914,8 @@
         </p:nvSpPr>
         <p:spPr>
           <a:xfrm>
-            <a:off x="822960" y="1463040"/>
-            <a:ext cx="73152" cy="1920240"/>
+            <a:off x="822960" y="1554480"/>
+            <a:ext cx="4937760" cy="73152"/>
           </a:xfrm>
           <a:prstGeom prst="rect">
             <a:avLst/>
@@ -17688,35 +18941,8 @@
         </p:nvSpPr>
         <p:spPr>
           <a:xfrm>
-            <a:off x="6309360" y="1463040"/>
-            <a:ext cx="73152" cy="1920240"/>
-          </a:xfrm>
-          <a:prstGeom prst="rect">
-            <a:avLst/>
-          </a:prstGeom>
-          <a:solidFill>
-            <a:srgbClr val="E5E7EB"/>
-          </a:solidFill>
-          <a:ln w="12700">
-            <a:solidFill>
-              <a:srgbClr val="E5E7EB">
-                <a:alpha val="0"/>
-              </a:srgbClr>
-            </a:solidFill>
-            <a:prstDash val="solid"/>
-          </a:ln>
-        </p:spPr>
-      </p:sp>
-      <p:sp>
-        <p:nvSpPr>
-          <p:cNvPr id="6" name="Shape 4"/>
-          <p:cNvSpPr/>
-          <p:nvPr/>
-        </p:nvSpPr>
-        <p:spPr>
-          <a:xfrm>
-            <a:off x="822960" y="3749040"/>
-            <a:ext cx="73152" cy="1920240"/>
+            <a:off x="6400800" y="1554480"/>
+            <a:ext cx="4937760" cy="73152"/>
           </a:xfrm>
           <a:prstGeom prst="rect">
             <a:avLst/>
@@ -17736,154 +18962,7 @@
       </p:sp>
       <p:sp>
         <p:nvSpPr>
-          <p:cNvPr id="7" name="Shape 5"/>
-          <p:cNvSpPr/>
-          <p:nvPr/>
-        </p:nvSpPr>
-        <p:spPr>
-          <a:xfrm>
-            <a:off x="6309360" y="3749040"/>
-            <a:ext cx="73152" cy="1920240"/>
-          </a:xfrm>
-          <a:prstGeom prst="rect">
-            <a:avLst/>
-          </a:prstGeom>
-          <a:solidFill>
-            <a:srgbClr val="E5E7EB"/>
-          </a:solidFill>
-          <a:ln w="12700">
-            <a:solidFill>
-              <a:srgbClr val="E5E7EB">
-                <a:alpha val="0"/>
-              </a:srgbClr>
-            </a:solidFill>
-            <a:prstDash val="solid"/>
-          </a:ln>
-        </p:spPr>
-      </p:sp>
-      <p:pic>
-        <p:nvPicPr>
-          <p:cNvPr id="8" name="Image 0" descr="preencoded.png">    </p:cNvPr>
-          <p:cNvPicPr>
-            <a:picLocks noChangeAspect="1"/>
-          </p:cNvPicPr>
-          <p:nvPr/>
-        </p:nvPicPr>
-        <p:blipFill>
-          <a:blip r:embed="rId1">
-            <a:extLst>
-              <a:ext uri="{96DAC541-7B7A-43D3-8B79-37D633B846F1}">
-                <asvg:svgBlip xmlns:asvg="http://schemas.microsoft.com/office/drawing/2016/SVG/main" r:embed="rId2"/>
-              </a:ext>
-            </a:extLst>
-          </a:blip>
-          <a:stretch>
-            <a:fillRect/>
-          </a:stretch>
-        </p:blipFill>
-        <p:spPr>
-          <a:xfrm>
-            <a:off x="822960" y="1463040"/>
-            <a:ext cx="5029200" cy="1920240"/>
-          </a:xfrm>
-          <a:prstGeom prst="rect">
-            <a:avLst/>
-          </a:prstGeom>
-        </p:spPr>
-      </p:pic>
-      <p:pic>
-        <p:nvPicPr>
-          <p:cNvPr id="9" name="Image 1" descr="preencoded.png">    </p:cNvPr>
-          <p:cNvPicPr>
-            <a:picLocks noChangeAspect="1"/>
-          </p:cNvPicPr>
-          <p:nvPr/>
-        </p:nvPicPr>
-        <p:blipFill>
-          <a:blip r:embed="rId3">
-            <a:extLst>
-              <a:ext uri="{96DAC541-7B7A-43D3-8B79-37D633B846F1}">
-                <asvg:svgBlip xmlns:asvg="http://schemas.microsoft.com/office/drawing/2016/SVG/main" r:embed="rId4"/>
-              </a:ext>
-            </a:extLst>
-          </a:blip>
-          <a:stretch>
-            <a:fillRect/>
-          </a:stretch>
-        </p:blipFill>
-        <p:spPr>
-          <a:xfrm>
-            <a:off x="6309360" y="1463040"/>
-            <a:ext cx="5029200" cy="1920240"/>
-          </a:xfrm>
-          <a:prstGeom prst="rect">
-            <a:avLst/>
-          </a:prstGeom>
-        </p:spPr>
-      </p:pic>
-      <p:pic>
-        <p:nvPicPr>
-          <p:cNvPr id="10" name="Image 2" descr="preencoded.png">    </p:cNvPr>
-          <p:cNvPicPr>
-            <a:picLocks noChangeAspect="1"/>
-          </p:cNvPicPr>
-          <p:nvPr/>
-        </p:nvPicPr>
-        <p:blipFill>
-          <a:blip r:embed="rId5">
-            <a:extLst>
-              <a:ext uri="{96DAC541-7B7A-43D3-8B79-37D633B846F1}">
-                <asvg:svgBlip xmlns:asvg="http://schemas.microsoft.com/office/drawing/2016/SVG/main" r:embed="rId6"/>
-              </a:ext>
-            </a:extLst>
-          </a:blip>
-          <a:stretch>
-            <a:fillRect/>
-          </a:stretch>
-        </p:blipFill>
-        <p:spPr>
-          <a:xfrm>
-            <a:off x="822960" y="3749040"/>
-            <a:ext cx="5029200" cy="1920240"/>
-          </a:xfrm>
-          <a:prstGeom prst="rect">
-            <a:avLst/>
-          </a:prstGeom>
-        </p:spPr>
-      </p:pic>
-      <p:pic>
-        <p:nvPicPr>
-          <p:cNvPr id="11" name="Image 3" descr="preencoded.png">    </p:cNvPr>
-          <p:cNvPicPr>
-            <a:picLocks noChangeAspect="1"/>
-          </p:cNvPicPr>
-          <p:nvPr/>
-        </p:nvPicPr>
-        <p:blipFill>
-          <a:blip r:embed="rId7">
-            <a:extLst>
-              <a:ext uri="{96DAC541-7B7A-43D3-8B79-37D633B846F1}">
-                <asvg:svgBlip xmlns:asvg="http://schemas.microsoft.com/office/drawing/2016/SVG/main" r:embed="rId8"/>
-              </a:ext>
-            </a:extLst>
-          </a:blip>
-          <a:stretch>
-            <a:fillRect/>
-          </a:stretch>
-        </p:blipFill>
-        <p:spPr>
-          <a:xfrm>
-            <a:off x="6309360" y="3749040"/>
-            <a:ext cx="5029200" cy="1920240"/>
-          </a:xfrm>
-          <a:prstGeom prst="rect">
-            <a:avLst/>
-          </a:prstGeom>
-        </p:spPr>
-      </p:pic>
-      <p:sp>
-        <p:nvSpPr>
-          <p:cNvPr id="12" name="Text 6"/>
+          <p:cNvPr id="6" name="Text 4"/>
           <p:cNvSpPr txBox="1"/>
           <p:nvPr/>
         </p:nvSpPr>
@@ -17925,71 +19004,14 @@
       </p:sp>
       <p:sp>
         <p:nvSpPr>
-          <p:cNvPr id="13" name="Shape 7"/>
-          <p:cNvSpPr/>
-          <p:nvPr/>
-        </p:nvSpPr>
-        <p:spPr>
-          <a:xfrm>
-            <a:off x="976122" y="2130552"/>
-            <a:ext cx="585216" cy="585216"/>
-          </a:xfrm>
-          <a:prstGeom prst="roundRect">
-            <a:avLst>
-              <a:gd name="adj" fmla="val 6250"/>
-            </a:avLst>
-          </a:prstGeom>
-          <a:solidFill>
-            <a:srgbClr val="FFFFFF"/>
-          </a:solidFill>
-          <a:ln w="12700">
-            <a:solidFill>
-              <a:srgbClr val="E5E7EB"/>
-            </a:solidFill>
-            <a:prstDash val="solid"/>
-          </a:ln>
-        </p:spPr>
-      </p:sp>
-      <p:pic>
-        <p:nvPicPr>
-          <p:cNvPr id="14" name="Image 4" descr="table icon from tabler-icons (MIT)">    </p:cNvPr>
-          <p:cNvPicPr>
-            <a:picLocks noChangeAspect="1"/>
-          </p:cNvPicPr>
-          <p:nvPr/>
-        </p:nvPicPr>
-        <p:blipFill>
-          <a:blip r:embed="rId9">
-            <a:extLst>
-              <a:ext uri="{96DAC541-7B7A-43D3-8B79-37D633B846F1}">
-                <asvg:svgBlip xmlns:asvg="http://schemas.microsoft.com/office/drawing/2016/SVG/main" r:embed="rId10"/>
-              </a:ext>
-            </a:extLst>
-          </a:blip>
-          <a:stretch>
-            <a:fillRect/>
-          </a:stretch>
-        </p:blipFill>
-        <p:spPr>
-          <a:xfrm>
-            <a:off x="1049274" y="2203704"/>
-            <a:ext cx="438912" cy="438912"/>
-          </a:xfrm>
-          <a:prstGeom prst="rect">
-            <a:avLst/>
-          </a:prstGeom>
-        </p:spPr>
-      </p:pic>
-      <p:sp>
-        <p:nvSpPr>
-          <p:cNvPr id="15" name="Text 8"/>
+          <p:cNvPr id="7" name="Text 5"/>
           <p:cNvSpPr txBox="1"/>
           <p:nvPr/>
         </p:nvSpPr>
         <p:spPr>
           <a:xfrm>
-            <a:off x="1689354" y="2033016"/>
-            <a:ext cx="3961638" cy="780288"/>
+            <a:off x="896112" y="1664208"/>
+            <a:ext cx="4791456" cy="4169664"/>
           </a:xfrm>
           <a:prstGeom prst="rect">
             <a:avLst/>
@@ -17998,7 +19020,7 @@
           <a:ln/>
         </p:spPr>
         <p:txBody>
-          <a:bodyPr wrap="square" lIns="0" tIns="25400" rIns="25400" bIns="0" rtlCol="0" anchor="ctr"/>
+          <a:bodyPr wrap="square" lIns="0" tIns="25400" rIns="25400" bIns="0" rtlCol="0" anchor="t"/>
           <a:lstStyle/>
           <a:p>
             <a:pPr algn="l" indent="0" marL="0">
@@ -18016,7 +19038,7 @@
                 <a:ea typeface="Pretendard" pitchFamily="34" charset="-122"/>
                 <a:cs typeface="Pretendard" pitchFamily="34" charset="-120"/>
               </a:rPr>
-              <a:t>Headings</a:t>
+              <a:t>- Headings</a:t>
             </a:r>
             <a:pPr algn="l" indent="0" marL="0">
               <a:lnSpc>
@@ -18041,71 +19063,14 @@
       </p:sp>
       <p:sp>
         <p:nvSpPr>
-          <p:cNvPr id="16" name="Shape 9"/>
-          <p:cNvSpPr/>
-          <p:nvPr/>
-        </p:nvSpPr>
-        <p:spPr>
-          <a:xfrm>
-            <a:off x="6462522" y="2130552"/>
-            <a:ext cx="585216" cy="585216"/>
-          </a:xfrm>
-          <a:prstGeom prst="roundRect">
-            <a:avLst>
-              <a:gd name="adj" fmla="val 6250"/>
-            </a:avLst>
-          </a:prstGeom>
-          <a:solidFill>
-            <a:srgbClr val="FFFFFF"/>
-          </a:solidFill>
-          <a:ln w="12700">
-            <a:solidFill>
-              <a:srgbClr val="E5E7EB"/>
-            </a:solidFill>
-            <a:prstDash val="solid"/>
-          </a:ln>
-        </p:spPr>
-      </p:sp>
-      <p:pic>
-        <p:nvPicPr>
-          <p:cNvPr id="17" name="Image 5" descr="article icon from tabler-icons (MIT)">    </p:cNvPr>
-          <p:cNvPicPr>
-            <a:picLocks noChangeAspect="1"/>
-          </p:cNvPicPr>
-          <p:nvPr/>
-        </p:nvPicPr>
-        <p:blipFill>
-          <a:blip r:embed="rId11">
-            <a:extLst>
-              <a:ext uri="{96DAC541-7B7A-43D3-8B79-37D633B846F1}">
-                <asvg:svgBlip xmlns:asvg="http://schemas.microsoft.com/office/drawing/2016/SVG/main" r:embed="rId12"/>
-              </a:ext>
-            </a:extLst>
-          </a:blip>
-          <a:stretch>
-            <a:fillRect/>
-          </a:stretch>
-        </p:blipFill>
-        <p:spPr>
-          <a:xfrm>
-            <a:off x="6535674" y="2203704"/>
-            <a:ext cx="438912" cy="438912"/>
-          </a:xfrm>
-          <a:prstGeom prst="rect">
-            <a:avLst/>
-          </a:prstGeom>
-        </p:spPr>
-      </p:pic>
-      <p:sp>
-        <p:nvSpPr>
-          <p:cNvPr id="18" name="Text 10"/>
+          <p:cNvPr id="8" name="Text 6"/>
           <p:cNvSpPr txBox="1"/>
           <p:nvPr/>
         </p:nvSpPr>
         <p:spPr>
           <a:xfrm>
-            <a:off x="7175754" y="1865376"/>
-            <a:ext cx="3961638" cy="1115568"/>
+            <a:off x="6473952" y="1664208"/>
+            <a:ext cx="4791456" cy="4169664"/>
           </a:xfrm>
           <a:prstGeom prst="rect">
             <a:avLst/>
@@ -18114,7 +19079,7 @@
           <a:ln/>
         </p:spPr>
         <p:txBody>
-          <a:bodyPr wrap="square" lIns="0" tIns="25400" rIns="25400" bIns="0" rtlCol="0" anchor="ctr"/>
+          <a:bodyPr wrap="square" lIns="0" tIns="25400" rIns="25400" bIns="0" rtlCol="0" anchor="t"/>
           <a:lstStyle/>
           <a:p>
             <a:pPr algn="l" indent="0" marL="0">
@@ -18132,7 +19097,7 @@
                 <a:ea typeface="Pretendard" pitchFamily="34" charset="-122"/>
                 <a:cs typeface="Pretendard" pitchFamily="34" charset="-120"/>
               </a:rPr>
-              <a:t>Lists</a:t>
+              <a:t>- Lists</a:t>
             </a:r>
             <a:pPr algn="l" indent="0" marL="0">
               <a:lnSpc>
@@ -18150,238 +19115,6 @@
                 <a:cs typeface="Pretendard" pitchFamily="34" charset="-120"/>
               </a:rPr>
               <a:t>  ordered and unordered structure.</a:t>
-            </a:r>
-            <a:endParaRPr lang="en-US" sz="2200" dirty="0"/>
-          </a:p>
-        </p:txBody>
-      </p:sp>
-      <p:sp>
-        <p:nvSpPr>
-          <p:cNvPr id="19" name="Shape 11"/>
-          <p:cNvSpPr/>
-          <p:nvPr/>
-        </p:nvSpPr>
-        <p:spPr>
-          <a:xfrm>
-            <a:off x="976122" y="4416552"/>
-            <a:ext cx="585216" cy="585216"/>
-          </a:xfrm>
-          <a:prstGeom prst="roundRect">
-            <a:avLst>
-              <a:gd name="adj" fmla="val 6250"/>
-            </a:avLst>
-          </a:prstGeom>
-          <a:solidFill>
-            <a:srgbClr val="FFFFFF"/>
-          </a:solidFill>
-          <a:ln w="12700">
-            <a:solidFill>
-              <a:srgbClr val="E5E7EB"/>
-            </a:solidFill>
-            <a:prstDash val="solid"/>
-          </a:ln>
-        </p:spPr>
-      </p:sp>
-      <p:pic>
-        <p:nvPicPr>
-          <p:cNvPr id="20" name="Image 6" descr="article icon from tabler-icons (MIT)">    </p:cNvPr>
-          <p:cNvPicPr>
-            <a:picLocks noChangeAspect="1"/>
-          </p:cNvPicPr>
-          <p:nvPr/>
-        </p:nvPicPr>
-        <p:blipFill>
-          <a:blip r:embed="rId13">
-            <a:extLst>
-              <a:ext uri="{96DAC541-7B7A-43D3-8B79-37D633B846F1}">
-                <asvg:svgBlip xmlns:asvg="http://schemas.microsoft.com/office/drawing/2016/SVG/main" r:embed="rId14"/>
-              </a:ext>
-            </a:extLst>
-          </a:blip>
-          <a:stretch>
-            <a:fillRect/>
-          </a:stretch>
-        </p:blipFill>
-        <p:spPr>
-          <a:xfrm>
-            <a:off x="1049274" y="4489704"/>
-            <a:ext cx="438912" cy="438912"/>
-          </a:xfrm>
-          <a:prstGeom prst="rect">
-            <a:avLst/>
-          </a:prstGeom>
-        </p:spPr>
-      </p:pic>
-      <p:sp>
-        <p:nvSpPr>
-          <p:cNvPr id="21" name="Text 12"/>
-          <p:cNvSpPr txBox="1"/>
-          <p:nvPr/>
-        </p:nvSpPr>
-        <p:spPr>
-          <a:xfrm>
-            <a:off x="1689354" y="4151376"/>
-            <a:ext cx="3961638" cy="1115568"/>
-          </a:xfrm>
-          <a:prstGeom prst="rect">
-            <a:avLst/>
-          </a:prstGeom>
-          <a:noFill/>
-          <a:ln/>
-        </p:spPr>
-        <p:txBody>
-          <a:bodyPr wrap="square" lIns="0" tIns="25400" rIns="25400" bIns="0" rtlCol="0" anchor="ctr"/>
-          <a:lstStyle/>
-          <a:p>
-            <a:pPr algn="l" indent="0" marL="0">
-              <a:lnSpc>
-                <a:spcPct val="120000"/>
-              </a:lnSpc>
-              <a:buNone/>
-            </a:pPr>
-            <a:r>
-              <a:rPr lang="en-US" sz="2200" b="1" dirty="0">
-                <a:solidFill>
-                  <a:srgbClr val="111827"/>
-                </a:solidFill>
-                <a:latin typeface="Pretendard" pitchFamily="34" charset="0"/>
-                <a:ea typeface="Pretendard" pitchFamily="34" charset="-122"/>
-                <a:cs typeface="Pretendard" pitchFamily="34" charset="-120"/>
-              </a:rPr>
-              <a:t>Constraint:</a:t>
-            </a:r>
-            <a:pPr algn="l" indent="0" marL="0">
-              <a:lnSpc>
-                <a:spcPct val="120000"/>
-              </a:lnSpc>
-              <a:buNone/>
-            </a:pPr>
-            <a:r>
-              <a:rPr lang="en-US" sz="2200" dirty="0">
-                <a:solidFill>
-                  <a:srgbClr val="111827"/>
-                </a:solidFill>
-                <a:latin typeface="Pretendard" pitchFamily="34" charset="0"/>
-                <a:ea typeface="Pretendard" pitchFamily="34" charset="-122"/>
-                <a:cs typeface="Pretendard" pitchFamily="34" charset="-120"/>
-              </a:rPr>
-              <a:t>  Indented description lines stay under the bold label.</a:t>
-            </a:r>
-            <a:endParaRPr lang="en-US" sz="2200" dirty="0"/>
-          </a:p>
-        </p:txBody>
-      </p:sp>
-      <p:sp>
-        <p:nvSpPr>
-          <p:cNvPr id="22" name="Shape 13"/>
-          <p:cNvSpPr/>
-          <p:nvPr/>
-        </p:nvSpPr>
-        <p:spPr>
-          <a:xfrm>
-            <a:off x="6462522" y="4416552"/>
-            <a:ext cx="585216" cy="585216"/>
-          </a:xfrm>
-          <a:prstGeom prst="roundRect">
-            <a:avLst>
-              <a:gd name="adj" fmla="val 6250"/>
-            </a:avLst>
-          </a:prstGeom>
-          <a:solidFill>
-            <a:srgbClr val="FFFFFF"/>
-          </a:solidFill>
-          <a:ln w="12700">
-            <a:solidFill>
-              <a:srgbClr val="E5E7EB"/>
-            </a:solidFill>
-            <a:prstDash val="solid"/>
-          </a:ln>
-        </p:spPr>
-      </p:sp>
-      <p:pic>
-        <p:nvPicPr>
-          <p:cNvPr id="23" name="Image 7" descr="table icon from tabler-icons (MIT)">    </p:cNvPr>
-          <p:cNvPicPr>
-            <a:picLocks noChangeAspect="1"/>
-          </p:cNvPicPr>
-          <p:nvPr/>
-        </p:nvPicPr>
-        <p:blipFill>
-          <a:blip r:embed="rId15">
-            <a:extLst>
-              <a:ext uri="{96DAC541-7B7A-43D3-8B79-37D633B846F1}">
-                <asvg:svgBlip xmlns:asvg="http://schemas.microsoft.com/office/drawing/2016/SVG/main" r:embed="rId16"/>
-              </a:ext>
-            </a:extLst>
-          </a:blip>
-          <a:stretch>
-            <a:fillRect/>
-          </a:stretch>
-        </p:blipFill>
-        <p:spPr>
-          <a:xfrm>
-            <a:off x="6535674" y="4489704"/>
-            <a:ext cx="438912" cy="438912"/>
-          </a:xfrm>
-          <a:prstGeom prst="rect">
-            <a:avLst/>
-          </a:prstGeom>
-        </p:spPr>
-      </p:pic>
-      <p:sp>
-        <p:nvSpPr>
-          <p:cNvPr id="24" name="Text 14"/>
-          <p:cNvSpPr txBox="1"/>
-          <p:nvPr/>
-        </p:nvSpPr>
-        <p:spPr>
-          <a:xfrm>
-            <a:off x="7175754" y="4151376"/>
-            <a:ext cx="3961638" cy="1115568"/>
-          </a:xfrm>
-          <a:prstGeom prst="rect">
-            <a:avLst/>
-          </a:prstGeom>
-          <a:noFill/>
-          <a:ln/>
-        </p:spPr>
-        <p:txBody>
-          <a:bodyPr wrap="square" lIns="0" tIns="25400" rIns="25400" bIns="0" rtlCol="0" anchor="ctr"/>
-          <a:lstStyle/>
-          <a:p>
-            <a:pPr algn="l" indent="0" marL="0">
-              <a:lnSpc>
-                <a:spcPct val="120000"/>
-              </a:lnSpc>
-              <a:buNone/>
-            </a:pPr>
-            <a:r>
-              <a:rPr lang="en-US" sz="2200" b="1" dirty="0">
-                <a:solidFill>
-                  <a:srgbClr val="111827"/>
-                </a:solidFill>
-                <a:latin typeface="Pretendard" pitchFamily="34" charset="0"/>
-                <a:ea typeface="Pretendard" pitchFamily="34" charset="-122"/>
-                <a:cs typeface="Pretendard" pitchFamily="34" charset="-120"/>
-              </a:rPr>
-              <a:t>Emphasis</a:t>
-            </a:r>
-            <a:pPr algn="l" indent="0" marL="0">
-              <a:lnSpc>
-                <a:spcPct val="120000"/>
-              </a:lnSpc>
-              <a:buNone/>
-            </a:pPr>
-            <a:r>
-              <a:rPr lang="en-US" sz="2200" dirty="0">
-                <a:solidFill>
-                  <a:srgbClr val="111827"/>
-                </a:solidFill>
-                <a:latin typeface="Pretendard" pitchFamily="34" charset="0"/>
-                <a:ea typeface="Pretendard" pitchFamily="34" charset="-122"/>
-                <a:cs typeface="Pretendard" pitchFamily="34" charset="-120"/>
-              </a:rPr>
-              <a:t>  bold and italic remain editable.</a:t>
             </a:r>
             <a:endParaRPr lang="en-US" sz="2200" dirty="0"/>
           </a:p>

--- a/docs/theme-preview/pptx/minimalism.pptx
+++ b/docs/theme-preview/pptx/minimalism.pptx
@@ -131,7 +131,247 @@
 </p:presentation>
 </file>
 
-<file path=ppt/charts/chart3.xml><?xml version="1.0" encoding="utf-8"?>
+<file path=ppt/charts/chart10.xml><?xml version="1.0" encoding="utf-8"?>
+<c:chartSpace xmlns:c="http://schemas.openxmlformats.org/drawingml/2006/chart" xmlns:a="http://schemas.openxmlformats.org/drawingml/2006/main" xmlns:r="http://schemas.openxmlformats.org/officeDocument/2006/relationships">
+  <c:date1904 val="0"/>
+  <c:roundedCorners val="1"/>
+  <c:chart>
+    <c:autoTitleDeleted val="1"/>
+    <c:plotArea>
+      <c:layout/>
+      <c:barChart>
+        <c:barDir val="col"/>
+        <c:grouping val="clustered"/>
+        <c:varyColors val="0"/>
+        <c:ser>
+          <c:idx val="0"/>
+          <c:order val="0"/>
+          <c:tx>
+            <c:strRef>
+              <c:f>Sheet1!$B$1</c:f>
+              <c:strCache>
+                <c:ptCount val="1"/>
+                <c:pt idx="0">
+                  <c:v>Score</c:v>
+                </c:pt>
+              </c:strCache>
+            </c:strRef>
+          </c:tx>
+          <c:spPr>
+            <a:solidFill>
+              <a:srgbClr val="111827"/>
+            </a:solidFill>
+            <a:effectLst/>
+          </c:spPr>
+          <c:invertIfNegative val="0"/>
+          <c:dLbls>
+            <c:numFmt formatCode="#,##0" sourceLinked="0"/>
+            <c:txPr>
+              <a:bodyPr/>
+              <a:lstStyle/>
+              <a:p>
+                <a:pPr>
+                  <a:defRPr b="0" i="0" strike="noStrike" sz="1200" u="none">
+                    <a:solidFill>
+                      <a:srgbClr val="000000"/>
+                    </a:solidFill>
+                    <a:latin typeface="Arial"/>
+                  </a:defRPr>
+                </a:pPr>
+              </a:p>
+            </c:txPr>
+            <c:showLegendKey val="0"/>
+            <c:showVal val="1"/>
+            <c:showCatName val="0"/>
+            <c:showSerName val="0"/>
+            <c:showPercent val="0"/>
+            <c:showBubbleSize val="0"/>
+            <c:showLeaderLines val="0"/>
+          </c:dLbls>
+          <c:cat>
+            <c:multiLvlStrRef>
+              <c:f>Sheet1!$A$2:$A$4</c:f>
+              <c:multiLvlStrCache>
+                <c:ptCount val="3"/>
+                <c:lvl>
+                  <c:pt idx="0">
+                    <c:v>Parse</c:v>
+                  </c:pt>
+                  <c:pt idx="1">
+                    <c:v>Plan</c:v>
+                  </c:pt>
+                  <c:pt idx="2">
+                    <c:v>Render</c:v>
+                  </c:pt>
+                </c:lvl>
+              </c:multiLvlStrCache>
+            </c:multiLvlStrRef>
+          </c:cat>
+          <c:val>
+            <c:numRef>
+              <c:f>Sheet1!$B$2:$B$4</c:f>
+              <c:numCache>
+                <c:formatCode>General</c:formatCode>
+                <c:ptCount val="3"/>
+                <c:pt idx="0">
+                  <c:v>78</c:v>
+                </c:pt>
+                <c:pt idx="1">
+                  <c:v>86</c:v>
+                </c:pt>
+                <c:pt idx="2">
+                  <c:v>93</c:v>
+                </c:pt>
+              </c:numCache>
+            </c:numRef>
+          </c:val>
+        </c:ser>
+        <c:dLbls>
+          <c:numFmt formatCode="#,##0" sourceLinked="0"/>
+          <c:txPr>
+            <a:bodyPr/>
+            <a:lstStyle/>
+            <a:p>
+              <a:pPr>
+                <a:defRPr b="0" i="0" strike="noStrike" sz="1200" u="none">
+                  <a:solidFill>
+                    <a:srgbClr val="000000"/>
+                  </a:solidFill>
+                  <a:latin typeface="Arial"/>
+                </a:defRPr>
+              </a:pPr>
+            </a:p>
+          </c:txPr>
+          <c:showLegendKey val="0"/>
+          <c:showVal val="1"/>
+          <c:showCatName val="0"/>
+          <c:showSerName val="0"/>
+          <c:showPercent val="0"/>
+          <c:showBubbleSize val="0"/>
+          <c:showLeaderLines val="0"/>
+        </c:dLbls>
+        <c:gapWidth val="150"/>
+        <c:overlap val="0"/>
+        <c:axId val="2094734554"/>
+        <c:axId val="2094734552"/>
+        <c:axId val="2094734556"/>
+      </c:barChart>
+      <c:catAx>
+        <c:axId val="2094734554"/>
+        <c:scaling>
+          <c:orientation val="minMax"/>
+        </c:scaling>
+        <c:delete val="0"/>
+        <c:axPos val="b"/>
+        <c:numFmt formatCode="General" sourceLinked="1"/>
+        <c:majorTickMark val="out"/>
+        <c:minorTickMark val="none"/>
+        <c:tickLblPos val="low"/>
+        <c:spPr>
+          <a:ln w="12700" cap="flat">
+            <a:solidFill>
+              <a:srgbClr val="888888"/>
+            </a:solidFill>
+            <a:prstDash val="solid"/>
+            <a:round/>
+          </a:ln>
+        </c:spPr>
+        <c:txPr>
+          <a:bodyPr/>
+          <a:lstStyle/>
+          <a:p>
+            <a:pPr>
+              <a:defRPr sz="1100" b="0" i="0" u="none" strike="noStrike">
+                <a:solidFill>
+                  <a:srgbClr val="111827"/>
+                </a:solidFill>
+                <a:latin typeface="Pretendard"/>
+              </a:defRPr>
+            </a:pPr>
+            <a:endParaRPr lang="en-US"/>
+          </a:p>
+        </c:txPr>
+        <c:crossAx val="2094734552"/>
+        <c:crosses val="autoZero"/>
+        <c:auto val="1"/>
+        <c:lblAlgn val="ctr"/>
+        <c:noMultiLvlLbl val="1"/>
+      </c:catAx>
+      <c:valAx>
+        <c:axId val="2094734552"/>
+        <c:scaling>
+          <c:orientation val="minMax"/>
+        </c:scaling>
+        <c:delete val="0"/>
+        <c:axPos val="l"/>
+        <c:majorGridlines>
+          <c:spPr>
+            <a:ln w="12700" cap="flat">
+              <a:solidFill>
+                <a:srgbClr val="E5E7EB"/>
+              </a:solidFill>
+              <a:prstDash val="solid"/>
+              <a:round/>
+            </a:ln>
+          </c:spPr>
+        </c:majorGridlines>
+        <c:numFmt formatCode="General" sourceLinked="0"/>
+        <c:majorTickMark val="out"/>
+        <c:minorTickMark val="none"/>
+        <c:tickLblPos val="nextTo"/>
+        <c:spPr>
+          <a:ln w="12700" cap="flat">
+            <a:solidFill>
+              <a:srgbClr val="888888"/>
+            </a:solidFill>
+            <a:prstDash val="solid"/>
+            <a:round/>
+          </a:ln>
+        </c:spPr>
+        <c:txPr>
+          <a:bodyPr/>
+          <a:lstStyle/>
+          <a:p>
+            <a:pPr>
+              <a:defRPr sz="1100" b="0" i="0" u="none" strike="noStrike">
+                <a:solidFill>
+                  <a:srgbClr val="4B5563"/>
+                </a:solidFill>
+                <a:latin typeface="Pretendard"/>
+              </a:defRPr>
+            </a:pPr>
+            <a:endParaRPr lang="en-US"/>
+          </a:p>
+        </c:txPr>
+        <c:crossAx val="2094734554"/>
+        <c:crosses val="autoZero"/>
+        <c:crossBetween val="between"/>
+      </c:valAx>
+      <c:spPr>
+        <a:noFill/>
+        <a:ln>
+          <a:noFill/>
+        </a:ln>
+        <a:effectLst/>
+      </c:spPr>
+    </c:plotArea>
+    <c:plotVisOnly val="1"/>
+    <c:dispBlanksAs val="span"/>
+  </c:chart>
+  <c:spPr>
+    <a:noFill/>
+    <a:ln>
+      <a:noFill/>
+    </a:ln>
+    <a:effectLst/>
+  </c:spPr>
+  <c:externalData r:id="rId1">
+    <c:autoUpdate val="0"/>
+  </c:externalData>
+</c:chartSpace>
+</file>
+
+<file path=ppt/charts/chart9.xml><?xml version="1.0" encoding="utf-8"?>
 <c:chartSpace xmlns:c="http://schemas.openxmlformats.org/drawingml/2006/chart" xmlns:a="http://schemas.openxmlformats.org/drawingml/2006/main" xmlns:r="http://schemas.openxmlformats.org/officeDocument/2006/relationships">
   <c:date1904 val="0"/>
   <c:roundedCorners val="1"/>
@@ -458,246 +698,6 @@
         </a:p>
       </c:txPr>
     </c:legend>
-    <c:plotVisOnly val="1"/>
-    <c:dispBlanksAs val="span"/>
-  </c:chart>
-  <c:spPr>
-    <a:noFill/>
-    <a:ln>
-      <a:noFill/>
-    </a:ln>
-    <a:effectLst/>
-  </c:spPr>
-  <c:externalData r:id="rId1">
-    <c:autoUpdate val="0"/>
-  </c:externalData>
-</c:chartSpace>
-</file>
-
-<file path=ppt/charts/chart4.xml><?xml version="1.0" encoding="utf-8"?>
-<c:chartSpace xmlns:c="http://schemas.openxmlformats.org/drawingml/2006/chart" xmlns:a="http://schemas.openxmlformats.org/drawingml/2006/main" xmlns:r="http://schemas.openxmlformats.org/officeDocument/2006/relationships">
-  <c:date1904 val="0"/>
-  <c:roundedCorners val="1"/>
-  <c:chart>
-    <c:autoTitleDeleted val="1"/>
-    <c:plotArea>
-      <c:layout/>
-      <c:barChart>
-        <c:barDir val="col"/>
-        <c:grouping val="clustered"/>
-        <c:varyColors val="0"/>
-        <c:ser>
-          <c:idx val="0"/>
-          <c:order val="0"/>
-          <c:tx>
-            <c:strRef>
-              <c:f>Sheet1!$B$1</c:f>
-              <c:strCache>
-                <c:ptCount val="1"/>
-                <c:pt idx="0">
-                  <c:v>Score</c:v>
-                </c:pt>
-              </c:strCache>
-            </c:strRef>
-          </c:tx>
-          <c:spPr>
-            <a:solidFill>
-              <a:srgbClr val="111827"/>
-            </a:solidFill>
-            <a:effectLst/>
-          </c:spPr>
-          <c:invertIfNegative val="0"/>
-          <c:dLbls>
-            <c:numFmt formatCode="#,##0" sourceLinked="0"/>
-            <c:txPr>
-              <a:bodyPr/>
-              <a:lstStyle/>
-              <a:p>
-                <a:pPr>
-                  <a:defRPr b="0" i="0" strike="noStrike" sz="1200" u="none">
-                    <a:solidFill>
-                      <a:srgbClr val="000000"/>
-                    </a:solidFill>
-                    <a:latin typeface="Arial"/>
-                  </a:defRPr>
-                </a:pPr>
-              </a:p>
-            </c:txPr>
-            <c:showLegendKey val="0"/>
-            <c:showVal val="1"/>
-            <c:showCatName val="0"/>
-            <c:showSerName val="0"/>
-            <c:showPercent val="0"/>
-            <c:showBubbleSize val="0"/>
-            <c:showLeaderLines val="0"/>
-          </c:dLbls>
-          <c:cat>
-            <c:multiLvlStrRef>
-              <c:f>Sheet1!$A$2:$A$4</c:f>
-              <c:multiLvlStrCache>
-                <c:ptCount val="3"/>
-                <c:lvl>
-                  <c:pt idx="0">
-                    <c:v>Parse</c:v>
-                  </c:pt>
-                  <c:pt idx="1">
-                    <c:v>Plan</c:v>
-                  </c:pt>
-                  <c:pt idx="2">
-                    <c:v>Render</c:v>
-                  </c:pt>
-                </c:lvl>
-              </c:multiLvlStrCache>
-            </c:multiLvlStrRef>
-          </c:cat>
-          <c:val>
-            <c:numRef>
-              <c:f>Sheet1!$B$2:$B$4</c:f>
-              <c:numCache>
-                <c:formatCode>General</c:formatCode>
-                <c:ptCount val="3"/>
-                <c:pt idx="0">
-                  <c:v>78</c:v>
-                </c:pt>
-                <c:pt idx="1">
-                  <c:v>86</c:v>
-                </c:pt>
-                <c:pt idx="2">
-                  <c:v>93</c:v>
-                </c:pt>
-              </c:numCache>
-            </c:numRef>
-          </c:val>
-        </c:ser>
-        <c:dLbls>
-          <c:numFmt formatCode="#,##0" sourceLinked="0"/>
-          <c:txPr>
-            <a:bodyPr/>
-            <a:lstStyle/>
-            <a:p>
-              <a:pPr>
-                <a:defRPr b="0" i="0" strike="noStrike" sz="1200" u="none">
-                  <a:solidFill>
-                    <a:srgbClr val="000000"/>
-                  </a:solidFill>
-                  <a:latin typeface="Arial"/>
-                </a:defRPr>
-              </a:pPr>
-            </a:p>
-          </c:txPr>
-          <c:showLegendKey val="0"/>
-          <c:showVal val="1"/>
-          <c:showCatName val="0"/>
-          <c:showSerName val="0"/>
-          <c:showPercent val="0"/>
-          <c:showBubbleSize val="0"/>
-          <c:showLeaderLines val="0"/>
-        </c:dLbls>
-        <c:gapWidth val="150"/>
-        <c:overlap val="0"/>
-        <c:axId val="2094734554"/>
-        <c:axId val="2094734552"/>
-        <c:axId val="2094734556"/>
-      </c:barChart>
-      <c:catAx>
-        <c:axId val="2094734554"/>
-        <c:scaling>
-          <c:orientation val="minMax"/>
-        </c:scaling>
-        <c:delete val="0"/>
-        <c:axPos val="b"/>
-        <c:numFmt formatCode="General" sourceLinked="1"/>
-        <c:majorTickMark val="out"/>
-        <c:minorTickMark val="none"/>
-        <c:tickLblPos val="low"/>
-        <c:spPr>
-          <a:ln w="12700" cap="flat">
-            <a:solidFill>
-              <a:srgbClr val="888888"/>
-            </a:solidFill>
-            <a:prstDash val="solid"/>
-            <a:round/>
-          </a:ln>
-        </c:spPr>
-        <c:txPr>
-          <a:bodyPr/>
-          <a:lstStyle/>
-          <a:p>
-            <a:pPr>
-              <a:defRPr sz="1100" b="0" i="0" u="none" strike="noStrike">
-                <a:solidFill>
-                  <a:srgbClr val="111827"/>
-                </a:solidFill>
-                <a:latin typeface="Pretendard"/>
-              </a:defRPr>
-            </a:pPr>
-            <a:endParaRPr lang="en-US"/>
-          </a:p>
-        </c:txPr>
-        <c:crossAx val="2094734552"/>
-        <c:crosses val="autoZero"/>
-        <c:auto val="1"/>
-        <c:lblAlgn val="ctr"/>
-        <c:noMultiLvlLbl val="1"/>
-      </c:catAx>
-      <c:valAx>
-        <c:axId val="2094734552"/>
-        <c:scaling>
-          <c:orientation val="minMax"/>
-        </c:scaling>
-        <c:delete val="0"/>
-        <c:axPos val="l"/>
-        <c:majorGridlines>
-          <c:spPr>
-            <a:ln w="12700" cap="flat">
-              <a:solidFill>
-                <a:srgbClr val="E5E7EB"/>
-              </a:solidFill>
-              <a:prstDash val="solid"/>
-              <a:round/>
-            </a:ln>
-          </c:spPr>
-        </c:majorGridlines>
-        <c:numFmt formatCode="General" sourceLinked="0"/>
-        <c:majorTickMark val="out"/>
-        <c:minorTickMark val="none"/>
-        <c:tickLblPos val="nextTo"/>
-        <c:spPr>
-          <a:ln w="12700" cap="flat">
-            <a:solidFill>
-              <a:srgbClr val="888888"/>
-            </a:solidFill>
-            <a:prstDash val="solid"/>
-            <a:round/>
-          </a:ln>
-        </c:spPr>
-        <c:txPr>
-          <a:bodyPr/>
-          <a:lstStyle/>
-          <a:p>
-            <a:pPr>
-              <a:defRPr sz="1100" b="0" i="0" u="none" strike="noStrike">
-                <a:solidFill>
-                  <a:srgbClr val="4B5563"/>
-                </a:solidFill>
-                <a:latin typeface="Pretendard"/>
-              </a:defRPr>
-            </a:pPr>
-            <a:endParaRPr lang="en-US"/>
-          </a:p>
-        </c:txPr>
-        <c:crossAx val="2094734554"/>
-        <c:crosses val="autoZero"/>
-        <c:crossBetween val="between"/>
-      </c:valAx>
-      <c:spPr>
-        <a:noFill/>
-        <a:ln>
-          <a:noFill/>
-        </a:ln>
-        <a:effectLst/>
-      </c:spPr>
-    </c:plotArea>
     <c:plotVisOnly val="1"/>
     <c:dispBlanksAs val="span"/>
   </c:chart>
@@ -3646,7 +3646,7 @@
       </p:sp>
       <p:sp>
         <p:nvSpPr>
-          <p:cNvPr id="4" name="Text 2"/>
+          <p:cNvPr id="4" name="mdpr:mdpr-design-grammar-b3a462:title:__title:mdpr-design-grammar-b3a462"/>
           <p:cNvSpPr txBox="1"/>
           <p:nvPr/>
         </p:nvSpPr>
@@ -3824,7 +3824,7 @@
       </p:sp>
       <p:sp>
         <p:nvSpPr>
-          <p:cNvPr id="6" name="Text 4"/>
+          <p:cNvPr id="6" name="mdpr:2-2-a9df10:title:__title:2-2-a9df10"/>
           <p:cNvSpPr txBox="1"/>
           <p:nvPr/>
         </p:nvSpPr>
@@ -3866,7 +3866,7 @@
       </p:sp>
       <p:sp>
         <p:nvSpPr>
-          <p:cNvPr id="7" name="Text 5"/>
+          <p:cNvPr id="7" name="mdpr:2-2-a9df10:left:block-10-chunk-2"/>
           <p:cNvSpPr txBox="1"/>
           <p:nvPr/>
         </p:nvSpPr>
@@ -3925,7 +3925,7 @@
       </p:sp>
       <p:sp>
         <p:nvSpPr>
-          <p:cNvPr id="8" name="Text 6"/>
+          <p:cNvPr id="8" name="mdpr:2-2-a9df10:right:block-10-chunk-2"/>
           <p:cNvSpPr txBox="1"/>
           <p:nvPr/>
         </p:nvSpPr>
@@ -4066,7 +4066,7 @@
       </p:sp>
       <p:sp>
         <p:nvSpPr>
-          <p:cNvPr id="4" name="Text 2"/>
+          <p:cNvPr id="4" name="mdpr:pipeline-diagram-51792c:title:__title:pipeline-diagram-51792c"/>
           <p:cNvSpPr txBox="1"/>
           <p:nvPr/>
         </p:nvSpPr>
@@ -5364,117 +5364,9 @@
           </a:ln>
         </p:spPr>
       </p:sp>
-      <p:sp>
-        <p:nvSpPr>
-          <p:cNvPr id="4" name="Shape 2"/>
-          <p:cNvSpPr/>
-          <p:nvPr/>
-        </p:nvSpPr>
-        <p:spPr>
-          <a:xfrm>
-            <a:off x="822960" y="1463040"/>
-            <a:ext cx="73152" cy="1920240"/>
-          </a:xfrm>
-          <a:prstGeom prst="rect">
-            <a:avLst/>
-          </a:prstGeom>
-          <a:solidFill>
-            <a:srgbClr val="111827"/>
-          </a:solidFill>
-          <a:ln w="12700">
-            <a:solidFill>
-              <a:srgbClr val="111827">
-                <a:alpha val="0"/>
-              </a:srgbClr>
-            </a:solidFill>
-            <a:prstDash val="solid"/>
-          </a:ln>
-        </p:spPr>
-      </p:sp>
-      <p:sp>
-        <p:nvSpPr>
-          <p:cNvPr id="5" name="Shape 3"/>
-          <p:cNvSpPr/>
-          <p:nvPr/>
-        </p:nvSpPr>
-        <p:spPr>
-          <a:xfrm>
-            <a:off x="6309360" y="1463040"/>
-            <a:ext cx="73152" cy="1920240"/>
-          </a:xfrm>
-          <a:prstGeom prst="rect">
-            <a:avLst/>
-          </a:prstGeom>
-          <a:solidFill>
-            <a:srgbClr val="E5E7EB"/>
-          </a:solidFill>
-          <a:ln w="12700">
-            <a:solidFill>
-              <a:srgbClr val="E5E7EB">
-                <a:alpha val="0"/>
-              </a:srgbClr>
-            </a:solidFill>
-            <a:prstDash val="solid"/>
-          </a:ln>
-        </p:spPr>
-      </p:sp>
-      <p:sp>
-        <p:nvSpPr>
-          <p:cNvPr id="6" name="Shape 4"/>
-          <p:cNvSpPr/>
-          <p:nvPr/>
-        </p:nvSpPr>
-        <p:spPr>
-          <a:xfrm>
-            <a:off x="822960" y="3749040"/>
-            <a:ext cx="73152" cy="1920240"/>
-          </a:xfrm>
-          <a:prstGeom prst="rect">
-            <a:avLst/>
-          </a:prstGeom>
-          <a:solidFill>
-            <a:srgbClr val="111827"/>
-          </a:solidFill>
-          <a:ln w="12700">
-            <a:solidFill>
-              <a:srgbClr val="111827">
-                <a:alpha val="0"/>
-              </a:srgbClr>
-            </a:solidFill>
-            <a:prstDash val="solid"/>
-          </a:ln>
-        </p:spPr>
-      </p:sp>
-      <p:sp>
-        <p:nvSpPr>
-          <p:cNvPr id="7" name="Shape 5"/>
-          <p:cNvSpPr/>
-          <p:nvPr/>
-        </p:nvSpPr>
-        <p:spPr>
-          <a:xfrm>
-            <a:off x="6309360" y="3749040"/>
-            <a:ext cx="73152" cy="1920240"/>
-          </a:xfrm>
-          <a:prstGeom prst="rect">
-            <a:avLst/>
-          </a:prstGeom>
-          <a:solidFill>
-            <a:srgbClr val="E5E7EB"/>
-          </a:solidFill>
-          <a:ln w="12700">
-            <a:solidFill>
-              <a:srgbClr val="E5E7EB">
-                <a:alpha val="0"/>
-              </a:srgbClr>
-            </a:solidFill>
-            <a:prstDash val="solid"/>
-          </a:ln>
-        </p:spPr>
-      </p:sp>
       <p:pic>
         <p:nvPicPr>
-          <p:cNvPr id="8" name="Image 0" descr="preencoded.png">    </p:cNvPr>
+          <p:cNvPr id="4" name="Image 0" descr="preencoded.png">    </p:cNvPr>
           <p:cNvPicPr>
             <a:picLocks noChangeAspect="1"/>
           </p:cNvPicPr>
@@ -5504,7 +5396,7 @@
       </p:pic>
       <p:pic>
         <p:nvPicPr>
-          <p:cNvPr id="9" name="Image 1" descr="preencoded.png">    </p:cNvPr>
+          <p:cNvPr id="5" name="Image 1" descr="preencoded.png">    </p:cNvPr>
           <p:cNvPicPr>
             <a:picLocks noChangeAspect="1"/>
           </p:cNvPicPr>
@@ -5534,7 +5426,7 @@
       </p:pic>
       <p:pic>
         <p:nvPicPr>
-          <p:cNvPr id="10" name="Image 2" descr="preencoded.png">    </p:cNvPr>
+          <p:cNvPr id="6" name="Image 2" descr="preencoded.png">    </p:cNvPr>
           <p:cNvPicPr>
             <a:picLocks noChangeAspect="1"/>
           </p:cNvPicPr>
@@ -5564,7 +5456,7 @@
       </p:pic>
       <p:pic>
         <p:nvPicPr>
-          <p:cNvPr id="11" name="Image 3" descr="preencoded.png">    </p:cNvPr>
+          <p:cNvPr id="7" name="Image 3" descr="preencoded.png">    </p:cNvPr>
           <p:cNvPicPr>
             <a:picLocks noChangeAspect="1"/>
           </p:cNvPicPr>
@@ -5594,7 +5486,115 @@
       </p:pic>
       <p:sp>
         <p:nvSpPr>
-          <p:cNvPr id="12" name="Text 6"/>
+          <p:cNvPr id="8" name="Shape 2"/>
+          <p:cNvSpPr/>
+          <p:nvPr/>
+        </p:nvSpPr>
+        <p:spPr>
+          <a:xfrm>
+            <a:off x="822960" y="1463040"/>
+            <a:ext cx="73152" cy="1920240"/>
+          </a:xfrm>
+          <a:prstGeom prst="rect">
+            <a:avLst/>
+          </a:prstGeom>
+          <a:solidFill>
+            <a:srgbClr val="111827"/>
+          </a:solidFill>
+          <a:ln w="12700">
+            <a:solidFill>
+              <a:srgbClr val="111827">
+                <a:alpha val="0"/>
+              </a:srgbClr>
+            </a:solidFill>
+            <a:prstDash val="solid"/>
+          </a:ln>
+        </p:spPr>
+      </p:sp>
+      <p:sp>
+        <p:nvSpPr>
+          <p:cNvPr id="9" name="Shape 3"/>
+          <p:cNvSpPr/>
+          <p:nvPr/>
+        </p:nvSpPr>
+        <p:spPr>
+          <a:xfrm>
+            <a:off x="6309360" y="1463040"/>
+            <a:ext cx="73152" cy="1920240"/>
+          </a:xfrm>
+          <a:prstGeom prst="rect">
+            <a:avLst/>
+          </a:prstGeom>
+          <a:solidFill>
+            <a:srgbClr val="E5E7EB"/>
+          </a:solidFill>
+          <a:ln w="12700">
+            <a:solidFill>
+              <a:srgbClr val="E5E7EB">
+                <a:alpha val="0"/>
+              </a:srgbClr>
+            </a:solidFill>
+            <a:prstDash val="solid"/>
+          </a:ln>
+        </p:spPr>
+      </p:sp>
+      <p:sp>
+        <p:nvSpPr>
+          <p:cNvPr id="10" name="Shape 4"/>
+          <p:cNvSpPr/>
+          <p:nvPr/>
+        </p:nvSpPr>
+        <p:spPr>
+          <a:xfrm>
+            <a:off x="822960" y="3749040"/>
+            <a:ext cx="73152" cy="1920240"/>
+          </a:xfrm>
+          <a:prstGeom prst="rect">
+            <a:avLst/>
+          </a:prstGeom>
+          <a:solidFill>
+            <a:srgbClr val="111827"/>
+          </a:solidFill>
+          <a:ln w="12700">
+            <a:solidFill>
+              <a:srgbClr val="111827">
+                <a:alpha val="0"/>
+              </a:srgbClr>
+            </a:solidFill>
+            <a:prstDash val="solid"/>
+          </a:ln>
+        </p:spPr>
+      </p:sp>
+      <p:sp>
+        <p:nvSpPr>
+          <p:cNvPr id="11" name="Shape 5"/>
+          <p:cNvSpPr/>
+          <p:nvPr/>
+        </p:nvSpPr>
+        <p:spPr>
+          <a:xfrm>
+            <a:off x="6309360" y="3749040"/>
+            <a:ext cx="73152" cy="1920240"/>
+          </a:xfrm>
+          <a:prstGeom prst="rect">
+            <a:avLst/>
+          </a:prstGeom>
+          <a:solidFill>
+            <a:srgbClr val="E5E7EB"/>
+          </a:solidFill>
+          <a:ln w="12700">
+            <a:solidFill>
+              <a:srgbClr val="E5E7EB">
+                <a:alpha val="0"/>
+              </a:srgbClr>
+            </a:solidFill>
+            <a:prstDash val="solid"/>
+          </a:ln>
+        </p:spPr>
+      </p:sp>
+      <p:sp>
+        <p:nvSpPr>
+          <p:cNvPr id="12" name="mdpr:1-2-e3669a:title:__title:1-2-e3669a"/>
           <p:cNvSpPr txBox="1"/>
           <p:nvPr/>
         </p:nvSpPr>
@@ -5693,7 +5693,7 @@
       </p:pic>
       <p:sp>
         <p:nvSpPr>
-          <p:cNvPr id="15" name="Text 8"/>
+          <p:cNvPr id="15" name="mdpr:1-2-e3669a:item-1:block-15-chunk-1"/>
           <p:cNvSpPr txBox="1"/>
           <p:nvPr/>
         </p:nvSpPr>
@@ -5809,7 +5809,7 @@
       </p:pic>
       <p:sp>
         <p:nvSpPr>
-          <p:cNvPr id="18" name="Text 10"/>
+          <p:cNvPr id="18" name="mdpr:1-2-e3669a:item-2:block-15-chunk-1"/>
           <p:cNvSpPr txBox="1"/>
           <p:nvPr/>
         </p:nvSpPr>
@@ -5925,7 +5925,7 @@
       </p:pic>
       <p:sp>
         <p:nvSpPr>
-          <p:cNvPr id="21" name="Text 12"/>
+          <p:cNvPr id="21" name="mdpr:1-2-e3669a:item-3:block-15-chunk-1"/>
           <p:cNvSpPr txBox="1"/>
           <p:nvPr/>
         </p:nvSpPr>
@@ -6041,7 +6041,7 @@
       </p:pic>
       <p:sp>
         <p:nvSpPr>
-          <p:cNvPr id="24" name="Text 14"/>
+          <p:cNvPr id="24" name="mdpr:1-2-e3669a:item-4:block-15-chunk-1"/>
           <p:cNvSpPr txBox="1"/>
           <p:nvPr/>
         </p:nvSpPr>
@@ -6236,7 +6236,7 @@
       </p:sp>
       <p:sp>
         <p:nvSpPr>
-          <p:cNvPr id="6" name="Text 4"/>
+          <p:cNvPr id="6" name="mdpr:2-2-c23e9b:title:__title:2-2-c23e9b"/>
           <p:cNvSpPr txBox="1"/>
           <p:nvPr/>
         </p:nvSpPr>
@@ -6278,7 +6278,7 @@
       </p:sp>
       <p:sp>
         <p:nvSpPr>
-          <p:cNvPr id="7" name="Text 5"/>
+          <p:cNvPr id="7" name="mdpr:2-2-c23e9b:left:block-15-chunk-2"/>
           <p:cNvSpPr txBox="1"/>
           <p:nvPr/>
         </p:nvSpPr>
@@ -6337,7 +6337,7 @@
       </p:sp>
       <p:sp>
         <p:nvSpPr>
-          <p:cNvPr id="8" name="Text 6"/>
+          <p:cNvPr id="8" name="mdpr:2-2-c23e9b:right:block-15-chunk-2"/>
           <p:cNvSpPr txBox="1"/>
           <p:nvPr/>
         </p:nvSpPr>
@@ -6388,7 +6388,7 @@
                 <a:ea typeface="Pretendard" pitchFamily="34" charset="-122"/>
                 <a:cs typeface="Pretendard" pitchFamily="34" charset="-120"/>
               </a:rPr>
-              <a:t>  clean-card, glass-surface, newmorphic-panel, data-rail, minimal-rule.</a:t>
+              <a:t>  skeuomorphic-bevel, glassmorphism-surface, newmorphic-panel, clay-blob, bento-tile, liquid-lens.</a:t>
             </a:r>
             <a:endParaRPr lang="en-US" sz="2200" dirty="0"/>
           </a:p>
@@ -6508,7 +6508,7 @@
       </p:pic>
       <p:sp>
         <p:nvSpPr>
-          <p:cNvPr id="5" name="Text 2"/>
+          <p:cNvPr id="5" name="mdpr:table-coherence-2f9a7b:title:__title:table-coherence-2f9a7b"/>
           <p:cNvSpPr txBox="1"/>
           <p:nvPr/>
         </p:nvSpPr>
@@ -6550,7 +6550,7 @@
       </p:sp>
       <p:graphicFrame>
         <p:nvGraphicFramePr>
-          <p:cNvPr id="15" name="Table 0"/>
+          <p:cNvPr id="15" name="mdpr:table-coherence-2f9a7b:table:block-17"/>
           <p:cNvGraphicFramePr>
             <a:graphicFrameLocks noGrp="1"/>
           </p:cNvGraphicFramePr>
@@ -6729,7 +6729,7 @@
                           <a:ea typeface="Pretendard" pitchFamily="34" charset="-122"/>
                           <a:cs typeface="Pretendard" pitchFamily="34" charset="-120"/>
                         </a:rPr>
-                        <a:t>QA signal</a:t>
+                        <a:t>Validation signal</a:t>
                       </a:r>
                       <a:endParaRPr lang="en-US" sz="1800" dirty="0">
                         <a:latin typeface="Pretendard" charset="0"/>
@@ -7685,36 +7685,9 @@
           </a:ln>
         </p:spPr>
       </p:sp>
-      <p:sp>
-        <p:nvSpPr>
-          <p:cNvPr id="4" name="Shape 2"/>
-          <p:cNvSpPr/>
-          <p:nvPr/>
-        </p:nvSpPr>
-        <p:spPr>
-          <a:xfrm>
-            <a:off x="841248" y="1517904"/>
-            <a:ext cx="3822192" cy="73152"/>
-          </a:xfrm>
-          <a:prstGeom prst="rect">
-            <a:avLst/>
-          </a:prstGeom>
-          <a:solidFill>
-            <a:srgbClr val="111827"/>
-          </a:solidFill>
-          <a:ln w="12700">
-            <a:solidFill>
-              <a:srgbClr val="111827">
-                <a:alpha val="0"/>
-              </a:srgbClr>
-            </a:solidFill>
-            <a:prstDash val="solid"/>
-          </a:ln>
-        </p:spPr>
-      </p:sp>
       <p:pic>
         <p:nvPicPr>
-          <p:cNvPr id="5" name="Image 0" descr="preencoded.png">    </p:cNvPr>
+          <p:cNvPr id="4" name="Image 0" descr="preencoded.png">    </p:cNvPr>
           <p:cNvPicPr>
             <a:picLocks noChangeAspect="1"/>
           </p:cNvPicPr>
@@ -7744,7 +7717,34 @@
       </p:pic>
       <p:sp>
         <p:nvSpPr>
-          <p:cNvPr id="6" name="Text 3"/>
+          <p:cNvPr id="5" name="Shape 2"/>
+          <p:cNvSpPr/>
+          <p:nvPr/>
+        </p:nvSpPr>
+        <p:spPr>
+          <a:xfrm>
+            <a:off x="841248" y="1517904"/>
+            <a:ext cx="3822192" cy="73152"/>
+          </a:xfrm>
+          <a:prstGeom prst="rect">
+            <a:avLst/>
+          </a:prstGeom>
+          <a:solidFill>
+            <a:srgbClr val="111827"/>
+          </a:solidFill>
+          <a:ln w="12700">
+            <a:solidFill>
+              <a:srgbClr val="111827">
+                <a:alpha val="0"/>
+              </a:srgbClr>
+            </a:solidFill>
+            <a:prstDash val="solid"/>
+          </a:ln>
+        </p:spPr>
+      </p:sp>
+      <p:sp>
+        <p:nvSpPr>
+          <p:cNvPr id="6" name="mdpr:1-2-2ff3f0:title:__title:1-2-2ff3f0"/>
           <p:cNvSpPr txBox="1"/>
           <p:nvPr/>
         </p:nvSpPr>
@@ -7786,7 +7786,7 @@
       </p:sp>
       <p:sp>
         <p:nvSpPr>
-          <p:cNvPr id="7" name="Text 4"/>
+          <p:cNvPr id="7" name="mdpr:1-2-2ff3f0:body:block-19"/>
           <p:cNvSpPr txBox="1"/>
           <p:nvPr/>
         </p:nvSpPr>
@@ -8053,7 +8053,7 @@
       </p:pic>
       <p:sp>
         <p:nvSpPr>
-          <p:cNvPr id="5" name="Text 2"/>
+          <p:cNvPr id="5" name="mdpr:2-2-542095:title:__title:2-2-542095"/>
           <p:cNvSpPr txBox="1"/>
           <p:nvPr/>
         </p:nvSpPr>
@@ -8095,7 +8095,7 @@
       </p:sp>
       <p:graphicFrame>
         <p:nvGraphicFramePr>
-          <p:cNvPr id="17" name="Table 0"/>
+          <p:cNvPr id="17" name="mdpr:2-2-542095:table:block-21"/>
           <p:cNvGraphicFramePr>
             <a:graphicFrameLocks noGrp="1"/>
           </p:cNvGraphicFramePr>
@@ -9050,7 +9050,7 @@
       </p:pic>
       <p:sp>
         <p:nvSpPr>
-          <p:cNvPr id="5" name="Text 2"/>
+          <p:cNvPr id="5" name="mdpr:1-2-b8955f:title:__title:1-2-b8955f"/>
           <p:cNvSpPr txBox="1"/>
           <p:nvPr/>
         </p:nvSpPr>
@@ -9907,7 +9907,7 @@
       </p:pic>
       <p:sp>
         <p:nvSpPr>
-          <p:cNvPr id="5" name="Text 2"/>
+          <p:cNvPr id="5" name="mdpr:2-2-4dc4c1:title:__title:2-2-4dc4c1"/>
           <p:cNvSpPr txBox="1"/>
           <p:nvPr/>
         </p:nvSpPr>
@@ -10669,9 +10669,99 @@
           </a:ln>
         </p:spPr>
       </p:sp>
-      <p:sp>
-        <p:nvSpPr>
-          <p:cNvPr id="4" name="Shape 2"/>
+      <p:pic>
+        <p:nvPicPr>
+          <p:cNvPr id="4" name="Image 0" descr="preencoded.png">    </p:cNvPr>
+          <p:cNvPicPr>
+            <a:picLocks noChangeAspect="1"/>
+          </p:cNvPicPr>
+          <p:nvPr/>
+        </p:nvPicPr>
+        <p:blipFill>
+          <a:blip r:embed="rId1">
+            <a:extLst>
+              <a:ext uri="{96DAC541-7B7A-43D3-8B79-37D633B846F1}">
+                <asvg:svgBlip xmlns:asvg="http://schemas.microsoft.com/office/drawing/2016/SVG/main" r:embed="rId2"/>
+              </a:ext>
+            </a:extLst>
+          </a:blip>
+          <a:stretch>
+            <a:fillRect/>
+          </a:stretch>
+        </p:blipFill>
+        <p:spPr>
+          <a:xfrm>
+            <a:off x="914400" y="1865376"/>
+            <a:ext cx="10241280" cy="1024128"/>
+          </a:xfrm>
+          <a:prstGeom prst="rect">
+            <a:avLst/>
+          </a:prstGeom>
+        </p:spPr>
+      </p:pic>
+      <p:pic>
+        <p:nvPicPr>
+          <p:cNvPr id="5" name="Image 1" descr="preencoded.png">    </p:cNvPr>
+          <p:cNvPicPr>
+            <a:picLocks noChangeAspect="1"/>
+          </p:cNvPicPr>
+          <p:nvPr/>
+        </p:nvPicPr>
+        <p:blipFill>
+          <a:blip r:embed="rId3">
+            <a:extLst>
+              <a:ext uri="{96DAC541-7B7A-43D3-8B79-37D633B846F1}">
+                <asvg:svgBlip xmlns:asvg="http://schemas.microsoft.com/office/drawing/2016/SVG/main" r:embed="rId4"/>
+              </a:ext>
+            </a:extLst>
+          </a:blip>
+          <a:stretch>
+            <a:fillRect/>
+          </a:stretch>
+        </p:blipFill>
+        <p:spPr>
+          <a:xfrm>
+            <a:off x="914400" y="3191256"/>
+            <a:ext cx="10241280" cy="1024128"/>
+          </a:xfrm>
+          <a:prstGeom prst="rect">
+            <a:avLst/>
+          </a:prstGeom>
+        </p:spPr>
+      </p:pic>
+      <p:pic>
+        <p:nvPicPr>
+          <p:cNvPr id="6" name="Image 2" descr="preencoded.png">    </p:cNvPr>
+          <p:cNvPicPr>
+            <a:picLocks noChangeAspect="1"/>
+          </p:cNvPicPr>
+          <p:nvPr/>
+        </p:nvPicPr>
+        <p:blipFill>
+          <a:blip r:embed="rId5">
+            <a:extLst>
+              <a:ext uri="{96DAC541-7B7A-43D3-8B79-37D633B846F1}">
+                <asvg:svgBlip xmlns:asvg="http://schemas.microsoft.com/office/drawing/2016/SVG/main" r:embed="rId6"/>
+              </a:ext>
+            </a:extLst>
+          </a:blip>
+          <a:stretch>
+            <a:fillRect/>
+          </a:stretch>
+        </p:blipFill>
+        <p:spPr>
+          <a:xfrm>
+            <a:off x="914400" y="4507992"/>
+            <a:ext cx="10241280" cy="1024128"/>
+          </a:xfrm>
+          <a:prstGeom prst="rect">
+            <a:avLst/>
+          </a:prstGeom>
+        </p:spPr>
+      </p:pic>
+      <p:sp>
+        <p:nvSpPr>
+          <p:cNvPr id="7" name="Shape 2"/>
           <p:cNvSpPr/>
           <p:nvPr/>
         </p:nvSpPr>
@@ -10700,7 +10790,7 @@
       </p:sp>
       <p:sp>
         <p:nvSpPr>
-          <p:cNvPr id="5" name="Shape 3"/>
+          <p:cNvPr id="8" name="Shape 3"/>
           <p:cNvSpPr/>
           <p:nvPr/>
         </p:nvSpPr>
@@ -10727,7 +10817,7 @@
       </p:sp>
       <p:sp>
         <p:nvSpPr>
-          <p:cNvPr id="6" name="Shape 4"/>
+          <p:cNvPr id="9" name="Shape 4"/>
           <p:cNvSpPr/>
           <p:nvPr/>
         </p:nvSpPr>
@@ -10754,7 +10844,7 @@
       </p:sp>
       <p:sp>
         <p:nvSpPr>
-          <p:cNvPr id="7" name="Shape 5"/>
+          <p:cNvPr id="10" name="Shape 5"/>
           <p:cNvSpPr/>
           <p:nvPr/>
         </p:nvSpPr>
@@ -10779,99 +10869,9 @@
           </a:ln>
         </p:spPr>
       </p:sp>
-      <p:pic>
-        <p:nvPicPr>
-          <p:cNvPr id="8" name="Image 0" descr="preencoded.png">    </p:cNvPr>
-          <p:cNvPicPr>
-            <a:picLocks noChangeAspect="1"/>
-          </p:cNvPicPr>
-          <p:nvPr/>
-        </p:nvPicPr>
-        <p:blipFill>
-          <a:blip r:embed="rId1">
-            <a:extLst>
-              <a:ext uri="{96DAC541-7B7A-43D3-8B79-37D633B846F1}">
-                <asvg:svgBlip xmlns:asvg="http://schemas.microsoft.com/office/drawing/2016/SVG/main" r:embed="rId2"/>
-              </a:ext>
-            </a:extLst>
-          </a:blip>
-          <a:stretch>
-            <a:fillRect/>
-          </a:stretch>
-        </p:blipFill>
-        <p:spPr>
-          <a:xfrm>
-            <a:off x="914400" y="1865376"/>
-            <a:ext cx="10241280" cy="1024128"/>
-          </a:xfrm>
-          <a:prstGeom prst="rect">
-            <a:avLst/>
-          </a:prstGeom>
-        </p:spPr>
-      </p:pic>
-      <p:pic>
-        <p:nvPicPr>
-          <p:cNvPr id="9" name="Image 1" descr="preencoded.png">    </p:cNvPr>
-          <p:cNvPicPr>
-            <a:picLocks noChangeAspect="1"/>
-          </p:cNvPicPr>
-          <p:nvPr/>
-        </p:nvPicPr>
-        <p:blipFill>
-          <a:blip r:embed="rId3">
-            <a:extLst>
-              <a:ext uri="{96DAC541-7B7A-43D3-8B79-37D633B846F1}">
-                <asvg:svgBlip xmlns:asvg="http://schemas.microsoft.com/office/drawing/2016/SVG/main" r:embed="rId4"/>
-              </a:ext>
-            </a:extLst>
-          </a:blip>
-          <a:stretch>
-            <a:fillRect/>
-          </a:stretch>
-        </p:blipFill>
-        <p:spPr>
-          <a:xfrm>
-            <a:off x="914400" y="3191256"/>
-            <a:ext cx="10241280" cy="1024128"/>
-          </a:xfrm>
-          <a:prstGeom prst="rect">
-            <a:avLst/>
-          </a:prstGeom>
-        </p:spPr>
-      </p:pic>
-      <p:pic>
-        <p:nvPicPr>
-          <p:cNvPr id="10" name="Image 2" descr="preencoded.png">    </p:cNvPr>
-          <p:cNvPicPr>
-            <a:picLocks noChangeAspect="1"/>
-          </p:cNvPicPr>
-          <p:nvPr/>
-        </p:nvPicPr>
-        <p:blipFill>
-          <a:blip r:embed="rId5">
-            <a:extLst>
-              <a:ext uri="{96DAC541-7B7A-43D3-8B79-37D633B846F1}">
-                <asvg:svgBlip xmlns:asvg="http://schemas.microsoft.com/office/drawing/2016/SVG/main" r:embed="rId6"/>
-              </a:ext>
-            </a:extLst>
-          </a:blip>
-          <a:stretch>
-            <a:fillRect/>
-          </a:stretch>
-        </p:blipFill>
-        <p:spPr>
-          <a:xfrm>
-            <a:off x="914400" y="4507992"/>
-            <a:ext cx="10241280" cy="1024128"/>
-          </a:xfrm>
-          <a:prstGeom prst="rect">
-            <a:avLst/>
-          </a:prstGeom>
-        </p:spPr>
-      </p:pic>
-      <p:sp>
-        <p:nvSpPr>
-          <p:cNvPr id="11" name="Text 6"/>
+      <p:sp>
+        <p:nvSpPr>
+          <p:cNvPr id="11" name="mdpr:1-2-ea42c8:title:__title:1-2-ea42c8"/>
           <p:cNvSpPr txBox="1"/>
           <p:nvPr/>
         </p:nvSpPr>
@@ -10970,7 +10970,7 @@
       </p:pic>
       <p:sp>
         <p:nvSpPr>
-          <p:cNvPr id="14" name="Text 8"/>
+          <p:cNvPr id="14" name="mdpr:1-2-ea42c8:item-1:block-27-chunk-1"/>
           <p:cNvSpPr txBox="1"/>
           <p:nvPr/>
         </p:nvSpPr>
@@ -11086,7 +11086,7 @@
       </p:pic>
       <p:sp>
         <p:nvSpPr>
-          <p:cNvPr id="17" name="Text 10"/>
+          <p:cNvPr id="17" name="mdpr:1-2-ea42c8:item-2:block-27-chunk-1"/>
           <p:cNvSpPr txBox="1"/>
           <p:nvPr/>
         </p:nvSpPr>
@@ -11202,7 +11202,7 @@
       </p:pic>
       <p:sp>
         <p:nvSpPr>
-          <p:cNvPr id="20" name="Text 12"/>
+          <p:cNvPr id="20" name="mdpr:1-2-ea42c8:item-3:block-27-chunk-1"/>
           <p:cNvSpPr txBox="1"/>
           <p:nvPr/>
         </p:nvSpPr>
@@ -11804,7 +11804,7 @@
       </p:sp>
       <p:sp>
         <p:nvSpPr>
-          <p:cNvPr id="21" name="Text 19"/>
+          <p:cNvPr id="21" name="mdpr:1-2-0772f8:title:__title:1-2-0772f8"/>
           <p:cNvSpPr txBox="1"/>
           <p:nvPr/>
         </p:nvSpPr>
@@ -11846,7 +11846,7 @@
       </p:sp>
       <p:sp>
         <p:nvSpPr>
-          <p:cNvPr id="22" name="Text 20"/>
+          <p:cNvPr id="22" name="mdpr:1-2-0772f8:toc-item-1:toc-item-1"/>
           <p:cNvSpPr txBox="1"/>
           <p:nvPr/>
         </p:nvSpPr>
@@ -11888,7 +11888,7 @@
       </p:sp>
       <p:sp>
         <p:nvSpPr>
-          <p:cNvPr id="23" name="Text 21"/>
+          <p:cNvPr id="23" name="mdpr:1-2-0772f8:toc-item-2:toc-item-2"/>
           <p:cNvSpPr txBox="1"/>
           <p:nvPr/>
         </p:nvSpPr>
@@ -11930,7 +11930,7 @@
       </p:sp>
       <p:sp>
         <p:nvSpPr>
-          <p:cNvPr id="24" name="Text 22"/>
+          <p:cNvPr id="24" name="mdpr:1-2-0772f8:toc-item-3:toc-item-3"/>
           <p:cNvSpPr txBox="1"/>
           <p:nvPr/>
         </p:nvSpPr>
@@ -11972,7 +11972,7 @@
       </p:sp>
       <p:sp>
         <p:nvSpPr>
-          <p:cNvPr id="25" name="Text 23"/>
+          <p:cNvPr id="25" name="mdpr:1-2-0772f8:toc-item-4:toc-item-4"/>
           <p:cNvSpPr txBox="1"/>
           <p:nvPr/>
         </p:nvSpPr>
@@ -12014,7 +12014,7 @@
       </p:sp>
       <p:sp>
         <p:nvSpPr>
-          <p:cNvPr id="26" name="Text 24"/>
+          <p:cNvPr id="26" name="mdpr:1-2-0772f8:toc-item-5:toc-item-5"/>
           <p:cNvSpPr txBox="1"/>
           <p:nvPr/>
         </p:nvSpPr>
@@ -12056,7 +12056,7 @@
       </p:sp>
       <p:sp>
         <p:nvSpPr>
-          <p:cNvPr id="27" name="Text 25"/>
+          <p:cNvPr id="27" name="mdpr:1-2-0772f8:toc-item-6:toc-item-6"/>
           <p:cNvSpPr txBox="1"/>
           <p:nvPr/>
         </p:nvSpPr>
@@ -12098,7 +12098,7 @@
       </p:sp>
       <p:sp>
         <p:nvSpPr>
-          <p:cNvPr id="28" name="Text 26"/>
+          <p:cNvPr id="28" name="mdpr:1-2-0772f8:toc-item-7:toc-item-7"/>
           <p:cNvSpPr txBox="1"/>
           <p:nvPr/>
         </p:nvSpPr>
@@ -12140,7 +12140,7 @@
       </p:sp>
       <p:sp>
         <p:nvSpPr>
-          <p:cNvPr id="29" name="Text 27"/>
+          <p:cNvPr id="29" name="mdpr:1-2-0772f8:toc-item-8:toc-item-8"/>
           <p:cNvSpPr txBox="1"/>
           <p:nvPr/>
         </p:nvSpPr>
@@ -12182,7 +12182,7 @@
       </p:sp>
       <p:sp>
         <p:nvSpPr>
-          <p:cNvPr id="30" name="Text 28"/>
+          <p:cNvPr id="30" name="mdpr:1-2-0772f8:toc-item-9:toc-item-9"/>
           <p:cNvSpPr txBox="1"/>
           <p:nvPr/>
         </p:nvSpPr>
@@ -12224,7 +12224,7 @@
       </p:sp>
       <p:sp>
         <p:nvSpPr>
-          <p:cNvPr id="31" name="Text 29"/>
+          <p:cNvPr id="31" name="mdpr:1-2-0772f8:toc-item-10:toc-item-10"/>
           <p:cNvSpPr txBox="1"/>
           <p:nvPr/>
         </p:nvSpPr>
@@ -12266,7 +12266,7 @@
       </p:sp>
       <p:sp>
         <p:nvSpPr>
-          <p:cNvPr id="32" name="Text 30"/>
+          <p:cNvPr id="32" name="mdpr:1-2-0772f8:toc-item-11:toc-item-11"/>
           <p:cNvSpPr txBox="1"/>
           <p:nvPr/>
         </p:nvSpPr>
@@ -12308,7 +12308,7 @@
       </p:sp>
       <p:sp>
         <p:nvSpPr>
-          <p:cNvPr id="33" name="Text 31"/>
+          <p:cNvPr id="33" name="mdpr:1-2-0772f8:toc-item-12:toc-item-12"/>
           <p:cNvSpPr txBox="1"/>
           <p:nvPr/>
         </p:nvSpPr>
@@ -12350,7 +12350,7 @@
       </p:sp>
       <p:sp>
         <p:nvSpPr>
-          <p:cNvPr id="34" name="Text 32"/>
+          <p:cNvPr id="34" name="mdpr:1-2-0772f8:toc-item-13:toc-item-13"/>
           <p:cNvSpPr txBox="1"/>
           <p:nvPr/>
         </p:nvSpPr>
@@ -12392,7 +12392,7 @@
       </p:sp>
       <p:sp>
         <p:nvSpPr>
-          <p:cNvPr id="35" name="Text 33"/>
+          <p:cNvPr id="35" name="mdpr:1-2-0772f8:toc-item-14:toc-item-14"/>
           <p:cNvSpPr txBox="1"/>
           <p:nvPr/>
         </p:nvSpPr>
@@ -12570,7 +12570,7 @@
       </p:sp>
       <p:sp>
         <p:nvSpPr>
-          <p:cNvPr id="6" name="Text 4"/>
+          <p:cNvPr id="6" name="mdpr:2-2-4f71ba:title:__title:2-2-4f71ba"/>
           <p:cNvSpPr txBox="1"/>
           <p:nvPr/>
         </p:nvSpPr>
@@ -12612,7 +12612,7 @@
       </p:sp>
       <p:sp>
         <p:nvSpPr>
-          <p:cNvPr id="7" name="Text 5"/>
+          <p:cNvPr id="7" name="mdpr:2-2-4f71ba:left:block-27-chunk-2"/>
           <p:cNvSpPr txBox="1"/>
           <p:nvPr/>
         </p:nvSpPr>
@@ -12671,7 +12671,7 @@
       </p:sp>
       <p:sp>
         <p:nvSpPr>
-          <p:cNvPr id="8" name="Text 6"/>
+          <p:cNvPr id="8" name="mdpr:2-2-4f71ba:right:block-27-chunk-2"/>
           <p:cNvSpPr txBox="1"/>
           <p:nvPr/>
         </p:nvSpPr>
@@ -12810,117 +12810,9 @@
           </a:ln>
         </p:spPr>
       </p:sp>
-      <p:sp>
-        <p:nvSpPr>
-          <p:cNvPr id="4" name="Shape 2"/>
-          <p:cNvSpPr/>
-          <p:nvPr/>
-        </p:nvSpPr>
-        <p:spPr>
-          <a:xfrm>
-            <a:off x="822960" y="1463040"/>
-            <a:ext cx="73152" cy="1920240"/>
-          </a:xfrm>
-          <a:prstGeom prst="rect">
-            <a:avLst/>
-          </a:prstGeom>
-          <a:solidFill>
-            <a:srgbClr val="111827"/>
-          </a:solidFill>
-          <a:ln w="12700">
-            <a:solidFill>
-              <a:srgbClr val="111827">
-                <a:alpha val="0"/>
-              </a:srgbClr>
-            </a:solidFill>
-            <a:prstDash val="solid"/>
-          </a:ln>
-        </p:spPr>
-      </p:sp>
-      <p:sp>
-        <p:nvSpPr>
-          <p:cNvPr id="5" name="Shape 3"/>
-          <p:cNvSpPr/>
-          <p:nvPr/>
-        </p:nvSpPr>
-        <p:spPr>
-          <a:xfrm>
-            <a:off x="6309360" y="1463040"/>
-            <a:ext cx="73152" cy="1920240"/>
-          </a:xfrm>
-          <a:prstGeom prst="rect">
-            <a:avLst/>
-          </a:prstGeom>
-          <a:solidFill>
-            <a:srgbClr val="E5E7EB"/>
-          </a:solidFill>
-          <a:ln w="12700">
-            <a:solidFill>
-              <a:srgbClr val="E5E7EB">
-                <a:alpha val="0"/>
-              </a:srgbClr>
-            </a:solidFill>
-            <a:prstDash val="solid"/>
-          </a:ln>
-        </p:spPr>
-      </p:sp>
-      <p:sp>
-        <p:nvSpPr>
-          <p:cNvPr id="6" name="Shape 4"/>
-          <p:cNvSpPr/>
-          <p:nvPr/>
-        </p:nvSpPr>
-        <p:spPr>
-          <a:xfrm>
-            <a:off x="822960" y="3749040"/>
-            <a:ext cx="73152" cy="1920240"/>
-          </a:xfrm>
-          <a:prstGeom prst="rect">
-            <a:avLst/>
-          </a:prstGeom>
-          <a:solidFill>
-            <a:srgbClr val="111827"/>
-          </a:solidFill>
-          <a:ln w="12700">
-            <a:solidFill>
-              <a:srgbClr val="111827">
-                <a:alpha val="0"/>
-              </a:srgbClr>
-            </a:solidFill>
-            <a:prstDash val="solid"/>
-          </a:ln>
-        </p:spPr>
-      </p:sp>
-      <p:sp>
-        <p:nvSpPr>
-          <p:cNvPr id="7" name="Shape 5"/>
-          <p:cNvSpPr/>
-          <p:nvPr/>
-        </p:nvSpPr>
-        <p:spPr>
-          <a:xfrm>
-            <a:off x="6309360" y="3749040"/>
-            <a:ext cx="73152" cy="1920240"/>
-          </a:xfrm>
-          <a:prstGeom prst="rect">
-            <a:avLst/>
-          </a:prstGeom>
-          <a:solidFill>
-            <a:srgbClr val="E5E7EB"/>
-          </a:solidFill>
-          <a:ln w="12700">
-            <a:solidFill>
-              <a:srgbClr val="E5E7EB">
-                <a:alpha val="0"/>
-              </a:srgbClr>
-            </a:solidFill>
-            <a:prstDash val="solid"/>
-          </a:ln>
-        </p:spPr>
-      </p:sp>
       <p:pic>
         <p:nvPicPr>
-          <p:cNvPr id="8" name="Image 0" descr="preencoded.png">    </p:cNvPr>
+          <p:cNvPr id="4" name="Image 0" descr="preencoded.png">    </p:cNvPr>
           <p:cNvPicPr>
             <a:picLocks noChangeAspect="1"/>
           </p:cNvPicPr>
@@ -12950,7 +12842,7 @@
       </p:pic>
       <p:pic>
         <p:nvPicPr>
-          <p:cNvPr id="9" name="Image 1" descr="preencoded.png">    </p:cNvPr>
+          <p:cNvPr id="5" name="Image 1" descr="preencoded.png">    </p:cNvPr>
           <p:cNvPicPr>
             <a:picLocks noChangeAspect="1"/>
           </p:cNvPicPr>
@@ -12980,7 +12872,7 @@
       </p:pic>
       <p:pic>
         <p:nvPicPr>
-          <p:cNvPr id="10" name="Image 2" descr="preencoded.png">    </p:cNvPr>
+          <p:cNvPr id="6" name="Image 2" descr="preencoded.png">    </p:cNvPr>
           <p:cNvPicPr>
             <a:picLocks noChangeAspect="1"/>
           </p:cNvPicPr>
@@ -13010,7 +12902,7 @@
       </p:pic>
       <p:pic>
         <p:nvPicPr>
-          <p:cNvPr id="11" name="Image 3" descr="preencoded.png">    </p:cNvPr>
+          <p:cNvPr id="7" name="Image 3" descr="preencoded.png">    </p:cNvPr>
           <p:cNvPicPr>
             <a:picLocks noChangeAspect="1"/>
           </p:cNvPicPr>
@@ -13040,7 +12932,115 @@
       </p:pic>
       <p:sp>
         <p:nvSpPr>
-          <p:cNvPr id="12" name="Text 6"/>
+          <p:cNvPr id="8" name="Shape 2"/>
+          <p:cNvSpPr/>
+          <p:nvPr/>
+        </p:nvSpPr>
+        <p:spPr>
+          <a:xfrm>
+            <a:off x="822960" y="1463040"/>
+            <a:ext cx="73152" cy="1920240"/>
+          </a:xfrm>
+          <a:prstGeom prst="rect">
+            <a:avLst/>
+          </a:prstGeom>
+          <a:solidFill>
+            <a:srgbClr val="111827"/>
+          </a:solidFill>
+          <a:ln w="12700">
+            <a:solidFill>
+              <a:srgbClr val="111827">
+                <a:alpha val="0"/>
+              </a:srgbClr>
+            </a:solidFill>
+            <a:prstDash val="solid"/>
+          </a:ln>
+        </p:spPr>
+      </p:sp>
+      <p:sp>
+        <p:nvSpPr>
+          <p:cNvPr id="9" name="Shape 3"/>
+          <p:cNvSpPr/>
+          <p:nvPr/>
+        </p:nvSpPr>
+        <p:spPr>
+          <a:xfrm>
+            <a:off x="6309360" y="1463040"/>
+            <a:ext cx="73152" cy="1920240"/>
+          </a:xfrm>
+          <a:prstGeom prst="rect">
+            <a:avLst/>
+          </a:prstGeom>
+          <a:solidFill>
+            <a:srgbClr val="E5E7EB"/>
+          </a:solidFill>
+          <a:ln w="12700">
+            <a:solidFill>
+              <a:srgbClr val="E5E7EB">
+                <a:alpha val="0"/>
+              </a:srgbClr>
+            </a:solidFill>
+            <a:prstDash val="solid"/>
+          </a:ln>
+        </p:spPr>
+      </p:sp>
+      <p:sp>
+        <p:nvSpPr>
+          <p:cNvPr id="10" name="Shape 4"/>
+          <p:cNvSpPr/>
+          <p:nvPr/>
+        </p:nvSpPr>
+        <p:spPr>
+          <a:xfrm>
+            <a:off x="822960" y="3749040"/>
+            <a:ext cx="73152" cy="1920240"/>
+          </a:xfrm>
+          <a:prstGeom prst="rect">
+            <a:avLst/>
+          </a:prstGeom>
+          <a:solidFill>
+            <a:srgbClr val="111827"/>
+          </a:solidFill>
+          <a:ln w="12700">
+            <a:solidFill>
+              <a:srgbClr val="111827">
+                <a:alpha val="0"/>
+              </a:srgbClr>
+            </a:solidFill>
+            <a:prstDash val="solid"/>
+          </a:ln>
+        </p:spPr>
+      </p:sp>
+      <p:sp>
+        <p:nvSpPr>
+          <p:cNvPr id="11" name="Shape 5"/>
+          <p:cNvSpPr/>
+          <p:nvPr/>
+        </p:nvSpPr>
+        <p:spPr>
+          <a:xfrm>
+            <a:off x="6309360" y="3749040"/>
+            <a:ext cx="73152" cy="1920240"/>
+          </a:xfrm>
+          <a:prstGeom prst="rect">
+            <a:avLst/>
+          </a:prstGeom>
+          <a:solidFill>
+            <a:srgbClr val="E5E7EB"/>
+          </a:solidFill>
+          <a:ln w="12700">
+            <a:solidFill>
+              <a:srgbClr val="E5E7EB">
+                <a:alpha val="0"/>
+              </a:srgbClr>
+            </a:solidFill>
+            <a:prstDash val="solid"/>
+          </a:ln>
+        </p:spPr>
+      </p:sp>
+      <p:sp>
+        <p:nvSpPr>
+          <p:cNvPr id="12" name="mdpr:icon-and-text-aside-8429fc:title:__title:icon-and-text-aside-8429fc"/>
           <p:cNvSpPr txBox="1"/>
           <p:nvPr/>
         </p:nvSpPr>
@@ -13139,7 +13139,7 @@
       </p:pic>
       <p:sp>
         <p:nvSpPr>
-          <p:cNvPr id="15" name="Text 8"/>
+          <p:cNvPr id="15" name="mdpr:icon-and-text-aside-8429fc:item-1:block-29"/>
           <p:cNvSpPr txBox="1"/>
           <p:nvPr/>
         </p:nvSpPr>
@@ -13255,7 +13255,7 @@
       </p:pic>
       <p:sp>
         <p:nvSpPr>
-          <p:cNvPr id="18" name="Text 10"/>
+          <p:cNvPr id="18" name="mdpr:icon-and-text-aside-8429fc:item-2:block-29"/>
           <p:cNvSpPr txBox="1"/>
           <p:nvPr/>
         </p:nvSpPr>
@@ -13371,7 +13371,7 @@
       </p:pic>
       <p:sp>
         <p:nvSpPr>
-          <p:cNvPr id="21" name="Text 12"/>
+          <p:cNvPr id="21" name="mdpr:icon-and-text-aside-8429fc:item-3:block-29"/>
           <p:cNvSpPr txBox="1"/>
           <p:nvPr/>
         </p:nvSpPr>
@@ -13487,7 +13487,7 @@
       </p:pic>
       <p:sp>
         <p:nvSpPr>
-          <p:cNvPr id="24" name="Text 14"/>
+          <p:cNvPr id="24" name="mdpr:icon-and-text-aside-8429fc:item-4:block-29"/>
           <p:cNvSpPr txBox="1"/>
           <p:nvPr/>
         </p:nvSpPr>
@@ -13626,117 +13626,9 @@
           </a:ln>
         </p:spPr>
       </p:sp>
-      <p:sp>
-        <p:nvSpPr>
-          <p:cNvPr id="4" name="Shape 2"/>
-          <p:cNvSpPr/>
-          <p:nvPr/>
-        </p:nvSpPr>
-        <p:spPr>
-          <a:xfrm>
-            <a:off x="822960" y="1463040"/>
-            <a:ext cx="73152" cy="1920240"/>
-          </a:xfrm>
-          <a:prstGeom prst="rect">
-            <a:avLst/>
-          </a:prstGeom>
-          <a:solidFill>
-            <a:srgbClr val="111827"/>
-          </a:solidFill>
-          <a:ln w="12700">
-            <a:solidFill>
-              <a:srgbClr val="111827">
-                <a:alpha val="0"/>
-              </a:srgbClr>
-            </a:solidFill>
-            <a:prstDash val="solid"/>
-          </a:ln>
-        </p:spPr>
-      </p:sp>
-      <p:sp>
-        <p:nvSpPr>
-          <p:cNvPr id="5" name="Shape 3"/>
-          <p:cNvSpPr/>
-          <p:nvPr/>
-        </p:nvSpPr>
-        <p:spPr>
-          <a:xfrm>
-            <a:off x="6309360" y="1463040"/>
-            <a:ext cx="73152" cy="1920240"/>
-          </a:xfrm>
-          <a:prstGeom prst="rect">
-            <a:avLst/>
-          </a:prstGeom>
-          <a:solidFill>
-            <a:srgbClr val="E5E7EB"/>
-          </a:solidFill>
-          <a:ln w="12700">
-            <a:solidFill>
-              <a:srgbClr val="E5E7EB">
-                <a:alpha val="0"/>
-              </a:srgbClr>
-            </a:solidFill>
-            <a:prstDash val="solid"/>
-          </a:ln>
-        </p:spPr>
-      </p:sp>
-      <p:sp>
-        <p:nvSpPr>
-          <p:cNvPr id="6" name="Shape 4"/>
-          <p:cNvSpPr/>
-          <p:nvPr/>
-        </p:nvSpPr>
-        <p:spPr>
-          <a:xfrm>
-            <a:off x="822960" y="3749040"/>
-            <a:ext cx="73152" cy="1920240"/>
-          </a:xfrm>
-          <a:prstGeom prst="rect">
-            <a:avLst/>
-          </a:prstGeom>
-          <a:solidFill>
-            <a:srgbClr val="111827"/>
-          </a:solidFill>
-          <a:ln w="12700">
-            <a:solidFill>
-              <a:srgbClr val="111827">
-                <a:alpha val="0"/>
-              </a:srgbClr>
-            </a:solidFill>
-            <a:prstDash val="solid"/>
-          </a:ln>
-        </p:spPr>
-      </p:sp>
-      <p:sp>
-        <p:nvSpPr>
-          <p:cNvPr id="7" name="Shape 5"/>
-          <p:cNvSpPr/>
-          <p:nvPr/>
-        </p:nvSpPr>
-        <p:spPr>
-          <a:xfrm>
-            <a:off x="6309360" y="3749040"/>
-            <a:ext cx="73152" cy="1920240"/>
-          </a:xfrm>
-          <a:prstGeom prst="rect">
-            <a:avLst/>
-          </a:prstGeom>
-          <a:solidFill>
-            <a:srgbClr val="E5E7EB"/>
-          </a:solidFill>
-          <a:ln w="12700">
-            <a:solidFill>
-              <a:srgbClr val="E5E7EB">
-                <a:alpha val="0"/>
-              </a:srgbClr>
-            </a:solidFill>
-            <a:prstDash val="solid"/>
-          </a:ln>
-        </p:spPr>
-      </p:sp>
       <p:pic>
         <p:nvPicPr>
-          <p:cNvPr id="8" name="Image 0" descr="preencoded.png">    </p:cNvPr>
+          <p:cNvPr id="4" name="Image 0" descr="preencoded.png">    </p:cNvPr>
           <p:cNvPicPr>
             <a:picLocks noChangeAspect="1"/>
           </p:cNvPicPr>
@@ -13766,7 +13658,7 @@
       </p:pic>
       <p:pic>
         <p:nvPicPr>
-          <p:cNvPr id="9" name="Image 1" descr="preencoded.png">    </p:cNvPr>
+          <p:cNvPr id="5" name="Image 1" descr="preencoded.png">    </p:cNvPr>
           <p:cNvPicPr>
             <a:picLocks noChangeAspect="1"/>
           </p:cNvPicPr>
@@ -13796,7 +13688,7 @@
       </p:pic>
       <p:pic>
         <p:nvPicPr>
-          <p:cNvPr id="10" name="Image 2" descr="preencoded.png">    </p:cNvPr>
+          <p:cNvPr id="6" name="Image 2" descr="preencoded.png">    </p:cNvPr>
           <p:cNvPicPr>
             <a:picLocks noChangeAspect="1"/>
           </p:cNvPicPr>
@@ -13826,7 +13718,7 @@
       </p:pic>
       <p:pic>
         <p:nvPicPr>
-          <p:cNvPr id="11" name="Image 3" descr="preencoded.png">    </p:cNvPr>
+          <p:cNvPr id="7" name="Image 3" descr="preencoded.png">    </p:cNvPr>
           <p:cNvPicPr>
             <a:picLocks noChangeAspect="1"/>
           </p:cNvPicPr>
@@ -13856,7 +13748,115 @@
       </p:pic>
       <p:sp>
         <p:nvSpPr>
-          <p:cNvPr id="12" name="Text 6"/>
+          <p:cNvPr id="8" name="Shape 2"/>
+          <p:cNvSpPr/>
+          <p:nvPr/>
+        </p:nvSpPr>
+        <p:spPr>
+          <a:xfrm>
+            <a:off x="822960" y="1463040"/>
+            <a:ext cx="73152" cy="1920240"/>
+          </a:xfrm>
+          <a:prstGeom prst="rect">
+            <a:avLst/>
+          </a:prstGeom>
+          <a:solidFill>
+            <a:srgbClr val="111827"/>
+          </a:solidFill>
+          <a:ln w="12700">
+            <a:solidFill>
+              <a:srgbClr val="111827">
+                <a:alpha val="0"/>
+              </a:srgbClr>
+            </a:solidFill>
+            <a:prstDash val="solid"/>
+          </a:ln>
+        </p:spPr>
+      </p:sp>
+      <p:sp>
+        <p:nvSpPr>
+          <p:cNvPr id="9" name="Shape 3"/>
+          <p:cNvSpPr/>
+          <p:nvPr/>
+        </p:nvSpPr>
+        <p:spPr>
+          <a:xfrm>
+            <a:off x="6309360" y="1463040"/>
+            <a:ext cx="73152" cy="1920240"/>
+          </a:xfrm>
+          <a:prstGeom prst="rect">
+            <a:avLst/>
+          </a:prstGeom>
+          <a:solidFill>
+            <a:srgbClr val="E5E7EB"/>
+          </a:solidFill>
+          <a:ln w="12700">
+            <a:solidFill>
+              <a:srgbClr val="E5E7EB">
+                <a:alpha val="0"/>
+              </a:srgbClr>
+            </a:solidFill>
+            <a:prstDash val="solid"/>
+          </a:ln>
+        </p:spPr>
+      </p:sp>
+      <p:sp>
+        <p:nvSpPr>
+          <p:cNvPr id="10" name="Shape 4"/>
+          <p:cNvSpPr/>
+          <p:nvPr/>
+        </p:nvSpPr>
+        <p:spPr>
+          <a:xfrm>
+            <a:off x="822960" y="3749040"/>
+            <a:ext cx="73152" cy="1920240"/>
+          </a:xfrm>
+          <a:prstGeom prst="rect">
+            <a:avLst/>
+          </a:prstGeom>
+          <a:solidFill>
+            <a:srgbClr val="111827"/>
+          </a:solidFill>
+          <a:ln w="12700">
+            <a:solidFill>
+              <a:srgbClr val="111827">
+                <a:alpha val="0"/>
+              </a:srgbClr>
+            </a:solidFill>
+            <a:prstDash val="solid"/>
+          </a:ln>
+        </p:spPr>
+      </p:sp>
+      <p:sp>
+        <p:nvSpPr>
+          <p:cNvPr id="11" name="Shape 5"/>
+          <p:cNvSpPr/>
+          <p:nvPr/>
+        </p:nvSpPr>
+        <p:spPr>
+          <a:xfrm>
+            <a:off x="6309360" y="3749040"/>
+            <a:ext cx="73152" cy="1920240"/>
+          </a:xfrm>
+          <a:prstGeom prst="rect">
+            <a:avLst/>
+          </a:prstGeom>
+          <a:solidFill>
+            <a:srgbClr val="E5E7EB"/>
+          </a:solidFill>
+          <a:ln w="12700">
+            <a:solidFill>
+              <a:srgbClr val="E5E7EB">
+                <a:alpha val="0"/>
+              </a:srgbClr>
+            </a:solidFill>
+            <a:prstDash val="solid"/>
+          </a:ln>
+        </p:spPr>
+      </p:sp>
+      <p:sp>
+        <p:nvSpPr>
+          <p:cNvPr id="12" name="mdpr:overflow-guard-f8d03e:title:__title:overflow-guard-f8d03e"/>
           <p:cNvSpPr txBox="1"/>
           <p:nvPr/>
         </p:nvSpPr>
@@ -13955,7 +13955,7 @@
       </p:pic>
       <p:sp>
         <p:nvSpPr>
-          <p:cNvPr id="15" name="Text 8"/>
+          <p:cNvPr id="15" name="mdpr:overflow-guard-f8d03e:item-1:block-31"/>
           <p:cNvSpPr txBox="1"/>
           <p:nvPr/>
         </p:nvSpPr>
@@ -14071,7 +14071,7 @@
       </p:pic>
       <p:sp>
         <p:nvSpPr>
-          <p:cNvPr id="18" name="Text 10"/>
+          <p:cNvPr id="18" name="mdpr:overflow-guard-f8d03e:item-2:block-31"/>
           <p:cNvSpPr txBox="1"/>
           <p:nvPr/>
         </p:nvSpPr>
@@ -14187,7 +14187,7 @@
       </p:pic>
       <p:sp>
         <p:nvSpPr>
-          <p:cNvPr id="21" name="Text 12"/>
+          <p:cNvPr id="21" name="mdpr:overflow-guard-f8d03e:item-3:block-31"/>
           <p:cNvSpPr txBox="1"/>
           <p:nvPr/>
         </p:nvSpPr>
@@ -14303,7 +14303,7 @@
       </p:pic>
       <p:sp>
         <p:nvSpPr>
-          <p:cNvPr id="24" name="Text 14"/>
+          <p:cNvPr id="24" name="mdpr:overflow-guard-f8d03e:item-4:block-31"/>
           <p:cNvSpPr txBox="1"/>
           <p:nvPr/>
         </p:nvSpPr>
@@ -14442,36 +14442,9 @@
           </a:ln>
         </p:spPr>
       </p:sp>
-      <p:sp>
-        <p:nvSpPr>
-          <p:cNvPr id="4" name="Shape 2"/>
-          <p:cNvSpPr/>
-          <p:nvPr/>
-        </p:nvSpPr>
-        <p:spPr>
-          <a:xfrm>
-            <a:off x="822960" y="1463040"/>
-            <a:ext cx="5623560" cy="73152"/>
-          </a:xfrm>
-          <a:prstGeom prst="rect">
-            <a:avLst/>
-          </a:prstGeom>
-          <a:solidFill>
-            <a:srgbClr val="111827"/>
-          </a:solidFill>
-          <a:ln w="12700">
-            <a:solidFill>
-              <a:srgbClr val="111827">
-                <a:alpha val="0"/>
-              </a:srgbClr>
-            </a:solidFill>
-            <a:prstDash val="solid"/>
-          </a:ln>
-        </p:spPr>
-      </p:sp>
       <p:pic>
         <p:nvPicPr>
-          <p:cNvPr id="5" name="Image 0" descr="preencoded.png">    </p:cNvPr>
+          <p:cNvPr id="4" name="Image 0" descr="preencoded.png">    </p:cNvPr>
           <p:cNvPicPr>
             <a:picLocks noChangeAspect="1"/>
           </p:cNvPicPr>
@@ -14501,7 +14474,34 @@
       </p:pic>
       <p:sp>
         <p:nvSpPr>
-          <p:cNvPr id="6" name="Text 3"/>
+          <p:cNvPr id="5" name="Shape 2"/>
+          <p:cNvSpPr/>
+          <p:nvPr/>
+        </p:nvSpPr>
+        <p:spPr>
+          <a:xfrm>
+            <a:off x="822960" y="1463040"/>
+            <a:ext cx="5623560" cy="73152"/>
+          </a:xfrm>
+          <a:prstGeom prst="rect">
+            <a:avLst/>
+          </a:prstGeom>
+          <a:solidFill>
+            <a:srgbClr val="111827"/>
+          </a:solidFill>
+          <a:ln w="12700">
+            <a:solidFill>
+              <a:srgbClr val="111827">
+                <a:alpha val="0"/>
+              </a:srgbClr>
+            </a:solidFill>
+            <a:prstDash val="solid"/>
+          </a:ln>
+        </p:spPr>
+      </p:sp>
+      <p:sp>
+        <p:nvSpPr>
+          <p:cNvPr id="6" name="mdpr:image-safe-frame-d4d6a4:title:__title:image-safe-frame-d4d6a4"/>
           <p:cNvSpPr txBox="1"/>
           <p:nvPr/>
         </p:nvSpPr>
@@ -14543,7 +14543,7 @@
       </p:sp>
       <p:sp>
         <p:nvSpPr>
-          <p:cNvPr id="7" name="Text 4"/>
+          <p:cNvPr id="7" name="mdpr:image-safe-frame-d4d6a4:body:block-33-block-33-block-33"/>
           <p:cNvSpPr txBox="1"/>
           <p:nvPr/>
         </p:nvSpPr>
@@ -14682,7 +14682,7 @@
       </p:sp>
       <p:pic>
         <p:nvPicPr>
-          <p:cNvPr id="8" name="Image 1" descr="Safe frame diagram">    </p:cNvPr>
+          <p:cNvPr id="8" name="mdpr:image-safe-frame-d4d6a4:image-1:block-34" descr="{&quot;mdpr&quot;:{&quot;slideId&quot;:&quot;image-safe-frame-d4d6a4&quot;,&quot;layoutSlideId&quot;:&quot;layout-image-safe-frame-d4d6a4&quot;,&quot;regionId&quot;:&quot;image-1&quot;,&quot;blockIds&quot;:[&quot;block-34&quot;],&quot;objectKind&quot;:&quot;native-image&quot;,&quot;role&quot;:&quot;image&quot;,&quot;editable&quot;:false}}">    </p:cNvPr>
           <p:cNvPicPr>
             <a:picLocks noChangeAspect="1"/>
           </p:cNvPicPr>
@@ -14792,36 +14792,9 @@
           </a:ln>
         </p:spPr>
       </p:sp>
-      <p:sp>
-        <p:nvSpPr>
-          <p:cNvPr id="4" name="Shape 2"/>
-          <p:cNvSpPr/>
-          <p:nvPr/>
-        </p:nvSpPr>
-        <p:spPr>
-          <a:xfrm>
-            <a:off x="841248" y="4041648"/>
-            <a:ext cx="4572000" cy="73152"/>
-          </a:xfrm>
-          <a:prstGeom prst="rect">
-            <a:avLst/>
-          </a:prstGeom>
-          <a:solidFill>
-            <a:srgbClr val="111827"/>
-          </a:solidFill>
-          <a:ln w="12700">
-            <a:solidFill>
-              <a:srgbClr val="111827">
-                <a:alpha val="0"/>
-              </a:srgbClr>
-            </a:solidFill>
-            <a:prstDash val="solid"/>
-          </a:ln>
-        </p:spPr>
-      </p:sp>
       <p:pic>
         <p:nvPicPr>
-          <p:cNvPr id="5" name="Image 0" descr="preencoded.png">    </p:cNvPr>
+          <p:cNvPr id="4" name="Image 0" descr="preencoded.png">    </p:cNvPr>
           <p:cNvPicPr>
             <a:picLocks noChangeAspect="1"/>
           </p:cNvPicPr>
@@ -14851,7 +14824,7 @@
       </p:pic>
       <p:pic>
         <p:nvPicPr>
-          <p:cNvPr id="6" name="Image 1" descr="preencoded.png">    </p:cNvPr>
+          <p:cNvPr id="5" name="Image 1" descr="preencoded.png">    </p:cNvPr>
           <p:cNvPicPr>
             <a:picLocks noChangeAspect="1"/>
           </p:cNvPicPr>
@@ -14881,7 +14854,7 @@
       </p:pic>
       <p:pic>
         <p:nvPicPr>
-          <p:cNvPr id="7" name="Image 2" descr="preencoded.png">    </p:cNvPr>
+          <p:cNvPr id="6" name="Image 2" descr="preencoded.png">    </p:cNvPr>
           <p:cNvPicPr>
             <a:picLocks noChangeAspect="1"/>
           </p:cNvPicPr>
@@ -14911,7 +14884,34 @@
       </p:pic>
       <p:sp>
         <p:nvSpPr>
-          <p:cNvPr id="8" name="Text 3"/>
+          <p:cNvPr id="7" name="Shape 2"/>
+          <p:cNvSpPr/>
+          <p:nvPr/>
+        </p:nvSpPr>
+        <p:spPr>
+          <a:xfrm>
+            <a:off x="841248" y="4041648"/>
+            <a:ext cx="4572000" cy="73152"/>
+          </a:xfrm>
+          <a:prstGeom prst="rect">
+            <a:avLst/>
+          </a:prstGeom>
+          <a:solidFill>
+            <a:srgbClr val="111827"/>
+          </a:solidFill>
+          <a:ln w="12700">
+            <a:solidFill>
+              <a:srgbClr val="111827">
+                <a:alpha val="0"/>
+              </a:srgbClr>
+            </a:solidFill>
+            <a:prstDash val="solid"/>
+          </a:ln>
+        </p:spPr>
+      </p:sp>
+      <p:sp>
+        <p:nvSpPr>
+          <p:cNvPr id="8" name="mdpr:mixed-object-packing-438299:title:__title:mixed-object-packing-438299"/>
           <p:cNvSpPr txBox="1"/>
           <p:nvPr/>
         </p:nvSpPr>
@@ -14969,7 +14969,7 @@
       </p:graphicFrame>
       <p:graphicFrame>
         <p:nvGraphicFramePr>
-          <p:cNvPr id="25" name="Table 0"/>
+          <p:cNvPr id="25" name="mdpr:mixed-object-packing-438299:table:block-38"/>
           <p:cNvGraphicFramePr>
             <a:graphicFrameLocks noGrp="1"/>
           </p:cNvGraphicFramePr>
@@ -15411,7 +15411,7 @@
       </p:graphicFrame>
       <p:sp>
         <p:nvSpPr>
-          <p:cNvPr id="11" name="Text 4"/>
+          <p:cNvPr id="11" name="mdpr:mixed-object-packing-438299:body:block-36"/>
           <p:cNvSpPr txBox="1"/>
           <p:nvPr/>
         </p:nvSpPr>
@@ -15510,7 +15510,7 @@
       </p:sp>
       <p:pic>
         <p:nvPicPr>
-          <p:cNvPr id="12" name="Image 3" descr="Safe frame diagram">    </p:cNvPr>
+          <p:cNvPr id="12" name="mdpr:mixed-object-packing-438299:image-1:block-39" descr="{&quot;mdpr&quot;:{&quot;slideId&quot;:&quot;mixed-object-packing-438299&quot;,&quot;layoutSlideId&quot;:&quot;layout-mixed-object-packing-438299&quot;,&quot;regionId&quot;:&quot;image-1&quot;,&quot;blockIds&quot;:[&quot;block-39&quot;],&quot;objectKind&quot;:&quot;native-image&quot;,&quot;role&quot;:&quot;image&quot;,&quot;editable&quot;:false}}">    </p:cNvPr>
           <p:cNvPicPr>
             <a:picLocks noChangeAspect="1"/>
           </p:cNvPicPr>
@@ -15620,9 +15620,99 @@
           </a:ln>
         </p:spPr>
       </p:sp>
-      <p:sp>
-        <p:nvSpPr>
-          <p:cNvPr id="4" name="Shape 2"/>
+      <p:pic>
+        <p:nvPicPr>
+          <p:cNvPr id="4" name="Image 0" descr="preencoded.png">    </p:cNvPr>
+          <p:cNvPicPr>
+            <a:picLocks noChangeAspect="1"/>
+          </p:cNvPicPr>
+          <p:nvPr/>
+        </p:nvPicPr>
+        <p:blipFill>
+          <a:blip r:embed="rId1">
+            <a:extLst>
+              <a:ext uri="{96DAC541-7B7A-43D3-8B79-37D633B846F1}">
+                <asvg:svgBlip xmlns:asvg="http://schemas.microsoft.com/office/drawing/2016/SVG/main" r:embed="rId2"/>
+              </a:ext>
+            </a:extLst>
+          </a:blip>
+          <a:stretch>
+            <a:fillRect/>
+          </a:stretch>
+        </p:blipFill>
+        <p:spPr>
+          <a:xfrm>
+            <a:off x="914400" y="1865376"/>
+            <a:ext cx="10241280" cy="1024128"/>
+          </a:xfrm>
+          <a:prstGeom prst="rect">
+            <a:avLst/>
+          </a:prstGeom>
+        </p:spPr>
+      </p:pic>
+      <p:pic>
+        <p:nvPicPr>
+          <p:cNvPr id="5" name="Image 1" descr="preencoded.png">    </p:cNvPr>
+          <p:cNvPicPr>
+            <a:picLocks noChangeAspect="1"/>
+          </p:cNvPicPr>
+          <p:nvPr/>
+        </p:nvPicPr>
+        <p:blipFill>
+          <a:blip r:embed="rId3">
+            <a:extLst>
+              <a:ext uri="{96DAC541-7B7A-43D3-8B79-37D633B846F1}">
+                <asvg:svgBlip xmlns:asvg="http://schemas.microsoft.com/office/drawing/2016/SVG/main" r:embed="rId4"/>
+              </a:ext>
+            </a:extLst>
+          </a:blip>
+          <a:stretch>
+            <a:fillRect/>
+          </a:stretch>
+        </p:blipFill>
+        <p:spPr>
+          <a:xfrm>
+            <a:off x="914400" y="3191256"/>
+            <a:ext cx="10241280" cy="1024128"/>
+          </a:xfrm>
+          <a:prstGeom prst="rect">
+            <a:avLst/>
+          </a:prstGeom>
+        </p:spPr>
+      </p:pic>
+      <p:pic>
+        <p:nvPicPr>
+          <p:cNvPr id="6" name="Image 2" descr="preencoded.png">    </p:cNvPr>
+          <p:cNvPicPr>
+            <a:picLocks noChangeAspect="1"/>
+          </p:cNvPicPr>
+          <p:nvPr/>
+        </p:nvPicPr>
+        <p:blipFill>
+          <a:blip r:embed="rId5">
+            <a:extLst>
+              <a:ext uri="{96DAC541-7B7A-43D3-8B79-37D633B846F1}">
+                <asvg:svgBlip xmlns:asvg="http://schemas.microsoft.com/office/drawing/2016/SVG/main" r:embed="rId6"/>
+              </a:ext>
+            </a:extLst>
+          </a:blip>
+          <a:stretch>
+            <a:fillRect/>
+          </a:stretch>
+        </p:blipFill>
+        <p:spPr>
+          <a:xfrm>
+            <a:off x="914400" y="4507992"/>
+            <a:ext cx="10241280" cy="1024128"/>
+          </a:xfrm>
+          <a:prstGeom prst="rect">
+            <a:avLst/>
+          </a:prstGeom>
+        </p:spPr>
+      </p:pic>
+      <p:sp>
+        <p:nvSpPr>
+          <p:cNvPr id="7" name="Shape 2"/>
           <p:cNvSpPr/>
           <p:nvPr/>
         </p:nvSpPr>
@@ -15651,7 +15741,7 @@
       </p:sp>
       <p:sp>
         <p:nvSpPr>
-          <p:cNvPr id="5" name="Shape 3"/>
+          <p:cNvPr id="8" name="Shape 3"/>
           <p:cNvSpPr/>
           <p:nvPr/>
         </p:nvSpPr>
@@ -15678,7 +15768,7 @@
       </p:sp>
       <p:sp>
         <p:nvSpPr>
-          <p:cNvPr id="6" name="Shape 4"/>
+          <p:cNvPr id="9" name="Shape 4"/>
           <p:cNvSpPr/>
           <p:nvPr/>
         </p:nvSpPr>
@@ -15705,7 +15795,7 @@
       </p:sp>
       <p:sp>
         <p:nvSpPr>
-          <p:cNvPr id="7" name="Shape 5"/>
+          <p:cNvPr id="10" name="Shape 5"/>
           <p:cNvSpPr/>
           <p:nvPr/>
         </p:nvSpPr>
@@ -15730,99 +15820,9 @@
           </a:ln>
         </p:spPr>
       </p:sp>
-      <p:pic>
-        <p:nvPicPr>
-          <p:cNvPr id="8" name="Image 0" descr="preencoded.png">    </p:cNvPr>
-          <p:cNvPicPr>
-            <a:picLocks noChangeAspect="1"/>
-          </p:cNvPicPr>
-          <p:nvPr/>
-        </p:nvPicPr>
-        <p:blipFill>
-          <a:blip r:embed="rId1">
-            <a:extLst>
-              <a:ext uri="{96DAC541-7B7A-43D3-8B79-37D633B846F1}">
-                <asvg:svgBlip xmlns:asvg="http://schemas.microsoft.com/office/drawing/2016/SVG/main" r:embed="rId2"/>
-              </a:ext>
-            </a:extLst>
-          </a:blip>
-          <a:stretch>
-            <a:fillRect/>
-          </a:stretch>
-        </p:blipFill>
-        <p:spPr>
-          <a:xfrm>
-            <a:off x="914400" y="1865376"/>
-            <a:ext cx="10241280" cy="1024128"/>
-          </a:xfrm>
-          <a:prstGeom prst="rect">
-            <a:avLst/>
-          </a:prstGeom>
-        </p:spPr>
-      </p:pic>
-      <p:pic>
-        <p:nvPicPr>
-          <p:cNvPr id="9" name="Image 1" descr="preencoded.png">    </p:cNvPr>
-          <p:cNvPicPr>
-            <a:picLocks noChangeAspect="1"/>
-          </p:cNvPicPr>
-          <p:nvPr/>
-        </p:nvPicPr>
-        <p:blipFill>
-          <a:blip r:embed="rId3">
-            <a:extLst>
-              <a:ext uri="{96DAC541-7B7A-43D3-8B79-37D633B846F1}">
-                <asvg:svgBlip xmlns:asvg="http://schemas.microsoft.com/office/drawing/2016/SVG/main" r:embed="rId4"/>
-              </a:ext>
-            </a:extLst>
-          </a:blip>
-          <a:stretch>
-            <a:fillRect/>
-          </a:stretch>
-        </p:blipFill>
-        <p:spPr>
-          <a:xfrm>
-            <a:off x="914400" y="3191256"/>
-            <a:ext cx="10241280" cy="1024128"/>
-          </a:xfrm>
-          <a:prstGeom prst="rect">
-            <a:avLst/>
-          </a:prstGeom>
-        </p:spPr>
-      </p:pic>
-      <p:pic>
-        <p:nvPicPr>
-          <p:cNvPr id="10" name="Image 2" descr="preencoded.png">    </p:cNvPr>
-          <p:cNvPicPr>
-            <a:picLocks noChangeAspect="1"/>
-          </p:cNvPicPr>
-          <p:nvPr/>
-        </p:nvPicPr>
-        <p:blipFill>
-          <a:blip r:embed="rId5">
-            <a:extLst>
-              <a:ext uri="{96DAC541-7B7A-43D3-8B79-37D633B846F1}">
-                <asvg:svgBlip xmlns:asvg="http://schemas.microsoft.com/office/drawing/2016/SVG/main" r:embed="rId6"/>
-              </a:ext>
-            </a:extLst>
-          </a:blip>
-          <a:stretch>
-            <a:fillRect/>
-          </a:stretch>
-        </p:blipFill>
-        <p:spPr>
-          <a:xfrm>
-            <a:off x="914400" y="4507992"/>
-            <a:ext cx="10241280" cy="1024128"/>
-          </a:xfrm>
-          <a:prstGeom prst="rect">
-            <a:avLst/>
-          </a:prstGeom>
-        </p:spPr>
-      </p:pic>
-      <p:sp>
-        <p:nvSpPr>
-          <p:cNvPr id="11" name="Text 6"/>
+      <p:sp>
+        <p:nvSpPr>
+          <p:cNvPr id="11" name="mdpr:actions-output-review-326e07:title:__title:actions-output-review-326e07"/>
           <p:cNvSpPr txBox="1"/>
           <p:nvPr/>
         </p:nvSpPr>
@@ -15921,7 +15921,7 @@
       </p:pic>
       <p:sp>
         <p:nvSpPr>
-          <p:cNvPr id="14" name="Text 8"/>
+          <p:cNvPr id="14" name="mdpr:actions-output-review-326e07:item-1:block-41"/>
           <p:cNvSpPr txBox="1"/>
           <p:nvPr/>
         </p:nvSpPr>
@@ -16037,7 +16037,7 @@
       </p:pic>
       <p:sp>
         <p:nvSpPr>
-          <p:cNvPr id="17" name="Text 10"/>
+          <p:cNvPr id="17" name="mdpr:actions-output-review-326e07:item-2:block-41"/>
           <p:cNvSpPr txBox="1"/>
           <p:nvPr/>
         </p:nvSpPr>
@@ -16153,7 +16153,7 @@
       </p:pic>
       <p:sp>
         <p:nvSpPr>
-          <p:cNvPr id="20" name="Text 12"/>
+          <p:cNvPr id="20" name="mdpr:actions-output-review-326e07:item-3:block-41"/>
           <p:cNvSpPr txBox="1"/>
           <p:nvPr/>
         </p:nvSpPr>
@@ -16375,7 +16375,7 @@
       </p:sp>
       <p:sp>
         <p:nvSpPr>
-          <p:cNvPr id="7" name="Text 5"/>
+          <p:cNvPr id="7" name="mdpr:2-2-7bfb60:title:__title:2-2-7bfb60"/>
           <p:cNvSpPr txBox="1"/>
           <p:nvPr/>
         </p:nvSpPr>
@@ -16417,7 +16417,7 @@
       </p:sp>
       <p:sp>
         <p:nvSpPr>
-          <p:cNvPr id="8" name="Text 6"/>
+          <p:cNvPr id="8" name="mdpr:2-2-7bfb60:toc-item-1:toc-item-15"/>
           <p:cNvSpPr txBox="1"/>
           <p:nvPr/>
         </p:nvSpPr>
@@ -16539,36 +16539,9 @@
           </a:ln>
         </p:spPr>
       </p:sp>
-      <p:sp>
-        <p:nvSpPr>
-          <p:cNvPr id="4" name="Shape 2"/>
-          <p:cNvSpPr/>
-          <p:nvPr/>
-        </p:nvSpPr>
-        <p:spPr>
-          <a:xfrm>
-            <a:off x="914400" y="3063240"/>
-            <a:ext cx="10241280" cy="73152"/>
-          </a:xfrm>
-          <a:prstGeom prst="rect">
-            <a:avLst/>
-          </a:prstGeom>
-          <a:solidFill>
-            <a:srgbClr val="111827"/>
-          </a:solidFill>
-          <a:ln w="12700">
-            <a:solidFill>
-              <a:srgbClr val="111827">
-                <a:alpha val="0"/>
-              </a:srgbClr>
-            </a:solidFill>
-            <a:prstDash val="solid"/>
-          </a:ln>
-        </p:spPr>
-      </p:sp>
       <p:pic>
         <p:nvPicPr>
-          <p:cNvPr id="5" name="Image 0" descr="preencoded.png">    </p:cNvPr>
+          <p:cNvPr id="4" name="Image 0" descr="preencoded.png">    </p:cNvPr>
           <p:cNvPicPr>
             <a:picLocks noChangeAspect="1"/>
           </p:cNvPicPr>
@@ -16598,7 +16571,7 @@
       </p:pic>
       <p:sp>
         <p:nvSpPr>
-          <p:cNvPr id="6" name="Shape 3"/>
+          <p:cNvPr id="5" name="Shape 2"/>
           <p:cNvSpPr/>
           <p:nvPr/>
         </p:nvSpPr>
@@ -16627,7 +16600,34 @@
       </p:sp>
       <p:sp>
         <p:nvSpPr>
-          <p:cNvPr id="7" name="Text 4"/>
+          <p:cNvPr id="6" name="Shape 3"/>
+          <p:cNvSpPr/>
+          <p:nvPr/>
+        </p:nvSpPr>
+        <p:spPr>
+          <a:xfrm>
+            <a:off x="914400" y="3063240"/>
+            <a:ext cx="10241280" cy="73152"/>
+          </a:xfrm>
+          <a:prstGeom prst="rect">
+            <a:avLst/>
+          </a:prstGeom>
+          <a:solidFill>
+            <a:srgbClr val="111827"/>
+          </a:solidFill>
+          <a:ln w="12700">
+            <a:solidFill>
+              <a:srgbClr val="111827">
+                <a:alpha val="0"/>
+              </a:srgbClr>
+            </a:solidFill>
+            <a:prstDash val="solid"/>
+          </a:ln>
+        </p:spPr>
+      </p:sp>
+      <p:sp>
+        <p:nvSpPr>
+          <p:cNvPr id="7" name="mdpr:teaser-summary-7731dc:title:__title:teaser-summary-7731dc"/>
           <p:cNvSpPr txBox="1"/>
           <p:nvPr/>
         </p:nvSpPr>
@@ -16669,7 +16669,7 @@
       </p:sp>
       <p:sp>
         <p:nvSpPr>
-          <p:cNvPr id="8" name="Text 5"/>
+          <p:cNvPr id="8" name="mdpr:teaser-summary-7731dc:key-message:block-3"/>
           <p:cNvSpPr txBox="1"/>
           <p:nvPr/>
         </p:nvSpPr>
@@ -16711,7 +16711,7 @@
       </p:sp>
       <p:sp>
         <p:nvSpPr>
-          <p:cNvPr id="9" name="Text 6"/>
+          <p:cNvPr id="9" name="mdpr:teaser-summary-7731dc:body:block-4"/>
           <p:cNvSpPr txBox="1"/>
           <p:nvPr/>
         </p:nvSpPr>
@@ -16762,7 +16762,7 @@
                 <a:ea typeface="Pretendard" pitchFamily="34" charset="-122"/>
                 <a:cs typeface="Pretendard" pitchFamily="34" charset="-120"/>
               </a:rPr>
-              <a:t>  5 pruned decoration grammars, not palette-only swaps.</a:t>
+              <a:t>  9 distinct decoration grammars, not palette-only swaps.</a:t>
             </a:r>
             <a:endParaRPr lang="en-US" sz="2200" dirty="0"/>
           </a:p>
@@ -16862,7 +16862,7 @@
                 <a:ea typeface="Pretendard" pitchFamily="34" charset="-122"/>
                 <a:cs typeface="Pretendard" pitchFamily="34" charset="-120"/>
               </a:rPr>
-              <a:t>- QA contract</a:t>
+              <a:t>- Validation contract</a:t>
             </a:r>
             <a:endParaRPr lang="en-US" sz="2200" dirty="0"/>
           </a:p>
@@ -16970,9 +16970,99 @@
           </a:ln>
         </p:spPr>
       </p:sp>
-      <p:sp>
-        <p:nvSpPr>
-          <p:cNvPr id="4" name="Shape 2"/>
+      <p:pic>
+        <p:nvPicPr>
+          <p:cNvPr id="4" name="Image 0" descr="preencoded.png">    </p:cNvPr>
+          <p:cNvPicPr>
+            <a:picLocks noChangeAspect="1"/>
+          </p:cNvPicPr>
+          <p:nvPr/>
+        </p:nvPicPr>
+        <p:blipFill>
+          <a:blip r:embed="rId1">
+            <a:extLst>
+              <a:ext uri="{96DAC541-7B7A-43D3-8B79-37D633B846F1}">
+                <asvg:svgBlip xmlns:asvg="http://schemas.microsoft.com/office/drawing/2016/SVG/main" r:embed="rId2"/>
+              </a:ext>
+            </a:extLst>
+          </a:blip>
+          <a:stretch>
+            <a:fillRect/>
+          </a:stretch>
+        </p:blipFill>
+        <p:spPr>
+          <a:xfrm>
+            <a:off x="914400" y="1865376"/>
+            <a:ext cx="10241280" cy="1024128"/>
+          </a:xfrm>
+          <a:prstGeom prst="rect">
+            <a:avLst/>
+          </a:prstGeom>
+        </p:spPr>
+      </p:pic>
+      <p:pic>
+        <p:nvPicPr>
+          <p:cNvPr id="5" name="Image 1" descr="preencoded.png">    </p:cNvPr>
+          <p:cNvPicPr>
+            <a:picLocks noChangeAspect="1"/>
+          </p:cNvPicPr>
+          <p:nvPr/>
+        </p:nvPicPr>
+        <p:blipFill>
+          <a:blip r:embed="rId3">
+            <a:extLst>
+              <a:ext uri="{96DAC541-7B7A-43D3-8B79-37D633B846F1}">
+                <asvg:svgBlip xmlns:asvg="http://schemas.microsoft.com/office/drawing/2016/SVG/main" r:embed="rId4"/>
+              </a:ext>
+            </a:extLst>
+          </a:blip>
+          <a:stretch>
+            <a:fillRect/>
+          </a:stretch>
+        </p:blipFill>
+        <p:spPr>
+          <a:xfrm>
+            <a:off x="914400" y="3191256"/>
+            <a:ext cx="10241280" cy="1024128"/>
+          </a:xfrm>
+          <a:prstGeom prst="rect">
+            <a:avLst/>
+          </a:prstGeom>
+        </p:spPr>
+      </p:pic>
+      <p:pic>
+        <p:nvPicPr>
+          <p:cNvPr id="6" name="Image 2" descr="preencoded.png">    </p:cNvPr>
+          <p:cNvPicPr>
+            <a:picLocks noChangeAspect="1"/>
+          </p:cNvPicPr>
+          <p:nvPr/>
+        </p:nvPicPr>
+        <p:blipFill>
+          <a:blip r:embed="rId5">
+            <a:extLst>
+              <a:ext uri="{96DAC541-7B7A-43D3-8B79-37D633B846F1}">
+                <asvg:svgBlip xmlns:asvg="http://schemas.microsoft.com/office/drawing/2016/SVG/main" r:embed="rId6"/>
+              </a:ext>
+            </a:extLst>
+          </a:blip>
+          <a:stretch>
+            <a:fillRect/>
+          </a:stretch>
+        </p:blipFill>
+        <p:spPr>
+          <a:xfrm>
+            <a:off x="914400" y="4507992"/>
+            <a:ext cx="10241280" cy="1024128"/>
+          </a:xfrm>
+          <a:prstGeom prst="rect">
+            <a:avLst/>
+          </a:prstGeom>
+        </p:spPr>
+      </p:pic>
+      <p:sp>
+        <p:nvSpPr>
+          <p:cNvPr id="7" name="Shape 2"/>
           <p:cNvSpPr/>
           <p:nvPr/>
         </p:nvSpPr>
@@ -17001,7 +17091,7 @@
       </p:sp>
       <p:sp>
         <p:nvSpPr>
-          <p:cNvPr id="5" name="Shape 3"/>
+          <p:cNvPr id="8" name="Shape 3"/>
           <p:cNvSpPr/>
           <p:nvPr/>
         </p:nvSpPr>
@@ -17028,7 +17118,7 @@
       </p:sp>
       <p:sp>
         <p:nvSpPr>
-          <p:cNvPr id="6" name="Shape 4"/>
+          <p:cNvPr id="9" name="Shape 4"/>
           <p:cNvSpPr/>
           <p:nvPr/>
         </p:nvSpPr>
@@ -17055,7 +17145,7 @@
       </p:sp>
       <p:sp>
         <p:nvSpPr>
-          <p:cNvPr id="7" name="Shape 5"/>
+          <p:cNvPr id="10" name="Shape 5"/>
           <p:cNvSpPr/>
           <p:nvPr/>
         </p:nvSpPr>
@@ -17080,99 +17170,9 @@
           </a:ln>
         </p:spPr>
       </p:sp>
-      <p:pic>
-        <p:nvPicPr>
-          <p:cNvPr id="8" name="Image 0" descr="preencoded.png">    </p:cNvPr>
-          <p:cNvPicPr>
-            <a:picLocks noChangeAspect="1"/>
-          </p:cNvPicPr>
-          <p:nvPr/>
-        </p:nvPicPr>
-        <p:blipFill>
-          <a:blip r:embed="rId1">
-            <a:extLst>
-              <a:ext uri="{96DAC541-7B7A-43D3-8B79-37D633B846F1}">
-                <asvg:svgBlip xmlns:asvg="http://schemas.microsoft.com/office/drawing/2016/SVG/main" r:embed="rId2"/>
-              </a:ext>
-            </a:extLst>
-          </a:blip>
-          <a:stretch>
-            <a:fillRect/>
-          </a:stretch>
-        </p:blipFill>
-        <p:spPr>
-          <a:xfrm>
-            <a:off x="914400" y="1865376"/>
-            <a:ext cx="10241280" cy="1024128"/>
-          </a:xfrm>
-          <a:prstGeom prst="rect">
-            <a:avLst/>
-          </a:prstGeom>
-        </p:spPr>
-      </p:pic>
-      <p:pic>
-        <p:nvPicPr>
-          <p:cNvPr id="9" name="Image 1" descr="preencoded.png">    </p:cNvPr>
-          <p:cNvPicPr>
-            <a:picLocks noChangeAspect="1"/>
-          </p:cNvPicPr>
-          <p:nvPr/>
-        </p:nvPicPr>
-        <p:blipFill>
-          <a:blip r:embed="rId3">
-            <a:extLst>
-              <a:ext uri="{96DAC541-7B7A-43D3-8B79-37D633B846F1}">
-                <asvg:svgBlip xmlns:asvg="http://schemas.microsoft.com/office/drawing/2016/SVG/main" r:embed="rId4"/>
-              </a:ext>
-            </a:extLst>
-          </a:blip>
-          <a:stretch>
-            <a:fillRect/>
-          </a:stretch>
-        </p:blipFill>
-        <p:spPr>
-          <a:xfrm>
-            <a:off x="914400" y="3191256"/>
-            <a:ext cx="10241280" cy="1024128"/>
-          </a:xfrm>
-          <a:prstGeom prst="rect">
-            <a:avLst/>
-          </a:prstGeom>
-        </p:spPr>
-      </p:pic>
-      <p:pic>
-        <p:nvPicPr>
-          <p:cNvPr id="10" name="Image 2" descr="preencoded.png">    </p:cNvPr>
-          <p:cNvPicPr>
-            <a:picLocks noChangeAspect="1"/>
-          </p:cNvPicPr>
-          <p:nvPr/>
-        </p:nvPicPr>
-        <p:blipFill>
-          <a:blip r:embed="rId5">
-            <a:extLst>
-              <a:ext uri="{96DAC541-7B7A-43D3-8B79-37D633B846F1}">
-                <asvg:svgBlip xmlns:asvg="http://schemas.microsoft.com/office/drawing/2016/SVG/main" r:embed="rId6"/>
-              </a:ext>
-            </a:extLst>
-          </a:blip>
-          <a:stretch>
-            <a:fillRect/>
-          </a:stretch>
-        </p:blipFill>
-        <p:spPr>
-          <a:xfrm>
-            <a:off x="914400" y="4507992"/>
-            <a:ext cx="10241280" cy="1024128"/>
-          </a:xfrm>
-          <a:prstGeom prst="rect">
-            <a:avLst/>
-          </a:prstGeom>
-        </p:spPr>
-      </p:pic>
-      <p:sp>
-        <p:nvSpPr>
-          <p:cNvPr id="11" name="Text 6"/>
+      <p:sp>
+        <p:nvSpPr>
+          <p:cNvPr id="11" name="mdpr:1-2-32ac08:title:__title:1-2-32ac08"/>
           <p:cNvSpPr txBox="1"/>
           <p:nvPr/>
         </p:nvSpPr>
@@ -17271,7 +17271,7 @@
       </p:pic>
       <p:sp>
         <p:nvSpPr>
-          <p:cNvPr id="14" name="Text 8"/>
+          <p:cNvPr id="14" name="mdpr:1-2-32ac08:item-1:block-6-chunk-1"/>
           <p:cNvSpPr txBox="1"/>
           <p:nvPr/>
         </p:nvSpPr>
@@ -17387,7 +17387,7 @@
       </p:pic>
       <p:sp>
         <p:nvSpPr>
-          <p:cNvPr id="17" name="Text 10"/>
+          <p:cNvPr id="17" name="mdpr:1-2-32ac08:item-2:block-6-chunk-1"/>
           <p:cNvSpPr txBox="1"/>
           <p:nvPr/>
         </p:nvSpPr>
@@ -17503,7 +17503,7 @@
       </p:pic>
       <p:sp>
         <p:nvSpPr>
-          <p:cNvPr id="20" name="Text 12"/>
+          <p:cNvPr id="20" name="mdpr:1-2-32ac08:item-3:block-6-chunk-1"/>
           <p:cNvSpPr txBox="1"/>
           <p:nvPr/>
         </p:nvSpPr>
@@ -17698,7 +17698,7 @@
       </p:sp>
       <p:sp>
         <p:nvSpPr>
-          <p:cNvPr id="6" name="Text 4"/>
+          <p:cNvPr id="6" name="mdpr:2-2-14f8eb:title:__title:2-2-14f8eb"/>
           <p:cNvSpPr txBox="1"/>
           <p:nvPr/>
         </p:nvSpPr>
@@ -17740,7 +17740,7 @@
       </p:sp>
       <p:sp>
         <p:nvSpPr>
-          <p:cNvPr id="7" name="Text 5"/>
+          <p:cNvPr id="7" name="mdpr:2-2-14f8eb:left:block-6-chunk-2"/>
           <p:cNvSpPr txBox="1"/>
           <p:nvPr/>
         </p:nvSpPr>
@@ -17799,7 +17799,7 @@
       </p:sp>
       <p:sp>
         <p:nvSpPr>
-          <p:cNvPr id="8" name="Text 6"/>
+          <p:cNvPr id="8" name="mdpr:2-2-14f8eb:right:block-6-chunk-2"/>
           <p:cNvSpPr txBox="1"/>
           <p:nvPr/>
         </p:nvSpPr>
@@ -17938,9 +17938,99 @@
           </a:ln>
         </p:spPr>
       </p:sp>
-      <p:sp>
-        <p:nvSpPr>
-          <p:cNvPr id="4" name="Shape 2"/>
+      <p:pic>
+        <p:nvPicPr>
+          <p:cNvPr id="4" name="Image 0" descr="preencoded.png">    </p:cNvPr>
+          <p:cNvPicPr>
+            <a:picLocks noChangeAspect="1"/>
+          </p:cNvPicPr>
+          <p:nvPr/>
+        </p:nvPicPr>
+        <p:blipFill>
+          <a:blip r:embed="rId1">
+            <a:extLst>
+              <a:ext uri="{96DAC541-7B7A-43D3-8B79-37D633B846F1}">
+                <asvg:svgBlip xmlns:asvg="http://schemas.microsoft.com/office/drawing/2016/SVG/main" r:embed="rId2"/>
+              </a:ext>
+            </a:extLst>
+          </a:blip>
+          <a:stretch>
+            <a:fillRect/>
+          </a:stretch>
+        </p:blipFill>
+        <p:spPr>
+          <a:xfrm>
+            <a:off x="914400" y="1865376"/>
+            <a:ext cx="10241280" cy="1024128"/>
+          </a:xfrm>
+          <a:prstGeom prst="rect">
+            <a:avLst/>
+          </a:prstGeom>
+        </p:spPr>
+      </p:pic>
+      <p:pic>
+        <p:nvPicPr>
+          <p:cNvPr id="5" name="Image 1" descr="preencoded.png">    </p:cNvPr>
+          <p:cNvPicPr>
+            <a:picLocks noChangeAspect="1"/>
+          </p:cNvPicPr>
+          <p:nvPr/>
+        </p:nvPicPr>
+        <p:blipFill>
+          <a:blip r:embed="rId3">
+            <a:extLst>
+              <a:ext uri="{96DAC541-7B7A-43D3-8B79-37D633B846F1}">
+                <asvg:svgBlip xmlns:asvg="http://schemas.microsoft.com/office/drawing/2016/SVG/main" r:embed="rId4"/>
+              </a:ext>
+            </a:extLst>
+          </a:blip>
+          <a:stretch>
+            <a:fillRect/>
+          </a:stretch>
+        </p:blipFill>
+        <p:spPr>
+          <a:xfrm>
+            <a:off x="914400" y="3191256"/>
+            <a:ext cx="10241280" cy="1024128"/>
+          </a:xfrm>
+          <a:prstGeom prst="rect">
+            <a:avLst/>
+          </a:prstGeom>
+        </p:spPr>
+      </p:pic>
+      <p:pic>
+        <p:nvPicPr>
+          <p:cNvPr id="6" name="Image 2" descr="preencoded.png">    </p:cNvPr>
+          <p:cNvPicPr>
+            <a:picLocks noChangeAspect="1"/>
+          </p:cNvPicPr>
+          <p:nvPr/>
+        </p:nvPicPr>
+        <p:blipFill>
+          <a:blip r:embed="rId5">
+            <a:extLst>
+              <a:ext uri="{96DAC541-7B7A-43D3-8B79-37D633B846F1}">
+                <asvg:svgBlip xmlns:asvg="http://schemas.microsoft.com/office/drawing/2016/SVG/main" r:embed="rId6"/>
+              </a:ext>
+            </a:extLst>
+          </a:blip>
+          <a:stretch>
+            <a:fillRect/>
+          </a:stretch>
+        </p:blipFill>
+        <p:spPr>
+          <a:xfrm>
+            <a:off x="914400" y="4507992"/>
+            <a:ext cx="10241280" cy="1024128"/>
+          </a:xfrm>
+          <a:prstGeom prst="rect">
+            <a:avLst/>
+          </a:prstGeom>
+        </p:spPr>
+      </p:pic>
+      <p:sp>
+        <p:nvSpPr>
+          <p:cNvPr id="7" name="Shape 2"/>
           <p:cNvSpPr/>
           <p:nvPr/>
         </p:nvSpPr>
@@ -17969,7 +18059,7 @@
       </p:sp>
       <p:sp>
         <p:nvSpPr>
-          <p:cNvPr id="5" name="Shape 3"/>
+          <p:cNvPr id="8" name="Shape 3"/>
           <p:cNvSpPr/>
           <p:nvPr/>
         </p:nvSpPr>
@@ -17996,7 +18086,7 @@
       </p:sp>
       <p:sp>
         <p:nvSpPr>
-          <p:cNvPr id="6" name="Shape 4"/>
+          <p:cNvPr id="9" name="Shape 4"/>
           <p:cNvSpPr/>
           <p:nvPr/>
         </p:nvSpPr>
@@ -18023,7 +18113,7 @@
       </p:sp>
       <p:sp>
         <p:nvSpPr>
-          <p:cNvPr id="7" name="Shape 5"/>
+          <p:cNvPr id="10" name="Shape 5"/>
           <p:cNvSpPr/>
           <p:nvPr/>
         </p:nvSpPr>
@@ -18048,99 +18138,9 @@
           </a:ln>
         </p:spPr>
       </p:sp>
-      <p:pic>
-        <p:nvPicPr>
-          <p:cNvPr id="8" name="Image 0" descr="preencoded.png">    </p:cNvPr>
-          <p:cNvPicPr>
-            <a:picLocks noChangeAspect="1"/>
-          </p:cNvPicPr>
-          <p:nvPr/>
-        </p:nvPicPr>
-        <p:blipFill>
-          <a:blip r:embed="rId1">
-            <a:extLst>
-              <a:ext uri="{96DAC541-7B7A-43D3-8B79-37D633B846F1}">
-                <asvg:svgBlip xmlns:asvg="http://schemas.microsoft.com/office/drawing/2016/SVG/main" r:embed="rId2"/>
-              </a:ext>
-            </a:extLst>
-          </a:blip>
-          <a:stretch>
-            <a:fillRect/>
-          </a:stretch>
-        </p:blipFill>
-        <p:spPr>
-          <a:xfrm>
-            <a:off x="914400" y="1865376"/>
-            <a:ext cx="10241280" cy="1024128"/>
-          </a:xfrm>
-          <a:prstGeom prst="rect">
-            <a:avLst/>
-          </a:prstGeom>
-        </p:spPr>
-      </p:pic>
-      <p:pic>
-        <p:nvPicPr>
-          <p:cNvPr id="9" name="Image 1" descr="preencoded.png">    </p:cNvPr>
-          <p:cNvPicPr>
-            <a:picLocks noChangeAspect="1"/>
-          </p:cNvPicPr>
-          <p:nvPr/>
-        </p:nvPicPr>
-        <p:blipFill>
-          <a:blip r:embed="rId3">
-            <a:extLst>
-              <a:ext uri="{96DAC541-7B7A-43D3-8B79-37D633B846F1}">
-                <asvg:svgBlip xmlns:asvg="http://schemas.microsoft.com/office/drawing/2016/SVG/main" r:embed="rId4"/>
-              </a:ext>
-            </a:extLst>
-          </a:blip>
-          <a:stretch>
-            <a:fillRect/>
-          </a:stretch>
-        </p:blipFill>
-        <p:spPr>
-          <a:xfrm>
-            <a:off x="914400" y="3191256"/>
-            <a:ext cx="10241280" cy="1024128"/>
-          </a:xfrm>
-          <a:prstGeom prst="rect">
-            <a:avLst/>
-          </a:prstGeom>
-        </p:spPr>
-      </p:pic>
-      <p:pic>
-        <p:nvPicPr>
-          <p:cNvPr id="10" name="Image 2" descr="preencoded.png">    </p:cNvPr>
-          <p:cNvPicPr>
-            <a:picLocks noChangeAspect="1"/>
-          </p:cNvPicPr>
-          <p:nvPr/>
-        </p:nvPicPr>
-        <p:blipFill>
-          <a:blip r:embed="rId5">
-            <a:extLst>
-              <a:ext uri="{96DAC541-7B7A-43D3-8B79-37D633B846F1}">
-                <asvg:svgBlip xmlns:asvg="http://schemas.microsoft.com/office/drawing/2016/SVG/main" r:embed="rId6"/>
-              </a:ext>
-            </a:extLst>
-          </a:blip>
-          <a:stretch>
-            <a:fillRect/>
-          </a:stretch>
-        </p:blipFill>
-        <p:spPr>
-          <a:xfrm>
-            <a:off x="914400" y="4507992"/>
-            <a:ext cx="10241280" cy="1024128"/>
-          </a:xfrm>
-          <a:prstGeom prst="rect">
-            <a:avLst/>
-          </a:prstGeom>
-        </p:spPr>
-      </p:pic>
-      <p:sp>
-        <p:nvSpPr>
-          <p:cNvPr id="11" name="Text 6"/>
+      <p:sp>
+        <p:nvSpPr>
+          <p:cNvPr id="11" name="mdpr:1-2-dfa474:title:__title:1-2-dfa474"/>
           <p:cNvSpPr txBox="1"/>
           <p:nvPr/>
         </p:nvSpPr>
@@ -18239,7 +18239,7 @@
       </p:pic>
       <p:sp>
         <p:nvSpPr>
-          <p:cNvPr id="14" name="Text 8"/>
+          <p:cNvPr id="14" name="mdpr:1-2-dfa474:item-1:block-8-chunk-1"/>
           <p:cNvSpPr txBox="1"/>
           <p:nvPr/>
         </p:nvSpPr>
@@ -18273,7 +18273,7 @@
                 <a:ea typeface="Pretendard" pitchFamily="34" charset="-122"/>
                 <a:cs typeface="Pretendard" pitchFamily="34" charset="-120"/>
               </a:rPr>
-              <a:t>Clean</a:t>
+              <a:t>Skeuomorphism / claymorphism</a:t>
             </a:r>
             <a:pPr algn="l" indent="0" marL="0">
               <a:lnSpc>
@@ -18290,7 +18290,7 @@
                 <a:ea typeface="Pretendard" pitchFamily="34" charset="-122"/>
                 <a:cs typeface="Pretendard" pitchFamily="34" charset="-120"/>
               </a:rPr>
-              <a:t>  restrained default structure.</a:t>
+              <a:t>  tactile depth, bevels, or puffy surfaces.</a:t>
             </a:r>
             <a:endParaRPr lang="en-US" sz="2200" dirty="0"/>
           </a:p>
@@ -18355,7 +18355,7 @@
       </p:pic>
       <p:sp>
         <p:nvSpPr>
-          <p:cNvPr id="17" name="Text 10"/>
+          <p:cNvPr id="17" name="mdpr:1-2-dfa474:item-2:block-8-chunk-1"/>
           <p:cNvSpPr txBox="1"/>
           <p:nvPr/>
         </p:nvSpPr>
@@ -18389,7 +18389,7 @@
                 <a:ea typeface="Pretendard" pitchFamily="34" charset="-122"/>
                 <a:cs typeface="Pretendard" pitchFamily="34" charset="-120"/>
               </a:rPr>
-              <a:t>Minimalism / newmorphism</a:t>
+              <a:t>Neomorphism / newmorphism</a:t>
             </a:r>
             <a:pPr algn="l" indent="0" marL="0">
               <a:lnSpc>
@@ -18406,7 +18406,7 @@
                 <a:ea typeface="Pretendard" pitchFamily="34" charset="-122"/>
                 <a:cs typeface="Pretendard" pitchFamily="34" charset="-120"/>
               </a:rPr>
-              <a:t>  sparse rules or soft raised surfaces.</a:t>
+              <a:t>  soft raised surfaces.</a:t>
             </a:r>
             <a:endParaRPr lang="en-US" sz="2200" dirty="0"/>
           </a:p>
@@ -18441,7 +18441,7 @@
       </p:sp>
       <p:pic>
         <p:nvPicPr>
-          <p:cNvPr id="19" name="Image 5" descr="chart icon from tabler-icons (MIT)">    </p:cNvPr>
+          <p:cNvPr id="19" name="Image 5" descr="article icon from tabler-icons (MIT)">    </p:cNvPr>
           <p:cNvPicPr>
             <a:picLocks noChangeAspect="1"/>
           </p:cNvPicPr>
@@ -18471,7 +18471,7 @@
       </p:pic>
       <p:sp>
         <p:nvSpPr>
-          <p:cNvPr id="20" name="Text 12"/>
+          <p:cNvPr id="20" name="mdpr:1-2-dfa474:item-3:block-8-chunk-1"/>
           <p:cNvSpPr txBox="1"/>
           <p:nvPr/>
         </p:nvSpPr>
@@ -18505,7 +18505,7 @@
                 <a:ea typeface="Pretendard" pitchFamily="34" charset="-122"/>
                 <a:cs typeface="Pretendard" pitchFamily="34" charset="-120"/>
               </a:rPr>
-              <a:t>Glass / data</a:t>
+              <a:t>Glassmorphism / liquid-glass</a:t>
             </a:r>
             <a:pPr algn="l" indent="0" marL="0">
               <a:lnSpc>
@@ -18522,7 +18522,7 @@
                 <a:ea typeface="Pretendard" pitchFamily="34" charset="-122"/>
                 <a:cs typeface="Pretendard" pitchFamily="34" charset="-120"/>
               </a:rPr>
-              <a:t>  translucent surfaces or metric rails.</a:t>
+              <a:t>  translucent panels and refractive highlights.</a:t>
             </a:r>
             <a:endParaRPr lang="en-US" sz="2200" dirty="0"/>
           </a:p>
@@ -18666,7 +18666,7 @@
       </p:sp>
       <p:sp>
         <p:nvSpPr>
-          <p:cNvPr id="6" name="Text 4"/>
+          <p:cNvPr id="6" name="mdpr:2-2-149bde:title:__title:2-2-149bde"/>
           <p:cNvSpPr txBox="1"/>
           <p:nvPr/>
         </p:nvSpPr>
@@ -18708,7 +18708,7 @@
       </p:sp>
       <p:sp>
         <p:nvSpPr>
-          <p:cNvPr id="7" name="Text 5"/>
+          <p:cNvPr id="7" name="mdpr:2-2-149bde:left:block-8-chunk-2"/>
           <p:cNvSpPr txBox="1"/>
           <p:nvPr/>
         </p:nvSpPr>
@@ -18742,7 +18742,7 @@
                 <a:ea typeface="Pretendard" pitchFamily="34" charset="-122"/>
                 <a:cs typeface="Pretendard" pitchFamily="34" charset="-120"/>
               </a:rPr>
-              <a:t>- Clean</a:t>
+              <a:t>- Minimalism / brutalism / bentogrid</a:t>
             </a:r>
             <a:pPr algn="l" indent="0" marL="0">
               <a:lnSpc>
@@ -18759,7 +18759,7 @@
                 <a:ea typeface="Pretendard" pitchFamily="34" charset="-122"/>
                 <a:cs typeface="Pretendard" pitchFamily="34" charset="-120"/>
               </a:rPr>
-              <a:t>  restrained default structure for ordinary decks.</a:t>
+              <a:t>  sparse rules, hard contrast, or tiled information rhythm.</a:t>
             </a:r>
             <a:endParaRPr lang="en-US" sz="2200" dirty="0"/>
           </a:p>
@@ -18767,7 +18767,7 @@
       </p:sp>
       <p:sp>
         <p:nvSpPr>
-          <p:cNvPr id="8" name="Text 6"/>
+          <p:cNvPr id="8" name="mdpr:2-2-149bde:right:block-8-chunk-2"/>
           <p:cNvSpPr txBox="1"/>
           <p:nvPr/>
         </p:nvSpPr>
@@ -18962,7 +18962,7 @@
       </p:sp>
       <p:sp>
         <p:nvSpPr>
-          <p:cNvPr id="6" name="Text 4"/>
+          <p:cNvPr id="6" name="mdpr:1-2-5a84f1:title:__title:1-2-5a84f1"/>
           <p:cNvSpPr txBox="1"/>
           <p:nvPr/>
         </p:nvSpPr>
@@ -19004,7 +19004,7 @@
       </p:sp>
       <p:sp>
         <p:nvSpPr>
-          <p:cNvPr id="7" name="Text 5"/>
+          <p:cNvPr id="7" name="mdpr:1-2-5a84f1:left:block-10-chunk-1"/>
           <p:cNvSpPr txBox="1"/>
           <p:nvPr/>
         </p:nvSpPr>
@@ -19063,7 +19063,7 @@
       </p:sp>
       <p:sp>
         <p:nvSpPr>
-          <p:cNvPr id="8" name="Text 6"/>
+          <p:cNvPr id="8" name="mdpr:1-2-5a84f1:right:block-10-chunk-1"/>
           <p:cNvSpPr txBox="1"/>
           <p:nvPr/>
         </p:nvSpPr>

--- a/docs/theme-preview/pptx/minimalism.pptx
+++ b/docs/theme-preview/pptx/minimalism.pptx
@@ -283,7 +283,7 @@
             <a:pPr>
               <a:defRPr sz="1100" b="0" i="0" u="none" strike="noStrike">
                 <a:solidFill>
-                  <a:srgbClr val="111827"/>
+                  <a:srgbClr val="111111"/>
                 </a:solidFill>
                 <a:latin typeface="Pretendard"/>
               </a:defRPr>
@@ -335,7 +335,7 @@
             <a:pPr>
               <a:defRPr sz="1100" b="0" i="0" u="none" strike="noStrike">
                 <a:solidFill>
-                  <a:srgbClr val="4B5563"/>
+                  <a:srgbClr val="949494"/>
                 </a:solidFill>
                 <a:latin typeface="Pretendard"/>
               </a:defRPr>
@@ -606,7 +606,7 @@
             <a:pPr>
               <a:defRPr sz="1100" b="0" i="0" u="none" strike="noStrike">
                 <a:solidFill>
-                  <a:srgbClr val="111827"/>
+                  <a:srgbClr val="111111"/>
                 </a:solidFill>
                 <a:latin typeface="Pretendard"/>
               </a:defRPr>
@@ -658,7 +658,7 @@
             <a:pPr>
               <a:defRPr sz="1100" b="0" i="0" u="none" strike="noStrike">
                 <a:solidFill>
-                  <a:srgbClr val="4B5563"/>
+                  <a:srgbClr val="949494"/>
                 </a:solidFill>
                 <a:latin typeface="Pretendard"/>
               </a:defRPr>
@@ -688,7 +688,7 @@
           <a:pPr>
             <a:defRPr sz="1100">
               <a:solidFill>
-                <a:srgbClr val="4B5563"/>
+                <a:srgbClr val="949494"/>
               </a:solidFill>
               <a:latin typeface="Pretendard"/>
               <a:cs typeface="Pretendard"/>
@@ -3674,7 +3674,7 @@
             <a:r>
               <a:rPr lang="en-US" sz="4800" b="1" dirty="0">
                 <a:solidFill>
-                  <a:srgbClr val="111827"/>
+                  <a:srgbClr val="111111"/>
                 </a:solidFill>
                 <a:latin typeface="Pretendard" pitchFamily="34" charset="0"/>
                 <a:ea typeface="Pretendard" pitchFamily="34" charset="-122"/>
@@ -3852,7 +3852,7 @@
             <a:r>
               <a:rPr lang="en-US" sz="3400" b="1" dirty="0">
                 <a:solidFill>
-                  <a:srgbClr val="111827"/>
+                  <a:srgbClr val="111111"/>
                 </a:solidFill>
                 <a:latin typeface="Pretendard" pitchFamily="34" charset="0"/>
                 <a:ea typeface="Pretendard" pitchFamily="34" charset="-122"/>
@@ -3911,7 +3911,7 @@
             <a:r>
               <a:rPr lang="en-US" sz="2200" dirty="0">
                 <a:solidFill>
-                  <a:srgbClr val="111827"/>
+                  <a:srgbClr val="111111"/>
                 </a:solidFill>
                 <a:latin typeface="Pretendard" pitchFamily="34" charset="0"/>
                 <a:ea typeface="Pretendard" pitchFamily="34" charset="-122"/>
@@ -3970,7 +3970,7 @@
             <a:r>
               <a:rPr lang="en-US" sz="2200" dirty="0">
                 <a:solidFill>
-                  <a:srgbClr val="111827"/>
+                  <a:srgbClr val="111111"/>
                 </a:solidFill>
                 <a:latin typeface="Pretendard" pitchFamily="34" charset="0"/>
                 <a:ea typeface="Pretendard" pitchFamily="34" charset="-122"/>
@@ -4094,7 +4094,7 @@
             <a:r>
               <a:rPr lang="en-US" sz="3400" b="1" dirty="0">
                 <a:solidFill>
-                  <a:srgbClr val="111827"/>
+                  <a:srgbClr val="111111"/>
                 </a:solidFill>
                 <a:latin typeface="Pretendard" pitchFamily="34" charset="0"/>
                 <a:ea typeface="Pretendard" pitchFamily="34" charset="-122"/>
@@ -4390,7 +4390,7 @@
             <a:r>
               <a:rPr lang="en-US" sz="1600" dirty="0">
                 <a:solidFill>
-                  <a:srgbClr val="111827"/>
+                  <a:srgbClr val="111111"/>
                 </a:solidFill>
                 <a:latin typeface="Pretendard" pitchFamily="34" charset="0"/>
                 <a:ea typeface="Pretendard" pitchFamily="34" charset="-122"/>
@@ -4566,7 +4566,7 @@
             <a:r>
               <a:rPr lang="en-US" sz="1600" dirty="0">
                 <a:solidFill>
-                  <a:srgbClr val="111827"/>
+                  <a:srgbClr val="111111"/>
                 </a:solidFill>
                 <a:latin typeface="Pretendard" pitchFamily="34" charset="0"/>
                 <a:ea typeface="Pretendard" pitchFamily="34" charset="-122"/>
@@ -4742,7 +4742,7 @@
             <a:r>
               <a:rPr lang="en-US" sz="1600" dirty="0">
                 <a:solidFill>
-                  <a:srgbClr val="111827"/>
+                  <a:srgbClr val="111111"/>
                 </a:solidFill>
                 <a:latin typeface="Pretendard" pitchFamily="34" charset="0"/>
                 <a:ea typeface="Pretendard" pitchFamily="34" charset="-122"/>
@@ -4918,7 +4918,7 @@
             <a:r>
               <a:rPr lang="en-US" sz="1600" dirty="0">
                 <a:solidFill>
-                  <a:srgbClr val="111827"/>
+                  <a:srgbClr val="111111"/>
                 </a:solidFill>
                 <a:latin typeface="Pretendard" pitchFamily="34" charset="0"/>
                 <a:ea typeface="Pretendard" pitchFamily="34" charset="-122"/>
@@ -5094,7 +5094,7 @@
             <a:r>
               <a:rPr lang="en-US" sz="1600" dirty="0">
                 <a:solidFill>
-                  <a:srgbClr val="111827"/>
+                  <a:srgbClr val="111111"/>
                 </a:solidFill>
                 <a:latin typeface="Pretendard" pitchFamily="34" charset="0"/>
                 <a:ea typeface="Pretendard" pitchFamily="34" charset="-122"/>
@@ -5270,7 +5270,7 @@
             <a:r>
               <a:rPr lang="en-US" sz="1600" dirty="0">
                 <a:solidFill>
-                  <a:srgbClr val="111827"/>
+                  <a:srgbClr val="111111"/>
                 </a:solidFill>
                 <a:latin typeface="Pretendard" pitchFamily="34" charset="0"/>
                 <a:ea typeface="Pretendard" pitchFamily="34" charset="-122"/>
@@ -5622,7 +5622,7 @@
             <a:r>
               <a:rPr lang="en-US" sz="3400" b="1" dirty="0">
                 <a:solidFill>
-                  <a:srgbClr val="111827"/>
+                  <a:srgbClr val="111111"/>
                 </a:solidFill>
                 <a:latin typeface="Pretendard" pitchFamily="34" charset="0"/>
                 <a:ea typeface="Pretendard" pitchFamily="34" charset="-122"/>
@@ -5738,7 +5738,7 @@
             <a:r>
               <a:rPr lang="en-US" sz="2200" dirty="0">
                 <a:solidFill>
-                  <a:srgbClr val="111827"/>
+                  <a:srgbClr val="111111"/>
                 </a:solidFill>
                 <a:latin typeface="Pretendard" pitchFamily="34" charset="0"/>
                 <a:ea typeface="Pretendard" pitchFamily="34" charset="-122"/>
@@ -5854,7 +5854,7 @@
             <a:r>
               <a:rPr lang="en-US" sz="2200" dirty="0">
                 <a:solidFill>
-                  <a:srgbClr val="111827"/>
+                  <a:srgbClr val="111111"/>
                 </a:solidFill>
                 <a:latin typeface="Pretendard" pitchFamily="34" charset="0"/>
                 <a:ea typeface="Pretendard" pitchFamily="34" charset="-122"/>
@@ -5970,7 +5970,7 @@
             <a:r>
               <a:rPr lang="en-US" sz="2200" dirty="0">
                 <a:solidFill>
-                  <a:srgbClr val="111827"/>
+                  <a:srgbClr val="111111"/>
                 </a:solidFill>
                 <a:latin typeface="Pretendard" pitchFamily="34" charset="0"/>
                 <a:ea typeface="Pretendard" pitchFamily="34" charset="-122"/>
@@ -6086,7 +6086,7 @@
             <a:r>
               <a:rPr lang="en-US" sz="2200" dirty="0">
                 <a:solidFill>
-                  <a:srgbClr val="111827"/>
+                  <a:srgbClr val="111111"/>
                 </a:solidFill>
                 <a:latin typeface="Pretendard" pitchFamily="34" charset="0"/>
                 <a:ea typeface="Pretendard" pitchFamily="34" charset="-122"/>
@@ -6264,7 +6264,7 @@
             <a:r>
               <a:rPr lang="en-US" sz="3400" b="1" dirty="0">
                 <a:solidFill>
-                  <a:srgbClr val="111827"/>
+                  <a:srgbClr val="111111"/>
                 </a:solidFill>
                 <a:latin typeface="Pretendard" pitchFamily="34" charset="0"/>
                 <a:ea typeface="Pretendard" pitchFamily="34" charset="-122"/>
@@ -6323,7 +6323,7 @@
             <a:r>
               <a:rPr lang="en-US" sz="2200" dirty="0">
                 <a:solidFill>
-                  <a:srgbClr val="111827"/>
+                  <a:srgbClr val="111111"/>
                 </a:solidFill>
                 <a:latin typeface="Pretendard" pitchFamily="34" charset="0"/>
                 <a:ea typeface="Pretendard" pitchFamily="34" charset="-122"/>
@@ -6382,7 +6382,7 @@
             <a:r>
               <a:rPr lang="en-US" sz="2200" dirty="0">
                 <a:solidFill>
-                  <a:srgbClr val="111827"/>
+                  <a:srgbClr val="111111"/>
                 </a:solidFill>
                 <a:latin typeface="Pretendard" pitchFamily="34" charset="0"/>
                 <a:ea typeface="Pretendard" pitchFamily="34" charset="-122"/>
@@ -6536,7 +6536,7 @@
             <a:r>
               <a:rPr lang="en-US" sz="3400" b="1" dirty="0">
                 <a:solidFill>
-                  <a:srgbClr val="111827"/>
+                  <a:srgbClr val="111111"/>
                 </a:solidFill>
                 <a:latin typeface="Pretendard" pitchFamily="34" charset="0"/>
                 <a:ea typeface="Pretendard" pitchFamily="34" charset="-122"/>
@@ -6793,7 +6793,7 @@
                       <a:r>
                         <a:rPr lang="en-US" sz="1800" b="1" dirty="0">
                           <a:solidFill>
-                            <a:srgbClr val="111827"/>
+                            <a:srgbClr val="111111"/>
                           </a:solidFill>
                           <a:latin typeface="Pretendard" pitchFamily="34" charset="0"/>
                           <a:ea typeface="Pretendard" pitchFamily="34" charset="-122"/>
@@ -6858,7 +6858,7 @@
                       <a:r>
                         <a:rPr lang="en-US" sz="1800" dirty="0">
                           <a:solidFill>
-                            <a:srgbClr val="111827"/>
+                            <a:srgbClr val="111111"/>
                           </a:solidFill>
                           <a:latin typeface="Pretendard" pitchFamily="34" charset="0"/>
                           <a:ea typeface="Pretendard" pitchFamily="34" charset="-122"/>
@@ -6923,7 +6923,7 @@
                       <a:r>
                         <a:rPr lang="en-US" sz="1800" dirty="0">
                           <a:solidFill>
-                            <a:srgbClr val="111827"/>
+                            <a:srgbClr val="111111"/>
                           </a:solidFill>
                           <a:latin typeface="Pretendard" pitchFamily="34" charset="0"/>
                           <a:ea typeface="Pretendard" pitchFamily="34" charset="-122"/>
@@ -6990,7 +6990,7 @@
                       <a:r>
                         <a:rPr lang="en-US" sz="1800" b="1" dirty="0">
                           <a:solidFill>
-                            <a:srgbClr val="111827"/>
+                            <a:srgbClr val="111111"/>
                           </a:solidFill>
                           <a:latin typeface="Pretendard" pitchFamily="34" charset="0"/>
                           <a:ea typeface="Pretendard" pitchFamily="34" charset="-122"/>
@@ -7060,7 +7060,7 @@
                       <a:r>
                         <a:rPr lang="en-US" sz="1800" dirty="0">
                           <a:solidFill>
-                            <a:srgbClr val="111827"/>
+                            <a:srgbClr val="111111"/>
                           </a:solidFill>
                           <a:latin typeface="Pretendard" pitchFamily="34" charset="0"/>
                           <a:ea typeface="Pretendard" pitchFamily="34" charset="-122"/>
@@ -7130,7 +7130,7 @@
                       <a:r>
                         <a:rPr lang="en-US" sz="1800" dirty="0">
                           <a:solidFill>
-                            <a:srgbClr val="111827"/>
+                            <a:srgbClr val="111111"/>
                           </a:solidFill>
                           <a:latin typeface="Pretendard" pitchFamily="34" charset="0"/>
                           <a:ea typeface="Pretendard" pitchFamily="34" charset="-122"/>
@@ -7202,7 +7202,7 @@
                       <a:r>
                         <a:rPr lang="en-US" sz="1800" b="1" dirty="0">
                           <a:solidFill>
-                            <a:srgbClr val="111827"/>
+                            <a:srgbClr val="111111"/>
                           </a:solidFill>
                           <a:latin typeface="Pretendard" pitchFamily="34" charset="0"/>
                           <a:ea typeface="Pretendard" pitchFamily="34" charset="-122"/>
@@ -7267,7 +7267,7 @@
                       <a:r>
                         <a:rPr lang="en-US" sz="1800" dirty="0">
                           <a:solidFill>
-                            <a:srgbClr val="111827"/>
+                            <a:srgbClr val="111111"/>
                           </a:solidFill>
                           <a:latin typeface="Pretendard" pitchFamily="34" charset="0"/>
                           <a:ea typeface="Pretendard" pitchFamily="34" charset="-122"/>
@@ -7332,7 +7332,7 @@
                       <a:r>
                         <a:rPr lang="en-US" sz="1800" dirty="0">
                           <a:solidFill>
-                            <a:srgbClr val="111827"/>
+                            <a:srgbClr val="111111"/>
                           </a:solidFill>
                           <a:latin typeface="Pretendard" pitchFamily="34" charset="0"/>
                           <a:ea typeface="Pretendard" pitchFamily="34" charset="-122"/>
@@ -7399,7 +7399,7 @@
                       <a:r>
                         <a:rPr lang="en-US" sz="1800" b="1" dirty="0">
                           <a:solidFill>
-                            <a:srgbClr val="111827"/>
+                            <a:srgbClr val="111111"/>
                           </a:solidFill>
                           <a:latin typeface="Pretendard" pitchFamily="34" charset="0"/>
                           <a:ea typeface="Pretendard" pitchFamily="34" charset="-122"/>
@@ -7469,7 +7469,7 @@
                       <a:r>
                         <a:rPr lang="en-US" sz="1800" dirty="0">
                           <a:solidFill>
-                            <a:srgbClr val="111827"/>
+                            <a:srgbClr val="111111"/>
                           </a:solidFill>
                           <a:latin typeface="Pretendard" pitchFamily="34" charset="0"/>
                           <a:ea typeface="Pretendard" pitchFamily="34" charset="-122"/>
@@ -7539,7 +7539,7 @@
                       <a:r>
                         <a:rPr lang="en-US" sz="1800" dirty="0">
                           <a:solidFill>
-                            <a:srgbClr val="111827"/>
+                            <a:srgbClr val="111111"/>
                           </a:solidFill>
                           <a:latin typeface="Pretendard" pitchFamily="34" charset="0"/>
                           <a:ea typeface="Pretendard" pitchFamily="34" charset="-122"/>
@@ -7772,7 +7772,7 @@
             <a:r>
               <a:rPr lang="en-US" sz="3400" b="1" dirty="0">
                 <a:solidFill>
-                  <a:srgbClr val="111827"/>
+                  <a:srgbClr val="111111"/>
                 </a:solidFill>
                 <a:latin typeface="Pretendard" pitchFamily="34" charset="0"/>
                 <a:ea typeface="Pretendard" pitchFamily="34" charset="-122"/>
@@ -7831,7 +7831,7 @@
             <a:r>
               <a:rPr lang="en-US" sz="2200" dirty="0">
                 <a:solidFill>
-                  <a:srgbClr val="111827"/>
+                  <a:srgbClr val="111111"/>
                 </a:solidFill>
                 <a:latin typeface="Pretendard" pitchFamily="34" charset="0"/>
                 <a:ea typeface="Pretendard" pitchFamily="34" charset="-122"/>
@@ -7871,7 +7871,7 @@
             <a:r>
               <a:rPr lang="en-US" sz="2200" dirty="0">
                 <a:solidFill>
-                  <a:srgbClr val="111827"/>
+                  <a:srgbClr val="111111"/>
                 </a:solidFill>
                 <a:latin typeface="Pretendard" pitchFamily="34" charset="0"/>
                 <a:ea typeface="Pretendard" pitchFamily="34" charset="-122"/>
@@ -7911,7 +7911,7 @@
             <a:r>
               <a:rPr lang="en-US" sz="2200" dirty="0">
                 <a:solidFill>
-                  <a:srgbClr val="111827"/>
+                  <a:srgbClr val="111111"/>
                 </a:solidFill>
                 <a:latin typeface="Pretendard" pitchFamily="34" charset="0"/>
                 <a:ea typeface="Pretendard" pitchFamily="34" charset="-122"/>
@@ -8081,7 +8081,7 @@
             <a:r>
               <a:rPr lang="en-US" sz="3400" b="1" dirty="0">
                 <a:solidFill>
-                  <a:srgbClr val="111827"/>
+                  <a:srgbClr val="111111"/>
                 </a:solidFill>
                 <a:latin typeface="Pretendard" pitchFamily="34" charset="0"/>
                 <a:ea typeface="Pretendard" pitchFamily="34" charset="-122"/>
@@ -8338,7 +8338,7 @@
                       <a:r>
                         <a:rPr lang="en-US" sz="1800" b="1" dirty="0">
                           <a:solidFill>
-                            <a:srgbClr val="111827"/>
+                            <a:srgbClr val="111111"/>
                           </a:solidFill>
                           <a:latin typeface="Pretendard" pitchFamily="34" charset="0"/>
                           <a:ea typeface="Pretendard" pitchFamily="34" charset="-122"/>
@@ -8403,7 +8403,7 @@
                       <a:r>
                         <a:rPr lang="en-US" sz="1800" dirty="0">
                           <a:solidFill>
-                            <a:srgbClr val="111827"/>
+                            <a:srgbClr val="111111"/>
                           </a:solidFill>
                           <a:latin typeface="Pretendard" pitchFamily="34" charset="0"/>
                           <a:ea typeface="Pretendard" pitchFamily="34" charset="-122"/>
@@ -8468,7 +8468,7 @@
                       <a:r>
                         <a:rPr lang="en-US" sz="1800" dirty="0">
                           <a:solidFill>
-                            <a:srgbClr val="111827"/>
+                            <a:srgbClr val="111111"/>
                           </a:solidFill>
                           <a:latin typeface="Pretendard" pitchFamily="34" charset="0"/>
                           <a:ea typeface="Pretendard" pitchFamily="34" charset="-122"/>
@@ -8535,7 +8535,7 @@
                       <a:r>
                         <a:rPr lang="en-US" sz="1800" b="1" dirty="0">
                           <a:solidFill>
-                            <a:srgbClr val="111827"/>
+                            <a:srgbClr val="111111"/>
                           </a:solidFill>
                           <a:latin typeface="Pretendard" pitchFamily="34" charset="0"/>
                           <a:ea typeface="Pretendard" pitchFamily="34" charset="-122"/>
@@ -8605,7 +8605,7 @@
                       <a:r>
                         <a:rPr lang="en-US" sz="1800" dirty="0">
                           <a:solidFill>
-                            <a:srgbClr val="111827"/>
+                            <a:srgbClr val="111111"/>
                           </a:solidFill>
                           <a:latin typeface="Pretendard" pitchFamily="34" charset="0"/>
                           <a:ea typeface="Pretendard" pitchFamily="34" charset="-122"/>
@@ -8675,7 +8675,7 @@
                       <a:r>
                         <a:rPr lang="en-US" sz="1800" dirty="0">
                           <a:solidFill>
-                            <a:srgbClr val="111827"/>
+                            <a:srgbClr val="111111"/>
                           </a:solidFill>
                           <a:latin typeface="Pretendard" pitchFamily="34" charset="0"/>
                           <a:ea typeface="Pretendard" pitchFamily="34" charset="-122"/>
@@ -8747,7 +8747,7 @@
                       <a:r>
                         <a:rPr lang="en-US" sz="1800" b="1" dirty="0">
                           <a:solidFill>
-                            <a:srgbClr val="111827"/>
+                            <a:srgbClr val="111111"/>
                           </a:solidFill>
                           <a:latin typeface="Pretendard" pitchFamily="34" charset="0"/>
                           <a:ea typeface="Pretendard" pitchFamily="34" charset="-122"/>
@@ -8812,7 +8812,7 @@
                       <a:r>
                         <a:rPr lang="en-US" sz="1800" dirty="0">
                           <a:solidFill>
-                            <a:srgbClr val="111827"/>
+                            <a:srgbClr val="111111"/>
                           </a:solidFill>
                           <a:latin typeface="Pretendard" pitchFamily="34" charset="0"/>
                           <a:ea typeface="Pretendard" pitchFamily="34" charset="-122"/>
@@ -8877,7 +8877,7 @@
                       <a:r>
                         <a:rPr lang="en-US" sz="1800" dirty="0">
                           <a:solidFill>
-                            <a:srgbClr val="111827"/>
+                            <a:srgbClr val="111111"/>
                           </a:solidFill>
                           <a:latin typeface="Pretendard" pitchFamily="34" charset="0"/>
                           <a:ea typeface="Pretendard" pitchFamily="34" charset="-122"/>
@@ -9078,7 +9078,7 @@
             <a:r>
               <a:rPr lang="en-US" sz="3400" b="1" dirty="0">
                 <a:solidFill>
-                  <a:srgbClr val="111827"/>
+                  <a:srgbClr val="111111"/>
                 </a:solidFill>
                 <a:latin typeface="Pretendard" pitchFamily="34" charset="0"/>
                 <a:ea typeface="Pretendard" pitchFamily="34" charset="-122"/>
@@ -9269,7 +9269,7 @@
             <a:r>
               <a:rPr lang="en-US" sz="3000" b="1" dirty="0">
                 <a:solidFill>
-                  <a:srgbClr val="111827"/>
+                  <a:srgbClr val="111111"/>
                 </a:solidFill>
                 <a:latin typeface="Pretendard" pitchFamily="34" charset="0"/>
                 <a:ea typeface="Pretendard" pitchFamily="34" charset="-122"/>
@@ -9311,7 +9311,7 @@
             <a:r>
               <a:rPr lang="en-US" sz="1600" dirty="0">
                 <a:solidFill>
-                  <a:srgbClr val="4B5563"/>
+                  <a:srgbClr val="949494"/>
                 </a:solidFill>
                 <a:latin typeface="Pretendard" pitchFamily="34" charset="0"/>
                 <a:ea typeface="Pretendard" pitchFamily="34" charset="-122"/>
@@ -9382,7 +9382,7 @@
             <a:r>
               <a:rPr lang="en-US" sz="1600" b="1" dirty="0">
                 <a:solidFill>
-                  <a:srgbClr val="111827"/>
+                  <a:srgbClr val="111111"/>
                 </a:solidFill>
                 <a:latin typeface="Pretendard" pitchFamily="34" charset="0"/>
                 <a:ea typeface="Pretendard" pitchFamily="34" charset="-122"/>
@@ -9453,7 +9453,7 @@
             <a:r>
               <a:rPr lang="en-US" sz="1600" dirty="0">
                 <a:solidFill>
-                  <a:srgbClr val="4B5563"/>
+                  <a:srgbClr val="949494"/>
                 </a:solidFill>
                 <a:latin typeface="Pretendard" pitchFamily="34" charset="0"/>
                 <a:ea typeface="Pretendard" pitchFamily="34" charset="-122"/>
@@ -9542,7 +9542,7 @@
           <a:noFill/>
           <a:ln w="12700">
             <a:solidFill>
-              <a:srgbClr val="111827"/>
+              <a:srgbClr val="111111"/>
             </a:solidFill>
             <a:prstDash val="solid"/>
           </a:ln>
@@ -9655,7 +9655,7 @@
             <a:r>
               <a:rPr lang="en-US" sz="3200" b="1" dirty="0">
                 <a:solidFill>
-                  <a:srgbClr val="111827"/>
+                  <a:srgbClr val="111111"/>
                 </a:solidFill>
                 <a:latin typeface="Pretendard" pitchFamily="34" charset="0"/>
                 <a:ea typeface="Pretendard" pitchFamily="34" charset="-122"/>
@@ -9697,7 +9697,7 @@
             <a:r>
               <a:rPr lang="en-US" sz="1700" dirty="0">
                 <a:solidFill>
-                  <a:srgbClr val="4B5563"/>
+                  <a:srgbClr val="949494"/>
                 </a:solidFill>
                 <a:latin typeface="Pretendard" pitchFamily="34" charset="0"/>
                 <a:ea typeface="Pretendard" pitchFamily="34" charset="-122"/>
@@ -9739,7 +9739,7 @@
             <a:r>
               <a:rPr lang="en-US" sz="1400" dirty="0">
                 <a:solidFill>
-                  <a:srgbClr val="4B5563"/>
+                  <a:srgbClr val="949494"/>
                 </a:solidFill>
                 <a:latin typeface="Pretendard" pitchFamily="34" charset="0"/>
                 <a:ea typeface="Pretendard" pitchFamily="34" charset="-122"/>
@@ -9781,7 +9781,7 @@
             <a:r>
               <a:rPr lang="en-US" sz="1400" dirty="0">
                 <a:solidFill>
-                  <a:srgbClr val="4B5563"/>
+                  <a:srgbClr val="949494"/>
                 </a:solidFill>
                 <a:latin typeface="Pretendard" pitchFamily="34" charset="0"/>
                 <a:ea typeface="Pretendard" pitchFamily="34" charset="-122"/>
@@ -9935,7 +9935,7 @@
             <a:r>
               <a:rPr lang="en-US" sz="3400" b="1" dirty="0">
                 <a:solidFill>
-                  <a:srgbClr val="111827"/>
+                  <a:srgbClr val="111111"/>
                 </a:solidFill>
                 <a:latin typeface="Pretendard" pitchFamily="34" charset="0"/>
                 <a:ea typeface="Pretendard" pitchFamily="34" charset="-122"/>
@@ -10033,7 +10033,7 @@
             <a:r>
               <a:rPr lang="en-US" sz="1800" b="1" dirty="0">
                 <a:solidFill>
-                  <a:srgbClr val="111827"/>
+                  <a:srgbClr val="111111"/>
                 </a:solidFill>
                 <a:latin typeface="Pretendard" pitchFamily="34" charset="0"/>
                 <a:ea typeface="Pretendard" pitchFamily="34" charset="-122"/>
@@ -10175,7 +10175,7 @@
             <a:r>
               <a:rPr lang="en-US" sz="1800" b="1" dirty="0">
                 <a:solidFill>
-                  <a:srgbClr val="111827"/>
+                  <a:srgbClr val="111111"/>
                 </a:solidFill>
                 <a:latin typeface="Pretendard" pitchFamily="34" charset="0"/>
                 <a:ea typeface="Pretendard" pitchFamily="34" charset="-122"/>
@@ -10317,7 +10317,7 @@
             <a:r>
               <a:rPr lang="en-US" sz="1800" b="1" dirty="0">
                 <a:solidFill>
-                  <a:srgbClr val="111827"/>
+                  <a:srgbClr val="111111"/>
                 </a:solidFill>
                 <a:latin typeface="Pretendard" pitchFamily="34" charset="0"/>
                 <a:ea typeface="Pretendard" pitchFamily="34" charset="-122"/>
@@ -10459,7 +10459,7 @@
             <a:r>
               <a:rPr lang="en-US" sz="1800" b="1" dirty="0">
                 <a:solidFill>
-                  <a:srgbClr val="111827"/>
+                  <a:srgbClr val="111111"/>
                 </a:solidFill>
                 <a:latin typeface="Pretendard" pitchFamily="34" charset="0"/>
                 <a:ea typeface="Pretendard" pitchFamily="34" charset="-122"/>
@@ -10899,7 +10899,7 @@
             <a:r>
               <a:rPr lang="en-US" sz="3400" b="1" dirty="0">
                 <a:solidFill>
-                  <a:srgbClr val="111827"/>
+                  <a:srgbClr val="111111"/>
                 </a:solidFill>
                 <a:latin typeface="Pretendard" pitchFamily="34" charset="0"/>
                 <a:ea typeface="Pretendard" pitchFamily="34" charset="-122"/>
@@ -11015,7 +11015,7 @@
             <a:r>
               <a:rPr lang="en-US" sz="2200" dirty="0">
                 <a:solidFill>
-                  <a:srgbClr val="111827"/>
+                  <a:srgbClr val="111111"/>
                 </a:solidFill>
                 <a:latin typeface="Pretendard" pitchFamily="34" charset="0"/>
                 <a:ea typeface="Pretendard" pitchFamily="34" charset="-122"/>
@@ -11131,7 +11131,7 @@
             <a:r>
               <a:rPr lang="en-US" sz="2200" dirty="0">
                 <a:solidFill>
-                  <a:srgbClr val="111827"/>
+                  <a:srgbClr val="111111"/>
                 </a:solidFill>
                 <a:latin typeface="Pretendard" pitchFamily="34" charset="0"/>
                 <a:ea typeface="Pretendard" pitchFamily="34" charset="-122"/>
@@ -11247,7 +11247,7 @@
             <a:r>
               <a:rPr lang="en-US" sz="2200" dirty="0">
                 <a:solidFill>
-                  <a:srgbClr val="111827"/>
+                  <a:srgbClr val="111111"/>
                 </a:solidFill>
                 <a:latin typeface="Pretendard" pitchFamily="34" charset="0"/>
                 <a:ea typeface="Pretendard" pitchFamily="34" charset="-122"/>
@@ -11832,7 +11832,7 @@
             <a:r>
               <a:rPr lang="en-US" sz="3800" b="1" dirty="0">
                 <a:solidFill>
-                  <a:srgbClr val="111827"/>
+                  <a:srgbClr val="111111"/>
                 </a:solidFill>
                 <a:latin typeface="Pretendard" pitchFamily="34" charset="0"/>
                 <a:ea typeface="Pretendard" pitchFamily="34" charset="-122"/>
@@ -11874,7 +11874,7 @@
             <a:r>
               <a:rPr lang="en-US" sz="1800" dirty="0">
                 <a:solidFill>
-                  <a:srgbClr val="111827"/>
+                  <a:srgbClr val="111111"/>
                 </a:solidFill>
                 <a:latin typeface="Pretendard" pitchFamily="34" charset="0"/>
                 <a:ea typeface="Pretendard" pitchFamily="34" charset="-122"/>
@@ -11916,7 +11916,7 @@
             <a:r>
               <a:rPr lang="en-US" sz="1800" dirty="0">
                 <a:solidFill>
-                  <a:srgbClr val="111827"/>
+                  <a:srgbClr val="111111"/>
                 </a:solidFill>
                 <a:latin typeface="Pretendard" pitchFamily="34" charset="0"/>
                 <a:ea typeface="Pretendard" pitchFamily="34" charset="-122"/>
@@ -11958,7 +11958,7 @@
             <a:r>
               <a:rPr lang="en-US" sz="1800" dirty="0">
                 <a:solidFill>
-                  <a:srgbClr val="111827"/>
+                  <a:srgbClr val="111111"/>
                 </a:solidFill>
                 <a:latin typeface="Pretendard" pitchFamily="34" charset="0"/>
                 <a:ea typeface="Pretendard" pitchFamily="34" charset="-122"/>
@@ -12000,7 +12000,7 @@
             <a:r>
               <a:rPr lang="en-US" sz="1800" dirty="0">
                 <a:solidFill>
-                  <a:srgbClr val="111827"/>
+                  <a:srgbClr val="111111"/>
                 </a:solidFill>
                 <a:latin typeface="Pretendard" pitchFamily="34" charset="0"/>
                 <a:ea typeface="Pretendard" pitchFamily="34" charset="-122"/>
@@ -12042,7 +12042,7 @@
             <a:r>
               <a:rPr lang="en-US" sz="1800" dirty="0">
                 <a:solidFill>
-                  <a:srgbClr val="111827"/>
+                  <a:srgbClr val="111111"/>
                 </a:solidFill>
                 <a:latin typeface="Pretendard" pitchFamily="34" charset="0"/>
                 <a:ea typeface="Pretendard" pitchFamily="34" charset="-122"/>
@@ -12084,7 +12084,7 @@
             <a:r>
               <a:rPr lang="en-US" sz="1800" dirty="0">
                 <a:solidFill>
-                  <a:srgbClr val="111827"/>
+                  <a:srgbClr val="111111"/>
                 </a:solidFill>
                 <a:latin typeface="Pretendard" pitchFamily="34" charset="0"/>
                 <a:ea typeface="Pretendard" pitchFamily="34" charset="-122"/>
@@ -12126,7 +12126,7 @@
             <a:r>
               <a:rPr lang="en-US" sz="1800" dirty="0">
                 <a:solidFill>
-                  <a:srgbClr val="111827"/>
+                  <a:srgbClr val="111111"/>
                 </a:solidFill>
                 <a:latin typeface="Pretendard" pitchFamily="34" charset="0"/>
                 <a:ea typeface="Pretendard" pitchFamily="34" charset="-122"/>
@@ -12168,7 +12168,7 @@
             <a:r>
               <a:rPr lang="en-US" sz="1800" dirty="0">
                 <a:solidFill>
-                  <a:srgbClr val="111827"/>
+                  <a:srgbClr val="111111"/>
                 </a:solidFill>
                 <a:latin typeface="Pretendard" pitchFamily="34" charset="0"/>
                 <a:ea typeface="Pretendard" pitchFamily="34" charset="-122"/>
@@ -12210,7 +12210,7 @@
             <a:r>
               <a:rPr lang="en-US" sz="1800" dirty="0">
                 <a:solidFill>
-                  <a:srgbClr val="111827"/>
+                  <a:srgbClr val="111111"/>
                 </a:solidFill>
                 <a:latin typeface="Pretendard" pitchFamily="34" charset="0"/>
                 <a:ea typeface="Pretendard" pitchFamily="34" charset="-122"/>
@@ -12252,7 +12252,7 @@
             <a:r>
               <a:rPr lang="en-US" sz="1800" dirty="0">
                 <a:solidFill>
-                  <a:srgbClr val="111827"/>
+                  <a:srgbClr val="111111"/>
                 </a:solidFill>
                 <a:latin typeface="Pretendard" pitchFamily="34" charset="0"/>
                 <a:ea typeface="Pretendard" pitchFamily="34" charset="-122"/>
@@ -12294,7 +12294,7 @@
             <a:r>
               <a:rPr lang="en-US" sz="1800" dirty="0">
                 <a:solidFill>
-                  <a:srgbClr val="111827"/>
+                  <a:srgbClr val="111111"/>
                 </a:solidFill>
                 <a:latin typeface="Pretendard" pitchFamily="34" charset="0"/>
                 <a:ea typeface="Pretendard" pitchFamily="34" charset="-122"/>
@@ -12336,7 +12336,7 @@
             <a:r>
               <a:rPr lang="en-US" sz="1800" dirty="0">
                 <a:solidFill>
-                  <a:srgbClr val="111827"/>
+                  <a:srgbClr val="111111"/>
                 </a:solidFill>
                 <a:latin typeface="Pretendard" pitchFamily="34" charset="0"/>
                 <a:ea typeface="Pretendard" pitchFamily="34" charset="-122"/>
@@ -12378,7 +12378,7 @@
             <a:r>
               <a:rPr lang="en-US" sz="1800" dirty="0">
                 <a:solidFill>
-                  <a:srgbClr val="111827"/>
+                  <a:srgbClr val="111111"/>
                 </a:solidFill>
                 <a:latin typeface="Pretendard" pitchFamily="34" charset="0"/>
                 <a:ea typeface="Pretendard" pitchFamily="34" charset="-122"/>
@@ -12420,7 +12420,7 @@
             <a:r>
               <a:rPr lang="en-US" sz="1800" dirty="0">
                 <a:solidFill>
-                  <a:srgbClr val="111827"/>
+                  <a:srgbClr val="111111"/>
                 </a:solidFill>
                 <a:latin typeface="Pretendard" pitchFamily="34" charset="0"/>
                 <a:ea typeface="Pretendard" pitchFamily="34" charset="-122"/>
@@ -12598,7 +12598,7 @@
             <a:r>
               <a:rPr lang="en-US" sz="3400" b="1" dirty="0">
                 <a:solidFill>
-                  <a:srgbClr val="111827"/>
+                  <a:srgbClr val="111111"/>
                 </a:solidFill>
                 <a:latin typeface="Pretendard" pitchFamily="34" charset="0"/>
                 <a:ea typeface="Pretendard" pitchFamily="34" charset="-122"/>
@@ -12657,7 +12657,7 @@
             <a:r>
               <a:rPr lang="en-US" sz="2200" dirty="0">
                 <a:solidFill>
-                  <a:srgbClr val="111827"/>
+                  <a:srgbClr val="111111"/>
                 </a:solidFill>
                 <a:latin typeface="Pretendard" pitchFamily="34" charset="0"/>
                 <a:ea typeface="Pretendard" pitchFamily="34" charset="-122"/>
@@ -12716,7 +12716,7 @@
             <a:r>
               <a:rPr lang="en-US" sz="2200" dirty="0">
                 <a:solidFill>
-                  <a:srgbClr val="111827"/>
+                  <a:srgbClr val="111111"/>
                 </a:solidFill>
                 <a:latin typeface="Pretendard" pitchFamily="34" charset="0"/>
                 <a:ea typeface="Pretendard" pitchFamily="34" charset="-122"/>
@@ -13068,7 +13068,7 @@
             <a:r>
               <a:rPr lang="en-US" sz="3400" b="1" dirty="0">
                 <a:solidFill>
-                  <a:srgbClr val="111827"/>
+                  <a:srgbClr val="111111"/>
                 </a:solidFill>
                 <a:latin typeface="Pretendard" pitchFamily="34" charset="0"/>
                 <a:ea typeface="Pretendard" pitchFamily="34" charset="-122"/>
@@ -13184,7 +13184,7 @@
             <a:r>
               <a:rPr lang="en-US" sz="2200" dirty="0">
                 <a:solidFill>
-                  <a:srgbClr val="111827"/>
+                  <a:srgbClr val="111111"/>
                 </a:solidFill>
                 <a:latin typeface="Pretendard" pitchFamily="34" charset="0"/>
                 <a:ea typeface="Pretendard" pitchFamily="34" charset="-122"/>
@@ -13300,7 +13300,7 @@
             <a:r>
               <a:rPr lang="en-US" sz="2200" dirty="0">
                 <a:solidFill>
-                  <a:srgbClr val="111827"/>
+                  <a:srgbClr val="111111"/>
                 </a:solidFill>
                 <a:latin typeface="Pretendard" pitchFamily="34" charset="0"/>
                 <a:ea typeface="Pretendard" pitchFamily="34" charset="-122"/>
@@ -13416,7 +13416,7 @@
             <a:r>
               <a:rPr lang="en-US" sz="2200" dirty="0">
                 <a:solidFill>
-                  <a:srgbClr val="111827"/>
+                  <a:srgbClr val="111111"/>
                 </a:solidFill>
                 <a:latin typeface="Pretendard" pitchFamily="34" charset="0"/>
                 <a:ea typeface="Pretendard" pitchFamily="34" charset="-122"/>
@@ -13532,7 +13532,7 @@
             <a:r>
               <a:rPr lang="en-US" sz="2200" dirty="0">
                 <a:solidFill>
-                  <a:srgbClr val="111827"/>
+                  <a:srgbClr val="111111"/>
                 </a:solidFill>
                 <a:latin typeface="Pretendard" pitchFamily="34" charset="0"/>
                 <a:ea typeface="Pretendard" pitchFamily="34" charset="-122"/>
@@ -13884,7 +13884,7 @@
             <a:r>
               <a:rPr lang="en-US" sz="3400" b="1" dirty="0">
                 <a:solidFill>
-                  <a:srgbClr val="111827"/>
+                  <a:srgbClr val="111111"/>
                 </a:solidFill>
                 <a:latin typeface="Pretendard" pitchFamily="34" charset="0"/>
                 <a:ea typeface="Pretendard" pitchFamily="34" charset="-122"/>
@@ -14000,7 +14000,7 @@
             <a:r>
               <a:rPr lang="en-US" sz="2200" dirty="0">
                 <a:solidFill>
-                  <a:srgbClr val="111827"/>
+                  <a:srgbClr val="111111"/>
                 </a:solidFill>
                 <a:latin typeface="Pretendard" pitchFamily="34" charset="0"/>
                 <a:ea typeface="Pretendard" pitchFamily="34" charset="-122"/>
@@ -14116,7 +14116,7 @@
             <a:r>
               <a:rPr lang="en-US" sz="2200" dirty="0">
                 <a:solidFill>
-                  <a:srgbClr val="111827"/>
+                  <a:srgbClr val="111111"/>
                 </a:solidFill>
                 <a:latin typeface="Pretendard" pitchFamily="34" charset="0"/>
                 <a:ea typeface="Pretendard" pitchFamily="34" charset="-122"/>
@@ -14232,7 +14232,7 @@
             <a:r>
               <a:rPr lang="en-US" sz="2200" dirty="0">
                 <a:solidFill>
-                  <a:srgbClr val="111827"/>
+                  <a:srgbClr val="111111"/>
                 </a:solidFill>
                 <a:latin typeface="Pretendard" pitchFamily="34" charset="0"/>
                 <a:ea typeface="Pretendard" pitchFamily="34" charset="-122"/>
@@ -14348,7 +14348,7 @@
             <a:r>
               <a:rPr lang="en-US" sz="2200" dirty="0">
                 <a:solidFill>
-                  <a:srgbClr val="111827"/>
+                  <a:srgbClr val="111111"/>
                 </a:solidFill>
                 <a:latin typeface="Pretendard" pitchFamily="34" charset="0"/>
                 <a:ea typeface="Pretendard" pitchFamily="34" charset="-122"/>
@@ -14529,7 +14529,7 @@
             <a:r>
               <a:rPr lang="en-US" sz="3400" b="1" dirty="0">
                 <a:solidFill>
-                  <a:srgbClr val="111827"/>
+                  <a:srgbClr val="111111"/>
                 </a:solidFill>
                 <a:latin typeface="Pretendard" pitchFamily="34" charset="0"/>
                 <a:ea typeface="Pretendard" pitchFamily="34" charset="-122"/>
@@ -14588,7 +14588,7 @@
             <a:r>
               <a:rPr lang="en-US" sz="2200" dirty="0">
                 <a:solidFill>
-                  <a:srgbClr val="111827"/>
+                  <a:srgbClr val="111111"/>
                 </a:solidFill>
                 <a:latin typeface="Pretendard" pitchFamily="34" charset="0"/>
                 <a:ea typeface="Pretendard" pitchFamily="34" charset="-122"/>
@@ -14628,7 +14628,7 @@
             <a:r>
               <a:rPr lang="en-US" sz="2200" dirty="0">
                 <a:solidFill>
-                  <a:srgbClr val="111827"/>
+                  <a:srgbClr val="111111"/>
                 </a:solidFill>
                 <a:latin typeface="Pretendard" pitchFamily="34" charset="0"/>
                 <a:ea typeface="Pretendard" pitchFamily="34" charset="-122"/>
@@ -14668,7 +14668,7 @@
             <a:r>
               <a:rPr lang="en-US" sz="2200" dirty="0">
                 <a:solidFill>
-                  <a:srgbClr val="111827"/>
+                  <a:srgbClr val="111111"/>
                 </a:solidFill>
                 <a:latin typeface="Pretendard" pitchFamily="34" charset="0"/>
                 <a:ea typeface="Pretendard" pitchFamily="34" charset="-122"/>
@@ -14939,7 +14939,7 @@
             <a:r>
               <a:rPr lang="en-US" sz="3400" b="1" dirty="0">
                 <a:solidFill>
-                  <a:srgbClr val="111827"/>
+                  <a:srgbClr val="111111"/>
                 </a:solidFill>
                 <a:latin typeface="Pretendard" pitchFamily="34" charset="0"/>
                 <a:ea typeface="Pretendard" pitchFamily="34" charset="-122"/>
@@ -15143,7 +15143,7 @@
                       <a:r>
                         <a:rPr lang="en-US" sz="1800" b="1" dirty="0">
                           <a:solidFill>
-                            <a:srgbClr val="111827"/>
+                            <a:srgbClr val="111111"/>
                           </a:solidFill>
                           <a:latin typeface="Pretendard" pitchFamily="34" charset="0"/>
                           <a:ea typeface="Pretendard" pitchFamily="34" charset="-122"/>
@@ -15208,7 +15208,7 @@
                       <a:r>
                         <a:rPr lang="en-US" sz="1800" dirty="0">
                           <a:solidFill>
-                            <a:srgbClr val="111827"/>
+                            <a:srgbClr val="111111"/>
                           </a:solidFill>
                           <a:latin typeface="Pretendard" pitchFamily="34" charset="0"/>
                           <a:ea typeface="Pretendard" pitchFamily="34" charset="-122"/>
@@ -15275,7 +15275,7 @@
                       <a:r>
                         <a:rPr lang="en-US" sz="1800" b="1" dirty="0">
                           <a:solidFill>
-                            <a:srgbClr val="111827"/>
+                            <a:srgbClr val="111111"/>
                           </a:solidFill>
                           <a:latin typeface="Pretendard" pitchFamily="34" charset="0"/>
                           <a:ea typeface="Pretendard" pitchFamily="34" charset="-122"/>
@@ -15345,7 +15345,7 @@
                       <a:r>
                         <a:rPr lang="en-US" sz="1800" dirty="0">
                           <a:solidFill>
-                            <a:srgbClr val="111827"/>
+                            <a:srgbClr val="111111"/>
                           </a:solidFill>
                           <a:latin typeface="Pretendard" pitchFamily="34" charset="0"/>
                           <a:ea typeface="Pretendard" pitchFamily="34" charset="-122"/>
@@ -15456,7 +15456,7 @@
             <a:r>
               <a:rPr lang="en-US" sz="1800" dirty="0">
                 <a:solidFill>
-                  <a:srgbClr val="111827"/>
+                  <a:srgbClr val="111111"/>
                 </a:solidFill>
                 <a:latin typeface="Pretendard" pitchFamily="34" charset="0"/>
                 <a:ea typeface="Pretendard" pitchFamily="34" charset="-122"/>
@@ -15496,7 +15496,7 @@
             <a:r>
               <a:rPr lang="en-US" sz="1800" dirty="0">
                 <a:solidFill>
-                  <a:srgbClr val="111827"/>
+                  <a:srgbClr val="111111"/>
                 </a:solidFill>
                 <a:latin typeface="Pretendard" pitchFamily="34" charset="0"/>
                 <a:ea typeface="Pretendard" pitchFamily="34" charset="-122"/>
@@ -15850,7 +15850,7 @@
             <a:r>
               <a:rPr lang="en-US" sz="3400" b="1" dirty="0">
                 <a:solidFill>
-                  <a:srgbClr val="111827"/>
+                  <a:srgbClr val="111111"/>
                 </a:solidFill>
                 <a:latin typeface="Pretendard" pitchFamily="34" charset="0"/>
                 <a:ea typeface="Pretendard" pitchFamily="34" charset="-122"/>
@@ -15966,7 +15966,7 @@
             <a:r>
               <a:rPr lang="en-US" sz="2200" dirty="0">
                 <a:solidFill>
-                  <a:srgbClr val="111827"/>
+                  <a:srgbClr val="111111"/>
                 </a:solidFill>
                 <a:latin typeface="Pretendard" pitchFamily="34" charset="0"/>
                 <a:ea typeface="Pretendard" pitchFamily="34" charset="-122"/>
@@ -16082,7 +16082,7 @@
             <a:r>
               <a:rPr lang="en-US" sz="2200" dirty="0">
                 <a:solidFill>
-                  <a:srgbClr val="111827"/>
+                  <a:srgbClr val="111111"/>
                 </a:solidFill>
                 <a:latin typeface="Pretendard" pitchFamily="34" charset="0"/>
                 <a:ea typeface="Pretendard" pitchFamily="34" charset="-122"/>
@@ -16198,7 +16198,7 @@
             <a:r>
               <a:rPr lang="en-US" sz="2200" dirty="0">
                 <a:solidFill>
-                  <a:srgbClr val="111827"/>
+                  <a:srgbClr val="111111"/>
                 </a:solidFill>
                 <a:latin typeface="Pretendard" pitchFamily="34" charset="0"/>
                 <a:ea typeface="Pretendard" pitchFamily="34" charset="-122"/>
@@ -16403,7 +16403,7 @@
             <a:r>
               <a:rPr lang="en-US" sz="3800" b="1" dirty="0">
                 <a:solidFill>
-                  <a:srgbClr val="111827"/>
+                  <a:srgbClr val="111111"/>
                 </a:solidFill>
                 <a:latin typeface="Pretendard" pitchFamily="34" charset="0"/>
                 <a:ea typeface="Pretendard" pitchFamily="34" charset="-122"/>
@@ -16445,7 +16445,7 @@
             <a:r>
               <a:rPr lang="en-US" sz="2200" dirty="0">
                 <a:solidFill>
-                  <a:srgbClr val="111827"/>
+                  <a:srgbClr val="111111"/>
                 </a:solidFill>
                 <a:latin typeface="Pretendard" pitchFamily="34" charset="0"/>
                 <a:ea typeface="Pretendard" pitchFamily="34" charset="-122"/>
@@ -16655,7 +16655,7 @@
             <a:r>
               <a:rPr lang="en-US" sz="3400" b="1" dirty="0">
                 <a:solidFill>
-                  <a:srgbClr val="111827"/>
+                  <a:srgbClr val="111111"/>
                 </a:solidFill>
                 <a:latin typeface="Pretendard" pitchFamily="34" charset="0"/>
                 <a:ea typeface="Pretendard" pitchFamily="34" charset="-122"/>
@@ -16697,7 +16697,7 @@
             <a:r>
               <a:rPr lang="en-US" sz="2200" b="1" dirty="0">
                 <a:solidFill>
-                  <a:srgbClr val="111827"/>
+                  <a:srgbClr val="111111"/>
                 </a:solidFill>
                 <a:latin typeface="Pretendard" pitchFamily="34" charset="0"/>
                 <a:ea typeface="Pretendard" pitchFamily="34" charset="-122"/>
@@ -16756,7 +16756,7 @@
             <a:r>
               <a:rPr lang="en-US" sz="2200" dirty="0">
                 <a:solidFill>
-                  <a:srgbClr val="111827"/>
+                  <a:srgbClr val="111111"/>
                 </a:solidFill>
                 <a:latin typeface="Pretendard" pitchFamily="34" charset="0"/>
                 <a:ea typeface="Pretendard" pitchFamily="34" charset="-122"/>
@@ -16796,7 +16796,7 @@
             <a:r>
               <a:rPr lang="en-US" sz="2200" dirty="0">
                 <a:solidFill>
-                  <a:srgbClr val="111827"/>
+                  <a:srgbClr val="111111"/>
                 </a:solidFill>
                 <a:latin typeface="Pretendard" pitchFamily="34" charset="0"/>
                 <a:ea typeface="Pretendard" pitchFamily="34" charset="-122"/>
@@ -16836,7 +16836,7 @@
             <a:r>
               <a:rPr lang="en-US" sz="2200" dirty="0">
                 <a:solidFill>
-                  <a:srgbClr val="111827"/>
+                  <a:srgbClr val="111111"/>
                 </a:solidFill>
                 <a:latin typeface="Pretendard" pitchFamily="34" charset="0"/>
                 <a:ea typeface="Pretendard" pitchFamily="34" charset="-122"/>
@@ -16876,7 +16876,7 @@
             <a:r>
               <a:rPr lang="en-US" sz="2200" dirty="0">
                 <a:solidFill>
-                  <a:srgbClr val="111827"/>
+                  <a:srgbClr val="111111"/>
                 </a:solidFill>
                 <a:latin typeface="Pretendard" pitchFamily="34" charset="0"/>
                 <a:ea typeface="Pretendard" pitchFamily="34" charset="-122"/>
@@ -17200,7 +17200,7 @@
             <a:r>
               <a:rPr lang="en-US" sz="3400" b="1" dirty="0">
                 <a:solidFill>
-                  <a:srgbClr val="111827"/>
+                  <a:srgbClr val="111111"/>
                 </a:solidFill>
                 <a:latin typeface="Pretendard" pitchFamily="34" charset="0"/>
                 <a:ea typeface="Pretendard" pitchFamily="34" charset="-122"/>
@@ -17316,7 +17316,7 @@
             <a:r>
               <a:rPr lang="en-US" sz="2200" dirty="0">
                 <a:solidFill>
-                  <a:srgbClr val="111827"/>
+                  <a:srgbClr val="111111"/>
                 </a:solidFill>
                 <a:latin typeface="Pretendard" pitchFamily="34" charset="0"/>
                 <a:ea typeface="Pretendard" pitchFamily="34" charset="-122"/>
@@ -17432,7 +17432,7 @@
             <a:r>
               <a:rPr lang="en-US" sz="2200" dirty="0">
                 <a:solidFill>
-                  <a:srgbClr val="111827"/>
+                  <a:srgbClr val="111111"/>
                 </a:solidFill>
                 <a:latin typeface="Pretendard" pitchFamily="34" charset="0"/>
                 <a:ea typeface="Pretendard" pitchFamily="34" charset="-122"/>
@@ -17548,7 +17548,7 @@
             <a:r>
               <a:rPr lang="en-US" sz="2200" dirty="0">
                 <a:solidFill>
-                  <a:srgbClr val="111827"/>
+                  <a:srgbClr val="111111"/>
                 </a:solidFill>
                 <a:latin typeface="Pretendard" pitchFamily="34" charset="0"/>
                 <a:ea typeface="Pretendard" pitchFamily="34" charset="-122"/>
@@ -17726,7 +17726,7 @@
             <a:r>
               <a:rPr lang="en-US" sz="3400" b="1" dirty="0">
                 <a:solidFill>
-                  <a:srgbClr val="111827"/>
+                  <a:srgbClr val="111111"/>
                 </a:solidFill>
                 <a:latin typeface="Pretendard" pitchFamily="34" charset="0"/>
                 <a:ea typeface="Pretendard" pitchFamily="34" charset="-122"/>
@@ -17785,7 +17785,7 @@
             <a:r>
               <a:rPr lang="en-US" sz="2200" dirty="0">
                 <a:solidFill>
-                  <a:srgbClr val="111827"/>
+                  <a:srgbClr val="111111"/>
                 </a:solidFill>
                 <a:latin typeface="Pretendard" pitchFamily="34" charset="0"/>
                 <a:ea typeface="Pretendard" pitchFamily="34" charset="-122"/>
@@ -17844,7 +17844,7 @@
             <a:r>
               <a:rPr lang="en-US" sz="2200" dirty="0">
                 <a:solidFill>
-                  <a:srgbClr val="111827"/>
+                  <a:srgbClr val="111111"/>
                 </a:solidFill>
                 <a:latin typeface="Pretendard" pitchFamily="34" charset="0"/>
                 <a:ea typeface="Pretendard" pitchFamily="34" charset="-122"/>
@@ -18168,7 +18168,7 @@
             <a:r>
               <a:rPr lang="en-US" sz="3400" b="1" dirty="0">
                 <a:solidFill>
-                  <a:srgbClr val="111827"/>
+                  <a:srgbClr val="111111"/>
                 </a:solidFill>
                 <a:latin typeface="Pretendard" pitchFamily="34" charset="0"/>
                 <a:ea typeface="Pretendard" pitchFamily="34" charset="-122"/>
@@ -18284,7 +18284,7 @@
             <a:r>
               <a:rPr lang="en-US" sz="2200" dirty="0">
                 <a:solidFill>
-                  <a:srgbClr val="111827"/>
+                  <a:srgbClr val="111111"/>
                 </a:solidFill>
                 <a:latin typeface="Pretendard" pitchFamily="34" charset="0"/>
                 <a:ea typeface="Pretendard" pitchFamily="34" charset="-122"/>
@@ -18400,7 +18400,7 @@
             <a:r>
               <a:rPr lang="en-US" sz="2200" dirty="0">
                 <a:solidFill>
-                  <a:srgbClr val="111827"/>
+                  <a:srgbClr val="111111"/>
                 </a:solidFill>
                 <a:latin typeface="Pretendard" pitchFamily="34" charset="0"/>
                 <a:ea typeface="Pretendard" pitchFamily="34" charset="-122"/>
@@ -18516,7 +18516,7 @@
             <a:r>
               <a:rPr lang="en-US" sz="2200" dirty="0">
                 <a:solidFill>
-                  <a:srgbClr val="111827"/>
+                  <a:srgbClr val="111111"/>
                 </a:solidFill>
                 <a:latin typeface="Pretendard" pitchFamily="34" charset="0"/>
                 <a:ea typeface="Pretendard" pitchFamily="34" charset="-122"/>
@@ -18694,7 +18694,7 @@
             <a:r>
               <a:rPr lang="en-US" sz="3400" b="1" dirty="0">
                 <a:solidFill>
-                  <a:srgbClr val="111827"/>
+                  <a:srgbClr val="111111"/>
                 </a:solidFill>
                 <a:latin typeface="Pretendard" pitchFamily="34" charset="0"/>
                 <a:ea typeface="Pretendard" pitchFamily="34" charset="-122"/>
@@ -18753,7 +18753,7 @@
             <a:r>
               <a:rPr lang="en-US" sz="2200" dirty="0">
                 <a:solidFill>
-                  <a:srgbClr val="111827"/>
+                  <a:srgbClr val="111111"/>
                 </a:solidFill>
                 <a:latin typeface="Pretendard" pitchFamily="34" charset="0"/>
                 <a:ea typeface="Pretendard" pitchFamily="34" charset="-122"/>
@@ -18812,7 +18812,7 @@
             <a:r>
               <a:rPr lang="en-US" sz="2200" dirty="0">
                 <a:solidFill>
-                  <a:srgbClr val="111827"/>
+                  <a:srgbClr val="111111"/>
                 </a:solidFill>
                 <a:latin typeface="Pretendard" pitchFamily="34" charset="0"/>
                 <a:ea typeface="Pretendard" pitchFamily="34" charset="-122"/>
@@ -18990,7 +18990,7 @@
             <a:r>
               <a:rPr lang="en-US" sz="3400" b="1" dirty="0">
                 <a:solidFill>
-                  <a:srgbClr val="111827"/>
+                  <a:srgbClr val="111111"/>
                 </a:solidFill>
                 <a:latin typeface="Pretendard" pitchFamily="34" charset="0"/>
                 <a:ea typeface="Pretendard" pitchFamily="34" charset="-122"/>
@@ -19049,7 +19049,7 @@
             <a:r>
               <a:rPr lang="en-US" sz="2200" dirty="0">
                 <a:solidFill>
-                  <a:srgbClr val="111827"/>
+                  <a:srgbClr val="111111"/>
                 </a:solidFill>
                 <a:latin typeface="Pretendard" pitchFamily="34" charset="0"/>
                 <a:ea typeface="Pretendard" pitchFamily="34" charset="-122"/>
@@ -19108,7 +19108,7 @@
             <a:r>
               <a:rPr lang="en-US" sz="2200" dirty="0">
                 <a:solidFill>
-                  <a:srgbClr val="111827"/>
+                  <a:srgbClr val="111111"/>
                 </a:solidFill>
                 <a:latin typeface="Pretendard" pitchFamily="34" charset="0"/>
                 <a:ea typeface="Pretendard" pitchFamily="34" charset="-122"/>
@@ -19133,13 +19133,13 @@
   <a:themeElements>
     <a:clrScheme name="Office">
       <a:dk1>
-        <a:srgbClr val="111827"/>
+        <a:srgbClr val="111111"/>
       </a:dk1>
       <a:lt1>
         <a:srgbClr val="FFFFFF"/>
       </a:lt1>
       <a:dk2>
-        <a:srgbClr val="4B5563"/>
+        <a:srgbClr val="949494"/>
       </a:dk2>
       <a:lt2>
         <a:srgbClr val="FFFFFF"/>
@@ -19154,13 +19154,13 @@
         <a:srgbClr val="111827"/>
       </a:accent3>
       <a:accent4>
-        <a:srgbClr val="4B5563"/>
+        <a:srgbClr val="949494"/>
       </a:accent4>
       <a:accent5>
         <a:srgbClr val="E5E7EB"/>
       </a:accent5>
       <a:accent6>
-        <a:srgbClr val="111827"/>
+        <a:srgbClr val="111111"/>
       </a:accent6>
       <a:hlink>
         <a:srgbClr val="111827"/>

--- a/docs/theme-preview/pptx/minimalism.pptx
+++ b/docs/theme-preview/pptx/minimalism.pptx
@@ -3646,7 +3646,132 @@
       </p:sp>
       <p:sp>
         <p:nvSpPr>
-          <p:cNvPr id="4" name="mdpr:mdpr-design-grammar-b3a462:title:__title:mdpr-design-grammar-b3a462"/>
+          <p:cNvPr id="4" name="Shape 2"/>
+          <p:cNvSpPr/>
+          <p:nvPr/>
+        </p:nvSpPr>
+        <p:spPr>
+          <a:xfrm>
+            <a:off x="585216" y="585216"/>
+            <a:ext cx="329184" cy="0"/>
+          </a:xfrm>
+          <a:prstGeom prst="line">
+            <a:avLst/>
+          </a:prstGeom>
+          <a:noFill/>
+          <a:ln w="12700">
+            <a:solidFill>
+              <a:srgbClr val="E5E7EB">
+                <a:alpha val="72000"/>
+              </a:srgbClr>
+            </a:solidFill>
+            <a:prstDash val="solid"/>
+          </a:ln>
+        </p:spPr>
+      </p:sp>
+      <p:sp>
+        <p:nvSpPr>
+          <p:cNvPr id="5" name="Shape 3"/>
+          <p:cNvSpPr/>
+          <p:nvPr/>
+        </p:nvSpPr>
+        <p:spPr>
+          <a:xfrm>
+            <a:off x="585216" y="585216"/>
+            <a:ext cx="0" cy="329184"/>
+          </a:xfrm>
+          <a:prstGeom prst="line">
+            <a:avLst/>
+          </a:prstGeom>
+          <a:noFill/>
+          <a:ln w="12700">
+            <a:solidFill>
+              <a:srgbClr val="E5E7EB">
+                <a:alpha val="72000"/>
+              </a:srgbClr>
+            </a:solidFill>
+            <a:prstDash val="solid"/>
+          </a:ln>
+        </p:spPr>
+      </p:sp>
+      <p:sp>
+        <p:nvSpPr>
+          <p:cNvPr id="6" name="Shape 4"/>
+          <p:cNvSpPr/>
+          <p:nvPr/>
+        </p:nvSpPr>
+        <p:spPr>
+          <a:xfrm>
+            <a:off x="11277295" y="6272784"/>
+            <a:ext cx="329184" cy="0"/>
+          </a:xfrm>
+          <a:prstGeom prst="line">
+            <a:avLst/>
+          </a:prstGeom>
+          <a:noFill/>
+          <a:ln w="12700">
+            <a:solidFill>
+              <a:srgbClr val="E5E7EB">
+                <a:alpha val="72000"/>
+              </a:srgbClr>
+            </a:solidFill>
+            <a:prstDash val="solid"/>
+          </a:ln>
+        </p:spPr>
+      </p:sp>
+      <p:sp>
+        <p:nvSpPr>
+          <p:cNvPr id="7" name="Shape 5"/>
+          <p:cNvSpPr/>
+          <p:nvPr/>
+        </p:nvSpPr>
+        <p:spPr>
+          <a:xfrm>
+            <a:off x="11606479" y="5943600"/>
+            <a:ext cx="0" cy="329184"/>
+          </a:xfrm>
+          <a:prstGeom prst="line">
+            <a:avLst/>
+          </a:prstGeom>
+          <a:noFill/>
+          <a:ln w="12700">
+            <a:solidFill>
+              <a:srgbClr val="E5E7EB">
+                <a:alpha val="72000"/>
+              </a:srgbClr>
+            </a:solidFill>
+            <a:prstDash val="solid"/>
+          </a:ln>
+        </p:spPr>
+      </p:sp>
+      <p:sp>
+        <p:nvSpPr>
+          <p:cNvPr id="8" name="Shape 6"/>
+          <p:cNvSpPr/>
+          <p:nvPr/>
+        </p:nvSpPr>
+        <p:spPr>
+          <a:xfrm>
+            <a:off x="749808" y="6437376"/>
+            <a:ext cx="10692079" cy="0"/>
+          </a:xfrm>
+          <a:prstGeom prst="line">
+            <a:avLst/>
+          </a:prstGeom>
+          <a:noFill/>
+          <a:ln w="12700">
+            <a:solidFill>
+              <a:srgbClr val="E5E7EB">
+                <a:alpha val="18000"/>
+              </a:srgbClr>
+            </a:solidFill>
+            <a:prstDash val="solid"/>
+          </a:ln>
+        </p:spPr>
+      </p:sp>
+      <p:sp>
+        <p:nvSpPr>
+          <p:cNvPr id="9" name="mdpr:mdpr-design-grammar-b3a462:title:__title:mdpr-design-grammar-b3a462"/>
           <p:cNvSpPr txBox="1"/>
           <p:nvPr/>
         </p:nvSpPr>
@@ -3776,6 +3901,131 @@
         </p:nvSpPr>
         <p:spPr>
           <a:xfrm>
+            <a:off x="585216" y="585216"/>
+            <a:ext cx="329184" cy="0"/>
+          </a:xfrm>
+          <a:prstGeom prst="line">
+            <a:avLst/>
+          </a:prstGeom>
+          <a:noFill/>
+          <a:ln w="12700">
+            <a:solidFill>
+              <a:srgbClr val="E5E7EB">
+                <a:alpha val="72000"/>
+              </a:srgbClr>
+            </a:solidFill>
+            <a:prstDash val="solid"/>
+          </a:ln>
+        </p:spPr>
+      </p:sp>
+      <p:sp>
+        <p:nvSpPr>
+          <p:cNvPr id="5" name="Shape 3"/>
+          <p:cNvSpPr/>
+          <p:nvPr/>
+        </p:nvSpPr>
+        <p:spPr>
+          <a:xfrm>
+            <a:off x="585216" y="585216"/>
+            <a:ext cx="0" cy="329184"/>
+          </a:xfrm>
+          <a:prstGeom prst="line">
+            <a:avLst/>
+          </a:prstGeom>
+          <a:noFill/>
+          <a:ln w="12700">
+            <a:solidFill>
+              <a:srgbClr val="E5E7EB">
+                <a:alpha val="72000"/>
+              </a:srgbClr>
+            </a:solidFill>
+            <a:prstDash val="solid"/>
+          </a:ln>
+        </p:spPr>
+      </p:sp>
+      <p:sp>
+        <p:nvSpPr>
+          <p:cNvPr id="6" name="Shape 4"/>
+          <p:cNvSpPr/>
+          <p:nvPr/>
+        </p:nvSpPr>
+        <p:spPr>
+          <a:xfrm>
+            <a:off x="11277295" y="6272784"/>
+            <a:ext cx="329184" cy="0"/>
+          </a:xfrm>
+          <a:prstGeom prst="line">
+            <a:avLst/>
+          </a:prstGeom>
+          <a:noFill/>
+          <a:ln w="12700">
+            <a:solidFill>
+              <a:srgbClr val="E5E7EB">
+                <a:alpha val="72000"/>
+              </a:srgbClr>
+            </a:solidFill>
+            <a:prstDash val="solid"/>
+          </a:ln>
+        </p:spPr>
+      </p:sp>
+      <p:sp>
+        <p:nvSpPr>
+          <p:cNvPr id="7" name="Shape 5"/>
+          <p:cNvSpPr/>
+          <p:nvPr/>
+        </p:nvSpPr>
+        <p:spPr>
+          <a:xfrm>
+            <a:off x="11606479" y="5943600"/>
+            <a:ext cx="0" cy="329184"/>
+          </a:xfrm>
+          <a:prstGeom prst="line">
+            <a:avLst/>
+          </a:prstGeom>
+          <a:noFill/>
+          <a:ln w="12700">
+            <a:solidFill>
+              <a:srgbClr val="E5E7EB">
+                <a:alpha val="72000"/>
+              </a:srgbClr>
+            </a:solidFill>
+            <a:prstDash val="solid"/>
+          </a:ln>
+        </p:spPr>
+      </p:sp>
+      <p:sp>
+        <p:nvSpPr>
+          <p:cNvPr id="8" name="Shape 6"/>
+          <p:cNvSpPr/>
+          <p:nvPr/>
+        </p:nvSpPr>
+        <p:spPr>
+          <a:xfrm>
+            <a:off x="749808" y="6437376"/>
+            <a:ext cx="10692079" cy="0"/>
+          </a:xfrm>
+          <a:prstGeom prst="line">
+            <a:avLst/>
+          </a:prstGeom>
+          <a:noFill/>
+          <a:ln w="12700">
+            <a:solidFill>
+              <a:srgbClr val="E5E7EB">
+                <a:alpha val="18000"/>
+              </a:srgbClr>
+            </a:solidFill>
+            <a:prstDash val="solid"/>
+          </a:ln>
+        </p:spPr>
+      </p:sp>
+      <p:sp>
+        <p:nvSpPr>
+          <p:cNvPr id="9" name="Shape 7"/>
+          <p:cNvSpPr/>
+          <p:nvPr/>
+        </p:nvSpPr>
+        <p:spPr>
+          <a:xfrm>
             <a:off x="822960" y="1554480"/>
             <a:ext cx="4937760" cy="73152"/>
           </a:xfrm>
@@ -3797,7 +4047,7 @@
       </p:sp>
       <p:sp>
         <p:nvSpPr>
-          <p:cNvPr id="5" name="Shape 3"/>
+          <p:cNvPr id="10" name="Shape 8"/>
           <p:cNvSpPr/>
           <p:nvPr/>
         </p:nvSpPr>
@@ -3824,7 +4074,7 @@
       </p:sp>
       <p:sp>
         <p:nvSpPr>
-          <p:cNvPr id="6" name="mdpr:2-2-a9df10:title:__title:2-2-a9df10"/>
+          <p:cNvPr id="11" name="mdpr:2-2-a9df10:title:__title:2-2-a9df10"/>
           <p:cNvSpPr txBox="1"/>
           <p:nvPr/>
         </p:nvSpPr>
@@ -3866,7 +4116,7 @@
       </p:sp>
       <p:sp>
         <p:nvSpPr>
-          <p:cNvPr id="7" name="mdpr:2-2-a9df10:left:block-10-chunk-2"/>
+          <p:cNvPr id="12" name="mdpr:2-2-a9df10:left:block-10-chunk-2"/>
           <p:cNvSpPr txBox="1"/>
           <p:nvPr/>
         </p:nvSpPr>
@@ -3925,7 +4175,7 @@
       </p:sp>
       <p:sp>
         <p:nvSpPr>
-          <p:cNvPr id="8" name="mdpr:2-2-a9df10:right:block-10-chunk-2"/>
+          <p:cNvPr id="13" name="mdpr:2-2-a9df10:right:block-10-chunk-2"/>
           <p:cNvSpPr txBox="1"/>
           <p:nvPr/>
         </p:nvSpPr>
@@ -4066,7 +4316,132 @@
       </p:sp>
       <p:sp>
         <p:nvSpPr>
-          <p:cNvPr id="4" name="mdpr:pipeline-diagram-51792c:title:__title:pipeline-diagram-51792c"/>
+          <p:cNvPr id="4" name="Shape 2"/>
+          <p:cNvSpPr/>
+          <p:nvPr/>
+        </p:nvSpPr>
+        <p:spPr>
+          <a:xfrm>
+            <a:off x="585216" y="585216"/>
+            <a:ext cx="329184" cy="0"/>
+          </a:xfrm>
+          <a:prstGeom prst="line">
+            <a:avLst/>
+          </a:prstGeom>
+          <a:noFill/>
+          <a:ln w="12700">
+            <a:solidFill>
+              <a:srgbClr val="E5E7EB">
+                <a:alpha val="72000"/>
+              </a:srgbClr>
+            </a:solidFill>
+            <a:prstDash val="solid"/>
+          </a:ln>
+        </p:spPr>
+      </p:sp>
+      <p:sp>
+        <p:nvSpPr>
+          <p:cNvPr id="5" name="Shape 3"/>
+          <p:cNvSpPr/>
+          <p:nvPr/>
+        </p:nvSpPr>
+        <p:spPr>
+          <a:xfrm>
+            <a:off x="585216" y="585216"/>
+            <a:ext cx="0" cy="329184"/>
+          </a:xfrm>
+          <a:prstGeom prst="line">
+            <a:avLst/>
+          </a:prstGeom>
+          <a:noFill/>
+          <a:ln w="12700">
+            <a:solidFill>
+              <a:srgbClr val="E5E7EB">
+                <a:alpha val="72000"/>
+              </a:srgbClr>
+            </a:solidFill>
+            <a:prstDash val="solid"/>
+          </a:ln>
+        </p:spPr>
+      </p:sp>
+      <p:sp>
+        <p:nvSpPr>
+          <p:cNvPr id="6" name="Shape 4"/>
+          <p:cNvSpPr/>
+          <p:nvPr/>
+        </p:nvSpPr>
+        <p:spPr>
+          <a:xfrm>
+            <a:off x="11277295" y="6272784"/>
+            <a:ext cx="329184" cy="0"/>
+          </a:xfrm>
+          <a:prstGeom prst="line">
+            <a:avLst/>
+          </a:prstGeom>
+          <a:noFill/>
+          <a:ln w="12700">
+            <a:solidFill>
+              <a:srgbClr val="E5E7EB">
+                <a:alpha val="72000"/>
+              </a:srgbClr>
+            </a:solidFill>
+            <a:prstDash val="solid"/>
+          </a:ln>
+        </p:spPr>
+      </p:sp>
+      <p:sp>
+        <p:nvSpPr>
+          <p:cNvPr id="7" name="Shape 5"/>
+          <p:cNvSpPr/>
+          <p:nvPr/>
+        </p:nvSpPr>
+        <p:spPr>
+          <a:xfrm>
+            <a:off x="11606479" y="5943600"/>
+            <a:ext cx="0" cy="329184"/>
+          </a:xfrm>
+          <a:prstGeom prst="line">
+            <a:avLst/>
+          </a:prstGeom>
+          <a:noFill/>
+          <a:ln w="12700">
+            <a:solidFill>
+              <a:srgbClr val="E5E7EB">
+                <a:alpha val="72000"/>
+              </a:srgbClr>
+            </a:solidFill>
+            <a:prstDash val="solid"/>
+          </a:ln>
+        </p:spPr>
+      </p:sp>
+      <p:sp>
+        <p:nvSpPr>
+          <p:cNvPr id="8" name="Shape 6"/>
+          <p:cNvSpPr/>
+          <p:nvPr/>
+        </p:nvSpPr>
+        <p:spPr>
+          <a:xfrm>
+            <a:off x="749808" y="6437376"/>
+            <a:ext cx="10692079" cy="0"/>
+          </a:xfrm>
+          <a:prstGeom prst="line">
+            <a:avLst/>
+          </a:prstGeom>
+          <a:noFill/>
+          <a:ln w="12700">
+            <a:solidFill>
+              <a:srgbClr val="E5E7EB">
+                <a:alpha val="18000"/>
+              </a:srgbClr>
+            </a:solidFill>
+            <a:prstDash val="solid"/>
+          </a:ln>
+        </p:spPr>
+      </p:sp>
+      <p:sp>
+        <p:nvSpPr>
+          <p:cNvPr id="9" name="mdpr:pipeline-diagram-51792c:title:__title:pipeline-diagram-51792c"/>
           <p:cNvSpPr txBox="1"/>
           <p:nvPr/>
         </p:nvSpPr>
@@ -4108,7 +4483,7 @@
       </p:sp>
       <p:sp>
         <p:nvSpPr>
-          <p:cNvPr id="5" name="Shape 3"/>
+          <p:cNvPr id="10" name="Shape 8"/>
           <p:cNvSpPr/>
           <p:nvPr/>
         </p:nvSpPr>
@@ -4132,7 +4507,7 @@
       </p:sp>
       <p:sp>
         <p:nvSpPr>
-          <p:cNvPr id="6" name="Shape 4"/>
+          <p:cNvPr id="11" name="Shape 9"/>
           <p:cNvSpPr/>
           <p:nvPr/>
         </p:nvSpPr>
@@ -4156,7 +4531,7 @@
       </p:sp>
       <p:sp>
         <p:nvSpPr>
-          <p:cNvPr id="7" name="Shape 5"/>
+          <p:cNvPr id="12" name="Shape 10"/>
           <p:cNvSpPr/>
           <p:nvPr/>
         </p:nvSpPr>
@@ -4180,7 +4555,7 @@
       </p:sp>
       <p:sp>
         <p:nvSpPr>
-          <p:cNvPr id="8" name="Shape 6"/>
+          <p:cNvPr id="13" name="Shape 11"/>
           <p:cNvSpPr/>
           <p:nvPr/>
         </p:nvSpPr>
@@ -4204,7 +4579,7 @@
       </p:sp>
       <p:sp>
         <p:nvSpPr>
-          <p:cNvPr id="9" name="Shape 7"/>
+          <p:cNvPr id="14" name="Shape 12"/>
           <p:cNvSpPr/>
           <p:nvPr/>
         </p:nvSpPr>
@@ -4228,7 +4603,7 @@
       </p:sp>
       <p:sp>
         <p:nvSpPr>
-          <p:cNvPr id="10" name="Shape 8"/>
+          <p:cNvPr id="15" name="Shape 13"/>
           <p:cNvSpPr/>
           <p:nvPr/>
         </p:nvSpPr>
@@ -4262,7 +4637,7 @@
       </p:sp>
       <p:sp>
         <p:nvSpPr>
-          <p:cNvPr id="11" name="Shape 9"/>
+          <p:cNvPr id="16" name="Shape 14"/>
           <p:cNvSpPr/>
           <p:nvPr/>
         </p:nvSpPr>
@@ -4289,7 +4664,7 @@
       </p:sp>
       <p:sp>
         <p:nvSpPr>
-          <p:cNvPr id="12" name="Shape 10"/>
+          <p:cNvPr id="17" name="Shape 15"/>
           <p:cNvSpPr/>
           <p:nvPr/>
         </p:nvSpPr>
@@ -4316,7 +4691,7 @@
       </p:sp>
       <p:sp>
         <p:nvSpPr>
-          <p:cNvPr id="13" name="Text 11"/>
+          <p:cNvPr id="18" name="Text 16"/>
           <p:cNvSpPr txBox="1"/>
           <p:nvPr/>
         </p:nvSpPr>
@@ -4360,7 +4735,7 @@
       </p:sp>
       <p:sp>
         <p:nvSpPr>
-          <p:cNvPr id="14" name="Text 12"/>
+          <p:cNvPr id="19" name="Text 17"/>
           <p:cNvSpPr txBox="1"/>
           <p:nvPr/>
         </p:nvSpPr>
@@ -4404,7 +4779,7 @@
       </p:sp>
       <p:sp>
         <p:nvSpPr>
-          <p:cNvPr id="15" name="Shape 13"/>
+          <p:cNvPr id="20" name="Shape 18"/>
           <p:cNvSpPr/>
           <p:nvPr/>
         </p:nvSpPr>
@@ -4438,7 +4813,7 @@
       </p:sp>
       <p:sp>
         <p:nvSpPr>
-          <p:cNvPr id="16" name="Shape 14"/>
+          <p:cNvPr id="21" name="Shape 19"/>
           <p:cNvSpPr/>
           <p:nvPr/>
         </p:nvSpPr>
@@ -4465,7 +4840,7 @@
       </p:sp>
       <p:sp>
         <p:nvSpPr>
-          <p:cNvPr id="17" name="Shape 15"/>
+          <p:cNvPr id="22" name="Shape 20"/>
           <p:cNvSpPr/>
           <p:nvPr/>
         </p:nvSpPr>
@@ -4492,7 +4867,7 @@
       </p:sp>
       <p:sp>
         <p:nvSpPr>
-          <p:cNvPr id="18" name="Text 16"/>
+          <p:cNvPr id="23" name="Text 21"/>
           <p:cNvSpPr txBox="1"/>
           <p:nvPr/>
         </p:nvSpPr>
@@ -4536,7 +4911,7 @@
       </p:sp>
       <p:sp>
         <p:nvSpPr>
-          <p:cNvPr id="19" name="Text 17"/>
+          <p:cNvPr id="24" name="Text 22"/>
           <p:cNvSpPr txBox="1"/>
           <p:nvPr/>
         </p:nvSpPr>
@@ -4580,7 +4955,7 @@
       </p:sp>
       <p:sp>
         <p:nvSpPr>
-          <p:cNvPr id="20" name="Shape 18"/>
+          <p:cNvPr id="25" name="Shape 23"/>
           <p:cNvSpPr/>
           <p:nvPr/>
         </p:nvSpPr>
@@ -4614,7 +4989,7 @@
       </p:sp>
       <p:sp>
         <p:nvSpPr>
-          <p:cNvPr id="21" name="Shape 19"/>
+          <p:cNvPr id="26" name="Shape 24"/>
           <p:cNvSpPr/>
           <p:nvPr/>
         </p:nvSpPr>
@@ -4641,7 +5016,7 @@
       </p:sp>
       <p:sp>
         <p:nvSpPr>
-          <p:cNvPr id="22" name="Shape 20"/>
+          <p:cNvPr id="27" name="Shape 25"/>
           <p:cNvSpPr/>
           <p:nvPr/>
         </p:nvSpPr>
@@ -4668,7 +5043,7 @@
       </p:sp>
       <p:sp>
         <p:nvSpPr>
-          <p:cNvPr id="23" name="Text 21"/>
+          <p:cNvPr id="28" name="Text 26"/>
           <p:cNvSpPr txBox="1"/>
           <p:nvPr/>
         </p:nvSpPr>
@@ -4712,7 +5087,7 @@
       </p:sp>
       <p:sp>
         <p:nvSpPr>
-          <p:cNvPr id="24" name="Text 22"/>
+          <p:cNvPr id="29" name="Text 27"/>
           <p:cNvSpPr txBox="1"/>
           <p:nvPr/>
         </p:nvSpPr>
@@ -4756,7 +5131,7 @@
       </p:sp>
       <p:sp>
         <p:nvSpPr>
-          <p:cNvPr id="25" name="Shape 23"/>
+          <p:cNvPr id="30" name="Shape 28"/>
           <p:cNvSpPr/>
           <p:nvPr/>
         </p:nvSpPr>
@@ -4790,7 +5165,7 @@
       </p:sp>
       <p:sp>
         <p:nvSpPr>
-          <p:cNvPr id="26" name="Shape 24"/>
+          <p:cNvPr id="31" name="Shape 29"/>
           <p:cNvSpPr/>
           <p:nvPr/>
         </p:nvSpPr>
@@ -4817,7 +5192,7 @@
       </p:sp>
       <p:sp>
         <p:nvSpPr>
-          <p:cNvPr id="27" name="Shape 25"/>
+          <p:cNvPr id="32" name="Shape 30"/>
           <p:cNvSpPr/>
           <p:nvPr/>
         </p:nvSpPr>
@@ -4844,7 +5219,7 @@
       </p:sp>
       <p:sp>
         <p:nvSpPr>
-          <p:cNvPr id="28" name="Text 26"/>
+          <p:cNvPr id="33" name="Text 31"/>
           <p:cNvSpPr txBox="1"/>
           <p:nvPr/>
         </p:nvSpPr>
@@ -4888,7 +5263,7 @@
       </p:sp>
       <p:sp>
         <p:nvSpPr>
-          <p:cNvPr id="29" name="Text 27"/>
+          <p:cNvPr id="34" name="Text 32"/>
           <p:cNvSpPr txBox="1"/>
           <p:nvPr/>
         </p:nvSpPr>
@@ -4932,7 +5307,7 @@
       </p:sp>
       <p:sp>
         <p:nvSpPr>
-          <p:cNvPr id="30" name="Shape 28"/>
+          <p:cNvPr id="35" name="Shape 33"/>
           <p:cNvSpPr/>
           <p:nvPr/>
         </p:nvSpPr>
@@ -4966,7 +5341,7 @@
       </p:sp>
       <p:sp>
         <p:nvSpPr>
-          <p:cNvPr id="31" name="Shape 29"/>
+          <p:cNvPr id="36" name="Shape 34"/>
           <p:cNvSpPr/>
           <p:nvPr/>
         </p:nvSpPr>
@@ -4993,7 +5368,7 @@
       </p:sp>
       <p:sp>
         <p:nvSpPr>
-          <p:cNvPr id="32" name="Shape 30"/>
+          <p:cNvPr id="37" name="Shape 35"/>
           <p:cNvSpPr/>
           <p:nvPr/>
         </p:nvSpPr>
@@ -5020,7 +5395,7 @@
       </p:sp>
       <p:sp>
         <p:nvSpPr>
-          <p:cNvPr id="33" name="Text 31"/>
+          <p:cNvPr id="38" name="Text 36"/>
           <p:cNvSpPr txBox="1"/>
           <p:nvPr/>
         </p:nvSpPr>
@@ -5064,7 +5439,7 @@
       </p:sp>
       <p:sp>
         <p:nvSpPr>
-          <p:cNvPr id="34" name="Text 32"/>
+          <p:cNvPr id="39" name="Text 37"/>
           <p:cNvSpPr txBox="1"/>
           <p:nvPr/>
         </p:nvSpPr>
@@ -5108,7 +5483,7 @@
       </p:sp>
       <p:sp>
         <p:nvSpPr>
-          <p:cNvPr id="35" name="Shape 33"/>
+          <p:cNvPr id="40" name="Shape 38"/>
           <p:cNvSpPr/>
           <p:nvPr/>
         </p:nvSpPr>
@@ -5142,7 +5517,7 @@
       </p:sp>
       <p:sp>
         <p:nvSpPr>
-          <p:cNvPr id="36" name="Shape 34"/>
+          <p:cNvPr id="41" name="Shape 39"/>
           <p:cNvSpPr/>
           <p:nvPr/>
         </p:nvSpPr>
@@ -5169,7 +5544,7 @@
       </p:sp>
       <p:sp>
         <p:nvSpPr>
-          <p:cNvPr id="37" name="Shape 35"/>
+          <p:cNvPr id="42" name="Shape 40"/>
           <p:cNvSpPr/>
           <p:nvPr/>
         </p:nvSpPr>
@@ -5196,7 +5571,7 @@
       </p:sp>
       <p:sp>
         <p:nvSpPr>
-          <p:cNvPr id="38" name="Text 36"/>
+          <p:cNvPr id="43" name="Text 41"/>
           <p:cNvSpPr txBox="1"/>
           <p:nvPr/>
         </p:nvSpPr>
@@ -5240,7 +5615,7 @@
       </p:sp>
       <p:sp>
         <p:nvSpPr>
-          <p:cNvPr id="39" name="Text 37"/>
+          <p:cNvPr id="44" name="Text 42"/>
           <p:cNvSpPr txBox="1"/>
           <p:nvPr/>
         </p:nvSpPr>
@@ -5364,9 +5739,134 @@
           </a:ln>
         </p:spPr>
       </p:sp>
+      <p:sp>
+        <p:nvSpPr>
+          <p:cNvPr id="4" name="Shape 2"/>
+          <p:cNvSpPr/>
+          <p:nvPr/>
+        </p:nvSpPr>
+        <p:spPr>
+          <a:xfrm>
+            <a:off x="585216" y="585216"/>
+            <a:ext cx="329184" cy="0"/>
+          </a:xfrm>
+          <a:prstGeom prst="line">
+            <a:avLst/>
+          </a:prstGeom>
+          <a:noFill/>
+          <a:ln w="12700">
+            <a:solidFill>
+              <a:srgbClr val="E5E7EB">
+                <a:alpha val="72000"/>
+              </a:srgbClr>
+            </a:solidFill>
+            <a:prstDash val="solid"/>
+          </a:ln>
+        </p:spPr>
+      </p:sp>
+      <p:sp>
+        <p:nvSpPr>
+          <p:cNvPr id="5" name="Shape 3"/>
+          <p:cNvSpPr/>
+          <p:nvPr/>
+        </p:nvSpPr>
+        <p:spPr>
+          <a:xfrm>
+            <a:off x="585216" y="585216"/>
+            <a:ext cx="0" cy="329184"/>
+          </a:xfrm>
+          <a:prstGeom prst="line">
+            <a:avLst/>
+          </a:prstGeom>
+          <a:noFill/>
+          <a:ln w="12700">
+            <a:solidFill>
+              <a:srgbClr val="E5E7EB">
+                <a:alpha val="72000"/>
+              </a:srgbClr>
+            </a:solidFill>
+            <a:prstDash val="solid"/>
+          </a:ln>
+        </p:spPr>
+      </p:sp>
+      <p:sp>
+        <p:nvSpPr>
+          <p:cNvPr id="6" name="Shape 4"/>
+          <p:cNvSpPr/>
+          <p:nvPr/>
+        </p:nvSpPr>
+        <p:spPr>
+          <a:xfrm>
+            <a:off x="11277295" y="6272784"/>
+            <a:ext cx="329184" cy="0"/>
+          </a:xfrm>
+          <a:prstGeom prst="line">
+            <a:avLst/>
+          </a:prstGeom>
+          <a:noFill/>
+          <a:ln w="12700">
+            <a:solidFill>
+              <a:srgbClr val="E5E7EB">
+                <a:alpha val="72000"/>
+              </a:srgbClr>
+            </a:solidFill>
+            <a:prstDash val="solid"/>
+          </a:ln>
+        </p:spPr>
+      </p:sp>
+      <p:sp>
+        <p:nvSpPr>
+          <p:cNvPr id="7" name="Shape 5"/>
+          <p:cNvSpPr/>
+          <p:nvPr/>
+        </p:nvSpPr>
+        <p:spPr>
+          <a:xfrm>
+            <a:off x="11606479" y="5943600"/>
+            <a:ext cx="0" cy="329184"/>
+          </a:xfrm>
+          <a:prstGeom prst="line">
+            <a:avLst/>
+          </a:prstGeom>
+          <a:noFill/>
+          <a:ln w="12700">
+            <a:solidFill>
+              <a:srgbClr val="E5E7EB">
+                <a:alpha val="72000"/>
+              </a:srgbClr>
+            </a:solidFill>
+            <a:prstDash val="solid"/>
+          </a:ln>
+        </p:spPr>
+      </p:sp>
+      <p:sp>
+        <p:nvSpPr>
+          <p:cNvPr id="8" name="Shape 6"/>
+          <p:cNvSpPr/>
+          <p:nvPr/>
+        </p:nvSpPr>
+        <p:spPr>
+          <a:xfrm>
+            <a:off x="749808" y="6437376"/>
+            <a:ext cx="10692079" cy="0"/>
+          </a:xfrm>
+          <a:prstGeom prst="line">
+            <a:avLst/>
+          </a:prstGeom>
+          <a:noFill/>
+          <a:ln w="12700">
+            <a:solidFill>
+              <a:srgbClr val="E5E7EB">
+                <a:alpha val="18000"/>
+              </a:srgbClr>
+            </a:solidFill>
+            <a:prstDash val="solid"/>
+          </a:ln>
+        </p:spPr>
+      </p:sp>
       <p:pic>
         <p:nvPicPr>
-          <p:cNvPr id="4" name="Image 0" descr="preencoded.png">    </p:cNvPr>
+          <p:cNvPr id="9" name="Image 0" descr="preencoded.png">    </p:cNvPr>
           <p:cNvPicPr>
             <a:picLocks noChangeAspect="1"/>
           </p:cNvPicPr>
@@ -5396,7 +5896,7 @@
       </p:pic>
       <p:pic>
         <p:nvPicPr>
-          <p:cNvPr id="5" name="Image 1" descr="preencoded.png">    </p:cNvPr>
+          <p:cNvPr id="10" name="Image 1" descr="preencoded.png">    </p:cNvPr>
           <p:cNvPicPr>
             <a:picLocks noChangeAspect="1"/>
           </p:cNvPicPr>
@@ -5426,7 +5926,7 @@
       </p:pic>
       <p:pic>
         <p:nvPicPr>
-          <p:cNvPr id="6" name="Image 2" descr="preencoded.png">    </p:cNvPr>
+          <p:cNvPr id="11" name="Image 2" descr="preencoded.png">    </p:cNvPr>
           <p:cNvPicPr>
             <a:picLocks noChangeAspect="1"/>
           </p:cNvPicPr>
@@ -5456,7 +5956,7 @@
       </p:pic>
       <p:pic>
         <p:nvPicPr>
-          <p:cNvPr id="7" name="Image 3" descr="preencoded.png">    </p:cNvPr>
+          <p:cNvPr id="12" name="Image 3" descr="preencoded.png">    </p:cNvPr>
           <p:cNvPicPr>
             <a:picLocks noChangeAspect="1"/>
           </p:cNvPicPr>
@@ -5486,7 +5986,7 @@
       </p:pic>
       <p:sp>
         <p:nvSpPr>
-          <p:cNvPr id="8" name="Shape 2"/>
+          <p:cNvPr id="13" name="Shape 7"/>
           <p:cNvSpPr/>
           <p:nvPr/>
         </p:nvSpPr>
@@ -5513,7 +6013,7 @@
       </p:sp>
       <p:sp>
         <p:nvSpPr>
-          <p:cNvPr id="9" name="Shape 3"/>
+          <p:cNvPr id="14" name="Shape 8"/>
           <p:cNvSpPr/>
           <p:nvPr/>
         </p:nvSpPr>
@@ -5540,7 +6040,7 @@
       </p:sp>
       <p:sp>
         <p:nvSpPr>
-          <p:cNvPr id="10" name="Shape 4"/>
+          <p:cNvPr id="15" name="Shape 9"/>
           <p:cNvSpPr/>
           <p:nvPr/>
         </p:nvSpPr>
@@ -5567,7 +6067,7 @@
       </p:sp>
       <p:sp>
         <p:nvSpPr>
-          <p:cNvPr id="11" name="Shape 5"/>
+          <p:cNvPr id="16" name="Shape 10"/>
           <p:cNvSpPr/>
           <p:nvPr/>
         </p:nvSpPr>
@@ -5594,7 +6094,7 @@
       </p:sp>
       <p:sp>
         <p:nvSpPr>
-          <p:cNvPr id="12" name="mdpr:1-2-e3669a:title:__title:1-2-e3669a"/>
+          <p:cNvPr id="17" name="mdpr:1-2-e3669a:title:__title:1-2-e3669a"/>
           <p:cNvSpPr txBox="1"/>
           <p:nvPr/>
         </p:nvSpPr>
@@ -5636,7 +6136,7 @@
       </p:sp>
       <p:sp>
         <p:nvSpPr>
-          <p:cNvPr id="13" name="Shape 7"/>
+          <p:cNvPr id="18" name="Shape 12"/>
           <p:cNvSpPr/>
           <p:nvPr/>
         </p:nvSpPr>
@@ -5663,7 +6163,7 @@
       </p:sp>
       <p:pic>
         <p:nvPicPr>
-          <p:cNvPr id="14" name="Image 4" descr="article icon from tabler-icons (MIT)">    </p:cNvPr>
+          <p:cNvPr id="19" name="Image 4" descr="article icon from tabler-icons (MIT)">    </p:cNvPr>
           <p:cNvPicPr>
             <a:picLocks noChangeAspect="1"/>
           </p:cNvPicPr>
@@ -5693,7 +6193,7 @@
       </p:pic>
       <p:sp>
         <p:nvSpPr>
-          <p:cNvPr id="15" name="mdpr:1-2-e3669a:item-1:block-15-chunk-1"/>
+          <p:cNvPr id="20" name="mdpr:1-2-e3669a:item-1:block-15-chunk-1"/>
           <p:cNvSpPr txBox="1"/>
           <p:nvPr/>
         </p:nvSpPr>
@@ -5752,7 +6252,7 @@
       </p:sp>
       <p:sp>
         <p:nvSpPr>
-          <p:cNvPr id="16" name="Shape 9"/>
+          <p:cNvPr id="21" name="Shape 14"/>
           <p:cNvSpPr/>
           <p:nvPr/>
         </p:nvSpPr>
@@ -5779,7 +6279,7 @@
       </p:sp>
       <p:pic>
         <p:nvPicPr>
-          <p:cNvPr id="17" name="Image 5" descr="table icon from tabler-icons (MIT)">    </p:cNvPr>
+          <p:cNvPr id="22" name="Image 5" descr="table icon from tabler-icons (MIT)">    </p:cNvPr>
           <p:cNvPicPr>
             <a:picLocks noChangeAspect="1"/>
           </p:cNvPicPr>
@@ -5809,7 +6309,7 @@
       </p:pic>
       <p:sp>
         <p:nvSpPr>
-          <p:cNvPr id="18" name="mdpr:1-2-e3669a:item-2:block-15-chunk-1"/>
+          <p:cNvPr id="23" name="mdpr:1-2-e3669a:item-2:block-15-chunk-1"/>
           <p:cNvSpPr txBox="1"/>
           <p:nvPr/>
         </p:nvSpPr>
@@ -5868,7 +6368,7 @@
       </p:sp>
       <p:sp>
         <p:nvSpPr>
-          <p:cNvPr id="19" name="Shape 11"/>
+          <p:cNvPr id="24" name="Shape 16"/>
           <p:cNvSpPr/>
           <p:nvPr/>
         </p:nvSpPr>
@@ -5895,7 +6395,7 @@
       </p:sp>
       <p:pic>
         <p:nvPicPr>
-          <p:cNvPr id="20" name="Image 6" descr="chart icon from tabler-icons (MIT)">    </p:cNvPr>
+          <p:cNvPr id="25" name="Image 6" descr="chart icon from tabler-icons (MIT)">    </p:cNvPr>
           <p:cNvPicPr>
             <a:picLocks noChangeAspect="1"/>
           </p:cNvPicPr>
@@ -5925,7 +6425,7 @@
       </p:pic>
       <p:sp>
         <p:nvSpPr>
-          <p:cNvPr id="21" name="mdpr:1-2-e3669a:item-3:block-15-chunk-1"/>
+          <p:cNvPr id="26" name="mdpr:1-2-e3669a:item-3:block-15-chunk-1"/>
           <p:cNvSpPr txBox="1"/>
           <p:nvPr/>
         </p:nvSpPr>
@@ -5984,7 +6484,7 @@
       </p:sp>
       <p:sp>
         <p:nvSpPr>
-          <p:cNvPr id="22" name="Shape 13"/>
+          <p:cNvPr id="27" name="Shape 18"/>
           <p:cNvSpPr/>
           <p:nvPr/>
         </p:nvSpPr>
@@ -6011,7 +6511,7 @@
       </p:sp>
       <p:pic>
         <p:nvPicPr>
-          <p:cNvPr id="23" name="Image 7" descr="flow icon from tabler-icons (MIT)">    </p:cNvPr>
+          <p:cNvPr id="28" name="Image 7" descr="flow icon from tabler-icons (MIT)">    </p:cNvPr>
           <p:cNvPicPr>
             <a:picLocks noChangeAspect="1"/>
           </p:cNvPicPr>
@@ -6041,7 +6541,7 @@
       </p:pic>
       <p:sp>
         <p:nvSpPr>
-          <p:cNvPr id="24" name="mdpr:1-2-e3669a:item-4:block-15-chunk-1"/>
+          <p:cNvPr id="29" name="mdpr:1-2-e3669a:item-4:block-15-chunk-1"/>
           <p:cNvSpPr txBox="1"/>
           <p:nvPr/>
         </p:nvSpPr>
@@ -6188,6 +6688,131 @@
         </p:nvSpPr>
         <p:spPr>
           <a:xfrm>
+            <a:off x="585216" y="585216"/>
+            <a:ext cx="329184" cy="0"/>
+          </a:xfrm>
+          <a:prstGeom prst="line">
+            <a:avLst/>
+          </a:prstGeom>
+          <a:noFill/>
+          <a:ln w="12700">
+            <a:solidFill>
+              <a:srgbClr val="E5E7EB">
+                <a:alpha val="72000"/>
+              </a:srgbClr>
+            </a:solidFill>
+            <a:prstDash val="solid"/>
+          </a:ln>
+        </p:spPr>
+      </p:sp>
+      <p:sp>
+        <p:nvSpPr>
+          <p:cNvPr id="5" name="Shape 3"/>
+          <p:cNvSpPr/>
+          <p:nvPr/>
+        </p:nvSpPr>
+        <p:spPr>
+          <a:xfrm>
+            <a:off x="585216" y="585216"/>
+            <a:ext cx="0" cy="329184"/>
+          </a:xfrm>
+          <a:prstGeom prst="line">
+            <a:avLst/>
+          </a:prstGeom>
+          <a:noFill/>
+          <a:ln w="12700">
+            <a:solidFill>
+              <a:srgbClr val="E5E7EB">
+                <a:alpha val="72000"/>
+              </a:srgbClr>
+            </a:solidFill>
+            <a:prstDash val="solid"/>
+          </a:ln>
+        </p:spPr>
+      </p:sp>
+      <p:sp>
+        <p:nvSpPr>
+          <p:cNvPr id="6" name="Shape 4"/>
+          <p:cNvSpPr/>
+          <p:nvPr/>
+        </p:nvSpPr>
+        <p:spPr>
+          <a:xfrm>
+            <a:off x="11277295" y="6272784"/>
+            <a:ext cx="329184" cy="0"/>
+          </a:xfrm>
+          <a:prstGeom prst="line">
+            <a:avLst/>
+          </a:prstGeom>
+          <a:noFill/>
+          <a:ln w="12700">
+            <a:solidFill>
+              <a:srgbClr val="E5E7EB">
+                <a:alpha val="72000"/>
+              </a:srgbClr>
+            </a:solidFill>
+            <a:prstDash val="solid"/>
+          </a:ln>
+        </p:spPr>
+      </p:sp>
+      <p:sp>
+        <p:nvSpPr>
+          <p:cNvPr id="7" name="Shape 5"/>
+          <p:cNvSpPr/>
+          <p:nvPr/>
+        </p:nvSpPr>
+        <p:spPr>
+          <a:xfrm>
+            <a:off x="11606479" y="5943600"/>
+            <a:ext cx="0" cy="329184"/>
+          </a:xfrm>
+          <a:prstGeom prst="line">
+            <a:avLst/>
+          </a:prstGeom>
+          <a:noFill/>
+          <a:ln w="12700">
+            <a:solidFill>
+              <a:srgbClr val="E5E7EB">
+                <a:alpha val="72000"/>
+              </a:srgbClr>
+            </a:solidFill>
+            <a:prstDash val="solid"/>
+          </a:ln>
+        </p:spPr>
+      </p:sp>
+      <p:sp>
+        <p:nvSpPr>
+          <p:cNvPr id="8" name="Shape 6"/>
+          <p:cNvSpPr/>
+          <p:nvPr/>
+        </p:nvSpPr>
+        <p:spPr>
+          <a:xfrm>
+            <a:off x="749808" y="6437376"/>
+            <a:ext cx="10692079" cy="0"/>
+          </a:xfrm>
+          <a:prstGeom prst="line">
+            <a:avLst/>
+          </a:prstGeom>
+          <a:noFill/>
+          <a:ln w="12700">
+            <a:solidFill>
+              <a:srgbClr val="E5E7EB">
+                <a:alpha val="18000"/>
+              </a:srgbClr>
+            </a:solidFill>
+            <a:prstDash val="solid"/>
+          </a:ln>
+        </p:spPr>
+      </p:sp>
+      <p:sp>
+        <p:nvSpPr>
+          <p:cNvPr id="9" name="Shape 7"/>
+          <p:cNvSpPr/>
+          <p:nvPr/>
+        </p:nvSpPr>
+        <p:spPr>
+          <a:xfrm>
             <a:off x="822960" y="1554480"/>
             <a:ext cx="4937760" cy="73152"/>
           </a:xfrm>
@@ -6209,7 +6834,7 @@
       </p:sp>
       <p:sp>
         <p:nvSpPr>
-          <p:cNvPr id="5" name="Shape 3"/>
+          <p:cNvPr id="10" name="Shape 8"/>
           <p:cNvSpPr/>
           <p:nvPr/>
         </p:nvSpPr>
@@ -6236,7 +6861,7 @@
       </p:sp>
       <p:sp>
         <p:nvSpPr>
-          <p:cNvPr id="6" name="mdpr:2-2-c23e9b:title:__title:2-2-c23e9b"/>
+          <p:cNvPr id="11" name="mdpr:2-2-c23e9b:title:__title:2-2-c23e9b"/>
           <p:cNvSpPr txBox="1"/>
           <p:nvPr/>
         </p:nvSpPr>
@@ -6278,7 +6903,7 @@
       </p:sp>
       <p:sp>
         <p:nvSpPr>
-          <p:cNvPr id="7" name="mdpr:2-2-c23e9b:left:block-15-chunk-2"/>
+          <p:cNvPr id="12" name="mdpr:2-2-c23e9b:left:block-15-chunk-2"/>
           <p:cNvSpPr txBox="1"/>
           <p:nvPr/>
         </p:nvSpPr>
@@ -6337,7 +6962,7 @@
       </p:sp>
       <p:sp>
         <p:nvSpPr>
-          <p:cNvPr id="8" name="mdpr:2-2-c23e9b:right:block-15-chunk-2"/>
+          <p:cNvPr id="13" name="mdpr:2-2-c23e9b:right:block-15-chunk-2"/>
           <p:cNvSpPr txBox="1"/>
           <p:nvPr/>
         </p:nvSpPr>
@@ -6476,9 +7101,134 @@
           </a:ln>
         </p:spPr>
       </p:sp>
+      <p:sp>
+        <p:nvSpPr>
+          <p:cNvPr id="4" name="Shape 2"/>
+          <p:cNvSpPr/>
+          <p:nvPr/>
+        </p:nvSpPr>
+        <p:spPr>
+          <a:xfrm>
+            <a:off x="585216" y="585216"/>
+            <a:ext cx="329184" cy="0"/>
+          </a:xfrm>
+          <a:prstGeom prst="line">
+            <a:avLst/>
+          </a:prstGeom>
+          <a:noFill/>
+          <a:ln w="12700">
+            <a:solidFill>
+              <a:srgbClr val="E5E7EB">
+                <a:alpha val="72000"/>
+              </a:srgbClr>
+            </a:solidFill>
+            <a:prstDash val="solid"/>
+          </a:ln>
+        </p:spPr>
+      </p:sp>
+      <p:sp>
+        <p:nvSpPr>
+          <p:cNvPr id="5" name="Shape 3"/>
+          <p:cNvSpPr/>
+          <p:nvPr/>
+        </p:nvSpPr>
+        <p:spPr>
+          <a:xfrm>
+            <a:off x="585216" y="585216"/>
+            <a:ext cx="0" cy="329184"/>
+          </a:xfrm>
+          <a:prstGeom prst="line">
+            <a:avLst/>
+          </a:prstGeom>
+          <a:noFill/>
+          <a:ln w="12700">
+            <a:solidFill>
+              <a:srgbClr val="E5E7EB">
+                <a:alpha val="72000"/>
+              </a:srgbClr>
+            </a:solidFill>
+            <a:prstDash val="solid"/>
+          </a:ln>
+        </p:spPr>
+      </p:sp>
+      <p:sp>
+        <p:nvSpPr>
+          <p:cNvPr id="6" name="Shape 4"/>
+          <p:cNvSpPr/>
+          <p:nvPr/>
+        </p:nvSpPr>
+        <p:spPr>
+          <a:xfrm>
+            <a:off x="11277295" y="6272784"/>
+            <a:ext cx="329184" cy="0"/>
+          </a:xfrm>
+          <a:prstGeom prst="line">
+            <a:avLst/>
+          </a:prstGeom>
+          <a:noFill/>
+          <a:ln w="12700">
+            <a:solidFill>
+              <a:srgbClr val="E5E7EB">
+                <a:alpha val="72000"/>
+              </a:srgbClr>
+            </a:solidFill>
+            <a:prstDash val="solid"/>
+          </a:ln>
+        </p:spPr>
+      </p:sp>
+      <p:sp>
+        <p:nvSpPr>
+          <p:cNvPr id="7" name="Shape 5"/>
+          <p:cNvSpPr/>
+          <p:nvPr/>
+        </p:nvSpPr>
+        <p:spPr>
+          <a:xfrm>
+            <a:off x="11606479" y="5943600"/>
+            <a:ext cx="0" cy="329184"/>
+          </a:xfrm>
+          <a:prstGeom prst="line">
+            <a:avLst/>
+          </a:prstGeom>
+          <a:noFill/>
+          <a:ln w="12700">
+            <a:solidFill>
+              <a:srgbClr val="E5E7EB">
+                <a:alpha val="72000"/>
+              </a:srgbClr>
+            </a:solidFill>
+            <a:prstDash val="solid"/>
+          </a:ln>
+        </p:spPr>
+      </p:sp>
+      <p:sp>
+        <p:nvSpPr>
+          <p:cNvPr id="8" name="Shape 6"/>
+          <p:cNvSpPr/>
+          <p:nvPr/>
+        </p:nvSpPr>
+        <p:spPr>
+          <a:xfrm>
+            <a:off x="749808" y="6437376"/>
+            <a:ext cx="10692079" cy="0"/>
+          </a:xfrm>
+          <a:prstGeom prst="line">
+            <a:avLst/>
+          </a:prstGeom>
+          <a:noFill/>
+          <a:ln w="12700">
+            <a:solidFill>
+              <a:srgbClr val="E5E7EB">
+                <a:alpha val="18000"/>
+              </a:srgbClr>
+            </a:solidFill>
+            <a:prstDash val="solid"/>
+          </a:ln>
+        </p:spPr>
+      </p:sp>
       <p:pic>
         <p:nvPicPr>
-          <p:cNvPr id="4" name="Image 0" descr="preencoded.png">    </p:cNvPr>
+          <p:cNvPr id="9" name="Image 0" descr="preencoded.png">    </p:cNvPr>
           <p:cNvPicPr>
             <a:picLocks noChangeAspect="1"/>
           </p:cNvPicPr>
@@ -6508,7 +7258,7 @@
       </p:pic>
       <p:sp>
         <p:nvSpPr>
-          <p:cNvPr id="5" name="mdpr:table-coherence-2f9a7b:title:__title:table-coherence-2f9a7b"/>
+          <p:cNvPr id="10" name="mdpr:table-coherence-2f9a7b:title:__title:table-coherence-2f9a7b"/>
           <p:cNvSpPr txBox="1"/>
           <p:nvPr/>
         </p:nvSpPr>
@@ -7685,9 +8435,134 @@
           </a:ln>
         </p:spPr>
       </p:sp>
+      <p:sp>
+        <p:nvSpPr>
+          <p:cNvPr id="4" name="Shape 2"/>
+          <p:cNvSpPr/>
+          <p:nvPr/>
+        </p:nvSpPr>
+        <p:spPr>
+          <a:xfrm>
+            <a:off x="585216" y="585216"/>
+            <a:ext cx="329184" cy="0"/>
+          </a:xfrm>
+          <a:prstGeom prst="line">
+            <a:avLst/>
+          </a:prstGeom>
+          <a:noFill/>
+          <a:ln w="12700">
+            <a:solidFill>
+              <a:srgbClr val="E5E7EB">
+                <a:alpha val="72000"/>
+              </a:srgbClr>
+            </a:solidFill>
+            <a:prstDash val="solid"/>
+          </a:ln>
+        </p:spPr>
+      </p:sp>
+      <p:sp>
+        <p:nvSpPr>
+          <p:cNvPr id="5" name="Shape 3"/>
+          <p:cNvSpPr/>
+          <p:nvPr/>
+        </p:nvSpPr>
+        <p:spPr>
+          <a:xfrm>
+            <a:off x="585216" y="585216"/>
+            <a:ext cx="0" cy="329184"/>
+          </a:xfrm>
+          <a:prstGeom prst="line">
+            <a:avLst/>
+          </a:prstGeom>
+          <a:noFill/>
+          <a:ln w="12700">
+            <a:solidFill>
+              <a:srgbClr val="E5E7EB">
+                <a:alpha val="72000"/>
+              </a:srgbClr>
+            </a:solidFill>
+            <a:prstDash val="solid"/>
+          </a:ln>
+        </p:spPr>
+      </p:sp>
+      <p:sp>
+        <p:nvSpPr>
+          <p:cNvPr id="6" name="Shape 4"/>
+          <p:cNvSpPr/>
+          <p:nvPr/>
+        </p:nvSpPr>
+        <p:spPr>
+          <a:xfrm>
+            <a:off x="11277295" y="6272784"/>
+            <a:ext cx="329184" cy="0"/>
+          </a:xfrm>
+          <a:prstGeom prst="line">
+            <a:avLst/>
+          </a:prstGeom>
+          <a:noFill/>
+          <a:ln w="12700">
+            <a:solidFill>
+              <a:srgbClr val="E5E7EB">
+                <a:alpha val="72000"/>
+              </a:srgbClr>
+            </a:solidFill>
+            <a:prstDash val="solid"/>
+          </a:ln>
+        </p:spPr>
+      </p:sp>
+      <p:sp>
+        <p:nvSpPr>
+          <p:cNvPr id="7" name="Shape 5"/>
+          <p:cNvSpPr/>
+          <p:nvPr/>
+        </p:nvSpPr>
+        <p:spPr>
+          <a:xfrm>
+            <a:off x="11606479" y="5943600"/>
+            <a:ext cx="0" cy="329184"/>
+          </a:xfrm>
+          <a:prstGeom prst="line">
+            <a:avLst/>
+          </a:prstGeom>
+          <a:noFill/>
+          <a:ln w="12700">
+            <a:solidFill>
+              <a:srgbClr val="E5E7EB">
+                <a:alpha val="72000"/>
+              </a:srgbClr>
+            </a:solidFill>
+            <a:prstDash val="solid"/>
+          </a:ln>
+        </p:spPr>
+      </p:sp>
+      <p:sp>
+        <p:nvSpPr>
+          <p:cNvPr id="8" name="Shape 6"/>
+          <p:cNvSpPr/>
+          <p:nvPr/>
+        </p:nvSpPr>
+        <p:spPr>
+          <a:xfrm>
+            <a:off x="749808" y="6437376"/>
+            <a:ext cx="10692079" cy="0"/>
+          </a:xfrm>
+          <a:prstGeom prst="line">
+            <a:avLst/>
+          </a:prstGeom>
+          <a:noFill/>
+          <a:ln w="12700">
+            <a:solidFill>
+              <a:srgbClr val="E5E7EB">
+                <a:alpha val="18000"/>
+              </a:srgbClr>
+            </a:solidFill>
+            <a:prstDash val="solid"/>
+          </a:ln>
+        </p:spPr>
+      </p:sp>
       <p:pic>
         <p:nvPicPr>
-          <p:cNvPr id="4" name="Image 0" descr="preencoded.png">    </p:cNvPr>
+          <p:cNvPr id="9" name="Image 0" descr="preencoded.png">    </p:cNvPr>
           <p:cNvPicPr>
             <a:picLocks noChangeAspect="1"/>
           </p:cNvPicPr>
@@ -7717,7 +8592,7 @@
       </p:pic>
       <p:sp>
         <p:nvSpPr>
-          <p:cNvPr id="5" name="Shape 2"/>
+          <p:cNvPr id="10" name="Shape 7"/>
           <p:cNvSpPr/>
           <p:nvPr/>
         </p:nvSpPr>
@@ -7744,7 +8619,7 @@
       </p:sp>
       <p:sp>
         <p:nvSpPr>
-          <p:cNvPr id="6" name="mdpr:1-2-2ff3f0:title:__title:1-2-2ff3f0"/>
+          <p:cNvPr id="11" name="mdpr:1-2-2ff3f0:title:__title:1-2-2ff3f0"/>
           <p:cNvSpPr txBox="1"/>
           <p:nvPr/>
         </p:nvSpPr>
@@ -7786,7 +8661,7 @@
       </p:sp>
       <p:sp>
         <p:nvSpPr>
-          <p:cNvPr id="7" name="mdpr:1-2-2ff3f0:body:block-19"/>
+          <p:cNvPr id="12" name="mdpr:1-2-2ff3f0:body:block-19"/>
           <p:cNvSpPr txBox="1"/>
           <p:nvPr/>
         </p:nvSpPr>
@@ -7925,7 +8800,7 @@
       </p:sp>
       <p:graphicFrame>
         <p:nvGraphicFramePr>
-          <p:cNvPr id="8" name="Chart 0" descr=""/>
+          <p:cNvPr id="13" name="Chart 0" descr=""/>
           <p:cNvGraphicFramePr/>
           <p:nvPr/>
         </p:nvGraphicFramePr>
@@ -8021,9 +8896,134 @@
           </a:ln>
         </p:spPr>
       </p:sp>
+      <p:sp>
+        <p:nvSpPr>
+          <p:cNvPr id="4" name="Shape 2"/>
+          <p:cNvSpPr/>
+          <p:nvPr/>
+        </p:nvSpPr>
+        <p:spPr>
+          <a:xfrm>
+            <a:off x="585216" y="585216"/>
+            <a:ext cx="329184" cy="0"/>
+          </a:xfrm>
+          <a:prstGeom prst="line">
+            <a:avLst/>
+          </a:prstGeom>
+          <a:noFill/>
+          <a:ln w="12700">
+            <a:solidFill>
+              <a:srgbClr val="E5E7EB">
+                <a:alpha val="72000"/>
+              </a:srgbClr>
+            </a:solidFill>
+            <a:prstDash val="solid"/>
+          </a:ln>
+        </p:spPr>
+      </p:sp>
+      <p:sp>
+        <p:nvSpPr>
+          <p:cNvPr id="5" name="Shape 3"/>
+          <p:cNvSpPr/>
+          <p:nvPr/>
+        </p:nvSpPr>
+        <p:spPr>
+          <a:xfrm>
+            <a:off x="585216" y="585216"/>
+            <a:ext cx="0" cy="329184"/>
+          </a:xfrm>
+          <a:prstGeom prst="line">
+            <a:avLst/>
+          </a:prstGeom>
+          <a:noFill/>
+          <a:ln w="12700">
+            <a:solidFill>
+              <a:srgbClr val="E5E7EB">
+                <a:alpha val="72000"/>
+              </a:srgbClr>
+            </a:solidFill>
+            <a:prstDash val="solid"/>
+          </a:ln>
+        </p:spPr>
+      </p:sp>
+      <p:sp>
+        <p:nvSpPr>
+          <p:cNvPr id="6" name="Shape 4"/>
+          <p:cNvSpPr/>
+          <p:nvPr/>
+        </p:nvSpPr>
+        <p:spPr>
+          <a:xfrm>
+            <a:off x="11277295" y="6272784"/>
+            <a:ext cx="329184" cy="0"/>
+          </a:xfrm>
+          <a:prstGeom prst="line">
+            <a:avLst/>
+          </a:prstGeom>
+          <a:noFill/>
+          <a:ln w="12700">
+            <a:solidFill>
+              <a:srgbClr val="E5E7EB">
+                <a:alpha val="72000"/>
+              </a:srgbClr>
+            </a:solidFill>
+            <a:prstDash val="solid"/>
+          </a:ln>
+        </p:spPr>
+      </p:sp>
+      <p:sp>
+        <p:nvSpPr>
+          <p:cNvPr id="7" name="Shape 5"/>
+          <p:cNvSpPr/>
+          <p:nvPr/>
+        </p:nvSpPr>
+        <p:spPr>
+          <a:xfrm>
+            <a:off x="11606479" y="5943600"/>
+            <a:ext cx="0" cy="329184"/>
+          </a:xfrm>
+          <a:prstGeom prst="line">
+            <a:avLst/>
+          </a:prstGeom>
+          <a:noFill/>
+          <a:ln w="12700">
+            <a:solidFill>
+              <a:srgbClr val="E5E7EB">
+                <a:alpha val="72000"/>
+              </a:srgbClr>
+            </a:solidFill>
+            <a:prstDash val="solid"/>
+          </a:ln>
+        </p:spPr>
+      </p:sp>
+      <p:sp>
+        <p:nvSpPr>
+          <p:cNvPr id="8" name="Shape 6"/>
+          <p:cNvSpPr/>
+          <p:nvPr/>
+        </p:nvSpPr>
+        <p:spPr>
+          <a:xfrm>
+            <a:off x="749808" y="6437376"/>
+            <a:ext cx="10692079" cy="0"/>
+          </a:xfrm>
+          <a:prstGeom prst="line">
+            <a:avLst/>
+          </a:prstGeom>
+          <a:noFill/>
+          <a:ln w="12700">
+            <a:solidFill>
+              <a:srgbClr val="E5E7EB">
+                <a:alpha val="18000"/>
+              </a:srgbClr>
+            </a:solidFill>
+            <a:prstDash val="solid"/>
+          </a:ln>
+        </p:spPr>
+      </p:sp>
       <p:pic>
         <p:nvPicPr>
-          <p:cNvPr id="4" name="Image 0" descr="preencoded.png">    </p:cNvPr>
+          <p:cNvPr id="9" name="Image 0" descr="preencoded.png">    </p:cNvPr>
           <p:cNvPicPr>
             <a:picLocks noChangeAspect="1"/>
           </p:cNvPicPr>
@@ -8053,7 +9053,7 @@
       </p:pic>
       <p:sp>
         <p:nvSpPr>
-          <p:cNvPr id="5" name="mdpr:2-2-542095:title:__title:2-2-542095"/>
+          <p:cNvPr id="10" name="mdpr:2-2-542095:title:__title:2-2-542095"/>
           <p:cNvSpPr txBox="1"/>
           <p:nvPr/>
         </p:nvSpPr>
@@ -9018,9 +10018,134 @@
           </a:ln>
         </p:spPr>
       </p:sp>
+      <p:sp>
+        <p:nvSpPr>
+          <p:cNvPr id="4" name="Shape 2"/>
+          <p:cNvSpPr/>
+          <p:nvPr/>
+        </p:nvSpPr>
+        <p:spPr>
+          <a:xfrm>
+            <a:off x="585216" y="585216"/>
+            <a:ext cx="329184" cy="0"/>
+          </a:xfrm>
+          <a:prstGeom prst="line">
+            <a:avLst/>
+          </a:prstGeom>
+          <a:noFill/>
+          <a:ln w="12700">
+            <a:solidFill>
+              <a:srgbClr val="E5E7EB">
+                <a:alpha val="72000"/>
+              </a:srgbClr>
+            </a:solidFill>
+            <a:prstDash val="solid"/>
+          </a:ln>
+        </p:spPr>
+      </p:sp>
+      <p:sp>
+        <p:nvSpPr>
+          <p:cNvPr id="5" name="Shape 3"/>
+          <p:cNvSpPr/>
+          <p:nvPr/>
+        </p:nvSpPr>
+        <p:spPr>
+          <a:xfrm>
+            <a:off x="585216" y="585216"/>
+            <a:ext cx="0" cy="329184"/>
+          </a:xfrm>
+          <a:prstGeom prst="line">
+            <a:avLst/>
+          </a:prstGeom>
+          <a:noFill/>
+          <a:ln w="12700">
+            <a:solidFill>
+              <a:srgbClr val="E5E7EB">
+                <a:alpha val="72000"/>
+              </a:srgbClr>
+            </a:solidFill>
+            <a:prstDash val="solid"/>
+          </a:ln>
+        </p:spPr>
+      </p:sp>
+      <p:sp>
+        <p:nvSpPr>
+          <p:cNvPr id="6" name="Shape 4"/>
+          <p:cNvSpPr/>
+          <p:nvPr/>
+        </p:nvSpPr>
+        <p:spPr>
+          <a:xfrm>
+            <a:off x="11277295" y="6272784"/>
+            <a:ext cx="329184" cy="0"/>
+          </a:xfrm>
+          <a:prstGeom prst="line">
+            <a:avLst/>
+          </a:prstGeom>
+          <a:noFill/>
+          <a:ln w="12700">
+            <a:solidFill>
+              <a:srgbClr val="E5E7EB">
+                <a:alpha val="72000"/>
+              </a:srgbClr>
+            </a:solidFill>
+            <a:prstDash val="solid"/>
+          </a:ln>
+        </p:spPr>
+      </p:sp>
+      <p:sp>
+        <p:nvSpPr>
+          <p:cNvPr id="7" name="Shape 5"/>
+          <p:cNvSpPr/>
+          <p:nvPr/>
+        </p:nvSpPr>
+        <p:spPr>
+          <a:xfrm>
+            <a:off x="11606479" y="5943600"/>
+            <a:ext cx="0" cy="329184"/>
+          </a:xfrm>
+          <a:prstGeom prst="line">
+            <a:avLst/>
+          </a:prstGeom>
+          <a:noFill/>
+          <a:ln w="12700">
+            <a:solidFill>
+              <a:srgbClr val="E5E7EB">
+                <a:alpha val="72000"/>
+              </a:srgbClr>
+            </a:solidFill>
+            <a:prstDash val="solid"/>
+          </a:ln>
+        </p:spPr>
+      </p:sp>
+      <p:sp>
+        <p:nvSpPr>
+          <p:cNvPr id="8" name="Shape 6"/>
+          <p:cNvSpPr/>
+          <p:nvPr/>
+        </p:nvSpPr>
+        <p:spPr>
+          <a:xfrm>
+            <a:off x="749808" y="6437376"/>
+            <a:ext cx="10692079" cy="0"/>
+          </a:xfrm>
+          <a:prstGeom prst="line">
+            <a:avLst/>
+          </a:prstGeom>
+          <a:noFill/>
+          <a:ln w="12700">
+            <a:solidFill>
+              <a:srgbClr val="E5E7EB">
+                <a:alpha val="18000"/>
+              </a:srgbClr>
+            </a:solidFill>
+            <a:prstDash val="solid"/>
+          </a:ln>
+        </p:spPr>
+      </p:sp>
       <p:pic>
         <p:nvPicPr>
-          <p:cNvPr id="4" name="Image 0" descr="preencoded.png">    </p:cNvPr>
+          <p:cNvPr id="9" name="Image 0" descr="preencoded.png">    </p:cNvPr>
           <p:cNvPicPr>
             <a:picLocks noChangeAspect="1"/>
           </p:cNvPicPr>
@@ -9050,7 +10175,7 @@
       </p:pic>
       <p:sp>
         <p:nvSpPr>
-          <p:cNvPr id="5" name="mdpr:1-2-b8955f:title:__title:1-2-b8955f"/>
+          <p:cNvPr id="10" name="mdpr:1-2-b8955f:title:__title:1-2-b8955f"/>
           <p:cNvSpPr txBox="1"/>
           <p:nvPr/>
         </p:nvSpPr>
@@ -9092,7 +10217,7 @@
       </p:sp>
       <p:sp>
         <p:nvSpPr>
-          <p:cNvPr id="6" name="Shape 3"/>
+          <p:cNvPr id="11" name="Shape 8"/>
           <p:cNvSpPr/>
           <p:nvPr/>
         </p:nvSpPr>
@@ -9125,7 +10250,7 @@
       </p:sp>
       <p:sp>
         <p:nvSpPr>
-          <p:cNvPr id="7" name="Shape 4"/>
+          <p:cNvPr id="12" name="Shape 9"/>
           <p:cNvSpPr/>
           <p:nvPr/>
         </p:nvSpPr>
@@ -9156,7 +10281,7 @@
       </p:sp>
       <p:sp>
         <p:nvSpPr>
-          <p:cNvPr id="8" name="Shape 5"/>
+          <p:cNvPr id="13" name="Shape 10"/>
           <p:cNvSpPr/>
           <p:nvPr/>
         </p:nvSpPr>
@@ -9187,7 +10312,7 @@
       </p:sp>
       <p:sp>
         <p:nvSpPr>
-          <p:cNvPr id="9" name="Shape 6"/>
+          <p:cNvPr id="14" name="Shape 11"/>
           <p:cNvSpPr/>
           <p:nvPr/>
         </p:nvSpPr>
@@ -9212,7 +10337,7 @@
       </p:sp>
       <p:sp>
         <p:nvSpPr>
-          <p:cNvPr id="10" name="Shape 7"/>
+          <p:cNvPr id="15" name="Shape 12"/>
           <p:cNvSpPr/>
           <p:nvPr/>
         </p:nvSpPr>
@@ -9239,7 +10364,7 @@
       </p:sp>
       <p:sp>
         <p:nvSpPr>
-          <p:cNvPr id="11" name="Text 8"/>
+          <p:cNvPr id="16" name="Text 13"/>
           <p:cNvSpPr txBox="1"/>
           <p:nvPr/>
         </p:nvSpPr>
@@ -9283,7 +10408,7 @@
       </p:sp>
       <p:sp>
         <p:nvSpPr>
-          <p:cNvPr id="12" name="Text 9"/>
+          <p:cNvPr id="17" name="Text 14"/>
           <p:cNvSpPr txBox="1"/>
           <p:nvPr/>
         </p:nvSpPr>
@@ -9325,7 +10450,7 @@
       </p:sp>
       <p:sp>
         <p:nvSpPr>
-          <p:cNvPr id="13" name="Shape 10"/>
+          <p:cNvPr id="18" name="Shape 15"/>
           <p:cNvSpPr/>
           <p:nvPr/>
         </p:nvSpPr>
@@ -9352,7 +10477,7 @@
       </p:sp>
       <p:sp>
         <p:nvSpPr>
-          <p:cNvPr id="14" name="Text 11"/>
+          <p:cNvPr id="19" name="Text 16"/>
           <p:cNvSpPr txBox="1"/>
           <p:nvPr/>
         </p:nvSpPr>
@@ -9396,7 +10521,7 @@
       </p:sp>
       <p:sp>
         <p:nvSpPr>
-          <p:cNvPr id="15" name="Shape 12"/>
+          <p:cNvPr id="20" name="Shape 17"/>
           <p:cNvSpPr/>
           <p:nvPr/>
         </p:nvSpPr>
@@ -9423,7 +10548,7 @@
       </p:sp>
       <p:sp>
         <p:nvSpPr>
-          <p:cNvPr id="16" name="Text 13"/>
+          <p:cNvPr id="21" name="Text 18"/>
           <p:cNvSpPr txBox="1"/>
           <p:nvPr/>
         </p:nvSpPr>
@@ -9467,7 +10592,7 @@
       </p:sp>
       <p:sp>
         <p:nvSpPr>
-          <p:cNvPr id="17" name="Shape 14"/>
+          <p:cNvPr id="22" name="Shape 19"/>
           <p:cNvSpPr/>
           <p:nvPr/>
         </p:nvSpPr>
@@ -9498,7 +10623,7 @@
       </p:sp>
       <p:sp>
         <p:nvSpPr>
-          <p:cNvPr id="18" name="Shape 15"/>
+          <p:cNvPr id="23" name="Shape 20"/>
           <p:cNvSpPr/>
           <p:nvPr/>
         </p:nvSpPr>
@@ -9527,7 +10652,7 @@
       </p:sp>
       <p:sp>
         <p:nvSpPr>
-          <p:cNvPr id="19" name="Shape 16"/>
+          <p:cNvPr id="24" name="Shape 21"/>
           <p:cNvSpPr/>
           <p:nvPr/>
         </p:nvSpPr>
@@ -9550,7 +10675,7 @@
       </p:sp>
       <p:sp>
         <p:nvSpPr>
-          <p:cNvPr id="20" name="Shape 17"/>
+          <p:cNvPr id="25" name="Shape 22"/>
           <p:cNvSpPr/>
           <p:nvPr/>
         </p:nvSpPr>
@@ -9575,7 +10700,7 @@
       </p:sp>
       <p:sp>
         <p:nvSpPr>
-          <p:cNvPr id="21" name="Shape 18"/>
+          <p:cNvPr id="26" name="Shape 23"/>
           <p:cNvSpPr/>
           <p:nvPr/>
         </p:nvSpPr>
@@ -9600,7 +10725,7 @@
       </p:sp>
       <p:sp>
         <p:nvSpPr>
-          <p:cNvPr id="22" name="Shape 19"/>
+          <p:cNvPr id="27" name="Shape 24"/>
           <p:cNvSpPr/>
           <p:nvPr/>
         </p:nvSpPr>
@@ -9625,7 +10750,7 @@
       </p:sp>
       <p:sp>
         <p:nvSpPr>
-          <p:cNvPr id="23" name="Text 20"/>
+          <p:cNvPr id="28" name="Text 25"/>
           <p:cNvSpPr txBox="1"/>
           <p:nvPr/>
         </p:nvSpPr>
@@ -9669,7 +10794,7 @@
       </p:sp>
       <p:sp>
         <p:nvSpPr>
-          <p:cNvPr id="24" name="Text 21"/>
+          <p:cNvPr id="29" name="Text 26"/>
           <p:cNvSpPr txBox="1"/>
           <p:nvPr/>
         </p:nvSpPr>
@@ -9711,7 +10836,7 @@
       </p:sp>
       <p:sp>
         <p:nvSpPr>
-          <p:cNvPr id="25" name="Text 22"/>
+          <p:cNvPr id="30" name="Text 27"/>
           <p:cNvSpPr txBox="1"/>
           <p:nvPr/>
         </p:nvSpPr>
@@ -9753,7 +10878,7 @@
       </p:sp>
       <p:sp>
         <p:nvSpPr>
-          <p:cNvPr id="26" name="Text 23"/>
+          <p:cNvPr id="31" name="Text 28"/>
           <p:cNvSpPr txBox="1"/>
           <p:nvPr/>
         </p:nvSpPr>
@@ -9875,9 +11000,134 @@
           </a:ln>
         </p:spPr>
       </p:sp>
+      <p:sp>
+        <p:nvSpPr>
+          <p:cNvPr id="4" name="Shape 2"/>
+          <p:cNvSpPr/>
+          <p:nvPr/>
+        </p:nvSpPr>
+        <p:spPr>
+          <a:xfrm>
+            <a:off x="585216" y="585216"/>
+            <a:ext cx="329184" cy="0"/>
+          </a:xfrm>
+          <a:prstGeom prst="line">
+            <a:avLst/>
+          </a:prstGeom>
+          <a:noFill/>
+          <a:ln w="12700">
+            <a:solidFill>
+              <a:srgbClr val="E5E7EB">
+                <a:alpha val="72000"/>
+              </a:srgbClr>
+            </a:solidFill>
+            <a:prstDash val="solid"/>
+          </a:ln>
+        </p:spPr>
+      </p:sp>
+      <p:sp>
+        <p:nvSpPr>
+          <p:cNvPr id="5" name="Shape 3"/>
+          <p:cNvSpPr/>
+          <p:nvPr/>
+        </p:nvSpPr>
+        <p:spPr>
+          <a:xfrm>
+            <a:off x="585216" y="585216"/>
+            <a:ext cx="0" cy="329184"/>
+          </a:xfrm>
+          <a:prstGeom prst="line">
+            <a:avLst/>
+          </a:prstGeom>
+          <a:noFill/>
+          <a:ln w="12700">
+            <a:solidFill>
+              <a:srgbClr val="E5E7EB">
+                <a:alpha val="72000"/>
+              </a:srgbClr>
+            </a:solidFill>
+            <a:prstDash val="solid"/>
+          </a:ln>
+        </p:spPr>
+      </p:sp>
+      <p:sp>
+        <p:nvSpPr>
+          <p:cNvPr id="6" name="Shape 4"/>
+          <p:cNvSpPr/>
+          <p:nvPr/>
+        </p:nvSpPr>
+        <p:spPr>
+          <a:xfrm>
+            <a:off x="11277295" y="6272784"/>
+            <a:ext cx="329184" cy="0"/>
+          </a:xfrm>
+          <a:prstGeom prst="line">
+            <a:avLst/>
+          </a:prstGeom>
+          <a:noFill/>
+          <a:ln w="12700">
+            <a:solidFill>
+              <a:srgbClr val="E5E7EB">
+                <a:alpha val="72000"/>
+              </a:srgbClr>
+            </a:solidFill>
+            <a:prstDash val="solid"/>
+          </a:ln>
+        </p:spPr>
+      </p:sp>
+      <p:sp>
+        <p:nvSpPr>
+          <p:cNvPr id="7" name="Shape 5"/>
+          <p:cNvSpPr/>
+          <p:nvPr/>
+        </p:nvSpPr>
+        <p:spPr>
+          <a:xfrm>
+            <a:off x="11606479" y="5943600"/>
+            <a:ext cx="0" cy="329184"/>
+          </a:xfrm>
+          <a:prstGeom prst="line">
+            <a:avLst/>
+          </a:prstGeom>
+          <a:noFill/>
+          <a:ln w="12700">
+            <a:solidFill>
+              <a:srgbClr val="E5E7EB">
+                <a:alpha val="72000"/>
+              </a:srgbClr>
+            </a:solidFill>
+            <a:prstDash val="solid"/>
+          </a:ln>
+        </p:spPr>
+      </p:sp>
+      <p:sp>
+        <p:nvSpPr>
+          <p:cNvPr id="8" name="Shape 6"/>
+          <p:cNvSpPr/>
+          <p:nvPr/>
+        </p:nvSpPr>
+        <p:spPr>
+          <a:xfrm>
+            <a:off x="749808" y="6437376"/>
+            <a:ext cx="10692079" cy="0"/>
+          </a:xfrm>
+          <a:prstGeom prst="line">
+            <a:avLst/>
+          </a:prstGeom>
+          <a:noFill/>
+          <a:ln w="12700">
+            <a:solidFill>
+              <a:srgbClr val="E5E7EB">
+                <a:alpha val="18000"/>
+              </a:srgbClr>
+            </a:solidFill>
+            <a:prstDash val="solid"/>
+          </a:ln>
+        </p:spPr>
+      </p:sp>
       <p:pic>
         <p:nvPicPr>
-          <p:cNvPr id="4" name="Image 0" descr="preencoded.png">    </p:cNvPr>
+          <p:cNvPr id="9" name="Image 0" descr="preencoded.png">    </p:cNvPr>
           <p:cNvPicPr>
             <a:picLocks noChangeAspect="1"/>
           </p:cNvPicPr>
@@ -9907,7 +11157,7 @@
       </p:pic>
       <p:sp>
         <p:nvSpPr>
-          <p:cNvPr id="5" name="mdpr:2-2-4dc4c1:title:__title:2-2-4dc4c1"/>
+          <p:cNvPr id="10" name="mdpr:2-2-4dc4c1:title:__title:2-2-4dc4c1"/>
           <p:cNvSpPr txBox="1"/>
           <p:nvPr/>
         </p:nvSpPr>
@@ -9949,7 +11199,7 @@
       </p:sp>
       <p:sp>
         <p:nvSpPr>
-          <p:cNvPr id="6" name="Shape 3"/>
+          <p:cNvPr id="11" name="Shape 8"/>
           <p:cNvSpPr/>
           <p:nvPr/>
         </p:nvSpPr>
@@ -9976,7 +11226,7 @@
       </p:sp>
       <p:sp>
         <p:nvSpPr>
-          <p:cNvPr id="7" name="Shape 4"/>
+          <p:cNvPr id="12" name="Shape 9"/>
           <p:cNvSpPr/>
           <p:nvPr/>
         </p:nvSpPr>
@@ -10003,7 +11253,7 @@
       </p:sp>
       <p:sp>
         <p:nvSpPr>
-          <p:cNvPr id="8" name="Text 5"/>
+          <p:cNvPr id="13" name="Text 10"/>
           <p:cNvSpPr txBox="1"/>
           <p:nvPr/>
         </p:nvSpPr>
@@ -10047,7 +11297,7 @@
       </p:sp>
       <p:sp>
         <p:nvSpPr>
-          <p:cNvPr id="9" name="Text 6"/>
+          <p:cNvPr id="14" name="Text 11"/>
           <p:cNvSpPr txBox="1"/>
           <p:nvPr/>
         </p:nvSpPr>
@@ -10091,7 +11341,7 @@
       </p:sp>
       <p:sp>
         <p:nvSpPr>
-          <p:cNvPr id="10" name="Shape 7"/>
+          <p:cNvPr id="15" name="Shape 12"/>
           <p:cNvSpPr/>
           <p:nvPr/>
         </p:nvSpPr>
@@ -10118,7 +11368,7 @@
       </p:sp>
       <p:sp>
         <p:nvSpPr>
-          <p:cNvPr id="11" name="Shape 8"/>
+          <p:cNvPr id="16" name="Shape 13"/>
           <p:cNvSpPr/>
           <p:nvPr/>
         </p:nvSpPr>
@@ -10145,7 +11395,7 @@
       </p:sp>
       <p:sp>
         <p:nvSpPr>
-          <p:cNvPr id="12" name="Text 9"/>
+          <p:cNvPr id="17" name="Text 14"/>
           <p:cNvSpPr txBox="1"/>
           <p:nvPr/>
         </p:nvSpPr>
@@ -10189,7 +11439,7 @@
       </p:sp>
       <p:sp>
         <p:nvSpPr>
-          <p:cNvPr id="13" name="Text 10"/>
+          <p:cNvPr id="18" name="Text 15"/>
           <p:cNvSpPr txBox="1"/>
           <p:nvPr/>
         </p:nvSpPr>
@@ -10233,7 +11483,7 @@
       </p:sp>
       <p:sp>
         <p:nvSpPr>
-          <p:cNvPr id="14" name="Shape 11"/>
+          <p:cNvPr id="19" name="Shape 16"/>
           <p:cNvSpPr/>
           <p:nvPr/>
         </p:nvSpPr>
@@ -10260,7 +11510,7 @@
       </p:sp>
       <p:sp>
         <p:nvSpPr>
-          <p:cNvPr id="15" name="Shape 12"/>
+          <p:cNvPr id="20" name="Shape 17"/>
           <p:cNvSpPr/>
           <p:nvPr/>
         </p:nvSpPr>
@@ -10287,7 +11537,7 @@
       </p:sp>
       <p:sp>
         <p:nvSpPr>
-          <p:cNvPr id="16" name="Text 13"/>
+          <p:cNvPr id="21" name="Text 18"/>
           <p:cNvSpPr txBox="1"/>
           <p:nvPr/>
         </p:nvSpPr>
@@ -10331,7 +11581,7 @@
       </p:sp>
       <p:sp>
         <p:nvSpPr>
-          <p:cNvPr id="17" name="Text 14"/>
+          <p:cNvPr id="22" name="Text 19"/>
           <p:cNvSpPr txBox="1"/>
           <p:nvPr/>
         </p:nvSpPr>
@@ -10375,7 +11625,7 @@
       </p:sp>
       <p:sp>
         <p:nvSpPr>
-          <p:cNvPr id="18" name="Shape 15"/>
+          <p:cNvPr id="23" name="Shape 20"/>
           <p:cNvSpPr/>
           <p:nvPr/>
         </p:nvSpPr>
@@ -10402,7 +11652,7 @@
       </p:sp>
       <p:sp>
         <p:nvSpPr>
-          <p:cNvPr id="19" name="Shape 16"/>
+          <p:cNvPr id="24" name="Shape 21"/>
           <p:cNvSpPr/>
           <p:nvPr/>
         </p:nvSpPr>
@@ -10429,7 +11679,7 @@
       </p:sp>
       <p:sp>
         <p:nvSpPr>
-          <p:cNvPr id="20" name="Text 17"/>
+          <p:cNvPr id="25" name="Text 22"/>
           <p:cNvSpPr txBox="1"/>
           <p:nvPr/>
         </p:nvSpPr>
@@ -10473,7 +11723,7 @@
       </p:sp>
       <p:sp>
         <p:nvSpPr>
-          <p:cNvPr id="21" name="Text 18"/>
+          <p:cNvPr id="26" name="Text 23"/>
           <p:cNvSpPr txBox="1"/>
           <p:nvPr/>
         </p:nvSpPr>
@@ -10517,7 +11767,7 @@
       </p:sp>
       <p:sp>
         <p:nvSpPr>
-          <p:cNvPr id="22" name="Shape 19"/>
+          <p:cNvPr id="27" name="Shape 24"/>
           <p:cNvSpPr/>
           <p:nvPr/>
         </p:nvSpPr>
@@ -10541,7 +11791,7 @@
       </p:sp>
       <p:sp>
         <p:nvSpPr>
-          <p:cNvPr id="23" name="Shape 20"/>
+          <p:cNvPr id="28" name="Shape 25"/>
           <p:cNvSpPr/>
           <p:nvPr/>
         </p:nvSpPr>
@@ -10565,7 +11815,7 @@
       </p:sp>
       <p:sp>
         <p:nvSpPr>
-          <p:cNvPr id="24" name="Shape 21"/>
+          <p:cNvPr id="29" name="Shape 26"/>
           <p:cNvSpPr/>
           <p:nvPr/>
         </p:nvSpPr>
@@ -10669,9 +11919,134 @@
           </a:ln>
         </p:spPr>
       </p:sp>
+      <p:sp>
+        <p:nvSpPr>
+          <p:cNvPr id="4" name="Shape 2"/>
+          <p:cNvSpPr/>
+          <p:nvPr/>
+        </p:nvSpPr>
+        <p:spPr>
+          <a:xfrm>
+            <a:off x="585216" y="585216"/>
+            <a:ext cx="329184" cy="0"/>
+          </a:xfrm>
+          <a:prstGeom prst="line">
+            <a:avLst/>
+          </a:prstGeom>
+          <a:noFill/>
+          <a:ln w="12700">
+            <a:solidFill>
+              <a:srgbClr val="E5E7EB">
+                <a:alpha val="72000"/>
+              </a:srgbClr>
+            </a:solidFill>
+            <a:prstDash val="solid"/>
+          </a:ln>
+        </p:spPr>
+      </p:sp>
+      <p:sp>
+        <p:nvSpPr>
+          <p:cNvPr id="5" name="Shape 3"/>
+          <p:cNvSpPr/>
+          <p:nvPr/>
+        </p:nvSpPr>
+        <p:spPr>
+          <a:xfrm>
+            <a:off x="585216" y="585216"/>
+            <a:ext cx="0" cy="329184"/>
+          </a:xfrm>
+          <a:prstGeom prst="line">
+            <a:avLst/>
+          </a:prstGeom>
+          <a:noFill/>
+          <a:ln w="12700">
+            <a:solidFill>
+              <a:srgbClr val="E5E7EB">
+                <a:alpha val="72000"/>
+              </a:srgbClr>
+            </a:solidFill>
+            <a:prstDash val="solid"/>
+          </a:ln>
+        </p:spPr>
+      </p:sp>
+      <p:sp>
+        <p:nvSpPr>
+          <p:cNvPr id="6" name="Shape 4"/>
+          <p:cNvSpPr/>
+          <p:nvPr/>
+        </p:nvSpPr>
+        <p:spPr>
+          <a:xfrm>
+            <a:off x="11277295" y="6272784"/>
+            <a:ext cx="329184" cy="0"/>
+          </a:xfrm>
+          <a:prstGeom prst="line">
+            <a:avLst/>
+          </a:prstGeom>
+          <a:noFill/>
+          <a:ln w="12700">
+            <a:solidFill>
+              <a:srgbClr val="E5E7EB">
+                <a:alpha val="72000"/>
+              </a:srgbClr>
+            </a:solidFill>
+            <a:prstDash val="solid"/>
+          </a:ln>
+        </p:spPr>
+      </p:sp>
+      <p:sp>
+        <p:nvSpPr>
+          <p:cNvPr id="7" name="Shape 5"/>
+          <p:cNvSpPr/>
+          <p:nvPr/>
+        </p:nvSpPr>
+        <p:spPr>
+          <a:xfrm>
+            <a:off x="11606479" y="5943600"/>
+            <a:ext cx="0" cy="329184"/>
+          </a:xfrm>
+          <a:prstGeom prst="line">
+            <a:avLst/>
+          </a:prstGeom>
+          <a:noFill/>
+          <a:ln w="12700">
+            <a:solidFill>
+              <a:srgbClr val="E5E7EB">
+                <a:alpha val="72000"/>
+              </a:srgbClr>
+            </a:solidFill>
+            <a:prstDash val="solid"/>
+          </a:ln>
+        </p:spPr>
+      </p:sp>
+      <p:sp>
+        <p:nvSpPr>
+          <p:cNvPr id="8" name="Shape 6"/>
+          <p:cNvSpPr/>
+          <p:nvPr/>
+        </p:nvSpPr>
+        <p:spPr>
+          <a:xfrm>
+            <a:off x="749808" y="6437376"/>
+            <a:ext cx="10692079" cy="0"/>
+          </a:xfrm>
+          <a:prstGeom prst="line">
+            <a:avLst/>
+          </a:prstGeom>
+          <a:noFill/>
+          <a:ln w="12700">
+            <a:solidFill>
+              <a:srgbClr val="E5E7EB">
+                <a:alpha val="18000"/>
+              </a:srgbClr>
+            </a:solidFill>
+            <a:prstDash val="solid"/>
+          </a:ln>
+        </p:spPr>
+      </p:sp>
       <p:pic>
         <p:nvPicPr>
-          <p:cNvPr id="4" name="Image 0" descr="preencoded.png">    </p:cNvPr>
+          <p:cNvPr id="9" name="Image 0" descr="preencoded.png">    </p:cNvPr>
           <p:cNvPicPr>
             <a:picLocks noChangeAspect="1"/>
           </p:cNvPicPr>
@@ -10701,7 +12076,7 @@
       </p:pic>
       <p:pic>
         <p:nvPicPr>
-          <p:cNvPr id="5" name="Image 1" descr="preencoded.png">    </p:cNvPr>
+          <p:cNvPr id="10" name="Image 1" descr="preencoded.png">    </p:cNvPr>
           <p:cNvPicPr>
             <a:picLocks noChangeAspect="1"/>
           </p:cNvPicPr>
@@ -10731,7 +12106,7 @@
       </p:pic>
       <p:pic>
         <p:nvPicPr>
-          <p:cNvPr id="6" name="Image 2" descr="preencoded.png">    </p:cNvPr>
+          <p:cNvPr id="11" name="Image 2" descr="preencoded.png">    </p:cNvPr>
           <p:cNvPicPr>
             <a:picLocks noChangeAspect="1"/>
           </p:cNvPicPr>
@@ -10761,7 +12136,7 @@
       </p:pic>
       <p:sp>
         <p:nvSpPr>
-          <p:cNvPr id="7" name="Shape 2"/>
+          <p:cNvPr id="12" name="Shape 7"/>
           <p:cNvSpPr/>
           <p:nvPr/>
         </p:nvSpPr>
@@ -10790,7 +12165,7 @@
       </p:sp>
       <p:sp>
         <p:nvSpPr>
-          <p:cNvPr id="8" name="Shape 3"/>
+          <p:cNvPr id="13" name="Shape 8"/>
           <p:cNvSpPr/>
           <p:nvPr/>
         </p:nvSpPr>
@@ -10817,7 +12192,7 @@
       </p:sp>
       <p:sp>
         <p:nvSpPr>
-          <p:cNvPr id="9" name="Shape 4"/>
+          <p:cNvPr id="14" name="Shape 9"/>
           <p:cNvSpPr/>
           <p:nvPr/>
         </p:nvSpPr>
@@ -10844,7 +12219,7 @@
       </p:sp>
       <p:sp>
         <p:nvSpPr>
-          <p:cNvPr id="10" name="Shape 5"/>
+          <p:cNvPr id="15" name="Shape 10"/>
           <p:cNvSpPr/>
           <p:nvPr/>
         </p:nvSpPr>
@@ -10871,7 +12246,7 @@
       </p:sp>
       <p:sp>
         <p:nvSpPr>
-          <p:cNvPr id="11" name="mdpr:1-2-ea42c8:title:__title:1-2-ea42c8"/>
+          <p:cNvPr id="16" name="mdpr:1-2-ea42c8:title:__title:1-2-ea42c8"/>
           <p:cNvSpPr txBox="1"/>
           <p:nvPr/>
         </p:nvSpPr>
@@ -10913,7 +12288,7 @@
       </p:sp>
       <p:sp>
         <p:nvSpPr>
-          <p:cNvPr id="12" name="Shape 7"/>
+          <p:cNvPr id="17" name="Shape 12"/>
           <p:cNvSpPr/>
           <p:nvPr/>
         </p:nvSpPr>
@@ -10940,7 +12315,7 @@
       </p:sp>
       <p:pic>
         <p:nvPicPr>
-          <p:cNvPr id="13" name="Image 3" descr="article icon from tabler-icons (MIT)">    </p:cNvPr>
+          <p:cNvPr id="18" name="Image 3" descr="article icon from tabler-icons (MIT)">    </p:cNvPr>
           <p:cNvPicPr>
             <a:picLocks noChangeAspect="1"/>
           </p:cNvPicPr>
@@ -10970,7 +12345,7 @@
       </p:pic>
       <p:sp>
         <p:nvSpPr>
-          <p:cNvPr id="14" name="mdpr:1-2-ea42c8:item-1:block-27-chunk-1"/>
+          <p:cNvPr id="19" name="mdpr:1-2-ea42c8:item-1:block-27-chunk-1"/>
           <p:cNvSpPr txBox="1"/>
           <p:nvPr/>
         </p:nvSpPr>
@@ -11029,7 +12404,7 @@
       </p:sp>
       <p:sp>
         <p:nvSpPr>
-          <p:cNvPr id="15" name="Shape 9"/>
+          <p:cNvPr id="20" name="Shape 14"/>
           <p:cNvSpPr/>
           <p:nvPr/>
         </p:nvSpPr>
@@ -11056,7 +12431,7 @@
       </p:sp>
       <p:pic>
         <p:nvPicPr>
-          <p:cNvPr id="16" name="Image 4" descr="article icon from tabler-icons (MIT)">    </p:cNvPr>
+          <p:cNvPr id="21" name="Image 4" descr="article icon from tabler-icons (MIT)">    </p:cNvPr>
           <p:cNvPicPr>
             <a:picLocks noChangeAspect="1"/>
           </p:cNvPicPr>
@@ -11086,7 +12461,7 @@
       </p:pic>
       <p:sp>
         <p:nvSpPr>
-          <p:cNvPr id="17" name="mdpr:1-2-ea42c8:item-2:block-27-chunk-1"/>
+          <p:cNvPr id="22" name="mdpr:1-2-ea42c8:item-2:block-27-chunk-1"/>
           <p:cNvSpPr txBox="1"/>
           <p:nvPr/>
         </p:nvSpPr>
@@ -11145,7 +12520,7 @@
       </p:sp>
       <p:sp>
         <p:nvSpPr>
-          <p:cNvPr id="18" name="Shape 11"/>
+          <p:cNvPr id="23" name="Shape 16"/>
           <p:cNvSpPr/>
           <p:nvPr/>
         </p:nvSpPr>
@@ -11172,7 +12547,7 @@
       </p:sp>
       <p:pic>
         <p:nvPicPr>
-          <p:cNvPr id="19" name="Image 5" descr="article icon from tabler-icons (MIT)">    </p:cNvPr>
+          <p:cNvPr id="24" name="Image 5" descr="article icon from tabler-icons (MIT)">    </p:cNvPr>
           <p:cNvPicPr>
             <a:picLocks noChangeAspect="1"/>
           </p:cNvPicPr>
@@ -11202,7 +12577,7 @@
       </p:pic>
       <p:sp>
         <p:nvSpPr>
-          <p:cNvPr id="20" name="mdpr:1-2-ea42c8:item-3:block-27-chunk-1"/>
+          <p:cNvPr id="25" name="mdpr:1-2-ea42c8:item-3:block-27-chunk-1"/>
           <p:cNvSpPr txBox="1"/>
           <p:nvPr/>
         </p:nvSpPr>
@@ -11349,6 +12724,131 @@
         </p:nvSpPr>
         <p:spPr>
           <a:xfrm>
+            <a:off x="585216" y="585216"/>
+            <a:ext cx="329184" cy="0"/>
+          </a:xfrm>
+          <a:prstGeom prst="line">
+            <a:avLst/>
+          </a:prstGeom>
+          <a:noFill/>
+          <a:ln w="12700">
+            <a:solidFill>
+              <a:srgbClr val="E5E7EB">
+                <a:alpha val="72000"/>
+              </a:srgbClr>
+            </a:solidFill>
+            <a:prstDash val="solid"/>
+          </a:ln>
+        </p:spPr>
+      </p:sp>
+      <p:sp>
+        <p:nvSpPr>
+          <p:cNvPr id="5" name="Shape 3"/>
+          <p:cNvSpPr/>
+          <p:nvPr/>
+        </p:nvSpPr>
+        <p:spPr>
+          <a:xfrm>
+            <a:off x="585216" y="585216"/>
+            <a:ext cx="0" cy="329184"/>
+          </a:xfrm>
+          <a:prstGeom prst="line">
+            <a:avLst/>
+          </a:prstGeom>
+          <a:noFill/>
+          <a:ln w="12700">
+            <a:solidFill>
+              <a:srgbClr val="E5E7EB">
+                <a:alpha val="72000"/>
+              </a:srgbClr>
+            </a:solidFill>
+            <a:prstDash val="solid"/>
+          </a:ln>
+        </p:spPr>
+      </p:sp>
+      <p:sp>
+        <p:nvSpPr>
+          <p:cNvPr id="6" name="Shape 4"/>
+          <p:cNvSpPr/>
+          <p:nvPr/>
+        </p:nvSpPr>
+        <p:spPr>
+          <a:xfrm>
+            <a:off x="11277295" y="6272784"/>
+            <a:ext cx="329184" cy="0"/>
+          </a:xfrm>
+          <a:prstGeom prst="line">
+            <a:avLst/>
+          </a:prstGeom>
+          <a:noFill/>
+          <a:ln w="12700">
+            <a:solidFill>
+              <a:srgbClr val="E5E7EB">
+                <a:alpha val="72000"/>
+              </a:srgbClr>
+            </a:solidFill>
+            <a:prstDash val="solid"/>
+          </a:ln>
+        </p:spPr>
+      </p:sp>
+      <p:sp>
+        <p:nvSpPr>
+          <p:cNvPr id="7" name="Shape 5"/>
+          <p:cNvSpPr/>
+          <p:nvPr/>
+        </p:nvSpPr>
+        <p:spPr>
+          <a:xfrm>
+            <a:off x="11606479" y="5943600"/>
+            <a:ext cx="0" cy="329184"/>
+          </a:xfrm>
+          <a:prstGeom prst="line">
+            <a:avLst/>
+          </a:prstGeom>
+          <a:noFill/>
+          <a:ln w="12700">
+            <a:solidFill>
+              <a:srgbClr val="E5E7EB">
+                <a:alpha val="72000"/>
+              </a:srgbClr>
+            </a:solidFill>
+            <a:prstDash val="solid"/>
+          </a:ln>
+        </p:spPr>
+      </p:sp>
+      <p:sp>
+        <p:nvSpPr>
+          <p:cNvPr id="8" name="Shape 6"/>
+          <p:cNvSpPr/>
+          <p:nvPr/>
+        </p:nvSpPr>
+        <p:spPr>
+          <a:xfrm>
+            <a:off x="749808" y="6437376"/>
+            <a:ext cx="10692079" cy="0"/>
+          </a:xfrm>
+          <a:prstGeom prst="line">
+            <a:avLst/>
+          </a:prstGeom>
+          <a:noFill/>
+          <a:ln w="12700">
+            <a:solidFill>
+              <a:srgbClr val="E5E7EB">
+                <a:alpha val="18000"/>
+              </a:srgbClr>
+            </a:solidFill>
+            <a:prstDash val="solid"/>
+          </a:ln>
+        </p:spPr>
+      </p:sp>
+      <p:sp>
+        <p:nvSpPr>
+          <p:cNvPr id="9" name="Shape 7"/>
+          <p:cNvSpPr/>
+          <p:nvPr/>
+        </p:nvSpPr>
+        <p:spPr>
+          <a:xfrm>
             <a:off x="822960" y="1188720"/>
             <a:ext cx="10515600" cy="45720"/>
           </a:xfrm>
@@ -11370,7 +12870,7 @@
       </p:sp>
       <p:sp>
         <p:nvSpPr>
-          <p:cNvPr id="5" name="Shape 3"/>
+          <p:cNvPr id="10" name="Shape 8"/>
           <p:cNvSpPr/>
           <p:nvPr/>
         </p:nvSpPr>
@@ -11397,7 +12897,7 @@
       </p:sp>
       <p:sp>
         <p:nvSpPr>
-          <p:cNvPr id="6" name="Shape 4"/>
+          <p:cNvPr id="11" name="Shape 9"/>
           <p:cNvSpPr/>
           <p:nvPr/>
         </p:nvSpPr>
@@ -11426,7 +12926,7 @@
       </p:sp>
       <p:sp>
         <p:nvSpPr>
-          <p:cNvPr id="7" name="Shape 5"/>
+          <p:cNvPr id="12" name="Shape 10"/>
           <p:cNvSpPr/>
           <p:nvPr/>
         </p:nvSpPr>
@@ -11453,7 +12953,7 @@
       </p:sp>
       <p:sp>
         <p:nvSpPr>
-          <p:cNvPr id="8" name="Shape 6"/>
+          <p:cNvPr id="13" name="Shape 11"/>
           <p:cNvSpPr/>
           <p:nvPr/>
         </p:nvSpPr>
@@ -11480,7 +12980,7 @@
       </p:sp>
       <p:sp>
         <p:nvSpPr>
-          <p:cNvPr id="9" name="Shape 7"/>
+          <p:cNvPr id="14" name="Shape 12"/>
           <p:cNvSpPr/>
           <p:nvPr/>
         </p:nvSpPr>
@@ -11507,7 +13007,7 @@
       </p:sp>
       <p:sp>
         <p:nvSpPr>
-          <p:cNvPr id="10" name="Shape 8"/>
+          <p:cNvPr id="15" name="Shape 13"/>
           <p:cNvSpPr/>
           <p:nvPr/>
         </p:nvSpPr>
@@ -11534,7 +13034,7 @@
       </p:sp>
       <p:sp>
         <p:nvSpPr>
-          <p:cNvPr id="11" name="Shape 9"/>
+          <p:cNvPr id="16" name="Shape 14"/>
           <p:cNvSpPr/>
           <p:nvPr/>
         </p:nvSpPr>
@@ -11561,7 +13061,7 @@
       </p:sp>
       <p:sp>
         <p:nvSpPr>
-          <p:cNvPr id="12" name="Shape 10"/>
+          <p:cNvPr id="17" name="Shape 15"/>
           <p:cNvSpPr/>
           <p:nvPr/>
         </p:nvSpPr>
@@ -11588,7 +13088,7 @@
       </p:sp>
       <p:sp>
         <p:nvSpPr>
-          <p:cNvPr id="13" name="Shape 11"/>
+          <p:cNvPr id="18" name="Shape 16"/>
           <p:cNvSpPr/>
           <p:nvPr/>
         </p:nvSpPr>
@@ -11615,7 +13115,7 @@
       </p:sp>
       <p:sp>
         <p:nvSpPr>
-          <p:cNvPr id="14" name="Shape 12"/>
+          <p:cNvPr id="19" name="Shape 17"/>
           <p:cNvSpPr/>
           <p:nvPr/>
         </p:nvSpPr>
@@ -11642,7 +13142,7 @@
       </p:sp>
       <p:sp>
         <p:nvSpPr>
-          <p:cNvPr id="15" name="Shape 13"/>
+          <p:cNvPr id="20" name="Shape 18"/>
           <p:cNvSpPr/>
           <p:nvPr/>
         </p:nvSpPr>
@@ -11669,7 +13169,7 @@
       </p:sp>
       <p:sp>
         <p:nvSpPr>
-          <p:cNvPr id="16" name="Shape 14"/>
+          <p:cNvPr id="21" name="Shape 19"/>
           <p:cNvSpPr/>
           <p:nvPr/>
         </p:nvSpPr>
@@ -11696,7 +13196,7 @@
       </p:sp>
       <p:sp>
         <p:nvSpPr>
-          <p:cNvPr id="17" name="Shape 15"/>
+          <p:cNvPr id="22" name="Shape 20"/>
           <p:cNvSpPr/>
           <p:nvPr/>
         </p:nvSpPr>
@@ -11723,7 +13223,7 @@
       </p:sp>
       <p:sp>
         <p:nvSpPr>
-          <p:cNvPr id="18" name="Shape 16"/>
+          <p:cNvPr id="23" name="Shape 21"/>
           <p:cNvSpPr/>
           <p:nvPr/>
         </p:nvSpPr>
@@ -11750,7 +13250,7 @@
       </p:sp>
       <p:sp>
         <p:nvSpPr>
-          <p:cNvPr id="19" name="Shape 17"/>
+          <p:cNvPr id="24" name="Shape 22"/>
           <p:cNvSpPr/>
           <p:nvPr/>
         </p:nvSpPr>
@@ -11777,7 +13277,7 @@
       </p:sp>
       <p:sp>
         <p:nvSpPr>
-          <p:cNvPr id="20" name="Shape 18"/>
+          <p:cNvPr id="25" name="Shape 23"/>
           <p:cNvSpPr/>
           <p:nvPr/>
         </p:nvSpPr>
@@ -11804,7 +13304,7 @@
       </p:sp>
       <p:sp>
         <p:nvSpPr>
-          <p:cNvPr id="21" name="mdpr:1-2-0772f8:title:__title:1-2-0772f8"/>
+          <p:cNvPr id="26" name="mdpr:1-2-0772f8:title:__title:1-2-0772f8"/>
           <p:cNvSpPr txBox="1"/>
           <p:nvPr/>
         </p:nvSpPr>
@@ -11846,7 +13346,7 @@
       </p:sp>
       <p:sp>
         <p:nvSpPr>
-          <p:cNvPr id="22" name="mdpr:1-2-0772f8:toc-item-1:toc-item-1"/>
+          <p:cNvPr id="27" name="mdpr:1-2-0772f8:toc-item-1:toc-item-1"/>
           <p:cNvSpPr txBox="1"/>
           <p:nvPr/>
         </p:nvSpPr>
@@ -11888,7 +13388,7 @@
       </p:sp>
       <p:sp>
         <p:nvSpPr>
-          <p:cNvPr id="23" name="mdpr:1-2-0772f8:toc-item-2:toc-item-2"/>
+          <p:cNvPr id="28" name="mdpr:1-2-0772f8:toc-item-2:toc-item-2"/>
           <p:cNvSpPr txBox="1"/>
           <p:nvPr/>
         </p:nvSpPr>
@@ -11930,7 +13430,7 @@
       </p:sp>
       <p:sp>
         <p:nvSpPr>
-          <p:cNvPr id="24" name="mdpr:1-2-0772f8:toc-item-3:toc-item-3"/>
+          <p:cNvPr id="29" name="mdpr:1-2-0772f8:toc-item-3:toc-item-3"/>
           <p:cNvSpPr txBox="1"/>
           <p:nvPr/>
         </p:nvSpPr>
@@ -11972,7 +13472,7 @@
       </p:sp>
       <p:sp>
         <p:nvSpPr>
-          <p:cNvPr id="25" name="mdpr:1-2-0772f8:toc-item-4:toc-item-4"/>
+          <p:cNvPr id="30" name="mdpr:1-2-0772f8:toc-item-4:toc-item-4"/>
           <p:cNvSpPr txBox="1"/>
           <p:nvPr/>
         </p:nvSpPr>
@@ -12014,7 +13514,7 @@
       </p:sp>
       <p:sp>
         <p:nvSpPr>
-          <p:cNvPr id="26" name="mdpr:1-2-0772f8:toc-item-5:toc-item-5"/>
+          <p:cNvPr id="31" name="mdpr:1-2-0772f8:toc-item-5:toc-item-5"/>
           <p:cNvSpPr txBox="1"/>
           <p:nvPr/>
         </p:nvSpPr>
@@ -12056,7 +13556,7 @@
       </p:sp>
       <p:sp>
         <p:nvSpPr>
-          <p:cNvPr id="27" name="mdpr:1-2-0772f8:toc-item-6:toc-item-6"/>
+          <p:cNvPr id="32" name="mdpr:1-2-0772f8:toc-item-6:toc-item-6"/>
           <p:cNvSpPr txBox="1"/>
           <p:nvPr/>
         </p:nvSpPr>
@@ -12098,7 +13598,7 @@
       </p:sp>
       <p:sp>
         <p:nvSpPr>
-          <p:cNvPr id="28" name="mdpr:1-2-0772f8:toc-item-7:toc-item-7"/>
+          <p:cNvPr id="33" name="mdpr:1-2-0772f8:toc-item-7:toc-item-7"/>
           <p:cNvSpPr txBox="1"/>
           <p:nvPr/>
         </p:nvSpPr>
@@ -12140,7 +13640,7 @@
       </p:sp>
       <p:sp>
         <p:nvSpPr>
-          <p:cNvPr id="29" name="mdpr:1-2-0772f8:toc-item-8:toc-item-8"/>
+          <p:cNvPr id="34" name="mdpr:1-2-0772f8:toc-item-8:toc-item-8"/>
           <p:cNvSpPr txBox="1"/>
           <p:nvPr/>
         </p:nvSpPr>
@@ -12182,7 +13682,7 @@
       </p:sp>
       <p:sp>
         <p:nvSpPr>
-          <p:cNvPr id="30" name="mdpr:1-2-0772f8:toc-item-9:toc-item-9"/>
+          <p:cNvPr id="35" name="mdpr:1-2-0772f8:toc-item-9:toc-item-9"/>
           <p:cNvSpPr txBox="1"/>
           <p:nvPr/>
         </p:nvSpPr>
@@ -12224,7 +13724,7 @@
       </p:sp>
       <p:sp>
         <p:nvSpPr>
-          <p:cNvPr id="31" name="mdpr:1-2-0772f8:toc-item-10:toc-item-10"/>
+          <p:cNvPr id="36" name="mdpr:1-2-0772f8:toc-item-10:toc-item-10"/>
           <p:cNvSpPr txBox="1"/>
           <p:nvPr/>
         </p:nvSpPr>
@@ -12266,7 +13766,7 @@
       </p:sp>
       <p:sp>
         <p:nvSpPr>
-          <p:cNvPr id="32" name="mdpr:1-2-0772f8:toc-item-11:toc-item-11"/>
+          <p:cNvPr id="37" name="mdpr:1-2-0772f8:toc-item-11:toc-item-11"/>
           <p:cNvSpPr txBox="1"/>
           <p:nvPr/>
         </p:nvSpPr>
@@ -12308,7 +13808,7 @@
       </p:sp>
       <p:sp>
         <p:nvSpPr>
-          <p:cNvPr id="33" name="mdpr:1-2-0772f8:toc-item-12:toc-item-12"/>
+          <p:cNvPr id="38" name="mdpr:1-2-0772f8:toc-item-12:toc-item-12"/>
           <p:cNvSpPr txBox="1"/>
           <p:nvPr/>
         </p:nvSpPr>
@@ -12350,7 +13850,7 @@
       </p:sp>
       <p:sp>
         <p:nvSpPr>
-          <p:cNvPr id="34" name="mdpr:1-2-0772f8:toc-item-13:toc-item-13"/>
+          <p:cNvPr id="39" name="mdpr:1-2-0772f8:toc-item-13:toc-item-13"/>
           <p:cNvSpPr txBox="1"/>
           <p:nvPr/>
         </p:nvSpPr>
@@ -12392,7 +13892,7 @@
       </p:sp>
       <p:sp>
         <p:nvSpPr>
-          <p:cNvPr id="35" name="mdpr:1-2-0772f8:toc-item-14:toc-item-14"/>
+          <p:cNvPr id="40" name="mdpr:1-2-0772f8:toc-item-14:toc-item-14"/>
           <p:cNvSpPr txBox="1"/>
           <p:nvPr/>
         </p:nvSpPr>
@@ -12522,6 +14022,131 @@
         </p:nvSpPr>
         <p:spPr>
           <a:xfrm>
+            <a:off x="585216" y="585216"/>
+            <a:ext cx="329184" cy="0"/>
+          </a:xfrm>
+          <a:prstGeom prst="line">
+            <a:avLst/>
+          </a:prstGeom>
+          <a:noFill/>
+          <a:ln w="12700">
+            <a:solidFill>
+              <a:srgbClr val="E5E7EB">
+                <a:alpha val="72000"/>
+              </a:srgbClr>
+            </a:solidFill>
+            <a:prstDash val="solid"/>
+          </a:ln>
+        </p:spPr>
+      </p:sp>
+      <p:sp>
+        <p:nvSpPr>
+          <p:cNvPr id="5" name="Shape 3"/>
+          <p:cNvSpPr/>
+          <p:nvPr/>
+        </p:nvSpPr>
+        <p:spPr>
+          <a:xfrm>
+            <a:off x="585216" y="585216"/>
+            <a:ext cx="0" cy="329184"/>
+          </a:xfrm>
+          <a:prstGeom prst="line">
+            <a:avLst/>
+          </a:prstGeom>
+          <a:noFill/>
+          <a:ln w="12700">
+            <a:solidFill>
+              <a:srgbClr val="E5E7EB">
+                <a:alpha val="72000"/>
+              </a:srgbClr>
+            </a:solidFill>
+            <a:prstDash val="solid"/>
+          </a:ln>
+        </p:spPr>
+      </p:sp>
+      <p:sp>
+        <p:nvSpPr>
+          <p:cNvPr id="6" name="Shape 4"/>
+          <p:cNvSpPr/>
+          <p:nvPr/>
+        </p:nvSpPr>
+        <p:spPr>
+          <a:xfrm>
+            <a:off x="11277295" y="6272784"/>
+            <a:ext cx="329184" cy="0"/>
+          </a:xfrm>
+          <a:prstGeom prst="line">
+            <a:avLst/>
+          </a:prstGeom>
+          <a:noFill/>
+          <a:ln w="12700">
+            <a:solidFill>
+              <a:srgbClr val="E5E7EB">
+                <a:alpha val="72000"/>
+              </a:srgbClr>
+            </a:solidFill>
+            <a:prstDash val="solid"/>
+          </a:ln>
+        </p:spPr>
+      </p:sp>
+      <p:sp>
+        <p:nvSpPr>
+          <p:cNvPr id="7" name="Shape 5"/>
+          <p:cNvSpPr/>
+          <p:nvPr/>
+        </p:nvSpPr>
+        <p:spPr>
+          <a:xfrm>
+            <a:off x="11606479" y="5943600"/>
+            <a:ext cx="0" cy="329184"/>
+          </a:xfrm>
+          <a:prstGeom prst="line">
+            <a:avLst/>
+          </a:prstGeom>
+          <a:noFill/>
+          <a:ln w="12700">
+            <a:solidFill>
+              <a:srgbClr val="E5E7EB">
+                <a:alpha val="72000"/>
+              </a:srgbClr>
+            </a:solidFill>
+            <a:prstDash val="solid"/>
+          </a:ln>
+        </p:spPr>
+      </p:sp>
+      <p:sp>
+        <p:nvSpPr>
+          <p:cNvPr id="8" name="Shape 6"/>
+          <p:cNvSpPr/>
+          <p:nvPr/>
+        </p:nvSpPr>
+        <p:spPr>
+          <a:xfrm>
+            <a:off x="749808" y="6437376"/>
+            <a:ext cx="10692079" cy="0"/>
+          </a:xfrm>
+          <a:prstGeom prst="line">
+            <a:avLst/>
+          </a:prstGeom>
+          <a:noFill/>
+          <a:ln w="12700">
+            <a:solidFill>
+              <a:srgbClr val="E5E7EB">
+                <a:alpha val="18000"/>
+              </a:srgbClr>
+            </a:solidFill>
+            <a:prstDash val="solid"/>
+          </a:ln>
+        </p:spPr>
+      </p:sp>
+      <p:sp>
+        <p:nvSpPr>
+          <p:cNvPr id="9" name="Shape 7"/>
+          <p:cNvSpPr/>
+          <p:nvPr/>
+        </p:nvSpPr>
+        <p:spPr>
+          <a:xfrm>
             <a:off x="822960" y="1554480"/>
             <a:ext cx="4937760" cy="73152"/>
           </a:xfrm>
@@ -12543,7 +14168,7 @@
       </p:sp>
       <p:sp>
         <p:nvSpPr>
-          <p:cNvPr id="5" name="Shape 3"/>
+          <p:cNvPr id="10" name="Shape 8"/>
           <p:cNvSpPr/>
           <p:nvPr/>
         </p:nvSpPr>
@@ -12570,7 +14195,7 @@
       </p:sp>
       <p:sp>
         <p:nvSpPr>
-          <p:cNvPr id="6" name="mdpr:2-2-4f71ba:title:__title:2-2-4f71ba"/>
+          <p:cNvPr id="11" name="mdpr:2-2-4f71ba:title:__title:2-2-4f71ba"/>
           <p:cNvSpPr txBox="1"/>
           <p:nvPr/>
         </p:nvSpPr>
@@ -12612,7 +14237,7 @@
       </p:sp>
       <p:sp>
         <p:nvSpPr>
-          <p:cNvPr id="7" name="mdpr:2-2-4f71ba:left:block-27-chunk-2"/>
+          <p:cNvPr id="12" name="mdpr:2-2-4f71ba:left:block-27-chunk-2"/>
           <p:cNvSpPr txBox="1"/>
           <p:nvPr/>
         </p:nvSpPr>
@@ -12671,7 +14296,7 @@
       </p:sp>
       <p:sp>
         <p:nvSpPr>
-          <p:cNvPr id="8" name="mdpr:2-2-4f71ba:right:block-27-chunk-2"/>
+          <p:cNvPr id="13" name="mdpr:2-2-4f71ba:right:block-27-chunk-2"/>
           <p:cNvSpPr txBox="1"/>
           <p:nvPr/>
         </p:nvSpPr>
@@ -12810,9 +14435,134 @@
           </a:ln>
         </p:spPr>
       </p:sp>
+      <p:sp>
+        <p:nvSpPr>
+          <p:cNvPr id="4" name="Shape 2"/>
+          <p:cNvSpPr/>
+          <p:nvPr/>
+        </p:nvSpPr>
+        <p:spPr>
+          <a:xfrm>
+            <a:off x="585216" y="585216"/>
+            <a:ext cx="329184" cy="0"/>
+          </a:xfrm>
+          <a:prstGeom prst="line">
+            <a:avLst/>
+          </a:prstGeom>
+          <a:noFill/>
+          <a:ln w="12700">
+            <a:solidFill>
+              <a:srgbClr val="E5E7EB">
+                <a:alpha val="72000"/>
+              </a:srgbClr>
+            </a:solidFill>
+            <a:prstDash val="solid"/>
+          </a:ln>
+        </p:spPr>
+      </p:sp>
+      <p:sp>
+        <p:nvSpPr>
+          <p:cNvPr id="5" name="Shape 3"/>
+          <p:cNvSpPr/>
+          <p:nvPr/>
+        </p:nvSpPr>
+        <p:spPr>
+          <a:xfrm>
+            <a:off x="585216" y="585216"/>
+            <a:ext cx="0" cy="329184"/>
+          </a:xfrm>
+          <a:prstGeom prst="line">
+            <a:avLst/>
+          </a:prstGeom>
+          <a:noFill/>
+          <a:ln w="12700">
+            <a:solidFill>
+              <a:srgbClr val="E5E7EB">
+                <a:alpha val="72000"/>
+              </a:srgbClr>
+            </a:solidFill>
+            <a:prstDash val="solid"/>
+          </a:ln>
+        </p:spPr>
+      </p:sp>
+      <p:sp>
+        <p:nvSpPr>
+          <p:cNvPr id="6" name="Shape 4"/>
+          <p:cNvSpPr/>
+          <p:nvPr/>
+        </p:nvSpPr>
+        <p:spPr>
+          <a:xfrm>
+            <a:off x="11277295" y="6272784"/>
+            <a:ext cx="329184" cy="0"/>
+          </a:xfrm>
+          <a:prstGeom prst="line">
+            <a:avLst/>
+          </a:prstGeom>
+          <a:noFill/>
+          <a:ln w="12700">
+            <a:solidFill>
+              <a:srgbClr val="E5E7EB">
+                <a:alpha val="72000"/>
+              </a:srgbClr>
+            </a:solidFill>
+            <a:prstDash val="solid"/>
+          </a:ln>
+        </p:spPr>
+      </p:sp>
+      <p:sp>
+        <p:nvSpPr>
+          <p:cNvPr id="7" name="Shape 5"/>
+          <p:cNvSpPr/>
+          <p:nvPr/>
+        </p:nvSpPr>
+        <p:spPr>
+          <a:xfrm>
+            <a:off x="11606479" y="5943600"/>
+            <a:ext cx="0" cy="329184"/>
+          </a:xfrm>
+          <a:prstGeom prst="line">
+            <a:avLst/>
+          </a:prstGeom>
+          <a:noFill/>
+          <a:ln w="12700">
+            <a:solidFill>
+              <a:srgbClr val="E5E7EB">
+                <a:alpha val="72000"/>
+              </a:srgbClr>
+            </a:solidFill>
+            <a:prstDash val="solid"/>
+          </a:ln>
+        </p:spPr>
+      </p:sp>
+      <p:sp>
+        <p:nvSpPr>
+          <p:cNvPr id="8" name="Shape 6"/>
+          <p:cNvSpPr/>
+          <p:nvPr/>
+        </p:nvSpPr>
+        <p:spPr>
+          <a:xfrm>
+            <a:off x="749808" y="6437376"/>
+            <a:ext cx="10692079" cy="0"/>
+          </a:xfrm>
+          <a:prstGeom prst="line">
+            <a:avLst/>
+          </a:prstGeom>
+          <a:noFill/>
+          <a:ln w="12700">
+            <a:solidFill>
+              <a:srgbClr val="E5E7EB">
+                <a:alpha val="18000"/>
+              </a:srgbClr>
+            </a:solidFill>
+            <a:prstDash val="solid"/>
+          </a:ln>
+        </p:spPr>
+      </p:sp>
       <p:pic>
         <p:nvPicPr>
-          <p:cNvPr id="4" name="Image 0" descr="preencoded.png">    </p:cNvPr>
+          <p:cNvPr id="9" name="Image 0" descr="preencoded.png">    </p:cNvPr>
           <p:cNvPicPr>
             <a:picLocks noChangeAspect="1"/>
           </p:cNvPicPr>
@@ -12842,7 +14592,7 @@
       </p:pic>
       <p:pic>
         <p:nvPicPr>
-          <p:cNvPr id="5" name="Image 1" descr="preencoded.png">    </p:cNvPr>
+          <p:cNvPr id="10" name="Image 1" descr="preencoded.png">    </p:cNvPr>
           <p:cNvPicPr>
             <a:picLocks noChangeAspect="1"/>
           </p:cNvPicPr>
@@ -12872,7 +14622,7 @@
       </p:pic>
       <p:pic>
         <p:nvPicPr>
-          <p:cNvPr id="6" name="Image 2" descr="preencoded.png">    </p:cNvPr>
+          <p:cNvPr id="11" name="Image 2" descr="preencoded.png">    </p:cNvPr>
           <p:cNvPicPr>
             <a:picLocks noChangeAspect="1"/>
           </p:cNvPicPr>
@@ -12902,7 +14652,7 @@
       </p:pic>
       <p:pic>
         <p:nvPicPr>
-          <p:cNvPr id="7" name="Image 3" descr="preencoded.png">    </p:cNvPr>
+          <p:cNvPr id="12" name="Image 3" descr="preencoded.png">    </p:cNvPr>
           <p:cNvPicPr>
             <a:picLocks noChangeAspect="1"/>
           </p:cNvPicPr>
@@ -12932,7 +14682,7 @@
       </p:pic>
       <p:sp>
         <p:nvSpPr>
-          <p:cNvPr id="8" name="Shape 2"/>
+          <p:cNvPr id="13" name="Shape 7"/>
           <p:cNvSpPr/>
           <p:nvPr/>
         </p:nvSpPr>
@@ -12959,7 +14709,7 @@
       </p:sp>
       <p:sp>
         <p:nvSpPr>
-          <p:cNvPr id="9" name="Shape 3"/>
+          <p:cNvPr id="14" name="Shape 8"/>
           <p:cNvSpPr/>
           <p:nvPr/>
         </p:nvSpPr>
@@ -12986,7 +14736,7 @@
       </p:sp>
       <p:sp>
         <p:nvSpPr>
-          <p:cNvPr id="10" name="Shape 4"/>
+          <p:cNvPr id="15" name="Shape 9"/>
           <p:cNvSpPr/>
           <p:nvPr/>
         </p:nvSpPr>
@@ -13013,7 +14763,7 @@
       </p:sp>
       <p:sp>
         <p:nvSpPr>
-          <p:cNvPr id="11" name="Shape 5"/>
+          <p:cNvPr id="16" name="Shape 10"/>
           <p:cNvSpPr/>
           <p:nvPr/>
         </p:nvSpPr>
@@ -13040,7 +14790,7 @@
       </p:sp>
       <p:sp>
         <p:nvSpPr>
-          <p:cNvPr id="12" name="mdpr:icon-and-text-aside-8429fc:title:__title:icon-and-text-aside-8429fc"/>
+          <p:cNvPr id="17" name="mdpr:icon-and-text-aside-8429fc:title:__title:icon-and-text-aside-8429fc"/>
           <p:cNvSpPr txBox="1"/>
           <p:nvPr/>
         </p:nvSpPr>
@@ -13082,7 +14832,7 @@
       </p:sp>
       <p:sp>
         <p:nvSpPr>
-          <p:cNvPr id="13" name="Shape 7"/>
+          <p:cNvPr id="18" name="Shape 12"/>
           <p:cNvSpPr/>
           <p:nvPr/>
         </p:nvSpPr>
@@ -13109,7 +14859,7 @@
       </p:sp>
       <p:pic>
         <p:nvPicPr>
-          <p:cNvPr id="14" name="Image 4" descr="article icon from tabler-icons (MIT)">    </p:cNvPr>
+          <p:cNvPr id="19" name="Image 4" descr="article icon from tabler-icons (MIT)">    </p:cNvPr>
           <p:cNvPicPr>
             <a:picLocks noChangeAspect="1"/>
           </p:cNvPicPr>
@@ -13139,7 +14889,7 @@
       </p:pic>
       <p:sp>
         <p:nvSpPr>
-          <p:cNvPr id="15" name="mdpr:icon-and-text-aside-8429fc:item-1:block-29"/>
+          <p:cNvPr id="20" name="mdpr:icon-and-text-aside-8429fc:item-1:block-29"/>
           <p:cNvSpPr txBox="1"/>
           <p:nvPr/>
         </p:nvSpPr>
@@ -13198,7 +14948,7 @@
       </p:sp>
       <p:sp>
         <p:nvSpPr>
-          <p:cNvPr id="16" name="Shape 9"/>
+          <p:cNvPr id="21" name="Shape 14"/>
           <p:cNvSpPr/>
           <p:nvPr/>
         </p:nvSpPr>
@@ -13225,7 +14975,7 @@
       </p:sp>
       <p:pic>
         <p:nvPicPr>
-          <p:cNvPr id="17" name="Image 5" descr="article icon from tabler-icons (MIT)">    </p:cNvPr>
+          <p:cNvPr id="22" name="Image 5" descr="article icon from tabler-icons (MIT)">    </p:cNvPr>
           <p:cNvPicPr>
             <a:picLocks noChangeAspect="1"/>
           </p:cNvPicPr>
@@ -13255,7 +15005,7 @@
       </p:pic>
       <p:sp>
         <p:nvSpPr>
-          <p:cNvPr id="18" name="mdpr:icon-and-text-aside-8429fc:item-2:block-29"/>
+          <p:cNvPr id="23" name="mdpr:icon-and-text-aside-8429fc:item-2:block-29"/>
           <p:cNvSpPr txBox="1"/>
           <p:nvPr/>
         </p:nvSpPr>
@@ -13314,7 +15064,7 @@
       </p:sp>
       <p:sp>
         <p:nvSpPr>
-          <p:cNvPr id="19" name="Shape 11"/>
+          <p:cNvPr id="24" name="Shape 16"/>
           <p:cNvSpPr/>
           <p:nvPr/>
         </p:nvSpPr>
@@ -13341,7 +15091,7 @@
       </p:sp>
       <p:pic>
         <p:nvPicPr>
-          <p:cNvPr id="20" name="Image 6" descr="article icon from tabler-icons (MIT)">    </p:cNvPr>
+          <p:cNvPr id="25" name="Image 6" descr="article icon from tabler-icons (MIT)">    </p:cNvPr>
           <p:cNvPicPr>
             <a:picLocks noChangeAspect="1"/>
           </p:cNvPicPr>
@@ -13371,7 +15121,7 @@
       </p:pic>
       <p:sp>
         <p:nvSpPr>
-          <p:cNvPr id="21" name="mdpr:icon-and-text-aside-8429fc:item-3:block-29"/>
+          <p:cNvPr id="26" name="mdpr:icon-and-text-aside-8429fc:item-3:block-29"/>
           <p:cNvSpPr txBox="1"/>
           <p:nvPr/>
         </p:nvSpPr>
@@ -13430,7 +15180,7 @@
       </p:sp>
       <p:sp>
         <p:nvSpPr>
-          <p:cNvPr id="22" name="Shape 13"/>
+          <p:cNvPr id="27" name="Shape 18"/>
           <p:cNvSpPr/>
           <p:nvPr/>
         </p:nvSpPr>
@@ -13457,7 +15207,7 @@
       </p:sp>
       <p:pic>
         <p:nvPicPr>
-          <p:cNvPr id="23" name="Image 7" descr="table icon from tabler-icons (MIT)">    </p:cNvPr>
+          <p:cNvPr id="28" name="Image 7" descr="table icon from tabler-icons (MIT)">    </p:cNvPr>
           <p:cNvPicPr>
             <a:picLocks noChangeAspect="1"/>
           </p:cNvPicPr>
@@ -13487,7 +15237,7 @@
       </p:pic>
       <p:sp>
         <p:nvSpPr>
-          <p:cNvPr id="24" name="mdpr:icon-and-text-aside-8429fc:item-4:block-29"/>
+          <p:cNvPr id="29" name="mdpr:icon-and-text-aside-8429fc:item-4:block-29"/>
           <p:cNvSpPr txBox="1"/>
           <p:nvPr/>
         </p:nvSpPr>
@@ -13626,9 +15376,134 @@
           </a:ln>
         </p:spPr>
       </p:sp>
+      <p:sp>
+        <p:nvSpPr>
+          <p:cNvPr id="4" name="Shape 2"/>
+          <p:cNvSpPr/>
+          <p:nvPr/>
+        </p:nvSpPr>
+        <p:spPr>
+          <a:xfrm>
+            <a:off x="585216" y="585216"/>
+            <a:ext cx="329184" cy="0"/>
+          </a:xfrm>
+          <a:prstGeom prst="line">
+            <a:avLst/>
+          </a:prstGeom>
+          <a:noFill/>
+          <a:ln w="12700">
+            <a:solidFill>
+              <a:srgbClr val="E5E7EB">
+                <a:alpha val="72000"/>
+              </a:srgbClr>
+            </a:solidFill>
+            <a:prstDash val="solid"/>
+          </a:ln>
+        </p:spPr>
+      </p:sp>
+      <p:sp>
+        <p:nvSpPr>
+          <p:cNvPr id="5" name="Shape 3"/>
+          <p:cNvSpPr/>
+          <p:nvPr/>
+        </p:nvSpPr>
+        <p:spPr>
+          <a:xfrm>
+            <a:off x="585216" y="585216"/>
+            <a:ext cx="0" cy="329184"/>
+          </a:xfrm>
+          <a:prstGeom prst="line">
+            <a:avLst/>
+          </a:prstGeom>
+          <a:noFill/>
+          <a:ln w="12700">
+            <a:solidFill>
+              <a:srgbClr val="E5E7EB">
+                <a:alpha val="72000"/>
+              </a:srgbClr>
+            </a:solidFill>
+            <a:prstDash val="solid"/>
+          </a:ln>
+        </p:spPr>
+      </p:sp>
+      <p:sp>
+        <p:nvSpPr>
+          <p:cNvPr id="6" name="Shape 4"/>
+          <p:cNvSpPr/>
+          <p:nvPr/>
+        </p:nvSpPr>
+        <p:spPr>
+          <a:xfrm>
+            <a:off x="11277295" y="6272784"/>
+            <a:ext cx="329184" cy="0"/>
+          </a:xfrm>
+          <a:prstGeom prst="line">
+            <a:avLst/>
+          </a:prstGeom>
+          <a:noFill/>
+          <a:ln w="12700">
+            <a:solidFill>
+              <a:srgbClr val="E5E7EB">
+                <a:alpha val="72000"/>
+              </a:srgbClr>
+            </a:solidFill>
+            <a:prstDash val="solid"/>
+          </a:ln>
+        </p:spPr>
+      </p:sp>
+      <p:sp>
+        <p:nvSpPr>
+          <p:cNvPr id="7" name="Shape 5"/>
+          <p:cNvSpPr/>
+          <p:nvPr/>
+        </p:nvSpPr>
+        <p:spPr>
+          <a:xfrm>
+            <a:off x="11606479" y="5943600"/>
+            <a:ext cx="0" cy="329184"/>
+          </a:xfrm>
+          <a:prstGeom prst="line">
+            <a:avLst/>
+          </a:prstGeom>
+          <a:noFill/>
+          <a:ln w="12700">
+            <a:solidFill>
+              <a:srgbClr val="E5E7EB">
+                <a:alpha val="72000"/>
+              </a:srgbClr>
+            </a:solidFill>
+            <a:prstDash val="solid"/>
+          </a:ln>
+        </p:spPr>
+      </p:sp>
+      <p:sp>
+        <p:nvSpPr>
+          <p:cNvPr id="8" name="Shape 6"/>
+          <p:cNvSpPr/>
+          <p:nvPr/>
+        </p:nvSpPr>
+        <p:spPr>
+          <a:xfrm>
+            <a:off x="749808" y="6437376"/>
+            <a:ext cx="10692079" cy="0"/>
+          </a:xfrm>
+          <a:prstGeom prst="line">
+            <a:avLst/>
+          </a:prstGeom>
+          <a:noFill/>
+          <a:ln w="12700">
+            <a:solidFill>
+              <a:srgbClr val="E5E7EB">
+                <a:alpha val="18000"/>
+              </a:srgbClr>
+            </a:solidFill>
+            <a:prstDash val="solid"/>
+          </a:ln>
+        </p:spPr>
+      </p:sp>
       <p:pic>
         <p:nvPicPr>
-          <p:cNvPr id="4" name="Image 0" descr="preencoded.png">    </p:cNvPr>
+          <p:cNvPr id="9" name="Image 0" descr="preencoded.png">    </p:cNvPr>
           <p:cNvPicPr>
             <a:picLocks noChangeAspect="1"/>
           </p:cNvPicPr>
@@ -13658,7 +15533,7 @@
       </p:pic>
       <p:pic>
         <p:nvPicPr>
-          <p:cNvPr id="5" name="Image 1" descr="preencoded.png">    </p:cNvPr>
+          <p:cNvPr id="10" name="Image 1" descr="preencoded.png">    </p:cNvPr>
           <p:cNvPicPr>
             <a:picLocks noChangeAspect="1"/>
           </p:cNvPicPr>
@@ -13688,7 +15563,7 @@
       </p:pic>
       <p:pic>
         <p:nvPicPr>
-          <p:cNvPr id="6" name="Image 2" descr="preencoded.png">    </p:cNvPr>
+          <p:cNvPr id="11" name="Image 2" descr="preencoded.png">    </p:cNvPr>
           <p:cNvPicPr>
             <a:picLocks noChangeAspect="1"/>
           </p:cNvPicPr>
@@ -13718,7 +15593,7 @@
       </p:pic>
       <p:pic>
         <p:nvPicPr>
-          <p:cNvPr id="7" name="Image 3" descr="preencoded.png">    </p:cNvPr>
+          <p:cNvPr id="12" name="Image 3" descr="preencoded.png">    </p:cNvPr>
           <p:cNvPicPr>
             <a:picLocks noChangeAspect="1"/>
           </p:cNvPicPr>
@@ -13748,7 +15623,7 @@
       </p:pic>
       <p:sp>
         <p:nvSpPr>
-          <p:cNvPr id="8" name="Shape 2"/>
+          <p:cNvPr id="13" name="Shape 7"/>
           <p:cNvSpPr/>
           <p:nvPr/>
         </p:nvSpPr>
@@ -13775,7 +15650,7 @@
       </p:sp>
       <p:sp>
         <p:nvSpPr>
-          <p:cNvPr id="9" name="Shape 3"/>
+          <p:cNvPr id="14" name="Shape 8"/>
           <p:cNvSpPr/>
           <p:nvPr/>
         </p:nvSpPr>
@@ -13802,7 +15677,7 @@
       </p:sp>
       <p:sp>
         <p:nvSpPr>
-          <p:cNvPr id="10" name="Shape 4"/>
+          <p:cNvPr id="15" name="Shape 9"/>
           <p:cNvSpPr/>
           <p:nvPr/>
         </p:nvSpPr>
@@ -13829,7 +15704,7 @@
       </p:sp>
       <p:sp>
         <p:nvSpPr>
-          <p:cNvPr id="11" name="Shape 5"/>
+          <p:cNvPr id="16" name="Shape 10"/>
           <p:cNvSpPr/>
           <p:nvPr/>
         </p:nvSpPr>
@@ -13856,7 +15731,7 @@
       </p:sp>
       <p:sp>
         <p:nvSpPr>
-          <p:cNvPr id="12" name="mdpr:overflow-guard-f8d03e:title:__title:overflow-guard-f8d03e"/>
+          <p:cNvPr id="17" name="mdpr:overflow-guard-f8d03e:title:__title:overflow-guard-f8d03e"/>
           <p:cNvSpPr txBox="1"/>
           <p:nvPr/>
         </p:nvSpPr>
@@ -13898,7 +15773,7 @@
       </p:sp>
       <p:sp>
         <p:nvSpPr>
-          <p:cNvPr id="13" name="Shape 7"/>
+          <p:cNvPr id="18" name="Shape 12"/>
           <p:cNvSpPr/>
           <p:nvPr/>
         </p:nvSpPr>
@@ -13925,7 +15800,7 @@
       </p:sp>
       <p:pic>
         <p:nvPicPr>
-          <p:cNvPr id="14" name="Image 4" descr="verified icon from tabler-icons (MIT)">    </p:cNvPr>
+          <p:cNvPr id="19" name="Image 4" descr="verified icon from tabler-icons (MIT)">    </p:cNvPr>
           <p:cNvPicPr>
             <a:picLocks noChangeAspect="1"/>
           </p:cNvPicPr>
@@ -13955,7 +15830,7 @@
       </p:pic>
       <p:sp>
         <p:nvSpPr>
-          <p:cNvPr id="15" name="mdpr:overflow-guard-f8d03e:item-1:block-31"/>
+          <p:cNvPr id="20" name="mdpr:overflow-guard-f8d03e:item-1:block-31"/>
           <p:cNvSpPr txBox="1"/>
           <p:nvPr/>
         </p:nvSpPr>
@@ -14014,7 +15889,7 @@
       </p:sp>
       <p:sp>
         <p:nvSpPr>
-          <p:cNvPr id="16" name="Shape 9"/>
+          <p:cNvPr id="21" name="Shape 14"/>
           <p:cNvSpPr/>
           <p:nvPr/>
         </p:nvSpPr>
@@ -14041,7 +15916,7 @@
       </p:sp>
       <p:pic>
         <p:nvPicPr>
-          <p:cNvPr id="17" name="Image 5" descr="table icon from tabler-icons (MIT)">    </p:cNvPr>
+          <p:cNvPr id="22" name="Image 5" descr="table icon from tabler-icons (MIT)">    </p:cNvPr>
           <p:cNvPicPr>
             <a:picLocks noChangeAspect="1"/>
           </p:cNvPicPr>
@@ -14071,7 +15946,7 @@
       </p:pic>
       <p:sp>
         <p:nvSpPr>
-          <p:cNvPr id="18" name="mdpr:overflow-guard-f8d03e:item-2:block-31"/>
+          <p:cNvPr id="23" name="mdpr:overflow-guard-f8d03e:item-2:block-31"/>
           <p:cNvSpPr txBox="1"/>
           <p:nvPr/>
         </p:nvSpPr>
@@ -14130,7 +16005,7 @@
       </p:sp>
       <p:sp>
         <p:nvSpPr>
-          <p:cNvPr id="19" name="Shape 11"/>
+          <p:cNvPr id="24" name="Shape 16"/>
           <p:cNvSpPr/>
           <p:nvPr/>
         </p:nvSpPr>
@@ -14157,7 +16032,7 @@
       </p:sp>
       <p:pic>
         <p:nvPicPr>
-          <p:cNvPr id="20" name="Image 6" descr="article icon from tabler-icons (MIT)">    </p:cNvPr>
+          <p:cNvPr id="25" name="Image 6" descr="article icon from tabler-icons (MIT)">    </p:cNvPr>
           <p:cNvPicPr>
             <a:picLocks noChangeAspect="1"/>
           </p:cNvPicPr>
@@ -14187,7 +16062,7 @@
       </p:pic>
       <p:sp>
         <p:nvSpPr>
-          <p:cNvPr id="21" name="mdpr:overflow-guard-f8d03e:item-3:block-31"/>
+          <p:cNvPr id="26" name="mdpr:overflow-guard-f8d03e:item-3:block-31"/>
           <p:cNvSpPr txBox="1"/>
           <p:nvPr/>
         </p:nvSpPr>
@@ -14246,7 +16121,7 @@
       </p:sp>
       <p:sp>
         <p:nvSpPr>
-          <p:cNvPr id="22" name="Shape 13"/>
+          <p:cNvPr id="27" name="Shape 18"/>
           <p:cNvSpPr/>
           <p:nvPr/>
         </p:nvSpPr>
@@ -14273,7 +16148,7 @@
       </p:sp>
       <p:pic>
         <p:nvPicPr>
-          <p:cNvPr id="23" name="Image 7" descr="article icon from tabler-icons (MIT)">    </p:cNvPr>
+          <p:cNvPr id="28" name="Image 7" descr="article icon from tabler-icons (MIT)">    </p:cNvPr>
           <p:cNvPicPr>
             <a:picLocks noChangeAspect="1"/>
           </p:cNvPicPr>
@@ -14303,7 +16178,7 @@
       </p:pic>
       <p:sp>
         <p:nvSpPr>
-          <p:cNvPr id="24" name="mdpr:overflow-guard-f8d03e:item-4:block-31"/>
+          <p:cNvPr id="29" name="mdpr:overflow-guard-f8d03e:item-4:block-31"/>
           <p:cNvSpPr txBox="1"/>
           <p:nvPr/>
         </p:nvSpPr>
@@ -14442,9 +16317,134 @@
           </a:ln>
         </p:spPr>
       </p:sp>
+      <p:sp>
+        <p:nvSpPr>
+          <p:cNvPr id="4" name="Shape 2"/>
+          <p:cNvSpPr/>
+          <p:nvPr/>
+        </p:nvSpPr>
+        <p:spPr>
+          <a:xfrm>
+            <a:off x="585216" y="585216"/>
+            <a:ext cx="329184" cy="0"/>
+          </a:xfrm>
+          <a:prstGeom prst="line">
+            <a:avLst/>
+          </a:prstGeom>
+          <a:noFill/>
+          <a:ln w="12700">
+            <a:solidFill>
+              <a:srgbClr val="E5E7EB">
+                <a:alpha val="72000"/>
+              </a:srgbClr>
+            </a:solidFill>
+            <a:prstDash val="solid"/>
+          </a:ln>
+        </p:spPr>
+      </p:sp>
+      <p:sp>
+        <p:nvSpPr>
+          <p:cNvPr id="5" name="Shape 3"/>
+          <p:cNvSpPr/>
+          <p:nvPr/>
+        </p:nvSpPr>
+        <p:spPr>
+          <a:xfrm>
+            <a:off x="585216" y="585216"/>
+            <a:ext cx="0" cy="329184"/>
+          </a:xfrm>
+          <a:prstGeom prst="line">
+            <a:avLst/>
+          </a:prstGeom>
+          <a:noFill/>
+          <a:ln w="12700">
+            <a:solidFill>
+              <a:srgbClr val="E5E7EB">
+                <a:alpha val="72000"/>
+              </a:srgbClr>
+            </a:solidFill>
+            <a:prstDash val="solid"/>
+          </a:ln>
+        </p:spPr>
+      </p:sp>
+      <p:sp>
+        <p:nvSpPr>
+          <p:cNvPr id="6" name="Shape 4"/>
+          <p:cNvSpPr/>
+          <p:nvPr/>
+        </p:nvSpPr>
+        <p:spPr>
+          <a:xfrm>
+            <a:off x="11277295" y="6272784"/>
+            <a:ext cx="329184" cy="0"/>
+          </a:xfrm>
+          <a:prstGeom prst="line">
+            <a:avLst/>
+          </a:prstGeom>
+          <a:noFill/>
+          <a:ln w="12700">
+            <a:solidFill>
+              <a:srgbClr val="E5E7EB">
+                <a:alpha val="72000"/>
+              </a:srgbClr>
+            </a:solidFill>
+            <a:prstDash val="solid"/>
+          </a:ln>
+        </p:spPr>
+      </p:sp>
+      <p:sp>
+        <p:nvSpPr>
+          <p:cNvPr id="7" name="Shape 5"/>
+          <p:cNvSpPr/>
+          <p:nvPr/>
+        </p:nvSpPr>
+        <p:spPr>
+          <a:xfrm>
+            <a:off x="11606479" y="5943600"/>
+            <a:ext cx="0" cy="329184"/>
+          </a:xfrm>
+          <a:prstGeom prst="line">
+            <a:avLst/>
+          </a:prstGeom>
+          <a:noFill/>
+          <a:ln w="12700">
+            <a:solidFill>
+              <a:srgbClr val="E5E7EB">
+                <a:alpha val="72000"/>
+              </a:srgbClr>
+            </a:solidFill>
+            <a:prstDash val="solid"/>
+          </a:ln>
+        </p:spPr>
+      </p:sp>
+      <p:sp>
+        <p:nvSpPr>
+          <p:cNvPr id="8" name="Shape 6"/>
+          <p:cNvSpPr/>
+          <p:nvPr/>
+        </p:nvSpPr>
+        <p:spPr>
+          <a:xfrm>
+            <a:off x="749808" y="6437376"/>
+            <a:ext cx="10692079" cy="0"/>
+          </a:xfrm>
+          <a:prstGeom prst="line">
+            <a:avLst/>
+          </a:prstGeom>
+          <a:noFill/>
+          <a:ln w="12700">
+            <a:solidFill>
+              <a:srgbClr val="E5E7EB">
+                <a:alpha val="18000"/>
+              </a:srgbClr>
+            </a:solidFill>
+            <a:prstDash val="solid"/>
+          </a:ln>
+        </p:spPr>
+      </p:sp>
       <p:pic>
         <p:nvPicPr>
-          <p:cNvPr id="4" name="Image 0" descr="preencoded.png">    </p:cNvPr>
+          <p:cNvPr id="9" name="Image 0" descr="preencoded.png">    </p:cNvPr>
           <p:cNvPicPr>
             <a:picLocks noChangeAspect="1"/>
           </p:cNvPicPr>
@@ -14474,7 +16474,7 @@
       </p:pic>
       <p:sp>
         <p:nvSpPr>
-          <p:cNvPr id="5" name="Shape 2"/>
+          <p:cNvPr id="10" name="Shape 7"/>
           <p:cNvSpPr/>
           <p:nvPr/>
         </p:nvSpPr>
@@ -14501,7 +16501,7 @@
       </p:sp>
       <p:sp>
         <p:nvSpPr>
-          <p:cNvPr id="6" name="mdpr:image-safe-frame-d4d6a4:title:__title:image-safe-frame-d4d6a4"/>
+          <p:cNvPr id="11" name="mdpr:image-safe-frame-d4d6a4:title:__title:image-safe-frame-d4d6a4"/>
           <p:cNvSpPr txBox="1"/>
           <p:nvPr/>
         </p:nvSpPr>
@@ -14543,7 +16543,7 @@
       </p:sp>
       <p:sp>
         <p:nvSpPr>
-          <p:cNvPr id="7" name="mdpr:image-safe-frame-d4d6a4:body:block-33-block-33-block-33"/>
+          <p:cNvPr id="12" name="mdpr:image-safe-frame-d4d6a4:body:block-33-block-33-block-33"/>
           <p:cNvSpPr txBox="1"/>
           <p:nvPr/>
         </p:nvSpPr>
@@ -14682,7 +16682,7 @@
       </p:sp>
       <p:pic>
         <p:nvPicPr>
-          <p:cNvPr id="8" name="mdpr:image-safe-frame-d4d6a4:image-1:block-34" descr="{&quot;mdpr&quot;:{&quot;slideId&quot;:&quot;image-safe-frame-d4d6a4&quot;,&quot;layoutSlideId&quot;:&quot;layout-image-safe-frame-d4d6a4&quot;,&quot;regionId&quot;:&quot;image-1&quot;,&quot;blockIds&quot;:[&quot;block-34&quot;],&quot;objectKind&quot;:&quot;native-image&quot;,&quot;role&quot;:&quot;image&quot;,&quot;editable&quot;:false}}">    </p:cNvPr>
+          <p:cNvPr id="13" name="mdpr:image-safe-frame-d4d6a4:image-1:block-34" descr="{&quot;mdpr&quot;:{&quot;slideId&quot;:&quot;image-safe-frame-d4d6a4&quot;,&quot;layoutSlideId&quot;:&quot;layout-image-safe-frame-d4d6a4&quot;,&quot;regionId&quot;:&quot;image-1&quot;,&quot;blockIds&quot;:[&quot;block-34&quot;],&quot;objectKind&quot;:&quot;native-image&quot;,&quot;role&quot;:&quot;image&quot;,&quot;editable&quot;:false}}">    </p:cNvPr>
           <p:cNvPicPr>
             <a:picLocks noChangeAspect="1"/>
           </p:cNvPicPr>
@@ -14792,9 +16792,134 @@
           </a:ln>
         </p:spPr>
       </p:sp>
+      <p:sp>
+        <p:nvSpPr>
+          <p:cNvPr id="4" name="Shape 2"/>
+          <p:cNvSpPr/>
+          <p:nvPr/>
+        </p:nvSpPr>
+        <p:spPr>
+          <a:xfrm>
+            <a:off x="585216" y="585216"/>
+            <a:ext cx="329184" cy="0"/>
+          </a:xfrm>
+          <a:prstGeom prst="line">
+            <a:avLst/>
+          </a:prstGeom>
+          <a:noFill/>
+          <a:ln w="12700">
+            <a:solidFill>
+              <a:srgbClr val="E5E7EB">
+                <a:alpha val="72000"/>
+              </a:srgbClr>
+            </a:solidFill>
+            <a:prstDash val="solid"/>
+          </a:ln>
+        </p:spPr>
+      </p:sp>
+      <p:sp>
+        <p:nvSpPr>
+          <p:cNvPr id="5" name="Shape 3"/>
+          <p:cNvSpPr/>
+          <p:nvPr/>
+        </p:nvSpPr>
+        <p:spPr>
+          <a:xfrm>
+            <a:off x="585216" y="585216"/>
+            <a:ext cx="0" cy="329184"/>
+          </a:xfrm>
+          <a:prstGeom prst="line">
+            <a:avLst/>
+          </a:prstGeom>
+          <a:noFill/>
+          <a:ln w="12700">
+            <a:solidFill>
+              <a:srgbClr val="E5E7EB">
+                <a:alpha val="72000"/>
+              </a:srgbClr>
+            </a:solidFill>
+            <a:prstDash val="solid"/>
+          </a:ln>
+        </p:spPr>
+      </p:sp>
+      <p:sp>
+        <p:nvSpPr>
+          <p:cNvPr id="6" name="Shape 4"/>
+          <p:cNvSpPr/>
+          <p:nvPr/>
+        </p:nvSpPr>
+        <p:spPr>
+          <a:xfrm>
+            <a:off x="11277295" y="6272784"/>
+            <a:ext cx="329184" cy="0"/>
+          </a:xfrm>
+          <a:prstGeom prst="line">
+            <a:avLst/>
+          </a:prstGeom>
+          <a:noFill/>
+          <a:ln w="12700">
+            <a:solidFill>
+              <a:srgbClr val="E5E7EB">
+                <a:alpha val="72000"/>
+              </a:srgbClr>
+            </a:solidFill>
+            <a:prstDash val="solid"/>
+          </a:ln>
+        </p:spPr>
+      </p:sp>
+      <p:sp>
+        <p:nvSpPr>
+          <p:cNvPr id="7" name="Shape 5"/>
+          <p:cNvSpPr/>
+          <p:nvPr/>
+        </p:nvSpPr>
+        <p:spPr>
+          <a:xfrm>
+            <a:off x="11606479" y="5943600"/>
+            <a:ext cx="0" cy="329184"/>
+          </a:xfrm>
+          <a:prstGeom prst="line">
+            <a:avLst/>
+          </a:prstGeom>
+          <a:noFill/>
+          <a:ln w="12700">
+            <a:solidFill>
+              <a:srgbClr val="E5E7EB">
+                <a:alpha val="72000"/>
+              </a:srgbClr>
+            </a:solidFill>
+            <a:prstDash val="solid"/>
+          </a:ln>
+        </p:spPr>
+      </p:sp>
+      <p:sp>
+        <p:nvSpPr>
+          <p:cNvPr id="8" name="Shape 6"/>
+          <p:cNvSpPr/>
+          <p:nvPr/>
+        </p:nvSpPr>
+        <p:spPr>
+          <a:xfrm>
+            <a:off x="749808" y="6437376"/>
+            <a:ext cx="10692079" cy="0"/>
+          </a:xfrm>
+          <a:prstGeom prst="line">
+            <a:avLst/>
+          </a:prstGeom>
+          <a:noFill/>
+          <a:ln w="12700">
+            <a:solidFill>
+              <a:srgbClr val="E5E7EB">
+                <a:alpha val="18000"/>
+              </a:srgbClr>
+            </a:solidFill>
+            <a:prstDash val="solid"/>
+          </a:ln>
+        </p:spPr>
+      </p:sp>
       <p:pic>
         <p:nvPicPr>
-          <p:cNvPr id="4" name="Image 0" descr="preencoded.png">    </p:cNvPr>
+          <p:cNvPr id="9" name="Image 0" descr="preencoded.png">    </p:cNvPr>
           <p:cNvPicPr>
             <a:picLocks noChangeAspect="1"/>
           </p:cNvPicPr>
@@ -14824,7 +16949,7 @@
       </p:pic>
       <p:pic>
         <p:nvPicPr>
-          <p:cNvPr id="5" name="Image 1" descr="preencoded.png">    </p:cNvPr>
+          <p:cNvPr id="10" name="Image 1" descr="preencoded.png">    </p:cNvPr>
           <p:cNvPicPr>
             <a:picLocks noChangeAspect="1"/>
           </p:cNvPicPr>
@@ -14854,7 +16979,7 @@
       </p:pic>
       <p:pic>
         <p:nvPicPr>
-          <p:cNvPr id="6" name="Image 2" descr="preencoded.png">    </p:cNvPr>
+          <p:cNvPr id="11" name="Image 2" descr="preencoded.png">    </p:cNvPr>
           <p:cNvPicPr>
             <a:picLocks noChangeAspect="1"/>
           </p:cNvPicPr>
@@ -14884,7 +17009,7 @@
       </p:pic>
       <p:sp>
         <p:nvSpPr>
-          <p:cNvPr id="7" name="Shape 2"/>
+          <p:cNvPr id="12" name="Shape 7"/>
           <p:cNvSpPr/>
           <p:nvPr/>
         </p:nvSpPr>
@@ -14911,7 +17036,7 @@
       </p:sp>
       <p:sp>
         <p:nvSpPr>
-          <p:cNvPr id="8" name="mdpr:mixed-object-packing-438299:title:__title:mixed-object-packing-438299"/>
+          <p:cNvPr id="13" name="mdpr:mixed-object-packing-438299:title:__title:mixed-object-packing-438299"/>
           <p:cNvSpPr txBox="1"/>
           <p:nvPr/>
         </p:nvSpPr>
@@ -14953,7 +17078,7 @@
       </p:sp>
       <p:graphicFrame>
         <p:nvGraphicFramePr>
-          <p:cNvPr id="9" name="Chart 0" descr=""/>
+          <p:cNvPr id="14" name="Chart 0" descr=""/>
           <p:cNvGraphicFramePr/>
           <p:nvPr/>
         </p:nvGraphicFramePr>
@@ -15411,7 +17536,7 @@
       </p:graphicFrame>
       <p:sp>
         <p:nvSpPr>
-          <p:cNvPr id="11" name="mdpr:mixed-object-packing-438299:body:block-36"/>
+          <p:cNvPr id="16" name="mdpr:mixed-object-packing-438299:body:block-36"/>
           <p:cNvSpPr txBox="1"/>
           <p:nvPr/>
         </p:nvSpPr>
@@ -15510,7 +17635,7 @@
       </p:sp>
       <p:pic>
         <p:nvPicPr>
-          <p:cNvPr id="12" name="mdpr:mixed-object-packing-438299:image-1:block-39" descr="{&quot;mdpr&quot;:{&quot;slideId&quot;:&quot;mixed-object-packing-438299&quot;,&quot;layoutSlideId&quot;:&quot;layout-mixed-object-packing-438299&quot;,&quot;regionId&quot;:&quot;image-1&quot;,&quot;blockIds&quot;:[&quot;block-39&quot;],&quot;objectKind&quot;:&quot;native-image&quot;,&quot;role&quot;:&quot;image&quot;,&quot;editable&quot;:false}}">    </p:cNvPr>
+          <p:cNvPr id="17" name="mdpr:mixed-object-packing-438299:image-1:block-39" descr="{&quot;mdpr&quot;:{&quot;slideId&quot;:&quot;mixed-object-packing-438299&quot;,&quot;layoutSlideId&quot;:&quot;layout-mixed-object-packing-438299&quot;,&quot;regionId&quot;:&quot;image-1&quot;,&quot;blockIds&quot;:[&quot;block-39&quot;],&quot;objectKind&quot;:&quot;native-image&quot;,&quot;role&quot;:&quot;image&quot;,&quot;editable&quot;:false}}">    </p:cNvPr>
           <p:cNvPicPr>
             <a:picLocks noChangeAspect="1"/>
           </p:cNvPicPr>
@@ -15620,9 +17745,134 @@
           </a:ln>
         </p:spPr>
       </p:sp>
+      <p:sp>
+        <p:nvSpPr>
+          <p:cNvPr id="4" name="Shape 2"/>
+          <p:cNvSpPr/>
+          <p:nvPr/>
+        </p:nvSpPr>
+        <p:spPr>
+          <a:xfrm>
+            <a:off x="585216" y="585216"/>
+            <a:ext cx="329184" cy="0"/>
+          </a:xfrm>
+          <a:prstGeom prst="line">
+            <a:avLst/>
+          </a:prstGeom>
+          <a:noFill/>
+          <a:ln w="12700">
+            <a:solidFill>
+              <a:srgbClr val="E5E7EB">
+                <a:alpha val="72000"/>
+              </a:srgbClr>
+            </a:solidFill>
+            <a:prstDash val="solid"/>
+          </a:ln>
+        </p:spPr>
+      </p:sp>
+      <p:sp>
+        <p:nvSpPr>
+          <p:cNvPr id="5" name="Shape 3"/>
+          <p:cNvSpPr/>
+          <p:nvPr/>
+        </p:nvSpPr>
+        <p:spPr>
+          <a:xfrm>
+            <a:off x="585216" y="585216"/>
+            <a:ext cx="0" cy="329184"/>
+          </a:xfrm>
+          <a:prstGeom prst="line">
+            <a:avLst/>
+          </a:prstGeom>
+          <a:noFill/>
+          <a:ln w="12700">
+            <a:solidFill>
+              <a:srgbClr val="E5E7EB">
+                <a:alpha val="72000"/>
+              </a:srgbClr>
+            </a:solidFill>
+            <a:prstDash val="solid"/>
+          </a:ln>
+        </p:spPr>
+      </p:sp>
+      <p:sp>
+        <p:nvSpPr>
+          <p:cNvPr id="6" name="Shape 4"/>
+          <p:cNvSpPr/>
+          <p:nvPr/>
+        </p:nvSpPr>
+        <p:spPr>
+          <a:xfrm>
+            <a:off x="11277295" y="6272784"/>
+            <a:ext cx="329184" cy="0"/>
+          </a:xfrm>
+          <a:prstGeom prst="line">
+            <a:avLst/>
+          </a:prstGeom>
+          <a:noFill/>
+          <a:ln w="12700">
+            <a:solidFill>
+              <a:srgbClr val="E5E7EB">
+                <a:alpha val="72000"/>
+              </a:srgbClr>
+            </a:solidFill>
+            <a:prstDash val="solid"/>
+          </a:ln>
+        </p:spPr>
+      </p:sp>
+      <p:sp>
+        <p:nvSpPr>
+          <p:cNvPr id="7" name="Shape 5"/>
+          <p:cNvSpPr/>
+          <p:nvPr/>
+        </p:nvSpPr>
+        <p:spPr>
+          <a:xfrm>
+            <a:off x="11606479" y="5943600"/>
+            <a:ext cx="0" cy="329184"/>
+          </a:xfrm>
+          <a:prstGeom prst="line">
+            <a:avLst/>
+          </a:prstGeom>
+          <a:noFill/>
+          <a:ln w="12700">
+            <a:solidFill>
+              <a:srgbClr val="E5E7EB">
+                <a:alpha val="72000"/>
+              </a:srgbClr>
+            </a:solidFill>
+            <a:prstDash val="solid"/>
+          </a:ln>
+        </p:spPr>
+      </p:sp>
+      <p:sp>
+        <p:nvSpPr>
+          <p:cNvPr id="8" name="Shape 6"/>
+          <p:cNvSpPr/>
+          <p:nvPr/>
+        </p:nvSpPr>
+        <p:spPr>
+          <a:xfrm>
+            <a:off x="749808" y="6437376"/>
+            <a:ext cx="10692079" cy="0"/>
+          </a:xfrm>
+          <a:prstGeom prst="line">
+            <a:avLst/>
+          </a:prstGeom>
+          <a:noFill/>
+          <a:ln w="12700">
+            <a:solidFill>
+              <a:srgbClr val="E5E7EB">
+                <a:alpha val="18000"/>
+              </a:srgbClr>
+            </a:solidFill>
+            <a:prstDash val="solid"/>
+          </a:ln>
+        </p:spPr>
+      </p:sp>
       <p:pic>
         <p:nvPicPr>
-          <p:cNvPr id="4" name="Image 0" descr="preencoded.png">    </p:cNvPr>
+          <p:cNvPr id="9" name="Image 0" descr="preencoded.png">    </p:cNvPr>
           <p:cNvPicPr>
             <a:picLocks noChangeAspect="1"/>
           </p:cNvPicPr>
@@ -15652,7 +17902,7 @@
       </p:pic>
       <p:pic>
         <p:nvPicPr>
-          <p:cNvPr id="5" name="Image 1" descr="preencoded.png">    </p:cNvPr>
+          <p:cNvPr id="10" name="Image 1" descr="preencoded.png">    </p:cNvPr>
           <p:cNvPicPr>
             <a:picLocks noChangeAspect="1"/>
           </p:cNvPicPr>
@@ -15682,7 +17932,7 @@
       </p:pic>
       <p:pic>
         <p:nvPicPr>
-          <p:cNvPr id="6" name="Image 2" descr="preencoded.png">    </p:cNvPr>
+          <p:cNvPr id="11" name="Image 2" descr="preencoded.png">    </p:cNvPr>
           <p:cNvPicPr>
             <a:picLocks noChangeAspect="1"/>
           </p:cNvPicPr>
@@ -15712,7 +17962,7 @@
       </p:pic>
       <p:sp>
         <p:nvSpPr>
-          <p:cNvPr id="7" name="Shape 2"/>
+          <p:cNvPr id="12" name="Shape 7"/>
           <p:cNvSpPr/>
           <p:nvPr/>
         </p:nvSpPr>
@@ -15741,7 +17991,7 @@
       </p:sp>
       <p:sp>
         <p:nvSpPr>
-          <p:cNvPr id="8" name="Shape 3"/>
+          <p:cNvPr id="13" name="Shape 8"/>
           <p:cNvSpPr/>
           <p:nvPr/>
         </p:nvSpPr>
@@ -15768,7 +18018,7 @@
       </p:sp>
       <p:sp>
         <p:nvSpPr>
-          <p:cNvPr id="9" name="Shape 4"/>
+          <p:cNvPr id="14" name="Shape 9"/>
           <p:cNvSpPr/>
           <p:nvPr/>
         </p:nvSpPr>
@@ -15795,7 +18045,7 @@
       </p:sp>
       <p:sp>
         <p:nvSpPr>
-          <p:cNvPr id="10" name="Shape 5"/>
+          <p:cNvPr id="15" name="Shape 10"/>
           <p:cNvSpPr/>
           <p:nvPr/>
         </p:nvSpPr>
@@ -15822,7 +18072,7 @@
       </p:sp>
       <p:sp>
         <p:nvSpPr>
-          <p:cNvPr id="11" name="mdpr:actions-output-review-326e07:title:__title:actions-output-review-326e07"/>
+          <p:cNvPr id="16" name="mdpr:actions-output-review-326e07:title:__title:actions-output-review-326e07"/>
           <p:cNvSpPr txBox="1"/>
           <p:nvPr/>
         </p:nvSpPr>
@@ -15864,7 +18114,7 @@
       </p:sp>
       <p:sp>
         <p:nvSpPr>
-          <p:cNvPr id="12" name="Shape 7"/>
+          <p:cNvPr id="17" name="Shape 12"/>
           <p:cNvSpPr/>
           <p:nvPr/>
         </p:nvSpPr>
@@ -15891,7 +18141,7 @@
       </p:sp>
       <p:pic>
         <p:nvPicPr>
-          <p:cNvPr id="13" name="Image 3" descr="flow icon from tabler-icons (MIT)">    </p:cNvPr>
+          <p:cNvPr id="18" name="Image 3" descr="flow icon from tabler-icons (MIT)">    </p:cNvPr>
           <p:cNvPicPr>
             <a:picLocks noChangeAspect="1"/>
           </p:cNvPicPr>
@@ -15921,7 +18171,7 @@
       </p:pic>
       <p:sp>
         <p:nvSpPr>
-          <p:cNvPr id="14" name="mdpr:actions-output-review-326e07:item-1:block-41"/>
+          <p:cNvPr id="19" name="mdpr:actions-output-review-326e07:item-1:block-41"/>
           <p:cNvSpPr txBox="1"/>
           <p:nvPr/>
         </p:nvSpPr>
@@ -15980,7 +18230,7 @@
       </p:sp>
       <p:sp>
         <p:nvSpPr>
-          <p:cNvPr id="15" name="Shape 9"/>
+          <p:cNvPr id="20" name="Shape 14"/>
           <p:cNvSpPr/>
           <p:nvPr/>
         </p:nvSpPr>
@@ -16007,7 +18257,7 @@
       </p:sp>
       <p:pic>
         <p:nvPicPr>
-          <p:cNvPr id="16" name="Image 4" descr="verified icon from tabler-icons (MIT)">    </p:cNvPr>
+          <p:cNvPr id="21" name="Image 4" descr="verified icon from tabler-icons (MIT)">    </p:cNvPr>
           <p:cNvPicPr>
             <a:picLocks noChangeAspect="1"/>
           </p:cNvPicPr>
@@ -16037,7 +18287,7 @@
       </p:pic>
       <p:sp>
         <p:nvSpPr>
-          <p:cNvPr id="17" name="mdpr:actions-output-review-326e07:item-2:block-41"/>
+          <p:cNvPr id="22" name="mdpr:actions-output-review-326e07:item-2:block-41"/>
           <p:cNvSpPr txBox="1"/>
           <p:nvPr/>
         </p:nvSpPr>
@@ -16096,7 +18346,7 @@
       </p:sp>
       <p:sp>
         <p:nvSpPr>
-          <p:cNvPr id="18" name="Shape 11"/>
+          <p:cNvPr id="23" name="Shape 16"/>
           <p:cNvSpPr/>
           <p:nvPr/>
         </p:nvSpPr>
@@ -16123,7 +18373,7 @@
       </p:sp>
       <p:pic>
         <p:nvPicPr>
-          <p:cNvPr id="19" name="Image 5" descr="spark icon from tabler-icons (MIT)">    </p:cNvPr>
+          <p:cNvPr id="24" name="Image 5" descr="spark icon from tabler-icons (MIT)">    </p:cNvPr>
           <p:cNvPicPr>
             <a:picLocks noChangeAspect="1"/>
           </p:cNvPicPr>
@@ -16153,7 +18403,7 @@
       </p:pic>
       <p:sp>
         <p:nvSpPr>
-          <p:cNvPr id="20" name="mdpr:actions-output-review-326e07:item-3:block-41"/>
+          <p:cNvPr id="25" name="mdpr:actions-output-review-326e07:item-3:block-41"/>
           <p:cNvSpPr txBox="1"/>
           <p:nvPr/>
         </p:nvSpPr>
@@ -16300,6 +18550,131 @@
         </p:nvSpPr>
         <p:spPr>
           <a:xfrm>
+            <a:off x="585216" y="585216"/>
+            <a:ext cx="329184" cy="0"/>
+          </a:xfrm>
+          <a:prstGeom prst="line">
+            <a:avLst/>
+          </a:prstGeom>
+          <a:noFill/>
+          <a:ln w="12700">
+            <a:solidFill>
+              <a:srgbClr val="E5E7EB">
+                <a:alpha val="72000"/>
+              </a:srgbClr>
+            </a:solidFill>
+            <a:prstDash val="solid"/>
+          </a:ln>
+        </p:spPr>
+      </p:sp>
+      <p:sp>
+        <p:nvSpPr>
+          <p:cNvPr id="5" name="Shape 3"/>
+          <p:cNvSpPr/>
+          <p:nvPr/>
+        </p:nvSpPr>
+        <p:spPr>
+          <a:xfrm>
+            <a:off x="585216" y="585216"/>
+            <a:ext cx="0" cy="329184"/>
+          </a:xfrm>
+          <a:prstGeom prst="line">
+            <a:avLst/>
+          </a:prstGeom>
+          <a:noFill/>
+          <a:ln w="12700">
+            <a:solidFill>
+              <a:srgbClr val="E5E7EB">
+                <a:alpha val="72000"/>
+              </a:srgbClr>
+            </a:solidFill>
+            <a:prstDash val="solid"/>
+          </a:ln>
+        </p:spPr>
+      </p:sp>
+      <p:sp>
+        <p:nvSpPr>
+          <p:cNvPr id="6" name="Shape 4"/>
+          <p:cNvSpPr/>
+          <p:nvPr/>
+        </p:nvSpPr>
+        <p:spPr>
+          <a:xfrm>
+            <a:off x="11277295" y="6272784"/>
+            <a:ext cx="329184" cy="0"/>
+          </a:xfrm>
+          <a:prstGeom prst="line">
+            <a:avLst/>
+          </a:prstGeom>
+          <a:noFill/>
+          <a:ln w="12700">
+            <a:solidFill>
+              <a:srgbClr val="E5E7EB">
+                <a:alpha val="72000"/>
+              </a:srgbClr>
+            </a:solidFill>
+            <a:prstDash val="solid"/>
+          </a:ln>
+        </p:spPr>
+      </p:sp>
+      <p:sp>
+        <p:nvSpPr>
+          <p:cNvPr id="7" name="Shape 5"/>
+          <p:cNvSpPr/>
+          <p:nvPr/>
+        </p:nvSpPr>
+        <p:spPr>
+          <a:xfrm>
+            <a:off x="11606479" y="5943600"/>
+            <a:ext cx="0" cy="329184"/>
+          </a:xfrm>
+          <a:prstGeom prst="line">
+            <a:avLst/>
+          </a:prstGeom>
+          <a:noFill/>
+          <a:ln w="12700">
+            <a:solidFill>
+              <a:srgbClr val="E5E7EB">
+                <a:alpha val="72000"/>
+              </a:srgbClr>
+            </a:solidFill>
+            <a:prstDash val="solid"/>
+          </a:ln>
+        </p:spPr>
+      </p:sp>
+      <p:sp>
+        <p:nvSpPr>
+          <p:cNvPr id="8" name="Shape 6"/>
+          <p:cNvSpPr/>
+          <p:nvPr/>
+        </p:nvSpPr>
+        <p:spPr>
+          <a:xfrm>
+            <a:off x="749808" y="6437376"/>
+            <a:ext cx="10692079" cy="0"/>
+          </a:xfrm>
+          <a:prstGeom prst="line">
+            <a:avLst/>
+          </a:prstGeom>
+          <a:noFill/>
+          <a:ln w="12700">
+            <a:solidFill>
+              <a:srgbClr val="E5E7EB">
+                <a:alpha val="18000"/>
+              </a:srgbClr>
+            </a:solidFill>
+            <a:prstDash val="solid"/>
+          </a:ln>
+        </p:spPr>
+      </p:sp>
+      <p:sp>
+        <p:nvSpPr>
+          <p:cNvPr id="9" name="Shape 7"/>
+          <p:cNvSpPr/>
+          <p:nvPr/>
+        </p:nvSpPr>
+        <p:spPr>
+          <a:xfrm>
             <a:off x="822960" y="3099816"/>
             <a:ext cx="10515600" cy="45720"/>
           </a:xfrm>
@@ -16321,7 +18696,7 @@
       </p:sp>
       <p:sp>
         <p:nvSpPr>
-          <p:cNvPr id="5" name="Shape 3"/>
+          <p:cNvPr id="10" name="Shape 8"/>
           <p:cNvSpPr/>
           <p:nvPr/>
         </p:nvSpPr>
@@ -16348,7 +18723,7 @@
       </p:sp>
       <p:sp>
         <p:nvSpPr>
-          <p:cNvPr id="6" name="Shape 4"/>
+          <p:cNvPr id="11" name="Shape 9"/>
           <p:cNvSpPr/>
           <p:nvPr/>
         </p:nvSpPr>
@@ -16375,7 +18750,7 @@
       </p:sp>
       <p:sp>
         <p:nvSpPr>
-          <p:cNvPr id="7" name="mdpr:2-2-7bfb60:title:__title:2-2-7bfb60"/>
+          <p:cNvPr id="12" name="mdpr:2-2-7bfb60:title:__title:2-2-7bfb60"/>
           <p:cNvSpPr txBox="1"/>
           <p:nvPr/>
         </p:nvSpPr>
@@ -16417,7 +18792,7 @@
       </p:sp>
       <p:sp>
         <p:nvSpPr>
-          <p:cNvPr id="8" name="mdpr:2-2-7bfb60:toc-item-1:toc-item-15"/>
+          <p:cNvPr id="13" name="mdpr:2-2-7bfb60:toc-item-1:toc-item-15"/>
           <p:cNvSpPr txBox="1"/>
           <p:nvPr/>
         </p:nvSpPr>
@@ -16539,9 +18914,134 @@
           </a:ln>
         </p:spPr>
       </p:sp>
+      <p:sp>
+        <p:nvSpPr>
+          <p:cNvPr id="4" name="Shape 2"/>
+          <p:cNvSpPr/>
+          <p:nvPr/>
+        </p:nvSpPr>
+        <p:spPr>
+          <a:xfrm>
+            <a:off x="585216" y="585216"/>
+            <a:ext cx="329184" cy="0"/>
+          </a:xfrm>
+          <a:prstGeom prst="line">
+            <a:avLst/>
+          </a:prstGeom>
+          <a:noFill/>
+          <a:ln w="12700">
+            <a:solidFill>
+              <a:srgbClr val="E5E7EB">
+                <a:alpha val="72000"/>
+              </a:srgbClr>
+            </a:solidFill>
+            <a:prstDash val="solid"/>
+          </a:ln>
+        </p:spPr>
+      </p:sp>
+      <p:sp>
+        <p:nvSpPr>
+          <p:cNvPr id="5" name="Shape 3"/>
+          <p:cNvSpPr/>
+          <p:nvPr/>
+        </p:nvSpPr>
+        <p:spPr>
+          <a:xfrm>
+            <a:off x="585216" y="585216"/>
+            <a:ext cx="0" cy="329184"/>
+          </a:xfrm>
+          <a:prstGeom prst="line">
+            <a:avLst/>
+          </a:prstGeom>
+          <a:noFill/>
+          <a:ln w="12700">
+            <a:solidFill>
+              <a:srgbClr val="E5E7EB">
+                <a:alpha val="72000"/>
+              </a:srgbClr>
+            </a:solidFill>
+            <a:prstDash val="solid"/>
+          </a:ln>
+        </p:spPr>
+      </p:sp>
+      <p:sp>
+        <p:nvSpPr>
+          <p:cNvPr id="6" name="Shape 4"/>
+          <p:cNvSpPr/>
+          <p:nvPr/>
+        </p:nvSpPr>
+        <p:spPr>
+          <a:xfrm>
+            <a:off x="11277295" y="6272784"/>
+            <a:ext cx="329184" cy="0"/>
+          </a:xfrm>
+          <a:prstGeom prst="line">
+            <a:avLst/>
+          </a:prstGeom>
+          <a:noFill/>
+          <a:ln w="12700">
+            <a:solidFill>
+              <a:srgbClr val="E5E7EB">
+                <a:alpha val="72000"/>
+              </a:srgbClr>
+            </a:solidFill>
+            <a:prstDash val="solid"/>
+          </a:ln>
+        </p:spPr>
+      </p:sp>
+      <p:sp>
+        <p:nvSpPr>
+          <p:cNvPr id="7" name="Shape 5"/>
+          <p:cNvSpPr/>
+          <p:nvPr/>
+        </p:nvSpPr>
+        <p:spPr>
+          <a:xfrm>
+            <a:off x="11606479" y="5943600"/>
+            <a:ext cx="0" cy="329184"/>
+          </a:xfrm>
+          <a:prstGeom prst="line">
+            <a:avLst/>
+          </a:prstGeom>
+          <a:noFill/>
+          <a:ln w="12700">
+            <a:solidFill>
+              <a:srgbClr val="E5E7EB">
+                <a:alpha val="72000"/>
+              </a:srgbClr>
+            </a:solidFill>
+            <a:prstDash val="solid"/>
+          </a:ln>
+        </p:spPr>
+      </p:sp>
+      <p:sp>
+        <p:nvSpPr>
+          <p:cNvPr id="8" name="Shape 6"/>
+          <p:cNvSpPr/>
+          <p:nvPr/>
+        </p:nvSpPr>
+        <p:spPr>
+          <a:xfrm>
+            <a:off x="749808" y="6437376"/>
+            <a:ext cx="10692079" cy="0"/>
+          </a:xfrm>
+          <a:prstGeom prst="line">
+            <a:avLst/>
+          </a:prstGeom>
+          <a:noFill/>
+          <a:ln w="12700">
+            <a:solidFill>
+              <a:srgbClr val="E5E7EB">
+                <a:alpha val="18000"/>
+              </a:srgbClr>
+            </a:solidFill>
+            <a:prstDash val="solid"/>
+          </a:ln>
+        </p:spPr>
+      </p:sp>
       <p:pic>
         <p:nvPicPr>
-          <p:cNvPr id="4" name="Image 0" descr="preencoded.png">    </p:cNvPr>
+          <p:cNvPr id="9" name="Image 0" descr="preencoded.png">    </p:cNvPr>
           <p:cNvPicPr>
             <a:picLocks noChangeAspect="1"/>
           </p:cNvPicPr>
@@ -16571,7 +19071,7 @@
       </p:pic>
       <p:sp>
         <p:nvSpPr>
-          <p:cNvPr id="5" name="Shape 2"/>
+          <p:cNvPr id="10" name="Shape 7"/>
           <p:cNvSpPr/>
           <p:nvPr/>
         </p:nvSpPr>
@@ -16600,7 +19100,7 @@
       </p:sp>
       <p:sp>
         <p:nvSpPr>
-          <p:cNvPr id="6" name="Shape 3"/>
+          <p:cNvPr id="11" name="Shape 8"/>
           <p:cNvSpPr/>
           <p:nvPr/>
         </p:nvSpPr>
@@ -16627,7 +19127,7 @@
       </p:sp>
       <p:sp>
         <p:nvSpPr>
-          <p:cNvPr id="7" name="mdpr:teaser-summary-7731dc:title:__title:teaser-summary-7731dc"/>
+          <p:cNvPr id="12" name="mdpr:teaser-summary-7731dc:title:__title:teaser-summary-7731dc"/>
           <p:cNvSpPr txBox="1"/>
           <p:nvPr/>
         </p:nvSpPr>
@@ -16669,7 +19169,7 @@
       </p:sp>
       <p:sp>
         <p:nvSpPr>
-          <p:cNvPr id="8" name="mdpr:teaser-summary-7731dc:key-message:block-3"/>
+          <p:cNvPr id="13" name="mdpr:teaser-summary-7731dc:key-message:block-3"/>
           <p:cNvSpPr txBox="1"/>
           <p:nvPr/>
         </p:nvSpPr>
@@ -16711,7 +19211,7 @@
       </p:sp>
       <p:sp>
         <p:nvSpPr>
-          <p:cNvPr id="9" name="mdpr:teaser-summary-7731dc:body:block-4"/>
+          <p:cNvPr id="14" name="mdpr:teaser-summary-7731dc:body:block-4"/>
           <p:cNvSpPr txBox="1"/>
           <p:nvPr/>
         </p:nvSpPr>
@@ -16970,9 +19470,134 @@
           </a:ln>
         </p:spPr>
       </p:sp>
+      <p:sp>
+        <p:nvSpPr>
+          <p:cNvPr id="4" name="Shape 2"/>
+          <p:cNvSpPr/>
+          <p:nvPr/>
+        </p:nvSpPr>
+        <p:spPr>
+          <a:xfrm>
+            <a:off x="585216" y="585216"/>
+            <a:ext cx="329184" cy="0"/>
+          </a:xfrm>
+          <a:prstGeom prst="line">
+            <a:avLst/>
+          </a:prstGeom>
+          <a:noFill/>
+          <a:ln w="12700">
+            <a:solidFill>
+              <a:srgbClr val="E5E7EB">
+                <a:alpha val="72000"/>
+              </a:srgbClr>
+            </a:solidFill>
+            <a:prstDash val="solid"/>
+          </a:ln>
+        </p:spPr>
+      </p:sp>
+      <p:sp>
+        <p:nvSpPr>
+          <p:cNvPr id="5" name="Shape 3"/>
+          <p:cNvSpPr/>
+          <p:nvPr/>
+        </p:nvSpPr>
+        <p:spPr>
+          <a:xfrm>
+            <a:off x="585216" y="585216"/>
+            <a:ext cx="0" cy="329184"/>
+          </a:xfrm>
+          <a:prstGeom prst="line">
+            <a:avLst/>
+          </a:prstGeom>
+          <a:noFill/>
+          <a:ln w="12700">
+            <a:solidFill>
+              <a:srgbClr val="E5E7EB">
+                <a:alpha val="72000"/>
+              </a:srgbClr>
+            </a:solidFill>
+            <a:prstDash val="solid"/>
+          </a:ln>
+        </p:spPr>
+      </p:sp>
+      <p:sp>
+        <p:nvSpPr>
+          <p:cNvPr id="6" name="Shape 4"/>
+          <p:cNvSpPr/>
+          <p:nvPr/>
+        </p:nvSpPr>
+        <p:spPr>
+          <a:xfrm>
+            <a:off x="11277295" y="6272784"/>
+            <a:ext cx="329184" cy="0"/>
+          </a:xfrm>
+          <a:prstGeom prst="line">
+            <a:avLst/>
+          </a:prstGeom>
+          <a:noFill/>
+          <a:ln w="12700">
+            <a:solidFill>
+              <a:srgbClr val="E5E7EB">
+                <a:alpha val="72000"/>
+              </a:srgbClr>
+            </a:solidFill>
+            <a:prstDash val="solid"/>
+          </a:ln>
+        </p:spPr>
+      </p:sp>
+      <p:sp>
+        <p:nvSpPr>
+          <p:cNvPr id="7" name="Shape 5"/>
+          <p:cNvSpPr/>
+          <p:nvPr/>
+        </p:nvSpPr>
+        <p:spPr>
+          <a:xfrm>
+            <a:off x="11606479" y="5943600"/>
+            <a:ext cx="0" cy="329184"/>
+          </a:xfrm>
+          <a:prstGeom prst="line">
+            <a:avLst/>
+          </a:prstGeom>
+          <a:noFill/>
+          <a:ln w="12700">
+            <a:solidFill>
+              <a:srgbClr val="E5E7EB">
+                <a:alpha val="72000"/>
+              </a:srgbClr>
+            </a:solidFill>
+            <a:prstDash val="solid"/>
+          </a:ln>
+        </p:spPr>
+      </p:sp>
+      <p:sp>
+        <p:nvSpPr>
+          <p:cNvPr id="8" name="Shape 6"/>
+          <p:cNvSpPr/>
+          <p:nvPr/>
+        </p:nvSpPr>
+        <p:spPr>
+          <a:xfrm>
+            <a:off x="749808" y="6437376"/>
+            <a:ext cx="10692079" cy="0"/>
+          </a:xfrm>
+          <a:prstGeom prst="line">
+            <a:avLst/>
+          </a:prstGeom>
+          <a:noFill/>
+          <a:ln w="12700">
+            <a:solidFill>
+              <a:srgbClr val="E5E7EB">
+                <a:alpha val="18000"/>
+              </a:srgbClr>
+            </a:solidFill>
+            <a:prstDash val="solid"/>
+          </a:ln>
+        </p:spPr>
+      </p:sp>
       <p:pic>
         <p:nvPicPr>
-          <p:cNvPr id="4" name="Image 0" descr="preencoded.png">    </p:cNvPr>
+          <p:cNvPr id="9" name="Image 0" descr="preencoded.png">    </p:cNvPr>
           <p:cNvPicPr>
             <a:picLocks noChangeAspect="1"/>
           </p:cNvPicPr>
@@ -17002,7 +19627,7 @@
       </p:pic>
       <p:pic>
         <p:nvPicPr>
-          <p:cNvPr id="5" name="Image 1" descr="preencoded.png">    </p:cNvPr>
+          <p:cNvPr id="10" name="Image 1" descr="preencoded.png">    </p:cNvPr>
           <p:cNvPicPr>
             <a:picLocks noChangeAspect="1"/>
           </p:cNvPicPr>
@@ -17032,7 +19657,7 @@
       </p:pic>
       <p:pic>
         <p:nvPicPr>
-          <p:cNvPr id="6" name="Image 2" descr="preencoded.png">    </p:cNvPr>
+          <p:cNvPr id="11" name="Image 2" descr="preencoded.png">    </p:cNvPr>
           <p:cNvPicPr>
             <a:picLocks noChangeAspect="1"/>
           </p:cNvPicPr>
@@ -17062,7 +19687,7 @@
       </p:pic>
       <p:sp>
         <p:nvSpPr>
-          <p:cNvPr id="7" name="Shape 2"/>
+          <p:cNvPr id="12" name="Shape 7"/>
           <p:cNvSpPr/>
           <p:nvPr/>
         </p:nvSpPr>
@@ -17091,7 +19716,7 @@
       </p:sp>
       <p:sp>
         <p:nvSpPr>
-          <p:cNvPr id="8" name="Shape 3"/>
+          <p:cNvPr id="13" name="Shape 8"/>
           <p:cNvSpPr/>
           <p:nvPr/>
         </p:nvSpPr>
@@ -17118,7 +19743,7 @@
       </p:sp>
       <p:sp>
         <p:nvSpPr>
-          <p:cNvPr id="9" name="Shape 4"/>
+          <p:cNvPr id="14" name="Shape 9"/>
           <p:cNvSpPr/>
           <p:nvPr/>
         </p:nvSpPr>
@@ -17145,7 +19770,7 @@
       </p:sp>
       <p:sp>
         <p:nvSpPr>
-          <p:cNvPr id="10" name="Shape 5"/>
+          <p:cNvPr id="15" name="Shape 10"/>
           <p:cNvSpPr/>
           <p:nvPr/>
         </p:nvSpPr>
@@ -17172,7 +19797,7 @@
       </p:sp>
       <p:sp>
         <p:nvSpPr>
-          <p:cNvPr id="11" name="mdpr:1-2-32ac08:title:__title:1-2-32ac08"/>
+          <p:cNvPr id="16" name="mdpr:1-2-32ac08:title:__title:1-2-32ac08"/>
           <p:cNvSpPr txBox="1"/>
           <p:nvPr/>
         </p:nvSpPr>
@@ -17214,7 +19839,7 @@
       </p:sp>
       <p:sp>
         <p:nvSpPr>
-          <p:cNvPr id="12" name="Shape 7"/>
+          <p:cNvPr id="17" name="Shape 12"/>
           <p:cNvSpPr/>
           <p:nvPr/>
         </p:nvSpPr>
@@ -17241,7 +19866,7 @@
       </p:sp>
       <p:pic>
         <p:nvPicPr>
-          <p:cNvPr id="13" name="Image 3" descr="article icon from tabler-icons (MIT)">    </p:cNvPr>
+          <p:cNvPr id="18" name="Image 3" descr="article icon from tabler-icons (MIT)">    </p:cNvPr>
           <p:cNvPicPr>
             <a:picLocks noChangeAspect="1"/>
           </p:cNvPicPr>
@@ -17271,7 +19896,7 @@
       </p:pic>
       <p:sp>
         <p:nvSpPr>
-          <p:cNvPr id="14" name="mdpr:1-2-32ac08:item-1:block-6-chunk-1"/>
+          <p:cNvPr id="19" name="mdpr:1-2-32ac08:item-1:block-6-chunk-1"/>
           <p:cNvSpPr txBox="1"/>
           <p:nvPr/>
         </p:nvSpPr>
@@ -17330,7 +19955,7 @@
       </p:sp>
       <p:sp>
         <p:nvSpPr>
-          <p:cNvPr id="15" name="Shape 9"/>
+          <p:cNvPr id="20" name="Shape 14"/>
           <p:cNvSpPr/>
           <p:nvPr/>
         </p:nvSpPr>
@@ -17357,7 +19982,7 @@
       </p:sp>
       <p:pic>
         <p:nvPicPr>
-          <p:cNvPr id="16" name="Image 4" descr="chart icon from tabler-icons (MIT)">    </p:cNvPr>
+          <p:cNvPr id="21" name="Image 4" descr="chart icon from tabler-icons (MIT)">    </p:cNvPr>
           <p:cNvPicPr>
             <a:picLocks noChangeAspect="1"/>
           </p:cNvPicPr>
@@ -17387,7 +20012,7 @@
       </p:pic>
       <p:sp>
         <p:nvSpPr>
-          <p:cNvPr id="17" name="mdpr:1-2-32ac08:item-2:block-6-chunk-1"/>
+          <p:cNvPr id="22" name="mdpr:1-2-32ac08:item-2:block-6-chunk-1"/>
           <p:cNvSpPr txBox="1"/>
           <p:nvPr/>
         </p:nvSpPr>
@@ -17446,7 +20071,7 @@
       </p:sp>
       <p:sp>
         <p:nvSpPr>
-          <p:cNvPr id="18" name="Shape 11"/>
+          <p:cNvPr id="23" name="Shape 16"/>
           <p:cNvSpPr/>
           <p:nvPr/>
         </p:nvSpPr>
@@ -17473,7 +20098,7 @@
       </p:sp>
       <p:pic>
         <p:nvPicPr>
-          <p:cNvPr id="19" name="Image 5" descr="article icon from tabler-icons (MIT)">    </p:cNvPr>
+          <p:cNvPr id="24" name="Image 5" descr="article icon from tabler-icons (MIT)">    </p:cNvPr>
           <p:cNvPicPr>
             <a:picLocks noChangeAspect="1"/>
           </p:cNvPicPr>
@@ -17503,7 +20128,7 @@
       </p:pic>
       <p:sp>
         <p:nvSpPr>
-          <p:cNvPr id="20" name="mdpr:1-2-32ac08:item-3:block-6-chunk-1"/>
+          <p:cNvPr id="25" name="mdpr:1-2-32ac08:item-3:block-6-chunk-1"/>
           <p:cNvSpPr txBox="1"/>
           <p:nvPr/>
         </p:nvSpPr>
@@ -17650,6 +20275,131 @@
         </p:nvSpPr>
         <p:spPr>
           <a:xfrm>
+            <a:off x="585216" y="585216"/>
+            <a:ext cx="329184" cy="0"/>
+          </a:xfrm>
+          <a:prstGeom prst="line">
+            <a:avLst/>
+          </a:prstGeom>
+          <a:noFill/>
+          <a:ln w="12700">
+            <a:solidFill>
+              <a:srgbClr val="E5E7EB">
+                <a:alpha val="72000"/>
+              </a:srgbClr>
+            </a:solidFill>
+            <a:prstDash val="solid"/>
+          </a:ln>
+        </p:spPr>
+      </p:sp>
+      <p:sp>
+        <p:nvSpPr>
+          <p:cNvPr id="5" name="Shape 3"/>
+          <p:cNvSpPr/>
+          <p:nvPr/>
+        </p:nvSpPr>
+        <p:spPr>
+          <a:xfrm>
+            <a:off x="585216" y="585216"/>
+            <a:ext cx="0" cy="329184"/>
+          </a:xfrm>
+          <a:prstGeom prst="line">
+            <a:avLst/>
+          </a:prstGeom>
+          <a:noFill/>
+          <a:ln w="12700">
+            <a:solidFill>
+              <a:srgbClr val="E5E7EB">
+                <a:alpha val="72000"/>
+              </a:srgbClr>
+            </a:solidFill>
+            <a:prstDash val="solid"/>
+          </a:ln>
+        </p:spPr>
+      </p:sp>
+      <p:sp>
+        <p:nvSpPr>
+          <p:cNvPr id="6" name="Shape 4"/>
+          <p:cNvSpPr/>
+          <p:nvPr/>
+        </p:nvSpPr>
+        <p:spPr>
+          <a:xfrm>
+            <a:off x="11277295" y="6272784"/>
+            <a:ext cx="329184" cy="0"/>
+          </a:xfrm>
+          <a:prstGeom prst="line">
+            <a:avLst/>
+          </a:prstGeom>
+          <a:noFill/>
+          <a:ln w="12700">
+            <a:solidFill>
+              <a:srgbClr val="E5E7EB">
+                <a:alpha val="72000"/>
+              </a:srgbClr>
+            </a:solidFill>
+            <a:prstDash val="solid"/>
+          </a:ln>
+        </p:spPr>
+      </p:sp>
+      <p:sp>
+        <p:nvSpPr>
+          <p:cNvPr id="7" name="Shape 5"/>
+          <p:cNvSpPr/>
+          <p:nvPr/>
+        </p:nvSpPr>
+        <p:spPr>
+          <a:xfrm>
+            <a:off x="11606479" y="5943600"/>
+            <a:ext cx="0" cy="329184"/>
+          </a:xfrm>
+          <a:prstGeom prst="line">
+            <a:avLst/>
+          </a:prstGeom>
+          <a:noFill/>
+          <a:ln w="12700">
+            <a:solidFill>
+              <a:srgbClr val="E5E7EB">
+                <a:alpha val="72000"/>
+              </a:srgbClr>
+            </a:solidFill>
+            <a:prstDash val="solid"/>
+          </a:ln>
+        </p:spPr>
+      </p:sp>
+      <p:sp>
+        <p:nvSpPr>
+          <p:cNvPr id="8" name="Shape 6"/>
+          <p:cNvSpPr/>
+          <p:nvPr/>
+        </p:nvSpPr>
+        <p:spPr>
+          <a:xfrm>
+            <a:off x="749808" y="6437376"/>
+            <a:ext cx="10692079" cy="0"/>
+          </a:xfrm>
+          <a:prstGeom prst="line">
+            <a:avLst/>
+          </a:prstGeom>
+          <a:noFill/>
+          <a:ln w="12700">
+            <a:solidFill>
+              <a:srgbClr val="E5E7EB">
+                <a:alpha val="18000"/>
+              </a:srgbClr>
+            </a:solidFill>
+            <a:prstDash val="solid"/>
+          </a:ln>
+        </p:spPr>
+      </p:sp>
+      <p:sp>
+        <p:nvSpPr>
+          <p:cNvPr id="9" name="Shape 7"/>
+          <p:cNvSpPr/>
+          <p:nvPr/>
+        </p:nvSpPr>
+        <p:spPr>
+          <a:xfrm>
             <a:off x="822960" y="1554480"/>
             <a:ext cx="4937760" cy="73152"/>
           </a:xfrm>
@@ -17671,7 +20421,7 @@
       </p:sp>
       <p:sp>
         <p:nvSpPr>
-          <p:cNvPr id="5" name="Shape 3"/>
+          <p:cNvPr id="10" name="Shape 8"/>
           <p:cNvSpPr/>
           <p:nvPr/>
         </p:nvSpPr>
@@ -17698,7 +20448,7 @@
       </p:sp>
       <p:sp>
         <p:nvSpPr>
-          <p:cNvPr id="6" name="mdpr:2-2-14f8eb:title:__title:2-2-14f8eb"/>
+          <p:cNvPr id="11" name="mdpr:2-2-14f8eb:title:__title:2-2-14f8eb"/>
           <p:cNvSpPr txBox="1"/>
           <p:nvPr/>
         </p:nvSpPr>
@@ -17740,7 +20490,7 @@
       </p:sp>
       <p:sp>
         <p:nvSpPr>
-          <p:cNvPr id="7" name="mdpr:2-2-14f8eb:left:block-6-chunk-2"/>
+          <p:cNvPr id="12" name="mdpr:2-2-14f8eb:left:block-6-chunk-2"/>
           <p:cNvSpPr txBox="1"/>
           <p:nvPr/>
         </p:nvSpPr>
@@ -17799,7 +20549,7 @@
       </p:sp>
       <p:sp>
         <p:nvSpPr>
-          <p:cNvPr id="8" name="mdpr:2-2-14f8eb:right:block-6-chunk-2"/>
+          <p:cNvPr id="13" name="mdpr:2-2-14f8eb:right:block-6-chunk-2"/>
           <p:cNvSpPr txBox="1"/>
           <p:nvPr/>
         </p:nvSpPr>
@@ -17938,9 +20688,134 @@
           </a:ln>
         </p:spPr>
       </p:sp>
+      <p:sp>
+        <p:nvSpPr>
+          <p:cNvPr id="4" name="Shape 2"/>
+          <p:cNvSpPr/>
+          <p:nvPr/>
+        </p:nvSpPr>
+        <p:spPr>
+          <a:xfrm>
+            <a:off x="585216" y="585216"/>
+            <a:ext cx="329184" cy="0"/>
+          </a:xfrm>
+          <a:prstGeom prst="line">
+            <a:avLst/>
+          </a:prstGeom>
+          <a:noFill/>
+          <a:ln w="12700">
+            <a:solidFill>
+              <a:srgbClr val="E5E7EB">
+                <a:alpha val="72000"/>
+              </a:srgbClr>
+            </a:solidFill>
+            <a:prstDash val="solid"/>
+          </a:ln>
+        </p:spPr>
+      </p:sp>
+      <p:sp>
+        <p:nvSpPr>
+          <p:cNvPr id="5" name="Shape 3"/>
+          <p:cNvSpPr/>
+          <p:nvPr/>
+        </p:nvSpPr>
+        <p:spPr>
+          <a:xfrm>
+            <a:off x="585216" y="585216"/>
+            <a:ext cx="0" cy="329184"/>
+          </a:xfrm>
+          <a:prstGeom prst="line">
+            <a:avLst/>
+          </a:prstGeom>
+          <a:noFill/>
+          <a:ln w="12700">
+            <a:solidFill>
+              <a:srgbClr val="E5E7EB">
+                <a:alpha val="72000"/>
+              </a:srgbClr>
+            </a:solidFill>
+            <a:prstDash val="solid"/>
+          </a:ln>
+        </p:spPr>
+      </p:sp>
+      <p:sp>
+        <p:nvSpPr>
+          <p:cNvPr id="6" name="Shape 4"/>
+          <p:cNvSpPr/>
+          <p:nvPr/>
+        </p:nvSpPr>
+        <p:spPr>
+          <a:xfrm>
+            <a:off x="11277295" y="6272784"/>
+            <a:ext cx="329184" cy="0"/>
+          </a:xfrm>
+          <a:prstGeom prst="line">
+            <a:avLst/>
+          </a:prstGeom>
+          <a:noFill/>
+          <a:ln w="12700">
+            <a:solidFill>
+              <a:srgbClr val="E5E7EB">
+                <a:alpha val="72000"/>
+              </a:srgbClr>
+            </a:solidFill>
+            <a:prstDash val="solid"/>
+          </a:ln>
+        </p:spPr>
+      </p:sp>
+      <p:sp>
+        <p:nvSpPr>
+          <p:cNvPr id="7" name="Shape 5"/>
+          <p:cNvSpPr/>
+          <p:nvPr/>
+        </p:nvSpPr>
+        <p:spPr>
+          <a:xfrm>
+            <a:off x="11606479" y="5943600"/>
+            <a:ext cx="0" cy="329184"/>
+          </a:xfrm>
+          <a:prstGeom prst="line">
+            <a:avLst/>
+          </a:prstGeom>
+          <a:noFill/>
+          <a:ln w="12700">
+            <a:solidFill>
+              <a:srgbClr val="E5E7EB">
+                <a:alpha val="72000"/>
+              </a:srgbClr>
+            </a:solidFill>
+            <a:prstDash val="solid"/>
+          </a:ln>
+        </p:spPr>
+      </p:sp>
+      <p:sp>
+        <p:nvSpPr>
+          <p:cNvPr id="8" name="Shape 6"/>
+          <p:cNvSpPr/>
+          <p:nvPr/>
+        </p:nvSpPr>
+        <p:spPr>
+          <a:xfrm>
+            <a:off x="749808" y="6437376"/>
+            <a:ext cx="10692079" cy="0"/>
+          </a:xfrm>
+          <a:prstGeom prst="line">
+            <a:avLst/>
+          </a:prstGeom>
+          <a:noFill/>
+          <a:ln w="12700">
+            <a:solidFill>
+              <a:srgbClr val="E5E7EB">
+                <a:alpha val="18000"/>
+              </a:srgbClr>
+            </a:solidFill>
+            <a:prstDash val="solid"/>
+          </a:ln>
+        </p:spPr>
+      </p:sp>
       <p:pic>
         <p:nvPicPr>
-          <p:cNvPr id="4" name="Image 0" descr="preencoded.png">    </p:cNvPr>
+          <p:cNvPr id="9" name="Image 0" descr="preencoded.png">    </p:cNvPr>
           <p:cNvPicPr>
             <a:picLocks noChangeAspect="1"/>
           </p:cNvPicPr>
@@ -17970,7 +20845,7 @@
       </p:pic>
       <p:pic>
         <p:nvPicPr>
-          <p:cNvPr id="5" name="Image 1" descr="preencoded.png">    </p:cNvPr>
+          <p:cNvPr id="10" name="Image 1" descr="preencoded.png">    </p:cNvPr>
           <p:cNvPicPr>
             <a:picLocks noChangeAspect="1"/>
           </p:cNvPicPr>
@@ -18000,7 +20875,7 @@
       </p:pic>
       <p:pic>
         <p:nvPicPr>
-          <p:cNvPr id="6" name="Image 2" descr="preencoded.png">    </p:cNvPr>
+          <p:cNvPr id="11" name="Image 2" descr="preencoded.png">    </p:cNvPr>
           <p:cNvPicPr>
             <a:picLocks noChangeAspect="1"/>
           </p:cNvPicPr>
@@ -18030,7 +20905,7 @@
       </p:pic>
       <p:sp>
         <p:nvSpPr>
-          <p:cNvPr id="7" name="Shape 2"/>
+          <p:cNvPr id="12" name="Shape 7"/>
           <p:cNvSpPr/>
           <p:nvPr/>
         </p:nvSpPr>
@@ -18059,7 +20934,7 @@
       </p:sp>
       <p:sp>
         <p:nvSpPr>
-          <p:cNvPr id="8" name="Shape 3"/>
+          <p:cNvPr id="13" name="Shape 8"/>
           <p:cNvSpPr/>
           <p:nvPr/>
         </p:nvSpPr>
@@ -18086,7 +20961,7 @@
       </p:sp>
       <p:sp>
         <p:nvSpPr>
-          <p:cNvPr id="9" name="Shape 4"/>
+          <p:cNvPr id="14" name="Shape 9"/>
           <p:cNvSpPr/>
           <p:nvPr/>
         </p:nvSpPr>
@@ -18113,7 +20988,7 @@
       </p:sp>
       <p:sp>
         <p:nvSpPr>
-          <p:cNvPr id="10" name="Shape 5"/>
+          <p:cNvPr id="15" name="Shape 10"/>
           <p:cNvSpPr/>
           <p:nvPr/>
         </p:nvSpPr>
@@ -18140,7 +21015,7 @@
       </p:sp>
       <p:sp>
         <p:nvSpPr>
-          <p:cNvPr id="11" name="mdpr:1-2-dfa474:title:__title:1-2-dfa474"/>
+          <p:cNvPr id="16" name="mdpr:1-2-dfa474:title:__title:1-2-dfa474"/>
           <p:cNvSpPr txBox="1"/>
           <p:nvPr/>
         </p:nvSpPr>
@@ -18182,7 +21057,7 @@
       </p:sp>
       <p:sp>
         <p:nvSpPr>
-          <p:cNvPr id="12" name="Shape 7"/>
+          <p:cNvPr id="17" name="Shape 12"/>
           <p:cNvSpPr/>
           <p:nvPr/>
         </p:nvSpPr>
@@ -18209,7 +21084,7 @@
       </p:sp>
       <p:pic>
         <p:nvPicPr>
-          <p:cNvPr id="13" name="Image 3" descr="article icon from tabler-icons (MIT)">    </p:cNvPr>
+          <p:cNvPr id="18" name="Image 3" descr="article icon from tabler-icons (MIT)">    </p:cNvPr>
           <p:cNvPicPr>
             <a:picLocks noChangeAspect="1"/>
           </p:cNvPicPr>
@@ -18239,7 +21114,7 @@
       </p:pic>
       <p:sp>
         <p:nvSpPr>
-          <p:cNvPr id="14" name="mdpr:1-2-dfa474:item-1:block-8-chunk-1"/>
+          <p:cNvPr id="19" name="mdpr:1-2-dfa474:item-1:block-8-chunk-1"/>
           <p:cNvSpPr txBox="1"/>
           <p:nvPr/>
         </p:nvSpPr>
@@ -18298,7 +21173,7 @@
       </p:sp>
       <p:sp>
         <p:nvSpPr>
-          <p:cNvPr id="15" name="Shape 9"/>
+          <p:cNvPr id="20" name="Shape 14"/>
           <p:cNvSpPr/>
           <p:nvPr/>
         </p:nvSpPr>
@@ -18325,7 +21200,7 @@
       </p:sp>
       <p:pic>
         <p:nvPicPr>
-          <p:cNvPr id="16" name="Image 4" descr="article icon from tabler-icons (MIT)">    </p:cNvPr>
+          <p:cNvPr id="21" name="Image 4" descr="article icon from tabler-icons (MIT)">    </p:cNvPr>
           <p:cNvPicPr>
             <a:picLocks noChangeAspect="1"/>
           </p:cNvPicPr>
@@ -18355,7 +21230,7 @@
       </p:pic>
       <p:sp>
         <p:nvSpPr>
-          <p:cNvPr id="17" name="mdpr:1-2-dfa474:item-2:block-8-chunk-1"/>
+          <p:cNvPr id="22" name="mdpr:1-2-dfa474:item-2:block-8-chunk-1"/>
           <p:cNvSpPr txBox="1"/>
           <p:nvPr/>
         </p:nvSpPr>
@@ -18414,7 +21289,7 @@
       </p:sp>
       <p:sp>
         <p:nvSpPr>
-          <p:cNvPr id="18" name="Shape 11"/>
+          <p:cNvPr id="23" name="Shape 16"/>
           <p:cNvSpPr/>
           <p:nvPr/>
         </p:nvSpPr>
@@ -18441,7 +21316,7 @@
       </p:sp>
       <p:pic>
         <p:nvPicPr>
-          <p:cNvPr id="19" name="Image 5" descr="article icon from tabler-icons (MIT)">    </p:cNvPr>
+          <p:cNvPr id="24" name="Image 5" descr="article icon from tabler-icons (MIT)">    </p:cNvPr>
           <p:cNvPicPr>
             <a:picLocks noChangeAspect="1"/>
           </p:cNvPicPr>
@@ -18471,7 +21346,7 @@
       </p:pic>
       <p:sp>
         <p:nvSpPr>
-          <p:cNvPr id="20" name="mdpr:1-2-dfa474:item-3:block-8-chunk-1"/>
+          <p:cNvPr id="25" name="mdpr:1-2-dfa474:item-3:block-8-chunk-1"/>
           <p:cNvSpPr txBox="1"/>
           <p:nvPr/>
         </p:nvSpPr>
@@ -18618,6 +21493,131 @@
         </p:nvSpPr>
         <p:spPr>
           <a:xfrm>
+            <a:off x="585216" y="585216"/>
+            <a:ext cx="329184" cy="0"/>
+          </a:xfrm>
+          <a:prstGeom prst="line">
+            <a:avLst/>
+          </a:prstGeom>
+          <a:noFill/>
+          <a:ln w="12700">
+            <a:solidFill>
+              <a:srgbClr val="E5E7EB">
+                <a:alpha val="72000"/>
+              </a:srgbClr>
+            </a:solidFill>
+            <a:prstDash val="solid"/>
+          </a:ln>
+        </p:spPr>
+      </p:sp>
+      <p:sp>
+        <p:nvSpPr>
+          <p:cNvPr id="5" name="Shape 3"/>
+          <p:cNvSpPr/>
+          <p:nvPr/>
+        </p:nvSpPr>
+        <p:spPr>
+          <a:xfrm>
+            <a:off x="585216" y="585216"/>
+            <a:ext cx="0" cy="329184"/>
+          </a:xfrm>
+          <a:prstGeom prst="line">
+            <a:avLst/>
+          </a:prstGeom>
+          <a:noFill/>
+          <a:ln w="12700">
+            <a:solidFill>
+              <a:srgbClr val="E5E7EB">
+                <a:alpha val="72000"/>
+              </a:srgbClr>
+            </a:solidFill>
+            <a:prstDash val="solid"/>
+          </a:ln>
+        </p:spPr>
+      </p:sp>
+      <p:sp>
+        <p:nvSpPr>
+          <p:cNvPr id="6" name="Shape 4"/>
+          <p:cNvSpPr/>
+          <p:nvPr/>
+        </p:nvSpPr>
+        <p:spPr>
+          <a:xfrm>
+            <a:off x="11277295" y="6272784"/>
+            <a:ext cx="329184" cy="0"/>
+          </a:xfrm>
+          <a:prstGeom prst="line">
+            <a:avLst/>
+          </a:prstGeom>
+          <a:noFill/>
+          <a:ln w="12700">
+            <a:solidFill>
+              <a:srgbClr val="E5E7EB">
+                <a:alpha val="72000"/>
+              </a:srgbClr>
+            </a:solidFill>
+            <a:prstDash val="solid"/>
+          </a:ln>
+        </p:spPr>
+      </p:sp>
+      <p:sp>
+        <p:nvSpPr>
+          <p:cNvPr id="7" name="Shape 5"/>
+          <p:cNvSpPr/>
+          <p:nvPr/>
+        </p:nvSpPr>
+        <p:spPr>
+          <a:xfrm>
+            <a:off x="11606479" y="5943600"/>
+            <a:ext cx="0" cy="329184"/>
+          </a:xfrm>
+          <a:prstGeom prst="line">
+            <a:avLst/>
+          </a:prstGeom>
+          <a:noFill/>
+          <a:ln w="12700">
+            <a:solidFill>
+              <a:srgbClr val="E5E7EB">
+                <a:alpha val="72000"/>
+              </a:srgbClr>
+            </a:solidFill>
+            <a:prstDash val="solid"/>
+          </a:ln>
+        </p:spPr>
+      </p:sp>
+      <p:sp>
+        <p:nvSpPr>
+          <p:cNvPr id="8" name="Shape 6"/>
+          <p:cNvSpPr/>
+          <p:nvPr/>
+        </p:nvSpPr>
+        <p:spPr>
+          <a:xfrm>
+            <a:off x="749808" y="6437376"/>
+            <a:ext cx="10692079" cy="0"/>
+          </a:xfrm>
+          <a:prstGeom prst="line">
+            <a:avLst/>
+          </a:prstGeom>
+          <a:noFill/>
+          <a:ln w="12700">
+            <a:solidFill>
+              <a:srgbClr val="E5E7EB">
+                <a:alpha val="18000"/>
+              </a:srgbClr>
+            </a:solidFill>
+            <a:prstDash val="solid"/>
+          </a:ln>
+        </p:spPr>
+      </p:sp>
+      <p:sp>
+        <p:nvSpPr>
+          <p:cNvPr id="9" name="Shape 7"/>
+          <p:cNvSpPr/>
+          <p:nvPr/>
+        </p:nvSpPr>
+        <p:spPr>
+          <a:xfrm>
             <a:off x="822960" y="1554480"/>
             <a:ext cx="4937760" cy="73152"/>
           </a:xfrm>
@@ -18639,7 +21639,7 @@
       </p:sp>
       <p:sp>
         <p:nvSpPr>
-          <p:cNvPr id="5" name="Shape 3"/>
+          <p:cNvPr id="10" name="Shape 8"/>
           <p:cNvSpPr/>
           <p:nvPr/>
         </p:nvSpPr>
@@ -18666,7 +21666,7 @@
       </p:sp>
       <p:sp>
         <p:nvSpPr>
-          <p:cNvPr id="6" name="mdpr:2-2-149bde:title:__title:2-2-149bde"/>
+          <p:cNvPr id="11" name="mdpr:2-2-149bde:title:__title:2-2-149bde"/>
           <p:cNvSpPr txBox="1"/>
           <p:nvPr/>
         </p:nvSpPr>
@@ -18708,7 +21708,7 @@
       </p:sp>
       <p:sp>
         <p:nvSpPr>
-          <p:cNvPr id="7" name="mdpr:2-2-149bde:left:block-8-chunk-2"/>
+          <p:cNvPr id="12" name="mdpr:2-2-149bde:left:block-8-chunk-2"/>
           <p:cNvSpPr txBox="1"/>
           <p:nvPr/>
         </p:nvSpPr>
@@ -18767,7 +21767,7 @@
       </p:sp>
       <p:sp>
         <p:nvSpPr>
-          <p:cNvPr id="8" name="mdpr:2-2-149bde:right:block-8-chunk-2"/>
+          <p:cNvPr id="13" name="mdpr:2-2-149bde:right:block-8-chunk-2"/>
           <p:cNvSpPr txBox="1"/>
           <p:nvPr/>
         </p:nvSpPr>
@@ -18914,6 +21914,131 @@
         </p:nvSpPr>
         <p:spPr>
           <a:xfrm>
+            <a:off x="585216" y="585216"/>
+            <a:ext cx="329184" cy="0"/>
+          </a:xfrm>
+          <a:prstGeom prst="line">
+            <a:avLst/>
+          </a:prstGeom>
+          <a:noFill/>
+          <a:ln w="12700">
+            <a:solidFill>
+              <a:srgbClr val="E5E7EB">
+                <a:alpha val="72000"/>
+              </a:srgbClr>
+            </a:solidFill>
+            <a:prstDash val="solid"/>
+          </a:ln>
+        </p:spPr>
+      </p:sp>
+      <p:sp>
+        <p:nvSpPr>
+          <p:cNvPr id="5" name="Shape 3"/>
+          <p:cNvSpPr/>
+          <p:nvPr/>
+        </p:nvSpPr>
+        <p:spPr>
+          <a:xfrm>
+            <a:off x="585216" y="585216"/>
+            <a:ext cx="0" cy="329184"/>
+          </a:xfrm>
+          <a:prstGeom prst="line">
+            <a:avLst/>
+          </a:prstGeom>
+          <a:noFill/>
+          <a:ln w="12700">
+            <a:solidFill>
+              <a:srgbClr val="E5E7EB">
+                <a:alpha val="72000"/>
+              </a:srgbClr>
+            </a:solidFill>
+            <a:prstDash val="solid"/>
+          </a:ln>
+        </p:spPr>
+      </p:sp>
+      <p:sp>
+        <p:nvSpPr>
+          <p:cNvPr id="6" name="Shape 4"/>
+          <p:cNvSpPr/>
+          <p:nvPr/>
+        </p:nvSpPr>
+        <p:spPr>
+          <a:xfrm>
+            <a:off x="11277295" y="6272784"/>
+            <a:ext cx="329184" cy="0"/>
+          </a:xfrm>
+          <a:prstGeom prst="line">
+            <a:avLst/>
+          </a:prstGeom>
+          <a:noFill/>
+          <a:ln w="12700">
+            <a:solidFill>
+              <a:srgbClr val="E5E7EB">
+                <a:alpha val="72000"/>
+              </a:srgbClr>
+            </a:solidFill>
+            <a:prstDash val="solid"/>
+          </a:ln>
+        </p:spPr>
+      </p:sp>
+      <p:sp>
+        <p:nvSpPr>
+          <p:cNvPr id="7" name="Shape 5"/>
+          <p:cNvSpPr/>
+          <p:nvPr/>
+        </p:nvSpPr>
+        <p:spPr>
+          <a:xfrm>
+            <a:off x="11606479" y="5943600"/>
+            <a:ext cx="0" cy="329184"/>
+          </a:xfrm>
+          <a:prstGeom prst="line">
+            <a:avLst/>
+          </a:prstGeom>
+          <a:noFill/>
+          <a:ln w="12700">
+            <a:solidFill>
+              <a:srgbClr val="E5E7EB">
+                <a:alpha val="72000"/>
+              </a:srgbClr>
+            </a:solidFill>
+            <a:prstDash val="solid"/>
+          </a:ln>
+        </p:spPr>
+      </p:sp>
+      <p:sp>
+        <p:nvSpPr>
+          <p:cNvPr id="8" name="Shape 6"/>
+          <p:cNvSpPr/>
+          <p:nvPr/>
+        </p:nvSpPr>
+        <p:spPr>
+          <a:xfrm>
+            <a:off x="749808" y="6437376"/>
+            <a:ext cx="10692079" cy="0"/>
+          </a:xfrm>
+          <a:prstGeom prst="line">
+            <a:avLst/>
+          </a:prstGeom>
+          <a:noFill/>
+          <a:ln w="12700">
+            <a:solidFill>
+              <a:srgbClr val="E5E7EB">
+                <a:alpha val="18000"/>
+              </a:srgbClr>
+            </a:solidFill>
+            <a:prstDash val="solid"/>
+          </a:ln>
+        </p:spPr>
+      </p:sp>
+      <p:sp>
+        <p:nvSpPr>
+          <p:cNvPr id="9" name="Shape 7"/>
+          <p:cNvSpPr/>
+          <p:nvPr/>
+        </p:nvSpPr>
+        <p:spPr>
+          <a:xfrm>
             <a:off x="822960" y="1554480"/>
             <a:ext cx="4937760" cy="73152"/>
           </a:xfrm>
@@ -18935,7 +22060,7 @@
       </p:sp>
       <p:sp>
         <p:nvSpPr>
-          <p:cNvPr id="5" name="Shape 3"/>
+          <p:cNvPr id="10" name="Shape 8"/>
           <p:cNvSpPr/>
           <p:nvPr/>
         </p:nvSpPr>
@@ -18962,7 +22087,7 @@
       </p:sp>
       <p:sp>
         <p:nvSpPr>
-          <p:cNvPr id="6" name="mdpr:1-2-5a84f1:title:__title:1-2-5a84f1"/>
+          <p:cNvPr id="11" name="mdpr:1-2-5a84f1:title:__title:1-2-5a84f1"/>
           <p:cNvSpPr txBox="1"/>
           <p:nvPr/>
         </p:nvSpPr>
@@ -19004,7 +22129,7 @@
       </p:sp>
       <p:sp>
         <p:nvSpPr>
-          <p:cNvPr id="7" name="mdpr:1-2-5a84f1:left:block-10-chunk-1"/>
+          <p:cNvPr id="12" name="mdpr:1-2-5a84f1:left:block-10-chunk-1"/>
           <p:cNvSpPr txBox="1"/>
           <p:nvPr/>
         </p:nvSpPr>
@@ -19063,7 +22188,7 @@
       </p:sp>
       <p:sp>
         <p:nvSpPr>
-          <p:cNvPr id="8" name="mdpr:1-2-5a84f1:right:block-10-chunk-1"/>
+          <p:cNvPr id="13" name="mdpr:1-2-5a84f1:right:block-10-chunk-1"/>
           <p:cNvSpPr txBox="1"/>
           <p:nvPr/>
         </p:nvSpPr>

--- a/docs/theme-preview/pptx/minimalism.pptx
+++ b/docs/theme-preview/pptx/minimalism.pptx
@@ -5864,136 +5864,16 @@
           </a:ln>
         </p:spPr>
       </p:sp>
-      <p:pic>
-        <p:nvPicPr>
-          <p:cNvPr id="9" name="Image 0" descr="preencoded.png">    </p:cNvPr>
-          <p:cNvPicPr>
-            <a:picLocks noChangeAspect="1"/>
-          </p:cNvPicPr>
-          <p:nvPr/>
-        </p:nvPicPr>
-        <p:blipFill>
-          <a:blip r:embed="rId1">
-            <a:extLst>
-              <a:ext uri="{96DAC541-7B7A-43D3-8B79-37D633B846F1}">
-                <asvg:svgBlip xmlns:asvg="http://schemas.microsoft.com/office/drawing/2016/SVG/main" r:embed="rId2"/>
-              </a:ext>
-            </a:extLst>
-          </a:blip>
-          <a:stretch>
-            <a:fillRect/>
-          </a:stretch>
-        </p:blipFill>
-        <p:spPr>
-          <a:xfrm>
-            <a:off x="822960" y="1463040"/>
-            <a:ext cx="5029200" cy="1920240"/>
-          </a:xfrm>
-          <a:prstGeom prst="rect">
-            <a:avLst/>
-          </a:prstGeom>
-        </p:spPr>
-      </p:pic>
-      <p:pic>
-        <p:nvPicPr>
-          <p:cNvPr id="10" name="Image 1" descr="preencoded.png">    </p:cNvPr>
-          <p:cNvPicPr>
-            <a:picLocks noChangeAspect="1"/>
-          </p:cNvPicPr>
-          <p:nvPr/>
-        </p:nvPicPr>
-        <p:blipFill>
-          <a:blip r:embed="rId3">
-            <a:extLst>
-              <a:ext uri="{96DAC541-7B7A-43D3-8B79-37D633B846F1}">
-                <asvg:svgBlip xmlns:asvg="http://schemas.microsoft.com/office/drawing/2016/SVG/main" r:embed="rId4"/>
-              </a:ext>
-            </a:extLst>
-          </a:blip>
-          <a:stretch>
-            <a:fillRect/>
-          </a:stretch>
-        </p:blipFill>
-        <p:spPr>
-          <a:xfrm>
-            <a:off x="6309360" y="1463040"/>
-            <a:ext cx="5029200" cy="1920240"/>
-          </a:xfrm>
-          <a:prstGeom prst="rect">
-            <a:avLst/>
-          </a:prstGeom>
-        </p:spPr>
-      </p:pic>
-      <p:pic>
-        <p:nvPicPr>
-          <p:cNvPr id="11" name="Image 2" descr="preencoded.png">    </p:cNvPr>
-          <p:cNvPicPr>
-            <a:picLocks noChangeAspect="1"/>
-          </p:cNvPicPr>
-          <p:nvPr/>
-        </p:nvPicPr>
-        <p:blipFill>
-          <a:blip r:embed="rId5">
-            <a:extLst>
-              <a:ext uri="{96DAC541-7B7A-43D3-8B79-37D633B846F1}">
-                <asvg:svgBlip xmlns:asvg="http://schemas.microsoft.com/office/drawing/2016/SVG/main" r:embed="rId6"/>
-              </a:ext>
-            </a:extLst>
-          </a:blip>
-          <a:stretch>
-            <a:fillRect/>
-          </a:stretch>
-        </p:blipFill>
-        <p:spPr>
-          <a:xfrm>
-            <a:off x="822960" y="3749040"/>
-            <a:ext cx="5029200" cy="1920240"/>
-          </a:xfrm>
-          <a:prstGeom prst="rect">
-            <a:avLst/>
-          </a:prstGeom>
-        </p:spPr>
-      </p:pic>
-      <p:pic>
-        <p:nvPicPr>
-          <p:cNvPr id="12" name="Image 3" descr="preencoded.png">    </p:cNvPr>
-          <p:cNvPicPr>
-            <a:picLocks noChangeAspect="1"/>
-          </p:cNvPicPr>
-          <p:nvPr/>
-        </p:nvPicPr>
-        <p:blipFill>
-          <a:blip r:embed="rId7">
-            <a:extLst>
-              <a:ext uri="{96DAC541-7B7A-43D3-8B79-37D633B846F1}">
-                <asvg:svgBlip xmlns:asvg="http://schemas.microsoft.com/office/drawing/2016/SVG/main" r:embed="rId8"/>
-              </a:ext>
-            </a:extLst>
-          </a:blip>
-          <a:stretch>
-            <a:fillRect/>
-          </a:stretch>
-        </p:blipFill>
-        <p:spPr>
-          <a:xfrm>
-            <a:off x="6309360" y="3749040"/>
-            <a:ext cx="5029200" cy="1920240"/>
-          </a:xfrm>
-          <a:prstGeom prst="rect">
-            <a:avLst/>
-          </a:prstGeom>
-        </p:spPr>
-      </p:pic>
-      <p:sp>
-        <p:nvSpPr>
-          <p:cNvPr id="13" name="Shape 7"/>
-          <p:cNvSpPr/>
-          <p:nvPr/>
-        </p:nvSpPr>
-        <p:spPr>
-          <a:xfrm>
-            <a:off x="822960" y="1463040"/>
-            <a:ext cx="73152" cy="1920240"/>
+      <p:sp>
+        <p:nvSpPr>
+          <p:cNvPr id="9" name="Shape 7"/>
+          <p:cNvSpPr/>
+          <p:nvPr/>
+        </p:nvSpPr>
+        <p:spPr>
+          <a:xfrm>
+            <a:off x="822960" y="1389888"/>
+            <a:ext cx="4937760" cy="73152"/>
           </a:xfrm>
           <a:prstGeom prst="rect">
             <a:avLst/>
@@ -6013,41 +5893,14 @@
       </p:sp>
       <p:sp>
         <p:nvSpPr>
-          <p:cNvPr id="14" name="Shape 8"/>
-          <p:cNvSpPr/>
-          <p:nvPr/>
-        </p:nvSpPr>
-        <p:spPr>
-          <a:xfrm>
-            <a:off x="6309360" y="1463040"/>
-            <a:ext cx="73152" cy="1920240"/>
-          </a:xfrm>
-          <a:prstGeom prst="rect">
-            <a:avLst/>
-          </a:prstGeom>
-          <a:solidFill>
-            <a:srgbClr val="E5E7EB"/>
-          </a:solidFill>
-          <a:ln w="12700">
-            <a:solidFill>
-              <a:srgbClr val="E5E7EB">
-                <a:alpha val="0"/>
-              </a:srgbClr>
-            </a:solidFill>
-            <a:prstDash val="solid"/>
-          </a:ln>
-        </p:spPr>
-      </p:sp>
-      <p:sp>
-        <p:nvSpPr>
-          <p:cNvPr id="15" name="Shape 9"/>
-          <p:cNvSpPr/>
-          <p:nvPr/>
-        </p:nvSpPr>
-        <p:spPr>
-          <a:xfrm>
-            <a:off x="822960" y="3749040"/>
-            <a:ext cx="73152" cy="1920240"/>
+          <p:cNvPr id="10" name="Shape 8"/>
+          <p:cNvSpPr/>
+          <p:nvPr/>
+        </p:nvSpPr>
+        <p:spPr>
+          <a:xfrm>
+            <a:off x="6400800" y="1389888"/>
+            <a:ext cx="4937760" cy="73152"/>
           </a:xfrm>
           <a:prstGeom prst="rect">
             <a:avLst/>
@@ -6067,34 +5920,7 @@
       </p:sp>
       <p:sp>
         <p:nvSpPr>
-          <p:cNvPr id="16" name="Shape 10"/>
-          <p:cNvSpPr/>
-          <p:nvPr/>
-        </p:nvSpPr>
-        <p:spPr>
-          <a:xfrm>
-            <a:off x="6309360" y="3749040"/>
-            <a:ext cx="73152" cy="1920240"/>
-          </a:xfrm>
-          <a:prstGeom prst="rect">
-            <a:avLst/>
-          </a:prstGeom>
-          <a:solidFill>
-            <a:srgbClr val="E5E7EB"/>
-          </a:solidFill>
-          <a:ln w="12700">
-            <a:solidFill>
-              <a:srgbClr val="E5E7EB">
-                <a:alpha val="0"/>
-              </a:srgbClr>
-            </a:solidFill>
-            <a:prstDash val="solid"/>
-          </a:ln>
-        </p:spPr>
-      </p:sp>
-      <p:sp>
-        <p:nvSpPr>
-          <p:cNvPr id="17" name="mdpr:1-2-e3669a:title:__title:1-2-e3669a"/>
+          <p:cNvPr id="11" name="mdpr:1-2-e3669a:title:__title:1-2-e3669a"/>
           <p:cNvSpPr txBox="1"/>
           <p:nvPr/>
         </p:nvSpPr>
@@ -6136,71 +5962,14 @@
       </p:sp>
       <p:sp>
         <p:nvSpPr>
-          <p:cNvPr id="18" name="Shape 12"/>
-          <p:cNvSpPr/>
-          <p:nvPr/>
-        </p:nvSpPr>
-        <p:spPr>
-          <a:xfrm>
-            <a:off x="976122" y="2130552"/>
-            <a:ext cx="585216" cy="585216"/>
-          </a:xfrm>
-          <a:prstGeom prst="roundRect">
-            <a:avLst>
-              <a:gd name="adj" fmla="val 6250"/>
-            </a:avLst>
-          </a:prstGeom>
-          <a:solidFill>
-            <a:srgbClr val="FFFFFF"/>
-          </a:solidFill>
-          <a:ln w="12700">
-            <a:solidFill>
-              <a:srgbClr val="E5E7EB"/>
-            </a:solidFill>
-            <a:prstDash val="solid"/>
-          </a:ln>
-        </p:spPr>
-      </p:sp>
-      <p:pic>
-        <p:nvPicPr>
-          <p:cNvPr id="19" name="Image 4" descr="article icon from tabler-icons (MIT)">    </p:cNvPr>
-          <p:cNvPicPr>
-            <a:picLocks noChangeAspect="1"/>
-          </p:cNvPicPr>
-          <p:nvPr/>
-        </p:nvPicPr>
-        <p:blipFill>
-          <a:blip r:embed="rId9">
-            <a:extLst>
-              <a:ext uri="{96DAC541-7B7A-43D3-8B79-37D633B846F1}">
-                <asvg:svgBlip xmlns:asvg="http://schemas.microsoft.com/office/drawing/2016/SVG/main" r:embed="rId10"/>
-              </a:ext>
-            </a:extLst>
-          </a:blip>
-          <a:stretch>
-            <a:fillRect/>
-          </a:stretch>
-        </p:blipFill>
-        <p:spPr>
-          <a:xfrm>
-            <a:off x="1049274" y="2203704"/>
-            <a:ext cx="438912" cy="438912"/>
-          </a:xfrm>
-          <a:prstGeom prst="rect">
-            <a:avLst/>
-          </a:prstGeom>
-        </p:spPr>
-      </p:pic>
-      <p:sp>
-        <p:nvSpPr>
-          <p:cNvPr id="20" name="mdpr:1-2-e3669a:item-1:block-15-chunk-1"/>
+          <p:cNvPr id="12" name="mdpr:1-2-e3669a:left:block-15-chunk-1-block-15-chunk-1"/>
           <p:cNvSpPr txBox="1"/>
           <p:nvPr/>
         </p:nvSpPr>
         <p:spPr>
           <a:xfrm>
-            <a:off x="1689354" y="1627632"/>
-            <a:ext cx="3961638" cy="1591056"/>
+            <a:off x="896112" y="1499616"/>
+            <a:ext cx="4791456" cy="4398264"/>
           </a:xfrm>
           <a:prstGeom prst="rect">
             <a:avLst/>
@@ -6209,7 +5978,7 @@
           <a:ln/>
         </p:spPr>
         <p:txBody>
-          <a:bodyPr wrap="square" lIns="0" tIns="25400" rIns="25400" bIns="0" rtlCol="0" anchor="ctr"/>
+          <a:bodyPr wrap="square" lIns="0" tIns="25400" rIns="25400" bIns="0" rtlCol="0" anchor="t"/>
           <a:lstStyle/>
           <a:p>
             <a:pPr algn="l" indent="0" marL="0">
@@ -6219,7 +5988,7 @@
               <a:buNone/>
             </a:pPr>
             <a:r>
-              <a:rPr lang="en-US" sz="2200" b="1" dirty="0">
+              <a:rPr lang="en-US" sz="1800" b="1" dirty="0">
                 <a:solidFill>
                   <a:srgbClr val="111827"/>
                 </a:solidFill>
@@ -6227,7 +5996,7 @@
                 <a:ea typeface="Pretendard" pitchFamily="34" charset="-122"/>
                 <a:cs typeface="Pretendard" pitchFamily="34" charset="-120"/>
               </a:rPr>
-              <a:t>Surfaces</a:t>
+              <a:t>- Surfaces</a:t>
             </a:r>
             <a:pPr algn="l" indent="0" marL="0">
               <a:lnSpc>
@@ -6236,7 +6005,7 @@
               <a:buNone/>
             </a:pPr>
             <a:r>
-              <a:rPr lang="en-US" sz="2200" dirty="0">
+              <a:rPr lang="en-US" sz="1800" dirty="0">
                 <a:solidFill>
                   <a:srgbClr val="111111"/>
                 </a:solidFill>
@@ -6246,77 +6015,60 @@
               </a:rPr>
               <a:t>  rounded-card, two-corner-card, flag-drop, ticket-panel, notched-panel, circle-vine.</a:t>
             </a:r>
-            <a:endParaRPr lang="en-US" sz="2200" dirty="0"/>
+            <a:endParaRPr lang="en-US" sz="1800" dirty="0"/>
+          </a:p>
+          <a:p>
+            <a:pPr algn="l" indent="0" marL="0">
+              <a:lnSpc>
+                <a:spcPct val="120000"/>
+              </a:lnSpc>
+              <a:buNone/>
+            </a:pPr>
+            <a:r>
+              <a:rPr lang="en-US" sz="1800" b="1" dirty="0">
+                <a:solidFill>
+                  <a:srgbClr val="111827"/>
+                </a:solidFill>
+                <a:latin typeface="Pretendard" pitchFamily="34" charset="0"/>
+                <a:ea typeface="Pretendard" pitchFamily="34" charset="-122"/>
+                <a:cs typeface="Pretendard" pitchFamily="34" charset="-120"/>
+              </a:rPr>
+              <a:t>- Layouts</a:t>
+            </a:r>
+            <a:endParaRPr lang="en-US" sz="1800" dirty="0"/>
+          </a:p>
+          <a:p>
+            <a:pPr algn="l" indent="0" marL="0">
+              <a:lnSpc>
+                <a:spcPct val="120000"/>
+              </a:lnSpc>
+              <a:buNone/>
+            </a:pPr>
+            <a:r>
+              <a:rPr lang="en-US" sz="1800" dirty="0">
+                <a:solidFill>
+                  <a:srgbClr val="111111"/>
+                </a:solidFill>
+                <a:latin typeface="Pretendard" pitchFamily="34" charset="0"/>
+                <a:ea typeface="Pretendard" pitchFamily="34" charset="-122"/>
+                <a:cs typeface="Pretendard" pitchFamily="34" charset="-120"/>
+              </a:rPr>
+              <a:t>  toc-strips, two-column-compare, three-card-grid, six-tile-grid, timeline-rail, pipeline-chain.</a:t>
+            </a:r>
+            <a:endParaRPr lang="en-US" sz="1800" dirty="0"/>
           </a:p>
         </p:txBody>
       </p:sp>
       <p:sp>
         <p:nvSpPr>
-          <p:cNvPr id="21" name="Shape 14"/>
-          <p:cNvSpPr/>
-          <p:nvPr/>
-        </p:nvSpPr>
-        <p:spPr>
-          <a:xfrm>
-            <a:off x="6462522" y="2130552"/>
-            <a:ext cx="585216" cy="585216"/>
-          </a:xfrm>
-          <a:prstGeom prst="roundRect">
-            <a:avLst>
-              <a:gd name="adj" fmla="val 6250"/>
-            </a:avLst>
-          </a:prstGeom>
-          <a:solidFill>
-            <a:srgbClr val="FFFFFF"/>
-          </a:solidFill>
-          <a:ln w="12700">
-            <a:solidFill>
-              <a:srgbClr val="E5E7EB"/>
-            </a:solidFill>
-            <a:prstDash val="solid"/>
-          </a:ln>
-        </p:spPr>
-      </p:sp>
-      <p:pic>
-        <p:nvPicPr>
-          <p:cNvPr id="22" name="Image 5" descr="table icon from tabler-icons (MIT)">    </p:cNvPr>
-          <p:cNvPicPr>
-            <a:picLocks noChangeAspect="1"/>
-          </p:cNvPicPr>
-          <p:nvPr/>
-        </p:nvPicPr>
-        <p:blipFill>
-          <a:blip r:embed="rId11">
-            <a:extLst>
-              <a:ext uri="{96DAC541-7B7A-43D3-8B79-37D633B846F1}">
-                <asvg:svgBlip xmlns:asvg="http://schemas.microsoft.com/office/drawing/2016/SVG/main" r:embed="rId12"/>
-              </a:ext>
-            </a:extLst>
-          </a:blip>
-          <a:stretch>
-            <a:fillRect/>
-          </a:stretch>
-        </p:blipFill>
-        <p:spPr>
-          <a:xfrm>
-            <a:off x="6535674" y="2203704"/>
-            <a:ext cx="438912" cy="438912"/>
-          </a:xfrm>
-          <a:prstGeom prst="rect">
-            <a:avLst/>
-          </a:prstGeom>
-        </p:spPr>
-      </p:pic>
-      <p:sp>
-        <p:nvSpPr>
-          <p:cNvPr id="23" name="mdpr:1-2-e3669a:item-2:block-15-chunk-1"/>
+          <p:cNvPr id="13" name="mdpr:1-2-e3669a:right:block-15-chunk-1-block-15-chunk-1"/>
           <p:cNvSpPr txBox="1"/>
           <p:nvPr/>
         </p:nvSpPr>
         <p:spPr>
           <a:xfrm>
-            <a:off x="7175754" y="1627632"/>
-            <a:ext cx="3961638" cy="1591056"/>
+            <a:off x="6473952" y="1499616"/>
+            <a:ext cx="4791456" cy="4398264"/>
           </a:xfrm>
           <a:prstGeom prst="rect">
             <a:avLst/>
@@ -6325,7 +6077,7 @@
           <a:ln/>
         </p:spPr>
         <p:txBody>
-          <a:bodyPr wrap="square" lIns="0" tIns="25400" rIns="25400" bIns="0" rtlCol="0" anchor="ctr"/>
+          <a:bodyPr wrap="square" lIns="0" tIns="25400" rIns="25400" bIns="0" rtlCol="0" anchor="t"/>
           <a:lstStyle/>
           <a:p>
             <a:pPr algn="l" indent="0" marL="0">
@@ -6335,7 +6087,7 @@
               <a:buNone/>
             </a:pPr>
             <a:r>
-              <a:rPr lang="en-US" sz="2200" b="1" dirty="0">
+              <a:rPr lang="en-US" sz="1800" b="1" dirty="0">
                 <a:solidFill>
                   <a:srgbClr val="111827"/>
                 </a:solidFill>
@@ -6343,7 +6095,7 @@
                 <a:ea typeface="Pretendard" pitchFamily="34" charset="-122"/>
                 <a:cs typeface="Pretendard" pitchFamily="34" charset="-120"/>
               </a:rPr>
-              <a:t>Layouts</a:t>
+              <a:t>- Evidence</a:t>
             </a:r>
             <a:pPr algn="l" indent="0" marL="0">
               <a:lnSpc>
@@ -6352,123 +6104,7 @@
               <a:buNone/>
             </a:pPr>
             <a:r>
-              <a:rPr lang="en-US" sz="2200" dirty="0">
-                <a:solidFill>
-                  <a:srgbClr val="111111"/>
-                </a:solidFill>
-                <a:latin typeface="Pretendard" pitchFamily="34" charset="0"/>
-                <a:ea typeface="Pretendard" pitchFamily="34" charset="-122"/>
-                <a:cs typeface="Pretendard" pitchFamily="34" charset="-120"/>
-              </a:rPr>
-              <a:t>  toc-strips, two-column-compare, three-card-grid, six-tile-grid, timeline-rail, pipeline-chain.</a:t>
-            </a:r>
-            <a:endParaRPr lang="en-US" sz="2200" dirty="0"/>
-          </a:p>
-        </p:txBody>
-      </p:sp>
-      <p:sp>
-        <p:nvSpPr>
-          <p:cNvPr id="24" name="Shape 16"/>
-          <p:cNvSpPr/>
-          <p:nvPr/>
-        </p:nvSpPr>
-        <p:spPr>
-          <a:xfrm>
-            <a:off x="976122" y="4416552"/>
-            <a:ext cx="585216" cy="585216"/>
-          </a:xfrm>
-          <a:prstGeom prst="roundRect">
-            <a:avLst>
-              <a:gd name="adj" fmla="val 6250"/>
-            </a:avLst>
-          </a:prstGeom>
-          <a:solidFill>
-            <a:srgbClr val="FFFFFF"/>
-          </a:solidFill>
-          <a:ln w="12700">
-            <a:solidFill>
-              <a:srgbClr val="E5E7EB"/>
-            </a:solidFill>
-            <a:prstDash val="solid"/>
-          </a:ln>
-        </p:spPr>
-      </p:sp>
-      <p:pic>
-        <p:nvPicPr>
-          <p:cNvPr id="25" name="Image 6" descr="chart icon from tabler-icons (MIT)">    </p:cNvPr>
-          <p:cNvPicPr>
-            <a:picLocks noChangeAspect="1"/>
-          </p:cNvPicPr>
-          <p:nvPr/>
-        </p:nvPicPr>
-        <p:blipFill>
-          <a:blip r:embed="rId13">
-            <a:extLst>
-              <a:ext uri="{96DAC541-7B7A-43D3-8B79-37D633B846F1}">
-                <asvg:svgBlip xmlns:asvg="http://schemas.microsoft.com/office/drawing/2016/SVG/main" r:embed="rId14"/>
-              </a:ext>
-            </a:extLst>
-          </a:blip>
-          <a:stretch>
-            <a:fillRect/>
-          </a:stretch>
-        </p:blipFill>
-        <p:spPr>
-          <a:xfrm>
-            <a:off x="1049274" y="4489704"/>
-            <a:ext cx="438912" cy="438912"/>
-          </a:xfrm>
-          <a:prstGeom prst="rect">
-            <a:avLst/>
-          </a:prstGeom>
-        </p:spPr>
-      </p:pic>
-      <p:sp>
-        <p:nvSpPr>
-          <p:cNvPr id="26" name="mdpr:1-2-e3669a:item-3:block-15-chunk-1"/>
-          <p:cNvSpPr txBox="1"/>
-          <p:nvPr/>
-        </p:nvSpPr>
-        <p:spPr>
-          <a:xfrm>
-            <a:off x="1689354" y="3913632"/>
-            <a:ext cx="3961638" cy="1591056"/>
-          </a:xfrm>
-          <a:prstGeom prst="rect">
-            <a:avLst/>
-          </a:prstGeom>
-          <a:noFill/>
-          <a:ln/>
-        </p:spPr>
-        <p:txBody>
-          <a:bodyPr wrap="square" lIns="0" tIns="25400" rIns="25400" bIns="0" rtlCol="0" anchor="ctr"/>
-          <a:lstStyle/>
-          <a:p>
-            <a:pPr algn="l" indent="0" marL="0">
-              <a:lnSpc>
-                <a:spcPct val="120000"/>
-              </a:lnSpc>
-              <a:buNone/>
-            </a:pPr>
-            <a:r>
-              <a:rPr lang="en-US" sz="2200" b="1" dirty="0">
-                <a:solidFill>
-                  <a:srgbClr val="111827"/>
-                </a:solidFill>
-                <a:latin typeface="Pretendard" pitchFamily="34" charset="0"/>
-                <a:ea typeface="Pretendard" pitchFamily="34" charset="-122"/>
-                <a:cs typeface="Pretendard" pitchFamily="34" charset="-120"/>
-              </a:rPr>
-              <a:t>Evidence</a:t>
-            </a:r>
-            <a:pPr algn="l" indent="0" marL="0">
-              <a:lnSpc>
-                <a:spcPct val="120000"/>
-              </a:lnSpc>
-              <a:buNone/>
-            </a:pPr>
-            <a:r>
-              <a:rPr lang="en-US" sz="2200" dirty="0">
+              <a:rPr lang="en-US" sz="1800" dirty="0">
                 <a:solidFill>
                   <a:srgbClr val="111111"/>
                 </a:solidFill>
@@ -6478,87 +6114,8 @@
               </a:rPr>
               <a:t>  chart-table-pair, metric-proof, arc-ring-proof, gauge-proof, connected-strip, mixed-object-pack.</a:t>
             </a:r>
-            <a:endParaRPr lang="en-US" sz="2200" dirty="0"/>
+            <a:endParaRPr lang="en-US" sz="1800" dirty="0"/>
           </a:p>
-        </p:txBody>
-      </p:sp>
-      <p:sp>
-        <p:nvSpPr>
-          <p:cNvPr id="27" name="Shape 18"/>
-          <p:cNvSpPr/>
-          <p:nvPr/>
-        </p:nvSpPr>
-        <p:spPr>
-          <a:xfrm>
-            <a:off x="6462522" y="4416552"/>
-            <a:ext cx="585216" cy="585216"/>
-          </a:xfrm>
-          <a:prstGeom prst="roundRect">
-            <a:avLst>
-              <a:gd name="adj" fmla="val 6250"/>
-            </a:avLst>
-          </a:prstGeom>
-          <a:solidFill>
-            <a:srgbClr val="FFFFFF"/>
-          </a:solidFill>
-          <a:ln w="12700">
-            <a:solidFill>
-              <a:srgbClr val="E5E7EB"/>
-            </a:solidFill>
-            <a:prstDash val="solid"/>
-          </a:ln>
-        </p:spPr>
-      </p:sp>
-      <p:pic>
-        <p:nvPicPr>
-          <p:cNvPr id="28" name="Image 7" descr="flow icon from tabler-icons (MIT)">    </p:cNvPr>
-          <p:cNvPicPr>
-            <a:picLocks noChangeAspect="1"/>
-          </p:cNvPicPr>
-          <p:nvPr/>
-        </p:nvPicPr>
-        <p:blipFill>
-          <a:blip r:embed="rId15">
-            <a:extLst>
-              <a:ext uri="{96DAC541-7B7A-43D3-8B79-37D633B846F1}">
-                <asvg:svgBlip xmlns:asvg="http://schemas.microsoft.com/office/drawing/2016/SVG/main" r:embed="rId16"/>
-              </a:ext>
-            </a:extLst>
-          </a:blip>
-          <a:stretch>
-            <a:fillRect/>
-          </a:stretch>
-        </p:blipFill>
-        <p:spPr>
-          <a:xfrm>
-            <a:off x="6535674" y="4489704"/>
-            <a:ext cx="438912" cy="438912"/>
-          </a:xfrm>
-          <a:prstGeom prst="rect">
-            <a:avLst/>
-          </a:prstGeom>
-        </p:spPr>
-      </p:pic>
-      <p:sp>
-        <p:nvSpPr>
-          <p:cNvPr id="29" name="mdpr:1-2-e3669a:item-4:block-15-chunk-1"/>
-          <p:cNvSpPr txBox="1"/>
-          <p:nvPr/>
-        </p:nvSpPr>
-        <p:spPr>
-          <a:xfrm>
-            <a:off x="7175754" y="3913632"/>
-            <a:ext cx="3961638" cy="1591056"/>
-          </a:xfrm>
-          <a:prstGeom prst="rect">
-            <a:avLst/>
-          </a:prstGeom>
-          <a:noFill/>
-          <a:ln/>
-        </p:spPr>
-        <p:txBody>
-          <a:bodyPr wrap="square" lIns="0" tIns="25400" rIns="25400" bIns="0" rtlCol="0" anchor="ctr"/>
-          <a:lstStyle/>
           <a:p>
             <a:pPr algn="l" indent="0" marL="0">
               <a:lnSpc>
@@ -6567,7 +6124,7 @@
               <a:buNone/>
             </a:pPr>
             <a:r>
-              <a:rPr lang="en-US" sz="2200" b="1" dirty="0">
+              <a:rPr lang="en-US" sz="1800" b="1" dirty="0">
                 <a:solidFill>
                   <a:srgbClr val="111827"/>
                 </a:solidFill>
@@ -6575,8 +6132,11 @@
                 <a:ea typeface="Pretendard" pitchFamily="34" charset="-122"/>
                 <a:cs typeface="Pretendard" pitchFamily="34" charset="-120"/>
               </a:rPr>
-              <a:t>Connectors</a:t>
+              <a:t>- Connectors</a:t>
             </a:r>
+            <a:endParaRPr lang="en-US" sz="1800" dirty="0"/>
+          </a:p>
+          <a:p>
             <a:pPr algn="l" indent="0" marL="0">
               <a:lnSpc>
                 <a:spcPct val="120000"/>
@@ -6584,7 +6144,7 @@
               <a:buNone/>
             </a:pPr>
             <a:r>
-              <a:rPr lang="en-US" sz="2200" dirty="0">
+              <a:rPr lang="en-US" sz="1800" dirty="0">
                 <a:solidFill>
                   <a:srgbClr val="111111"/>
                 </a:solidFill>
@@ -6594,7 +6154,7 @@
               </a:rPr>
               <a:t>  straight-arrow, elbow-arrow, boundary-attach, overlap-joint, parallel-flow, contrast-flow.</a:t>
             </a:r>
-            <a:endParaRPr lang="en-US" sz="2200" dirty="0"/>
+            <a:endParaRPr lang="en-US" sz="1800" dirty="0"/>
           </a:p>
         </p:txBody>
       </p:sp>
@@ -12288,71 +11848,14 @@
       </p:sp>
       <p:sp>
         <p:nvSpPr>
-          <p:cNvPr id="17" name="Shape 12"/>
-          <p:cNvSpPr/>
-          <p:nvPr/>
-        </p:nvSpPr>
-        <p:spPr>
-          <a:xfrm>
-            <a:off x="1097280" y="2140428"/>
-            <a:ext cx="474025" cy="474025"/>
-          </a:xfrm>
-          <a:prstGeom prst="roundRect">
-            <a:avLst>
-              <a:gd name="adj" fmla="val 7716"/>
-            </a:avLst>
-          </a:prstGeom>
-          <a:solidFill>
-            <a:srgbClr val="FFFFFF"/>
-          </a:solidFill>
-          <a:ln w="12700">
-            <a:solidFill>
-              <a:srgbClr val="E5E7EB"/>
-            </a:solidFill>
-            <a:prstDash val="solid"/>
-          </a:ln>
-        </p:spPr>
-      </p:sp>
-      <p:pic>
-        <p:nvPicPr>
-          <p:cNvPr id="18" name="Image 3" descr="article icon from tabler-icons (MIT)">    </p:cNvPr>
-          <p:cNvPicPr>
-            <a:picLocks noChangeAspect="1"/>
-          </p:cNvPicPr>
-          <p:nvPr/>
-        </p:nvPicPr>
-        <p:blipFill>
-          <a:blip r:embed="rId7">
-            <a:extLst>
-              <a:ext uri="{96DAC541-7B7A-43D3-8B79-37D633B846F1}">
-                <asvg:svgBlip xmlns:asvg="http://schemas.microsoft.com/office/drawing/2016/SVG/main" r:embed="rId8"/>
-              </a:ext>
-            </a:extLst>
-          </a:blip>
-          <a:stretch>
-            <a:fillRect/>
-          </a:stretch>
-        </p:blipFill>
-        <p:spPr>
-          <a:xfrm>
-            <a:off x="1170432" y="2213580"/>
-            <a:ext cx="327721" cy="327721"/>
-          </a:xfrm>
-          <a:prstGeom prst="rect">
-            <a:avLst/>
-          </a:prstGeom>
-        </p:spPr>
-      </p:pic>
-      <p:sp>
-        <p:nvSpPr>
-          <p:cNvPr id="19" name="mdpr:1-2-ea42c8:item-1:block-27-chunk-1"/>
+          <p:cNvPr id="17" name="mdpr:1-2-ea42c8:item-1:block-27-chunk-1"/>
           <p:cNvSpPr txBox="1"/>
           <p:nvPr/>
         </p:nvSpPr>
         <p:spPr>
           <a:xfrm>
-            <a:off x="1699321" y="1987296"/>
-            <a:ext cx="9255191" cy="780288"/>
+            <a:off x="1133856" y="1957548"/>
+            <a:ext cx="9820656" cy="839785"/>
           </a:xfrm>
           <a:prstGeom prst="rect">
             <a:avLst/>
@@ -12404,71 +11907,14 @@
       </p:sp>
       <p:sp>
         <p:nvSpPr>
-          <p:cNvPr id="20" name="Shape 14"/>
-          <p:cNvSpPr/>
-          <p:nvPr/>
-        </p:nvSpPr>
-        <p:spPr>
-          <a:xfrm>
-            <a:off x="1097280" y="3466308"/>
-            <a:ext cx="474025" cy="474025"/>
-          </a:xfrm>
-          <a:prstGeom prst="roundRect">
-            <a:avLst>
-              <a:gd name="adj" fmla="val 7716"/>
-            </a:avLst>
-          </a:prstGeom>
-          <a:solidFill>
-            <a:srgbClr val="FFFFFF"/>
-          </a:solidFill>
-          <a:ln w="12700">
-            <a:solidFill>
-              <a:srgbClr val="E5E7EB"/>
-            </a:solidFill>
-            <a:prstDash val="solid"/>
-          </a:ln>
-        </p:spPr>
-      </p:sp>
-      <p:pic>
-        <p:nvPicPr>
-          <p:cNvPr id="21" name="Image 4" descr="article icon from tabler-icons (MIT)">    </p:cNvPr>
-          <p:cNvPicPr>
-            <a:picLocks noChangeAspect="1"/>
-          </p:cNvPicPr>
-          <p:nvPr/>
-        </p:nvPicPr>
-        <p:blipFill>
-          <a:blip r:embed="rId9">
-            <a:extLst>
-              <a:ext uri="{96DAC541-7B7A-43D3-8B79-37D633B846F1}">
-                <asvg:svgBlip xmlns:asvg="http://schemas.microsoft.com/office/drawing/2016/SVG/main" r:embed="rId10"/>
-              </a:ext>
-            </a:extLst>
-          </a:blip>
-          <a:stretch>
-            <a:fillRect/>
-          </a:stretch>
-        </p:blipFill>
-        <p:spPr>
-          <a:xfrm>
-            <a:off x="1170432" y="3539460"/>
-            <a:ext cx="327721" cy="327721"/>
-          </a:xfrm>
-          <a:prstGeom prst="rect">
-            <a:avLst/>
-          </a:prstGeom>
-        </p:spPr>
-      </p:pic>
-      <p:sp>
-        <p:nvSpPr>
-          <p:cNvPr id="22" name="mdpr:1-2-ea42c8:item-2:block-27-chunk-1"/>
+          <p:cNvPr id="18" name="mdpr:1-2-ea42c8:item-2:block-27-chunk-1"/>
           <p:cNvSpPr txBox="1"/>
           <p:nvPr/>
         </p:nvSpPr>
         <p:spPr>
           <a:xfrm>
-            <a:off x="1699321" y="3313176"/>
-            <a:ext cx="9255191" cy="780288"/>
+            <a:off x="1133856" y="3283428"/>
+            <a:ext cx="9820656" cy="839785"/>
           </a:xfrm>
           <a:prstGeom prst="rect">
             <a:avLst/>
@@ -12520,71 +11966,14 @@
       </p:sp>
       <p:sp>
         <p:nvSpPr>
-          <p:cNvPr id="23" name="Shape 16"/>
-          <p:cNvSpPr/>
-          <p:nvPr/>
-        </p:nvSpPr>
-        <p:spPr>
-          <a:xfrm>
-            <a:off x="1097280" y="4783044"/>
-            <a:ext cx="474025" cy="474025"/>
-          </a:xfrm>
-          <a:prstGeom prst="roundRect">
-            <a:avLst>
-              <a:gd name="adj" fmla="val 7716"/>
-            </a:avLst>
-          </a:prstGeom>
-          <a:solidFill>
-            <a:srgbClr val="FFFFFF"/>
-          </a:solidFill>
-          <a:ln w="12700">
-            <a:solidFill>
-              <a:srgbClr val="E5E7EB"/>
-            </a:solidFill>
-            <a:prstDash val="solid"/>
-          </a:ln>
-        </p:spPr>
-      </p:sp>
-      <p:pic>
-        <p:nvPicPr>
-          <p:cNvPr id="24" name="Image 5" descr="article icon from tabler-icons (MIT)">    </p:cNvPr>
-          <p:cNvPicPr>
-            <a:picLocks noChangeAspect="1"/>
-          </p:cNvPicPr>
-          <p:nvPr/>
-        </p:nvPicPr>
-        <p:blipFill>
-          <a:blip r:embed="rId11">
-            <a:extLst>
-              <a:ext uri="{96DAC541-7B7A-43D3-8B79-37D633B846F1}">
-                <asvg:svgBlip xmlns:asvg="http://schemas.microsoft.com/office/drawing/2016/SVG/main" r:embed="rId12"/>
-              </a:ext>
-            </a:extLst>
-          </a:blip>
-          <a:stretch>
-            <a:fillRect/>
-          </a:stretch>
-        </p:blipFill>
-        <p:spPr>
-          <a:xfrm>
-            <a:off x="1170432" y="4856196"/>
-            <a:ext cx="327721" cy="327721"/>
-          </a:xfrm>
-          <a:prstGeom prst="rect">
-            <a:avLst/>
-          </a:prstGeom>
-        </p:spPr>
-      </p:pic>
-      <p:sp>
-        <p:nvSpPr>
-          <p:cNvPr id="25" name="mdpr:1-2-ea42c8:item-3:block-27-chunk-1"/>
+          <p:cNvPr id="19" name="mdpr:1-2-ea42c8:item-3:block-27-chunk-1"/>
           <p:cNvSpPr txBox="1"/>
           <p:nvPr/>
         </p:nvSpPr>
         <p:spPr>
           <a:xfrm>
-            <a:off x="1699321" y="4629912"/>
-            <a:ext cx="9255191" cy="780288"/>
+            <a:off x="1133856" y="4600164"/>
+            <a:ext cx="9820656" cy="839785"/>
           </a:xfrm>
           <a:prstGeom prst="rect">
             <a:avLst/>
@@ -14832,71 +14221,14 @@
       </p:sp>
       <p:sp>
         <p:nvSpPr>
-          <p:cNvPr id="18" name="Shape 12"/>
-          <p:cNvSpPr/>
-          <p:nvPr/>
-        </p:nvSpPr>
-        <p:spPr>
-          <a:xfrm>
-            <a:off x="976122" y="2130552"/>
-            <a:ext cx="585216" cy="585216"/>
-          </a:xfrm>
-          <a:prstGeom prst="roundRect">
-            <a:avLst>
-              <a:gd name="adj" fmla="val 6250"/>
-            </a:avLst>
-          </a:prstGeom>
-          <a:solidFill>
-            <a:srgbClr val="FFFFFF"/>
-          </a:solidFill>
-          <a:ln w="12700">
-            <a:solidFill>
-              <a:srgbClr val="E5E7EB"/>
-            </a:solidFill>
-            <a:prstDash val="solid"/>
-          </a:ln>
-        </p:spPr>
-      </p:sp>
-      <p:pic>
-        <p:nvPicPr>
-          <p:cNvPr id="19" name="Image 4" descr="article icon from tabler-icons (MIT)">    </p:cNvPr>
-          <p:cNvPicPr>
-            <a:picLocks noChangeAspect="1"/>
-          </p:cNvPicPr>
-          <p:nvPr/>
-        </p:nvPicPr>
-        <p:blipFill>
-          <a:blip r:embed="rId9">
-            <a:extLst>
-              <a:ext uri="{96DAC541-7B7A-43D3-8B79-37D633B846F1}">
-                <asvg:svgBlip xmlns:asvg="http://schemas.microsoft.com/office/drawing/2016/SVG/main" r:embed="rId10"/>
-              </a:ext>
-            </a:extLst>
-          </a:blip>
-          <a:stretch>
-            <a:fillRect/>
-          </a:stretch>
-        </p:blipFill>
-        <p:spPr>
-          <a:xfrm>
-            <a:off x="1049274" y="2203704"/>
-            <a:ext cx="438912" cy="438912"/>
-          </a:xfrm>
-          <a:prstGeom prst="rect">
-            <a:avLst/>
-          </a:prstGeom>
-        </p:spPr>
-      </p:pic>
-      <p:sp>
-        <p:nvSpPr>
-          <p:cNvPr id="20" name="mdpr:icon-and-text-aside-8429fc:item-1:block-29"/>
+          <p:cNvPr id="18" name="mdpr:icon-and-text-aside-8429fc:item-1:block-29"/>
           <p:cNvSpPr txBox="1"/>
           <p:nvPr/>
         </p:nvSpPr>
         <p:spPr>
           <a:xfrm>
-            <a:off x="1689354" y="2033016"/>
-            <a:ext cx="3961638" cy="780288"/>
+            <a:off x="1042416" y="1627632"/>
+            <a:ext cx="4608576" cy="1591056"/>
           </a:xfrm>
           <a:prstGeom prst="rect">
             <a:avLst/>
@@ -14948,71 +14280,14 @@
       </p:sp>
       <p:sp>
         <p:nvSpPr>
-          <p:cNvPr id="21" name="Shape 14"/>
-          <p:cNvSpPr/>
-          <p:nvPr/>
-        </p:nvSpPr>
-        <p:spPr>
-          <a:xfrm>
-            <a:off x="6462522" y="2130552"/>
-            <a:ext cx="585216" cy="585216"/>
-          </a:xfrm>
-          <a:prstGeom prst="roundRect">
-            <a:avLst>
-              <a:gd name="adj" fmla="val 6250"/>
-            </a:avLst>
-          </a:prstGeom>
-          <a:solidFill>
-            <a:srgbClr val="FFFFFF"/>
-          </a:solidFill>
-          <a:ln w="12700">
-            <a:solidFill>
-              <a:srgbClr val="E5E7EB"/>
-            </a:solidFill>
-            <a:prstDash val="solid"/>
-          </a:ln>
-        </p:spPr>
-      </p:sp>
-      <p:pic>
-        <p:nvPicPr>
-          <p:cNvPr id="22" name="Image 5" descr="article icon from tabler-icons (MIT)">    </p:cNvPr>
-          <p:cNvPicPr>
-            <a:picLocks noChangeAspect="1"/>
-          </p:cNvPicPr>
-          <p:nvPr/>
-        </p:nvPicPr>
-        <p:blipFill>
-          <a:blip r:embed="rId11">
-            <a:extLst>
-              <a:ext uri="{96DAC541-7B7A-43D3-8B79-37D633B846F1}">
-                <asvg:svgBlip xmlns:asvg="http://schemas.microsoft.com/office/drawing/2016/SVG/main" r:embed="rId12"/>
-              </a:ext>
-            </a:extLst>
-          </a:blip>
-          <a:stretch>
-            <a:fillRect/>
-          </a:stretch>
-        </p:blipFill>
-        <p:spPr>
-          <a:xfrm>
-            <a:off x="6535674" y="2203704"/>
-            <a:ext cx="438912" cy="438912"/>
-          </a:xfrm>
-          <a:prstGeom prst="rect">
-            <a:avLst/>
-          </a:prstGeom>
-        </p:spPr>
-      </p:pic>
-      <p:sp>
-        <p:nvSpPr>
-          <p:cNvPr id="23" name="mdpr:icon-and-text-aside-8429fc:item-2:block-29"/>
+          <p:cNvPr id="19" name="mdpr:icon-and-text-aside-8429fc:item-2:block-29"/>
           <p:cNvSpPr txBox="1"/>
           <p:nvPr/>
         </p:nvSpPr>
         <p:spPr>
           <a:xfrm>
-            <a:off x="7175754" y="1865376"/>
-            <a:ext cx="3961638" cy="1115568"/>
+            <a:off x="6528816" y="1627632"/>
+            <a:ext cx="4608576" cy="1591056"/>
           </a:xfrm>
           <a:prstGeom prst="rect">
             <a:avLst/>
@@ -15064,71 +14339,14 @@
       </p:sp>
       <p:sp>
         <p:nvSpPr>
-          <p:cNvPr id="24" name="Shape 16"/>
-          <p:cNvSpPr/>
-          <p:nvPr/>
-        </p:nvSpPr>
-        <p:spPr>
-          <a:xfrm>
-            <a:off x="976122" y="4416552"/>
-            <a:ext cx="585216" cy="585216"/>
-          </a:xfrm>
-          <a:prstGeom prst="roundRect">
-            <a:avLst>
-              <a:gd name="adj" fmla="val 6250"/>
-            </a:avLst>
-          </a:prstGeom>
-          <a:solidFill>
-            <a:srgbClr val="FFFFFF"/>
-          </a:solidFill>
-          <a:ln w="12700">
-            <a:solidFill>
-              <a:srgbClr val="E5E7EB"/>
-            </a:solidFill>
-            <a:prstDash val="solid"/>
-          </a:ln>
-        </p:spPr>
-      </p:sp>
-      <p:pic>
-        <p:nvPicPr>
-          <p:cNvPr id="25" name="Image 6" descr="article icon from tabler-icons (MIT)">    </p:cNvPr>
-          <p:cNvPicPr>
-            <a:picLocks noChangeAspect="1"/>
-          </p:cNvPicPr>
-          <p:nvPr/>
-        </p:nvPicPr>
-        <p:blipFill>
-          <a:blip r:embed="rId13">
-            <a:extLst>
-              <a:ext uri="{96DAC541-7B7A-43D3-8B79-37D633B846F1}">
-                <asvg:svgBlip xmlns:asvg="http://schemas.microsoft.com/office/drawing/2016/SVG/main" r:embed="rId14"/>
-              </a:ext>
-            </a:extLst>
-          </a:blip>
-          <a:stretch>
-            <a:fillRect/>
-          </a:stretch>
-        </p:blipFill>
-        <p:spPr>
-          <a:xfrm>
-            <a:off x="1049274" y="4489704"/>
-            <a:ext cx="438912" cy="438912"/>
-          </a:xfrm>
-          <a:prstGeom prst="rect">
-            <a:avLst/>
-          </a:prstGeom>
-        </p:spPr>
-      </p:pic>
-      <p:sp>
-        <p:nvSpPr>
-          <p:cNvPr id="26" name="mdpr:icon-and-text-aside-8429fc:item-3:block-29"/>
+          <p:cNvPr id="20" name="mdpr:icon-and-text-aside-8429fc:item-3:block-29"/>
           <p:cNvSpPr txBox="1"/>
           <p:nvPr/>
         </p:nvSpPr>
         <p:spPr>
           <a:xfrm>
-            <a:off x="1689354" y="4151376"/>
-            <a:ext cx="3961638" cy="1115568"/>
+            <a:off x="1042416" y="3913632"/>
+            <a:ext cx="4608576" cy="1591056"/>
           </a:xfrm>
           <a:prstGeom prst="rect">
             <a:avLst/>
@@ -15180,71 +14398,14 @@
       </p:sp>
       <p:sp>
         <p:nvSpPr>
-          <p:cNvPr id="27" name="Shape 18"/>
-          <p:cNvSpPr/>
-          <p:nvPr/>
-        </p:nvSpPr>
-        <p:spPr>
-          <a:xfrm>
-            <a:off x="6462522" y="4416552"/>
-            <a:ext cx="585216" cy="585216"/>
-          </a:xfrm>
-          <a:prstGeom prst="roundRect">
-            <a:avLst>
-              <a:gd name="adj" fmla="val 6250"/>
-            </a:avLst>
-          </a:prstGeom>
-          <a:solidFill>
-            <a:srgbClr val="FFFFFF"/>
-          </a:solidFill>
-          <a:ln w="12700">
-            <a:solidFill>
-              <a:srgbClr val="E5E7EB"/>
-            </a:solidFill>
-            <a:prstDash val="solid"/>
-          </a:ln>
-        </p:spPr>
-      </p:sp>
-      <p:pic>
-        <p:nvPicPr>
-          <p:cNvPr id="28" name="Image 7" descr="table icon from tabler-icons (MIT)">    </p:cNvPr>
-          <p:cNvPicPr>
-            <a:picLocks noChangeAspect="1"/>
-          </p:cNvPicPr>
-          <p:nvPr/>
-        </p:nvPicPr>
-        <p:blipFill>
-          <a:blip r:embed="rId15">
-            <a:extLst>
-              <a:ext uri="{96DAC541-7B7A-43D3-8B79-37D633B846F1}">
-                <asvg:svgBlip xmlns:asvg="http://schemas.microsoft.com/office/drawing/2016/SVG/main" r:embed="rId16"/>
-              </a:ext>
-            </a:extLst>
-          </a:blip>
-          <a:stretch>
-            <a:fillRect/>
-          </a:stretch>
-        </p:blipFill>
-        <p:spPr>
-          <a:xfrm>
-            <a:off x="6535674" y="4489704"/>
-            <a:ext cx="438912" cy="438912"/>
-          </a:xfrm>
-          <a:prstGeom prst="rect">
-            <a:avLst/>
-          </a:prstGeom>
-        </p:spPr>
-      </p:pic>
-      <p:sp>
-        <p:nvSpPr>
-          <p:cNvPr id="29" name="mdpr:icon-and-text-aside-8429fc:item-4:block-29"/>
+          <p:cNvPr id="21" name="mdpr:icon-and-text-aside-8429fc:item-4:block-29"/>
           <p:cNvSpPr txBox="1"/>
           <p:nvPr/>
         </p:nvSpPr>
         <p:spPr>
           <a:xfrm>
-            <a:off x="7175754" y="4151376"/>
-            <a:ext cx="3961638" cy="1115568"/>
+            <a:off x="6528816" y="3913632"/>
+            <a:ext cx="4608576" cy="1591056"/>
           </a:xfrm>
           <a:prstGeom prst="rect">
             <a:avLst/>
@@ -15773,71 +14934,14 @@
       </p:sp>
       <p:sp>
         <p:nvSpPr>
-          <p:cNvPr id="18" name="Shape 12"/>
-          <p:cNvSpPr/>
-          <p:nvPr/>
-        </p:nvSpPr>
-        <p:spPr>
-          <a:xfrm>
-            <a:off x="976122" y="2130552"/>
-            <a:ext cx="585216" cy="585216"/>
-          </a:xfrm>
-          <a:prstGeom prst="roundRect">
-            <a:avLst>
-              <a:gd name="adj" fmla="val 6250"/>
-            </a:avLst>
-          </a:prstGeom>
-          <a:solidFill>
-            <a:srgbClr val="FFFFFF"/>
-          </a:solidFill>
-          <a:ln w="12700">
-            <a:solidFill>
-              <a:srgbClr val="E5E7EB"/>
-            </a:solidFill>
-            <a:prstDash val="solid"/>
-          </a:ln>
-        </p:spPr>
-      </p:sp>
-      <p:pic>
-        <p:nvPicPr>
-          <p:cNvPr id="19" name="Image 4" descr="verified icon from tabler-icons (MIT)">    </p:cNvPr>
-          <p:cNvPicPr>
-            <a:picLocks noChangeAspect="1"/>
-          </p:cNvPicPr>
-          <p:nvPr/>
-        </p:nvPicPr>
-        <p:blipFill>
-          <a:blip r:embed="rId9">
-            <a:extLst>
-              <a:ext uri="{96DAC541-7B7A-43D3-8B79-37D633B846F1}">
-                <asvg:svgBlip xmlns:asvg="http://schemas.microsoft.com/office/drawing/2016/SVG/main" r:embed="rId10"/>
-              </a:ext>
-            </a:extLst>
-          </a:blip>
-          <a:stretch>
-            <a:fillRect/>
-          </a:stretch>
-        </p:blipFill>
-        <p:spPr>
-          <a:xfrm>
-            <a:off x="1049274" y="2203704"/>
-            <a:ext cx="438912" cy="438912"/>
-          </a:xfrm>
-          <a:prstGeom prst="rect">
-            <a:avLst/>
-          </a:prstGeom>
-        </p:spPr>
-      </p:pic>
-      <p:sp>
-        <p:nvSpPr>
-          <p:cNvPr id="20" name="mdpr:overflow-guard-f8d03e:item-1:block-31"/>
+          <p:cNvPr id="18" name="mdpr:overflow-guard-f8d03e:item-1:block-31"/>
           <p:cNvSpPr txBox="1"/>
           <p:nvPr/>
         </p:nvSpPr>
         <p:spPr>
           <a:xfrm>
-            <a:off x="1689354" y="1865376"/>
-            <a:ext cx="3961638" cy="1115568"/>
+            <a:off x="1042416" y="1627632"/>
+            <a:ext cx="4608576" cy="1591056"/>
           </a:xfrm>
           <a:prstGeom prst="rect">
             <a:avLst/>
@@ -15889,71 +14993,14 @@
       </p:sp>
       <p:sp>
         <p:nvSpPr>
-          <p:cNvPr id="21" name="Shape 14"/>
-          <p:cNvSpPr/>
-          <p:nvPr/>
-        </p:nvSpPr>
-        <p:spPr>
-          <a:xfrm>
-            <a:off x="6462522" y="2130552"/>
-            <a:ext cx="585216" cy="585216"/>
-          </a:xfrm>
-          <a:prstGeom prst="roundRect">
-            <a:avLst>
-              <a:gd name="adj" fmla="val 6250"/>
-            </a:avLst>
-          </a:prstGeom>
-          <a:solidFill>
-            <a:srgbClr val="FFFFFF"/>
-          </a:solidFill>
-          <a:ln w="12700">
-            <a:solidFill>
-              <a:srgbClr val="E5E7EB"/>
-            </a:solidFill>
-            <a:prstDash val="solid"/>
-          </a:ln>
-        </p:spPr>
-      </p:sp>
-      <p:pic>
-        <p:nvPicPr>
-          <p:cNvPr id="22" name="Image 5" descr="table icon from tabler-icons (MIT)">    </p:cNvPr>
-          <p:cNvPicPr>
-            <a:picLocks noChangeAspect="1"/>
-          </p:cNvPicPr>
-          <p:nvPr/>
-        </p:nvPicPr>
-        <p:blipFill>
-          <a:blip r:embed="rId11">
-            <a:extLst>
-              <a:ext uri="{96DAC541-7B7A-43D3-8B79-37D633B846F1}">
-                <asvg:svgBlip xmlns:asvg="http://schemas.microsoft.com/office/drawing/2016/SVG/main" r:embed="rId12"/>
-              </a:ext>
-            </a:extLst>
-          </a:blip>
-          <a:stretch>
-            <a:fillRect/>
-          </a:stretch>
-        </p:blipFill>
-        <p:spPr>
-          <a:xfrm>
-            <a:off x="6535674" y="2203704"/>
-            <a:ext cx="438912" cy="438912"/>
-          </a:xfrm>
-          <a:prstGeom prst="rect">
-            <a:avLst/>
-          </a:prstGeom>
-        </p:spPr>
-      </p:pic>
-      <p:sp>
-        <p:nvSpPr>
-          <p:cNvPr id="23" name="mdpr:overflow-guard-f8d03e:item-2:block-31"/>
+          <p:cNvPr id="19" name="mdpr:overflow-guard-f8d03e:item-2:block-31"/>
           <p:cNvSpPr txBox="1"/>
           <p:nvPr/>
         </p:nvSpPr>
         <p:spPr>
           <a:xfrm>
-            <a:off x="7175754" y="1697736"/>
-            <a:ext cx="3961638" cy="1450848"/>
+            <a:off x="6528816" y="1627632"/>
+            <a:ext cx="4608576" cy="1591056"/>
           </a:xfrm>
           <a:prstGeom prst="rect">
             <a:avLst/>
@@ -16005,71 +15052,14 @@
       </p:sp>
       <p:sp>
         <p:nvSpPr>
-          <p:cNvPr id="24" name="Shape 16"/>
-          <p:cNvSpPr/>
-          <p:nvPr/>
-        </p:nvSpPr>
-        <p:spPr>
-          <a:xfrm>
-            <a:off x="976122" y="4416552"/>
-            <a:ext cx="585216" cy="585216"/>
-          </a:xfrm>
-          <a:prstGeom prst="roundRect">
-            <a:avLst>
-              <a:gd name="adj" fmla="val 6250"/>
-            </a:avLst>
-          </a:prstGeom>
-          <a:solidFill>
-            <a:srgbClr val="FFFFFF"/>
-          </a:solidFill>
-          <a:ln w="12700">
-            <a:solidFill>
-              <a:srgbClr val="E5E7EB"/>
-            </a:solidFill>
-            <a:prstDash val="solid"/>
-          </a:ln>
-        </p:spPr>
-      </p:sp>
-      <p:pic>
-        <p:nvPicPr>
-          <p:cNvPr id="25" name="Image 6" descr="article icon from tabler-icons (MIT)">    </p:cNvPr>
-          <p:cNvPicPr>
-            <a:picLocks noChangeAspect="1"/>
-          </p:cNvPicPr>
-          <p:nvPr/>
-        </p:nvPicPr>
-        <p:blipFill>
-          <a:blip r:embed="rId13">
-            <a:extLst>
-              <a:ext uri="{96DAC541-7B7A-43D3-8B79-37D633B846F1}">
-                <asvg:svgBlip xmlns:asvg="http://schemas.microsoft.com/office/drawing/2016/SVG/main" r:embed="rId14"/>
-              </a:ext>
-            </a:extLst>
-          </a:blip>
-          <a:stretch>
-            <a:fillRect/>
-          </a:stretch>
-        </p:blipFill>
-        <p:spPr>
-          <a:xfrm>
-            <a:off x="1049274" y="4489704"/>
-            <a:ext cx="438912" cy="438912"/>
-          </a:xfrm>
-          <a:prstGeom prst="rect">
-            <a:avLst/>
-          </a:prstGeom>
-        </p:spPr>
-      </p:pic>
-      <p:sp>
-        <p:nvSpPr>
-          <p:cNvPr id="26" name="mdpr:overflow-guard-f8d03e:item-3:block-31"/>
+          <p:cNvPr id="20" name="mdpr:overflow-guard-f8d03e:item-3:block-31"/>
           <p:cNvSpPr txBox="1"/>
           <p:nvPr/>
         </p:nvSpPr>
         <p:spPr>
           <a:xfrm>
-            <a:off x="1689354" y="4151376"/>
-            <a:ext cx="3961638" cy="1115568"/>
+            <a:off x="1042416" y="3913632"/>
+            <a:ext cx="4608576" cy="1591056"/>
           </a:xfrm>
           <a:prstGeom prst="rect">
             <a:avLst/>
@@ -16121,71 +15111,14 @@
       </p:sp>
       <p:sp>
         <p:nvSpPr>
-          <p:cNvPr id="27" name="Shape 18"/>
-          <p:cNvSpPr/>
-          <p:nvPr/>
-        </p:nvSpPr>
-        <p:spPr>
-          <a:xfrm>
-            <a:off x="6462522" y="4416552"/>
-            <a:ext cx="585216" cy="585216"/>
-          </a:xfrm>
-          <a:prstGeom prst="roundRect">
-            <a:avLst>
-              <a:gd name="adj" fmla="val 6250"/>
-            </a:avLst>
-          </a:prstGeom>
-          <a:solidFill>
-            <a:srgbClr val="FFFFFF"/>
-          </a:solidFill>
-          <a:ln w="12700">
-            <a:solidFill>
-              <a:srgbClr val="E5E7EB"/>
-            </a:solidFill>
-            <a:prstDash val="solid"/>
-          </a:ln>
-        </p:spPr>
-      </p:sp>
-      <p:pic>
-        <p:nvPicPr>
-          <p:cNvPr id="28" name="Image 7" descr="article icon from tabler-icons (MIT)">    </p:cNvPr>
-          <p:cNvPicPr>
-            <a:picLocks noChangeAspect="1"/>
-          </p:cNvPicPr>
-          <p:nvPr/>
-        </p:nvPicPr>
-        <p:blipFill>
-          <a:blip r:embed="rId15">
-            <a:extLst>
-              <a:ext uri="{96DAC541-7B7A-43D3-8B79-37D633B846F1}">
-                <asvg:svgBlip xmlns:asvg="http://schemas.microsoft.com/office/drawing/2016/SVG/main" r:embed="rId16"/>
-              </a:ext>
-            </a:extLst>
-          </a:blip>
-          <a:stretch>
-            <a:fillRect/>
-          </a:stretch>
-        </p:blipFill>
-        <p:spPr>
-          <a:xfrm>
-            <a:off x="6535674" y="4489704"/>
-            <a:ext cx="438912" cy="438912"/>
-          </a:xfrm>
-          <a:prstGeom prst="rect">
-            <a:avLst/>
-          </a:prstGeom>
-        </p:spPr>
-      </p:pic>
-      <p:sp>
-        <p:nvSpPr>
-          <p:cNvPr id="29" name="mdpr:overflow-guard-f8d03e:item-4:block-31"/>
+          <p:cNvPr id="21" name="mdpr:overflow-guard-f8d03e:item-4:block-31"/>
           <p:cNvSpPr txBox="1"/>
           <p:nvPr/>
         </p:nvSpPr>
         <p:spPr>
           <a:xfrm>
-            <a:off x="7175754" y="4151376"/>
-            <a:ext cx="3961638" cy="1115568"/>
+            <a:off x="6528816" y="3913632"/>
+            <a:ext cx="4608576" cy="1591056"/>
           </a:xfrm>
           <a:prstGeom prst="rect">
             <a:avLst/>
@@ -18114,71 +17047,14 @@
       </p:sp>
       <p:sp>
         <p:nvSpPr>
-          <p:cNvPr id="17" name="Shape 12"/>
-          <p:cNvSpPr/>
-          <p:nvPr/>
-        </p:nvSpPr>
-        <p:spPr>
-          <a:xfrm>
-            <a:off x="1097280" y="2140428"/>
-            <a:ext cx="474025" cy="474025"/>
-          </a:xfrm>
-          <a:prstGeom prst="roundRect">
-            <a:avLst>
-              <a:gd name="adj" fmla="val 7716"/>
-            </a:avLst>
-          </a:prstGeom>
-          <a:solidFill>
-            <a:srgbClr val="FFFFFF"/>
-          </a:solidFill>
-          <a:ln w="12700">
-            <a:solidFill>
-              <a:srgbClr val="E5E7EB"/>
-            </a:solidFill>
-            <a:prstDash val="solid"/>
-          </a:ln>
-        </p:spPr>
-      </p:sp>
-      <p:pic>
-        <p:nvPicPr>
-          <p:cNvPr id="18" name="Image 3" descr="flow icon from tabler-icons (MIT)">    </p:cNvPr>
-          <p:cNvPicPr>
-            <a:picLocks noChangeAspect="1"/>
-          </p:cNvPicPr>
-          <p:nvPr/>
-        </p:nvPicPr>
-        <p:blipFill>
-          <a:blip r:embed="rId7">
-            <a:extLst>
-              <a:ext uri="{96DAC541-7B7A-43D3-8B79-37D633B846F1}">
-                <asvg:svgBlip xmlns:asvg="http://schemas.microsoft.com/office/drawing/2016/SVG/main" r:embed="rId8"/>
-              </a:ext>
-            </a:extLst>
-          </a:blip>
-          <a:stretch>
-            <a:fillRect/>
-          </a:stretch>
-        </p:blipFill>
-        <p:spPr>
-          <a:xfrm>
-            <a:off x="1170432" y="2213580"/>
-            <a:ext cx="327721" cy="327721"/>
-          </a:xfrm>
-          <a:prstGeom prst="rect">
-            <a:avLst/>
-          </a:prstGeom>
-        </p:spPr>
-      </p:pic>
-      <p:sp>
-        <p:nvSpPr>
-          <p:cNvPr id="19" name="mdpr:actions-output-review-326e07:item-1:block-41"/>
+          <p:cNvPr id="17" name="mdpr:actions-output-review-326e07:item-1:block-41"/>
           <p:cNvSpPr txBox="1"/>
           <p:nvPr/>
         </p:nvSpPr>
         <p:spPr>
           <a:xfrm>
-            <a:off x="1699321" y="1987296"/>
-            <a:ext cx="9255191" cy="780288"/>
+            <a:off x="1133856" y="1957548"/>
+            <a:ext cx="9820656" cy="839785"/>
           </a:xfrm>
           <a:prstGeom prst="rect">
             <a:avLst/>
@@ -18230,71 +17106,14 @@
       </p:sp>
       <p:sp>
         <p:nvSpPr>
-          <p:cNvPr id="20" name="Shape 14"/>
-          <p:cNvSpPr/>
-          <p:nvPr/>
-        </p:nvSpPr>
-        <p:spPr>
-          <a:xfrm>
-            <a:off x="1097280" y="3466308"/>
-            <a:ext cx="474025" cy="474025"/>
-          </a:xfrm>
-          <a:prstGeom prst="roundRect">
-            <a:avLst>
-              <a:gd name="adj" fmla="val 7716"/>
-            </a:avLst>
-          </a:prstGeom>
-          <a:solidFill>
-            <a:srgbClr val="FFFFFF"/>
-          </a:solidFill>
-          <a:ln w="12700">
-            <a:solidFill>
-              <a:srgbClr val="E5E7EB"/>
-            </a:solidFill>
-            <a:prstDash val="solid"/>
-          </a:ln>
-        </p:spPr>
-      </p:sp>
-      <p:pic>
-        <p:nvPicPr>
-          <p:cNvPr id="21" name="Image 4" descr="verified icon from tabler-icons (MIT)">    </p:cNvPr>
-          <p:cNvPicPr>
-            <a:picLocks noChangeAspect="1"/>
-          </p:cNvPicPr>
-          <p:nvPr/>
-        </p:nvPicPr>
-        <p:blipFill>
-          <a:blip r:embed="rId9">
-            <a:extLst>
-              <a:ext uri="{96DAC541-7B7A-43D3-8B79-37D633B846F1}">
-                <asvg:svgBlip xmlns:asvg="http://schemas.microsoft.com/office/drawing/2016/SVG/main" r:embed="rId10"/>
-              </a:ext>
-            </a:extLst>
-          </a:blip>
-          <a:stretch>
-            <a:fillRect/>
-          </a:stretch>
-        </p:blipFill>
-        <p:spPr>
-          <a:xfrm>
-            <a:off x="1170432" y="3539460"/>
-            <a:ext cx="327721" cy="327721"/>
-          </a:xfrm>
-          <a:prstGeom prst="rect">
-            <a:avLst/>
-          </a:prstGeom>
-        </p:spPr>
-      </p:pic>
-      <p:sp>
-        <p:nvSpPr>
-          <p:cNvPr id="22" name="mdpr:actions-output-review-326e07:item-2:block-41"/>
+          <p:cNvPr id="18" name="mdpr:actions-output-review-326e07:item-2:block-41"/>
           <p:cNvSpPr txBox="1"/>
           <p:nvPr/>
         </p:nvSpPr>
         <p:spPr>
           <a:xfrm>
-            <a:off x="1699321" y="3313176"/>
-            <a:ext cx="9255191" cy="780288"/>
+            <a:off x="1133856" y="3283428"/>
+            <a:ext cx="9820656" cy="839785"/>
           </a:xfrm>
           <a:prstGeom prst="rect">
             <a:avLst/>
@@ -18346,71 +17165,14 @@
       </p:sp>
       <p:sp>
         <p:nvSpPr>
-          <p:cNvPr id="23" name="Shape 16"/>
-          <p:cNvSpPr/>
-          <p:nvPr/>
-        </p:nvSpPr>
-        <p:spPr>
-          <a:xfrm>
-            <a:off x="1097280" y="4783044"/>
-            <a:ext cx="474025" cy="474025"/>
-          </a:xfrm>
-          <a:prstGeom prst="roundRect">
-            <a:avLst>
-              <a:gd name="adj" fmla="val 7716"/>
-            </a:avLst>
-          </a:prstGeom>
-          <a:solidFill>
-            <a:srgbClr val="FFFFFF"/>
-          </a:solidFill>
-          <a:ln w="12700">
-            <a:solidFill>
-              <a:srgbClr val="E5E7EB"/>
-            </a:solidFill>
-            <a:prstDash val="solid"/>
-          </a:ln>
-        </p:spPr>
-      </p:sp>
-      <p:pic>
-        <p:nvPicPr>
-          <p:cNvPr id="24" name="Image 5" descr="spark icon from tabler-icons (MIT)">    </p:cNvPr>
-          <p:cNvPicPr>
-            <a:picLocks noChangeAspect="1"/>
-          </p:cNvPicPr>
-          <p:nvPr/>
-        </p:nvPicPr>
-        <p:blipFill>
-          <a:blip r:embed="rId11">
-            <a:extLst>
-              <a:ext uri="{96DAC541-7B7A-43D3-8B79-37D633B846F1}">
-                <asvg:svgBlip xmlns:asvg="http://schemas.microsoft.com/office/drawing/2016/SVG/main" r:embed="rId12"/>
-              </a:ext>
-            </a:extLst>
-          </a:blip>
-          <a:stretch>
-            <a:fillRect/>
-          </a:stretch>
-        </p:blipFill>
-        <p:spPr>
-          <a:xfrm>
-            <a:off x="1170432" y="4856196"/>
-            <a:ext cx="327721" cy="327721"/>
-          </a:xfrm>
-          <a:prstGeom prst="rect">
-            <a:avLst/>
-          </a:prstGeom>
-        </p:spPr>
-      </p:pic>
-      <p:sp>
-        <p:nvSpPr>
-          <p:cNvPr id="25" name="mdpr:actions-output-review-326e07:item-3:block-41"/>
+          <p:cNvPr id="19" name="mdpr:actions-output-review-326e07:item-3:block-41"/>
           <p:cNvSpPr txBox="1"/>
           <p:nvPr/>
         </p:nvSpPr>
         <p:spPr>
           <a:xfrm>
-            <a:off x="1699321" y="4629912"/>
-            <a:ext cx="9255191" cy="780288"/>
+            <a:off x="1133856" y="4600164"/>
+            <a:ext cx="9820656" cy="839785"/>
           </a:xfrm>
           <a:prstGeom prst="rect">
             <a:avLst/>
@@ -19839,71 +18601,14 @@
       </p:sp>
       <p:sp>
         <p:nvSpPr>
-          <p:cNvPr id="17" name="Shape 12"/>
-          <p:cNvSpPr/>
-          <p:nvPr/>
-        </p:nvSpPr>
-        <p:spPr>
-          <a:xfrm>
-            <a:off x="1097280" y="2140428"/>
-            <a:ext cx="474025" cy="474025"/>
-          </a:xfrm>
-          <a:prstGeom prst="roundRect">
-            <a:avLst>
-              <a:gd name="adj" fmla="val 7716"/>
-            </a:avLst>
-          </a:prstGeom>
-          <a:solidFill>
-            <a:srgbClr val="FFFFFF"/>
-          </a:solidFill>
-          <a:ln w="12700">
-            <a:solidFill>
-              <a:srgbClr val="E5E7EB"/>
-            </a:solidFill>
-            <a:prstDash val="solid"/>
-          </a:ln>
-        </p:spPr>
-      </p:sp>
-      <p:pic>
-        <p:nvPicPr>
-          <p:cNvPr id="18" name="Image 3" descr="article icon from tabler-icons (MIT)">    </p:cNvPr>
-          <p:cNvPicPr>
-            <a:picLocks noChangeAspect="1"/>
-          </p:cNvPicPr>
-          <p:nvPr/>
-        </p:nvPicPr>
-        <p:blipFill>
-          <a:blip r:embed="rId7">
-            <a:extLst>
-              <a:ext uri="{96DAC541-7B7A-43D3-8B79-37D633B846F1}">
-                <asvg:svgBlip xmlns:asvg="http://schemas.microsoft.com/office/drawing/2016/SVG/main" r:embed="rId8"/>
-              </a:ext>
-            </a:extLst>
-          </a:blip>
-          <a:stretch>
-            <a:fillRect/>
-          </a:stretch>
-        </p:blipFill>
-        <p:spPr>
-          <a:xfrm>
-            <a:off x="1170432" y="2213580"/>
-            <a:ext cx="327721" cy="327721"/>
-          </a:xfrm>
-          <a:prstGeom prst="rect">
-            <a:avLst/>
-          </a:prstGeom>
-        </p:spPr>
-      </p:pic>
-      <p:sp>
-        <p:nvSpPr>
-          <p:cNvPr id="19" name="mdpr:1-2-32ac08:item-1:block-6-chunk-1"/>
+          <p:cNvPr id="17" name="mdpr:1-2-32ac08:item-1:block-6-chunk-1"/>
           <p:cNvSpPr txBox="1"/>
           <p:nvPr/>
         </p:nvSpPr>
         <p:spPr>
           <a:xfrm>
-            <a:off x="1699321" y="1987296"/>
-            <a:ext cx="9255191" cy="780288"/>
+            <a:off x="1133856" y="1957548"/>
+            <a:ext cx="9820656" cy="839785"/>
           </a:xfrm>
           <a:prstGeom prst="rect">
             <a:avLst/>
@@ -19955,71 +18660,14 @@
       </p:sp>
       <p:sp>
         <p:nvSpPr>
-          <p:cNvPr id="20" name="Shape 14"/>
-          <p:cNvSpPr/>
-          <p:nvPr/>
-        </p:nvSpPr>
-        <p:spPr>
-          <a:xfrm>
-            <a:off x="1097280" y="3466308"/>
-            <a:ext cx="474025" cy="474025"/>
-          </a:xfrm>
-          <a:prstGeom prst="roundRect">
-            <a:avLst>
-              <a:gd name="adj" fmla="val 7716"/>
-            </a:avLst>
-          </a:prstGeom>
-          <a:solidFill>
-            <a:srgbClr val="FFFFFF"/>
-          </a:solidFill>
-          <a:ln w="12700">
-            <a:solidFill>
-              <a:srgbClr val="E5E7EB"/>
-            </a:solidFill>
-            <a:prstDash val="solid"/>
-          </a:ln>
-        </p:spPr>
-      </p:sp>
-      <p:pic>
-        <p:nvPicPr>
-          <p:cNvPr id="21" name="Image 4" descr="chart icon from tabler-icons (MIT)">    </p:cNvPr>
-          <p:cNvPicPr>
-            <a:picLocks noChangeAspect="1"/>
-          </p:cNvPicPr>
-          <p:nvPr/>
-        </p:nvPicPr>
-        <p:blipFill>
-          <a:blip r:embed="rId9">
-            <a:extLst>
-              <a:ext uri="{96DAC541-7B7A-43D3-8B79-37D633B846F1}">
-                <asvg:svgBlip xmlns:asvg="http://schemas.microsoft.com/office/drawing/2016/SVG/main" r:embed="rId10"/>
-              </a:ext>
-            </a:extLst>
-          </a:blip>
-          <a:stretch>
-            <a:fillRect/>
-          </a:stretch>
-        </p:blipFill>
-        <p:spPr>
-          <a:xfrm>
-            <a:off x="1170432" y="3539460"/>
-            <a:ext cx="327721" cy="327721"/>
-          </a:xfrm>
-          <a:prstGeom prst="rect">
-            <a:avLst/>
-          </a:prstGeom>
-        </p:spPr>
-      </p:pic>
-      <p:sp>
-        <p:nvSpPr>
-          <p:cNvPr id="22" name="mdpr:1-2-32ac08:item-2:block-6-chunk-1"/>
+          <p:cNvPr id="18" name="mdpr:1-2-32ac08:item-2:block-6-chunk-1"/>
           <p:cNvSpPr txBox="1"/>
           <p:nvPr/>
         </p:nvSpPr>
         <p:spPr>
           <a:xfrm>
-            <a:off x="1699321" y="3313176"/>
-            <a:ext cx="9255191" cy="780288"/>
+            <a:off x="1133856" y="3283428"/>
+            <a:ext cx="9820656" cy="839785"/>
           </a:xfrm>
           <a:prstGeom prst="rect">
             <a:avLst/>
@@ -20071,71 +18719,14 @@
       </p:sp>
       <p:sp>
         <p:nvSpPr>
-          <p:cNvPr id="23" name="Shape 16"/>
-          <p:cNvSpPr/>
-          <p:nvPr/>
-        </p:nvSpPr>
-        <p:spPr>
-          <a:xfrm>
-            <a:off x="1097280" y="4783044"/>
-            <a:ext cx="474025" cy="474025"/>
-          </a:xfrm>
-          <a:prstGeom prst="roundRect">
-            <a:avLst>
-              <a:gd name="adj" fmla="val 7716"/>
-            </a:avLst>
-          </a:prstGeom>
-          <a:solidFill>
-            <a:srgbClr val="FFFFFF"/>
-          </a:solidFill>
-          <a:ln w="12700">
-            <a:solidFill>
-              <a:srgbClr val="E5E7EB"/>
-            </a:solidFill>
-            <a:prstDash val="solid"/>
-          </a:ln>
-        </p:spPr>
-      </p:sp>
-      <p:pic>
-        <p:nvPicPr>
-          <p:cNvPr id="24" name="Image 5" descr="article icon from tabler-icons (MIT)">    </p:cNvPr>
-          <p:cNvPicPr>
-            <a:picLocks noChangeAspect="1"/>
-          </p:cNvPicPr>
-          <p:nvPr/>
-        </p:nvPicPr>
-        <p:blipFill>
-          <a:blip r:embed="rId11">
-            <a:extLst>
-              <a:ext uri="{96DAC541-7B7A-43D3-8B79-37D633B846F1}">
-                <asvg:svgBlip xmlns:asvg="http://schemas.microsoft.com/office/drawing/2016/SVG/main" r:embed="rId12"/>
-              </a:ext>
-            </a:extLst>
-          </a:blip>
-          <a:stretch>
-            <a:fillRect/>
-          </a:stretch>
-        </p:blipFill>
-        <p:spPr>
-          <a:xfrm>
-            <a:off x="1170432" y="4856196"/>
-            <a:ext cx="327721" cy="327721"/>
-          </a:xfrm>
-          <a:prstGeom prst="rect">
-            <a:avLst/>
-          </a:prstGeom>
-        </p:spPr>
-      </p:pic>
-      <p:sp>
-        <p:nvSpPr>
-          <p:cNvPr id="25" name="mdpr:1-2-32ac08:item-3:block-6-chunk-1"/>
+          <p:cNvPr id="19" name="mdpr:1-2-32ac08:item-3:block-6-chunk-1"/>
           <p:cNvSpPr txBox="1"/>
           <p:nvPr/>
         </p:nvSpPr>
         <p:spPr>
           <a:xfrm>
-            <a:off x="1699321" y="4629912"/>
-            <a:ext cx="9255191" cy="780288"/>
+            <a:off x="1133856" y="4600164"/>
+            <a:ext cx="9820656" cy="839785"/>
           </a:xfrm>
           <a:prstGeom prst="rect">
             <a:avLst/>
@@ -21057,71 +19648,14 @@
       </p:sp>
       <p:sp>
         <p:nvSpPr>
-          <p:cNvPr id="17" name="Shape 12"/>
-          <p:cNvSpPr/>
-          <p:nvPr/>
-        </p:nvSpPr>
-        <p:spPr>
-          <a:xfrm>
-            <a:off x="1097280" y="2140428"/>
-            <a:ext cx="474025" cy="474025"/>
-          </a:xfrm>
-          <a:prstGeom prst="roundRect">
-            <a:avLst>
-              <a:gd name="adj" fmla="val 7716"/>
-            </a:avLst>
-          </a:prstGeom>
-          <a:solidFill>
-            <a:srgbClr val="FFFFFF"/>
-          </a:solidFill>
-          <a:ln w="12700">
-            <a:solidFill>
-              <a:srgbClr val="E5E7EB"/>
-            </a:solidFill>
-            <a:prstDash val="solid"/>
-          </a:ln>
-        </p:spPr>
-      </p:sp>
-      <p:pic>
-        <p:nvPicPr>
-          <p:cNvPr id="18" name="Image 3" descr="article icon from tabler-icons (MIT)">    </p:cNvPr>
-          <p:cNvPicPr>
-            <a:picLocks noChangeAspect="1"/>
-          </p:cNvPicPr>
-          <p:nvPr/>
-        </p:nvPicPr>
-        <p:blipFill>
-          <a:blip r:embed="rId7">
-            <a:extLst>
-              <a:ext uri="{96DAC541-7B7A-43D3-8B79-37D633B846F1}">
-                <asvg:svgBlip xmlns:asvg="http://schemas.microsoft.com/office/drawing/2016/SVG/main" r:embed="rId8"/>
-              </a:ext>
-            </a:extLst>
-          </a:blip>
-          <a:stretch>
-            <a:fillRect/>
-          </a:stretch>
-        </p:blipFill>
-        <p:spPr>
-          <a:xfrm>
-            <a:off x="1170432" y="2213580"/>
-            <a:ext cx="327721" cy="327721"/>
-          </a:xfrm>
-          <a:prstGeom prst="rect">
-            <a:avLst/>
-          </a:prstGeom>
-        </p:spPr>
-      </p:pic>
-      <p:sp>
-        <p:nvSpPr>
-          <p:cNvPr id="19" name="mdpr:1-2-dfa474:item-1:block-8-chunk-1"/>
+          <p:cNvPr id="17" name="mdpr:1-2-dfa474:item-1:block-8-chunk-1"/>
           <p:cNvSpPr txBox="1"/>
           <p:nvPr/>
         </p:nvSpPr>
         <p:spPr>
           <a:xfrm>
-            <a:off x="1699321" y="1987296"/>
-            <a:ext cx="9255191" cy="780288"/>
+            <a:off x="1133856" y="1957548"/>
+            <a:ext cx="9820656" cy="839785"/>
           </a:xfrm>
           <a:prstGeom prst="rect">
             <a:avLst/>
@@ -21173,71 +19707,14 @@
       </p:sp>
       <p:sp>
         <p:nvSpPr>
-          <p:cNvPr id="20" name="Shape 14"/>
-          <p:cNvSpPr/>
-          <p:nvPr/>
-        </p:nvSpPr>
-        <p:spPr>
-          <a:xfrm>
-            <a:off x="1097280" y="3466308"/>
-            <a:ext cx="474025" cy="474025"/>
-          </a:xfrm>
-          <a:prstGeom prst="roundRect">
-            <a:avLst>
-              <a:gd name="adj" fmla="val 7716"/>
-            </a:avLst>
-          </a:prstGeom>
-          <a:solidFill>
-            <a:srgbClr val="FFFFFF"/>
-          </a:solidFill>
-          <a:ln w="12700">
-            <a:solidFill>
-              <a:srgbClr val="E5E7EB"/>
-            </a:solidFill>
-            <a:prstDash val="solid"/>
-          </a:ln>
-        </p:spPr>
-      </p:sp>
-      <p:pic>
-        <p:nvPicPr>
-          <p:cNvPr id="21" name="Image 4" descr="article icon from tabler-icons (MIT)">    </p:cNvPr>
-          <p:cNvPicPr>
-            <a:picLocks noChangeAspect="1"/>
-          </p:cNvPicPr>
-          <p:nvPr/>
-        </p:nvPicPr>
-        <p:blipFill>
-          <a:blip r:embed="rId9">
-            <a:extLst>
-              <a:ext uri="{96DAC541-7B7A-43D3-8B79-37D633B846F1}">
-                <asvg:svgBlip xmlns:asvg="http://schemas.microsoft.com/office/drawing/2016/SVG/main" r:embed="rId10"/>
-              </a:ext>
-            </a:extLst>
-          </a:blip>
-          <a:stretch>
-            <a:fillRect/>
-          </a:stretch>
-        </p:blipFill>
-        <p:spPr>
-          <a:xfrm>
-            <a:off x="1170432" y="3539460"/>
-            <a:ext cx="327721" cy="327721"/>
-          </a:xfrm>
-          <a:prstGeom prst="rect">
-            <a:avLst/>
-          </a:prstGeom>
-        </p:spPr>
-      </p:pic>
-      <p:sp>
-        <p:nvSpPr>
-          <p:cNvPr id="22" name="mdpr:1-2-dfa474:item-2:block-8-chunk-1"/>
+          <p:cNvPr id="18" name="mdpr:1-2-dfa474:item-2:block-8-chunk-1"/>
           <p:cNvSpPr txBox="1"/>
           <p:nvPr/>
         </p:nvSpPr>
         <p:spPr>
           <a:xfrm>
-            <a:off x="1699321" y="3313176"/>
-            <a:ext cx="9255191" cy="780288"/>
+            <a:off x="1133856" y="3283428"/>
+            <a:ext cx="9820656" cy="839785"/>
           </a:xfrm>
           <a:prstGeom prst="rect">
             <a:avLst/>
@@ -21289,71 +19766,14 @@
       </p:sp>
       <p:sp>
         <p:nvSpPr>
-          <p:cNvPr id="23" name="Shape 16"/>
-          <p:cNvSpPr/>
-          <p:nvPr/>
-        </p:nvSpPr>
-        <p:spPr>
-          <a:xfrm>
-            <a:off x="1097280" y="4783044"/>
-            <a:ext cx="474025" cy="474025"/>
-          </a:xfrm>
-          <a:prstGeom prst="roundRect">
-            <a:avLst>
-              <a:gd name="adj" fmla="val 7716"/>
-            </a:avLst>
-          </a:prstGeom>
-          <a:solidFill>
-            <a:srgbClr val="FFFFFF"/>
-          </a:solidFill>
-          <a:ln w="12700">
-            <a:solidFill>
-              <a:srgbClr val="E5E7EB"/>
-            </a:solidFill>
-            <a:prstDash val="solid"/>
-          </a:ln>
-        </p:spPr>
-      </p:sp>
-      <p:pic>
-        <p:nvPicPr>
-          <p:cNvPr id="24" name="Image 5" descr="article icon from tabler-icons (MIT)">    </p:cNvPr>
-          <p:cNvPicPr>
-            <a:picLocks noChangeAspect="1"/>
-          </p:cNvPicPr>
-          <p:nvPr/>
-        </p:nvPicPr>
-        <p:blipFill>
-          <a:blip r:embed="rId11">
-            <a:extLst>
-              <a:ext uri="{96DAC541-7B7A-43D3-8B79-37D633B846F1}">
-                <asvg:svgBlip xmlns:asvg="http://schemas.microsoft.com/office/drawing/2016/SVG/main" r:embed="rId12"/>
-              </a:ext>
-            </a:extLst>
-          </a:blip>
-          <a:stretch>
-            <a:fillRect/>
-          </a:stretch>
-        </p:blipFill>
-        <p:spPr>
-          <a:xfrm>
-            <a:off x="1170432" y="4856196"/>
-            <a:ext cx="327721" cy="327721"/>
-          </a:xfrm>
-          <a:prstGeom prst="rect">
-            <a:avLst/>
-          </a:prstGeom>
-        </p:spPr>
-      </p:pic>
-      <p:sp>
-        <p:nvSpPr>
-          <p:cNvPr id="25" name="mdpr:1-2-dfa474:item-3:block-8-chunk-1"/>
+          <p:cNvPr id="19" name="mdpr:1-2-dfa474:item-3:block-8-chunk-1"/>
           <p:cNvSpPr txBox="1"/>
           <p:nvPr/>
         </p:nvSpPr>
         <p:spPr>
           <a:xfrm>
-            <a:off x="1699321" y="4629912"/>
-            <a:ext cx="9255191" cy="780288"/>
+            <a:off x="1133856" y="4600164"/>
+            <a:ext cx="9820656" cy="839785"/>
           </a:xfrm>
           <a:prstGeom prst="rect">
             <a:avLst/>

--- a/docs/theme-preview/pptx/minimalism.pptx
+++ b/docs/theme-preview/pptx/minimalism.pptx
@@ -4018,16 +4018,76 @@
           </a:ln>
         </p:spPr>
       </p:sp>
-      <p:sp>
-        <p:nvSpPr>
-          <p:cNvPr id="9" name="Shape 7"/>
-          <p:cNvSpPr/>
-          <p:nvPr/>
-        </p:nvSpPr>
-        <p:spPr>
-          <a:xfrm>
-            <a:off x="822960" y="1554480"/>
-            <a:ext cx="4937760" cy="73152"/>
+      <p:pic>
+        <p:nvPicPr>
+          <p:cNvPr id="9" name="Image 0" descr="preencoded.png">    </p:cNvPr>
+          <p:cNvPicPr>
+            <a:picLocks noChangeAspect="1"/>
+          </p:cNvPicPr>
+          <p:nvPr/>
+        </p:nvPicPr>
+        <p:blipFill>
+          <a:blip r:embed="rId1">
+            <a:extLst>
+              <a:ext uri="{96DAC541-7B7A-43D3-8B79-37D633B846F1}">
+                <asvg:svgBlip xmlns:asvg="http://schemas.microsoft.com/office/drawing/2016/SVG/main" r:embed="rId2"/>
+              </a:ext>
+            </a:extLst>
+          </a:blip>
+          <a:stretch>
+            <a:fillRect/>
+          </a:stretch>
+        </p:blipFill>
+        <p:spPr>
+          <a:xfrm>
+            <a:off x="914400" y="2523744"/>
+            <a:ext cx="10241280" cy="1024128"/>
+          </a:xfrm>
+          <a:prstGeom prst="rect">
+            <a:avLst/>
+          </a:prstGeom>
+        </p:spPr>
+      </p:pic>
+      <p:pic>
+        <p:nvPicPr>
+          <p:cNvPr id="10" name="Image 1" descr="preencoded.png">    </p:cNvPr>
+          <p:cNvPicPr>
+            <a:picLocks noChangeAspect="1"/>
+          </p:cNvPicPr>
+          <p:nvPr/>
+        </p:nvPicPr>
+        <p:blipFill>
+          <a:blip r:embed="rId3">
+            <a:extLst>
+              <a:ext uri="{96DAC541-7B7A-43D3-8B79-37D633B846F1}">
+                <asvg:svgBlip xmlns:asvg="http://schemas.microsoft.com/office/drawing/2016/SVG/main" r:embed="rId4"/>
+              </a:ext>
+            </a:extLst>
+          </a:blip>
+          <a:stretch>
+            <a:fillRect/>
+          </a:stretch>
+        </p:blipFill>
+        <p:spPr>
+          <a:xfrm>
+            <a:off x="914400" y="3849624"/>
+            <a:ext cx="10241280" cy="1024128"/>
+          </a:xfrm>
+          <a:prstGeom prst="rect">
+            <a:avLst/>
+          </a:prstGeom>
+        </p:spPr>
+      </p:pic>
+      <p:sp>
+        <p:nvSpPr>
+          <p:cNvPr id="11" name="Shape 7"/>
+          <p:cNvSpPr/>
+          <p:nvPr/>
+        </p:nvSpPr>
+        <p:spPr>
+          <a:xfrm>
+            <a:off x="914400" y="2523744"/>
+            <a:ext cx="73152" cy="1024128"/>
           </a:xfrm>
           <a:prstGeom prst="rect">
             <a:avLst/>
@@ -4047,24 +4107,24 @@
       </p:sp>
       <p:sp>
         <p:nvSpPr>
-          <p:cNvPr id="10" name="Shape 8"/>
-          <p:cNvSpPr/>
-          <p:nvPr/>
-        </p:nvSpPr>
-        <p:spPr>
-          <a:xfrm>
-            <a:off x="6400800" y="1554480"/>
-            <a:ext cx="4937760" cy="73152"/>
+          <p:cNvPr id="12" name="Shape 8"/>
+          <p:cNvSpPr/>
+          <p:nvPr/>
+        </p:nvSpPr>
+        <p:spPr>
+          <a:xfrm>
+            <a:off x="914400" y="3849624"/>
+            <a:ext cx="73152" cy="1024128"/>
           </a:xfrm>
           <a:prstGeom prst="rect">
             <a:avLst/>
           </a:prstGeom>
           <a:solidFill>
-            <a:srgbClr val="111827"/>
+            <a:srgbClr val="E5E7EB"/>
           </a:solidFill>
           <a:ln w="12700">
             <a:solidFill>
-              <a:srgbClr val="111827">
+              <a:srgbClr val="E5E7EB">
                 <a:alpha val="0"/>
               </a:srgbClr>
             </a:solidFill>
@@ -4074,7 +4134,7 @@
       </p:sp>
       <p:sp>
         <p:nvSpPr>
-          <p:cNvPr id="11" name="mdpr:2-2-a9df10:title:__title:2-2-a9df10"/>
+          <p:cNvPr id="13" name="mdpr:2-2-a9df10:title:__title:2-2-a9df10"/>
           <p:cNvSpPr txBox="1"/>
           <p:nvPr/>
         </p:nvSpPr>
@@ -4108,7 +4168,24 @@
                 <a:ea typeface="Pretendard" pitchFamily="34" charset="-122"/>
                 <a:cs typeface="Pretendard" pitchFamily="34" charset="-120"/>
               </a:rPr>
-              <a:t>Semantic Blocks (Cont. 2/2)</a:t>
+              <a:t>Semantic Blocks</a:t>
+            </a:r>
+            <a:pPr algn="ctr" indent="0" marL="0">
+              <a:lnSpc>
+                <a:spcPct val="120000"/>
+              </a:lnSpc>
+              <a:buNone/>
+            </a:pPr>
+            <a:r>
+              <a:rPr lang="en-US" sz="2000" dirty="0">
+                <a:solidFill>
+                  <a:srgbClr val="949494"/>
+                </a:solidFill>
+                <a:latin typeface="Pretendard" pitchFamily="34" charset="0"/>
+                <a:ea typeface="Pretendard" pitchFamily="34" charset="-122"/>
+                <a:cs typeface="Pretendard" pitchFamily="34" charset="-120"/>
+              </a:rPr>
+              <a:t> (Cont. 2/2)</a:t>
             </a:r>
             <a:endParaRPr lang="en-US" sz="3400" dirty="0"/>
           </a:p>
@@ -4116,14 +4193,14 @@
       </p:sp>
       <p:sp>
         <p:nvSpPr>
-          <p:cNvPr id="12" name="mdpr:2-2-a9df10:left:block-10-chunk-2"/>
+          <p:cNvPr id="14" name="mdpr:2-2-a9df10:item-1:block-10-chunk-2"/>
           <p:cNvSpPr txBox="1"/>
           <p:nvPr/>
         </p:nvSpPr>
         <p:spPr>
           <a:xfrm>
-            <a:off x="896112" y="1664208"/>
-            <a:ext cx="4791456" cy="4169664"/>
+            <a:off x="1133856" y="2615916"/>
+            <a:ext cx="9820656" cy="839785"/>
           </a:xfrm>
           <a:prstGeom prst="rect">
             <a:avLst/>
@@ -4132,7 +4209,7 @@
           <a:ln/>
         </p:spPr>
         <p:txBody>
-          <a:bodyPr wrap="square" lIns="0" tIns="25400" rIns="25400" bIns="0" rtlCol="0" anchor="t"/>
+          <a:bodyPr wrap="square" lIns="0" tIns="25400" rIns="25400" bIns="0" rtlCol="0" anchor="ctr"/>
           <a:lstStyle/>
           <a:p>
             <a:pPr algn="l" indent="0" marL="0">
@@ -4150,7 +4227,7 @@
                 <a:ea typeface="Pretendard" pitchFamily="34" charset="-122"/>
                 <a:cs typeface="Pretendard" pitchFamily="34" charset="-120"/>
               </a:rPr>
-              <a:t>- Constraint:</a:t>
+              <a:t>Constraint:</a:t>
             </a:r>
             <a:pPr algn="l" indent="0" marL="0">
               <a:lnSpc>
@@ -4175,14 +4252,14 @@
       </p:sp>
       <p:sp>
         <p:nvSpPr>
-          <p:cNvPr id="13" name="mdpr:2-2-a9df10:right:block-10-chunk-2"/>
+          <p:cNvPr id="15" name="mdpr:2-2-a9df10:item-2:block-10-chunk-2"/>
           <p:cNvSpPr txBox="1"/>
           <p:nvPr/>
         </p:nvSpPr>
         <p:spPr>
           <a:xfrm>
-            <a:off x="6473952" y="1664208"/>
-            <a:ext cx="4791456" cy="4169664"/>
+            <a:off x="1133856" y="3941796"/>
+            <a:ext cx="9820656" cy="839785"/>
           </a:xfrm>
           <a:prstGeom prst="rect">
             <a:avLst/>
@@ -4191,7 +4268,7 @@
           <a:ln/>
         </p:spPr>
         <p:txBody>
-          <a:bodyPr wrap="square" lIns="0" tIns="25400" rIns="25400" bIns="0" rtlCol="0" anchor="t"/>
+          <a:bodyPr wrap="square" lIns="0" tIns="25400" rIns="25400" bIns="0" rtlCol="0" anchor="ctr"/>
           <a:lstStyle/>
           <a:p>
             <a:pPr algn="l" indent="0" marL="0">
@@ -4209,7 +4286,7 @@
                 <a:ea typeface="Pretendard" pitchFamily="34" charset="-122"/>
                 <a:cs typeface="Pretendard" pitchFamily="34" charset="-120"/>
               </a:rPr>
-              <a:t>- Emphasis</a:t>
+              <a:t>Emphasis</a:t>
             </a:r>
             <a:pPr algn="l" indent="0" marL="0">
               <a:lnSpc>
@@ -4719,7 +4796,7 @@
               <a:buNone/>
             </a:pPr>
             <a:r>
-              <a:rPr lang="en-US" sz="1500" b="1" dirty="0">
+              <a:rPr lang="en-US" sz="1600" b="1" dirty="0">
                 <a:solidFill>
                   <a:srgbClr val="FFFFFF"/>
                 </a:solidFill>
@@ -4729,7 +4806,7 @@
               </a:rPr>
               <a:t>1</a:t>
             </a:r>
-            <a:endParaRPr lang="en-US" sz="1500" dirty="0"/>
+            <a:endParaRPr lang="en-US" sz="1600" dirty="0"/>
           </a:p>
         </p:txBody>
       </p:sp>
@@ -4895,7 +4972,7 @@
               <a:buNone/>
             </a:pPr>
             <a:r>
-              <a:rPr lang="en-US" sz="1500" b="1" dirty="0">
+              <a:rPr lang="en-US" sz="1600" b="1" dirty="0">
                 <a:solidFill>
                   <a:srgbClr val="FFFFFF"/>
                 </a:solidFill>
@@ -4905,7 +4982,7 @@
               </a:rPr>
               <a:t>2</a:t>
             </a:r>
-            <a:endParaRPr lang="en-US" sz="1500" dirty="0"/>
+            <a:endParaRPr lang="en-US" sz="1600" dirty="0"/>
           </a:p>
         </p:txBody>
       </p:sp>
@@ -5071,7 +5148,7 @@
               <a:buNone/>
             </a:pPr>
             <a:r>
-              <a:rPr lang="en-US" sz="1500" b="1" dirty="0">
+              <a:rPr lang="en-US" sz="1600" b="1" dirty="0">
                 <a:solidFill>
                   <a:srgbClr val="FFFFFF"/>
                 </a:solidFill>
@@ -5081,7 +5158,7 @@
               </a:rPr>
               <a:t>3</a:t>
             </a:r>
-            <a:endParaRPr lang="en-US" sz="1500" dirty="0"/>
+            <a:endParaRPr lang="en-US" sz="1600" dirty="0"/>
           </a:p>
         </p:txBody>
       </p:sp>
@@ -5247,7 +5324,7 @@
               <a:buNone/>
             </a:pPr>
             <a:r>
-              <a:rPr lang="en-US" sz="1500" b="1" dirty="0">
+              <a:rPr lang="en-US" sz="1600" b="1" dirty="0">
                 <a:solidFill>
                   <a:srgbClr val="FFFFFF"/>
                 </a:solidFill>
@@ -5257,7 +5334,7 @@
               </a:rPr>
               <a:t>4</a:t>
             </a:r>
-            <a:endParaRPr lang="en-US" sz="1500" dirty="0"/>
+            <a:endParaRPr lang="en-US" sz="1600" dirty="0"/>
           </a:p>
         </p:txBody>
       </p:sp>
@@ -5423,7 +5500,7 @@
               <a:buNone/>
             </a:pPr>
             <a:r>
-              <a:rPr lang="en-US" sz="1500" b="1" dirty="0">
+              <a:rPr lang="en-US" sz="1600" b="1" dirty="0">
                 <a:solidFill>
                   <a:srgbClr val="FFFFFF"/>
                 </a:solidFill>
@@ -5433,7 +5510,7 @@
               </a:rPr>
               <a:t>5</a:t>
             </a:r>
-            <a:endParaRPr lang="en-US" sz="1500" dirty="0"/>
+            <a:endParaRPr lang="en-US" sz="1600" dirty="0"/>
           </a:p>
         </p:txBody>
       </p:sp>
@@ -5599,7 +5676,7 @@
               <a:buNone/>
             </a:pPr>
             <a:r>
-              <a:rPr lang="en-US" sz="1500" b="1" dirty="0">
+              <a:rPr lang="en-US" sz="1600" b="1" dirty="0">
                 <a:solidFill>
                   <a:srgbClr val="FFFFFF"/>
                 </a:solidFill>
@@ -5609,7 +5686,7 @@
               </a:rPr>
               <a:t>6</a:t>
             </a:r>
-            <a:endParaRPr lang="en-US" sz="1500" dirty="0"/>
+            <a:endParaRPr lang="en-US" sz="1600" dirty="0"/>
           </a:p>
         </p:txBody>
       </p:sp>
@@ -5866,61 +5943,7 @@
       </p:sp>
       <p:sp>
         <p:nvSpPr>
-          <p:cNvPr id="9" name="Shape 7"/>
-          <p:cNvSpPr/>
-          <p:nvPr/>
-        </p:nvSpPr>
-        <p:spPr>
-          <a:xfrm>
-            <a:off x="822960" y="1389888"/>
-            <a:ext cx="4937760" cy="73152"/>
-          </a:xfrm>
-          <a:prstGeom prst="rect">
-            <a:avLst/>
-          </a:prstGeom>
-          <a:solidFill>
-            <a:srgbClr val="111827"/>
-          </a:solidFill>
-          <a:ln w="12700">
-            <a:solidFill>
-              <a:srgbClr val="111827">
-                <a:alpha val="0"/>
-              </a:srgbClr>
-            </a:solidFill>
-            <a:prstDash val="solid"/>
-          </a:ln>
-        </p:spPr>
-      </p:sp>
-      <p:sp>
-        <p:nvSpPr>
-          <p:cNvPr id="10" name="Shape 8"/>
-          <p:cNvSpPr/>
-          <p:nvPr/>
-        </p:nvSpPr>
-        <p:spPr>
-          <a:xfrm>
-            <a:off x="6400800" y="1389888"/>
-            <a:ext cx="4937760" cy="73152"/>
-          </a:xfrm>
-          <a:prstGeom prst="rect">
-            <a:avLst/>
-          </a:prstGeom>
-          <a:solidFill>
-            <a:srgbClr val="111827"/>
-          </a:solidFill>
-          <a:ln w="12700">
-            <a:solidFill>
-              <a:srgbClr val="111827">
-                <a:alpha val="0"/>
-              </a:srgbClr>
-            </a:solidFill>
-            <a:prstDash val="solid"/>
-          </a:ln>
-        </p:spPr>
-      </p:sp>
-      <p:sp>
-        <p:nvSpPr>
-          <p:cNvPr id="11" name="mdpr:1-2-e3669a:title:__title:1-2-e3669a"/>
+          <p:cNvPr id="9" name="mdpr:1-2-e3669a:title:__title:1-2-e3669a"/>
           <p:cNvSpPr txBox="1"/>
           <p:nvPr/>
         </p:nvSpPr>
@@ -5962,14 +5985,14 @@
       </p:sp>
       <p:sp>
         <p:nvSpPr>
-          <p:cNvPr id="12" name="mdpr:1-2-e3669a:left:block-15-chunk-1-block-15-chunk-1"/>
+          <p:cNvPr id="10" name="mdpr:1-2-e3669a:left:block-15-chunk-1-block-15-chunk-1"/>
           <p:cNvSpPr txBox="1"/>
           <p:nvPr/>
         </p:nvSpPr>
         <p:spPr>
           <a:xfrm>
-            <a:off x="896112" y="1499616"/>
-            <a:ext cx="4791456" cy="4398264"/>
+            <a:off x="896112" y="1463040"/>
+            <a:ext cx="4791456" cy="4261104"/>
           </a:xfrm>
           <a:prstGeom prst="rect">
             <a:avLst/>
@@ -6061,14 +6084,14 @@
       </p:sp>
       <p:sp>
         <p:nvSpPr>
-          <p:cNvPr id="13" name="mdpr:1-2-e3669a:right:block-15-chunk-1-block-15-chunk-1"/>
+          <p:cNvPr id="11" name="mdpr:1-2-e3669a:right:block-15-chunk-1"/>
           <p:cNvSpPr txBox="1"/>
           <p:nvPr/>
         </p:nvSpPr>
         <p:spPr>
           <a:xfrm>
-            <a:off x="6473952" y="1499616"/>
-            <a:ext cx="4791456" cy="4398264"/>
+            <a:off x="6473952" y="1463040"/>
+            <a:ext cx="4791456" cy="4261104"/>
           </a:xfrm>
           <a:prstGeom prst="rect">
             <a:avLst/>
@@ -6116,46 +6139,6 @@
             </a:r>
             <a:endParaRPr lang="en-US" sz="1800" dirty="0"/>
           </a:p>
-          <a:p>
-            <a:pPr algn="l" indent="0" marL="0">
-              <a:lnSpc>
-                <a:spcPct val="120000"/>
-              </a:lnSpc>
-              <a:buNone/>
-            </a:pPr>
-            <a:r>
-              <a:rPr lang="en-US" sz="1800" b="1" dirty="0">
-                <a:solidFill>
-                  <a:srgbClr val="111827"/>
-                </a:solidFill>
-                <a:latin typeface="Pretendard" pitchFamily="34" charset="0"/>
-                <a:ea typeface="Pretendard" pitchFamily="34" charset="-122"/>
-                <a:cs typeface="Pretendard" pitchFamily="34" charset="-120"/>
-              </a:rPr>
-              <a:t>- Connectors</a:t>
-            </a:r>
-            <a:endParaRPr lang="en-US" sz="1800" dirty="0"/>
-          </a:p>
-          <a:p>
-            <a:pPr algn="l" indent="0" marL="0">
-              <a:lnSpc>
-                <a:spcPct val="120000"/>
-              </a:lnSpc>
-              <a:buNone/>
-            </a:pPr>
-            <a:r>
-              <a:rPr lang="en-US" sz="1800" dirty="0">
-                <a:solidFill>
-                  <a:srgbClr val="111111"/>
-                </a:solidFill>
-                <a:latin typeface="Pretendard" pitchFamily="34" charset="0"/>
-                <a:ea typeface="Pretendard" pitchFamily="34" charset="-122"/>
-                <a:cs typeface="Pretendard" pitchFamily="34" charset="-120"/>
-              </a:rPr>
-              <a:t>  straight-arrow, elbow-arrow, boundary-attach, overlap-joint, parallel-flow, contrast-flow.</a:t>
-            </a:r>
-            <a:endParaRPr lang="en-US" sz="1800" dirty="0"/>
-          </a:p>
         </p:txBody>
       </p:sp>
     </p:spTree>
@@ -6367,61 +6350,7 @@
       </p:sp>
       <p:sp>
         <p:nvSpPr>
-          <p:cNvPr id="9" name="Shape 7"/>
-          <p:cNvSpPr/>
-          <p:nvPr/>
-        </p:nvSpPr>
-        <p:spPr>
-          <a:xfrm>
-            <a:off x="822960" y="1554480"/>
-            <a:ext cx="4937760" cy="73152"/>
-          </a:xfrm>
-          <a:prstGeom prst="rect">
-            <a:avLst/>
-          </a:prstGeom>
-          <a:solidFill>
-            <a:srgbClr val="111827"/>
-          </a:solidFill>
-          <a:ln w="12700">
-            <a:solidFill>
-              <a:srgbClr val="111827">
-                <a:alpha val="0"/>
-              </a:srgbClr>
-            </a:solidFill>
-            <a:prstDash val="solid"/>
-          </a:ln>
-        </p:spPr>
-      </p:sp>
-      <p:sp>
-        <p:nvSpPr>
-          <p:cNvPr id="10" name="Shape 8"/>
-          <p:cNvSpPr/>
-          <p:nvPr/>
-        </p:nvSpPr>
-        <p:spPr>
-          <a:xfrm>
-            <a:off x="6400800" y="1554480"/>
-            <a:ext cx="4937760" cy="73152"/>
-          </a:xfrm>
-          <a:prstGeom prst="rect">
-            <a:avLst/>
-          </a:prstGeom>
-          <a:solidFill>
-            <a:srgbClr val="111827"/>
-          </a:solidFill>
-          <a:ln w="12700">
-            <a:solidFill>
-              <a:srgbClr val="111827">
-                <a:alpha val="0"/>
-              </a:srgbClr>
-            </a:solidFill>
-            <a:prstDash val="solid"/>
-          </a:ln>
-        </p:spPr>
-      </p:sp>
-      <p:sp>
-        <p:nvSpPr>
-          <p:cNvPr id="11" name="mdpr:2-2-c23e9b:title:__title:2-2-c23e9b"/>
+          <p:cNvPr id="9" name="mdpr:2-2-c23e9b:title:__title:2-2-c23e9b"/>
           <p:cNvSpPr txBox="1"/>
           <p:nvPr/>
         </p:nvSpPr>
@@ -6455,7 +6384,24 @@
                 <a:ea typeface="Pretendard" pitchFamily="34" charset="-122"/>
                 <a:cs typeface="Pretendard" pitchFamily="34" charset="-120"/>
               </a:rPr>
-              <a:t>Decoration Pattern Catalog (Cont. 2/2)</a:t>
+              <a:t>Decoration Pattern Catalog</a:t>
+            </a:r>
+            <a:pPr algn="ctr" indent="0" marL="0">
+              <a:lnSpc>
+                <a:spcPct val="120000"/>
+              </a:lnSpc>
+              <a:buNone/>
+            </a:pPr>
+            <a:r>
+              <a:rPr lang="en-US" sz="2000" dirty="0">
+                <a:solidFill>
+                  <a:srgbClr val="949494"/>
+                </a:solidFill>
+                <a:latin typeface="Pretendard" pitchFamily="34" charset="0"/>
+                <a:ea typeface="Pretendard" pitchFamily="34" charset="-122"/>
+                <a:cs typeface="Pretendard" pitchFamily="34" charset="-120"/>
+              </a:rPr>
+              <a:t> (Cont. 2/2)</a:t>
             </a:r>
             <a:endParaRPr lang="en-US" sz="3400" dirty="0"/>
           </a:p>
@@ -6463,14 +6409,14 @@
       </p:sp>
       <p:sp>
         <p:nvSpPr>
-          <p:cNvPr id="12" name="mdpr:2-2-c23e9b:left:block-15-chunk-2"/>
+          <p:cNvPr id="10" name="mdpr:2-2-c23e9b:left:block-15-chunk-2-block-15-chunk-2"/>
           <p:cNvSpPr txBox="1"/>
           <p:nvPr/>
         </p:nvSpPr>
         <p:spPr>
           <a:xfrm>
-            <a:off x="896112" y="1664208"/>
-            <a:ext cx="4791456" cy="4169664"/>
+            <a:off x="896112" y="1463040"/>
+            <a:ext cx="4791456" cy="4261104"/>
           </a:xfrm>
           <a:prstGeom prst="rect">
             <a:avLst/>
@@ -6489,7 +6435,44 @@
               <a:buNone/>
             </a:pPr>
             <a:r>
-              <a:rPr lang="en-US" sz="2200" b="1" dirty="0">
+              <a:rPr lang="en-US" sz="1800" b="1" dirty="0">
+                <a:solidFill>
+                  <a:srgbClr val="111827"/>
+                </a:solidFill>
+                <a:latin typeface="Pretendard" pitchFamily="34" charset="0"/>
+                <a:ea typeface="Pretendard" pitchFamily="34" charset="-122"/>
+                <a:cs typeface="Pretendard" pitchFamily="34" charset="-120"/>
+              </a:rPr>
+              <a:t>- Connectors</a:t>
+            </a:r>
+            <a:pPr algn="l" indent="0" marL="0">
+              <a:lnSpc>
+                <a:spcPct val="120000"/>
+              </a:lnSpc>
+              <a:buNone/>
+            </a:pPr>
+            <a:r>
+              <a:rPr lang="en-US" sz="1800" dirty="0">
+                <a:solidFill>
+                  <a:srgbClr val="111111"/>
+                </a:solidFill>
+                <a:latin typeface="Pretendard" pitchFamily="34" charset="0"/>
+                <a:ea typeface="Pretendard" pitchFamily="34" charset="-122"/>
+                <a:cs typeface="Pretendard" pitchFamily="34" charset="-120"/>
+              </a:rPr>
+              <a:t>  straight-arrow, elbow-arrow, boundary-attach, overlap-joint, parallel-flow, contrast-flow.</a:t>
+            </a:r>
+            <a:endParaRPr lang="en-US" sz="1800" dirty="0"/>
+          </a:p>
+          <a:p>
+            <a:pPr algn="l" indent="0" marL="0">
+              <a:lnSpc>
+                <a:spcPct val="120000"/>
+              </a:lnSpc>
+              <a:buNone/>
+            </a:pPr>
+            <a:r>
+              <a:rPr lang="en-US" sz="1800" b="1" dirty="0">
                 <a:solidFill>
                   <a:srgbClr val="111827"/>
                 </a:solidFill>
@@ -6499,6 +6482,9 @@
               </a:rPr>
               <a:t>- Icons</a:t>
             </a:r>
+            <a:endParaRPr lang="en-US" sz="1800" dirty="0"/>
+          </a:p>
+          <a:p>
             <a:pPr algn="l" indent="0" marL="0">
               <a:lnSpc>
                 <a:spcPct val="120000"/>
@@ -6506,7 +6492,7 @@
               <a:buNone/>
             </a:pPr>
             <a:r>
-              <a:rPr lang="en-US" sz="2200" dirty="0">
+              <a:rPr lang="en-US" sz="1800" dirty="0">
                 <a:solidFill>
                   <a:srgbClr val="111111"/>
                 </a:solidFill>
@@ -6516,20 +6502,20 @@
               </a:rPr>
               <a:t>  number-badge, mono-icon-slot, letter-disc, quiet-aside, image-safe-frame, brand-glyph.</a:t>
             </a:r>
-            <a:endParaRPr lang="en-US" sz="2200" dirty="0"/>
+            <a:endParaRPr lang="en-US" sz="1800" dirty="0"/>
           </a:p>
         </p:txBody>
       </p:sp>
       <p:sp>
         <p:nvSpPr>
-          <p:cNvPr id="13" name="mdpr:2-2-c23e9b:right:block-15-chunk-2"/>
+          <p:cNvPr id="11" name="mdpr:2-2-c23e9b:right:block-15-chunk-2"/>
           <p:cNvSpPr txBox="1"/>
           <p:nvPr/>
         </p:nvSpPr>
         <p:spPr>
           <a:xfrm>
-            <a:off x="6473952" y="1664208"/>
-            <a:ext cx="4791456" cy="4169664"/>
+            <a:off x="6473952" y="1463040"/>
+            <a:ext cx="4791456" cy="4261104"/>
           </a:xfrm>
           <a:prstGeom prst="rect">
             <a:avLst/>
@@ -6548,7 +6534,7 @@
               <a:buNone/>
             </a:pPr>
             <a:r>
-              <a:rPr lang="en-US" sz="2200" b="1" dirty="0">
+              <a:rPr lang="en-US" sz="1800" b="1" dirty="0">
                 <a:solidFill>
                   <a:srgbClr val="111827"/>
                 </a:solidFill>
@@ -6565,7 +6551,7 @@
               <a:buNone/>
             </a:pPr>
             <a:r>
-              <a:rPr lang="en-US" sz="2200" dirty="0">
+              <a:rPr lang="en-US" sz="1800" dirty="0">
                 <a:solidFill>
                   <a:srgbClr val="111111"/>
                 </a:solidFill>
@@ -6575,7 +6561,7 @@
               </a:rPr>
               <a:t>  skeuomorphic-bevel, glassmorphism-surface, newmorphic-panel, clay-blob, bento-tile, liquid-lens.</a:t>
             </a:r>
-            <a:endParaRPr lang="en-US" sz="2200" dirty="0"/>
+            <a:endParaRPr lang="en-US" sz="1800" dirty="0"/>
           </a:p>
         </p:txBody>
       </p:sp>
@@ -8647,7 +8633,24 @@
                 <a:ea typeface="Pretendard" pitchFamily="34" charset="-122"/>
                 <a:cs typeface="Pretendard" pitchFamily="34" charset="-120"/>
               </a:rPr>
-              <a:t>Chart and Table Pair (Cont. 2/2)</a:t>
+              <a:t>Chart and Table Pair</a:t>
+            </a:r>
+            <a:pPr algn="ctr" indent="0" marL="0">
+              <a:lnSpc>
+                <a:spcPct val="120000"/>
+              </a:lnSpc>
+              <a:buNone/>
+            </a:pPr>
+            <a:r>
+              <a:rPr lang="en-US" sz="2000" dirty="0">
+                <a:solidFill>
+                  <a:srgbClr val="949494"/>
+                </a:solidFill>
+                <a:latin typeface="Pretendard" pitchFamily="34" charset="0"/>
+                <a:ea typeface="Pretendard" pitchFamily="34" charset="-122"/>
+                <a:cs typeface="Pretendard" pitchFamily="34" charset="-120"/>
+              </a:rPr>
+              <a:t> (Cont. 2/2)</a:t>
             </a:r>
             <a:endParaRPr lang="en-US" sz="3400" dirty="0"/>
           </a:p>
@@ -10751,7 +10754,24 @@
                 <a:ea typeface="Pretendard" pitchFamily="34" charset="-122"/>
                 <a:cs typeface="Pretendard" pitchFamily="34" charset="-120"/>
               </a:rPr>
-              <a:t>Editable Proof Objects (Cont. 2/2)</a:t>
+              <a:t>Editable Proof Objects</a:t>
+            </a:r>
+            <a:pPr algn="ctr" indent="0" marL="0">
+              <a:lnSpc>
+                <a:spcPct val="120000"/>
+              </a:lnSpc>
+              <a:buNone/>
+            </a:pPr>
+            <a:r>
+              <a:rPr lang="en-US" sz="2000" dirty="0">
+                <a:solidFill>
+                  <a:srgbClr val="949494"/>
+                </a:solidFill>
+                <a:latin typeface="Pretendard" pitchFamily="34" charset="0"/>
+                <a:ea typeface="Pretendard" pitchFamily="34" charset="-122"/>
+                <a:cs typeface="Pretendard" pitchFamily="34" charset="-120"/>
+              </a:rPr>
+              <a:t> (Cont. 2/2)</a:t>
             </a:r>
             <a:endParaRPr lang="en-US" sz="3400" dirty="0"/>
           </a:p>
@@ -11604,135 +11624,16 @@
           </a:ln>
         </p:spPr>
       </p:sp>
-      <p:pic>
-        <p:nvPicPr>
-          <p:cNvPr id="9" name="Image 0" descr="preencoded.png">    </p:cNvPr>
-          <p:cNvPicPr>
-            <a:picLocks noChangeAspect="1"/>
-          </p:cNvPicPr>
-          <p:nvPr/>
-        </p:nvPicPr>
-        <p:blipFill>
-          <a:blip r:embed="rId1">
-            <a:extLst>
-              <a:ext uri="{96DAC541-7B7A-43D3-8B79-37D633B846F1}">
-                <asvg:svgBlip xmlns:asvg="http://schemas.microsoft.com/office/drawing/2016/SVG/main" r:embed="rId2"/>
-              </a:ext>
-            </a:extLst>
-          </a:blip>
-          <a:stretch>
-            <a:fillRect/>
-          </a:stretch>
-        </p:blipFill>
-        <p:spPr>
-          <a:xfrm>
-            <a:off x="914400" y="1865376"/>
-            <a:ext cx="10241280" cy="1024128"/>
-          </a:xfrm>
-          <a:prstGeom prst="rect">
-            <a:avLst/>
-          </a:prstGeom>
-        </p:spPr>
-      </p:pic>
-      <p:pic>
-        <p:nvPicPr>
-          <p:cNvPr id="10" name="Image 1" descr="preencoded.png">    </p:cNvPr>
-          <p:cNvPicPr>
-            <a:picLocks noChangeAspect="1"/>
-          </p:cNvPicPr>
-          <p:nvPr/>
-        </p:nvPicPr>
-        <p:blipFill>
-          <a:blip r:embed="rId3">
-            <a:extLst>
-              <a:ext uri="{96DAC541-7B7A-43D3-8B79-37D633B846F1}">
-                <asvg:svgBlip xmlns:asvg="http://schemas.microsoft.com/office/drawing/2016/SVG/main" r:embed="rId4"/>
-              </a:ext>
-            </a:extLst>
-          </a:blip>
-          <a:stretch>
-            <a:fillRect/>
-          </a:stretch>
-        </p:blipFill>
-        <p:spPr>
-          <a:xfrm>
-            <a:off x="914400" y="3191256"/>
-            <a:ext cx="10241280" cy="1024128"/>
-          </a:xfrm>
-          <a:prstGeom prst="rect">
-            <a:avLst/>
-          </a:prstGeom>
-        </p:spPr>
-      </p:pic>
-      <p:pic>
-        <p:nvPicPr>
-          <p:cNvPr id="11" name="Image 2" descr="preencoded.png">    </p:cNvPr>
-          <p:cNvPicPr>
-            <a:picLocks noChangeAspect="1"/>
-          </p:cNvPicPr>
-          <p:nvPr/>
-        </p:nvPicPr>
-        <p:blipFill>
-          <a:blip r:embed="rId5">
-            <a:extLst>
-              <a:ext uri="{96DAC541-7B7A-43D3-8B79-37D633B846F1}">
-                <asvg:svgBlip xmlns:asvg="http://schemas.microsoft.com/office/drawing/2016/SVG/main" r:embed="rId6"/>
-              </a:ext>
-            </a:extLst>
-          </a:blip>
-          <a:stretch>
-            <a:fillRect/>
-          </a:stretch>
-        </p:blipFill>
-        <p:spPr>
-          <a:xfrm>
-            <a:off x="914400" y="4507992"/>
-            <a:ext cx="10241280" cy="1024128"/>
-          </a:xfrm>
-          <a:prstGeom prst="rect">
-            <a:avLst/>
-          </a:prstGeom>
-        </p:spPr>
-      </p:pic>
-      <p:sp>
-        <p:nvSpPr>
-          <p:cNvPr id="12" name="Shape 7"/>
-          <p:cNvSpPr/>
-          <p:nvPr/>
-        </p:nvSpPr>
-        <p:spPr>
-          <a:xfrm>
-            <a:off x="786384" y="1956816"/>
-            <a:ext cx="32004" cy="3483864"/>
-          </a:xfrm>
-          <a:prstGeom prst="rect">
-            <a:avLst/>
-          </a:prstGeom>
-          <a:solidFill>
-            <a:srgbClr val="E5E7EB">
-              <a:alpha val="80000"/>
-            </a:srgbClr>
-          </a:solidFill>
-          <a:ln w="12700">
-            <a:solidFill>
-              <a:srgbClr val="E5E7EB">
-                <a:alpha val="0"/>
-              </a:srgbClr>
-            </a:solidFill>
-            <a:prstDash val="solid"/>
-          </a:ln>
-        </p:spPr>
-      </p:sp>
-      <p:sp>
-        <p:nvSpPr>
-          <p:cNvPr id="13" name="Shape 8"/>
-          <p:cNvSpPr/>
-          <p:nvPr/>
-        </p:nvSpPr>
-        <p:spPr>
-          <a:xfrm>
-            <a:off x="914400" y="1865376"/>
-            <a:ext cx="73152" cy="1024128"/>
+      <p:sp>
+        <p:nvSpPr>
+          <p:cNvPr id="9" name="Shape 7"/>
+          <p:cNvSpPr/>
+          <p:nvPr/>
+        </p:nvSpPr>
+        <p:spPr>
+          <a:xfrm>
+            <a:off x="822960" y="1938528"/>
+            <a:ext cx="73152" cy="2514600"/>
           </a:xfrm>
           <a:prstGeom prst="rect">
             <a:avLst/>
@@ -11752,14 +11653,14 @@
       </p:sp>
       <p:sp>
         <p:nvSpPr>
-          <p:cNvPr id="14" name="Shape 9"/>
-          <p:cNvSpPr/>
-          <p:nvPr/>
-        </p:nvSpPr>
-        <p:spPr>
-          <a:xfrm>
-            <a:off x="914400" y="3191256"/>
-            <a:ext cx="73152" cy="1024128"/>
+          <p:cNvPr id="10" name="Shape 8"/>
+          <p:cNvSpPr/>
+          <p:nvPr/>
+        </p:nvSpPr>
+        <p:spPr>
+          <a:xfrm>
+            <a:off x="4343400" y="1938528"/>
+            <a:ext cx="73152" cy="2514600"/>
           </a:xfrm>
           <a:prstGeom prst="rect">
             <a:avLst/>
@@ -11779,14 +11680,14 @@
       </p:sp>
       <p:sp>
         <p:nvSpPr>
-          <p:cNvPr id="15" name="Shape 10"/>
-          <p:cNvSpPr/>
-          <p:nvPr/>
-        </p:nvSpPr>
-        <p:spPr>
-          <a:xfrm>
-            <a:off x="914400" y="4507992"/>
-            <a:ext cx="73152" cy="1024128"/>
+          <p:cNvPr id="11" name="Shape 9"/>
+          <p:cNvSpPr/>
+          <p:nvPr/>
+        </p:nvSpPr>
+        <p:spPr>
+          <a:xfrm>
+            <a:off x="7863840" y="1938528"/>
+            <a:ext cx="73152" cy="2514600"/>
           </a:xfrm>
           <a:prstGeom prst="rect">
             <a:avLst/>
@@ -11806,7 +11707,7 @@
       </p:sp>
       <p:sp>
         <p:nvSpPr>
-          <p:cNvPr id="16" name="mdpr:1-2-ea42c8:title:__title:1-2-ea42c8"/>
+          <p:cNvPr id="12" name="mdpr:1-2-ea42c8:title:__title:1-2-ea42c8"/>
           <p:cNvSpPr txBox="1"/>
           <p:nvPr/>
         </p:nvSpPr>
@@ -11848,14 +11749,14 @@
       </p:sp>
       <p:sp>
         <p:nvSpPr>
-          <p:cNvPr id="17" name="mdpr:1-2-ea42c8:item-1:block-27-chunk-1"/>
+          <p:cNvPr id="13" name="mdpr:1-2-ea42c8:item-1:block-27-chunk-1"/>
           <p:cNvSpPr txBox="1"/>
           <p:nvPr/>
         </p:nvSpPr>
         <p:spPr>
           <a:xfrm>
-            <a:off x="1133856" y="1957548"/>
-            <a:ext cx="9820656" cy="839785"/>
+            <a:off x="1042416" y="2103120"/>
+            <a:ext cx="2825496" cy="2185416"/>
           </a:xfrm>
           <a:prstGeom prst="rect">
             <a:avLst/>
@@ -11907,14 +11808,14 @@
       </p:sp>
       <p:sp>
         <p:nvSpPr>
-          <p:cNvPr id="18" name="mdpr:1-2-ea42c8:item-2:block-27-chunk-1"/>
+          <p:cNvPr id="14" name="mdpr:1-2-ea42c8:item-2:block-27-chunk-1"/>
           <p:cNvSpPr txBox="1"/>
           <p:nvPr/>
         </p:nvSpPr>
         <p:spPr>
           <a:xfrm>
-            <a:off x="1133856" y="3283428"/>
-            <a:ext cx="9820656" cy="839785"/>
+            <a:off x="4562856" y="2103120"/>
+            <a:ext cx="2825496" cy="2185416"/>
           </a:xfrm>
           <a:prstGeom prst="rect">
             <a:avLst/>
@@ -11966,14 +11867,14 @@
       </p:sp>
       <p:sp>
         <p:nvSpPr>
-          <p:cNvPr id="19" name="mdpr:1-2-ea42c8:item-3:block-27-chunk-1"/>
+          <p:cNvPr id="15" name="mdpr:1-2-ea42c8:item-3:block-27-chunk-1"/>
           <p:cNvSpPr txBox="1"/>
           <p:nvPr/>
         </p:nvSpPr>
         <p:spPr>
           <a:xfrm>
-            <a:off x="1133856" y="4600164"/>
-            <a:ext cx="9820656" cy="839785"/>
+            <a:off x="8083296" y="2103120"/>
+            <a:ext cx="2825496" cy="2185416"/>
           </a:xfrm>
           <a:prstGeom prst="rect">
             <a:avLst/>
@@ -12238,8 +12139,8 @@
         </p:nvSpPr>
         <p:spPr>
           <a:xfrm>
-            <a:off x="822960" y="1188720"/>
-            <a:ext cx="10515600" cy="45720"/>
+            <a:off x="822960" y="1737360"/>
+            <a:ext cx="73152" cy="841248"/>
           </a:xfrm>
           <a:prstGeom prst="rect">
             <a:avLst/>
@@ -12265,8 +12166,8 @@
         </p:nvSpPr>
         <p:spPr>
           <a:xfrm>
-            <a:off x="822960" y="6382512"/>
-            <a:ext cx="2011680" cy="45720"/>
+            <a:off x="822960" y="2779776"/>
+            <a:ext cx="73152" cy="841248"/>
           </a:xfrm>
           <a:prstGeom prst="rect">
             <a:avLst/>
@@ -12292,37 +12193,8 @@
         </p:nvSpPr>
         <p:spPr>
           <a:xfrm>
-            <a:off x="6080760" y="1389888"/>
-            <a:ext cx="22860" cy="4846320"/>
-          </a:xfrm>
-          <a:prstGeom prst="rect">
-            <a:avLst/>
-          </a:prstGeom>
-          <a:solidFill>
-            <a:srgbClr val="E5E7EB">
-              <a:alpha val="90000"/>
-            </a:srgbClr>
-          </a:solidFill>
-          <a:ln w="12700">
-            <a:solidFill>
-              <a:srgbClr val="E5E7EB">
-                <a:alpha val="0"/>
-              </a:srgbClr>
-            </a:solidFill>
-            <a:prstDash val="solid"/>
-          </a:ln>
-        </p:spPr>
-      </p:sp>
-      <p:sp>
-        <p:nvSpPr>
-          <p:cNvPr id="12" name="Shape 10"/>
-          <p:cNvSpPr/>
-          <p:nvPr/>
-        </p:nvSpPr>
-        <p:spPr>
-          <a:xfrm>
-            <a:off x="822960" y="1389888"/>
-            <a:ext cx="73152" cy="566928"/>
+            <a:off x="822960" y="3822192"/>
+            <a:ext cx="73152" cy="841248"/>
           </a:xfrm>
           <a:prstGeom prst="rect">
             <a:avLst/>
@@ -12342,14 +12214,14 @@
       </p:sp>
       <p:sp>
         <p:nvSpPr>
-          <p:cNvPr id="13" name="Shape 11"/>
-          <p:cNvSpPr/>
-          <p:nvPr/>
-        </p:nvSpPr>
-        <p:spPr>
-          <a:xfrm>
-            <a:off x="822960" y="2103120"/>
-            <a:ext cx="73152" cy="566928"/>
+          <p:cNvPr id="12" name="Shape 10"/>
+          <p:cNvSpPr/>
+          <p:nvPr/>
+        </p:nvSpPr>
+        <p:spPr>
+          <a:xfrm>
+            <a:off x="822960" y="4864608"/>
+            <a:ext cx="73152" cy="841248"/>
           </a:xfrm>
           <a:prstGeom prst="rect">
             <a:avLst/>
@@ -12369,14 +12241,14 @@
       </p:sp>
       <p:sp>
         <p:nvSpPr>
-          <p:cNvPr id="14" name="Shape 12"/>
-          <p:cNvSpPr/>
-          <p:nvPr/>
-        </p:nvSpPr>
-        <p:spPr>
-          <a:xfrm>
-            <a:off x="822960" y="2816352"/>
-            <a:ext cx="73152" cy="566928"/>
+          <p:cNvPr id="13" name="Shape 11"/>
+          <p:cNvSpPr/>
+          <p:nvPr/>
+        </p:nvSpPr>
+        <p:spPr>
+          <a:xfrm>
+            <a:off x="6272784" y="1737360"/>
+            <a:ext cx="73152" cy="841248"/>
           </a:xfrm>
           <a:prstGeom prst="rect">
             <a:avLst/>
@@ -12396,14 +12268,14 @@
       </p:sp>
       <p:sp>
         <p:nvSpPr>
-          <p:cNvPr id="15" name="Shape 13"/>
-          <p:cNvSpPr/>
-          <p:nvPr/>
-        </p:nvSpPr>
-        <p:spPr>
-          <a:xfrm>
-            <a:off x="822960" y="3529584"/>
-            <a:ext cx="73152" cy="566928"/>
+          <p:cNvPr id="14" name="Shape 12"/>
+          <p:cNvSpPr/>
+          <p:nvPr/>
+        </p:nvSpPr>
+        <p:spPr>
+          <a:xfrm>
+            <a:off x="6272784" y="2779776"/>
+            <a:ext cx="73152" cy="841248"/>
           </a:xfrm>
           <a:prstGeom prst="rect">
             <a:avLst/>
@@ -12423,14 +12295,14 @@
       </p:sp>
       <p:sp>
         <p:nvSpPr>
-          <p:cNvPr id="16" name="Shape 14"/>
-          <p:cNvSpPr/>
-          <p:nvPr/>
-        </p:nvSpPr>
-        <p:spPr>
-          <a:xfrm>
-            <a:off x="822960" y="4242816"/>
-            <a:ext cx="73152" cy="566928"/>
+          <p:cNvPr id="15" name="Shape 13"/>
+          <p:cNvSpPr/>
+          <p:nvPr/>
+        </p:nvSpPr>
+        <p:spPr>
+          <a:xfrm>
+            <a:off x="6272784" y="3822192"/>
+            <a:ext cx="73152" cy="841248"/>
           </a:xfrm>
           <a:prstGeom prst="rect">
             <a:avLst/>
@@ -12450,14 +12322,14 @@
       </p:sp>
       <p:sp>
         <p:nvSpPr>
-          <p:cNvPr id="17" name="Shape 15"/>
-          <p:cNvSpPr/>
-          <p:nvPr/>
-        </p:nvSpPr>
-        <p:spPr>
-          <a:xfrm>
-            <a:off x="822960" y="4956048"/>
-            <a:ext cx="73152" cy="566928"/>
+          <p:cNvPr id="16" name="Shape 14"/>
+          <p:cNvSpPr/>
+          <p:nvPr/>
+        </p:nvSpPr>
+        <p:spPr>
+          <a:xfrm>
+            <a:off x="6272784" y="4864608"/>
+            <a:ext cx="73152" cy="841248"/>
           </a:xfrm>
           <a:prstGeom prst="rect">
             <a:avLst/>
@@ -12477,223 +12349,7 @@
       </p:sp>
       <p:sp>
         <p:nvSpPr>
-          <p:cNvPr id="18" name="Shape 16"/>
-          <p:cNvSpPr/>
-          <p:nvPr/>
-        </p:nvSpPr>
-        <p:spPr>
-          <a:xfrm>
-            <a:off x="822960" y="5669280"/>
-            <a:ext cx="73152" cy="566928"/>
-          </a:xfrm>
-          <a:prstGeom prst="rect">
-            <a:avLst/>
-          </a:prstGeom>
-          <a:solidFill>
-            <a:srgbClr val="111827"/>
-          </a:solidFill>
-          <a:ln w="12700">
-            <a:solidFill>
-              <a:srgbClr val="111827">
-                <a:alpha val="0"/>
-              </a:srgbClr>
-            </a:solidFill>
-            <a:prstDash val="solid"/>
-          </a:ln>
-        </p:spPr>
-      </p:sp>
-      <p:sp>
-        <p:nvSpPr>
-          <p:cNvPr id="19" name="Shape 17"/>
-          <p:cNvSpPr/>
-          <p:nvPr/>
-        </p:nvSpPr>
-        <p:spPr>
-          <a:xfrm>
-            <a:off x="6272784" y="1389888"/>
-            <a:ext cx="73152" cy="566928"/>
-          </a:xfrm>
-          <a:prstGeom prst="rect">
-            <a:avLst/>
-          </a:prstGeom>
-          <a:solidFill>
-            <a:srgbClr val="E5E7EB"/>
-          </a:solidFill>
-          <a:ln w="12700">
-            <a:solidFill>
-              <a:srgbClr val="E5E7EB">
-                <a:alpha val="0"/>
-              </a:srgbClr>
-            </a:solidFill>
-            <a:prstDash val="solid"/>
-          </a:ln>
-        </p:spPr>
-      </p:sp>
-      <p:sp>
-        <p:nvSpPr>
-          <p:cNvPr id="20" name="Shape 18"/>
-          <p:cNvSpPr/>
-          <p:nvPr/>
-        </p:nvSpPr>
-        <p:spPr>
-          <a:xfrm>
-            <a:off x="6272784" y="2103120"/>
-            <a:ext cx="73152" cy="566928"/>
-          </a:xfrm>
-          <a:prstGeom prst="rect">
-            <a:avLst/>
-          </a:prstGeom>
-          <a:solidFill>
-            <a:srgbClr val="111827"/>
-          </a:solidFill>
-          <a:ln w="12700">
-            <a:solidFill>
-              <a:srgbClr val="111827">
-                <a:alpha val="0"/>
-              </a:srgbClr>
-            </a:solidFill>
-            <a:prstDash val="solid"/>
-          </a:ln>
-        </p:spPr>
-      </p:sp>
-      <p:sp>
-        <p:nvSpPr>
-          <p:cNvPr id="21" name="Shape 19"/>
-          <p:cNvSpPr/>
-          <p:nvPr/>
-        </p:nvSpPr>
-        <p:spPr>
-          <a:xfrm>
-            <a:off x="6272784" y="2816352"/>
-            <a:ext cx="73152" cy="566928"/>
-          </a:xfrm>
-          <a:prstGeom prst="rect">
-            <a:avLst/>
-          </a:prstGeom>
-          <a:solidFill>
-            <a:srgbClr val="E5E7EB"/>
-          </a:solidFill>
-          <a:ln w="12700">
-            <a:solidFill>
-              <a:srgbClr val="E5E7EB">
-                <a:alpha val="0"/>
-              </a:srgbClr>
-            </a:solidFill>
-            <a:prstDash val="solid"/>
-          </a:ln>
-        </p:spPr>
-      </p:sp>
-      <p:sp>
-        <p:nvSpPr>
-          <p:cNvPr id="22" name="Shape 20"/>
-          <p:cNvSpPr/>
-          <p:nvPr/>
-        </p:nvSpPr>
-        <p:spPr>
-          <a:xfrm>
-            <a:off x="6272784" y="3529584"/>
-            <a:ext cx="73152" cy="566928"/>
-          </a:xfrm>
-          <a:prstGeom prst="rect">
-            <a:avLst/>
-          </a:prstGeom>
-          <a:solidFill>
-            <a:srgbClr val="111827"/>
-          </a:solidFill>
-          <a:ln w="12700">
-            <a:solidFill>
-              <a:srgbClr val="111827">
-                <a:alpha val="0"/>
-              </a:srgbClr>
-            </a:solidFill>
-            <a:prstDash val="solid"/>
-          </a:ln>
-        </p:spPr>
-      </p:sp>
-      <p:sp>
-        <p:nvSpPr>
-          <p:cNvPr id="23" name="Shape 21"/>
-          <p:cNvSpPr/>
-          <p:nvPr/>
-        </p:nvSpPr>
-        <p:spPr>
-          <a:xfrm>
-            <a:off x="6272784" y="4242816"/>
-            <a:ext cx="73152" cy="566928"/>
-          </a:xfrm>
-          <a:prstGeom prst="rect">
-            <a:avLst/>
-          </a:prstGeom>
-          <a:solidFill>
-            <a:srgbClr val="E5E7EB"/>
-          </a:solidFill>
-          <a:ln w="12700">
-            <a:solidFill>
-              <a:srgbClr val="E5E7EB">
-                <a:alpha val="0"/>
-              </a:srgbClr>
-            </a:solidFill>
-            <a:prstDash val="solid"/>
-          </a:ln>
-        </p:spPr>
-      </p:sp>
-      <p:sp>
-        <p:nvSpPr>
-          <p:cNvPr id="24" name="Shape 22"/>
-          <p:cNvSpPr/>
-          <p:nvPr/>
-        </p:nvSpPr>
-        <p:spPr>
-          <a:xfrm>
-            <a:off x="6272784" y="4956048"/>
-            <a:ext cx="73152" cy="566928"/>
-          </a:xfrm>
-          <a:prstGeom prst="rect">
-            <a:avLst/>
-          </a:prstGeom>
-          <a:solidFill>
-            <a:srgbClr val="111827"/>
-          </a:solidFill>
-          <a:ln w="12700">
-            <a:solidFill>
-              <a:srgbClr val="111827">
-                <a:alpha val="0"/>
-              </a:srgbClr>
-            </a:solidFill>
-            <a:prstDash val="solid"/>
-          </a:ln>
-        </p:spPr>
-      </p:sp>
-      <p:sp>
-        <p:nvSpPr>
-          <p:cNvPr id="25" name="Shape 23"/>
-          <p:cNvSpPr/>
-          <p:nvPr/>
-        </p:nvSpPr>
-        <p:spPr>
-          <a:xfrm>
-            <a:off x="6272784" y="5669280"/>
-            <a:ext cx="73152" cy="566928"/>
-          </a:xfrm>
-          <a:prstGeom prst="rect">
-            <a:avLst/>
-          </a:prstGeom>
-          <a:solidFill>
-            <a:srgbClr val="E5E7EB"/>
-          </a:solidFill>
-          <a:ln w="12700">
-            <a:solidFill>
-              <a:srgbClr val="E5E7EB">
-                <a:alpha val="0"/>
-              </a:srgbClr>
-            </a:solidFill>
-            <a:prstDash val="solid"/>
-          </a:ln>
-        </p:spPr>
-      </p:sp>
-      <p:sp>
-        <p:nvSpPr>
-          <p:cNvPr id="26" name="mdpr:1-2-0772f8:title:__title:1-2-0772f8"/>
+          <p:cNvPr id="17" name="mdpr:1-2-0772f8:title:__title:1-2-0772f8"/>
           <p:cNvSpPr txBox="1"/>
           <p:nvPr/>
         </p:nvSpPr>
@@ -12735,14 +12391,14 @@
       </p:sp>
       <p:sp>
         <p:nvSpPr>
-          <p:cNvPr id="27" name="mdpr:1-2-0772f8:toc-item-1:toc-item-1"/>
+          <p:cNvPr id="18" name="mdpr:1-2-0772f8:toc-item-1:toc-item-1"/>
           <p:cNvSpPr txBox="1"/>
           <p:nvPr/>
         </p:nvSpPr>
         <p:spPr>
           <a:xfrm>
-            <a:off x="1042416" y="1481328"/>
-            <a:ext cx="4645152" cy="384048"/>
+            <a:off x="1042416" y="1828800"/>
+            <a:ext cx="4645152" cy="658368"/>
           </a:xfrm>
           <a:prstGeom prst="rect">
             <a:avLst/>
@@ -12777,14 +12433,14 @@
       </p:sp>
       <p:sp>
         <p:nvSpPr>
-          <p:cNvPr id="28" name="mdpr:1-2-0772f8:toc-item-2:toc-item-2"/>
+          <p:cNvPr id="19" name="mdpr:1-2-0772f8:toc-item-2:toc-item-2"/>
           <p:cNvSpPr txBox="1"/>
           <p:nvPr/>
         </p:nvSpPr>
         <p:spPr>
           <a:xfrm>
-            <a:off x="1042416" y="2194560"/>
-            <a:ext cx="4645152" cy="384048"/>
+            <a:off x="1042416" y="2871216"/>
+            <a:ext cx="4645152" cy="658368"/>
           </a:xfrm>
           <a:prstGeom prst="rect">
             <a:avLst/>
@@ -12819,14 +12475,14 @@
       </p:sp>
       <p:sp>
         <p:nvSpPr>
-          <p:cNvPr id="29" name="mdpr:1-2-0772f8:toc-item-3:toc-item-3"/>
+          <p:cNvPr id="20" name="mdpr:1-2-0772f8:toc-item-3:toc-item-3"/>
           <p:cNvSpPr txBox="1"/>
           <p:nvPr/>
         </p:nvSpPr>
         <p:spPr>
           <a:xfrm>
-            <a:off x="1042416" y="2907792"/>
-            <a:ext cx="4645152" cy="384048"/>
+            <a:off x="1042416" y="3913632"/>
+            <a:ext cx="4645152" cy="658368"/>
           </a:xfrm>
           <a:prstGeom prst="rect">
             <a:avLst/>
@@ -12861,14 +12517,14 @@
       </p:sp>
       <p:sp>
         <p:nvSpPr>
-          <p:cNvPr id="30" name="mdpr:1-2-0772f8:toc-item-4:toc-item-4"/>
+          <p:cNvPr id="21" name="mdpr:1-2-0772f8:toc-item-4:toc-item-4"/>
           <p:cNvSpPr txBox="1"/>
           <p:nvPr/>
         </p:nvSpPr>
         <p:spPr>
           <a:xfrm>
-            <a:off x="1042416" y="3621024"/>
-            <a:ext cx="4645152" cy="384048"/>
+            <a:off x="1042416" y="4956048"/>
+            <a:ext cx="4645152" cy="658368"/>
           </a:xfrm>
           <a:prstGeom prst="rect">
             <a:avLst/>
@@ -12903,14 +12559,14 @@
       </p:sp>
       <p:sp>
         <p:nvSpPr>
-          <p:cNvPr id="31" name="mdpr:1-2-0772f8:toc-item-5:toc-item-5"/>
+          <p:cNvPr id="22" name="mdpr:1-2-0772f8:toc-item-5:toc-item-5"/>
           <p:cNvSpPr txBox="1"/>
           <p:nvPr/>
         </p:nvSpPr>
         <p:spPr>
           <a:xfrm>
-            <a:off x="1042416" y="4334256"/>
-            <a:ext cx="4645152" cy="384048"/>
+            <a:off x="6492240" y="1828800"/>
+            <a:ext cx="4645152" cy="658368"/>
           </a:xfrm>
           <a:prstGeom prst="rect">
             <a:avLst/>
@@ -12945,14 +12601,14 @@
       </p:sp>
       <p:sp>
         <p:nvSpPr>
-          <p:cNvPr id="32" name="mdpr:1-2-0772f8:toc-item-6:toc-item-6"/>
+          <p:cNvPr id="23" name="mdpr:1-2-0772f8:toc-item-6:toc-item-6"/>
           <p:cNvSpPr txBox="1"/>
           <p:nvPr/>
         </p:nvSpPr>
         <p:spPr>
           <a:xfrm>
-            <a:off x="1042416" y="5047488"/>
-            <a:ext cx="4645152" cy="384048"/>
+            <a:off x="6492240" y="2871216"/>
+            <a:ext cx="4645152" cy="658368"/>
           </a:xfrm>
           <a:prstGeom prst="rect">
             <a:avLst/>
@@ -12987,14 +12643,14 @@
       </p:sp>
       <p:sp>
         <p:nvSpPr>
-          <p:cNvPr id="33" name="mdpr:1-2-0772f8:toc-item-7:toc-item-7"/>
+          <p:cNvPr id="24" name="mdpr:1-2-0772f8:toc-item-7:toc-item-7"/>
           <p:cNvSpPr txBox="1"/>
           <p:nvPr/>
         </p:nvSpPr>
         <p:spPr>
           <a:xfrm>
-            <a:off x="1042416" y="5760720"/>
-            <a:ext cx="4645152" cy="384048"/>
+            <a:off x="6492240" y="3913632"/>
+            <a:ext cx="4645152" cy="658368"/>
           </a:xfrm>
           <a:prstGeom prst="rect">
             <a:avLst/>
@@ -13029,14 +12685,14 @@
       </p:sp>
       <p:sp>
         <p:nvSpPr>
-          <p:cNvPr id="34" name="mdpr:1-2-0772f8:toc-item-8:toc-item-8"/>
+          <p:cNvPr id="25" name="mdpr:1-2-0772f8:toc-item-8:toc-item-8"/>
           <p:cNvSpPr txBox="1"/>
           <p:nvPr/>
         </p:nvSpPr>
         <p:spPr>
           <a:xfrm>
-            <a:off x="6492240" y="1481328"/>
-            <a:ext cx="4645152" cy="384048"/>
+            <a:off x="6492240" y="4956048"/>
+            <a:ext cx="4645152" cy="658368"/>
           </a:xfrm>
           <a:prstGeom prst="rect">
             <a:avLst/>
@@ -13064,258 +12720,6 @@
                 <a:cs typeface="Pretendard" pitchFamily="34" charset="-120"/>
               </a:rPr>
               <a:t>08  Chart and Table Pair</a:t>
-            </a:r>
-            <a:endParaRPr lang="en-US" sz="1800" dirty="0"/>
-          </a:p>
-        </p:txBody>
-      </p:sp>
-      <p:sp>
-        <p:nvSpPr>
-          <p:cNvPr id="35" name="mdpr:1-2-0772f8:toc-item-9:toc-item-9"/>
-          <p:cNvSpPr txBox="1"/>
-          <p:nvPr/>
-        </p:nvSpPr>
-        <p:spPr>
-          <a:xfrm>
-            <a:off x="6492240" y="2194560"/>
-            <a:ext cx="4645152" cy="384048"/>
-          </a:xfrm>
-          <a:prstGeom prst="rect">
-            <a:avLst/>
-          </a:prstGeom>
-          <a:noFill/>
-          <a:ln/>
-        </p:spPr>
-        <p:txBody>
-          <a:bodyPr wrap="square" lIns="0" tIns="25400" rIns="25400" bIns="0" rtlCol="0" anchor="ctr"/>
-          <a:lstStyle/>
-          <a:p>
-            <a:pPr algn="ctr" indent="0" marL="0">
-              <a:lnSpc>
-                <a:spcPct val="120000"/>
-              </a:lnSpc>
-              <a:buNone/>
-            </a:pPr>
-            <a:r>
-              <a:rPr lang="en-US" sz="1800" dirty="0">
-                <a:solidFill>
-                  <a:srgbClr val="111111"/>
-                </a:solidFill>
-                <a:latin typeface="Pretendard" pitchFamily="34" charset="0"/>
-                <a:ea typeface="Pretendard" pitchFamily="34" charset="-122"/>
-                <a:cs typeface="Pretendard" pitchFamily="34" charset="-120"/>
-              </a:rPr>
-              <a:t>09  Editable Proof Objects</a:t>
-            </a:r>
-            <a:endParaRPr lang="en-US" sz="1800" dirty="0"/>
-          </a:p>
-        </p:txBody>
-      </p:sp>
-      <p:sp>
-        <p:nvSpPr>
-          <p:cNvPr id="36" name="mdpr:1-2-0772f8:toc-item-10:toc-item-10"/>
-          <p:cNvSpPr txBox="1"/>
-          <p:nvPr/>
-        </p:nvSpPr>
-        <p:spPr>
-          <a:xfrm>
-            <a:off x="6492240" y="2907792"/>
-            <a:ext cx="4645152" cy="384048"/>
-          </a:xfrm>
-          <a:prstGeom prst="rect">
-            <a:avLst/>
-          </a:prstGeom>
-          <a:noFill/>
-          <a:ln/>
-        </p:spPr>
-        <p:txBody>
-          <a:bodyPr wrap="square" lIns="0" tIns="25400" rIns="25400" bIns="0" rtlCol="0" anchor="ctr"/>
-          <a:lstStyle/>
-          <a:p>
-            <a:pPr algn="ctr" indent="0" marL="0">
-              <a:lnSpc>
-                <a:spcPct val="120000"/>
-              </a:lnSpc>
-              <a:buNone/>
-            </a:pPr>
-            <a:r>
-              <a:rPr lang="en-US" sz="1800" dirty="0">
-                <a:solidFill>
-                  <a:srgbClr val="111111"/>
-                </a:solidFill>
-                <a:latin typeface="Pretendard" pitchFamily="34" charset="0"/>
-                <a:ea typeface="Pretendard" pitchFamily="34" charset="-122"/>
-                <a:cs typeface="Pretendard" pitchFamily="34" charset="-120"/>
-              </a:rPr>
-              <a:t>10  Object Shape Grammar</a:t>
-            </a:r>
-            <a:endParaRPr lang="en-US" sz="1800" dirty="0"/>
-          </a:p>
-        </p:txBody>
-      </p:sp>
-      <p:sp>
-        <p:nvSpPr>
-          <p:cNvPr id="37" name="mdpr:1-2-0772f8:toc-item-11:toc-item-11"/>
-          <p:cNvSpPr txBox="1"/>
-          <p:nvPr/>
-        </p:nvSpPr>
-        <p:spPr>
-          <a:xfrm>
-            <a:off x="6492240" y="3621024"/>
-            <a:ext cx="4645152" cy="384048"/>
-          </a:xfrm>
-          <a:prstGeom prst="rect">
-            <a:avLst/>
-          </a:prstGeom>
-          <a:noFill/>
-          <a:ln/>
-        </p:spPr>
-        <p:txBody>
-          <a:bodyPr wrap="square" lIns="0" tIns="25400" rIns="25400" bIns="0" rtlCol="0" anchor="ctr"/>
-          <a:lstStyle/>
-          <a:p>
-            <a:pPr algn="ctr" indent="0" marL="0">
-              <a:lnSpc>
-                <a:spcPct val="120000"/>
-              </a:lnSpc>
-              <a:buNone/>
-            </a:pPr>
-            <a:r>
-              <a:rPr lang="en-US" sz="1800" dirty="0">
-                <a:solidFill>
-                  <a:srgbClr val="111111"/>
-                </a:solidFill>
-                <a:latin typeface="Pretendard" pitchFamily="34" charset="0"/>
-                <a:ea typeface="Pretendard" pitchFamily="34" charset="-122"/>
-                <a:cs typeface="Pretendard" pitchFamily="34" charset="-120"/>
-              </a:rPr>
-              <a:t>11  Icon and Text Aside</a:t>
-            </a:r>
-            <a:endParaRPr lang="en-US" sz="1800" dirty="0"/>
-          </a:p>
-        </p:txBody>
-      </p:sp>
-      <p:sp>
-        <p:nvSpPr>
-          <p:cNvPr id="38" name="mdpr:1-2-0772f8:toc-item-12:toc-item-12"/>
-          <p:cNvSpPr txBox="1"/>
-          <p:nvPr/>
-        </p:nvSpPr>
-        <p:spPr>
-          <a:xfrm>
-            <a:off x="6492240" y="4334256"/>
-            <a:ext cx="4645152" cy="384048"/>
-          </a:xfrm>
-          <a:prstGeom prst="rect">
-            <a:avLst/>
-          </a:prstGeom>
-          <a:noFill/>
-          <a:ln/>
-        </p:spPr>
-        <p:txBody>
-          <a:bodyPr wrap="square" lIns="0" tIns="25400" rIns="25400" bIns="0" rtlCol="0" anchor="ctr"/>
-          <a:lstStyle/>
-          <a:p>
-            <a:pPr algn="ctr" indent="0" marL="0">
-              <a:lnSpc>
-                <a:spcPct val="120000"/>
-              </a:lnSpc>
-              <a:buNone/>
-            </a:pPr>
-            <a:r>
-              <a:rPr lang="en-US" sz="1800" dirty="0">
-                <a:solidFill>
-                  <a:srgbClr val="111111"/>
-                </a:solidFill>
-                <a:latin typeface="Pretendard" pitchFamily="34" charset="0"/>
-                <a:ea typeface="Pretendard" pitchFamily="34" charset="-122"/>
-                <a:cs typeface="Pretendard" pitchFamily="34" charset="-120"/>
-              </a:rPr>
-              <a:t>12  Overflow Guard</a:t>
-            </a:r>
-            <a:endParaRPr lang="en-US" sz="1800" dirty="0"/>
-          </a:p>
-        </p:txBody>
-      </p:sp>
-      <p:sp>
-        <p:nvSpPr>
-          <p:cNvPr id="39" name="mdpr:1-2-0772f8:toc-item-13:toc-item-13"/>
-          <p:cNvSpPr txBox="1"/>
-          <p:nvPr/>
-        </p:nvSpPr>
-        <p:spPr>
-          <a:xfrm>
-            <a:off x="6492240" y="5047488"/>
-            <a:ext cx="4645152" cy="384048"/>
-          </a:xfrm>
-          <a:prstGeom prst="rect">
-            <a:avLst/>
-          </a:prstGeom>
-          <a:noFill/>
-          <a:ln/>
-        </p:spPr>
-        <p:txBody>
-          <a:bodyPr wrap="square" lIns="0" tIns="25400" rIns="25400" bIns="0" rtlCol="0" anchor="ctr"/>
-          <a:lstStyle/>
-          <a:p>
-            <a:pPr algn="ctr" indent="0" marL="0">
-              <a:lnSpc>
-                <a:spcPct val="120000"/>
-              </a:lnSpc>
-              <a:buNone/>
-            </a:pPr>
-            <a:r>
-              <a:rPr lang="en-US" sz="1800" dirty="0">
-                <a:solidFill>
-                  <a:srgbClr val="111111"/>
-                </a:solidFill>
-                <a:latin typeface="Pretendard" pitchFamily="34" charset="0"/>
-                <a:ea typeface="Pretendard" pitchFamily="34" charset="-122"/>
-                <a:cs typeface="Pretendard" pitchFamily="34" charset="-120"/>
-              </a:rPr>
-              <a:t>13  Image Safe Frame</a:t>
-            </a:r>
-            <a:endParaRPr lang="en-US" sz="1800" dirty="0"/>
-          </a:p>
-        </p:txBody>
-      </p:sp>
-      <p:sp>
-        <p:nvSpPr>
-          <p:cNvPr id="40" name="mdpr:1-2-0772f8:toc-item-14:toc-item-14"/>
-          <p:cNvSpPr txBox="1"/>
-          <p:nvPr/>
-        </p:nvSpPr>
-        <p:spPr>
-          <a:xfrm>
-            <a:off x="6492240" y="5760720"/>
-            <a:ext cx="4645152" cy="384048"/>
-          </a:xfrm>
-          <a:prstGeom prst="rect">
-            <a:avLst/>
-          </a:prstGeom>
-          <a:noFill/>
-          <a:ln/>
-        </p:spPr>
-        <p:txBody>
-          <a:bodyPr wrap="square" lIns="0" tIns="25400" rIns="25400" bIns="0" rtlCol="0" anchor="ctr"/>
-          <a:lstStyle/>
-          <a:p>
-            <a:pPr algn="ctr" indent="0" marL="0">
-              <a:lnSpc>
-                <a:spcPct val="120000"/>
-              </a:lnSpc>
-              <a:buNone/>
-            </a:pPr>
-            <a:r>
-              <a:rPr lang="en-US" sz="1800" dirty="0">
-                <a:solidFill>
-                  <a:srgbClr val="111111"/>
-                </a:solidFill>
-                <a:latin typeface="Pretendard" pitchFamily="34" charset="0"/>
-                <a:ea typeface="Pretendard" pitchFamily="34" charset="-122"/>
-                <a:cs typeface="Pretendard" pitchFamily="34" charset="-120"/>
-              </a:rPr>
-              <a:t>14  Mixed Object Packing</a:t>
             </a:r>
             <a:endParaRPr lang="en-US" sz="1800" dirty="0"/>
           </a:p>
@@ -13536,8 +12940,8 @@
         </p:nvSpPr>
         <p:spPr>
           <a:xfrm>
-            <a:off x="822960" y="1554480"/>
-            <a:ext cx="4937760" cy="73152"/>
+            <a:off x="914400" y="1463040"/>
+            <a:ext cx="10241280" cy="73152"/>
           </a:xfrm>
           <a:prstGeom prst="rect">
             <a:avLst/>
@@ -13557,34 +12961,7 @@
       </p:sp>
       <p:sp>
         <p:nvSpPr>
-          <p:cNvPr id="10" name="Shape 8"/>
-          <p:cNvSpPr/>
-          <p:nvPr/>
-        </p:nvSpPr>
-        <p:spPr>
-          <a:xfrm>
-            <a:off x="6400800" y="1554480"/>
-            <a:ext cx="4937760" cy="73152"/>
-          </a:xfrm>
-          <a:prstGeom prst="rect">
-            <a:avLst/>
-          </a:prstGeom>
-          <a:solidFill>
-            <a:srgbClr val="111827"/>
-          </a:solidFill>
-          <a:ln w="12700">
-            <a:solidFill>
-              <a:srgbClr val="111827">
-                <a:alpha val="0"/>
-              </a:srgbClr>
-            </a:solidFill>
-            <a:prstDash val="solid"/>
-          </a:ln>
-        </p:spPr>
-      </p:sp>
-      <p:sp>
-        <p:nvSpPr>
-          <p:cNvPr id="11" name="mdpr:2-2-4f71ba:title:__title:2-2-4f71ba"/>
+          <p:cNvPr id="10" name="mdpr:2-2-4f71ba:title:__title:2-2-4f71ba"/>
           <p:cNvSpPr txBox="1"/>
           <p:nvPr/>
         </p:nvSpPr>
@@ -13618,7 +12995,24 @@
                 <a:ea typeface="Pretendard" pitchFamily="34" charset="-122"/>
                 <a:cs typeface="Pretendard" pitchFamily="34" charset="-120"/>
               </a:rPr>
-              <a:t>Object Shape Grammar (Cont. 2/2)</a:t>
+              <a:t>Object Shape Grammar</a:t>
+            </a:r>
+            <a:pPr algn="ctr" indent="0" marL="0">
+              <a:lnSpc>
+                <a:spcPct val="120000"/>
+              </a:lnSpc>
+              <a:buNone/>
+            </a:pPr>
+            <a:r>
+              <a:rPr lang="en-US" sz="2000" dirty="0">
+                <a:solidFill>
+                  <a:srgbClr val="949494"/>
+                </a:solidFill>
+                <a:latin typeface="Pretendard" pitchFamily="34" charset="0"/>
+                <a:ea typeface="Pretendard" pitchFamily="34" charset="-122"/>
+                <a:cs typeface="Pretendard" pitchFamily="34" charset="-120"/>
+              </a:rPr>
+              <a:t> (Cont. 2/2)</a:t>
             </a:r>
             <a:endParaRPr lang="en-US" sz="3400" dirty="0"/>
           </a:p>
@@ -13626,14 +13020,14 @@
       </p:sp>
       <p:sp>
         <p:nvSpPr>
-          <p:cNvPr id="12" name="mdpr:2-2-4f71ba:left:block-27-chunk-2"/>
+          <p:cNvPr id="11" name="mdpr:2-2-4f71ba:body:block-27-chunk-2"/>
           <p:cNvSpPr txBox="1"/>
           <p:nvPr/>
         </p:nvSpPr>
         <p:spPr>
           <a:xfrm>
-            <a:off x="896112" y="1664208"/>
-            <a:ext cx="4791456" cy="4169664"/>
+            <a:off x="987552" y="1572768"/>
+            <a:ext cx="10094976" cy="4261104"/>
           </a:xfrm>
           <a:prstGeom prst="rect">
             <a:avLst/>
@@ -13681,28 +13075,6 @@
             </a:r>
             <a:endParaRPr lang="en-US" sz="2200" dirty="0"/>
           </a:p>
-        </p:txBody>
-      </p:sp>
-      <p:sp>
-        <p:nvSpPr>
-          <p:cNvPr id="13" name="mdpr:2-2-4f71ba:right:block-27-chunk-2"/>
-          <p:cNvSpPr txBox="1"/>
-          <p:nvPr/>
-        </p:nvSpPr>
-        <p:spPr>
-          <a:xfrm>
-            <a:off x="6473952" y="1664208"/>
-            <a:ext cx="4791456" cy="4169664"/>
-          </a:xfrm>
-          <a:prstGeom prst="rect">
-            <a:avLst/>
-          </a:prstGeom>
-          <a:noFill/>
-          <a:ln/>
-        </p:spPr>
-        <p:txBody>
-          <a:bodyPr wrap="square" lIns="0" tIns="25400" rIns="25400" bIns="0" rtlCol="0" anchor="t"/>
-          <a:lstStyle/>
           <a:p>
             <a:pPr algn="l" indent="0" marL="0">
               <a:lnSpc>
@@ -13721,6 +13093,9 @@
               </a:rPr>
               <a:t>- Rounded panel</a:t>
             </a:r>
+            <a:endParaRPr lang="en-US" sz="2200" dirty="0"/>
+          </a:p>
+          <a:p>
             <a:pPr algn="l" indent="0" marL="0">
               <a:lnSpc>
                 <a:spcPct val="120000"/>
@@ -16803,135 +16178,16 @@
           </a:ln>
         </p:spPr>
       </p:sp>
-      <p:pic>
-        <p:nvPicPr>
-          <p:cNvPr id="9" name="Image 0" descr="preencoded.png">    </p:cNvPr>
-          <p:cNvPicPr>
-            <a:picLocks noChangeAspect="1"/>
-          </p:cNvPicPr>
-          <p:nvPr/>
-        </p:nvPicPr>
-        <p:blipFill>
-          <a:blip r:embed="rId1">
-            <a:extLst>
-              <a:ext uri="{96DAC541-7B7A-43D3-8B79-37D633B846F1}">
-                <asvg:svgBlip xmlns:asvg="http://schemas.microsoft.com/office/drawing/2016/SVG/main" r:embed="rId2"/>
-              </a:ext>
-            </a:extLst>
-          </a:blip>
-          <a:stretch>
-            <a:fillRect/>
-          </a:stretch>
-        </p:blipFill>
-        <p:spPr>
-          <a:xfrm>
-            <a:off x="914400" y="1865376"/>
-            <a:ext cx="10241280" cy="1024128"/>
-          </a:xfrm>
-          <a:prstGeom prst="rect">
-            <a:avLst/>
-          </a:prstGeom>
-        </p:spPr>
-      </p:pic>
-      <p:pic>
-        <p:nvPicPr>
-          <p:cNvPr id="10" name="Image 1" descr="preencoded.png">    </p:cNvPr>
-          <p:cNvPicPr>
-            <a:picLocks noChangeAspect="1"/>
-          </p:cNvPicPr>
-          <p:nvPr/>
-        </p:nvPicPr>
-        <p:blipFill>
-          <a:blip r:embed="rId3">
-            <a:extLst>
-              <a:ext uri="{96DAC541-7B7A-43D3-8B79-37D633B846F1}">
-                <asvg:svgBlip xmlns:asvg="http://schemas.microsoft.com/office/drawing/2016/SVG/main" r:embed="rId4"/>
-              </a:ext>
-            </a:extLst>
-          </a:blip>
-          <a:stretch>
-            <a:fillRect/>
-          </a:stretch>
-        </p:blipFill>
-        <p:spPr>
-          <a:xfrm>
-            <a:off x="914400" y="3191256"/>
-            <a:ext cx="10241280" cy="1024128"/>
-          </a:xfrm>
-          <a:prstGeom prst="rect">
-            <a:avLst/>
-          </a:prstGeom>
-        </p:spPr>
-      </p:pic>
-      <p:pic>
-        <p:nvPicPr>
-          <p:cNvPr id="11" name="Image 2" descr="preencoded.png">    </p:cNvPr>
-          <p:cNvPicPr>
-            <a:picLocks noChangeAspect="1"/>
-          </p:cNvPicPr>
-          <p:nvPr/>
-        </p:nvPicPr>
-        <p:blipFill>
-          <a:blip r:embed="rId5">
-            <a:extLst>
-              <a:ext uri="{96DAC541-7B7A-43D3-8B79-37D633B846F1}">
-                <asvg:svgBlip xmlns:asvg="http://schemas.microsoft.com/office/drawing/2016/SVG/main" r:embed="rId6"/>
-              </a:ext>
-            </a:extLst>
-          </a:blip>
-          <a:stretch>
-            <a:fillRect/>
-          </a:stretch>
-        </p:blipFill>
-        <p:spPr>
-          <a:xfrm>
-            <a:off x="914400" y="4507992"/>
-            <a:ext cx="10241280" cy="1024128"/>
-          </a:xfrm>
-          <a:prstGeom prst="rect">
-            <a:avLst/>
-          </a:prstGeom>
-        </p:spPr>
-      </p:pic>
-      <p:sp>
-        <p:nvSpPr>
-          <p:cNvPr id="12" name="Shape 7"/>
-          <p:cNvSpPr/>
-          <p:nvPr/>
-        </p:nvSpPr>
-        <p:spPr>
-          <a:xfrm>
-            <a:off x="786384" y="1956816"/>
-            <a:ext cx="32004" cy="3483864"/>
-          </a:xfrm>
-          <a:prstGeom prst="rect">
-            <a:avLst/>
-          </a:prstGeom>
-          <a:solidFill>
-            <a:srgbClr val="E5E7EB">
-              <a:alpha val="80000"/>
-            </a:srgbClr>
-          </a:solidFill>
-          <a:ln w="12700">
-            <a:solidFill>
-              <a:srgbClr val="E5E7EB">
-                <a:alpha val="0"/>
-              </a:srgbClr>
-            </a:solidFill>
-            <a:prstDash val="solid"/>
-          </a:ln>
-        </p:spPr>
-      </p:sp>
-      <p:sp>
-        <p:nvSpPr>
-          <p:cNvPr id="13" name="Shape 8"/>
-          <p:cNvSpPr/>
-          <p:nvPr/>
-        </p:nvSpPr>
-        <p:spPr>
-          <a:xfrm>
-            <a:off x="914400" y="1865376"/>
-            <a:ext cx="73152" cy="1024128"/>
+      <p:sp>
+        <p:nvSpPr>
+          <p:cNvPr id="9" name="Shape 7"/>
+          <p:cNvSpPr/>
+          <p:nvPr/>
+        </p:nvSpPr>
+        <p:spPr>
+          <a:xfrm>
+            <a:off x="822960" y="1938528"/>
+            <a:ext cx="73152" cy="2514600"/>
           </a:xfrm>
           <a:prstGeom prst="rect">
             <a:avLst/>
@@ -16951,14 +16207,14 @@
       </p:sp>
       <p:sp>
         <p:nvSpPr>
-          <p:cNvPr id="14" name="Shape 9"/>
-          <p:cNvSpPr/>
-          <p:nvPr/>
-        </p:nvSpPr>
-        <p:spPr>
-          <a:xfrm>
-            <a:off x="914400" y="3191256"/>
-            <a:ext cx="73152" cy="1024128"/>
+          <p:cNvPr id="10" name="Shape 8"/>
+          <p:cNvSpPr/>
+          <p:nvPr/>
+        </p:nvSpPr>
+        <p:spPr>
+          <a:xfrm>
+            <a:off x="4343400" y="1938528"/>
+            <a:ext cx="73152" cy="2514600"/>
           </a:xfrm>
           <a:prstGeom prst="rect">
             <a:avLst/>
@@ -16978,14 +16234,14 @@
       </p:sp>
       <p:sp>
         <p:nvSpPr>
-          <p:cNvPr id="15" name="Shape 10"/>
-          <p:cNvSpPr/>
-          <p:nvPr/>
-        </p:nvSpPr>
-        <p:spPr>
-          <a:xfrm>
-            <a:off x="914400" y="4507992"/>
-            <a:ext cx="73152" cy="1024128"/>
+          <p:cNvPr id="11" name="Shape 9"/>
+          <p:cNvSpPr/>
+          <p:nvPr/>
+        </p:nvSpPr>
+        <p:spPr>
+          <a:xfrm>
+            <a:off x="7863840" y="1938528"/>
+            <a:ext cx="73152" cy="2514600"/>
           </a:xfrm>
           <a:prstGeom prst="rect">
             <a:avLst/>
@@ -17005,7 +16261,7 @@
       </p:sp>
       <p:sp>
         <p:nvSpPr>
-          <p:cNvPr id="16" name="mdpr:actions-output-review-326e07:title:__title:actions-output-review-326e07"/>
+          <p:cNvPr id="12" name="mdpr:actions-output-review-326e07:title:__title:actions-output-review-326e07"/>
           <p:cNvSpPr txBox="1"/>
           <p:nvPr/>
         </p:nvSpPr>
@@ -17047,14 +16303,14 @@
       </p:sp>
       <p:sp>
         <p:nvSpPr>
-          <p:cNvPr id="17" name="mdpr:actions-output-review-326e07:item-1:block-41"/>
+          <p:cNvPr id="13" name="mdpr:actions-output-review-326e07:item-1:block-41"/>
           <p:cNvSpPr txBox="1"/>
           <p:nvPr/>
         </p:nvSpPr>
         <p:spPr>
           <a:xfrm>
-            <a:off x="1133856" y="1957548"/>
-            <a:ext cx="9820656" cy="839785"/>
+            <a:off x="1042416" y="2103120"/>
+            <a:ext cx="2825496" cy="2185416"/>
           </a:xfrm>
           <a:prstGeom prst="rect">
             <a:avLst/>
@@ -17106,14 +16362,14 @@
       </p:sp>
       <p:sp>
         <p:nvSpPr>
-          <p:cNvPr id="18" name="mdpr:actions-output-review-326e07:item-2:block-41"/>
+          <p:cNvPr id="14" name="mdpr:actions-output-review-326e07:item-2:block-41"/>
           <p:cNvSpPr txBox="1"/>
           <p:nvPr/>
         </p:nvSpPr>
         <p:spPr>
           <a:xfrm>
-            <a:off x="1133856" y="3283428"/>
-            <a:ext cx="9820656" cy="839785"/>
+            <a:off x="4562856" y="2103120"/>
+            <a:ext cx="2825496" cy="2185416"/>
           </a:xfrm>
           <a:prstGeom prst="rect">
             <a:avLst/>
@@ -17165,14 +16421,14 @@
       </p:sp>
       <p:sp>
         <p:nvSpPr>
-          <p:cNvPr id="19" name="mdpr:actions-output-review-326e07:item-3:block-41"/>
+          <p:cNvPr id="15" name="mdpr:actions-output-review-326e07:item-3:block-41"/>
           <p:cNvSpPr txBox="1"/>
           <p:nvPr/>
         </p:nvSpPr>
         <p:spPr>
           <a:xfrm>
-            <a:off x="1133856" y="4600164"/>
-            <a:ext cx="9820656" cy="839785"/>
+            <a:off x="8083296" y="2103120"/>
+            <a:ext cx="2825496" cy="2185416"/>
           </a:xfrm>
           <a:prstGeom prst="rect">
             <a:avLst/>
@@ -17437,8 +16693,8 @@
         </p:nvSpPr>
         <p:spPr>
           <a:xfrm>
-            <a:off x="822960" y="3099816"/>
-            <a:ext cx="10515600" cy="45720"/>
+            <a:off x="822960" y="1737360"/>
+            <a:ext cx="73152" cy="841248"/>
           </a:xfrm>
           <a:prstGeom prst="rect">
             <a:avLst/>
@@ -17464,8 +16720,8 @@
         </p:nvSpPr>
         <p:spPr>
           <a:xfrm>
-            <a:off x="822960" y="4288536"/>
-            <a:ext cx="2011680" cy="45720"/>
+            <a:off x="822960" y="2779776"/>
+            <a:ext cx="73152" cy="841248"/>
           </a:xfrm>
           <a:prstGeom prst="rect">
             <a:avLst/>
@@ -17491,7 +16747,7 @@
         </p:nvSpPr>
         <p:spPr>
           <a:xfrm>
-            <a:off x="822960" y="3300984"/>
+            <a:off x="822960" y="3822192"/>
             <a:ext cx="73152" cy="841248"/>
           </a:xfrm>
           <a:prstGeom prst="rect">
@@ -17512,7 +16768,115 @@
       </p:sp>
       <p:sp>
         <p:nvSpPr>
-          <p:cNvPr id="12" name="mdpr:2-2-7bfb60:title:__title:2-2-7bfb60"/>
+          <p:cNvPr id="12" name="Shape 10"/>
+          <p:cNvSpPr/>
+          <p:nvPr/>
+        </p:nvSpPr>
+        <p:spPr>
+          <a:xfrm>
+            <a:off x="822960" y="4864608"/>
+            <a:ext cx="73152" cy="841248"/>
+          </a:xfrm>
+          <a:prstGeom prst="rect">
+            <a:avLst/>
+          </a:prstGeom>
+          <a:solidFill>
+            <a:srgbClr val="E5E7EB"/>
+          </a:solidFill>
+          <a:ln w="12700">
+            <a:solidFill>
+              <a:srgbClr val="E5E7EB">
+                <a:alpha val="0"/>
+              </a:srgbClr>
+            </a:solidFill>
+            <a:prstDash val="solid"/>
+          </a:ln>
+        </p:spPr>
+      </p:sp>
+      <p:sp>
+        <p:nvSpPr>
+          <p:cNvPr id="13" name="Shape 11"/>
+          <p:cNvSpPr/>
+          <p:nvPr/>
+        </p:nvSpPr>
+        <p:spPr>
+          <a:xfrm>
+            <a:off x="6272784" y="1737360"/>
+            <a:ext cx="73152" cy="841248"/>
+          </a:xfrm>
+          <a:prstGeom prst="rect">
+            <a:avLst/>
+          </a:prstGeom>
+          <a:solidFill>
+            <a:srgbClr val="111827"/>
+          </a:solidFill>
+          <a:ln w="12700">
+            <a:solidFill>
+              <a:srgbClr val="111827">
+                <a:alpha val="0"/>
+              </a:srgbClr>
+            </a:solidFill>
+            <a:prstDash val="solid"/>
+          </a:ln>
+        </p:spPr>
+      </p:sp>
+      <p:sp>
+        <p:nvSpPr>
+          <p:cNvPr id="14" name="Shape 12"/>
+          <p:cNvSpPr/>
+          <p:nvPr/>
+        </p:nvSpPr>
+        <p:spPr>
+          <a:xfrm>
+            <a:off x="6272784" y="2779776"/>
+            <a:ext cx="73152" cy="841248"/>
+          </a:xfrm>
+          <a:prstGeom prst="rect">
+            <a:avLst/>
+          </a:prstGeom>
+          <a:solidFill>
+            <a:srgbClr val="E5E7EB"/>
+          </a:solidFill>
+          <a:ln w="12700">
+            <a:solidFill>
+              <a:srgbClr val="E5E7EB">
+                <a:alpha val="0"/>
+              </a:srgbClr>
+            </a:solidFill>
+            <a:prstDash val="solid"/>
+          </a:ln>
+        </p:spPr>
+      </p:sp>
+      <p:sp>
+        <p:nvSpPr>
+          <p:cNvPr id="15" name="Shape 13"/>
+          <p:cNvSpPr/>
+          <p:nvPr/>
+        </p:nvSpPr>
+        <p:spPr>
+          <a:xfrm>
+            <a:off x="6272784" y="3822192"/>
+            <a:ext cx="73152" cy="841248"/>
+          </a:xfrm>
+          <a:prstGeom prst="rect">
+            <a:avLst/>
+          </a:prstGeom>
+          <a:solidFill>
+            <a:srgbClr val="111827"/>
+          </a:solidFill>
+          <a:ln w="12700">
+            <a:solidFill>
+              <a:srgbClr val="111827">
+                <a:alpha val="0"/>
+              </a:srgbClr>
+            </a:solidFill>
+            <a:prstDash val="solid"/>
+          </a:ln>
+        </p:spPr>
+      </p:sp>
+      <p:sp>
+        <p:nvSpPr>
+          <p:cNvPr id="16" name="mdpr:2-2-7bfb60:title:__title:2-2-7bfb60"/>
           <p:cNvSpPr txBox="1"/>
           <p:nvPr/>
         </p:nvSpPr>
@@ -17546,7 +16910,24 @@
                 <a:ea typeface="Pretendard" pitchFamily="34" charset="-122"/>
                 <a:cs typeface="Pretendard" pitchFamily="34" charset="-120"/>
               </a:rPr>
-              <a:t>Agenda (Cont. 2/2)</a:t>
+              <a:t>Agenda</a:t>
+            </a:r>
+            <a:pPr algn="ctr" indent="0" marL="0">
+              <a:lnSpc>
+                <a:spcPct val="120000"/>
+              </a:lnSpc>
+              <a:buNone/>
+            </a:pPr>
+            <a:r>
+              <a:rPr lang="en-US" sz="2300" dirty="0">
+                <a:solidFill>
+                  <a:srgbClr val="949494"/>
+                </a:solidFill>
+                <a:latin typeface="Pretendard" pitchFamily="34" charset="0"/>
+                <a:ea typeface="Pretendard" pitchFamily="34" charset="-122"/>
+                <a:cs typeface="Pretendard" pitchFamily="34" charset="-120"/>
+              </a:rPr>
+              <a:t> (Cont. 2/2)</a:t>
             </a:r>
             <a:endParaRPr lang="en-US" sz="3800" dirty="0"/>
           </a:p>
@@ -17554,14 +16935,14 @@
       </p:sp>
       <p:sp>
         <p:nvSpPr>
-          <p:cNvPr id="13" name="mdpr:2-2-7bfb60:toc-item-1:toc-item-15"/>
+          <p:cNvPr id="17" name="mdpr:2-2-7bfb60:toc-item-1:toc-item-9"/>
           <p:cNvSpPr txBox="1"/>
           <p:nvPr/>
         </p:nvSpPr>
         <p:spPr>
           <a:xfrm>
-            <a:off x="1042416" y="3392424"/>
-            <a:ext cx="10094976" cy="658368"/>
+            <a:off x="1042416" y="1828800"/>
+            <a:ext cx="4645152" cy="658368"/>
           </a:xfrm>
           <a:prstGeom prst="rect">
             <a:avLst/>
@@ -17580,7 +16961,7 @@
               <a:buNone/>
             </a:pPr>
             <a:r>
-              <a:rPr lang="en-US" sz="2200" dirty="0">
+              <a:rPr lang="en-US" sz="1800" dirty="0">
                 <a:solidFill>
                   <a:srgbClr val="111111"/>
                 </a:solidFill>
@@ -17588,9 +16969,261 @@
                 <a:ea typeface="Pretendard" pitchFamily="34" charset="-122"/>
                 <a:cs typeface="Pretendard" pitchFamily="34" charset="-120"/>
               </a:rPr>
-              <a:t>01  Actions Output Review</a:t>
+              <a:t>09  Editable Proof Objects</a:t>
             </a:r>
-            <a:endParaRPr lang="en-US" sz="2200" dirty="0"/>
+            <a:endParaRPr lang="en-US" sz="1800" dirty="0"/>
+          </a:p>
+        </p:txBody>
+      </p:sp>
+      <p:sp>
+        <p:nvSpPr>
+          <p:cNvPr id="18" name="mdpr:2-2-7bfb60:toc-item-2:toc-item-10"/>
+          <p:cNvSpPr txBox="1"/>
+          <p:nvPr/>
+        </p:nvSpPr>
+        <p:spPr>
+          <a:xfrm>
+            <a:off x="1042416" y="2871216"/>
+            <a:ext cx="4645152" cy="658368"/>
+          </a:xfrm>
+          <a:prstGeom prst="rect">
+            <a:avLst/>
+          </a:prstGeom>
+          <a:noFill/>
+          <a:ln/>
+        </p:spPr>
+        <p:txBody>
+          <a:bodyPr wrap="square" lIns="0" tIns="25400" rIns="25400" bIns="0" rtlCol="0" anchor="ctr"/>
+          <a:lstStyle/>
+          <a:p>
+            <a:pPr algn="ctr" indent="0" marL="0">
+              <a:lnSpc>
+                <a:spcPct val="120000"/>
+              </a:lnSpc>
+              <a:buNone/>
+            </a:pPr>
+            <a:r>
+              <a:rPr lang="en-US" sz="1800" dirty="0">
+                <a:solidFill>
+                  <a:srgbClr val="111111"/>
+                </a:solidFill>
+                <a:latin typeface="Pretendard" pitchFamily="34" charset="0"/>
+                <a:ea typeface="Pretendard" pitchFamily="34" charset="-122"/>
+                <a:cs typeface="Pretendard" pitchFamily="34" charset="-120"/>
+              </a:rPr>
+              <a:t>10  Object Shape Grammar</a:t>
+            </a:r>
+            <a:endParaRPr lang="en-US" sz="1800" dirty="0"/>
+          </a:p>
+        </p:txBody>
+      </p:sp>
+      <p:sp>
+        <p:nvSpPr>
+          <p:cNvPr id="19" name="mdpr:2-2-7bfb60:toc-item-3:toc-item-11"/>
+          <p:cNvSpPr txBox="1"/>
+          <p:nvPr/>
+        </p:nvSpPr>
+        <p:spPr>
+          <a:xfrm>
+            <a:off x="1042416" y="3913632"/>
+            <a:ext cx="4645152" cy="658368"/>
+          </a:xfrm>
+          <a:prstGeom prst="rect">
+            <a:avLst/>
+          </a:prstGeom>
+          <a:noFill/>
+          <a:ln/>
+        </p:spPr>
+        <p:txBody>
+          <a:bodyPr wrap="square" lIns="0" tIns="25400" rIns="25400" bIns="0" rtlCol="0" anchor="ctr"/>
+          <a:lstStyle/>
+          <a:p>
+            <a:pPr algn="ctr" indent="0" marL="0">
+              <a:lnSpc>
+                <a:spcPct val="120000"/>
+              </a:lnSpc>
+              <a:buNone/>
+            </a:pPr>
+            <a:r>
+              <a:rPr lang="en-US" sz="1800" dirty="0">
+                <a:solidFill>
+                  <a:srgbClr val="111111"/>
+                </a:solidFill>
+                <a:latin typeface="Pretendard" pitchFamily="34" charset="0"/>
+                <a:ea typeface="Pretendard" pitchFamily="34" charset="-122"/>
+                <a:cs typeface="Pretendard" pitchFamily="34" charset="-120"/>
+              </a:rPr>
+              <a:t>11  Icon and Text Aside</a:t>
+            </a:r>
+            <a:endParaRPr lang="en-US" sz="1800" dirty="0"/>
+          </a:p>
+        </p:txBody>
+      </p:sp>
+      <p:sp>
+        <p:nvSpPr>
+          <p:cNvPr id="20" name="mdpr:2-2-7bfb60:toc-item-4:toc-item-12"/>
+          <p:cNvSpPr txBox="1"/>
+          <p:nvPr/>
+        </p:nvSpPr>
+        <p:spPr>
+          <a:xfrm>
+            <a:off x="1042416" y="4956048"/>
+            <a:ext cx="4645152" cy="658368"/>
+          </a:xfrm>
+          <a:prstGeom prst="rect">
+            <a:avLst/>
+          </a:prstGeom>
+          <a:noFill/>
+          <a:ln/>
+        </p:spPr>
+        <p:txBody>
+          <a:bodyPr wrap="square" lIns="0" tIns="25400" rIns="25400" bIns="0" rtlCol="0" anchor="ctr"/>
+          <a:lstStyle/>
+          <a:p>
+            <a:pPr algn="ctr" indent="0" marL="0">
+              <a:lnSpc>
+                <a:spcPct val="120000"/>
+              </a:lnSpc>
+              <a:buNone/>
+            </a:pPr>
+            <a:r>
+              <a:rPr lang="en-US" sz="1800" dirty="0">
+                <a:solidFill>
+                  <a:srgbClr val="111111"/>
+                </a:solidFill>
+                <a:latin typeface="Pretendard" pitchFamily="34" charset="0"/>
+                <a:ea typeface="Pretendard" pitchFamily="34" charset="-122"/>
+                <a:cs typeface="Pretendard" pitchFamily="34" charset="-120"/>
+              </a:rPr>
+              <a:t>12  Overflow Guard</a:t>
+            </a:r>
+            <a:endParaRPr lang="en-US" sz="1800" dirty="0"/>
+          </a:p>
+        </p:txBody>
+      </p:sp>
+      <p:sp>
+        <p:nvSpPr>
+          <p:cNvPr id="21" name="mdpr:2-2-7bfb60:toc-item-5:toc-item-13"/>
+          <p:cNvSpPr txBox="1"/>
+          <p:nvPr/>
+        </p:nvSpPr>
+        <p:spPr>
+          <a:xfrm>
+            <a:off x="6492240" y="1828800"/>
+            <a:ext cx="4645152" cy="658368"/>
+          </a:xfrm>
+          <a:prstGeom prst="rect">
+            <a:avLst/>
+          </a:prstGeom>
+          <a:noFill/>
+          <a:ln/>
+        </p:spPr>
+        <p:txBody>
+          <a:bodyPr wrap="square" lIns="0" tIns="25400" rIns="25400" bIns="0" rtlCol="0" anchor="ctr"/>
+          <a:lstStyle/>
+          <a:p>
+            <a:pPr algn="ctr" indent="0" marL="0">
+              <a:lnSpc>
+                <a:spcPct val="120000"/>
+              </a:lnSpc>
+              <a:buNone/>
+            </a:pPr>
+            <a:r>
+              <a:rPr lang="en-US" sz="1800" dirty="0">
+                <a:solidFill>
+                  <a:srgbClr val="111111"/>
+                </a:solidFill>
+                <a:latin typeface="Pretendard" pitchFamily="34" charset="0"/>
+                <a:ea typeface="Pretendard" pitchFamily="34" charset="-122"/>
+                <a:cs typeface="Pretendard" pitchFamily="34" charset="-120"/>
+              </a:rPr>
+              <a:t>13  Image Safe Frame</a:t>
+            </a:r>
+            <a:endParaRPr lang="en-US" sz="1800" dirty="0"/>
+          </a:p>
+        </p:txBody>
+      </p:sp>
+      <p:sp>
+        <p:nvSpPr>
+          <p:cNvPr id="22" name="mdpr:2-2-7bfb60:toc-item-6:toc-item-14"/>
+          <p:cNvSpPr txBox="1"/>
+          <p:nvPr/>
+        </p:nvSpPr>
+        <p:spPr>
+          <a:xfrm>
+            <a:off x="6492240" y="2871216"/>
+            <a:ext cx="4645152" cy="658368"/>
+          </a:xfrm>
+          <a:prstGeom prst="rect">
+            <a:avLst/>
+          </a:prstGeom>
+          <a:noFill/>
+          <a:ln/>
+        </p:spPr>
+        <p:txBody>
+          <a:bodyPr wrap="square" lIns="0" tIns="25400" rIns="25400" bIns="0" rtlCol="0" anchor="ctr"/>
+          <a:lstStyle/>
+          <a:p>
+            <a:pPr algn="ctr" indent="0" marL="0">
+              <a:lnSpc>
+                <a:spcPct val="120000"/>
+              </a:lnSpc>
+              <a:buNone/>
+            </a:pPr>
+            <a:r>
+              <a:rPr lang="en-US" sz="1800" dirty="0">
+                <a:solidFill>
+                  <a:srgbClr val="111111"/>
+                </a:solidFill>
+                <a:latin typeface="Pretendard" pitchFamily="34" charset="0"/>
+                <a:ea typeface="Pretendard" pitchFamily="34" charset="-122"/>
+                <a:cs typeface="Pretendard" pitchFamily="34" charset="-120"/>
+              </a:rPr>
+              <a:t>14  Mixed Object Packing</a:t>
+            </a:r>
+            <a:endParaRPr lang="en-US" sz="1800" dirty="0"/>
+          </a:p>
+        </p:txBody>
+      </p:sp>
+      <p:sp>
+        <p:nvSpPr>
+          <p:cNvPr id="23" name="mdpr:2-2-7bfb60:toc-item-7:toc-item-15"/>
+          <p:cNvSpPr txBox="1"/>
+          <p:nvPr/>
+        </p:nvSpPr>
+        <p:spPr>
+          <a:xfrm>
+            <a:off x="6492240" y="3913632"/>
+            <a:ext cx="4645152" cy="658368"/>
+          </a:xfrm>
+          <a:prstGeom prst="rect">
+            <a:avLst/>
+          </a:prstGeom>
+          <a:noFill/>
+          <a:ln/>
+        </p:spPr>
+        <p:txBody>
+          <a:bodyPr wrap="square" lIns="0" tIns="25400" rIns="25400" bIns="0" rtlCol="0" anchor="ctr"/>
+          <a:lstStyle/>
+          <a:p>
+            <a:pPr algn="ctr" indent="0" marL="0">
+              <a:lnSpc>
+                <a:spcPct val="120000"/>
+              </a:lnSpc>
+              <a:buNone/>
+            </a:pPr>
+            <a:r>
+              <a:rPr lang="en-US" sz="1800" dirty="0">
+                <a:solidFill>
+                  <a:srgbClr val="111111"/>
+                </a:solidFill>
+                <a:latin typeface="Pretendard" pitchFamily="34" charset="0"/>
+                <a:ea typeface="Pretendard" pitchFamily="34" charset="-122"/>
+                <a:cs typeface="Pretendard" pitchFamily="34" charset="-120"/>
+              </a:rPr>
+              <a:t>15  Actions Output Review</a:t>
+            </a:r>
+            <a:endParaRPr lang="en-US" sz="1800" dirty="0"/>
           </a:p>
         </p:txBody>
       </p:sp>
@@ -18357,135 +17990,16 @@
           </a:ln>
         </p:spPr>
       </p:sp>
-      <p:pic>
-        <p:nvPicPr>
-          <p:cNvPr id="9" name="Image 0" descr="preencoded.png">    </p:cNvPr>
-          <p:cNvPicPr>
-            <a:picLocks noChangeAspect="1"/>
-          </p:cNvPicPr>
-          <p:nvPr/>
-        </p:nvPicPr>
-        <p:blipFill>
-          <a:blip r:embed="rId1">
-            <a:extLst>
-              <a:ext uri="{96DAC541-7B7A-43D3-8B79-37D633B846F1}">
-                <asvg:svgBlip xmlns:asvg="http://schemas.microsoft.com/office/drawing/2016/SVG/main" r:embed="rId2"/>
-              </a:ext>
-            </a:extLst>
-          </a:blip>
-          <a:stretch>
-            <a:fillRect/>
-          </a:stretch>
-        </p:blipFill>
-        <p:spPr>
-          <a:xfrm>
-            <a:off x="914400" y="1865376"/>
-            <a:ext cx="10241280" cy="1024128"/>
-          </a:xfrm>
-          <a:prstGeom prst="rect">
-            <a:avLst/>
-          </a:prstGeom>
-        </p:spPr>
-      </p:pic>
-      <p:pic>
-        <p:nvPicPr>
-          <p:cNvPr id="10" name="Image 1" descr="preencoded.png">    </p:cNvPr>
-          <p:cNvPicPr>
-            <a:picLocks noChangeAspect="1"/>
-          </p:cNvPicPr>
-          <p:nvPr/>
-        </p:nvPicPr>
-        <p:blipFill>
-          <a:blip r:embed="rId3">
-            <a:extLst>
-              <a:ext uri="{96DAC541-7B7A-43D3-8B79-37D633B846F1}">
-                <asvg:svgBlip xmlns:asvg="http://schemas.microsoft.com/office/drawing/2016/SVG/main" r:embed="rId4"/>
-              </a:ext>
-            </a:extLst>
-          </a:blip>
-          <a:stretch>
-            <a:fillRect/>
-          </a:stretch>
-        </p:blipFill>
-        <p:spPr>
-          <a:xfrm>
-            <a:off x="914400" y="3191256"/>
-            <a:ext cx="10241280" cy="1024128"/>
-          </a:xfrm>
-          <a:prstGeom prst="rect">
-            <a:avLst/>
-          </a:prstGeom>
-        </p:spPr>
-      </p:pic>
-      <p:pic>
-        <p:nvPicPr>
-          <p:cNvPr id="11" name="Image 2" descr="preencoded.png">    </p:cNvPr>
-          <p:cNvPicPr>
-            <a:picLocks noChangeAspect="1"/>
-          </p:cNvPicPr>
-          <p:nvPr/>
-        </p:nvPicPr>
-        <p:blipFill>
-          <a:blip r:embed="rId5">
-            <a:extLst>
-              <a:ext uri="{96DAC541-7B7A-43D3-8B79-37D633B846F1}">
-                <asvg:svgBlip xmlns:asvg="http://schemas.microsoft.com/office/drawing/2016/SVG/main" r:embed="rId6"/>
-              </a:ext>
-            </a:extLst>
-          </a:blip>
-          <a:stretch>
-            <a:fillRect/>
-          </a:stretch>
-        </p:blipFill>
-        <p:spPr>
-          <a:xfrm>
-            <a:off x="914400" y="4507992"/>
-            <a:ext cx="10241280" cy="1024128"/>
-          </a:xfrm>
-          <a:prstGeom prst="rect">
-            <a:avLst/>
-          </a:prstGeom>
-        </p:spPr>
-      </p:pic>
-      <p:sp>
-        <p:nvSpPr>
-          <p:cNvPr id="12" name="Shape 7"/>
-          <p:cNvSpPr/>
-          <p:nvPr/>
-        </p:nvSpPr>
-        <p:spPr>
-          <a:xfrm>
-            <a:off x="786384" y="1956816"/>
-            <a:ext cx="32004" cy="3483864"/>
-          </a:xfrm>
-          <a:prstGeom prst="rect">
-            <a:avLst/>
-          </a:prstGeom>
-          <a:solidFill>
-            <a:srgbClr val="E5E7EB">
-              <a:alpha val="80000"/>
-            </a:srgbClr>
-          </a:solidFill>
-          <a:ln w="12700">
-            <a:solidFill>
-              <a:srgbClr val="E5E7EB">
-                <a:alpha val="0"/>
-              </a:srgbClr>
-            </a:solidFill>
-            <a:prstDash val="solid"/>
-          </a:ln>
-        </p:spPr>
-      </p:sp>
-      <p:sp>
-        <p:nvSpPr>
-          <p:cNvPr id="13" name="Shape 8"/>
-          <p:cNvSpPr/>
-          <p:nvPr/>
-        </p:nvSpPr>
-        <p:spPr>
-          <a:xfrm>
-            <a:off x="914400" y="1865376"/>
-            <a:ext cx="73152" cy="1024128"/>
+      <p:sp>
+        <p:nvSpPr>
+          <p:cNvPr id="9" name="Shape 7"/>
+          <p:cNvSpPr/>
+          <p:nvPr/>
+        </p:nvSpPr>
+        <p:spPr>
+          <a:xfrm>
+            <a:off x="822960" y="1938528"/>
+            <a:ext cx="73152" cy="2514600"/>
           </a:xfrm>
           <a:prstGeom prst="rect">
             <a:avLst/>
@@ -18505,14 +18019,14 @@
       </p:sp>
       <p:sp>
         <p:nvSpPr>
-          <p:cNvPr id="14" name="Shape 9"/>
-          <p:cNvSpPr/>
-          <p:nvPr/>
-        </p:nvSpPr>
-        <p:spPr>
-          <a:xfrm>
-            <a:off x="914400" y="3191256"/>
-            <a:ext cx="73152" cy="1024128"/>
+          <p:cNvPr id="10" name="Shape 8"/>
+          <p:cNvSpPr/>
+          <p:nvPr/>
+        </p:nvSpPr>
+        <p:spPr>
+          <a:xfrm>
+            <a:off x="4343400" y="1938528"/>
+            <a:ext cx="73152" cy="2514600"/>
           </a:xfrm>
           <a:prstGeom prst="rect">
             <a:avLst/>
@@ -18532,14 +18046,14 @@
       </p:sp>
       <p:sp>
         <p:nvSpPr>
-          <p:cNvPr id="15" name="Shape 10"/>
-          <p:cNvSpPr/>
-          <p:nvPr/>
-        </p:nvSpPr>
-        <p:spPr>
-          <a:xfrm>
-            <a:off x="914400" y="4507992"/>
-            <a:ext cx="73152" cy="1024128"/>
+          <p:cNvPr id="11" name="Shape 9"/>
+          <p:cNvSpPr/>
+          <p:nvPr/>
+        </p:nvSpPr>
+        <p:spPr>
+          <a:xfrm>
+            <a:off x="7863840" y="1938528"/>
+            <a:ext cx="73152" cy="2514600"/>
           </a:xfrm>
           <a:prstGeom prst="rect">
             <a:avLst/>
@@ -18559,7 +18073,7 @@
       </p:sp>
       <p:sp>
         <p:nvSpPr>
-          <p:cNvPr id="16" name="mdpr:1-2-32ac08:title:__title:1-2-32ac08"/>
+          <p:cNvPr id="12" name="mdpr:1-2-32ac08:title:__title:1-2-32ac08"/>
           <p:cNvSpPr txBox="1"/>
           <p:nvPr/>
         </p:nvSpPr>
@@ -18601,14 +18115,14 @@
       </p:sp>
       <p:sp>
         <p:nvSpPr>
-          <p:cNvPr id="17" name="mdpr:1-2-32ac08:item-1:block-6-chunk-1"/>
+          <p:cNvPr id="13" name="mdpr:1-2-32ac08:item-1:block-6-chunk-1"/>
           <p:cNvSpPr txBox="1"/>
           <p:nvPr/>
         </p:nvSpPr>
         <p:spPr>
           <a:xfrm>
-            <a:off x="1133856" y="1957548"/>
-            <a:ext cx="9820656" cy="839785"/>
+            <a:off x="1042416" y="2103120"/>
+            <a:ext cx="2825496" cy="2185416"/>
           </a:xfrm>
           <a:prstGeom prst="rect">
             <a:avLst/>
@@ -18660,14 +18174,14 @@
       </p:sp>
       <p:sp>
         <p:nvSpPr>
-          <p:cNvPr id="18" name="mdpr:1-2-32ac08:item-2:block-6-chunk-1"/>
+          <p:cNvPr id="14" name="mdpr:1-2-32ac08:item-2:block-6-chunk-1"/>
           <p:cNvSpPr txBox="1"/>
           <p:nvPr/>
         </p:nvSpPr>
         <p:spPr>
           <a:xfrm>
-            <a:off x="1133856" y="3283428"/>
-            <a:ext cx="9820656" cy="839785"/>
+            <a:off x="4562856" y="2103120"/>
+            <a:ext cx="2825496" cy="2185416"/>
           </a:xfrm>
           <a:prstGeom prst="rect">
             <a:avLst/>
@@ -18719,14 +18233,14 @@
       </p:sp>
       <p:sp>
         <p:nvSpPr>
-          <p:cNvPr id="19" name="mdpr:1-2-32ac08:item-3:block-6-chunk-1"/>
+          <p:cNvPr id="15" name="mdpr:1-2-32ac08:item-3:block-6-chunk-1"/>
           <p:cNvSpPr txBox="1"/>
           <p:nvPr/>
         </p:nvSpPr>
         <p:spPr>
           <a:xfrm>
-            <a:off x="1133856" y="4600164"/>
-            <a:ext cx="9820656" cy="839785"/>
+            <a:off x="8083296" y="2103120"/>
+            <a:ext cx="2825496" cy="2185416"/>
           </a:xfrm>
           <a:prstGeom prst="rect">
             <a:avLst/>
@@ -18985,61 +18499,7 @@
       </p:sp>
       <p:sp>
         <p:nvSpPr>
-          <p:cNvPr id="9" name="Shape 7"/>
-          <p:cNvSpPr/>
-          <p:nvPr/>
-        </p:nvSpPr>
-        <p:spPr>
-          <a:xfrm>
-            <a:off x="822960" y="1554480"/>
-            <a:ext cx="4937760" cy="73152"/>
-          </a:xfrm>
-          <a:prstGeom prst="rect">
-            <a:avLst/>
-          </a:prstGeom>
-          <a:solidFill>
-            <a:srgbClr val="111827"/>
-          </a:solidFill>
-          <a:ln w="12700">
-            <a:solidFill>
-              <a:srgbClr val="111827">
-                <a:alpha val="0"/>
-              </a:srgbClr>
-            </a:solidFill>
-            <a:prstDash val="solid"/>
-          </a:ln>
-        </p:spPr>
-      </p:sp>
-      <p:sp>
-        <p:nvSpPr>
-          <p:cNvPr id="10" name="Shape 8"/>
-          <p:cNvSpPr/>
-          <p:nvPr/>
-        </p:nvSpPr>
-        <p:spPr>
-          <a:xfrm>
-            <a:off x="6400800" y="1554480"/>
-            <a:ext cx="4937760" cy="73152"/>
-          </a:xfrm>
-          <a:prstGeom prst="rect">
-            <a:avLst/>
-          </a:prstGeom>
-          <a:solidFill>
-            <a:srgbClr val="111827"/>
-          </a:solidFill>
-          <a:ln w="12700">
-            <a:solidFill>
-              <a:srgbClr val="111827">
-                <a:alpha val="0"/>
-              </a:srgbClr>
-            </a:solidFill>
-            <a:prstDash val="solid"/>
-          </a:ln>
-        </p:spPr>
-      </p:sp>
-      <p:sp>
-        <p:nvSpPr>
-          <p:cNvPr id="11" name="mdpr:2-2-14f8eb:title:__title:2-2-14f8eb"/>
+          <p:cNvPr id="9" name="mdpr:2-2-14f8eb:title:__title:2-2-14f8eb"/>
           <p:cNvSpPr txBox="1"/>
           <p:nvPr/>
         </p:nvSpPr>
@@ -19073,7 +18533,24 @@
                 <a:ea typeface="Pretendard" pitchFamily="34" charset="-122"/>
                 <a:cs typeface="Pretendard" pitchFamily="34" charset="-120"/>
               </a:rPr>
-              <a:t>Composition Contract (Cont. 2/2)</a:t>
+              <a:t>Composition Contract</a:t>
+            </a:r>
+            <a:pPr algn="ctr" indent="0" marL="0">
+              <a:lnSpc>
+                <a:spcPct val="120000"/>
+              </a:lnSpc>
+              <a:buNone/>
+            </a:pPr>
+            <a:r>
+              <a:rPr lang="en-US" sz="2000" dirty="0">
+                <a:solidFill>
+                  <a:srgbClr val="949494"/>
+                </a:solidFill>
+                <a:latin typeface="Pretendard" pitchFamily="34" charset="0"/>
+                <a:ea typeface="Pretendard" pitchFamily="34" charset="-122"/>
+                <a:cs typeface="Pretendard" pitchFamily="34" charset="-120"/>
+              </a:rPr>
+              <a:t> (Cont. 2/2)</a:t>
             </a:r>
             <a:endParaRPr lang="en-US" sz="3400" dirty="0"/>
           </a:p>
@@ -19081,14 +18558,14 @@
       </p:sp>
       <p:sp>
         <p:nvSpPr>
-          <p:cNvPr id="12" name="mdpr:2-2-14f8eb:left:block-6-chunk-2"/>
+          <p:cNvPr id="10" name="mdpr:2-2-14f8eb:left:block-6-chunk-2"/>
           <p:cNvSpPr txBox="1"/>
           <p:nvPr/>
         </p:nvSpPr>
         <p:spPr>
           <a:xfrm>
-            <a:off x="896112" y="1664208"/>
-            <a:ext cx="4791456" cy="4169664"/>
+            <a:off x="896112" y="1463040"/>
+            <a:ext cx="4791456" cy="4261104"/>
           </a:xfrm>
           <a:prstGeom prst="rect">
             <a:avLst/>
@@ -19140,14 +18617,14 @@
       </p:sp>
       <p:sp>
         <p:nvSpPr>
-          <p:cNvPr id="13" name="mdpr:2-2-14f8eb:right:block-6-chunk-2"/>
+          <p:cNvPr id="11" name="mdpr:2-2-14f8eb:right:block-6-chunk-2"/>
           <p:cNvSpPr txBox="1"/>
           <p:nvPr/>
         </p:nvSpPr>
         <p:spPr>
           <a:xfrm>
-            <a:off x="6473952" y="1664208"/>
-            <a:ext cx="4791456" cy="4169664"/>
+            <a:off x="6473952" y="1463040"/>
+            <a:ext cx="4791456" cy="4261104"/>
           </a:xfrm>
           <a:prstGeom prst="rect">
             <a:avLst/>
@@ -19404,135 +18881,16 @@
           </a:ln>
         </p:spPr>
       </p:sp>
-      <p:pic>
-        <p:nvPicPr>
-          <p:cNvPr id="9" name="Image 0" descr="preencoded.png">    </p:cNvPr>
-          <p:cNvPicPr>
-            <a:picLocks noChangeAspect="1"/>
-          </p:cNvPicPr>
-          <p:nvPr/>
-        </p:nvPicPr>
-        <p:blipFill>
-          <a:blip r:embed="rId1">
-            <a:extLst>
-              <a:ext uri="{96DAC541-7B7A-43D3-8B79-37D633B846F1}">
-                <asvg:svgBlip xmlns:asvg="http://schemas.microsoft.com/office/drawing/2016/SVG/main" r:embed="rId2"/>
-              </a:ext>
-            </a:extLst>
-          </a:blip>
-          <a:stretch>
-            <a:fillRect/>
-          </a:stretch>
-        </p:blipFill>
-        <p:spPr>
-          <a:xfrm>
-            <a:off x="914400" y="1865376"/>
-            <a:ext cx="10241280" cy="1024128"/>
-          </a:xfrm>
-          <a:prstGeom prst="rect">
-            <a:avLst/>
-          </a:prstGeom>
-        </p:spPr>
-      </p:pic>
-      <p:pic>
-        <p:nvPicPr>
-          <p:cNvPr id="10" name="Image 1" descr="preencoded.png">    </p:cNvPr>
-          <p:cNvPicPr>
-            <a:picLocks noChangeAspect="1"/>
-          </p:cNvPicPr>
-          <p:nvPr/>
-        </p:nvPicPr>
-        <p:blipFill>
-          <a:blip r:embed="rId3">
-            <a:extLst>
-              <a:ext uri="{96DAC541-7B7A-43D3-8B79-37D633B846F1}">
-                <asvg:svgBlip xmlns:asvg="http://schemas.microsoft.com/office/drawing/2016/SVG/main" r:embed="rId4"/>
-              </a:ext>
-            </a:extLst>
-          </a:blip>
-          <a:stretch>
-            <a:fillRect/>
-          </a:stretch>
-        </p:blipFill>
-        <p:spPr>
-          <a:xfrm>
-            <a:off x="914400" y="3191256"/>
-            <a:ext cx="10241280" cy="1024128"/>
-          </a:xfrm>
-          <a:prstGeom prst="rect">
-            <a:avLst/>
-          </a:prstGeom>
-        </p:spPr>
-      </p:pic>
-      <p:pic>
-        <p:nvPicPr>
-          <p:cNvPr id="11" name="Image 2" descr="preencoded.png">    </p:cNvPr>
-          <p:cNvPicPr>
-            <a:picLocks noChangeAspect="1"/>
-          </p:cNvPicPr>
-          <p:nvPr/>
-        </p:nvPicPr>
-        <p:blipFill>
-          <a:blip r:embed="rId5">
-            <a:extLst>
-              <a:ext uri="{96DAC541-7B7A-43D3-8B79-37D633B846F1}">
-                <asvg:svgBlip xmlns:asvg="http://schemas.microsoft.com/office/drawing/2016/SVG/main" r:embed="rId6"/>
-              </a:ext>
-            </a:extLst>
-          </a:blip>
-          <a:stretch>
-            <a:fillRect/>
-          </a:stretch>
-        </p:blipFill>
-        <p:spPr>
-          <a:xfrm>
-            <a:off x="914400" y="4507992"/>
-            <a:ext cx="10241280" cy="1024128"/>
-          </a:xfrm>
-          <a:prstGeom prst="rect">
-            <a:avLst/>
-          </a:prstGeom>
-        </p:spPr>
-      </p:pic>
-      <p:sp>
-        <p:nvSpPr>
-          <p:cNvPr id="12" name="Shape 7"/>
-          <p:cNvSpPr/>
-          <p:nvPr/>
-        </p:nvSpPr>
-        <p:spPr>
-          <a:xfrm>
-            <a:off x="786384" y="1956816"/>
-            <a:ext cx="32004" cy="3483864"/>
-          </a:xfrm>
-          <a:prstGeom prst="rect">
-            <a:avLst/>
-          </a:prstGeom>
-          <a:solidFill>
-            <a:srgbClr val="E5E7EB">
-              <a:alpha val="80000"/>
-            </a:srgbClr>
-          </a:solidFill>
-          <a:ln w="12700">
-            <a:solidFill>
-              <a:srgbClr val="E5E7EB">
-                <a:alpha val="0"/>
-              </a:srgbClr>
-            </a:solidFill>
-            <a:prstDash val="solid"/>
-          </a:ln>
-        </p:spPr>
-      </p:sp>
-      <p:sp>
-        <p:nvSpPr>
-          <p:cNvPr id="13" name="Shape 8"/>
-          <p:cNvSpPr/>
-          <p:nvPr/>
-        </p:nvSpPr>
-        <p:spPr>
-          <a:xfrm>
-            <a:off x="914400" y="1865376"/>
-            <a:ext cx="73152" cy="1024128"/>
+      <p:sp>
+        <p:nvSpPr>
+          <p:cNvPr id="9" name="Shape 7"/>
+          <p:cNvSpPr/>
+          <p:nvPr/>
+        </p:nvSpPr>
+        <p:spPr>
+          <a:xfrm>
+            <a:off x="822960" y="1938528"/>
+            <a:ext cx="73152" cy="2514600"/>
           </a:xfrm>
           <a:prstGeom prst="rect">
             <a:avLst/>
@@ -19552,14 +18910,14 @@
       </p:sp>
       <p:sp>
         <p:nvSpPr>
-          <p:cNvPr id="14" name="Shape 9"/>
-          <p:cNvSpPr/>
-          <p:nvPr/>
-        </p:nvSpPr>
-        <p:spPr>
-          <a:xfrm>
-            <a:off x="914400" y="3191256"/>
-            <a:ext cx="73152" cy="1024128"/>
+          <p:cNvPr id="10" name="Shape 8"/>
+          <p:cNvSpPr/>
+          <p:nvPr/>
+        </p:nvSpPr>
+        <p:spPr>
+          <a:xfrm>
+            <a:off x="4343400" y="1938528"/>
+            <a:ext cx="73152" cy="2514600"/>
           </a:xfrm>
           <a:prstGeom prst="rect">
             <a:avLst/>
@@ -19579,14 +18937,14 @@
       </p:sp>
       <p:sp>
         <p:nvSpPr>
-          <p:cNvPr id="15" name="Shape 10"/>
-          <p:cNvSpPr/>
-          <p:nvPr/>
-        </p:nvSpPr>
-        <p:spPr>
-          <a:xfrm>
-            <a:off x="914400" y="4507992"/>
-            <a:ext cx="73152" cy="1024128"/>
+          <p:cNvPr id="11" name="Shape 9"/>
+          <p:cNvSpPr/>
+          <p:nvPr/>
+        </p:nvSpPr>
+        <p:spPr>
+          <a:xfrm>
+            <a:off x="7863840" y="1938528"/>
+            <a:ext cx="73152" cy="2514600"/>
           </a:xfrm>
           <a:prstGeom prst="rect">
             <a:avLst/>
@@ -19606,7 +18964,7 @@
       </p:sp>
       <p:sp>
         <p:nvSpPr>
-          <p:cNvPr id="16" name="mdpr:1-2-dfa474:title:__title:1-2-dfa474"/>
+          <p:cNvPr id="12" name="mdpr:1-2-dfa474:title:__title:1-2-dfa474"/>
           <p:cNvSpPr txBox="1"/>
           <p:nvPr/>
         </p:nvSpPr>
@@ -19648,14 +19006,14 @@
       </p:sp>
       <p:sp>
         <p:nvSpPr>
-          <p:cNvPr id="17" name="mdpr:1-2-dfa474:item-1:block-8-chunk-1"/>
+          <p:cNvPr id="13" name="mdpr:1-2-dfa474:item-1:block-8-chunk-1"/>
           <p:cNvSpPr txBox="1"/>
           <p:nvPr/>
         </p:nvSpPr>
         <p:spPr>
           <a:xfrm>
-            <a:off x="1133856" y="1957548"/>
-            <a:ext cx="9820656" cy="839785"/>
+            <a:off x="1042416" y="2103120"/>
+            <a:ext cx="2825496" cy="2185416"/>
           </a:xfrm>
           <a:prstGeom prst="rect">
             <a:avLst/>
@@ -19707,14 +19065,14 @@
       </p:sp>
       <p:sp>
         <p:nvSpPr>
-          <p:cNvPr id="18" name="mdpr:1-2-dfa474:item-2:block-8-chunk-1"/>
+          <p:cNvPr id="14" name="mdpr:1-2-dfa474:item-2:block-8-chunk-1"/>
           <p:cNvSpPr txBox="1"/>
           <p:nvPr/>
         </p:nvSpPr>
         <p:spPr>
           <a:xfrm>
-            <a:off x="1133856" y="3283428"/>
-            <a:ext cx="9820656" cy="839785"/>
+            <a:off x="4562856" y="2103120"/>
+            <a:ext cx="2825496" cy="2185416"/>
           </a:xfrm>
           <a:prstGeom prst="rect">
             <a:avLst/>
@@ -19766,14 +19124,14 @@
       </p:sp>
       <p:sp>
         <p:nvSpPr>
-          <p:cNvPr id="19" name="mdpr:1-2-dfa474:item-3:block-8-chunk-1"/>
+          <p:cNvPr id="15" name="mdpr:1-2-dfa474:item-3:block-8-chunk-1"/>
           <p:cNvSpPr txBox="1"/>
           <p:nvPr/>
         </p:nvSpPr>
         <p:spPr>
           <a:xfrm>
-            <a:off x="1133856" y="4600164"/>
-            <a:ext cx="9820656" cy="839785"/>
+            <a:off x="8083296" y="2103120"/>
+            <a:ext cx="2825496" cy="2185416"/>
           </a:xfrm>
           <a:prstGeom prst="rect">
             <a:avLst/>
@@ -20032,61 +19390,7 @@
       </p:sp>
       <p:sp>
         <p:nvSpPr>
-          <p:cNvPr id="9" name="Shape 7"/>
-          <p:cNvSpPr/>
-          <p:nvPr/>
-        </p:nvSpPr>
-        <p:spPr>
-          <a:xfrm>
-            <a:off x="822960" y="1554480"/>
-            <a:ext cx="4937760" cy="73152"/>
-          </a:xfrm>
-          <a:prstGeom prst="rect">
-            <a:avLst/>
-          </a:prstGeom>
-          <a:solidFill>
-            <a:srgbClr val="111827"/>
-          </a:solidFill>
-          <a:ln w="12700">
-            <a:solidFill>
-              <a:srgbClr val="111827">
-                <a:alpha val="0"/>
-              </a:srgbClr>
-            </a:solidFill>
-            <a:prstDash val="solid"/>
-          </a:ln>
-        </p:spPr>
-      </p:sp>
-      <p:sp>
-        <p:nvSpPr>
-          <p:cNvPr id="10" name="Shape 8"/>
-          <p:cNvSpPr/>
-          <p:nvPr/>
-        </p:nvSpPr>
-        <p:spPr>
-          <a:xfrm>
-            <a:off x="6400800" y="1554480"/>
-            <a:ext cx="4937760" cy="73152"/>
-          </a:xfrm>
-          <a:prstGeom prst="rect">
-            <a:avLst/>
-          </a:prstGeom>
-          <a:solidFill>
-            <a:srgbClr val="111827"/>
-          </a:solidFill>
-          <a:ln w="12700">
-            <a:solidFill>
-              <a:srgbClr val="111827">
-                <a:alpha val="0"/>
-              </a:srgbClr>
-            </a:solidFill>
-            <a:prstDash val="solid"/>
-          </a:ln>
-        </p:spPr>
-      </p:sp>
-      <p:sp>
-        <p:nvSpPr>
-          <p:cNvPr id="11" name="mdpr:2-2-149bde:title:__title:2-2-149bde"/>
+          <p:cNvPr id="9" name="mdpr:2-2-149bde:title:__title:2-2-149bde"/>
           <p:cNvSpPr txBox="1"/>
           <p:nvPr/>
         </p:nvSpPr>
@@ -20120,7 +19424,24 @@
                 <a:ea typeface="Pretendard" pitchFamily="34" charset="-122"/>
                 <a:cs typeface="Pretendard" pitchFamily="34" charset="-120"/>
               </a:rPr>
-              <a:t>Pruned Style Families (Cont. 2/2)</a:t>
+              <a:t>Pruned Style Families</a:t>
+            </a:r>
+            <a:pPr algn="ctr" indent="0" marL="0">
+              <a:lnSpc>
+                <a:spcPct val="120000"/>
+              </a:lnSpc>
+              <a:buNone/>
+            </a:pPr>
+            <a:r>
+              <a:rPr lang="en-US" sz="2000" dirty="0">
+                <a:solidFill>
+                  <a:srgbClr val="949494"/>
+                </a:solidFill>
+                <a:latin typeface="Pretendard" pitchFamily="34" charset="0"/>
+                <a:ea typeface="Pretendard" pitchFamily="34" charset="-122"/>
+                <a:cs typeface="Pretendard" pitchFamily="34" charset="-120"/>
+              </a:rPr>
+              <a:t> (Cont. 2/2)</a:t>
             </a:r>
             <a:endParaRPr lang="en-US" sz="3400" dirty="0"/>
           </a:p>
@@ -20128,14 +19449,14 @@
       </p:sp>
       <p:sp>
         <p:nvSpPr>
-          <p:cNvPr id="12" name="mdpr:2-2-149bde:left:block-8-chunk-2"/>
+          <p:cNvPr id="10" name="mdpr:2-2-149bde:left:block-8-chunk-2"/>
           <p:cNvSpPr txBox="1"/>
           <p:nvPr/>
         </p:nvSpPr>
         <p:spPr>
           <a:xfrm>
-            <a:off x="896112" y="1664208"/>
-            <a:ext cx="4791456" cy="4169664"/>
+            <a:off x="896112" y="1463040"/>
+            <a:ext cx="4791456" cy="4261104"/>
           </a:xfrm>
           <a:prstGeom prst="rect">
             <a:avLst/>
@@ -20187,14 +19508,14 @@
       </p:sp>
       <p:sp>
         <p:nvSpPr>
-          <p:cNvPr id="13" name="mdpr:2-2-149bde:right:block-8-chunk-2"/>
+          <p:cNvPr id="11" name="mdpr:2-2-149bde:right:block-8-chunk-2"/>
           <p:cNvSpPr txBox="1"/>
           <p:nvPr/>
         </p:nvSpPr>
         <p:spPr>
           <a:xfrm>
-            <a:off x="6473952" y="1664208"/>
-            <a:ext cx="4791456" cy="4169664"/>
+            <a:off x="6473952" y="1463040"/>
+            <a:ext cx="4791456" cy="4261104"/>
           </a:xfrm>
           <a:prstGeom prst="rect">
             <a:avLst/>
@@ -20451,16 +19772,76 @@
           </a:ln>
         </p:spPr>
       </p:sp>
-      <p:sp>
-        <p:nvSpPr>
-          <p:cNvPr id="9" name="Shape 7"/>
-          <p:cNvSpPr/>
-          <p:nvPr/>
-        </p:nvSpPr>
-        <p:spPr>
-          <a:xfrm>
-            <a:off x="822960" y="1554480"/>
-            <a:ext cx="4937760" cy="73152"/>
+      <p:pic>
+        <p:nvPicPr>
+          <p:cNvPr id="9" name="Image 0" descr="preencoded.png">    </p:cNvPr>
+          <p:cNvPicPr>
+            <a:picLocks noChangeAspect="1"/>
+          </p:cNvPicPr>
+          <p:nvPr/>
+        </p:nvPicPr>
+        <p:blipFill>
+          <a:blip r:embed="rId1">
+            <a:extLst>
+              <a:ext uri="{96DAC541-7B7A-43D3-8B79-37D633B846F1}">
+                <asvg:svgBlip xmlns:asvg="http://schemas.microsoft.com/office/drawing/2016/SVG/main" r:embed="rId2"/>
+              </a:ext>
+            </a:extLst>
+          </a:blip>
+          <a:stretch>
+            <a:fillRect/>
+          </a:stretch>
+        </p:blipFill>
+        <p:spPr>
+          <a:xfrm>
+            <a:off x="914400" y="2523744"/>
+            <a:ext cx="10241280" cy="1024128"/>
+          </a:xfrm>
+          <a:prstGeom prst="rect">
+            <a:avLst/>
+          </a:prstGeom>
+        </p:spPr>
+      </p:pic>
+      <p:pic>
+        <p:nvPicPr>
+          <p:cNvPr id="10" name="Image 1" descr="preencoded.png">    </p:cNvPr>
+          <p:cNvPicPr>
+            <a:picLocks noChangeAspect="1"/>
+          </p:cNvPicPr>
+          <p:nvPr/>
+        </p:nvPicPr>
+        <p:blipFill>
+          <a:blip r:embed="rId3">
+            <a:extLst>
+              <a:ext uri="{96DAC541-7B7A-43D3-8B79-37D633B846F1}">
+                <asvg:svgBlip xmlns:asvg="http://schemas.microsoft.com/office/drawing/2016/SVG/main" r:embed="rId4"/>
+              </a:ext>
+            </a:extLst>
+          </a:blip>
+          <a:stretch>
+            <a:fillRect/>
+          </a:stretch>
+        </p:blipFill>
+        <p:spPr>
+          <a:xfrm>
+            <a:off x="914400" y="3849624"/>
+            <a:ext cx="10241280" cy="1024128"/>
+          </a:xfrm>
+          <a:prstGeom prst="rect">
+            <a:avLst/>
+          </a:prstGeom>
+        </p:spPr>
+      </p:pic>
+      <p:sp>
+        <p:nvSpPr>
+          <p:cNvPr id="11" name="Shape 7"/>
+          <p:cNvSpPr/>
+          <p:nvPr/>
+        </p:nvSpPr>
+        <p:spPr>
+          <a:xfrm>
+            <a:off x="914400" y="2523744"/>
+            <a:ext cx="73152" cy="1024128"/>
           </a:xfrm>
           <a:prstGeom prst="rect">
             <a:avLst/>
@@ -20480,24 +19861,24 @@
       </p:sp>
       <p:sp>
         <p:nvSpPr>
-          <p:cNvPr id="10" name="Shape 8"/>
-          <p:cNvSpPr/>
-          <p:nvPr/>
-        </p:nvSpPr>
-        <p:spPr>
-          <a:xfrm>
-            <a:off x="6400800" y="1554480"/>
-            <a:ext cx="4937760" cy="73152"/>
+          <p:cNvPr id="12" name="Shape 8"/>
+          <p:cNvSpPr/>
+          <p:nvPr/>
+        </p:nvSpPr>
+        <p:spPr>
+          <a:xfrm>
+            <a:off x="914400" y="3849624"/>
+            <a:ext cx="73152" cy="1024128"/>
           </a:xfrm>
           <a:prstGeom prst="rect">
             <a:avLst/>
           </a:prstGeom>
           <a:solidFill>
-            <a:srgbClr val="111827"/>
+            <a:srgbClr val="E5E7EB"/>
           </a:solidFill>
           <a:ln w="12700">
             <a:solidFill>
-              <a:srgbClr val="111827">
+              <a:srgbClr val="E5E7EB">
                 <a:alpha val="0"/>
               </a:srgbClr>
             </a:solidFill>
@@ -20507,7 +19888,7 @@
       </p:sp>
       <p:sp>
         <p:nvSpPr>
-          <p:cNvPr id="11" name="mdpr:1-2-5a84f1:title:__title:1-2-5a84f1"/>
+          <p:cNvPr id="13" name="mdpr:1-2-5a84f1:title:__title:1-2-5a84f1"/>
           <p:cNvSpPr txBox="1"/>
           <p:nvPr/>
         </p:nvSpPr>
@@ -20549,14 +19930,14 @@
       </p:sp>
       <p:sp>
         <p:nvSpPr>
-          <p:cNvPr id="12" name="mdpr:1-2-5a84f1:left:block-10-chunk-1"/>
+          <p:cNvPr id="14" name="mdpr:1-2-5a84f1:item-1:block-10-chunk-1"/>
           <p:cNvSpPr txBox="1"/>
           <p:nvPr/>
         </p:nvSpPr>
         <p:spPr>
           <a:xfrm>
-            <a:off x="896112" y="1664208"/>
-            <a:ext cx="4791456" cy="4169664"/>
+            <a:off x="1133856" y="2615916"/>
+            <a:ext cx="9820656" cy="839785"/>
           </a:xfrm>
           <a:prstGeom prst="rect">
             <a:avLst/>
@@ -20565,7 +19946,7 @@
           <a:ln/>
         </p:spPr>
         <p:txBody>
-          <a:bodyPr wrap="square" lIns="0" tIns="25400" rIns="25400" bIns="0" rtlCol="0" anchor="t"/>
+          <a:bodyPr wrap="square" lIns="0" tIns="25400" rIns="25400" bIns="0" rtlCol="0" anchor="ctr"/>
           <a:lstStyle/>
           <a:p>
             <a:pPr algn="l" indent="0" marL="0">
@@ -20583,7 +19964,7 @@
                 <a:ea typeface="Pretendard" pitchFamily="34" charset="-122"/>
                 <a:cs typeface="Pretendard" pitchFamily="34" charset="-120"/>
               </a:rPr>
-              <a:t>- Headings</a:t>
+              <a:t>Headings</a:t>
             </a:r>
             <a:pPr algn="l" indent="0" marL="0">
               <a:lnSpc>
@@ -20608,14 +19989,14 @@
       </p:sp>
       <p:sp>
         <p:nvSpPr>
-          <p:cNvPr id="13" name="mdpr:1-2-5a84f1:right:block-10-chunk-1"/>
+          <p:cNvPr id="15" name="mdpr:1-2-5a84f1:item-2:block-10-chunk-1"/>
           <p:cNvSpPr txBox="1"/>
           <p:nvPr/>
         </p:nvSpPr>
         <p:spPr>
           <a:xfrm>
-            <a:off x="6473952" y="1664208"/>
-            <a:ext cx="4791456" cy="4169664"/>
+            <a:off x="1133856" y="3941796"/>
+            <a:ext cx="9820656" cy="839785"/>
           </a:xfrm>
           <a:prstGeom prst="rect">
             <a:avLst/>
@@ -20624,7 +20005,7 @@
           <a:ln/>
         </p:spPr>
         <p:txBody>
-          <a:bodyPr wrap="square" lIns="0" tIns="25400" rIns="25400" bIns="0" rtlCol="0" anchor="t"/>
+          <a:bodyPr wrap="square" lIns="0" tIns="25400" rIns="25400" bIns="0" rtlCol="0" anchor="ctr"/>
           <a:lstStyle/>
           <a:p>
             <a:pPr algn="l" indent="0" marL="0">
@@ -20642,7 +20023,7 @@
                 <a:ea typeface="Pretendard" pitchFamily="34" charset="-122"/>
                 <a:cs typeface="Pretendard" pitchFamily="34" charset="-120"/>
               </a:rPr>
-              <a:t>- Lists</a:t>
+              <a:t>Lists</a:t>
             </a:r>
             <a:pPr algn="l" indent="0" marL="0">
               <a:lnSpc>
